--- a/tools/myCustomBlockly/iMi/block.pptx
+++ b/tools/myCustomBlockly/iMi/block.pptx
@@ -7,6 +7,7 @@
   <p:sldIdLst>
     <p:sldId id="256" r:id="rId2"/>
     <p:sldId id="257" r:id="rId3"/>
+    <p:sldId id="258" r:id="rId4"/>
   </p:sldIdLst>
   <p:sldSz cx="12192000" cy="6858000"/>
   <p:notesSz cx="6858000" cy="9144000"/>
@@ -105,6 +106,11 @@
       </a:defRPr>
     </a:lvl9pPr>
   </p:defaultTextStyle>
+  <p:extLst>
+    <p:ext uri="{EFAFB233-063F-42B5-8137-9DF3F51BA10A}">
+      <p15:sldGuideLst xmlns:p15="http://schemas.microsoft.com/office/powerpoint/2012/main"/>
+    </p:ext>
+  </p:extLst>
 </p:presentation>
 </file>
 
@@ -239,7 +245,7 @@
           <a:p>
             <a:fld id="{28019EB3-9618-4DC9-9742-E69F5EF18F40}" type="datetimeFigureOut">
               <a:rPr lang="zh-TW" altLang="en-US" smtClean="0"/>
-              <a:t>2023/12/14</a:t>
+              <a:t>2023/12/16</a:t>
             </a:fld>
             <a:endParaRPr lang="zh-TW" altLang="en-US"/>
           </a:p>
@@ -409,7 +415,7 @@
           <a:p>
             <a:fld id="{28019EB3-9618-4DC9-9742-E69F5EF18F40}" type="datetimeFigureOut">
               <a:rPr lang="zh-TW" altLang="en-US" smtClean="0"/>
-              <a:t>2023/12/14</a:t>
+              <a:t>2023/12/16</a:t>
             </a:fld>
             <a:endParaRPr lang="zh-TW" altLang="en-US"/>
           </a:p>
@@ -589,7 +595,7 @@
           <a:p>
             <a:fld id="{28019EB3-9618-4DC9-9742-E69F5EF18F40}" type="datetimeFigureOut">
               <a:rPr lang="zh-TW" altLang="en-US" smtClean="0"/>
-              <a:t>2023/12/14</a:t>
+              <a:t>2023/12/16</a:t>
             </a:fld>
             <a:endParaRPr lang="zh-TW" altLang="en-US"/>
           </a:p>
@@ -759,7 +765,7 @@
           <a:p>
             <a:fld id="{28019EB3-9618-4DC9-9742-E69F5EF18F40}" type="datetimeFigureOut">
               <a:rPr lang="zh-TW" altLang="en-US" smtClean="0"/>
-              <a:t>2023/12/14</a:t>
+              <a:t>2023/12/16</a:t>
             </a:fld>
             <a:endParaRPr lang="zh-TW" altLang="en-US"/>
           </a:p>
@@ -1005,7 +1011,7 @@
           <a:p>
             <a:fld id="{28019EB3-9618-4DC9-9742-E69F5EF18F40}" type="datetimeFigureOut">
               <a:rPr lang="zh-TW" altLang="en-US" smtClean="0"/>
-              <a:t>2023/12/14</a:t>
+              <a:t>2023/12/16</a:t>
             </a:fld>
             <a:endParaRPr lang="zh-TW" altLang="en-US"/>
           </a:p>
@@ -1237,7 +1243,7 @@
           <a:p>
             <a:fld id="{28019EB3-9618-4DC9-9742-E69F5EF18F40}" type="datetimeFigureOut">
               <a:rPr lang="zh-TW" altLang="en-US" smtClean="0"/>
-              <a:t>2023/12/14</a:t>
+              <a:t>2023/12/16</a:t>
             </a:fld>
             <a:endParaRPr lang="zh-TW" altLang="en-US"/>
           </a:p>
@@ -1604,7 +1610,7 @@
           <a:p>
             <a:fld id="{28019EB3-9618-4DC9-9742-E69F5EF18F40}" type="datetimeFigureOut">
               <a:rPr lang="zh-TW" altLang="en-US" smtClean="0"/>
-              <a:t>2023/12/14</a:t>
+              <a:t>2023/12/16</a:t>
             </a:fld>
             <a:endParaRPr lang="zh-TW" altLang="en-US"/>
           </a:p>
@@ -1722,7 +1728,7 @@
           <a:p>
             <a:fld id="{28019EB3-9618-4DC9-9742-E69F5EF18F40}" type="datetimeFigureOut">
               <a:rPr lang="zh-TW" altLang="en-US" smtClean="0"/>
-              <a:t>2023/12/14</a:t>
+              <a:t>2023/12/16</a:t>
             </a:fld>
             <a:endParaRPr lang="zh-TW" altLang="en-US"/>
           </a:p>
@@ -1817,7 +1823,7 @@
           <a:p>
             <a:fld id="{28019EB3-9618-4DC9-9742-E69F5EF18F40}" type="datetimeFigureOut">
               <a:rPr lang="zh-TW" altLang="en-US" smtClean="0"/>
-              <a:t>2023/12/14</a:t>
+              <a:t>2023/12/16</a:t>
             </a:fld>
             <a:endParaRPr lang="zh-TW" altLang="en-US"/>
           </a:p>
@@ -2094,7 +2100,7 @@
           <a:p>
             <a:fld id="{28019EB3-9618-4DC9-9742-E69F5EF18F40}" type="datetimeFigureOut">
               <a:rPr lang="zh-TW" altLang="en-US" smtClean="0"/>
-              <a:t>2023/12/14</a:t>
+              <a:t>2023/12/16</a:t>
             </a:fld>
             <a:endParaRPr lang="zh-TW" altLang="en-US"/>
           </a:p>
@@ -2347,7 +2353,7 @@
           <a:p>
             <a:fld id="{28019EB3-9618-4DC9-9742-E69F5EF18F40}" type="datetimeFigureOut">
               <a:rPr lang="zh-TW" altLang="en-US" smtClean="0"/>
-              <a:t>2023/12/14</a:t>
+              <a:t>2023/12/16</a:t>
             </a:fld>
             <a:endParaRPr lang="zh-TW" altLang="en-US"/>
           </a:p>
@@ -2560,7 +2566,7 @@
           <a:p>
             <a:fld id="{28019EB3-9618-4DC9-9742-E69F5EF18F40}" type="datetimeFigureOut">
               <a:rPr lang="zh-TW" altLang="en-US" smtClean="0"/>
-              <a:t>2023/12/14</a:t>
+              <a:t>2023/12/16</a:t>
             </a:fld>
             <a:endParaRPr lang="zh-TW" altLang="en-US"/>
           </a:p>
@@ -3019,6 +3025,17 @@
 <file path=ppt/slides/slide2.xml><?xml version="1.0" encoding="utf-8"?>
 <p:sld xmlns:a="http://schemas.openxmlformats.org/drawingml/2006/main" xmlns:r="http://schemas.openxmlformats.org/officeDocument/2006/relationships" xmlns:p="http://schemas.openxmlformats.org/presentationml/2006/main">
   <p:cSld>
+    <p:bg>
+      <p:bgPr>
+        <a:solidFill>
+          <a:schemeClr val="tx1">
+            <a:lumMod val="85000"/>
+            <a:lumOff val="15000"/>
+          </a:schemeClr>
+        </a:solidFill>
+        <a:effectLst/>
+      </p:bgPr>
+    </p:bg>
     <p:spTree>
       <p:nvGrpSpPr>
         <p:cNvPr id="1" name=""/>
@@ -5608,390 +5625,449 @@
           </a:p>
         </p:txBody>
       </p:sp>
+      <p:sp>
+        <p:nvSpPr>
+          <p:cNvPr id="54" name="圓角矩形 48"/>
+          <p:cNvSpPr/>
+          <p:nvPr/>
+        </p:nvSpPr>
+        <p:spPr>
+          <a:xfrm>
+            <a:off x="1122279" y="4744362"/>
+            <a:ext cx="954109" cy="263525"/>
+          </a:xfrm>
+          <a:custGeom>
+            <a:avLst/>
+            <a:gdLst>
+              <a:gd name="connsiteX0" fmla="*/ 0 w 4506685"/>
+              <a:gd name="connsiteY0" fmla="*/ 62594 h 375557"/>
+              <a:gd name="connsiteX1" fmla="*/ 62594 w 4506685"/>
+              <a:gd name="connsiteY1" fmla="*/ 0 h 375557"/>
+              <a:gd name="connsiteX2" fmla="*/ 4444091 w 4506685"/>
+              <a:gd name="connsiteY2" fmla="*/ 0 h 375557"/>
+              <a:gd name="connsiteX3" fmla="*/ 4506685 w 4506685"/>
+              <a:gd name="connsiteY3" fmla="*/ 62594 h 375557"/>
+              <a:gd name="connsiteX4" fmla="*/ 4506685 w 4506685"/>
+              <a:gd name="connsiteY4" fmla="*/ 312963 h 375557"/>
+              <a:gd name="connsiteX5" fmla="*/ 4444091 w 4506685"/>
+              <a:gd name="connsiteY5" fmla="*/ 375557 h 375557"/>
+              <a:gd name="connsiteX6" fmla="*/ 62594 w 4506685"/>
+              <a:gd name="connsiteY6" fmla="*/ 375557 h 375557"/>
+              <a:gd name="connsiteX7" fmla="*/ 0 w 4506685"/>
+              <a:gd name="connsiteY7" fmla="*/ 312963 h 375557"/>
+              <a:gd name="connsiteX8" fmla="*/ 0 w 4506685"/>
+              <a:gd name="connsiteY8" fmla="*/ 62594 h 375557"/>
+              <a:gd name="connsiteX0" fmla="*/ 0 w 4506685"/>
+              <a:gd name="connsiteY0" fmla="*/ 62594 h 375557"/>
+              <a:gd name="connsiteX1" fmla="*/ 62594 w 4506685"/>
+              <a:gd name="connsiteY1" fmla="*/ 0 h 375557"/>
+              <a:gd name="connsiteX2" fmla="*/ 4444091 w 4506685"/>
+              <a:gd name="connsiteY2" fmla="*/ 0 h 375557"/>
+              <a:gd name="connsiteX3" fmla="*/ 4506685 w 4506685"/>
+              <a:gd name="connsiteY3" fmla="*/ 62594 h 375557"/>
+              <a:gd name="connsiteX4" fmla="*/ 4506685 w 4506685"/>
+              <a:gd name="connsiteY4" fmla="*/ 312963 h 375557"/>
+              <a:gd name="connsiteX5" fmla="*/ 4444091 w 4506685"/>
+              <a:gd name="connsiteY5" fmla="*/ 375557 h 375557"/>
+              <a:gd name="connsiteX6" fmla="*/ 62594 w 4506685"/>
+              <a:gd name="connsiteY6" fmla="*/ 375557 h 375557"/>
+              <a:gd name="connsiteX7" fmla="*/ 0 w 4506685"/>
+              <a:gd name="connsiteY7" fmla="*/ 312963 h 375557"/>
+              <a:gd name="connsiteX8" fmla="*/ 5443 w 4506685"/>
+              <a:gd name="connsiteY8" fmla="*/ 163286 h 375557"/>
+              <a:gd name="connsiteX9" fmla="*/ 0 w 4506685"/>
+              <a:gd name="connsiteY9" fmla="*/ 62594 h 375557"/>
+              <a:gd name="connsiteX0" fmla="*/ 310249 w 4816934"/>
+              <a:gd name="connsiteY0" fmla="*/ 62594 h 375557"/>
+              <a:gd name="connsiteX1" fmla="*/ 372843 w 4816934"/>
+              <a:gd name="connsiteY1" fmla="*/ 0 h 375557"/>
+              <a:gd name="connsiteX2" fmla="*/ 4754340 w 4816934"/>
+              <a:gd name="connsiteY2" fmla="*/ 0 h 375557"/>
+              <a:gd name="connsiteX3" fmla="*/ 4816934 w 4816934"/>
+              <a:gd name="connsiteY3" fmla="*/ 62594 h 375557"/>
+              <a:gd name="connsiteX4" fmla="*/ 4816934 w 4816934"/>
+              <a:gd name="connsiteY4" fmla="*/ 312963 h 375557"/>
+              <a:gd name="connsiteX5" fmla="*/ 4754340 w 4816934"/>
+              <a:gd name="connsiteY5" fmla="*/ 375557 h 375557"/>
+              <a:gd name="connsiteX6" fmla="*/ 372843 w 4816934"/>
+              <a:gd name="connsiteY6" fmla="*/ 375557 h 375557"/>
+              <a:gd name="connsiteX7" fmla="*/ 310249 w 4816934"/>
+              <a:gd name="connsiteY7" fmla="*/ 312963 h 375557"/>
+              <a:gd name="connsiteX8" fmla="*/ 0 w 4816934"/>
+              <a:gd name="connsiteY8" fmla="*/ 146945 h 375557"/>
+              <a:gd name="connsiteX9" fmla="*/ 310249 w 4816934"/>
+              <a:gd name="connsiteY9" fmla="*/ 62594 h 375557"/>
+              <a:gd name="connsiteX0" fmla="*/ 310249 w 4816934"/>
+              <a:gd name="connsiteY0" fmla="*/ 62594 h 375557"/>
+              <a:gd name="connsiteX1" fmla="*/ 372843 w 4816934"/>
+              <a:gd name="connsiteY1" fmla="*/ 0 h 375557"/>
+              <a:gd name="connsiteX2" fmla="*/ 4754340 w 4816934"/>
+              <a:gd name="connsiteY2" fmla="*/ 0 h 375557"/>
+              <a:gd name="connsiteX3" fmla="*/ 4816934 w 4816934"/>
+              <a:gd name="connsiteY3" fmla="*/ 62594 h 375557"/>
+              <a:gd name="connsiteX4" fmla="*/ 4816934 w 4816934"/>
+              <a:gd name="connsiteY4" fmla="*/ 312963 h 375557"/>
+              <a:gd name="connsiteX5" fmla="*/ 4754340 w 4816934"/>
+              <a:gd name="connsiteY5" fmla="*/ 375557 h 375557"/>
+              <a:gd name="connsiteX6" fmla="*/ 372843 w 4816934"/>
+              <a:gd name="connsiteY6" fmla="*/ 375557 h 375557"/>
+              <a:gd name="connsiteX7" fmla="*/ 310249 w 4816934"/>
+              <a:gd name="connsiteY7" fmla="*/ 312963 h 375557"/>
+              <a:gd name="connsiteX8" fmla="*/ 190500 w 4816934"/>
+              <a:gd name="connsiteY8" fmla="*/ 261257 h 375557"/>
+              <a:gd name="connsiteX9" fmla="*/ 0 w 4816934"/>
+              <a:gd name="connsiteY9" fmla="*/ 146945 h 375557"/>
+              <a:gd name="connsiteX10" fmla="*/ 310249 w 4816934"/>
+              <a:gd name="connsiteY10" fmla="*/ 62594 h 375557"/>
+              <a:gd name="connsiteX0" fmla="*/ 321154 w 4827839"/>
+              <a:gd name="connsiteY0" fmla="*/ 62594 h 375557"/>
+              <a:gd name="connsiteX1" fmla="*/ 383748 w 4827839"/>
+              <a:gd name="connsiteY1" fmla="*/ 0 h 375557"/>
+              <a:gd name="connsiteX2" fmla="*/ 4765245 w 4827839"/>
+              <a:gd name="connsiteY2" fmla="*/ 0 h 375557"/>
+              <a:gd name="connsiteX3" fmla="*/ 4827839 w 4827839"/>
+              <a:gd name="connsiteY3" fmla="*/ 62594 h 375557"/>
+              <a:gd name="connsiteX4" fmla="*/ 4827839 w 4827839"/>
+              <a:gd name="connsiteY4" fmla="*/ 312963 h 375557"/>
+              <a:gd name="connsiteX5" fmla="*/ 4765245 w 4827839"/>
+              <a:gd name="connsiteY5" fmla="*/ 375557 h 375557"/>
+              <a:gd name="connsiteX6" fmla="*/ 383748 w 4827839"/>
+              <a:gd name="connsiteY6" fmla="*/ 375557 h 375557"/>
+              <a:gd name="connsiteX7" fmla="*/ 321154 w 4827839"/>
+              <a:gd name="connsiteY7" fmla="*/ 312963 h 375557"/>
+              <a:gd name="connsiteX8" fmla="*/ 0 w 4827839"/>
+              <a:gd name="connsiteY8" fmla="*/ 321173 h 375557"/>
+              <a:gd name="connsiteX9" fmla="*/ 10905 w 4827839"/>
+              <a:gd name="connsiteY9" fmla="*/ 146945 h 375557"/>
+              <a:gd name="connsiteX10" fmla="*/ 321154 w 4827839"/>
+              <a:gd name="connsiteY10" fmla="*/ 62594 h 375557"/>
+              <a:gd name="connsiteX0" fmla="*/ 321154 w 4827839"/>
+              <a:gd name="connsiteY0" fmla="*/ 62594 h 375557"/>
+              <a:gd name="connsiteX1" fmla="*/ 383748 w 4827839"/>
+              <a:gd name="connsiteY1" fmla="*/ 0 h 375557"/>
+              <a:gd name="connsiteX2" fmla="*/ 4765245 w 4827839"/>
+              <a:gd name="connsiteY2" fmla="*/ 0 h 375557"/>
+              <a:gd name="connsiteX3" fmla="*/ 4827839 w 4827839"/>
+              <a:gd name="connsiteY3" fmla="*/ 62594 h 375557"/>
+              <a:gd name="connsiteX4" fmla="*/ 4827839 w 4827839"/>
+              <a:gd name="connsiteY4" fmla="*/ 312963 h 375557"/>
+              <a:gd name="connsiteX5" fmla="*/ 4765245 w 4827839"/>
+              <a:gd name="connsiteY5" fmla="*/ 375557 h 375557"/>
+              <a:gd name="connsiteX6" fmla="*/ 383748 w 4827839"/>
+              <a:gd name="connsiteY6" fmla="*/ 375557 h 375557"/>
+              <a:gd name="connsiteX7" fmla="*/ 321154 w 4827839"/>
+              <a:gd name="connsiteY7" fmla="*/ 312963 h 375557"/>
+              <a:gd name="connsiteX8" fmla="*/ 0 w 4827839"/>
+              <a:gd name="connsiteY8" fmla="*/ 321173 h 375557"/>
+              <a:gd name="connsiteX9" fmla="*/ 38122 w 4827839"/>
+              <a:gd name="connsiteY9" fmla="*/ 97924 h 375557"/>
+              <a:gd name="connsiteX10" fmla="*/ 321154 w 4827839"/>
+              <a:gd name="connsiteY10" fmla="*/ 62594 h 375557"/>
+              <a:gd name="connsiteX0" fmla="*/ 283032 w 4789717"/>
+              <a:gd name="connsiteY0" fmla="*/ 62594 h 375557"/>
+              <a:gd name="connsiteX1" fmla="*/ 345626 w 4789717"/>
+              <a:gd name="connsiteY1" fmla="*/ 0 h 375557"/>
+              <a:gd name="connsiteX2" fmla="*/ 4727123 w 4789717"/>
+              <a:gd name="connsiteY2" fmla="*/ 0 h 375557"/>
+              <a:gd name="connsiteX3" fmla="*/ 4789717 w 4789717"/>
+              <a:gd name="connsiteY3" fmla="*/ 62594 h 375557"/>
+              <a:gd name="connsiteX4" fmla="*/ 4789717 w 4789717"/>
+              <a:gd name="connsiteY4" fmla="*/ 312963 h 375557"/>
+              <a:gd name="connsiteX5" fmla="*/ 4727123 w 4789717"/>
+              <a:gd name="connsiteY5" fmla="*/ 375557 h 375557"/>
+              <a:gd name="connsiteX6" fmla="*/ 345626 w 4789717"/>
+              <a:gd name="connsiteY6" fmla="*/ 375557 h 375557"/>
+              <a:gd name="connsiteX7" fmla="*/ 283032 w 4789717"/>
+              <a:gd name="connsiteY7" fmla="*/ 312963 h 375557"/>
+              <a:gd name="connsiteX8" fmla="*/ 21756 w 4789717"/>
+              <a:gd name="connsiteY8" fmla="*/ 315726 h 375557"/>
+              <a:gd name="connsiteX9" fmla="*/ 0 w 4789717"/>
+              <a:gd name="connsiteY9" fmla="*/ 97924 h 375557"/>
+              <a:gd name="connsiteX10" fmla="*/ 283032 w 4789717"/>
+              <a:gd name="connsiteY10" fmla="*/ 62594 h 375557"/>
+              <a:gd name="connsiteX0" fmla="*/ 261276 w 4767961"/>
+              <a:gd name="connsiteY0" fmla="*/ 62594 h 375557"/>
+              <a:gd name="connsiteX1" fmla="*/ 323870 w 4767961"/>
+              <a:gd name="connsiteY1" fmla="*/ 0 h 375557"/>
+              <a:gd name="connsiteX2" fmla="*/ 4705367 w 4767961"/>
+              <a:gd name="connsiteY2" fmla="*/ 0 h 375557"/>
+              <a:gd name="connsiteX3" fmla="*/ 4767961 w 4767961"/>
+              <a:gd name="connsiteY3" fmla="*/ 62594 h 375557"/>
+              <a:gd name="connsiteX4" fmla="*/ 4767961 w 4767961"/>
+              <a:gd name="connsiteY4" fmla="*/ 312963 h 375557"/>
+              <a:gd name="connsiteX5" fmla="*/ 4705367 w 4767961"/>
+              <a:gd name="connsiteY5" fmla="*/ 375557 h 375557"/>
+              <a:gd name="connsiteX6" fmla="*/ 323870 w 4767961"/>
+              <a:gd name="connsiteY6" fmla="*/ 375557 h 375557"/>
+              <a:gd name="connsiteX7" fmla="*/ 261276 w 4767961"/>
+              <a:gd name="connsiteY7" fmla="*/ 312963 h 375557"/>
+              <a:gd name="connsiteX8" fmla="*/ 0 w 4767961"/>
+              <a:gd name="connsiteY8" fmla="*/ 315726 h 375557"/>
+              <a:gd name="connsiteX9" fmla="*/ 92557 w 4767961"/>
+              <a:gd name="connsiteY9" fmla="*/ 81583 h 375557"/>
+              <a:gd name="connsiteX10" fmla="*/ 261276 w 4767961"/>
+              <a:gd name="connsiteY10" fmla="*/ 62594 h 375557"/>
+              <a:gd name="connsiteX0" fmla="*/ 168719 w 4675404"/>
+              <a:gd name="connsiteY0" fmla="*/ 62594 h 375557"/>
+              <a:gd name="connsiteX1" fmla="*/ 231313 w 4675404"/>
+              <a:gd name="connsiteY1" fmla="*/ 0 h 375557"/>
+              <a:gd name="connsiteX2" fmla="*/ 4612810 w 4675404"/>
+              <a:gd name="connsiteY2" fmla="*/ 0 h 375557"/>
+              <a:gd name="connsiteX3" fmla="*/ 4675404 w 4675404"/>
+              <a:gd name="connsiteY3" fmla="*/ 62594 h 375557"/>
+              <a:gd name="connsiteX4" fmla="*/ 4675404 w 4675404"/>
+              <a:gd name="connsiteY4" fmla="*/ 312963 h 375557"/>
+              <a:gd name="connsiteX5" fmla="*/ 4612810 w 4675404"/>
+              <a:gd name="connsiteY5" fmla="*/ 375557 h 375557"/>
+              <a:gd name="connsiteX6" fmla="*/ 231313 w 4675404"/>
+              <a:gd name="connsiteY6" fmla="*/ 375557 h 375557"/>
+              <a:gd name="connsiteX7" fmla="*/ 168719 w 4675404"/>
+              <a:gd name="connsiteY7" fmla="*/ 312963 h 375557"/>
+              <a:gd name="connsiteX8" fmla="*/ 59855 w 4675404"/>
+              <a:gd name="connsiteY8" fmla="*/ 315726 h 375557"/>
+              <a:gd name="connsiteX9" fmla="*/ 0 w 4675404"/>
+              <a:gd name="connsiteY9" fmla="*/ 81583 h 375557"/>
+              <a:gd name="connsiteX10" fmla="*/ 168719 w 4675404"/>
+              <a:gd name="connsiteY10" fmla="*/ 62594 h 375557"/>
+              <a:gd name="connsiteX0" fmla="*/ 119183 w 4625868"/>
+              <a:gd name="connsiteY0" fmla="*/ 62594 h 375557"/>
+              <a:gd name="connsiteX1" fmla="*/ 181777 w 4625868"/>
+              <a:gd name="connsiteY1" fmla="*/ 0 h 375557"/>
+              <a:gd name="connsiteX2" fmla="*/ 4563274 w 4625868"/>
+              <a:gd name="connsiteY2" fmla="*/ 0 h 375557"/>
+              <a:gd name="connsiteX3" fmla="*/ 4625868 w 4625868"/>
+              <a:gd name="connsiteY3" fmla="*/ 62594 h 375557"/>
+              <a:gd name="connsiteX4" fmla="*/ 4625868 w 4625868"/>
+              <a:gd name="connsiteY4" fmla="*/ 312963 h 375557"/>
+              <a:gd name="connsiteX5" fmla="*/ 4563274 w 4625868"/>
+              <a:gd name="connsiteY5" fmla="*/ 375557 h 375557"/>
+              <a:gd name="connsiteX6" fmla="*/ 181777 w 4625868"/>
+              <a:gd name="connsiteY6" fmla="*/ 375557 h 375557"/>
+              <a:gd name="connsiteX7" fmla="*/ 119183 w 4625868"/>
+              <a:gd name="connsiteY7" fmla="*/ 312963 h 375557"/>
+              <a:gd name="connsiteX8" fmla="*/ 10319 w 4625868"/>
+              <a:gd name="connsiteY8" fmla="*/ 315726 h 375557"/>
+              <a:gd name="connsiteX9" fmla="*/ 0 w 4625868"/>
+              <a:gd name="connsiteY9" fmla="*/ 77770 h 375557"/>
+              <a:gd name="connsiteX10" fmla="*/ 119183 w 4625868"/>
+              <a:gd name="connsiteY10" fmla="*/ 62594 h 375557"/>
+              <a:gd name="connsiteX0" fmla="*/ 119183 w 4625868"/>
+              <a:gd name="connsiteY0" fmla="*/ 127411 h 375557"/>
+              <a:gd name="connsiteX1" fmla="*/ 181777 w 4625868"/>
+              <a:gd name="connsiteY1" fmla="*/ 0 h 375557"/>
+              <a:gd name="connsiteX2" fmla="*/ 4563274 w 4625868"/>
+              <a:gd name="connsiteY2" fmla="*/ 0 h 375557"/>
+              <a:gd name="connsiteX3" fmla="*/ 4625868 w 4625868"/>
+              <a:gd name="connsiteY3" fmla="*/ 62594 h 375557"/>
+              <a:gd name="connsiteX4" fmla="*/ 4625868 w 4625868"/>
+              <a:gd name="connsiteY4" fmla="*/ 312963 h 375557"/>
+              <a:gd name="connsiteX5" fmla="*/ 4563274 w 4625868"/>
+              <a:gd name="connsiteY5" fmla="*/ 375557 h 375557"/>
+              <a:gd name="connsiteX6" fmla="*/ 181777 w 4625868"/>
+              <a:gd name="connsiteY6" fmla="*/ 375557 h 375557"/>
+              <a:gd name="connsiteX7" fmla="*/ 119183 w 4625868"/>
+              <a:gd name="connsiteY7" fmla="*/ 312963 h 375557"/>
+              <a:gd name="connsiteX8" fmla="*/ 10319 w 4625868"/>
+              <a:gd name="connsiteY8" fmla="*/ 315726 h 375557"/>
+              <a:gd name="connsiteX9" fmla="*/ 0 w 4625868"/>
+              <a:gd name="connsiteY9" fmla="*/ 77770 h 375557"/>
+              <a:gd name="connsiteX10" fmla="*/ 119183 w 4625868"/>
+              <a:gd name="connsiteY10" fmla="*/ 127411 h 375557"/>
+              <a:gd name="connsiteX0" fmla="*/ 119183 w 4625868"/>
+              <a:gd name="connsiteY0" fmla="*/ 127411 h 375557"/>
+              <a:gd name="connsiteX1" fmla="*/ 181777 w 4625868"/>
+              <a:gd name="connsiteY1" fmla="*/ 0 h 375557"/>
+              <a:gd name="connsiteX2" fmla="*/ 4563274 w 4625868"/>
+              <a:gd name="connsiteY2" fmla="*/ 0 h 375557"/>
+              <a:gd name="connsiteX3" fmla="*/ 4625868 w 4625868"/>
+              <a:gd name="connsiteY3" fmla="*/ 62594 h 375557"/>
+              <a:gd name="connsiteX4" fmla="*/ 4625868 w 4625868"/>
+              <a:gd name="connsiteY4" fmla="*/ 312963 h 375557"/>
+              <a:gd name="connsiteX5" fmla="*/ 4563274 w 4625868"/>
+              <a:gd name="connsiteY5" fmla="*/ 375557 h 375557"/>
+              <a:gd name="connsiteX6" fmla="*/ 181777 w 4625868"/>
+              <a:gd name="connsiteY6" fmla="*/ 375557 h 375557"/>
+              <a:gd name="connsiteX7" fmla="*/ 126803 w 4625868"/>
+              <a:gd name="connsiteY7" fmla="*/ 240520 h 375557"/>
+              <a:gd name="connsiteX8" fmla="*/ 10319 w 4625868"/>
+              <a:gd name="connsiteY8" fmla="*/ 315726 h 375557"/>
+              <a:gd name="connsiteX9" fmla="*/ 0 w 4625868"/>
+              <a:gd name="connsiteY9" fmla="*/ 77770 h 375557"/>
+              <a:gd name="connsiteX10" fmla="*/ 119183 w 4625868"/>
+              <a:gd name="connsiteY10" fmla="*/ 127411 h 375557"/>
+            </a:gdLst>
+            <a:ahLst/>
+            <a:cxnLst>
+              <a:cxn ang="0">
+                <a:pos x="connsiteX0" y="connsiteY0"/>
+              </a:cxn>
+              <a:cxn ang="0">
+                <a:pos x="connsiteX1" y="connsiteY1"/>
+              </a:cxn>
+              <a:cxn ang="0">
+                <a:pos x="connsiteX2" y="connsiteY2"/>
+              </a:cxn>
+              <a:cxn ang="0">
+                <a:pos x="connsiteX3" y="connsiteY3"/>
+              </a:cxn>
+              <a:cxn ang="0">
+                <a:pos x="connsiteX4" y="connsiteY4"/>
+              </a:cxn>
+              <a:cxn ang="0">
+                <a:pos x="connsiteX5" y="connsiteY5"/>
+              </a:cxn>
+              <a:cxn ang="0">
+                <a:pos x="connsiteX6" y="connsiteY6"/>
+              </a:cxn>
+              <a:cxn ang="0">
+                <a:pos x="connsiteX7" y="connsiteY7"/>
+              </a:cxn>
+              <a:cxn ang="0">
+                <a:pos x="connsiteX8" y="connsiteY8"/>
+              </a:cxn>
+              <a:cxn ang="0">
+                <a:pos x="connsiteX9" y="connsiteY9"/>
+              </a:cxn>
+              <a:cxn ang="0">
+                <a:pos x="connsiteX10" y="connsiteY10"/>
+              </a:cxn>
+            </a:cxnLst>
+            <a:rect l="l" t="t" r="r" b="b"/>
+            <a:pathLst>
+              <a:path w="4625868" h="375557">
+                <a:moveTo>
+                  <a:pt x="119183" y="127411"/>
+                </a:moveTo>
+                <a:cubicBezTo>
+                  <a:pt x="119183" y="92841"/>
+                  <a:pt x="147207" y="0"/>
+                  <a:pt x="181777" y="0"/>
+                </a:cubicBezTo>
+                <a:lnTo>
+                  <a:pt x="4563274" y="0"/>
+                </a:lnTo>
+                <a:cubicBezTo>
+                  <a:pt x="4597844" y="0"/>
+                  <a:pt x="4625868" y="28024"/>
+                  <a:pt x="4625868" y="62594"/>
+                </a:cubicBezTo>
+                <a:lnTo>
+                  <a:pt x="4625868" y="312963"/>
+                </a:lnTo>
+                <a:cubicBezTo>
+                  <a:pt x="4625868" y="347533"/>
+                  <a:pt x="4597844" y="375557"/>
+                  <a:pt x="4563274" y="375557"/>
+                </a:cubicBezTo>
+                <a:lnTo>
+                  <a:pt x="181777" y="375557"/>
+                </a:lnTo>
+                <a:cubicBezTo>
+                  <a:pt x="147207" y="375557"/>
+                  <a:pt x="126803" y="275090"/>
+                  <a:pt x="126803" y="240520"/>
+                </a:cubicBezTo>
+                <a:lnTo>
+                  <a:pt x="10319" y="315726"/>
+                </a:lnTo>
+                <a:lnTo>
+                  <a:pt x="0" y="77770"/>
+                </a:lnTo>
+                <a:lnTo>
+                  <a:pt x="119183" y="127411"/>
+                </a:lnTo>
+                <a:close/>
+              </a:path>
+            </a:pathLst>
+          </a:custGeom>
+        </p:spPr>
+        <p:style>
+          <a:lnRef idx="2">
+            <a:schemeClr val="accent4">
+              <a:shade val="50000"/>
+            </a:schemeClr>
+          </a:lnRef>
+          <a:fillRef idx="1">
+            <a:schemeClr val="accent4"/>
+          </a:fillRef>
+          <a:effectRef idx="0">
+            <a:schemeClr val="accent4"/>
+          </a:effectRef>
+          <a:fontRef idx="minor">
+            <a:schemeClr val="lt1"/>
+          </a:fontRef>
+        </p:style>
+        <p:txBody>
+          <a:bodyPr rot="0" spcFirstLastPara="0" vert="horz" wrap="square" lIns="0" tIns="0" rIns="0" bIns="0" numCol="1" spcCol="0" rtlCol="0" fromWordArt="0" anchor="ctr" anchorCtr="0" forceAA="0" compatLnSpc="1">
+            <a:prstTxWarp prst="textNoShape">
+              <a:avLst/>
+            </a:prstTxWarp>
+            <a:noAutofit/>
+          </a:bodyPr>
+          <a:lstStyle/>
+          <a:p>
+            <a:pPr indent="63500">
+              <a:spcAft>
+                <a:spcPts val="0"/>
+              </a:spcAft>
+            </a:pPr>
+            <a:r>
+              <a:rPr lang="zh-TW" altLang="en-US" sz="1200" kern="100" dirty="0" smtClean="0">
+                <a:effectLst/>
+                <a:ea typeface="新細明體" panose="02020500000000000000" pitchFamily="18" charset="-120"/>
+                <a:cs typeface="Times New Roman" panose="02020603050405020304" pitchFamily="18" charset="0"/>
+              </a:rPr>
+              <a:t>按下簽收鈕</a:t>
+            </a:r>
+            <a:endParaRPr lang="zh-TW" sz="1200" kern="100" dirty="0">
+              <a:effectLst/>
+              <a:ea typeface="新細明體" panose="02020500000000000000" pitchFamily="18" charset="-120"/>
+              <a:cs typeface="Times New Roman" panose="02020603050405020304" pitchFamily="18" charset="0"/>
+            </a:endParaRPr>
+          </a:p>
+        </p:txBody>
+      </p:sp>
       <p:grpSp>
         <p:nvGrpSpPr>
-          <p:cNvPr id="53" name="群組 52"/>
+          <p:cNvPr id="55" name="群組 54"/>
           <p:cNvGrpSpPr/>
           <p:nvPr/>
         </p:nvGrpSpPr>
         <p:grpSpPr>
           <a:xfrm>
-            <a:off x="1122279" y="4744362"/>
-            <a:ext cx="1331361" cy="263525"/>
-            <a:chOff x="0" y="0"/>
-            <a:chExt cx="1331361" cy="263525"/>
+            <a:off x="2811029" y="4738669"/>
+            <a:ext cx="550142" cy="238125"/>
+            <a:chOff x="-459817" y="0"/>
+            <a:chExt cx="550713" cy="238539"/>
           </a:xfrm>
         </p:grpSpPr>
         <p:sp>
           <p:nvSpPr>
-            <p:cNvPr id="54" name="圓角矩形 48"/>
+            <p:cNvPr id="59" name="圓角矩形 58"/>
             <p:cNvSpPr/>
             <p:nvPr/>
           </p:nvSpPr>
           <p:spPr>
             <a:xfrm>
-              <a:off x="0" y="0"/>
-              <a:ext cx="1331361" cy="263525"/>
+              <a:off x="-459817" y="0"/>
+              <a:ext cx="550713" cy="238539"/>
             </a:xfrm>
-            <a:custGeom>
+            <a:prstGeom prst="roundRect">
               <a:avLst/>
-              <a:gdLst>
-                <a:gd name="connsiteX0" fmla="*/ 0 w 4506685"/>
-                <a:gd name="connsiteY0" fmla="*/ 62594 h 375557"/>
-                <a:gd name="connsiteX1" fmla="*/ 62594 w 4506685"/>
-                <a:gd name="connsiteY1" fmla="*/ 0 h 375557"/>
-                <a:gd name="connsiteX2" fmla="*/ 4444091 w 4506685"/>
-                <a:gd name="connsiteY2" fmla="*/ 0 h 375557"/>
-                <a:gd name="connsiteX3" fmla="*/ 4506685 w 4506685"/>
-                <a:gd name="connsiteY3" fmla="*/ 62594 h 375557"/>
-                <a:gd name="connsiteX4" fmla="*/ 4506685 w 4506685"/>
-                <a:gd name="connsiteY4" fmla="*/ 312963 h 375557"/>
-                <a:gd name="connsiteX5" fmla="*/ 4444091 w 4506685"/>
-                <a:gd name="connsiteY5" fmla="*/ 375557 h 375557"/>
-                <a:gd name="connsiteX6" fmla="*/ 62594 w 4506685"/>
-                <a:gd name="connsiteY6" fmla="*/ 375557 h 375557"/>
-                <a:gd name="connsiteX7" fmla="*/ 0 w 4506685"/>
-                <a:gd name="connsiteY7" fmla="*/ 312963 h 375557"/>
-                <a:gd name="connsiteX8" fmla="*/ 0 w 4506685"/>
-                <a:gd name="connsiteY8" fmla="*/ 62594 h 375557"/>
-                <a:gd name="connsiteX0" fmla="*/ 0 w 4506685"/>
-                <a:gd name="connsiteY0" fmla="*/ 62594 h 375557"/>
-                <a:gd name="connsiteX1" fmla="*/ 62594 w 4506685"/>
-                <a:gd name="connsiteY1" fmla="*/ 0 h 375557"/>
-                <a:gd name="connsiteX2" fmla="*/ 4444091 w 4506685"/>
-                <a:gd name="connsiteY2" fmla="*/ 0 h 375557"/>
-                <a:gd name="connsiteX3" fmla="*/ 4506685 w 4506685"/>
-                <a:gd name="connsiteY3" fmla="*/ 62594 h 375557"/>
-                <a:gd name="connsiteX4" fmla="*/ 4506685 w 4506685"/>
-                <a:gd name="connsiteY4" fmla="*/ 312963 h 375557"/>
-                <a:gd name="connsiteX5" fmla="*/ 4444091 w 4506685"/>
-                <a:gd name="connsiteY5" fmla="*/ 375557 h 375557"/>
-                <a:gd name="connsiteX6" fmla="*/ 62594 w 4506685"/>
-                <a:gd name="connsiteY6" fmla="*/ 375557 h 375557"/>
-                <a:gd name="connsiteX7" fmla="*/ 0 w 4506685"/>
-                <a:gd name="connsiteY7" fmla="*/ 312963 h 375557"/>
-                <a:gd name="connsiteX8" fmla="*/ 5443 w 4506685"/>
-                <a:gd name="connsiteY8" fmla="*/ 163286 h 375557"/>
-                <a:gd name="connsiteX9" fmla="*/ 0 w 4506685"/>
-                <a:gd name="connsiteY9" fmla="*/ 62594 h 375557"/>
-                <a:gd name="connsiteX0" fmla="*/ 310249 w 4816934"/>
-                <a:gd name="connsiteY0" fmla="*/ 62594 h 375557"/>
-                <a:gd name="connsiteX1" fmla="*/ 372843 w 4816934"/>
-                <a:gd name="connsiteY1" fmla="*/ 0 h 375557"/>
-                <a:gd name="connsiteX2" fmla="*/ 4754340 w 4816934"/>
-                <a:gd name="connsiteY2" fmla="*/ 0 h 375557"/>
-                <a:gd name="connsiteX3" fmla="*/ 4816934 w 4816934"/>
-                <a:gd name="connsiteY3" fmla="*/ 62594 h 375557"/>
-                <a:gd name="connsiteX4" fmla="*/ 4816934 w 4816934"/>
-                <a:gd name="connsiteY4" fmla="*/ 312963 h 375557"/>
-                <a:gd name="connsiteX5" fmla="*/ 4754340 w 4816934"/>
-                <a:gd name="connsiteY5" fmla="*/ 375557 h 375557"/>
-                <a:gd name="connsiteX6" fmla="*/ 372843 w 4816934"/>
-                <a:gd name="connsiteY6" fmla="*/ 375557 h 375557"/>
-                <a:gd name="connsiteX7" fmla="*/ 310249 w 4816934"/>
-                <a:gd name="connsiteY7" fmla="*/ 312963 h 375557"/>
-                <a:gd name="connsiteX8" fmla="*/ 0 w 4816934"/>
-                <a:gd name="connsiteY8" fmla="*/ 146945 h 375557"/>
-                <a:gd name="connsiteX9" fmla="*/ 310249 w 4816934"/>
-                <a:gd name="connsiteY9" fmla="*/ 62594 h 375557"/>
-                <a:gd name="connsiteX0" fmla="*/ 310249 w 4816934"/>
-                <a:gd name="connsiteY0" fmla="*/ 62594 h 375557"/>
-                <a:gd name="connsiteX1" fmla="*/ 372843 w 4816934"/>
-                <a:gd name="connsiteY1" fmla="*/ 0 h 375557"/>
-                <a:gd name="connsiteX2" fmla="*/ 4754340 w 4816934"/>
-                <a:gd name="connsiteY2" fmla="*/ 0 h 375557"/>
-                <a:gd name="connsiteX3" fmla="*/ 4816934 w 4816934"/>
-                <a:gd name="connsiteY3" fmla="*/ 62594 h 375557"/>
-                <a:gd name="connsiteX4" fmla="*/ 4816934 w 4816934"/>
-                <a:gd name="connsiteY4" fmla="*/ 312963 h 375557"/>
-                <a:gd name="connsiteX5" fmla="*/ 4754340 w 4816934"/>
-                <a:gd name="connsiteY5" fmla="*/ 375557 h 375557"/>
-                <a:gd name="connsiteX6" fmla="*/ 372843 w 4816934"/>
-                <a:gd name="connsiteY6" fmla="*/ 375557 h 375557"/>
-                <a:gd name="connsiteX7" fmla="*/ 310249 w 4816934"/>
-                <a:gd name="connsiteY7" fmla="*/ 312963 h 375557"/>
-                <a:gd name="connsiteX8" fmla="*/ 190500 w 4816934"/>
-                <a:gd name="connsiteY8" fmla="*/ 261257 h 375557"/>
-                <a:gd name="connsiteX9" fmla="*/ 0 w 4816934"/>
-                <a:gd name="connsiteY9" fmla="*/ 146945 h 375557"/>
-                <a:gd name="connsiteX10" fmla="*/ 310249 w 4816934"/>
-                <a:gd name="connsiteY10" fmla="*/ 62594 h 375557"/>
-                <a:gd name="connsiteX0" fmla="*/ 321154 w 4827839"/>
-                <a:gd name="connsiteY0" fmla="*/ 62594 h 375557"/>
-                <a:gd name="connsiteX1" fmla="*/ 383748 w 4827839"/>
-                <a:gd name="connsiteY1" fmla="*/ 0 h 375557"/>
-                <a:gd name="connsiteX2" fmla="*/ 4765245 w 4827839"/>
-                <a:gd name="connsiteY2" fmla="*/ 0 h 375557"/>
-                <a:gd name="connsiteX3" fmla="*/ 4827839 w 4827839"/>
-                <a:gd name="connsiteY3" fmla="*/ 62594 h 375557"/>
-                <a:gd name="connsiteX4" fmla="*/ 4827839 w 4827839"/>
-                <a:gd name="connsiteY4" fmla="*/ 312963 h 375557"/>
-                <a:gd name="connsiteX5" fmla="*/ 4765245 w 4827839"/>
-                <a:gd name="connsiteY5" fmla="*/ 375557 h 375557"/>
-                <a:gd name="connsiteX6" fmla="*/ 383748 w 4827839"/>
-                <a:gd name="connsiteY6" fmla="*/ 375557 h 375557"/>
-                <a:gd name="connsiteX7" fmla="*/ 321154 w 4827839"/>
-                <a:gd name="connsiteY7" fmla="*/ 312963 h 375557"/>
-                <a:gd name="connsiteX8" fmla="*/ 0 w 4827839"/>
-                <a:gd name="connsiteY8" fmla="*/ 321173 h 375557"/>
-                <a:gd name="connsiteX9" fmla="*/ 10905 w 4827839"/>
-                <a:gd name="connsiteY9" fmla="*/ 146945 h 375557"/>
-                <a:gd name="connsiteX10" fmla="*/ 321154 w 4827839"/>
-                <a:gd name="connsiteY10" fmla="*/ 62594 h 375557"/>
-                <a:gd name="connsiteX0" fmla="*/ 321154 w 4827839"/>
-                <a:gd name="connsiteY0" fmla="*/ 62594 h 375557"/>
-                <a:gd name="connsiteX1" fmla="*/ 383748 w 4827839"/>
-                <a:gd name="connsiteY1" fmla="*/ 0 h 375557"/>
-                <a:gd name="connsiteX2" fmla="*/ 4765245 w 4827839"/>
-                <a:gd name="connsiteY2" fmla="*/ 0 h 375557"/>
-                <a:gd name="connsiteX3" fmla="*/ 4827839 w 4827839"/>
-                <a:gd name="connsiteY3" fmla="*/ 62594 h 375557"/>
-                <a:gd name="connsiteX4" fmla="*/ 4827839 w 4827839"/>
-                <a:gd name="connsiteY4" fmla="*/ 312963 h 375557"/>
-                <a:gd name="connsiteX5" fmla="*/ 4765245 w 4827839"/>
-                <a:gd name="connsiteY5" fmla="*/ 375557 h 375557"/>
-                <a:gd name="connsiteX6" fmla="*/ 383748 w 4827839"/>
-                <a:gd name="connsiteY6" fmla="*/ 375557 h 375557"/>
-                <a:gd name="connsiteX7" fmla="*/ 321154 w 4827839"/>
-                <a:gd name="connsiteY7" fmla="*/ 312963 h 375557"/>
-                <a:gd name="connsiteX8" fmla="*/ 0 w 4827839"/>
-                <a:gd name="connsiteY8" fmla="*/ 321173 h 375557"/>
-                <a:gd name="connsiteX9" fmla="*/ 38122 w 4827839"/>
-                <a:gd name="connsiteY9" fmla="*/ 97924 h 375557"/>
-                <a:gd name="connsiteX10" fmla="*/ 321154 w 4827839"/>
-                <a:gd name="connsiteY10" fmla="*/ 62594 h 375557"/>
-                <a:gd name="connsiteX0" fmla="*/ 283032 w 4789717"/>
-                <a:gd name="connsiteY0" fmla="*/ 62594 h 375557"/>
-                <a:gd name="connsiteX1" fmla="*/ 345626 w 4789717"/>
-                <a:gd name="connsiteY1" fmla="*/ 0 h 375557"/>
-                <a:gd name="connsiteX2" fmla="*/ 4727123 w 4789717"/>
-                <a:gd name="connsiteY2" fmla="*/ 0 h 375557"/>
-                <a:gd name="connsiteX3" fmla="*/ 4789717 w 4789717"/>
-                <a:gd name="connsiteY3" fmla="*/ 62594 h 375557"/>
-                <a:gd name="connsiteX4" fmla="*/ 4789717 w 4789717"/>
-                <a:gd name="connsiteY4" fmla="*/ 312963 h 375557"/>
-                <a:gd name="connsiteX5" fmla="*/ 4727123 w 4789717"/>
-                <a:gd name="connsiteY5" fmla="*/ 375557 h 375557"/>
-                <a:gd name="connsiteX6" fmla="*/ 345626 w 4789717"/>
-                <a:gd name="connsiteY6" fmla="*/ 375557 h 375557"/>
-                <a:gd name="connsiteX7" fmla="*/ 283032 w 4789717"/>
-                <a:gd name="connsiteY7" fmla="*/ 312963 h 375557"/>
-                <a:gd name="connsiteX8" fmla="*/ 21756 w 4789717"/>
-                <a:gd name="connsiteY8" fmla="*/ 315726 h 375557"/>
-                <a:gd name="connsiteX9" fmla="*/ 0 w 4789717"/>
-                <a:gd name="connsiteY9" fmla="*/ 97924 h 375557"/>
-                <a:gd name="connsiteX10" fmla="*/ 283032 w 4789717"/>
-                <a:gd name="connsiteY10" fmla="*/ 62594 h 375557"/>
-                <a:gd name="connsiteX0" fmla="*/ 261276 w 4767961"/>
-                <a:gd name="connsiteY0" fmla="*/ 62594 h 375557"/>
-                <a:gd name="connsiteX1" fmla="*/ 323870 w 4767961"/>
-                <a:gd name="connsiteY1" fmla="*/ 0 h 375557"/>
-                <a:gd name="connsiteX2" fmla="*/ 4705367 w 4767961"/>
-                <a:gd name="connsiteY2" fmla="*/ 0 h 375557"/>
-                <a:gd name="connsiteX3" fmla="*/ 4767961 w 4767961"/>
-                <a:gd name="connsiteY3" fmla="*/ 62594 h 375557"/>
-                <a:gd name="connsiteX4" fmla="*/ 4767961 w 4767961"/>
-                <a:gd name="connsiteY4" fmla="*/ 312963 h 375557"/>
-                <a:gd name="connsiteX5" fmla="*/ 4705367 w 4767961"/>
-                <a:gd name="connsiteY5" fmla="*/ 375557 h 375557"/>
-                <a:gd name="connsiteX6" fmla="*/ 323870 w 4767961"/>
-                <a:gd name="connsiteY6" fmla="*/ 375557 h 375557"/>
-                <a:gd name="connsiteX7" fmla="*/ 261276 w 4767961"/>
-                <a:gd name="connsiteY7" fmla="*/ 312963 h 375557"/>
-                <a:gd name="connsiteX8" fmla="*/ 0 w 4767961"/>
-                <a:gd name="connsiteY8" fmla="*/ 315726 h 375557"/>
-                <a:gd name="connsiteX9" fmla="*/ 92557 w 4767961"/>
-                <a:gd name="connsiteY9" fmla="*/ 81583 h 375557"/>
-                <a:gd name="connsiteX10" fmla="*/ 261276 w 4767961"/>
-                <a:gd name="connsiteY10" fmla="*/ 62594 h 375557"/>
-                <a:gd name="connsiteX0" fmla="*/ 168719 w 4675404"/>
-                <a:gd name="connsiteY0" fmla="*/ 62594 h 375557"/>
-                <a:gd name="connsiteX1" fmla="*/ 231313 w 4675404"/>
-                <a:gd name="connsiteY1" fmla="*/ 0 h 375557"/>
-                <a:gd name="connsiteX2" fmla="*/ 4612810 w 4675404"/>
-                <a:gd name="connsiteY2" fmla="*/ 0 h 375557"/>
-                <a:gd name="connsiteX3" fmla="*/ 4675404 w 4675404"/>
-                <a:gd name="connsiteY3" fmla="*/ 62594 h 375557"/>
-                <a:gd name="connsiteX4" fmla="*/ 4675404 w 4675404"/>
-                <a:gd name="connsiteY4" fmla="*/ 312963 h 375557"/>
-                <a:gd name="connsiteX5" fmla="*/ 4612810 w 4675404"/>
-                <a:gd name="connsiteY5" fmla="*/ 375557 h 375557"/>
-                <a:gd name="connsiteX6" fmla="*/ 231313 w 4675404"/>
-                <a:gd name="connsiteY6" fmla="*/ 375557 h 375557"/>
-                <a:gd name="connsiteX7" fmla="*/ 168719 w 4675404"/>
-                <a:gd name="connsiteY7" fmla="*/ 312963 h 375557"/>
-                <a:gd name="connsiteX8" fmla="*/ 59855 w 4675404"/>
-                <a:gd name="connsiteY8" fmla="*/ 315726 h 375557"/>
-                <a:gd name="connsiteX9" fmla="*/ 0 w 4675404"/>
-                <a:gd name="connsiteY9" fmla="*/ 81583 h 375557"/>
-                <a:gd name="connsiteX10" fmla="*/ 168719 w 4675404"/>
-                <a:gd name="connsiteY10" fmla="*/ 62594 h 375557"/>
-                <a:gd name="connsiteX0" fmla="*/ 119183 w 4625868"/>
-                <a:gd name="connsiteY0" fmla="*/ 62594 h 375557"/>
-                <a:gd name="connsiteX1" fmla="*/ 181777 w 4625868"/>
-                <a:gd name="connsiteY1" fmla="*/ 0 h 375557"/>
-                <a:gd name="connsiteX2" fmla="*/ 4563274 w 4625868"/>
-                <a:gd name="connsiteY2" fmla="*/ 0 h 375557"/>
-                <a:gd name="connsiteX3" fmla="*/ 4625868 w 4625868"/>
-                <a:gd name="connsiteY3" fmla="*/ 62594 h 375557"/>
-                <a:gd name="connsiteX4" fmla="*/ 4625868 w 4625868"/>
-                <a:gd name="connsiteY4" fmla="*/ 312963 h 375557"/>
-                <a:gd name="connsiteX5" fmla="*/ 4563274 w 4625868"/>
-                <a:gd name="connsiteY5" fmla="*/ 375557 h 375557"/>
-                <a:gd name="connsiteX6" fmla="*/ 181777 w 4625868"/>
-                <a:gd name="connsiteY6" fmla="*/ 375557 h 375557"/>
-                <a:gd name="connsiteX7" fmla="*/ 119183 w 4625868"/>
-                <a:gd name="connsiteY7" fmla="*/ 312963 h 375557"/>
-                <a:gd name="connsiteX8" fmla="*/ 10319 w 4625868"/>
-                <a:gd name="connsiteY8" fmla="*/ 315726 h 375557"/>
-                <a:gd name="connsiteX9" fmla="*/ 0 w 4625868"/>
-                <a:gd name="connsiteY9" fmla="*/ 77770 h 375557"/>
-                <a:gd name="connsiteX10" fmla="*/ 119183 w 4625868"/>
-                <a:gd name="connsiteY10" fmla="*/ 62594 h 375557"/>
-                <a:gd name="connsiteX0" fmla="*/ 119183 w 4625868"/>
-                <a:gd name="connsiteY0" fmla="*/ 127411 h 375557"/>
-                <a:gd name="connsiteX1" fmla="*/ 181777 w 4625868"/>
-                <a:gd name="connsiteY1" fmla="*/ 0 h 375557"/>
-                <a:gd name="connsiteX2" fmla="*/ 4563274 w 4625868"/>
-                <a:gd name="connsiteY2" fmla="*/ 0 h 375557"/>
-                <a:gd name="connsiteX3" fmla="*/ 4625868 w 4625868"/>
-                <a:gd name="connsiteY3" fmla="*/ 62594 h 375557"/>
-                <a:gd name="connsiteX4" fmla="*/ 4625868 w 4625868"/>
-                <a:gd name="connsiteY4" fmla="*/ 312963 h 375557"/>
-                <a:gd name="connsiteX5" fmla="*/ 4563274 w 4625868"/>
-                <a:gd name="connsiteY5" fmla="*/ 375557 h 375557"/>
-                <a:gd name="connsiteX6" fmla="*/ 181777 w 4625868"/>
-                <a:gd name="connsiteY6" fmla="*/ 375557 h 375557"/>
-                <a:gd name="connsiteX7" fmla="*/ 119183 w 4625868"/>
-                <a:gd name="connsiteY7" fmla="*/ 312963 h 375557"/>
-                <a:gd name="connsiteX8" fmla="*/ 10319 w 4625868"/>
-                <a:gd name="connsiteY8" fmla="*/ 315726 h 375557"/>
-                <a:gd name="connsiteX9" fmla="*/ 0 w 4625868"/>
-                <a:gd name="connsiteY9" fmla="*/ 77770 h 375557"/>
-                <a:gd name="connsiteX10" fmla="*/ 119183 w 4625868"/>
-                <a:gd name="connsiteY10" fmla="*/ 127411 h 375557"/>
-                <a:gd name="connsiteX0" fmla="*/ 119183 w 4625868"/>
-                <a:gd name="connsiteY0" fmla="*/ 127411 h 375557"/>
-                <a:gd name="connsiteX1" fmla="*/ 181777 w 4625868"/>
-                <a:gd name="connsiteY1" fmla="*/ 0 h 375557"/>
-                <a:gd name="connsiteX2" fmla="*/ 4563274 w 4625868"/>
-                <a:gd name="connsiteY2" fmla="*/ 0 h 375557"/>
-                <a:gd name="connsiteX3" fmla="*/ 4625868 w 4625868"/>
-                <a:gd name="connsiteY3" fmla="*/ 62594 h 375557"/>
-                <a:gd name="connsiteX4" fmla="*/ 4625868 w 4625868"/>
-                <a:gd name="connsiteY4" fmla="*/ 312963 h 375557"/>
-                <a:gd name="connsiteX5" fmla="*/ 4563274 w 4625868"/>
-                <a:gd name="connsiteY5" fmla="*/ 375557 h 375557"/>
-                <a:gd name="connsiteX6" fmla="*/ 181777 w 4625868"/>
-                <a:gd name="connsiteY6" fmla="*/ 375557 h 375557"/>
-                <a:gd name="connsiteX7" fmla="*/ 126803 w 4625868"/>
-                <a:gd name="connsiteY7" fmla="*/ 240520 h 375557"/>
-                <a:gd name="connsiteX8" fmla="*/ 10319 w 4625868"/>
-                <a:gd name="connsiteY8" fmla="*/ 315726 h 375557"/>
-                <a:gd name="connsiteX9" fmla="*/ 0 w 4625868"/>
-                <a:gd name="connsiteY9" fmla="*/ 77770 h 375557"/>
-                <a:gd name="connsiteX10" fmla="*/ 119183 w 4625868"/>
-                <a:gd name="connsiteY10" fmla="*/ 127411 h 375557"/>
-              </a:gdLst>
-              <a:ahLst/>
-              <a:cxnLst>
-                <a:cxn ang="0">
-                  <a:pos x="connsiteX0" y="connsiteY0"/>
-                </a:cxn>
-                <a:cxn ang="0">
-                  <a:pos x="connsiteX1" y="connsiteY1"/>
-                </a:cxn>
-                <a:cxn ang="0">
-                  <a:pos x="connsiteX2" y="connsiteY2"/>
-                </a:cxn>
-                <a:cxn ang="0">
-                  <a:pos x="connsiteX3" y="connsiteY3"/>
-                </a:cxn>
-                <a:cxn ang="0">
-                  <a:pos x="connsiteX4" y="connsiteY4"/>
-                </a:cxn>
-                <a:cxn ang="0">
-                  <a:pos x="connsiteX5" y="connsiteY5"/>
-                </a:cxn>
-                <a:cxn ang="0">
-                  <a:pos x="connsiteX6" y="connsiteY6"/>
-                </a:cxn>
-                <a:cxn ang="0">
-                  <a:pos x="connsiteX7" y="connsiteY7"/>
-                </a:cxn>
-                <a:cxn ang="0">
-                  <a:pos x="connsiteX8" y="connsiteY8"/>
-                </a:cxn>
-                <a:cxn ang="0">
-                  <a:pos x="connsiteX9" y="connsiteY9"/>
-                </a:cxn>
-                <a:cxn ang="0">
-                  <a:pos x="connsiteX10" y="connsiteY10"/>
-                </a:cxn>
-              </a:cxnLst>
-              <a:rect l="l" t="t" r="r" b="b"/>
-              <a:pathLst>
-                <a:path w="4625868" h="375557">
-                  <a:moveTo>
-                    <a:pt x="119183" y="127411"/>
-                  </a:moveTo>
-                  <a:cubicBezTo>
-                    <a:pt x="119183" y="92841"/>
-                    <a:pt x="147207" y="0"/>
-                    <a:pt x="181777" y="0"/>
-                  </a:cubicBezTo>
-                  <a:lnTo>
-                    <a:pt x="4563274" y="0"/>
-                  </a:lnTo>
-                  <a:cubicBezTo>
-                    <a:pt x="4597844" y="0"/>
-                    <a:pt x="4625868" y="28024"/>
-                    <a:pt x="4625868" y="62594"/>
-                  </a:cubicBezTo>
-                  <a:lnTo>
-                    <a:pt x="4625868" y="312963"/>
-                  </a:lnTo>
-                  <a:cubicBezTo>
-                    <a:pt x="4625868" y="347533"/>
-                    <a:pt x="4597844" y="375557"/>
-                    <a:pt x="4563274" y="375557"/>
-                  </a:cubicBezTo>
-                  <a:lnTo>
-                    <a:pt x="181777" y="375557"/>
-                  </a:lnTo>
-                  <a:cubicBezTo>
-                    <a:pt x="147207" y="375557"/>
-                    <a:pt x="126803" y="275090"/>
-                    <a:pt x="126803" y="240520"/>
-                  </a:cubicBezTo>
-                  <a:lnTo>
-                    <a:pt x="10319" y="315726"/>
-                  </a:lnTo>
-                  <a:lnTo>
-                    <a:pt x="0" y="77770"/>
-                  </a:lnTo>
-                  <a:lnTo>
-                    <a:pt x="119183" y="127411"/>
-                  </a:lnTo>
-                  <a:close/>
-                </a:path>
-              </a:pathLst>
-            </a:custGeom>
+            </a:prstGeom>
           </p:spPr>
           <p:style>
             <a:lnRef idx="2">
-              <a:schemeClr val="accent4">
-                <a:shade val="50000"/>
-              </a:schemeClr>
+              <a:schemeClr val="accent4"/>
             </a:lnRef>
             <a:fillRef idx="1">
-              <a:schemeClr val="accent4"/>
+              <a:schemeClr val="lt1"/>
             </a:fillRef>
             <a:effectRef idx="0">
               <a:schemeClr val="accent4"/>
             </a:effectRef>
             <a:fontRef idx="minor">
-              <a:schemeClr val="lt1"/>
+              <a:schemeClr val="dk1"/>
             </a:fontRef>
           </p:style>
           <p:txBody>
@@ -6003,18 +6079,18 @@
             </a:bodyPr>
             <a:lstStyle/>
             <a:p>
-              <a:pPr indent="63500">
+              <a:pPr indent="76200">
                 <a:spcAft>
                   <a:spcPts val="0"/>
                 </a:spcAft>
               </a:pPr>
               <a:r>
-                <a:rPr lang="zh-TW" altLang="en-US" sz="1200" kern="100" dirty="0" smtClean="0">
+                <a:rPr lang="en-US" sz="1200" b="1" kern="100" dirty="0" smtClean="0">
                   <a:effectLst/>
                   <a:ea typeface="新細明體" panose="02020500000000000000" pitchFamily="18" charset="-120"/>
                   <a:cs typeface="Times New Roman" panose="02020603050405020304" pitchFamily="18" charset="0"/>
                 </a:rPr>
-                <a:t>電量低於</a:t>
+                <a:t>20%</a:t>
               </a:r>
               <a:endParaRPr lang="zh-TW" sz="1200" kern="100" dirty="0">
                 <a:effectLst/>
@@ -6024,122 +6100,48 @@
             </a:p>
           </p:txBody>
         </p:sp>
-        <p:grpSp>
-          <p:nvGrpSpPr>
-            <p:cNvPr id="55" name="群組 54"/>
-            <p:cNvGrpSpPr/>
+        <p:sp>
+          <p:nvSpPr>
+            <p:cNvPr id="60" name="等腰三角形 59"/>
+            <p:cNvSpPr/>
             <p:nvPr/>
-          </p:nvGrpSpPr>
-          <p:grpSpPr>
-            <a:xfrm>
-              <a:off x="702712" y="12700"/>
-              <a:ext cx="550142" cy="238125"/>
-              <a:chOff x="-459817" y="0"/>
-              <a:chExt cx="550713" cy="238539"/>
+          </p:nvSpPr>
+          <p:spPr>
+            <a:xfrm rot="10800000">
+              <a:off x="-115805" y="71562"/>
+              <a:ext cx="174928" cy="143123"/>
             </a:xfrm>
-          </p:grpSpPr>
-          <p:sp>
-            <p:nvSpPr>
-              <p:cNvPr id="59" name="圓角矩形 58"/>
-              <p:cNvSpPr/>
-              <p:nvPr/>
-            </p:nvSpPr>
-            <p:spPr>
-              <a:xfrm>
-                <a:off x="-459817" y="0"/>
-                <a:ext cx="550713" cy="238539"/>
-              </a:xfrm>
-              <a:prstGeom prst="roundRect">
+            <a:prstGeom prst="triangle">
+              <a:avLst/>
+            </a:prstGeom>
+          </p:spPr>
+          <p:style>
+            <a:lnRef idx="3">
+              <a:schemeClr val="lt1"/>
+            </a:lnRef>
+            <a:fillRef idx="1">
+              <a:schemeClr val="accent4"/>
+            </a:fillRef>
+            <a:effectRef idx="1">
+              <a:schemeClr val="accent4"/>
+            </a:effectRef>
+            <a:fontRef idx="minor">
+              <a:schemeClr val="lt1"/>
+            </a:fontRef>
+          </p:style>
+          <p:txBody>
+            <a:bodyPr rot="0" spcFirstLastPara="0" vert="horz" wrap="square" lIns="91440" tIns="45720" rIns="91440" bIns="45720" numCol="1" spcCol="0" rtlCol="0" fromWordArt="0" anchor="ctr" anchorCtr="0" forceAA="0" compatLnSpc="1">
+              <a:prstTxWarp prst="textNoShape">
                 <a:avLst/>
-              </a:prstGeom>
-            </p:spPr>
-            <p:style>
-              <a:lnRef idx="2">
-                <a:schemeClr val="accent4"/>
-              </a:lnRef>
-              <a:fillRef idx="1">
-                <a:schemeClr val="lt1"/>
-              </a:fillRef>
-              <a:effectRef idx="0">
-                <a:schemeClr val="accent4"/>
-              </a:effectRef>
-              <a:fontRef idx="minor">
-                <a:schemeClr val="dk1"/>
-              </a:fontRef>
-            </p:style>
-            <p:txBody>
-              <a:bodyPr rot="0" spcFirstLastPara="0" vert="horz" wrap="square" lIns="0" tIns="0" rIns="0" bIns="0" numCol="1" spcCol="0" rtlCol="0" fromWordArt="0" anchor="ctr" anchorCtr="0" forceAA="0" compatLnSpc="1">
-                <a:prstTxWarp prst="textNoShape">
-                  <a:avLst/>
-                </a:prstTxWarp>
-                <a:noAutofit/>
-              </a:bodyPr>
-              <a:lstStyle/>
-              <a:p>
-                <a:pPr indent="76200">
-                  <a:spcAft>
-                    <a:spcPts val="0"/>
-                  </a:spcAft>
-                </a:pPr>
-                <a:r>
-                  <a:rPr lang="en-US" sz="1200" b="1" kern="100" dirty="0" smtClean="0">
-                    <a:effectLst/>
-                    <a:ea typeface="新細明體" panose="02020500000000000000" pitchFamily="18" charset="-120"/>
-                    <a:cs typeface="Times New Roman" panose="02020603050405020304" pitchFamily="18" charset="0"/>
-                  </a:rPr>
-                  <a:t>20%</a:t>
-                </a:r>
-                <a:endParaRPr lang="zh-TW" sz="1200" kern="100" dirty="0">
-                  <a:effectLst/>
-                  <a:ea typeface="新細明體" panose="02020500000000000000" pitchFamily="18" charset="-120"/>
-                  <a:cs typeface="Times New Roman" panose="02020603050405020304" pitchFamily="18" charset="0"/>
-                </a:endParaRPr>
-              </a:p>
-            </p:txBody>
-          </p:sp>
-          <p:sp>
-            <p:nvSpPr>
-              <p:cNvPr id="60" name="等腰三角形 59"/>
-              <p:cNvSpPr/>
-              <p:nvPr/>
-            </p:nvSpPr>
-            <p:spPr>
-              <a:xfrm rot="10800000">
-                <a:off x="-115805" y="71562"/>
-                <a:ext cx="174928" cy="143123"/>
-              </a:xfrm>
-              <a:prstGeom prst="triangle">
-                <a:avLst/>
-              </a:prstGeom>
-            </p:spPr>
-            <p:style>
-              <a:lnRef idx="3">
-                <a:schemeClr val="lt1"/>
-              </a:lnRef>
-              <a:fillRef idx="1">
-                <a:schemeClr val="accent4"/>
-              </a:fillRef>
-              <a:effectRef idx="1">
-                <a:schemeClr val="accent4"/>
-              </a:effectRef>
-              <a:fontRef idx="minor">
-                <a:schemeClr val="lt1"/>
-              </a:fontRef>
-            </p:style>
-            <p:txBody>
-              <a:bodyPr rot="0" spcFirstLastPara="0" vert="horz" wrap="square" lIns="91440" tIns="45720" rIns="91440" bIns="45720" numCol="1" spcCol="0" rtlCol="0" fromWordArt="0" anchor="ctr" anchorCtr="0" forceAA="0" compatLnSpc="1">
-                <a:prstTxWarp prst="textNoShape">
-                  <a:avLst/>
-                </a:prstTxWarp>
-                <a:noAutofit/>
-              </a:bodyPr>
-              <a:lstStyle/>
-              <a:p>
-                <a:endParaRPr lang="zh-TW" altLang="en-US"/>
-              </a:p>
-            </p:txBody>
-          </p:sp>
-        </p:grpSp>
+              </a:prstTxWarp>
+              <a:noAutofit/>
+            </a:bodyPr>
+            <a:lstStyle/>
+            <a:p>
+              <a:endParaRPr lang="zh-TW" altLang="en-US"/>
+            </a:p>
+          </p:txBody>
+        </p:sp>
       </p:grpSp>
       <p:grpSp>
         <p:nvGrpSpPr>
@@ -7113,12 +7115,16 @@
               </a:spcAft>
             </a:pPr>
             <a:r>
-              <a:rPr lang="zh-TW" altLang="en-US" sz="1200" kern="100" dirty="0" smtClean="0">
-                <a:effectLst/>
-                <a:ea typeface="新細明體" panose="02020500000000000000" pitchFamily="18" charset="-120"/>
+              <a:rPr lang="en-US" altLang="zh-TW" sz="1200" kern="100" dirty="0" smtClean="0">
                 <a:cs typeface="Times New Roman" panose="02020603050405020304" pitchFamily="18" charset="0"/>
               </a:rPr>
-              <a:t>儲存收件人陣列</a:t>
+              <a:t>Statements</a:t>
+            </a:r>
+            <a:r>
+              <a:rPr lang="zh-TW" altLang="en-US" sz="1200" kern="100" dirty="0" smtClean="0">
+                <a:cs typeface="Times New Roman" panose="02020603050405020304" pitchFamily="18" charset="0"/>
+              </a:rPr>
+              <a:t>區塊</a:t>
             </a:r>
             <a:endParaRPr lang="zh-TW" sz="1200" kern="100" dirty="0">
               <a:effectLst/>
@@ -7246,16 +7252,16 @@
       </p:grpSp>
       <p:grpSp>
         <p:nvGrpSpPr>
-          <p:cNvPr id="95" name="群組 94"/>
+          <p:cNvPr id="2" name="群組 1"/>
           <p:cNvGrpSpPr/>
           <p:nvPr/>
         </p:nvGrpSpPr>
         <p:grpSpPr>
           <a:xfrm>
-            <a:off x="4642500" y="3867784"/>
-            <a:ext cx="3221340" cy="413020"/>
-            <a:chOff x="2767980" y="4235180"/>
-            <a:chExt cx="3057510" cy="269924"/>
+            <a:off x="4077786" y="3867784"/>
+            <a:ext cx="2785294" cy="413020"/>
+            <a:chOff x="4077786" y="3867784"/>
+            <a:chExt cx="2785294" cy="413020"/>
           </a:xfrm>
         </p:grpSpPr>
         <p:sp>
@@ -7266,8 +7272,8 @@
           </p:nvSpPr>
           <p:spPr>
             <a:xfrm>
-              <a:off x="2767980" y="4235180"/>
-              <a:ext cx="3057510" cy="269924"/>
+              <a:off x="4077786" y="3867784"/>
+              <a:ext cx="2785294" cy="413020"/>
             </a:xfrm>
             <a:custGeom>
               <a:avLst/>
@@ -7555,20 +7561,12 @@
                 </a:spcAft>
               </a:pPr>
               <a:r>
-                <a:rPr lang="zh-TW" altLang="en-US" sz="1000" kern="100" dirty="0" smtClean="0">
-                  <a:effectLst/>
-                  <a:ea typeface="新細明體" panose="02020500000000000000" pitchFamily="18" charset="-120"/>
-                  <a:cs typeface="Times New Roman" panose="02020603050405020304" pitchFamily="18" charset="0"/>
-                </a:rPr>
-                <a:t>開始</a:t>
-              </a:r>
-              <a:r>
                 <a:rPr lang="en-US" altLang="zh-TW" sz="1000" kern="100" dirty="0" smtClean="0">
                   <a:effectLst/>
                   <a:ea typeface="新細明體" panose="02020500000000000000" pitchFamily="18" charset="-120"/>
                   <a:cs typeface="Times New Roman" panose="02020603050405020304" pitchFamily="18" charset="0"/>
                 </a:rPr>
-                <a:t>A*</a:t>
+                <a:t>AI</a:t>
               </a:r>
               <a:r>
                 <a:rPr lang="zh-TW" altLang="en-US" sz="1000" kern="100" dirty="0" smtClean="0">
@@ -7576,7 +7574,7 @@
                   <a:ea typeface="新細明體" panose="02020500000000000000" pitchFamily="18" charset="-120"/>
                   <a:cs typeface="Times New Roman" panose="02020603050405020304" pitchFamily="18" charset="0"/>
                 </a:rPr>
-                <a:t>路徑規劃</a:t>
+                <a:t>識別模式切換為</a:t>
               </a:r>
               <a:r>
                 <a:rPr lang="en-US" altLang="zh-TW" sz="1000" kern="100" dirty="0" smtClean="0">
@@ -7585,14 +7583,6 @@
                   <a:cs typeface="Times New Roman" panose="02020603050405020304" pitchFamily="18" charset="0"/>
                 </a:rPr>
                 <a:t>:</a:t>
-              </a:r>
-              <a:r>
-                <a:rPr lang="zh-TW" altLang="en-US" sz="1000" kern="100" dirty="0" smtClean="0">
-                  <a:effectLst/>
-                  <a:ea typeface="新細明體" panose="02020500000000000000" pitchFamily="18" charset="-120"/>
-                  <a:cs typeface="Times New Roman" panose="02020603050405020304" pitchFamily="18" charset="0"/>
-                </a:rPr>
-                <a:t> 起點                          終點</a:t>
               </a:r>
               <a:endParaRPr lang="zh-TW" sz="1000" kern="100" dirty="0">
                 <a:effectLst/>
@@ -7604,28 +7594,28 @@
         </p:sp>
         <p:grpSp>
           <p:nvGrpSpPr>
-            <p:cNvPr id="87" name="群組 86"/>
+            <p:cNvPr id="92" name="群組 91"/>
             <p:cNvGrpSpPr/>
             <p:nvPr/>
           </p:nvGrpSpPr>
           <p:grpSpPr>
             <a:xfrm>
-              <a:off x="4077786" y="4277537"/>
-              <a:ext cx="667144" cy="152442"/>
-              <a:chOff x="-260662" y="0"/>
-              <a:chExt cx="713887" cy="238539"/>
+              <a:off x="5236526" y="3935730"/>
+              <a:ext cx="1502997" cy="233257"/>
+              <a:chOff x="-1073284" y="0"/>
+              <a:chExt cx="1526510" cy="238539"/>
             </a:xfrm>
           </p:grpSpPr>
           <p:sp>
             <p:nvSpPr>
-              <p:cNvPr id="88" name="圓角矩形 87"/>
+              <p:cNvPr id="93" name="圓角矩形 92"/>
               <p:cNvSpPr/>
               <p:nvPr/>
             </p:nvSpPr>
             <p:spPr>
               <a:xfrm>
-                <a:off x="-260662" y="0"/>
-                <a:ext cx="713887" cy="238539"/>
+                <a:off x="-1073284" y="0"/>
+                <a:ext cx="1526510" cy="238539"/>
               </a:xfrm>
               <a:prstGeom prst="roundRect">
                 <a:avLst/>
@@ -7660,126 +7650,10 @@
                   </a:spcAft>
                 </a:pPr>
                 <a:r>
-                  <a:rPr lang="zh-TW" altLang="en-US" sz="1000" kern="100" dirty="0" smtClean="0">
-                    <a:ea typeface="新細明體" panose="02020500000000000000" pitchFamily="18" charset="-120"/>
+                  <a:rPr lang="en-US" altLang="zh-TW" sz="1000" kern="100" dirty="0" err="1">
                     <a:cs typeface="Times New Roman" panose="02020603050405020304" pitchFamily="18" charset="0"/>
                   </a:rPr>
-                  <a:t>物流站</a:t>
-                </a:r>
-                <a:endParaRPr lang="zh-TW" sz="1000" kern="100" dirty="0">
-                  <a:effectLst/>
-                  <a:ea typeface="新細明體" panose="02020500000000000000" pitchFamily="18" charset="-120"/>
-                  <a:cs typeface="Times New Roman" panose="02020603050405020304" pitchFamily="18" charset="0"/>
-                </a:endParaRPr>
-              </a:p>
-            </p:txBody>
-          </p:sp>
-          <p:sp>
-            <p:nvSpPr>
-              <p:cNvPr id="89" name="等腰三角形 88"/>
-              <p:cNvSpPr/>
-              <p:nvPr/>
-            </p:nvSpPr>
-            <p:spPr>
-              <a:xfrm rot="10800000">
-                <a:off x="246491" y="71562"/>
-                <a:ext cx="174928" cy="143123"/>
-              </a:xfrm>
-              <a:prstGeom prst="triangle">
-                <a:avLst/>
-              </a:prstGeom>
-            </p:spPr>
-            <p:style>
-              <a:lnRef idx="3">
-                <a:schemeClr val="lt1"/>
-              </a:lnRef>
-              <a:fillRef idx="1">
-                <a:schemeClr val="accent4"/>
-              </a:fillRef>
-              <a:effectRef idx="1">
-                <a:schemeClr val="accent4"/>
-              </a:effectRef>
-              <a:fontRef idx="minor">
-                <a:schemeClr val="lt1"/>
-              </a:fontRef>
-            </p:style>
-            <p:txBody>
-              <a:bodyPr rot="0" spcFirstLastPara="0" vert="horz" wrap="square" lIns="91440" tIns="45720" rIns="91440" bIns="45720" numCol="1" spcCol="0" rtlCol="0" fromWordArt="0" anchor="ctr" anchorCtr="0" forceAA="0" compatLnSpc="1">
-                <a:prstTxWarp prst="textNoShape">
-                  <a:avLst/>
-                </a:prstTxWarp>
-                <a:noAutofit/>
-              </a:bodyPr>
-              <a:lstStyle/>
-              <a:p>
-                <a:endParaRPr lang="zh-TW" altLang="en-US" sz="1000"/>
-              </a:p>
-            </p:txBody>
-          </p:sp>
-        </p:grpSp>
-        <p:grpSp>
-          <p:nvGrpSpPr>
-            <p:cNvPr id="92" name="群組 91"/>
-            <p:cNvGrpSpPr/>
-            <p:nvPr/>
-          </p:nvGrpSpPr>
-          <p:grpSpPr>
-            <a:xfrm>
-              <a:off x="5105444" y="4280267"/>
-              <a:ext cx="667144" cy="152442"/>
-              <a:chOff x="-260662" y="0"/>
-              <a:chExt cx="713887" cy="238539"/>
-            </a:xfrm>
-          </p:grpSpPr>
-          <p:sp>
-            <p:nvSpPr>
-              <p:cNvPr id="93" name="圓角矩形 92"/>
-              <p:cNvSpPr/>
-              <p:nvPr/>
-            </p:nvSpPr>
-            <p:spPr>
-              <a:xfrm>
-                <a:off x="-260662" y="0"/>
-                <a:ext cx="713887" cy="238539"/>
-              </a:xfrm>
-              <a:prstGeom prst="roundRect">
-                <a:avLst/>
-              </a:prstGeom>
-            </p:spPr>
-            <p:style>
-              <a:lnRef idx="2">
-                <a:schemeClr val="accent4"/>
-              </a:lnRef>
-              <a:fillRef idx="1">
-                <a:schemeClr val="lt1"/>
-              </a:fillRef>
-              <a:effectRef idx="0">
-                <a:schemeClr val="accent4"/>
-              </a:effectRef>
-              <a:fontRef idx="minor">
-                <a:schemeClr val="dk1"/>
-              </a:fontRef>
-            </p:style>
-            <p:txBody>
-              <a:bodyPr rot="0" spcFirstLastPara="0" vert="horz" wrap="square" lIns="0" tIns="0" rIns="0" bIns="0" numCol="1" spcCol="0" rtlCol="0" fromWordArt="0" anchor="ctr" anchorCtr="0" forceAA="0" compatLnSpc="1">
-                <a:prstTxWarp prst="textNoShape">
-                  <a:avLst/>
-                </a:prstTxWarp>
-                <a:noAutofit/>
-              </a:bodyPr>
-              <a:lstStyle/>
-              <a:p>
-                <a:pPr indent="63500">
-                  <a:spcAft>
-                    <a:spcPts val="0"/>
-                  </a:spcAft>
-                </a:pPr>
-                <a:r>
-                  <a:rPr lang="zh-TW" altLang="en-US" sz="1000" kern="100" dirty="0" smtClean="0">
-                    <a:ea typeface="新細明體" panose="02020500000000000000" pitchFamily="18" charset="-120"/>
-                    <a:cs typeface="Times New Roman" panose="02020603050405020304" pitchFamily="18" charset="0"/>
-                  </a:rPr>
-                  <a:t>收件人</a:t>
+                  <a:t>ALGORITHM_OBJECT</a:t>
                 </a:r>
                 <a:endParaRPr lang="zh-TW" sz="1000" kern="100" dirty="0">
                   <a:effectLst/>
@@ -8685,11 +8559,10 @@
               </a:pPr>
               <a:r>
                 <a:rPr lang="zh-TW" altLang="en-US" sz="1000" kern="100" dirty="0" smtClean="0">
-                  <a:effectLst/>
                   <a:ea typeface="新細明體" panose="02020500000000000000" pitchFamily="18" charset="-120"/>
                   <a:cs typeface="Times New Roman" panose="02020603050405020304" pitchFamily="18" charset="0"/>
                 </a:rPr>
-                <a:t>車子執行</a:t>
+                <a:t>車頭轉向</a:t>
               </a:r>
               <a:endParaRPr lang="zh-TW" sz="1000" kern="100" dirty="0">
                 <a:effectLst/>
@@ -8761,7 +8634,7 @@
                     <a:ea typeface="新細明體" panose="02020500000000000000" pitchFamily="18" charset="-120"/>
                     <a:cs typeface="Times New Roman" panose="02020603050405020304" pitchFamily="18" charset="0"/>
                   </a:rPr>
-                  <a:t>停車</a:t>
+                  <a:t>朝下</a:t>
                 </a:r>
                 <a:endParaRPr lang="zh-TW" sz="1000" kern="100" dirty="0">
                   <a:effectLst/>
@@ -9224,10 +9097,2868 @@
           </a:p>
         </p:txBody>
       </p:sp>
+      <p:sp>
+        <p:nvSpPr>
+          <p:cNvPr id="56" name="圓角矩形 4"/>
+          <p:cNvSpPr/>
+          <p:nvPr/>
+        </p:nvSpPr>
+        <p:spPr>
+          <a:xfrm>
+            <a:off x="4304262" y="4951640"/>
+            <a:ext cx="2435260" cy="421640"/>
+          </a:xfrm>
+          <a:custGeom>
+            <a:avLst/>
+            <a:gdLst>
+              <a:gd name="connsiteX0" fmla="*/ 0 w 4424680"/>
+              <a:gd name="connsiteY0" fmla="*/ 60115 h 360680"/>
+              <a:gd name="connsiteX1" fmla="*/ 60115 w 4424680"/>
+              <a:gd name="connsiteY1" fmla="*/ 0 h 360680"/>
+              <a:gd name="connsiteX2" fmla="*/ 4364565 w 4424680"/>
+              <a:gd name="connsiteY2" fmla="*/ 0 h 360680"/>
+              <a:gd name="connsiteX3" fmla="*/ 4424680 w 4424680"/>
+              <a:gd name="connsiteY3" fmla="*/ 60115 h 360680"/>
+              <a:gd name="connsiteX4" fmla="*/ 4424680 w 4424680"/>
+              <a:gd name="connsiteY4" fmla="*/ 300565 h 360680"/>
+              <a:gd name="connsiteX5" fmla="*/ 4364565 w 4424680"/>
+              <a:gd name="connsiteY5" fmla="*/ 360680 h 360680"/>
+              <a:gd name="connsiteX6" fmla="*/ 60115 w 4424680"/>
+              <a:gd name="connsiteY6" fmla="*/ 360680 h 360680"/>
+              <a:gd name="connsiteX7" fmla="*/ 0 w 4424680"/>
+              <a:gd name="connsiteY7" fmla="*/ 300565 h 360680"/>
+              <a:gd name="connsiteX8" fmla="*/ 0 w 4424680"/>
+              <a:gd name="connsiteY8" fmla="*/ 60115 h 360680"/>
+              <a:gd name="connsiteX0" fmla="*/ 0 w 4424680"/>
+              <a:gd name="connsiteY0" fmla="*/ 60115 h 360680"/>
+              <a:gd name="connsiteX1" fmla="*/ 60115 w 4424680"/>
+              <a:gd name="connsiteY1" fmla="*/ 0 h 360680"/>
+              <a:gd name="connsiteX2" fmla="*/ 279400 w 4424680"/>
+              <a:gd name="connsiteY2" fmla="*/ 0 h 360680"/>
+              <a:gd name="connsiteX3" fmla="*/ 4364565 w 4424680"/>
+              <a:gd name="connsiteY3" fmla="*/ 0 h 360680"/>
+              <a:gd name="connsiteX4" fmla="*/ 4424680 w 4424680"/>
+              <a:gd name="connsiteY4" fmla="*/ 60115 h 360680"/>
+              <a:gd name="connsiteX5" fmla="*/ 4424680 w 4424680"/>
+              <a:gd name="connsiteY5" fmla="*/ 300565 h 360680"/>
+              <a:gd name="connsiteX6" fmla="*/ 4364565 w 4424680"/>
+              <a:gd name="connsiteY6" fmla="*/ 360680 h 360680"/>
+              <a:gd name="connsiteX7" fmla="*/ 60115 w 4424680"/>
+              <a:gd name="connsiteY7" fmla="*/ 360680 h 360680"/>
+              <a:gd name="connsiteX8" fmla="*/ 0 w 4424680"/>
+              <a:gd name="connsiteY8" fmla="*/ 300565 h 360680"/>
+              <a:gd name="connsiteX9" fmla="*/ 0 w 4424680"/>
+              <a:gd name="connsiteY9" fmla="*/ 60115 h 360680"/>
+              <a:gd name="connsiteX0" fmla="*/ 0 w 4424680"/>
+              <a:gd name="connsiteY0" fmla="*/ 60115 h 360680"/>
+              <a:gd name="connsiteX1" fmla="*/ 60115 w 4424680"/>
+              <a:gd name="connsiteY1" fmla="*/ 0 h 360680"/>
+              <a:gd name="connsiteX2" fmla="*/ 4364565 w 4424680"/>
+              <a:gd name="connsiteY2" fmla="*/ 0 h 360680"/>
+              <a:gd name="connsiteX3" fmla="*/ 4424680 w 4424680"/>
+              <a:gd name="connsiteY3" fmla="*/ 60115 h 360680"/>
+              <a:gd name="connsiteX4" fmla="*/ 4424680 w 4424680"/>
+              <a:gd name="connsiteY4" fmla="*/ 300565 h 360680"/>
+              <a:gd name="connsiteX5" fmla="*/ 4364565 w 4424680"/>
+              <a:gd name="connsiteY5" fmla="*/ 360680 h 360680"/>
+              <a:gd name="connsiteX6" fmla="*/ 60115 w 4424680"/>
+              <a:gd name="connsiteY6" fmla="*/ 360680 h 360680"/>
+              <a:gd name="connsiteX7" fmla="*/ 0 w 4424680"/>
+              <a:gd name="connsiteY7" fmla="*/ 300565 h 360680"/>
+              <a:gd name="connsiteX8" fmla="*/ 0 w 4424680"/>
+              <a:gd name="connsiteY8" fmla="*/ 60115 h 360680"/>
+              <a:gd name="connsiteX0" fmla="*/ 0 w 4424680"/>
+              <a:gd name="connsiteY0" fmla="*/ 60115 h 360680"/>
+              <a:gd name="connsiteX1" fmla="*/ 60115 w 4424680"/>
+              <a:gd name="connsiteY1" fmla="*/ 0 h 360680"/>
+              <a:gd name="connsiteX2" fmla="*/ 350520 w 4424680"/>
+              <a:gd name="connsiteY2" fmla="*/ 0 h 360680"/>
+              <a:gd name="connsiteX3" fmla="*/ 4364565 w 4424680"/>
+              <a:gd name="connsiteY3" fmla="*/ 0 h 360680"/>
+              <a:gd name="connsiteX4" fmla="*/ 4424680 w 4424680"/>
+              <a:gd name="connsiteY4" fmla="*/ 60115 h 360680"/>
+              <a:gd name="connsiteX5" fmla="*/ 4424680 w 4424680"/>
+              <a:gd name="connsiteY5" fmla="*/ 300565 h 360680"/>
+              <a:gd name="connsiteX6" fmla="*/ 4364565 w 4424680"/>
+              <a:gd name="connsiteY6" fmla="*/ 360680 h 360680"/>
+              <a:gd name="connsiteX7" fmla="*/ 60115 w 4424680"/>
+              <a:gd name="connsiteY7" fmla="*/ 360680 h 360680"/>
+              <a:gd name="connsiteX8" fmla="*/ 0 w 4424680"/>
+              <a:gd name="connsiteY8" fmla="*/ 300565 h 360680"/>
+              <a:gd name="connsiteX9" fmla="*/ 0 w 4424680"/>
+              <a:gd name="connsiteY9" fmla="*/ 60115 h 360680"/>
+              <a:gd name="connsiteX0" fmla="*/ 0 w 4424680"/>
+              <a:gd name="connsiteY0" fmla="*/ 121075 h 421640"/>
+              <a:gd name="connsiteX1" fmla="*/ 60115 w 4424680"/>
+              <a:gd name="connsiteY1" fmla="*/ 60960 h 421640"/>
+              <a:gd name="connsiteX2" fmla="*/ 350520 w 4424680"/>
+              <a:gd name="connsiteY2" fmla="*/ 60960 h 421640"/>
+              <a:gd name="connsiteX3" fmla="*/ 4364565 w 4424680"/>
+              <a:gd name="connsiteY3" fmla="*/ 60960 h 421640"/>
+              <a:gd name="connsiteX4" fmla="*/ 4424680 w 4424680"/>
+              <a:gd name="connsiteY4" fmla="*/ 121075 h 421640"/>
+              <a:gd name="connsiteX5" fmla="*/ 4424680 w 4424680"/>
+              <a:gd name="connsiteY5" fmla="*/ 361525 h 421640"/>
+              <a:gd name="connsiteX6" fmla="*/ 4364565 w 4424680"/>
+              <a:gd name="connsiteY6" fmla="*/ 421640 h 421640"/>
+              <a:gd name="connsiteX7" fmla="*/ 60115 w 4424680"/>
+              <a:gd name="connsiteY7" fmla="*/ 421640 h 421640"/>
+              <a:gd name="connsiteX8" fmla="*/ 0 w 4424680"/>
+              <a:gd name="connsiteY8" fmla="*/ 361525 h 421640"/>
+              <a:gd name="connsiteX9" fmla="*/ 0 w 4424680"/>
+              <a:gd name="connsiteY9" fmla="*/ 121075 h 421640"/>
+              <a:gd name="connsiteX0" fmla="*/ 0 w 4424680"/>
+              <a:gd name="connsiteY0" fmla="*/ 121075 h 421640"/>
+              <a:gd name="connsiteX1" fmla="*/ 60115 w 4424680"/>
+              <a:gd name="connsiteY1" fmla="*/ 60960 h 421640"/>
+              <a:gd name="connsiteX2" fmla="*/ 350520 w 4424680"/>
+              <a:gd name="connsiteY2" fmla="*/ 60960 h 421640"/>
+              <a:gd name="connsiteX3" fmla="*/ 4364565 w 4424680"/>
+              <a:gd name="connsiteY3" fmla="*/ 60960 h 421640"/>
+              <a:gd name="connsiteX4" fmla="*/ 4424680 w 4424680"/>
+              <a:gd name="connsiteY4" fmla="*/ 121075 h 421640"/>
+              <a:gd name="connsiteX5" fmla="*/ 4424680 w 4424680"/>
+              <a:gd name="connsiteY5" fmla="*/ 361525 h 421640"/>
+              <a:gd name="connsiteX6" fmla="*/ 4364565 w 4424680"/>
+              <a:gd name="connsiteY6" fmla="*/ 421640 h 421640"/>
+              <a:gd name="connsiteX7" fmla="*/ 330200 w 4424680"/>
+              <a:gd name="connsiteY7" fmla="*/ 421640 h 421640"/>
+              <a:gd name="connsiteX8" fmla="*/ 60115 w 4424680"/>
+              <a:gd name="connsiteY8" fmla="*/ 421640 h 421640"/>
+              <a:gd name="connsiteX9" fmla="*/ 0 w 4424680"/>
+              <a:gd name="connsiteY9" fmla="*/ 361525 h 421640"/>
+              <a:gd name="connsiteX10" fmla="*/ 0 w 4424680"/>
+              <a:gd name="connsiteY10" fmla="*/ 121075 h 421640"/>
+              <a:gd name="connsiteX0" fmla="*/ 0 w 4424680"/>
+              <a:gd name="connsiteY0" fmla="*/ 60115 h 360680"/>
+              <a:gd name="connsiteX1" fmla="*/ 60115 w 4424680"/>
+              <a:gd name="connsiteY1" fmla="*/ 0 h 360680"/>
+              <a:gd name="connsiteX2" fmla="*/ 350520 w 4424680"/>
+              <a:gd name="connsiteY2" fmla="*/ 0 h 360680"/>
+              <a:gd name="connsiteX3" fmla="*/ 4364565 w 4424680"/>
+              <a:gd name="connsiteY3" fmla="*/ 0 h 360680"/>
+              <a:gd name="connsiteX4" fmla="*/ 4424680 w 4424680"/>
+              <a:gd name="connsiteY4" fmla="*/ 60115 h 360680"/>
+              <a:gd name="connsiteX5" fmla="*/ 4424680 w 4424680"/>
+              <a:gd name="connsiteY5" fmla="*/ 300565 h 360680"/>
+              <a:gd name="connsiteX6" fmla="*/ 4364565 w 4424680"/>
+              <a:gd name="connsiteY6" fmla="*/ 360680 h 360680"/>
+              <a:gd name="connsiteX7" fmla="*/ 330200 w 4424680"/>
+              <a:gd name="connsiteY7" fmla="*/ 360680 h 360680"/>
+              <a:gd name="connsiteX8" fmla="*/ 60115 w 4424680"/>
+              <a:gd name="connsiteY8" fmla="*/ 360680 h 360680"/>
+              <a:gd name="connsiteX9" fmla="*/ 0 w 4424680"/>
+              <a:gd name="connsiteY9" fmla="*/ 300565 h 360680"/>
+              <a:gd name="connsiteX10" fmla="*/ 0 w 4424680"/>
+              <a:gd name="connsiteY10" fmla="*/ 60115 h 360680"/>
+              <a:gd name="connsiteX0" fmla="*/ 0 w 4424680"/>
+              <a:gd name="connsiteY0" fmla="*/ 60115 h 421640"/>
+              <a:gd name="connsiteX1" fmla="*/ 60115 w 4424680"/>
+              <a:gd name="connsiteY1" fmla="*/ 0 h 421640"/>
+              <a:gd name="connsiteX2" fmla="*/ 350520 w 4424680"/>
+              <a:gd name="connsiteY2" fmla="*/ 0 h 421640"/>
+              <a:gd name="connsiteX3" fmla="*/ 4364565 w 4424680"/>
+              <a:gd name="connsiteY3" fmla="*/ 0 h 421640"/>
+              <a:gd name="connsiteX4" fmla="*/ 4424680 w 4424680"/>
+              <a:gd name="connsiteY4" fmla="*/ 60115 h 421640"/>
+              <a:gd name="connsiteX5" fmla="*/ 4424680 w 4424680"/>
+              <a:gd name="connsiteY5" fmla="*/ 300565 h 421640"/>
+              <a:gd name="connsiteX6" fmla="*/ 4364565 w 4424680"/>
+              <a:gd name="connsiteY6" fmla="*/ 360680 h 421640"/>
+              <a:gd name="connsiteX7" fmla="*/ 330200 w 4424680"/>
+              <a:gd name="connsiteY7" fmla="*/ 360680 h 421640"/>
+              <a:gd name="connsiteX8" fmla="*/ 60115 w 4424680"/>
+              <a:gd name="connsiteY8" fmla="*/ 360680 h 421640"/>
+              <a:gd name="connsiteX9" fmla="*/ 0 w 4424680"/>
+              <a:gd name="connsiteY9" fmla="*/ 300565 h 421640"/>
+              <a:gd name="connsiteX10" fmla="*/ 0 w 4424680"/>
+              <a:gd name="connsiteY10" fmla="*/ 60115 h 421640"/>
+            </a:gdLst>
+            <a:ahLst/>
+            <a:cxnLst>
+              <a:cxn ang="0">
+                <a:pos x="connsiteX0" y="connsiteY0"/>
+              </a:cxn>
+              <a:cxn ang="0">
+                <a:pos x="connsiteX1" y="connsiteY1"/>
+              </a:cxn>
+              <a:cxn ang="0">
+                <a:pos x="connsiteX2" y="connsiteY2"/>
+              </a:cxn>
+              <a:cxn ang="0">
+                <a:pos x="connsiteX3" y="connsiteY3"/>
+              </a:cxn>
+              <a:cxn ang="0">
+                <a:pos x="connsiteX4" y="connsiteY4"/>
+              </a:cxn>
+              <a:cxn ang="0">
+                <a:pos x="connsiteX5" y="connsiteY5"/>
+              </a:cxn>
+              <a:cxn ang="0">
+                <a:pos x="connsiteX6" y="connsiteY6"/>
+              </a:cxn>
+              <a:cxn ang="0">
+                <a:pos x="connsiteX7" y="connsiteY7"/>
+              </a:cxn>
+              <a:cxn ang="0">
+                <a:pos x="connsiteX8" y="connsiteY8"/>
+              </a:cxn>
+              <a:cxn ang="0">
+                <a:pos x="connsiteX9" y="connsiteY9"/>
+              </a:cxn>
+              <a:cxn ang="0">
+                <a:pos x="connsiteX10" y="connsiteY10"/>
+              </a:cxn>
+            </a:cxnLst>
+            <a:rect l="l" t="t" r="r" b="b"/>
+            <a:pathLst>
+              <a:path w="4424680" h="421640">
+                <a:moveTo>
+                  <a:pt x="0" y="60115"/>
+                </a:moveTo>
+                <a:cubicBezTo>
+                  <a:pt x="0" y="26914"/>
+                  <a:pt x="26914" y="0"/>
+                  <a:pt x="60115" y="0"/>
+                </a:cubicBezTo>
+                <a:cubicBezTo>
+                  <a:pt x="156917" y="0"/>
+                  <a:pt x="207998" y="121920"/>
+                  <a:pt x="350520" y="0"/>
+                </a:cubicBezTo>
+                <a:lnTo>
+                  <a:pt x="4364565" y="0"/>
+                </a:lnTo>
+                <a:cubicBezTo>
+                  <a:pt x="4397766" y="0"/>
+                  <a:pt x="4424680" y="26914"/>
+                  <a:pt x="4424680" y="60115"/>
+                </a:cubicBezTo>
+                <a:lnTo>
+                  <a:pt x="4424680" y="300565"/>
+                </a:lnTo>
+                <a:cubicBezTo>
+                  <a:pt x="4424680" y="333766"/>
+                  <a:pt x="4397766" y="360680"/>
+                  <a:pt x="4364565" y="360680"/>
+                </a:cubicBezTo>
+                <a:lnTo>
+                  <a:pt x="330200" y="360680"/>
+                </a:lnTo>
+                <a:cubicBezTo>
+                  <a:pt x="138572" y="497840"/>
+                  <a:pt x="150143" y="360680"/>
+                  <a:pt x="60115" y="360680"/>
+                </a:cubicBezTo>
+                <a:cubicBezTo>
+                  <a:pt x="26914" y="360680"/>
+                  <a:pt x="0" y="333766"/>
+                  <a:pt x="0" y="300565"/>
+                </a:cubicBezTo>
+                <a:lnTo>
+                  <a:pt x="0" y="60115"/>
+                </a:lnTo>
+                <a:close/>
+              </a:path>
+            </a:pathLst>
+          </a:custGeom>
+        </p:spPr>
+        <p:style>
+          <a:lnRef idx="2">
+            <a:schemeClr val="accent1">
+              <a:shade val="50000"/>
+            </a:schemeClr>
+          </a:lnRef>
+          <a:fillRef idx="1">
+            <a:schemeClr val="accent1"/>
+          </a:fillRef>
+          <a:effectRef idx="0">
+            <a:schemeClr val="accent1"/>
+          </a:effectRef>
+          <a:fontRef idx="minor">
+            <a:schemeClr val="lt1"/>
+          </a:fontRef>
+        </p:style>
+        <p:txBody>
+          <a:bodyPr rot="0" spcFirstLastPara="0" vert="horz" wrap="square" lIns="91440" tIns="45720" rIns="91440" bIns="45720" numCol="1" spcCol="0" rtlCol="0" fromWordArt="0" anchor="ctr" anchorCtr="0" forceAA="0" compatLnSpc="1">
+            <a:prstTxWarp prst="textNoShape">
+              <a:avLst/>
+            </a:prstTxWarp>
+            <a:noAutofit/>
+          </a:bodyPr>
+          <a:lstStyle/>
+          <a:p>
+            <a:pPr>
+              <a:spcAft>
+                <a:spcPts val="0"/>
+              </a:spcAft>
+            </a:pPr>
+            <a:r>
+              <a:rPr lang="en-US" altLang="zh-TW" sz="1200" kern="100" dirty="0">
+                <a:solidFill>
+                  <a:srgbClr val="FFFFFF"/>
+                </a:solidFill>
+                <a:cs typeface="Times New Roman" panose="02020603050405020304" pitchFamily="18" charset="0"/>
+              </a:rPr>
+              <a:t>AI</a:t>
+            </a:r>
+            <a:r>
+              <a:rPr lang="zh-TW" altLang="en-US" sz="1200" kern="100" dirty="0">
+                <a:solidFill>
+                  <a:srgbClr val="FFFFFF"/>
+                </a:solidFill>
+                <a:cs typeface="Times New Roman" panose="02020603050405020304" pitchFamily="18" charset="0"/>
+              </a:rPr>
+              <a:t>鏡頭朝向</a:t>
+            </a:r>
+            <a:r>
+              <a:rPr lang="en-US" altLang="zh-TW" sz="1200" kern="100" dirty="0">
+                <a:solidFill>
+                  <a:srgbClr val="FFFFFF"/>
+                </a:solidFill>
+                <a:cs typeface="Times New Roman" panose="02020603050405020304" pitchFamily="18" charset="0"/>
+              </a:rPr>
+              <a:t>,</a:t>
+            </a:r>
+            <a:r>
+              <a:rPr lang="zh-TW" altLang="en-US" sz="1200" kern="100" dirty="0">
+                <a:solidFill>
+                  <a:srgbClr val="FFFFFF"/>
+                </a:solidFill>
+                <a:cs typeface="Times New Roman" panose="02020603050405020304" pitchFamily="18" charset="0"/>
+              </a:rPr>
+              <a:t>準備人臉識別收貨人</a:t>
+            </a:r>
+            <a:endParaRPr lang="zh-TW" sz="1200" kern="100" dirty="0">
+              <a:effectLst/>
+              <a:ea typeface="新細明體" panose="02020500000000000000" pitchFamily="18" charset="-120"/>
+              <a:cs typeface="Times New Roman" panose="02020603050405020304" pitchFamily="18" charset="0"/>
+            </a:endParaRPr>
+          </a:p>
+        </p:txBody>
+      </p:sp>
+      <p:sp>
+        <p:nvSpPr>
+          <p:cNvPr id="57" name="圓角矩形 48"/>
+          <p:cNvSpPr/>
+          <p:nvPr/>
+        </p:nvSpPr>
+        <p:spPr>
+          <a:xfrm>
+            <a:off x="7005552" y="3012977"/>
+            <a:ext cx="1463040" cy="263525"/>
+          </a:xfrm>
+          <a:custGeom>
+            <a:avLst/>
+            <a:gdLst>
+              <a:gd name="connsiteX0" fmla="*/ 0 w 4506685"/>
+              <a:gd name="connsiteY0" fmla="*/ 62594 h 375557"/>
+              <a:gd name="connsiteX1" fmla="*/ 62594 w 4506685"/>
+              <a:gd name="connsiteY1" fmla="*/ 0 h 375557"/>
+              <a:gd name="connsiteX2" fmla="*/ 4444091 w 4506685"/>
+              <a:gd name="connsiteY2" fmla="*/ 0 h 375557"/>
+              <a:gd name="connsiteX3" fmla="*/ 4506685 w 4506685"/>
+              <a:gd name="connsiteY3" fmla="*/ 62594 h 375557"/>
+              <a:gd name="connsiteX4" fmla="*/ 4506685 w 4506685"/>
+              <a:gd name="connsiteY4" fmla="*/ 312963 h 375557"/>
+              <a:gd name="connsiteX5" fmla="*/ 4444091 w 4506685"/>
+              <a:gd name="connsiteY5" fmla="*/ 375557 h 375557"/>
+              <a:gd name="connsiteX6" fmla="*/ 62594 w 4506685"/>
+              <a:gd name="connsiteY6" fmla="*/ 375557 h 375557"/>
+              <a:gd name="connsiteX7" fmla="*/ 0 w 4506685"/>
+              <a:gd name="connsiteY7" fmla="*/ 312963 h 375557"/>
+              <a:gd name="connsiteX8" fmla="*/ 0 w 4506685"/>
+              <a:gd name="connsiteY8" fmla="*/ 62594 h 375557"/>
+              <a:gd name="connsiteX0" fmla="*/ 0 w 4506685"/>
+              <a:gd name="connsiteY0" fmla="*/ 62594 h 375557"/>
+              <a:gd name="connsiteX1" fmla="*/ 62594 w 4506685"/>
+              <a:gd name="connsiteY1" fmla="*/ 0 h 375557"/>
+              <a:gd name="connsiteX2" fmla="*/ 4444091 w 4506685"/>
+              <a:gd name="connsiteY2" fmla="*/ 0 h 375557"/>
+              <a:gd name="connsiteX3" fmla="*/ 4506685 w 4506685"/>
+              <a:gd name="connsiteY3" fmla="*/ 62594 h 375557"/>
+              <a:gd name="connsiteX4" fmla="*/ 4506685 w 4506685"/>
+              <a:gd name="connsiteY4" fmla="*/ 312963 h 375557"/>
+              <a:gd name="connsiteX5" fmla="*/ 4444091 w 4506685"/>
+              <a:gd name="connsiteY5" fmla="*/ 375557 h 375557"/>
+              <a:gd name="connsiteX6" fmla="*/ 62594 w 4506685"/>
+              <a:gd name="connsiteY6" fmla="*/ 375557 h 375557"/>
+              <a:gd name="connsiteX7" fmla="*/ 0 w 4506685"/>
+              <a:gd name="connsiteY7" fmla="*/ 312963 h 375557"/>
+              <a:gd name="connsiteX8" fmla="*/ 5443 w 4506685"/>
+              <a:gd name="connsiteY8" fmla="*/ 163286 h 375557"/>
+              <a:gd name="connsiteX9" fmla="*/ 0 w 4506685"/>
+              <a:gd name="connsiteY9" fmla="*/ 62594 h 375557"/>
+              <a:gd name="connsiteX0" fmla="*/ 310249 w 4816934"/>
+              <a:gd name="connsiteY0" fmla="*/ 62594 h 375557"/>
+              <a:gd name="connsiteX1" fmla="*/ 372843 w 4816934"/>
+              <a:gd name="connsiteY1" fmla="*/ 0 h 375557"/>
+              <a:gd name="connsiteX2" fmla="*/ 4754340 w 4816934"/>
+              <a:gd name="connsiteY2" fmla="*/ 0 h 375557"/>
+              <a:gd name="connsiteX3" fmla="*/ 4816934 w 4816934"/>
+              <a:gd name="connsiteY3" fmla="*/ 62594 h 375557"/>
+              <a:gd name="connsiteX4" fmla="*/ 4816934 w 4816934"/>
+              <a:gd name="connsiteY4" fmla="*/ 312963 h 375557"/>
+              <a:gd name="connsiteX5" fmla="*/ 4754340 w 4816934"/>
+              <a:gd name="connsiteY5" fmla="*/ 375557 h 375557"/>
+              <a:gd name="connsiteX6" fmla="*/ 372843 w 4816934"/>
+              <a:gd name="connsiteY6" fmla="*/ 375557 h 375557"/>
+              <a:gd name="connsiteX7" fmla="*/ 310249 w 4816934"/>
+              <a:gd name="connsiteY7" fmla="*/ 312963 h 375557"/>
+              <a:gd name="connsiteX8" fmla="*/ 0 w 4816934"/>
+              <a:gd name="connsiteY8" fmla="*/ 146945 h 375557"/>
+              <a:gd name="connsiteX9" fmla="*/ 310249 w 4816934"/>
+              <a:gd name="connsiteY9" fmla="*/ 62594 h 375557"/>
+              <a:gd name="connsiteX0" fmla="*/ 310249 w 4816934"/>
+              <a:gd name="connsiteY0" fmla="*/ 62594 h 375557"/>
+              <a:gd name="connsiteX1" fmla="*/ 372843 w 4816934"/>
+              <a:gd name="connsiteY1" fmla="*/ 0 h 375557"/>
+              <a:gd name="connsiteX2" fmla="*/ 4754340 w 4816934"/>
+              <a:gd name="connsiteY2" fmla="*/ 0 h 375557"/>
+              <a:gd name="connsiteX3" fmla="*/ 4816934 w 4816934"/>
+              <a:gd name="connsiteY3" fmla="*/ 62594 h 375557"/>
+              <a:gd name="connsiteX4" fmla="*/ 4816934 w 4816934"/>
+              <a:gd name="connsiteY4" fmla="*/ 312963 h 375557"/>
+              <a:gd name="connsiteX5" fmla="*/ 4754340 w 4816934"/>
+              <a:gd name="connsiteY5" fmla="*/ 375557 h 375557"/>
+              <a:gd name="connsiteX6" fmla="*/ 372843 w 4816934"/>
+              <a:gd name="connsiteY6" fmla="*/ 375557 h 375557"/>
+              <a:gd name="connsiteX7" fmla="*/ 310249 w 4816934"/>
+              <a:gd name="connsiteY7" fmla="*/ 312963 h 375557"/>
+              <a:gd name="connsiteX8" fmla="*/ 190500 w 4816934"/>
+              <a:gd name="connsiteY8" fmla="*/ 261257 h 375557"/>
+              <a:gd name="connsiteX9" fmla="*/ 0 w 4816934"/>
+              <a:gd name="connsiteY9" fmla="*/ 146945 h 375557"/>
+              <a:gd name="connsiteX10" fmla="*/ 310249 w 4816934"/>
+              <a:gd name="connsiteY10" fmla="*/ 62594 h 375557"/>
+              <a:gd name="connsiteX0" fmla="*/ 321154 w 4827839"/>
+              <a:gd name="connsiteY0" fmla="*/ 62594 h 375557"/>
+              <a:gd name="connsiteX1" fmla="*/ 383748 w 4827839"/>
+              <a:gd name="connsiteY1" fmla="*/ 0 h 375557"/>
+              <a:gd name="connsiteX2" fmla="*/ 4765245 w 4827839"/>
+              <a:gd name="connsiteY2" fmla="*/ 0 h 375557"/>
+              <a:gd name="connsiteX3" fmla="*/ 4827839 w 4827839"/>
+              <a:gd name="connsiteY3" fmla="*/ 62594 h 375557"/>
+              <a:gd name="connsiteX4" fmla="*/ 4827839 w 4827839"/>
+              <a:gd name="connsiteY4" fmla="*/ 312963 h 375557"/>
+              <a:gd name="connsiteX5" fmla="*/ 4765245 w 4827839"/>
+              <a:gd name="connsiteY5" fmla="*/ 375557 h 375557"/>
+              <a:gd name="connsiteX6" fmla="*/ 383748 w 4827839"/>
+              <a:gd name="connsiteY6" fmla="*/ 375557 h 375557"/>
+              <a:gd name="connsiteX7" fmla="*/ 321154 w 4827839"/>
+              <a:gd name="connsiteY7" fmla="*/ 312963 h 375557"/>
+              <a:gd name="connsiteX8" fmla="*/ 0 w 4827839"/>
+              <a:gd name="connsiteY8" fmla="*/ 321173 h 375557"/>
+              <a:gd name="connsiteX9" fmla="*/ 10905 w 4827839"/>
+              <a:gd name="connsiteY9" fmla="*/ 146945 h 375557"/>
+              <a:gd name="connsiteX10" fmla="*/ 321154 w 4827839"/>
+              <a:gd name="connsiteY10" fmla="*/ 62594 h 375557"/>
+              <a:gd name="connsiteX0" fmla="*/ 321154 w 4827839"/>
+              <a:gd name="connsiteY0" fmla="*/ 62594 h 375557"/>
+              <a:gd name="connsiteX1" fmla="*/ 383748 w 4827839"/>
+              <a:gd name="connsiteY1" fmla="*/ 0 h 375557"/>
+              <a:gd name="connsiteX2" fmla="*/ 4765245 w 4827839"/>
+              <a:gd name="connsiteY2" fmla="*/ 0 h 375557"/>
+              <a:gd name="connsiteX3" fmla="*/ 4827839 w 4827839"/>
+              <a:gd name="connsiteY3" fmla="*/ 62594 h 375557"/>
+              <a:gd name="connsiteX4" fmla="*/ 4827839 w 4827839"/>
+              <a:gd name="connsiteY4" fmla="*/ 312963 h 375557"/>
+              <a:gd name="connsiteX5" fmla="*/ 4765245 w 4827839"/>
+              <a:gd name="connsiteY5" fmla="*/ 375557 h 375557"/>
+              <a:gd name="connsiteX6" fmla="*/ 383748 w 4827839"/>
+              <a:gd name="connsiteY6" fmla="*/ 375557 h 375557"/>
+              <a:gd name="connsiteX7" fmla="*/ 321154 w 4827839"/>
+              <a:gd name="connsiteY7" fmla="*/ 312963 h 375557"/>
+              <a:gd name="connsiteX8" fmla="*/ 0 w 4827839"/>
+              <a:gd name="connsiteY8" fmla="*/ 321173 h 375557"/>
+              <a:gd name="connsiteX9" fmla="*/ 38122 w 4827839"/>
+              <a:gd name="connsiteY9" fmla="*/ 97924 h 375557"/>
+              <a:gd name="connsiteX10" fmla="*/ 321154 w 4827839"/>
+              <a:gd name="connsiteY10" fmla="*/ 62594 h 375557"/>
+              <a:gd name="connsiteX0" fmla="*/ 283032 w 4789717"/>
+              <a:gd name="connsiteY0" fmla="*/ 62594 h 375557"/>
+              <a:gd name="connsiteX1" fmla="*/ 345626 w 4789717"/>
+              <a:gd name="connsiteY1" fmla="*/ 0 h 375557"/>
+              <a:gd name="connsiteX2" fmla="*/ 4727123 w 4789717"/>
+              <a:gd name="connsiteY2" fmla="*/ 0 h 375557"/>
+              <a:gd name="connsiteX3" fmla="*/ 4789717 w 4789717"/>
+              <a:gd name="connsiteY3" fmla="*/ 62594 h 375557"/>
+              <a:gd name="connsiteX4" fmla="*/ 4789717 w 4789717"/>
+              <a:gd name="connsiteY4" fmla="*/ 312963 h 375557"/>
+              <a:gd name="connsiteX5" fmla="*/ 4727123 w 4789717"/>
+              <a:gd name="connsiteY5" fmla="*/ 375557 h 375557"/>
+              <a:gd name="connsiteX6" fmla="*/ 345626 w 4789717"/>
+              <a:gd name="connsiteY6" fmla="*/ 375557 h 375557"/>
+              <a:gd name="connsiteX7" fmla="*/ 283032 w 4789717"/>
+              <a:gd name="connsiteY7" fmla="*/ 312963 h 375557"/>
+              <a:gd name="connsiteX8" fmla="*/ 21756 w 4789717"/>
+              <a:gd name="connsiteY8" fmla="*/ 315726 h 375557"/>
+              <a:gd name="connsiteX9" fmla="*/ 0 w 4789717"/>
+              <a:gd name="connsiteY9" fmla="*/ 97924 h 375557"/>
+              <a:gd name="connsiteX10" fmla="*/ 283032 w 4789717"/>
+              <a:gd name="connsiteY10" fmla="*/ 62594 h 375557"/>
+              <a:gd name="connsiteX0" fmla="*/ 261276 w 4767961"/>
+              <a:gd name="connsiteY0" fmla="*/ 62594 h 375557"/>
+              <a:gd name="connsiteX1" fmla="*/ 323870 w 4767961"/>
+              <a:gd name="connsiteY1" fmla="*/ 0 h 375557"/>
+              <a:gd name="connsiteX2" fmla="*/ 4705367 w 4767961"/>
+              <a:gd name="connsiteY2" fmla="*/ 0 h 375557"/>
+              <a:gd name="connsiteX3" fmla="*/ 4767961 w 4767961"/>
+              <a:gd name="connsiteY3" fmla="*/ 62594 h 375557"/>
+              <a:gd name="connsiteX4" fmla="*/ 4767961 w 4767961"/>
+              <a:gd name="connsiteY4" fmla="*/ 312963 h 375557"/>
+              <a:gd name="connsiteX5" fmla="*/ 4705367 w 4767961"/>
+              <a:gd name="connsiteY5" fmla="*/ 375557 h 375557"/>
+              <a:gd name="connsiteX6" fmla="*/ 323870 w 4767961"/>
+              <a:gd name="connsiteY6" fmla="*/ 375557 h 375557"/>
+              <a:gd name="connsiteX7" fmla="*/ 261276 w 4767961"/>
+              <a:gd name="connsiteY7" fmla="*/ 312963 h 375557"/>
+              <a:gd name="connsiteX8" fmla="*/ 0 w 4767961"/>
+              <a:gd name="connsiteY8" fmla="*/ 315726 h 375557"/>
+              <a:gd name="connsiteX9" fmla="*/ 92557 w 4767961"/>
+              <a:gd name="connsiteY9" fmla="*/ 81583 h 375557"/>
+              <a:gd name="connsiteX10" fmla="*/ 261276 w 4767961"/>
+              <a:gd name="connsiteY10" fmla="*/ 62594 h 375557"/>
+              <a:gd name="connsiteX0" fmla="*/ 168719 w 4675404"/>
+              <a:gd name="connsiteY0" fmla="*/ 62594 h 375557"/>
+              <a:gd name="connsiteX1" fmla="*/ 231313 w 4675404"/>
+              <a:gd name="connsiteY1" fmla="*/ 0 h 375557"/>
+              <a:gd name="connsiteX2" fmla="*/ 4612810 w 4675404"/>
+              <a:gd name="connsiteY2" fmla="*/ 0 h 375557"/>
+              <a:gd name="connsiteX3" fmla="*/ 4675404 w 4675404"/>
+              <a:gd name="connsiteY3" fmla="*/ 62594 h 375557"/>
+              <a:gd name="connsiteX4" fmla="*/ 4675404 w 4675404"/>
+              <a:gd name="connsiteY4" fmla="*/ 312963 h 375557"/>
+              <a:gd name="connsiteX5" fmla="*/ 4612810 w 4675404"/>
+              <a:gd name="connsiteY5" fmla="*/ 375557 h 375557"/>
+              <a:gd name="connsiteX6" fmla="*/ 231313 w 4675404"/>
+              <a:gd name="connsiteY6" fmla="*/ 375557 h 375557"/>
+              <a:gd name="connsiteX7" fmla="*/ 168719 w 4675404"/>
+              <a:gd name="connsiteY7" fmla="*/ 312963 h 375557"/>
+              <a:gd name="connsiteX8" fmla="*/ 59855 w 4675404"/>
+              <a:gd name="connsiteY8" fmla="*/ 315726 h 375557"/>
+              <a:gd name="connsiteX9" fmla="*/ 0 w 4675404"/>
+              <a:gd name="connsiteY9" fmla="*/ 81583 h 375557"/>
+              <a:gd name="connsiteX10" fmla="*/ 168719 w 4675404"/>
+              <a:gd name="connsiteY10" fmla="*/ 62594 h 375557"/>
+              <a:gd name="connsiteX0" fmla="*/ 119183 w 4625868"/>
+              <a:gd name="connsiteY0" fmla="*/ 62594 h 375557"/>
+              <a:gd name="connsiteX1" fmla="*/ 181777 w 4625868"/>
+              <a:gd name="connsiteY1" fmla="*/ 0 h 375557"/>
+              <a:gd name="connsiteX2" fmla="*/ 4563274 w 4625868"/>
+              <a:gd name="connsiteY2" fmla="*/ 0 h 375557"/>
+              <a:gd name="connsiteX3" fmla="*/ 4625868 w 4625868"/>
+              <a:gd name="connsiteY3" fmla="*/ 62594 h 375557"/>
+              <a:gd name="connsiteX4" fmla="*/ 4625868 w 4625868"/>
+              <a:gd name="connsiteY4" fmla="*/ 312963 h 375557"/>
+              <a:gd name="connsiteX5" fmla="*/ 4563274 w 4625868"/>
+              <a:gd name="connsiteY5" fmla="*/ 375557 h 375557"/>
+              <a:gd name="connsiteX6" fmla="*/ 181777 w 4625868"/>
+              <a:gd name="connsiteY6" fmla="*/ 375557 h 375557"/>
+              <a:gd name="connsiteX7" fmla="*/ 119183 w 4625868"/>
+              <a:gd name="connsiteY7" fmla="*/ 312963 h 375557"/>
+              <a:gd name="connsiteX8" fmla="*/ 10319 w 4625868"/>
+              <a:gd name="connsiteY8" fmla="*/ 315726 h 375557"/>
+              <a:gd name="connsiteX9" fmla="*/ 0 w 4625868"/>
+              <a:gd name="connsiteY9" fmla="*/ 77770 h 375557"/>
+              <a:gd name="connsiteX10" fmla="*/ 119183 w 4625868"/>
+              <a:gd name="connsiteY10" fmla="*/ 62594 h 375557"/>
+              <a:gd name="connsiteX0" fmla="*/ 119183 w 4625868"/>
+              <a:gd name="connsiteY0" fmla="*/ 127411 h 375557"/>
+              <a:gd name="connsiteX1" fmla="*/ 181777 w 4625868"/>
+              <a:gd name="connsiteY1" fmla="*/ 0 h 375557"/>
+              <a:gd name="connsiteX2" fmla="*/ 4563274 w 4625868"/>
+              <a:gd name="connsiteY2" fmla="*/ 0 h 375557"/>
+              <a:gd name="connsiteX3" fmla="*/ 4625868 w 4625868"/>
+              <a:gd name="connsiteY3" fmla="*/ 62594 h 375557"/>
+              <a:gd name="connsiteX4" fmla="*/ 4625868 w 4625868"/>
+              <a:gd name="connsiteY4" fmla="*/ 312963 h 375557"/>
+              <a:gd name="connsiteX5" fmla="*/ 4563274 w 4625868"/>
+              <a:gd name="connsiteY5" fmla="*/ 375557 h 375557"/>
+              <a:gd name="connsiteX6" fmla="*/ 181777 w 4625868"/>
+              <a:gd name="connsiteY6" fmla="*/ 375557 h 375557"/>
+              <a:gd name="connsiteX7" fmla="*/ 119183 w 4625868"/>
+              <a:gd name="connsiteY7" fmla="*/ 312963 h 375557"/>
+              <a:gd name="connsiteX8" fmla="*/ 10319 w 4625868"/>
+              <a:gd name="connsiteY8" fmla="*/ 315726 h 375557"/>
+              <a:gd name="connsiteX9" fmla="*/ 0 w 4625868"/>
+              <a:gd name="connsiteY9" fmla="*/ 77770 h 375557"/>
+              <a:gd name="connsiteX10" fmla="*/ 119183 w 4625868"/>
+              <a:gd name="connsiteY10" fmla="*/ 127411 h 375557"/>
+              <a:gd name="connsiteX0" fmla="*/ 119183 w 4625868"/>
+              <a:gd name="connsiteY0" fmla="*/ 127411 h 375557"/>
+              <a:gd name="connsiteX1" fmla="*/ 181777 w 4625868"/>
+              <a:gd name="connsiteY1" fmla="*/ 0 h 375557"/>
+              <a:gd name="connsiteX2" fmla="*/ 4563274 w 4625868"/>
+              <a:gd name="connsiteY2" fmla="*/ 0 h 375557"/>
+              <a:gd name="connsiteX3" fmla="*/ 4625868 w 4625868"/>
+              <a:gd name="connsiteY3" fmla="*/ 62594 h 375557"/>
+              <a:gd name="connsiteX4" fmla="*/ 4625868 w 4625868"/>
+              <a:gd name="connsiteY4" fmla="*/ 312963 h 375557"/>
+              <a:gd name="connsiteX5" fmla="*/ 4563274 w 4625868"/>
+              <a:gd name="connsiteY5" fmla="*/ 375557 h 375557"/>
+              <a:gd name="connsiteX6" fmla="*/ 181777 w 4625868"/>
+              <a:gd name="connsiteY6" fmla="*/ 375557 h 375557"/>
+              <a:gd name="connsiteX7" fmla="*/ 126803 w 4625868"/>
+              <a:gd name="connsiteY7" fmla="*/ 240520 h 375557"/>
+              <a:gd name="connsiteX8" fmla="*/ 10319 w 4625868"/>
+              <a:gd name="connsiteY8" fmla="*/ 315726 h 375557"/>
+              <a:gd name="connsiteX9" fmla="*/ 0 w 4625868"/>
+              <a:gd name="connsiteY9" fmla="*/ 77770 h 375557"/>
+              <a:gd name="connsiteX10" fmla="*/ 119183 w 4625868"/>
+              <a:gd name="connsiteY10" fmla="*/ 127411 h 375557"/>
+            </a:gdLst>
+            <a:ahLst/>
+            <a:cxnLst>
+              <a:cxn ang="0">
+                <a:pos x="connsiteX0" y="connsiteY0"/>
+              </a:cxn>
+              <a:cxn ang="0">
+                <a:pos x="connsiteX1" y="connsiteY1"/>
+              </a:cxn>
+              <a:cxn ang="0">
+                <a:pos x="connsiteX2" y="connsiteY2"/>
+              </a:cxn>
+              <a:cxn ang="0">
+                <a:pos x="connsiteX3" y="connsiteY3"/>
+              </a:cxn>
+              <a:cxn ang="0">
+                <a:pos x="connsiteX4" y="connsiteY4"/>
+              </a:cxn>
+              <a:cxn ang="0">
+                <a:pos x="connsiteX5" y="connsiteY5"/>
+              </a:cxn>
+              <a:cxn ang="0">
+                <a:pos x="connsiteX6" y="connsiteY6"/>
+              </a:cxn>
+              <a:cxn ang="0">
+                <a:pos x="connsiteX7" y="connsiteY7"/>
+              </a:cxn>
+              <a:cxn ang="0">
+                <a:pos x="connsiteX8" y="connsiteY8"/>
+              </a:cxn>
+              <a:cxn ang="0">
+                <a:pos x="connsiteX9" y="connsiteY9"/>
+              </a:cxn>
+              <a:cxn ang="0">
+                <a:pos x="connsiteX10" y="connsiteY10"/>
+              </a:cxn>
+            </a:cxnLst>
+            <a:rect l="l" t="t" r="r" b="b"/>
+            <a:pathLst>
+              <a:path w="4625868" h="375557">
+                <a:moveTo>
+                  <a:pt x="119183" y="127411"/>
+                </a:moveTo>
+                <a:cubicBezTo>
+                  <a:pt x="119183" y="92841"/>
+                  <a:pt x="147207" y="0"/>
+                  <a:pt x="181777" y="0"/>
+                </a:cubicBezTo>
+                <a:lnTo>
+                  <a:pt x="4563274" y="0"/>
+                </a:lnTo>
+                <a:cubicBezTo>
+                  <a:pt x="4597844" y="0"/>
+                  <a:pt x="4625868" y="28024"/>
+                  <a:pt x="4625868" y="62594"/>
+                </a:cubicBezTo>
+                <a:lnTo>
+                  <a:pt x="4625868" y="312963"/>
+                </a:lnTo>
+                <a:cubicBezTo>
+                  <a:pt x="4625868" y="347533"/>
+                  <a:pt x="4597844" y="375557"/>
+                  <a:pt x="4563274" y="375557"/>
+                </a:cubicBezTo>
+                <a:lnTo>
+                  <a:pt x="181777" y="375557"/>
+                </a:lnTo>
+                <a:cubicBezTo>
+                  <a:pt x="147207" y="375557"/>
+                  <a:pt x="126803" y="275090"/>
+                  <a:pt x="126803" y="240520"/>
+                </a:cubicBezTo>
+                <a:lnTo>
+                  <a:pt x="10319" y="315726"/>
+                </a:lnTo>
+                <a:lnTo>
+                  <a:pt x="0" y="77770"/>
+                </a:lnTo>
+                <a:lnTo>
+                  <a:pt x="119183" y="127411"/>
+                </a:lnTo>
+                <a:close/>
+              </a:path>
+            </a:pathLst>
+          </a:custGeom>
+        </p:spPr>
+        <p:style>
+          <a:lnRef idx="2">
+            <a:schemeClr val="accent4">
+              <a:shade val="50000"/>
+            </a:schemeClr>
+          </a:lnRef>
+          <a:fillRef idx="1">
+            <a:schemeClr val="accent4"/>
+          </a:fillRef>
+          <a:effectRef idx="0">
+            <a:schemeClr val="accent4"/>
+          </a:effectRef>
+          <a:fontRef idx="minor">
+            <a:schemeClr val="lt1"/>
+          </a:fontRef>
+        </p:style>
+        <p:txBody>
+          <a:bodyPr rot="0" spcFirstLastPara="0" vert="horz" wrap="square" lIns="0" tIns="0" rIns="0" bIns="0" numCol="1" spcCol="0" rtlCol="0" fromWordArt="0" anchor="ctr" anchorCtr="0" forceAA="0" compatLnSpc="1">
+            <a:prstTxWarp prst="textNoShape">
+              <a:avLst/>
+            </a:prstTxWarp>
+            <a:noAutofit/>
+          </a:bodyPr>
+          <a:lstStyle/>
+          <a:p>
+            <a:pPr indent="73025">
+              <a:spcAft>
+                <a:spcPts val="0"/>
+              </a:spcAft>
+            </a:pPr>
+            <a:r>
+              <a:rPr lang="zh-TW" sz="1200">
+                <a:solidFill>
+                  <a:srgbClr val="FFFFFF"/>
+                </a:solidFill>
+                <a:effectLst/>
+                <a:ea typeface="新細明體" panose="02020500000000000000" pitchFamily="18" charset="-120"/>
+                <a:cs typeface="Times New Roman" panose="02020603050405020304" pitchFamily="18" charset="0"/>
+              </a:rPr>
+              <a:t>取得</a:t>
+            </a:r>
+            <a:r>
+              <a:rPr lang="en-US" sz="1200">
+                <a:solidFill>
+                  <a:srgbClr val="FFFFFF"/>
+                </a:solidFill>
+                <a:effectLst/>
+                <a:ea typeface="新細明體" panose="02020500000000000000" pitchFamily="18" charset="-120"/>
+                <a:cs typeface="Times New Roman" panose="02020603050405020304" pitchFamily="18" charset="0"/>
+              </a:rPr>
+              <a:t>ESP32</a:t>
+            </a:r>
+            <a:r>
+              <a:rPr lang="zh-TW" sz="1200">
+                <a:solidFill>
+                  <a:srgbClr val="FFFFFF"/>
+                </a:solidFill>
+                <a:effectLst/>
+                <a:ea typeface="新細明體" panose="02020500000000000000" pitchFamily="18" charset="-120"/>
+                <a:cs typeface="Times New Roman" panose="02020603050405020304" pitchFamily="18" charset="0"/>
+              </a:rPr>
+              <a:t>訊息字串</a:t>
+            </a:r>
+            <a:endParaRPr lang="zh-TW" sz="1200">
+              <a:effectLst/>
+              <a:latin typeface="新細明體" panose="02020500000000000000" pitchFamily="18" charset="-120"/>
+              <a:ea typeface="新細明體" panose="02020500000000000000" pitchFamily="18" charset="-120"/>
+              <a:cs typeface="新細明體" panose="02020500000000000000" pitchFamily="18" charset="-120"/>
+            </a:endParaRPr>
+          </a:p>
+        </p:txBody>
+      </p:sp>
+      <p:grpSp>
+        <p:nvGrpSpPr>
+          <p:cNvPr id="58" name="群組 57"/>
+          <p:cNvGrpSpPr/>
+          <p:nvPr/>
+        </p:nvGrpSpPr>
+        <p:grpSpPr>
+          <a:xfrm>
+            <a:off x="6739522" y="4667827"/>
+            <a:ext cx="1617078" cy="412750"/>
+            <a:chOff x="-250803" y="0"/>
+            <a:chExt cx="1617162" cy="413020"/>
+          </a:xfrm>
+        </p:grpSpPr>
+        <p:sp>
+          <p:nvSpPr>
+            <p:cNvPr id="68" name="圓角矩形 4"/>
+            <p:cNvSpPr/>
+            <p:nvPr/>
+          </p:nvSpPr>
+          <p:spPr>
+            <a:xfrm>
+              <a:off x="-250803" y="0"/>
+              <a:ext cx="1617162" cy="413020"/>
+            </a:xfrm>
+            <a:custGeom>
+              <a:avLst/>
+              <a:gdLst>
+                <a:gd name="connsiteX0" fmla="*/ 0 w 4424680"/>
+                <a:gd name="connsiteY0" fmla="*/ 60115 h 360680"/>
+                <a:gd name="connsiteX1" fmla="*/ 60115 w 4424680"/>
+                <a:gd name="connsiteY1" fmla="*/ 0 h 360680"/>
+                <a:gd name="connsiteX2" fmla="*/ 4364565 w 4424680"/>
+                <a:gd name="connsiteY2" fmla="*/ 0 h 360680"/>
+                <a:gd name="connsiteX3" fmla="*/ 4424680 w 4424680"/>
+                <a:gd name="connsiteY3" fmla="*/ 60115 h 360680"/>
+                <a:gd name="connsiteX4" fmla="*/ 4424680 w 4424680"/>
+                <a:gd name="connsiteY4" fmla="*/ 300565 h 360680"/>
+                <a:gd name="connsiteX5" fmla="*/ 4364565 w 4424680"/>
+                <a:gd name="connsiteY5" fmla="*/ 360680 h 360680"/>
+                <a:gd name="connsiteX6" fmla="*/ 60115 w 4424680"/>
+                <a:gd name="connsiteY6" fmla="*/ 360680 h 360680"/>
+                <a:gd name="connsiteX7" fmla="*/ 0 w 4424680"/>
+                <a:gd name="connsiteY7" fmla="*/ 300565 h 360680"/>
+                <a:gd name="connsiteX8" fmla="*/ 0 w 4424680"/>
+                <a:gd name="connsiteY8" fmla="*/ 60115 h 360680"/>
+                <a:gd name="connsiteX0" fmla="*/ 0 w 4424680"/>
+                <a:gd name="connsiteY0" fmla="*/ 60115 h 360680"/>
+                <a:gd name="connsiteX1" fmla="*/ 60115 w 4424680"/>
+                <a:gd name="connsiteY1" fmla="*/ 0 h 360680"/>
+                <a:gd name="connsiteX2" fmla="*/ 279400 w 4424680"/>
+                <a:gd name="connsiteY2" fmla="*/ 0 h 360680"/>
+                <a:gd name="connsiteX3" fmla="*/ 4364565 w 4424680"/>
+                <a:gd name="connsiteY3" fmla="*/ 0 h 360680"/>
+                <a:gd name="connsiteX4" fmla="*/ 4424680 w 4424680"/>
+                <a:gd name="connsiteY4" fmla="*/ 60115 h 360680"/>
+                <a:gd name="connsiteX5" fmla="*/ 4424680 w 4424680"/>
+                <a:gd name="connsiteY5" fmla="*/ 300565 h 360680"/>
+                <a:gd name="connsiteX6" fmla="*/ 4364565 w 4424680"/>
+                <a:gd name="connsiteY6" fmla="*/ 360680 h 360680"/>
+                <a:gd name="connsiteX7" fmla="*/ 60115 w 4424680"/>
+                <a:gd name="connsiteY7" fmla="*/ 360680 h 360680"/>
+                <a:gd name="connsiteX8" fmla="*/ 0 w 4424680"/>
+                <a:gd name="connsiteY8" fmla="*/ 300565 h 360680"/>
+                <a:gd name="connsiteX9" fmla="*/ 0 w 4424680"/>
+                <a:gd name="connsiteY9" fmla="*/ 60115 h 360680"/>
+                <a:gd name="connsiteX0" fmla="*/ 0 w 4424680"/>
+                <a:gd name="connsiteY0" fmla="*/ 60115 h 360680"/>
+                <a:gd name="connsiteX1" fmla="*/ 60115 w 4424680"/>
+                <a:gd name="connsiteY1" fmla="*/ 0 h 360680"/>
+                <a:gd name="connsiteX2" fmla="*/ 4364565 w 4424680"/>
+                <a:gd name="connsiteY2" fmla="*/ 0 h 360680"/>
+                <a:gd name="connsiteX3" fmla="*/ 4424680 w 4424680"/>
+                <a:gd name="connsiteY3" fmla="*/ 60115 h 360680"/>
+                <a:gd name="connsiteX4" fmla="*/ 4424680 w 4424680"/>
+                <a:gd name="connsiteY4" fmla="*/ 300565 h 360680"/>
+                <a:gd name="connsiteX5" fmla="*/ 4364565 w 4424680"/>
+                <a:gd name="connsiteY5" fmla="*/ 360680 h 360680"/>
+                <a:gd name="connsiteX6" fmla="*/ 60115 w 4424680"/>
+                <a:gd name="connsiteY6" fmla="*/ 360680 h 360680"/>
+                <a:gd name="connsiteX7" fmla="*/ 0 w 4424680"/>
+                <a:gd name="connsiteY7" fmla="*/ 300565 h 360680"/>
+                <a:gd name="connsiteX8" fmla="*/ 0 w 4424680"/>
+                <a:gd name="connsiteY8" fmla="*/ 60115 h 360680"/>
+                <a:gd name="connsiteX0" fmla="*/ 0 w 4424680"/>
+                <a:gd name="connsiteY0" fmla="*/ 60115 h 360680"/>
+                <a:gd name="connsiteX1" fmla="*/ 60115 w 4424680"/>
+                <a:gd name="connsiteY1" fmla="*/ 0 h 360680"/>
+                <a:gd name="connsiteX2" fmla="*/ 350520 w 4424680"/>
+                <a:gd name="connsiteY2" fmla="*/ 0 h 360680"/>
+                <a:gd name="connsiteX3" fmla="*/ 4364565 w 4424680"/>
+                <a:gd name="connsiteY3" fmla="*/ 0 h 360680"/>
+                <a:gd name="connsiteX4" fmla="*/ 4424680 w 4424680"/>
+                <a:gd name="connsiteY4" fmla="*/ 60115 h 360680"/>
+                <a:gd name="connsiteX5" fmla="*/ 4424680 w 4424680"/>
+                <a:gd name="connsiteY5" fmla="*/ 300565 h 360680"/>
+                <a:gd name="connsiteX6" fmla="*/ 4364565 w 4424680"/>
+                <a:gd name="connsiteY6" fmla="*/ 360680 h 360680"/>
+                <a:gd name="connsiteX7" fmla="*/ 60115 w 4424680"/>
+                <a:gd name="connsiteY7" fmla="*/ 360680 h 360680"/>
+                <a:gd name="connsiteX8" fmla="*/ 0 w 4424680"/>
+                <a:gd name="connsiteY8" fmla="*/ 300565 h 360680"/>
+                <a:gd name="connsiteX9" fmla="*/ 0 w 4424680"/>
+                <a:gd name="connsiteY9" fmla="*/ 60115 h 360680"/>
+                <a:gd name="connsiteX0" fmla="*/ 0 w 4424680"/>
+                <a:gd name="connsiteY0" fmla="*/ 121075 h 421640"/>
+                <a:gd name="connsiteX1" fmla="*/ 60115 w 4424680"/>
+                <a:gd name="connsiteY1" fmla="*/ 60960 h 421640"/>
+                <a:gd name="connsiteX2" fmla="*/ 350520 w 4424680"/>
+                <a:gd name="connsiteY2" fmla="*/ 60960 h 421640"/>
+                <a:gd name="connsiteX3" fmla="*/ 4364565 w 4424680"/>
+                <a:gd name="connsiteY3" fmla="*/ 60960 h 421640"/>
+                <a:gd name="connsiteX4" fmla="*/ 4424680 w 4424680"/>
+                <a:gd name="connsiteY4" fmla="*/ 121075 h 421640"/>
+                <a:gd name="connsiteX5" fmla="*/ 4424680 w 4424680"/>
+                <a:gd name="connsiteY5" fmla="*/ 361525 h 421640"/>
+                <a:gd name="connsiteX6" fmla="*/ 4364565 w 4424680"/>
+                <a:gd name="connsiteY6" fmla="*/ 421640 h 421640"/>
+                <a:gd name="connsiteX7" fmla="*/ 60115 w 4424680"/>
+                <a:gd name="connsiteY7" fmla="*/ 421640 h 421640"/>
+                <a:gd name="connsiteX8" fmla="*/ 0 w 4424680"/>
+                <a:gd name="connsiteY8" fmla="*/ 361525 h 421640"/>
+                <a:gd name="connsiteX9" fmla="*/ 0 w 4424680"/>
+                <a:gd name="connsiteY9" fmla="*/ 121075 h 421640"/>
+                <a:gd name="connsiteX0" fmla="*/ 0 w 4424680"/>
+                <a:gd name="connsiteY0" fmla="*/ 121075 h 421640"/>
+                <a:gd name="connsiteX1" fmla="*/ 60115 w 4424680"/>
+                <a:gd name="connsiteY1" fmla="*/ 60960 h 421640"/>
+                <a:gd name="connsiteX2" fmla="*/ 350520 w 4424680"/>
+                <a:gd name="connsiteY2" fmla="*/ 60960 h 421640"/>
+                <a:gd name="connsiteX3" fmla="*/ 4364565 w 4424680"/>
+                <a:gd name="connsiteY3" fmla="*/ 60960 h 421640"/>
+                <a:gd name="connsiteX4" fmla="*/ 4424680 w 4424680"/>
+                <a:gd name="connsiteY4" fmla="*/ 121075 h 421640"/>
+                <a:gd name="connsiteX5" fmla="*/ 4424680 w 4424680"/>
+                <a:gd name="connsiteY5" fmla="*/ 361525 h 421640"/>
+                <a:gd name="connsiteX6" fmla="*/ 4364565 w 4424680"/>
+                <a:gd name="connsiteY6" fmla="*/ 421640 h 421640"/>
+                <a:gd name="connsiteX7" fmla="*/ 330200 w 4424680"/>
+                <a:gd name="connsiteY7" fmla="*/ 421640 h 421640"/>
+                <a:gd name="connsiteX8" fmla="*/ 60115 w 4424680"/>
+                <a:gd name="connsiteY8" fmla="*/ 421640 h 421640"/>
+                <a:gd name="connsiteX9" fmla="*/ 0 w 4424680"/>
+                <a:gd name="connsiteY9" fmla="*/ 361525 h 421640"/>
+                <a:gd name="connsiteX10" fmla="*/ 0 w 4424680"/>
+                <a:gd name="connsiteY10" fmla="*/ 121075 h 421640"/>
+                <a:gd name="connsiteX0" fmla="*/ 0 w 4424680"/>
+                <a:gd name="connsiteY0" fmla="*/ 60115 h 360680"/>
+                <a:gd name="connsiteX1" fmla="*/ 60115 w 4424680"/>
+                <a:gd name="connsiteY1" fmla="*/ 0 h 360680"/>
+                <a:gd name="connsiteX2" fmla="*/ 350520 w 4424680"/>
+                <a:gd name="connsiteY2" fmla="*/ 0 h 360680"/>
+                <a:gd name="connsiteX3" fmla="*/ 4364565 w 4424680"/>
+                <a:gd name="connsiteY3" fmla="*/ 0 h 360680"/>
+                <a:gd name="connsiteX4" fmla="*/ 4424680 w 4424680"/>
+                <a:gd name="connsiteY4" fmla="*/ 60115 h 360680"/>
+                <a:gd name="connsiteX5" fmla="*/ 4424680 w 4424680"/>
+                <a:gd name="connsiteY5" fmla="*/ 300565 h 360680"/>
+                <a:gd name="connsiteX6" fmla="*/ 4364565 w 4424680"/>
+                <a:gd name="connsiteY6" fmla="*/ 360680 h 360680"/>
+                <a:gd name="connsiteX7" fmla="*/ 330200 w 4424680"/>
+                <a:gd name="connsiteY7" fmla="*/ 360680 h 360680"/>
+                <a:gd name="connsiteX8" fmla="*/ 60115 w 4424680"/>
+                <a:gd name="connsiteY8" fmla="*/ 360680 h 360680"/>
+                <a:gd name="connsiteX9" fmla="*/ 0 w 4424680"/>
+                <a:gd name="connsiteY9" fmla="*/ 300565 h 360680"/>
+                <a:gd name="connsiteX10" fmla="*/ 0 w 4424680"/>
+                <a:gd name="connsiteY10" fmla="*/ 60115 h 360680"/>
+                <a:gd name="connsiteX0" fmla="*/ 0 w 4424680"/>
+                <a:gd name="connsiteY0" fmla="*/ 60115 h 421640"/>
+                <a:gd name="connsiteX1" fmla="*/ 60115 w 4424680"/>
+                <a:gd name="connsiteY1" fmla="*/ 0 h 421640"/>
+                <a:gd name="connsiteX2" fmla="*/ 350520 w 4424680"/>
+                <a:gd name="connsiteY2" fmla="*/ 0 h 421640"/>
+                <a:gd name="connsiteX3" fmla="*/ 4364565 w 4424680"/>
+                <a:gd name="connsiteY3" fmla="*/ 0 h 421640"/>
+                <a:gd name="connsiteX4" fmla="*/ 4424680 w 4424680"/>
+                <a:gd name="connsiteY4" fmla="*/ 60115 h 421640"/>
+                <a:gd name="connsiteX5" fmla="*/ 4424680 w 4424680"/>
+                <a:gd name="connsiteY5" fmla="*/ 300565 h 421640"/>
+                <a:gd name="connsiteX6" fmla="*/ 4364565 w 4424680"/>
+                <a:gd name="connsiteY6" fmla="*/ 360680 h 421640"/>
+                <a:gd name="connsiteX7" fmla="*/ 330200 w 4424680"/>
+                <a:gd name="connsiteY7" fmla="*/ 360680 h 421640"/>
+                <a:gd name="connsiteX8" fmla="*/ 60115 w 4424680"/>
+                <a:gd name="connsiteY8" fmla="*/ 360680 h 421640"/>
+                <a:gd name="connsiteX9" fmla="*/ 0 w 4424680"/>
+                <a:gd name="connsiteY9" fmla="*/ 300565 h 421640"/>
+                <a:gd name="connsiteX10" fmla="*/ 0 w 4424680"/>
+                <a:gd name="connsiteY10" fmla="*/ 60115 h 421640"/>
+              </a:gdLst>
+              <a:ahLst/>
+              <a:cxnLst>
+                <a:cxn ang="0">
+                  <a:pos x="connsiteX0" y="connsiteY0"/>
+                </a:cxn>
+                <a:cxn ang="0">
+                  <a:pos x="connsiteX1" y="connsiteY1"/>
+                </a:cxn>
+                <a:cxn ang="0">
+                  <a:pos x="connsiteX2" y="connsiteY2"/>
+                </a:cxn>
+                <a:cxn ang="0">
+                  <a:pos x="connsiteX3" y="connsiteY3"/>
+                </a:cxn>
+                <a:cxn ang="0">
+                  <a:pos x="connsiteX4" y="connsiteY4"/>
+                </a:cxn>
+                <a:cxn ang="0">
+                  <a:pos x="connsiteX5" y="connsiteY5"/>
+                </a:cxn>
+                <a:cxn ang="0">
+                  <a:pos x="connsiteX6" y="connsiteY6"/>
+                </a:cxn>
+                <a:cxn ang="0">
+                  <a:pos x="connsiteX7" y="connsiteY7"/>
+                </a:cxn>
+                <a:cxn ang="0">
+                  <a:pos x="connsiteX8" y="connsiteY8"/>
+                </a:cxn>
+                <a:cxn ang="0">
+                  <a:pos x="connsiteX9" y="connsiteY9"/>
+                </a:cxn>
+                <a:cxn ang="0">
+                  <a:pos x="connsiteX10" y="connsiteY10"/>
+                </a:cxn>
+              </a:cxnLst>
+              <a:rect l="l" t="t" r="r" b="b"/>
+              <a:pathLst>
+                <a:path w="4424680" h="421640">
+                  <a:moveTo>
+                    <a:pt x="0" y="60115"/>
+                  </a:moveTo>
+                  <a:cubicBezTo>
+                    <a:pt x="0" y="26914"/>
+                    <a:pt x="26914" y="0"/>
+                    <a:pt x="60115" y="0"/>
+                  </a:cubicBezTo>
+                  <a:cubicBezTo>
+                    <a:pt x="156917" y="0"/>
+                    <a:pt x="207998" y="121920"/>
+                    <a:pt x="350520" y="0"/>
+                  </a:cubicBezTo>
+                  <a:lnTo>
+                    <a:pt x="4364565" y="0"/>
+                  </a:lnTo>
+                  <a:cubicBezTo>
+                    <a:pt x="4397766" y="0"/>
+                    <a:pt x="4424680" y="26914"/>
+                    <a:pt x="4424680" y="60115"/>
+                  </a:cubicBezTo>
+                  <a:lnTo>
+                    <a:pt x="4424680" y="300565"/>
+                  </a:lnTo>
+                  <a:cubicBezTo>
+                    <a:pt x="4424680" y="333766"/>
+                    <a:pt x="4397766" y="360680"/>
+                    <a:pt x="4364565" y="360680"/>
+                  </a:cubicBezTo>
+                  <a:lnTo>
+                    <a:pt x="330200" y="360680"/>
+                  </a:lnTo>
+                  <a:cubicBezTo>
+                    <a:pt x="138572" y="497840"/>
+                    <a:pt x="150143" y="360680"/>
+                    <a:pt x="60115" y="360680"/>
+                  </a:cubicBezTo>
+                  <a:cubicBezTo>
+                    <a:pt x="26914" y="360680"/>
+                    <a:pt x="0" y="333766"/>
+                    <a:pt x="0" y="300565"/>
+                  </a:cubicBezTo>
+                  <a:lnTo>
+                    <a:pt x="0" y="60115"/>
+                  </a:lnTo>
+                  <a:close/>
+                </a:path>
+              </a:pathLst>
+            </a:custGeom>
+          </p:spPr>
+          <p:style>
+            <a:lnRef idx="2">
+              <a:schemeClr val="accent1">
+                <a:shade val="50000"/>
+              </a:schemeClr>
+            </a:lnRef>
+            <a:fillRef idx="1">
+              <a:schemeClr val="accent1"/>
+            </a:fillRef>
+            <a:effectRef idx="0">
+              <a:schemeClr val="accent1"/>
+            </a:effectRef>
+            <a:fontRef idx="minor">
+              <a:schemeClr val="lt1"/>
+            </a:fontRef>
+          </p:style>
+          <p:txBody>
+            <a:bodyPr rot="0" spcFirstLastPara="0" vert="horz" wrap="square" lIns="91440" tIns="45720" rIns="91440" bIns="45720" numCol="1" spcCol="0" rtlCol="0" fromWordArt="0" anchor="ctr" anchorCtr="0" forceAA="0" compatLnSpc="1">
+              <a:prstTxWarp prst="textNoShape">
+                <a:avLst/>
+              </a:prstTxWarp>
+              <a:noAutofit/>
+            </a:bodyPr>
+            <a:lstStyle/>
+            <a:p>
+              <a:pPr>
+                <a:spcAft>
+                  <a:spcPts val="0"/>
+                </a:spcAft>
+              </a:pPr>
+              <a:r>
+                <a:rPr lang="zh-TW" sz="1000">
+                  <a:solidFill>
+                    <a:srgbClr val="FFFFFF"/>
+                  </a:solidFill>
+                  <a:effectLst/>
+                  <a:ea typeface="新細明體" panose="02020500000000000000" pitchFamily="18" charset="-120"/>
+                  <a:cs typeface="Times New Roman" panose="02020603050405020304" pitchFamily="18" charset="0"/>
+                </a:rPr>
+                <a:t>車子執行</a:t>
+              </a:r>
+              <a:endParaRPr lang="zh-TW" sz="1200">
+                <a:effectLst/>
+                <a:latin typeface="新細明體" panose="02020500000000000000" pitchFamily="18" charset="-120"/>
+                <a:ea typeface="新細明體" panose="02020500000000000000" pitchFamily="18" charset="-120"/>
+                <a:cs typeface="新細明體" panose="02020500000000000000" pitchFamily="18" charset="-120"/>
+              </a:endParaRPr>
+            </a:p>
+          </p:txBody>
+        </p:sp>
+        <p:grpSp>
+          <p:nvGrpSpPr>
+            <p:cNvPr id="69" name="群組 68"/>
+            <p:cNvGrpSpPr/>
+            <p:nvPr/>
+          </p:nvGrpSpPr>
+          <p:grpSpPr>
+            <a:xfrm>
+              <a:off x="408438" y="59651"/>
+              <a:ext cx="846523" cy="233257"/>
+              <a:chOff x="404515" y="59651"/>
+              <a:chExt cx="859766" cy="238539"/>
+            </a:xfrm>
+          </p:grpSpPr>
+          <p:sp>
+            <p:nvSpPr>
+              <p:cNvPr id="70" name="圓角矩形 69"/>
+              <p:cNvSpPr/>
+              <p:nvPr/>
+            </p:nvSpPr>
+            <p:spPr>
+              <a:xfrm>
+                <a:off x="404515" y="59651"/>
+                <a:ext cx="859766" cy="238539"/>
+              </a:xfrm>
+              <a:prstGeom prst="roundRect">
+                <a:avLst/>
+              </a:prstGeom>
+            </p:spPr>
+            <p:style>
+              <a:lnRef idx="2">
+                <a:schemeClr val="accent4"/>
+              </a:lnRef>
+              <a:fillRef idx="1">
+                <a:schemeClr val="lt1"/>
+              </a:fillRef>
+              <a:effectRef idx="0">
+                <a:schemeClr val="accent4"/>
+              </a:effectRef>
+              <a:fontRef idx="minor">
+                <a:schemeClr val="dk1"/>
+              </a:fontRef>
+            </p:style>
+            <p:txBody>
+              <a:bodyPr rot="0" spcFirstLastPara="0" vert="horz" wrap="square" lIns="0" tIns="0" rIns="0" bIns="0" numCol="1" spcCol="0" rtlCol="0" fromWordArt="0" anchor="ctr" anchorCtr="0" forceAA="0" compatLnSpc="1">
+                <a:prstTxWarp prst="textNoShape">
+                  <a:avLst/>
+                </a:prstTxWarp>
+                <a:noAutofit/>
+              </a:bodyPr>
+              <a:lstStyle/>
+              <a:p>
+                <a:pPr indent="64135">
+                  <a:spcAft>
+                    <a:spcPts val="0"/>
+                  </a:spcAft>
+                </a:pPr>
+                <a:r>
+                  <a:rPr lang="zh-TW" altLang="en-US" sz="1000" dirty="0" smtClean="0">
+                    <a:solidFill>
+                      <a:srgbClr val="000000"/>
+                    </a:solidFill>
+                    <a:ea typeface="新細明體" panose="02020500000000000000" pitchFamily="18" charset="-120"/>
+                    <a:cs typeface="Times New Roman" panose="02020603050405020304" pitchFamily="18" charset="0"/>
+                  </a:rPr>
+                  <a:t>對角右進</a:t>
+                </a:r>
+                <a:endParaRPr lang="zh-TW" sz="1200" dirty="0">
+                  <a:effectLst/>
+                  <a:latin typeface="新細明體" panose="02020500000000000000" pitchFamily="18" charset="-120"/>
+                  <a:ea typeface="新細明體" panose="02020500000000000000" pitchFamily="18" charset="-120"/>
+                  <a:cs typeface="新細明體" panose="02020500000000000000" pitchFamily="18" charset="-120"/>
+                </a:endParaRPr>
+              </a:p>
+            </p:txBody>
+          </p:sp>
+          <p:sp>
+            <p:nvSpPr>
+              <p:cNvPr id="75" name="等腰三角形 74"/>
+              <p:cNvSpPr/>
+              <p:nvPr/>
+            </p:nvSpPr>
+            <p:spPr>
+              <a:xfrm rot="10800000">
+                <a:off x="1057547" y="131213"/>
+                <a:ext cx="174928" cy="143123"/>
+              </a:xfrm>
+              <a:prstGeom prst="triangle">
+                <a:avLst/>
+              </a:prstGeom>
+            </p:spPr>
+            <p:style>
+              <a:lnRef idx="3">
+                <a:schemeClr val="lt1"/>
+              </a:lnRef>
+              <a:fillRef idx="1">
+                <a:schemeClr val="accent4"/>
+              </a:fillRef>
+              <a:effectRef idx="1">
+                <a:schemeClr val="accent4"/>
+              </a:effectRef>
+              <a:fontRef idx="minor">
+                <a:schemeClr val="lt1"/>
+              </a:fontRef>
+            </p:style>
+            <p:txBody>
+              <a:bodyPr rot="0" spcFirstLastPara="0" vert="horz" wrap="square" lIns="91440" tIns="45720" rIns="91440" bIns="45720" numCol="1" spcCol="0" rtlCol="0" fromWordArt="0" anchor="ctr" anchorCtr="0" forceAA="0" compatLnSpc="1">
+                <a:prstTxWarp prst="textNoShape">
+                  <a:avLst/>
+                </a:prstTxWarp>
+                <a:noAutofit/>
+              </a:bodyPr>
+              <a:lstStyle/>
+              <a:p>
+                <a:endParaRPr lang="zh-TW" altLang="en-US"/>
+              </a:p>
+            </p:txBody>
+          </p:sp>
+        </p:grpSp>
+      </p:grpSp>
+      <p:grpSp>
+        <p:nvGrpSpPr>
+          <p:cNvPr id="3" name="群組 2"/>
+          <p:cNvGrpSpPr/>
+          <p:nvPr/>
+        </p:nvGrpSpPr>
+        <p:grpSpPr>
+          <a:xfrm>
+            <a:off x="3084004" y="4409684"/>
+            <a:ext cx="800584" cy="266700"/>
+            <a:chOff x="3084004" y="4409684"/>
+            <a:chExt cx="800584" cy="266700"/>
+          </a:xfrm>
+        </p:grpSpPr>
+        <p:sp>
+          <p:nvSpPr>
+            <p:cNvPr id="78" name="圓角矩形 4"/>
+            <p:cNvSpPr/>
+            <p:nvPr/>
+          </p:nvSpPr>
+          <p:spPr>
+            <a:xfrm>
+              <a:off x="3084004" y="4409684"/>
+              <a:ext cx="800584" cy="266700"/>
+            </a:xfrm>
+            <a:custGeom>
+              <a:avLst/>
+              <a:gdLst>
+                <a:gd name="connsiteX0" fmla="*/ 0 w 4424680"/>
+                <a:gd name="connsiteY0" fmla="*/ 60115 h 360680"/>
+                <a:gd name="connsiteX1" fmla="*/ 60115 w 4424680"/>
+                <a:gd name="connsiteY1" fmla="*/ 0 h 360680"/>
+                <a:gd name="connsiteX2" fmla="*/ 4364565 w 4424680"/>
+                <a:gd name="connsiteY2" fmla="*/ 0 h 360680"/>
+                <a:gd name="connsiteX3" fmla="*/ 4424680 w 4424680"/>
+                <a:gd name="connsiteY3" fmla="*/ 60115 h 360680"/>
+                <a:gd name="connsiteX4" fmla="*/ 4424680 w 4424680"/>
+                <a:gd name="connsiteY4" fmla="*/ 300565 h 360680"/>
+                <a:gd name="connsiteX5" fmla="*/ 4364565 w 4424680"/>
+                <a:gd name="connsiteY5" fmla="*/ 360680 h 360680"/>
+                <a:gd name="connsiteX6" fmla="*/ 60115 w 4424680"/>
+                <a:gd name="connsiteY6" fmla="*/ 360680 h 360680"/>
+                <a:gd name="connsiteX7" fmla="*/ 0 w 4424680"/>
+                <a:gd name="connsiteY7" fmla="*/ 300565 h 360680"/>
+                <a:gd name="connsiteX8" fmla="*/ 0 w 4424680"/>
+                <a:gd name="connsiteY8" fmla="*/ 60115 h 360680"/>
+                <a:gd name="connsiteX0" fmla="*/ 0 w 4424680"/>
+                <a:gd name="connsiteY0" fmla="*/ 60115 h 360680"/>
+                <a:gd name="connsiteX1" fmla="*/ 60115 w 4424680"/>
+                <a:gd name="connsiteY1" fmla="*/ 0 h 360680"/>
+                <a:gd name="connsiteX2" fmla="*/ 279400 w 4424680"/>
+                <a:gd name="connsiteY2" fmla="*/ 0 h 360680"/>
+                <a:gd name="connsiteX3" fmla="*/ 4364565 w 4424680"/>
+                <a:gd name="connsiteY3" fmla="*/ 0 h 360680"/>
+                <a:gd name="connsiteX4" fmla="*/ 4424680 w 4424680"/>
+                <a:gd name="connsiteY4" fmla="*/ 60115 h 360680"/>
+                <a:gd name="connsiteX5" fmla="*/ 4424680 w 4424680"/>
+                <a:gd name="connsiteY5" fmla="*/ 300565 h 360680"/>
+                <a:gd name="connsiteX6" fmla="*/ 4364565 w 4424680"/>
+                <a:gd name="connsiteY6" fmla="*/ 360680 h 360680"/>
+                <a:gd name="connsiteX7" fmla="*/ 60115 w 4424680"/>
+                <a:gd name="connsiteY7" fmla="*/ 360680 h 360680"/>
+                <a:gd name="connsiteX8" fmla="*/ 0 w 4424680"/>
+                <a:gd name="connsiteY8" fmla="*/ 300565 h 360680"/>
+                <a:gd name="connsiteX9" fmla="*/ 0 w 4424680"/>
+                <a:gd name="connsiteY9" fmla="*/ 60115 h 360680"/>
+                <a:gd name="connsiteX0" fmla="*/ 0 w 4424680"/>
+                <a:gd name="connsiteY0" fmla="*/ 60115 h 360680"/>
+                <a:gd name="connsiteX1" fmla="*/ 60115 w 4424680"/>
+                <a:gd name="connsiteY1" fmla="*/ 0 h 360680"/>
+                <a:gd name="connsiteX2" fmla="*/ 4364565 w 4424680"/>
+                <a:gd name="connsiteY2" fmla="*/ 0 h 360680"/>
+                <a:gd name="connsiteX3" fmla="*/ 4424680 w 4424680"/>
+                <a:gd name="connsiteY3" fmla="*/ 60115 h 360680"/>
+                <a:gd name="connsiteX4" fmla="*/ 4424680 w 4424680"/>
+                <a:gd name="connsiteY4" fmla="*/ 300565 h 360680"/>
+                <a:gd name="connsiteX5" fmla="*/ 4364565 w 4424680"/>
+                <a:gd name="connsiteY5" fmla="*/ 360680 h 360680"/>
+                <a:gd name="connsiteX6" fmla="*/ 60115 w 4424680"/>
+                <a:gd name="connsiteY6" fmla="*/ 360680 h 360680"/>
+                <a:gd name="connsiteX7" fmla="*/ 0 w 4424680"/>
+                <a:gd name="connsiteY7" fmla="*/ 300565 h 360680"/>
+                <a:gd name="connsiteX8" fmla="*/ 0 w 4424680"/>
+                <a:gd name="connsiteY8" fmla="*/ 60115 h 360680"/>
+                <a:gd name="connsiteX0" fmla="*/ 0 w 4424680"/>
+                <a:gd name="connsiteY0" fmla="*/ 60115 h 360680"/>
+                <a:gd name="connsiteX1" fmla="*/ 60115 w 4424680"/>
+                <a:gd name="connsiteY1" fmla="*/ 0 h 360680"/>
+                <a:gd name="connsiteX2" fmla="*/ 350520 w 4424680"/>
+                <a:gd name="connsiteY2" fmla="*/ 0 h 360680"/>
+                <a:gd name="connsiteX3" fmla="*/ 4364565 w 4424680"/>
+                <a:gd name="connsiteY3" fmla="*/ 0 h 360680"/>
+                <a:gd name="connsiteX4" fmla="*/ 4424680 w 4424680"/>
+                <a:gd name="connsiteY4" fmla="*/ 60115 h 360680"/>
+                <a:gd name="connsiteX5" fmla="*/ 4424680 w 4424680"/>
+                <a:gd name="connsiteY5" fmla="*/ 300565 h 360680"/>
+                <a:gd name="connsiteX6" fmla="*/ 4364565 w 4424680"/>
+                <a:gd name="connsiteY6" fmla="*/ 360680 h 360680"/>
+                <a:gd name="connsiteX7" fmla="*/ 60115 w 4424680"/>
+                <a:gd name="connsiteY7" fmla="*/ 360680 h 360680"/>
+                <a:gd name="connsiteX8" fmla="*/ 0 w 4424680"/>
+                <a:gd name="connsiteY8" fmla="*/ 300565 h 360680"/>
+                <a:gd name="connsiteX9" fmla="*/ 0 w 4424680"/>
+                <a:gd name="connsiteY9" fmla="*/ 60115 h 360680"/>
+                <a:gd name="connsiteX0" fmla="*/ 0 w 4424680"/>
+                <a:gd name="connsiteY0" fmla="*/ 121075 h 421640"/>
+                <a:gd name="connsiteX1" fmla="*/ 60115 w 4424680"/>
+                <a:gd name="connsiteY1" fmla="*/ 60960 h 421640"/>
+                <a:gd name="connsiteX2" fmla="*/ 350520 w 4424680"/>
+                <a:gd name="connsiteY2" fmla="*/ 60960 h 421640"/>
+                <a:gd name="connsiteX3" fmla="*/ 4364565 w 4424680"/>
+                <a:gd name="connsiteY3" fmla="*/ 60960 h 421640"/>
+                <a:gd name="connsiteX4" fmla="*/ 4424680 w 4424680"/>
+                <a:gd name="connsiteY4" fmla="*/ 121075 h 421640"/>
+                <a:gd name="connsiteX5" fmla="*/ 4424680 w 4424680"/>
+                <a:gd name="connsiteY5" fmla="*/ 361525 h 421640"/>
+                <a:gd name="connsiteX6" fmla="*/ 4364565 w 4424680"/>
+                <a:gd name="connsiteY6" fmla="*/ 421640 h 421640"/>
+                <a:gd name="connsiteX7" fmla="*/ 60115 w 4424680"/>
+                <a:gd name="connsiteY7" fmla="*/ 421640 h 421640"/>
+                <a:gd name="connsiteX8" fmla="*/ 0 w 4424680"/>
+                <a:gd name="connsiteY8" fmla="*/ 361525 h 421640"/>
+                <a:gd name="connsiteX9" fmla="*/ 0 w 4424680"/>
+                <a:gd name="connsiteY9" fmla="*/ 121075 h 421640"/>
+                <a:gd name="connsiteX0" fmla="*/ 0 w 4424680"/>
+                <a:gd name="connsiteY0" fmla="*/ 121075 h 421640"/>
+                <a:gd name="connsiteX1" fmla="*/ 60115 w 4424680"/>
+                <a:gd name="connsiteY1" fmla="*/ 60960 h 421640"/>
+                <a:gd name="connsiteX2" fmla="*/ 350520 w 4424680"/>
+                <a:gd name="connsiteY2" fmla="*/ 60960 h 421640"/>
+                <a:gd name="connsiteX3" fmla="*/ 4364565 w 4424680"/>
+                <a:gd name="connsiteY3" fmla="*/ 60960 h 421640"/>
+                <a:gd name="connsiteX4" fmla="*/ 4424680 w 4424680"/>
+                <a:gd name="connsiteY4" fmla="*/ 121075 h 421640"/>
+                <a:gd name="connsiteX5" fmla="*/ 4424680 w 4424680"/>
+                <a:gd name="connsiteY5" fmla="*/ 361525 h 421640"/>
+                <a:gd name="connsiteX6" fmla="*/ 4364565 w 4424680"/>
+                <a:gd name="connsiteY6" fmla="*/ 421640 h 421640"/>
+                <a:gd name="connsiteX7" fmla="*/ 330200 w 4424680"/>
+                <a:gd name="connsiteY7" fmla="*/ 421640 h 421640"/>
+                <a:gd name="connsiteX8" fmla="*/ 60115 w 4424680"/>
+                <a:gd name="connsiteY8" fmla="*/ 421640 h 421640"/>
+                <a:gd name="connsiteX9" fmla="*/ 0 w 4424680"/>
+                <a:gd name="connsiteY9" fmla="*/ 361525 h 421640"/>
+                <a:gd name="connsiteX10" fmla="*/ 0 w 4424680"/>
+                <a:gd name="connsiteY10" fmla="*/ 121075 h 421640"/>
+                <a:gd name="connsiteX0" fmla="*/ 0 w 4424680"/>
+                <a:gd name="connsiteY0" fmla="*/ 60115 h 360680"/>
+                <a:gd name="connsiteX1" fmla="*/ 60115 w 4424680"/>
+                <a:gd name="connsiteY1" fmla="*/ 0 h 360680"/>
+                <a:gd name="connsiteX2" fmla="*/ 350520 w 4424680"/>
+                <a:gd name="connsiteY2" fmla="*/ 0 h 360680"/>
+                <a:gd name="connsiteX3" fmla="*/ 4364565 w 4424680"/>
+                <a:gd name="connsiteY3" fmla="*/ 0 h 360680"/>
+                <a:gd name="connsiteX4" fmla="*/ 4424680 w 4424680"/>
+                <a:gd name="connsiteY4" fmla="*/ 60115 h 360680"/>
+                <a:gd name="connsiteX5" fmla="*/ 4424680 w 4424680"/>
+                <a:gd name="connsiteY5" fmla="*/ 300565 h 360680"/>
+                <a:gd name="connsiteX6" fmla="*/ 4364565 w 4424680"/>
+                <a:gd name="connsiteY6" fmla="*/ 360680 h 360680"/>
+                <a:gd name="connsiteX7" fmla="*/ 330200 w 4424680"/>
+                <a:gd name="connsiteY7" fmla="*/ 360680 h 360680"/>
+                <a:gd name="connsiteX8" fmla="*/ 60115 w 4424680"/>
+                <a:gd name="connsiteY8" fmla="*/ 360680 h 360680"/>
+                <a:gd name="connsiteX9" fmla="*/ 0 w 4424680"/>
+                <a:gd name="connsiteY9" fmla="*/ 300565 h 360680"/>
+                <a:gd name="connsiteX10" fmla="*/ 0 w 4424680"/>
+                <a:gd name="connsiteY10" fmla="*/ 60115 h 360680"/>
+                <a:gd name="connsiteX0" fmla="*/ 0 w 4424680"/>
+                <a:gd name="connsiteY0" fmla="*/ 60115 h 421640"/>
+                <a:gd name="connsiteX1" fmla="*/ 60115 w 4424680"/>
+                <a:gd name="connsiteY1" fmla="*/ 0 h 421640"/>
+                <a:gd name="connsiteX2" fmla="*/ 350520 w 4424680"/>
+                <a:gd name="connsiteY2" fmla="*/ 0 h 421640"/>
+                <a:gd name="connsiteX3" fmla="*/ 4364565 w 4424680"/>
+                <a:gd name="connsiteY3" fmla="*/ 0 h 421640"/>
+                <a:gd name="connsiteX4" fmla="*/ 4424680 w 4424680"/>
+                <a:gd name="connsiteY4" fmla="*/ 60115 h 421640"/>
+                <a:gd name="connsiteX5" fmla="*/ 4424680 w 4424680"/>
+                <a:gd name="connsiteY5" fmla="*/ 300565 h 421640"/>
+                <a:gd name="connsiteX6" fmla="*/ 4364565 w 4424680"/>
+                <a:gd name="connsiteY6" fmla="*/ 360680 h 421640"/>
+                <a:gd name="connsiteX7" fmla="*/ 330200 w 4424680"/>
+                <a:gd name="connsiteY7" fmla="*/ 360680 h 421640"/>
+                <a:gd name="connsiteX8" fmla="*/ 60115 w 4424680"/>
+                <a:gd name="connsiteY8" fmla="*/ 360680 h 421640"/>
+                <a:gd name="connsiteX9" fmla="*/ 0 w 4424680"/>
+                <a:gd name="connsiteY9" fmla="*/ 300565 h 421640"/>
+                <a:gd name="connsiteX10" fmla="*/ 0 w 4424680"/>
+                <a:gd name="connsiteY10" fmla="*/ 60115 h 421640"/>
+              </a:gdLst>
+              <a:ahLst/>
+              <a:cxnLst>
+                <a:cxn ang="0">
+                  <a:pos x="connsiteX0" y="connsiteY0"/>
+                </a:cxn>
+                <a:cxn ang="0">
+                  <a:pos x="connsiteX1" y="connsiteY1"/>
+                </a:cxn>
+                <a:cxn ang="0">
+                  <a:pos x="connsiteX2" y="connsiteY2"/>
+                </a:cxn>
+                <a:cxn ang="0">
+                  <a:pos x="connsiteX3" y="connsiteY3"/>
+                </a:cxn>
+                <a:cxn ang="0">
+                  <a:pos x="connsiteX4" y="connsiteY4"/>
+                </a:cxn>
+                <a:cxn ang="0">
+                  <a:pos x="connsiteX5" y="connsiteY5"/>
+                </a:cxn>
+                <a:cxn ang="0">
+                  <a:pos x="connsiteX6" y="connsiteY6"/>
+                </a:cxn>
+                <a:cxn ang="0">
+                  <a:pos x="connsiteX7" y="connsiteY7"/>
+                </a:cxn>
+                <a:cxn ang="0">
+                  <a:pos x="connsiteX8" y="connsiteY8"/>
+                </a:cxn>
+                <a:cxn ang="0">
+                  <a:pos x="connsiteX9" y="connsiteY9"/>
+                </a:cxn>
+                <a:cxn ang="0">
+                  <a:pos x="connsiteX10" y="connsiteY10"/>
+                </a:cxn>
+              </a:cxnLst>
+              <a:rect l="l" t="t" r="r" b="b"/>
+              <a:pathLst>
+                <a:path w="4424680" h="421640">
+                  <a:moveTo>
+                    <a:pt x="0" y="60115"/>
+                  </a:moveTo>
+                  <a:cubicBezTo>
+                    <a:pt x="0" y="26914"/>
+                    <a:pt x="26914" y="0"/>
+                    <a:pt x="60115" y="0"/>
+                  </a:cubicBezTo>
+                  <a:cubicBezTo>
+                    <a:pt x="156917" y="0"/>
+                    <a:pt x="207998" y="121920"/>
+                    <a:pt x="350520" y="0"/>
+                  </a:cubicBezTo>
+                  <a:lnTo>
+                    <a:pt x="4364565" y="0"/>
+                  </a:lnTo>
+                  <a:cubicBezTo>
+                    <a:pt x="4397766" y="0"/>
+                    <a:pt x="4424680" y="26914"/>
+                    <a:pt x="4424680" y="60115"/>
+                  </a:cubicBezTo>
+                  <a:lnTo>
+                    <a:pt x="4424680" y="300565"/>
+                  </a:lnTo>
+                  <a:cubicBezTo>
+                    <a:pt x="4424680" y="333766"/>
+                    <a:pt x="4397766" y="360680"/>
+                    <a:pt x="4364565" y="360680"/>
+                  </a:cubicBezTo>
+                  <a:lnTo>
+                    <a:pt x="330200" y="360680"/>
+                  </a:lnTo>
+                  <a:cubicBezTo>
+                    <a:pt x="138572" y="497840"/>
+                    <a:pt x="150143" y="360680"/>
+                    <a:pt x="60115" y="360680"/>
+                  </a:cubicBezTo>
+                  <a:cubicBezTo>
+                    <a:pt x="26914" y="360680"/>
+                    <a:pt x="0" y="333766"/>
+                    <a:pt x="0" y="300565"/>
+                  </a:cubicBezTo>
+                  <a:lnTo>
+                    <a:pt x="0" y="60115"/>
+                  </a:lnTo>
+                  <a:close/>
+                </a:path>
+              </a:pathLst>
+            </a:custGeom>
+          </p:spPr>
+          <p:style>
+            <a:lnRef idx="2">
+              <a:schemeClr val="accent1">
+                <a:shade val="50000"/>
+              </a:schemeClr>
+            </a:lnRef>
+            <a:fillRef idx="1">
+              <a:schemeClr val="accent1"/>
+            </a:fillRef>
+            <a:effectRef idx="0">
+              <a:schemeClr val="accent1"/>
+            </a:effectRef>
+            <a:fontRef idx="minor">
+              <a:schemeClr val="lt1"/>
+            </a:fontRef>
+          </p:style>
+          <p:txBody>
+            <a:bodyPr rot="0" spcFirstLastPara="0" vert="horz" wrap="square" lIns="36000" tIns="0" rIns="36000" bIns="0" numCol="1" spcCol="0" rtlCol="0" fromWordArt="0" anchor="ctr" anchorCtr="0" forceAA="0" compatLnSpc="1">
+              <a:prstTxWarp prst="textNoShape">
+                <a:avLst/>
+              </a:prstTxWarp>
+              <a:noAutofit/>
+            </a:bodyPr>
+            <a:lstStyle/>
+            <a:p>
+              <a:pPr>
+                <a:spcAft>
+                  <a:spcPts val="0"/>
+                </a:spcAft>
+              </a:pPr>
+              <a:r>
+                <a:rPr lang="zh-TW" altLang="en-US" sz="1200" kern="100" dirty="0" smtClean="0">
+                  <a:ea typeface="新細明體" panose="02020500000000000000" pitchFamily="18" charset="-120"/>
+                  <a:cs typeface="Times New Roman" panose="02020603050405020304" pitchFamily="18" charset="0"/>
+                </a:rPr>
+                <a:t>觸發值</a:t>
+              </a:r>
+              <a:endParaRPr lang="zh-TW" sz="1200" kern="100" dirty="0">
+                <a:effectLst/>
+                <a:ea typeface="新細明體" panose="02020500000000000000" pitchFamily="18" charset="-120"/>
+                <a:cs typeface="Times New Roman" panose="02020603050405020304" pitchFamily="18" charset="0"/>
+              </a:endParaRPr>
+            </a:p>
+          </p:txBody>
+        </p:sp>
+        <p:sp>
+          <p:nvSpPr>
+            <p:cNvPr id="79" name="手繪多邊形: 圖案 10"/>
+            <p:cNvSpPr/>
+            <p:nvPr/>
+          </p:nvSpPr>
+          <p:spPr>
+            <a:xfrm>
+              <a:off x="3592480" y="4449054"/>
+              <a:ext cx="219078" cy="175260"/>
+            </a:xfrm>
+            <a:custGeom>
+              <a:avLst/>
+              <a:gdLst>
+                <a:gd name="connsiteX0" fmla="*/ 84890 w 453390"/>
+                <a:gd name="connsiteY0" fmla="*/ 0 h 263525"/>
+                <a:gd name="connsiteX1" fmla="*/ 453390 w 453390"/>
+                <a:gd name="connsiteY1" fmla="*/ 0 h 263525"/>
+                <a:gd name="connsiteX2" fmla="*/ 453390 w 453390"/>
+                <a:gd name="connsiteY2" fmla="*/ 263525 h 263525"/>
+                <a:gd name="connsiteX3" fmla="*/ 84890 w 453390"/>
+                <a:gd name="connsiteY3" fmla="*/ 263525 h 263525"/>
+                <a:gd name="connsiteX4" fmla="*/ 59217 w 453390"/>
+                <a:gd name="connsiteY4" fmla="*/ 168771 h 263525"/>
+                <a:gd name="connsiteX5" fmla="*/ 4819 w 453390"/>
+                <a:gd name="connsiteY5" fmla="*/ 221542 h 263525"/>
+                <a:gd name="connsiteX6" fmla="*/ 0 w 453390"/>
+                <a:gd name="connsiteY6" fmla="*/ 54571 h 263525"/>
+                <a:gd name="connsiteX7" fmla="*/ 55658 w 453390"/>
+                <a:gd name="connsiteY7" fmla="*/ 89403 h 263525"/>
+                <a:gd name="connsiteX8" fmla="*/ 84890 w 453390"/>
+                <a:gd name="connsiteY8" fmla="*/ 0 h 263525"/>
+              </a:gdLst>
+              <a:ahLst/>
+              <a:cxnLst>
+                <a:cxn ang="0">
+                  <a:pos x="connsiteX0" y="connsiteY0"/>
+                </a:cxn>
+                <a:cxn ang="0">
+                  <a:pos x="connsiteX1" y="connsiteY1"/>
+                </a:cxn>
+                <a:cxn ang="0">
+                  <a:pos x="connsiteX2" y="connsiteY2"/>
+                </a:cxn>
+                <a:cxn ang="0">
+                  <a:pos x="connsiteX3" y="connsiteY3"/>
+                </a:cxn>
+                <a:cxn ang="0">
+                  <a:pos x="connsiteX4" y="connsiteY4"/>
+                </a:cxn>
+                <a:cxn ang="0">
+                  <a:pos x="connsiteX5" y="connsiteY5"/>
+                </a:cxn>
+                <a:cxn ang="0">
+                  <a:pos x="connsiteX6" y="connsiteY6"/>
+                </a:cxn>
+                <a:cxn ang="0">
+                  <a:pos x="connsiteX7" y="connsiteY7"/>
+                </a:cxn>
+                <a:cxn ang="0">
+                  <a:pos x="connsiteX8" y="connsiteY8"/>
+                </a:cxn>
+              </a:cxnLst>
+              <a:rect l="l" t="t" r="r" b="b"/>
+              <a:pathLst>
+                <a:path w="453390" h="263525">
+                  <a:moveTo>
+                    <a:pt x="84890" y="0"/>
+                  </a:moveTo>
+                  <a:lnTo>
+                    <a:pt x="453390" y="0"/>
+                  </a:lnTo>
+                  <a:lnTo>
+                    <a:pt x="453390" y="263525"/>
+                  </a:lnTo>
+                  <a:lnTo>
+                    <a:pt x="84890" y="263525"/>
+                  </a:lnTo>
+                  <a:cubicBezTo>
+                    <a:pt x="68745" y="263525"/>
+                    <a:pt x="59217" y="193028"/>
+                    <a:pt x="59217" y="168771"/>
+                  </a:cubicBezTo>
+                  <a:lnTo>
+                    <a:pt x="4819" y="221542"/>
+                  </a:lnTo>
+                  <a:lnTo>
+                    <a:pt x="0" y="54571"/>
+                  </a:lnTo>
+                  <a:lnTo>
+                    <a:pt x="55658" y="89403"/>
+                  </a:lnTo>
+                  <a:cubicBezTo>
+                    <a:pt x="55658" y="65146"/>
+                    <a:pt x="68745" y="0"/>
+                    <a:pt x="84890" y="0"/>
+                  </a:cubicBezTo>
+                  <a:close/>
+                </a:path>
+              </a:pathLst>
+            </a:custGeom>
+          </p:spPr>
+          <p:style>
+            <a:lnRef idx="2">
+              <a:schemeClr val="accent5">
+                <a:shade val="50000"/>
+              </a:schemeClr>
+            </a:lnRef>
+            <a:fillRef idx="1">
+              <a:schemeClr val="accent5"/>
+            </a:fillRef>
+            <a:effectRef idx="0">
+              <a:schemeClr val="accent5"/>
+            </a:effectRef>
+            <a:fontRef idx="minor">
+              <a:schemeClr val="lt1"/>
+            </a:fontRef>
+          </p:style>
+          <p:txBody>
+            <a:bodyPr rot="0" spcFirstLastPara="0" vert="horz" wrap="square" lIns="0" tIns="0" rIns="0" bIns="0" numCol="1" spcCol="0" rtlCol="0" fromWordArt="0" anchor="ctr" anchorCtr="0" forceAA="0" compatLnSpc="1">
+              <a:prstTxWarp prst="textNoShape">
+                <a:avLst/>
+              </a:prstTxWarp>
+              <a:noAutofit/>
+            </a:bodyPr>
+            <a:lstStyle/>
+            <a:p>
+              <a:pPr indent="73025" algn="ctr">
+                <a:spcAft>
+                  <a:spcPts val="0"/>
+                </a:spcAft>
+              </a:pPr>
+              <a:r>
+                <a:rPr lang="en-US" sz="1200" kern="100" dirty="0" smtClean="0">
+                  <a:solidFill>
+                    <a:srgbClr val="FFFFFF"/>
+                  </a:solidFill>
+                  <a:effectLst/>
+                  <a:ea typeface="新細明體" panose="02020500000000000000" pitchFamily="18" charset="-120"/>
+                  <a:cs typeface="Times New Roman" panose="02020603050405020304" pitchFamily="18" charset="0"/>
+                </a:rPr>
+                <a:t>1</a:t>
+              </a:r>
+              <a:endParaRPr lang="zh-TW" sz="1200" kern="100" dirty="0">
+                <a:effectLst/>
+                <a:ea typeface="新細明體" panose="02020500000000000000" pitchFamily="18" charset="-120"/>
+                <a:cs typeface="Times New Roman" panose="02020603050405020304" pitchFamily="18" charset="0"/>
+              </a:endParaRPr>
+            </a:p>
+          </p:txBody>
+        </p:sp>
+      </p:grpSp>
     </p:spTree>
     <p:extLst>
       <p:ext uri="{BB962C8B-B14F-4D97-AF65-F5344CB8AC3E}">
         <p14:creationId xmlns:p14="http://schemas.microsoft.com/office/powerpoint/2010/main" val="1013723899"/>
+      </p:ext>
+    </p:extLst>
+  </p:cSld>
+  <p:clrMapOvr>
+    <a:masterClrMapping/>
+  </p:clrMapOvr>
+</p:sld>
+</file>
+
+<file path=ppt/slides/slide3.xml><?xml version="1.0" encoding="utf-8"?>
+<p:sld xmlns:a="http://schemas.openxmlformats.org/drawingml/2006/main" xmlns:r="http://schemas.openxmlformats.org/officeDocument/2006/relationships" xmlns:p="http://schemas.openxmlformats.org/presentationml/2006/main">
+  <p:cSld>
+    <p:bg>
+      <p:bgPr>
+        <a:solidFill>
+          <a:schemeClr val="tx1">
+            <a:lumMod val="85000"/>
+            <a:lumOff val="15000"/>
+          </a:schemeClr>
+        </a:solidFill>
+        <a:effectLst/>
+      </p:bgPr>
+    </p:bg>
+    <p:spTree>
+      <p:nvGrpSpPr>
+        <p:cNvPr id="1" name=""/>
+        <p:cNvGrpSpPr/>
+        <p:nvPr/>
+      </p:nvGrpSpPr>
+      <p:grpSpPr>
+        <a:xfrm>
+          <a:off x="0" y="0"/>
+          <a:ext cx="0" cy="0"/>
+          <a:chOff x="0" y="0"/>
+          <a:chExt cx="0" cy="0"/>
+        </a:xfrm>
+      </p:grpSpPr>
+      <p:sp>
+        <p:nvSpPr>
+          <p:cNvPr id="82" name="手繪多邊形 81"/>
+          <p:cNvSpPr/>
+          <p:nvPr/>
+        </p:nvSpPr>
+        <p:spPr>
+          <a:xfrm>
+            <a:off x="2011362" y="1980565"/>
+            <a:ext cx="1961515" cy="2876550"/>
+          </a:xfrm>
+          <a:custGeom>
+            <a:avLst/>
+            <a:gdLst>
+              <a:gd name="connsiteX0" fmla="*/ 165525 w 1961515"/>
+              <a:gd name="connsiteY0" fmla="*/ 2866440 h 2876550"/>
+              <a:gd name="connsiteX1" fmla="*/ 169253 w 1961515"/>
+              <a:gd name="connsiteY1" fmla="*/ 2868973 h 2876550"/>
+              <a:gd name="connsiteX2" fmla="*/ 164084 w 1961515"/>
+              <a:gd name="connsiteY2" fmla="*/ 2871363 h 2876550"/>
+              <a:gd name="connsiteX3" fmla="*/ 38547 w 1961515"/>
+              <a:gd name="connsiteY3" fmla="*/ 0 h 2876550"/>
+              <a:gd name="connsiteX4" fmla="*/ 165474 w 1961515"/>
+              <a:gd name="connsiteY4" fmla="*/ 0 h 2876550"/>
+              <a:gd name="connsiteX5" fmla="*/ 1919874 w 1961515"/>
+              <a:gd name="connsiteY5" fmla="*/ 0 h 2876550"/>
+              <a:gd name="connsiteX6" fmla="*/ 1946148 w 1961515"/>
+              <a:gd name="connsiteY6" fmla="*/ 65804 h 2876550"/>
+              <a:gd name="connsiteX7" fmla="*/ 1946148 w 1961515"/>
+              <a:gd name="connsiteY7" fmla="*/ 327342 h 2876550"/>
+              <a:gd name="connsiteX8" fmla="*/ 1385550 w 1961515"/>
+              <a:gd name="connsiteY8" fmla="*/ 327342 h 2876550"/>
+              <a:gd name="connsiteX9" fmla="*/ 1136190 w 1961515"/>
+              <a:gd name="connsiteY9" fmla="*/ 327342 h 2876550"/>
+              <a:gd name="connsiteX10" fmla="*/ 1084570 w 1961515"/>
+              <a:gd name="connsiteY10" fmla="*/ 365367 h 2876550"/>
+              <a:gd name="connsiteX11" fmla="*/ 1084570 w 1961515"/>
+              <a:gd name="connsiteY11" fmla="*/ 517459 h 2876550"/>
+              <a:gd name="connsiteX12" fmla="*/ 1136190 w 1961515"/>
+              <a:gd name="connsiteY12" fmla="*/ 555483 h 2876550"/>
+              <a:gd name="connsiteX13" fmla="*/ 1368103 w 1961515"/>
+              <a:gd name="connsiteY13" fmla="*/ 555483 h 2876550"/>
+              <a:gd name="connsiteX14" fmla="*/ 1948235 w 1961515"/>
+              <a:gd name="connsiteY14" fmla="*/ 555483 h 2876550"/>
+              <a:gd name="connsiteX15" fmla="*/ 1948401 w 1961515"/>
+              <a:gd name="connsiteY15" fmla="*/ 573172 h 2876550"/>
+              <a:gd name="connsiteX16" fmla="*/ 1948954 w 1961515"/>
+              <a:gd name="connsiteY16" fmla="*/ 632777 h 2876550"/>
+              <a:gd name="connsiteX17" fmla="*/ 1385550 w 1961515"/>
+              <a:gd name="connsiteY17" fmla="*/ 632777 h 2876550"/>
+              <a:gd name="connsiteX18" fmla="*/ 1136190 w 1961515"/>
+              <a:gd name="connsiteY18" fmla="*/ 632777 h 2876550"/>
+              <a:gd name="connsiteX19" fmla="*/ 1084570 w 1961515"/>
+              <a:gd name="connsiteY19" fmla="*/ 670802 h 2876550"/>
+              <a:gd name="connsiteX20" fmla="*/ 1084570 w 1961515"/>
+              <a:gd name="connsiteY20" fmla="*/ 822894 h 2876550"/>
+              <a:gd name="connsiteX21" fmla="*/ 1136190 w 1961515"/>
+              <a:gd name="connsiteY21" fmla="*/ 860918 h 2876550"/>
+              <a:gd name="connsiteX22" fmla="*/ 1368103 w 1961515"/>
+              <a:gd name="connsiteY22" fmla="*/ 860918 h 2876550"/>
+              <a:gd name="connsiteX23" fmla="*/ 1951037 w 1961515"/>
+              <a:gd name="connsiteY23" fmla="*/ 860918 h 2876550"/>
+              <a:gd name="connsiteX24" fmla="*/ 1951604 w 1961515"/>
+              <a:gd name="connsiteY24" fmla="*/ 925072 h 2876550"/>
+              <a:gd name="connsiteX25" fmla="*/ 1199202 w 1961515"/>
+              <a:gd name="connsiteY25" fmla="*/ 925072 h 2876550"/>
+              <a:gd name="connsiteX26" fmla="*/ 1113181 w 1961515"/>
+              <a:gd name="connsiteY26" fmla="*/ 925072 h 2876550"/>
+              <a:gd name="connsiteX27" fmla="*/ 1095374 w 1961515"/>
+              <a:gd name="connsiteY27" fmla="*/ 967268 h 2876550"/>
+              <a:gd name="connsiteX28" fmla="*/ 1095374 w 1961515"/>
+              <a:gd name="connsiteY28" fmla="*/ 1136046 h 2876550"/>
+              <a:gd name="connsiteX29" fmla="*/ 1113181 w 1961515"/>
+              <a:gd name="connsiteY29" fmla="*/ 1178242 h 2876550"/>
+              <a:gd name="connsiteX30" fmla="*/ 1193183 w 1961515"/>
+              <a:gd name="connsiteY30" fmla="*/ 1178242 h 2876550"/>
+              <a:gd name="connsiteX31" fmla="*/ 1953771 w 1961515"/>
+              <a:gd name="connsiteY31" fmla="*/ 1178242 h 2876550"/>
+              <a:gd name="connsiteX32" fmla="*/ 1954320 w 1961515"/>
+              <a:gd name="connsiteY32" fmla="*/ 1243647 h 2876550"/>
+              <a:gd name="connsiteX33" fmla="*/ 1385550 w 1961515"/>
+              <a:gd name="connsiteY33" fmla="*/ 1243647 h 2876550"/>
+              <a:gd name="connsiteX34" fmla="*/ 1136190 w 1961515"/>
+              <a:gd name="connsiteY34" fmla="*/ 1243647 h 2876550"/>
+              <a:gd name="connsiteX35" fmla="*/ 1084570 w 1961515"/>
+              <a:gd name="connsiteY35" fmla="*/ 1281672 h 2876550"/>
+              <a:gd name="connsiteX36" fmla="*/ 1084570 w 1961515"/>
+              <a:gd name="connsiteY36" fmla="*/ 1433764 h 2876550"/>
+              <a:gd name="connsiteX37" fmla="*/ 1136190 w 1961515"/>
+              <a:gd name="connsiteY37" fmla="*/ 1471788 h 2876550"/>
+              <a:gd name="connsiteX38" fmla="*/ 1368103 w 1961515"/>
+              <a:gd name="connsiteY38" fmla="*/ 1471788 h 2876550"/>
+              <a:gd name="connsiteX39" fmla="*/ 1956131 w 1961515"/>
+              <a:gd name="connsiteY39" fmla="*/ 1471788 h 2876550"/>
+              <a:gd name="connsiteX40" fmla="*/ 1956731 w 1961515"/>
+              <a:gd name="connsiteY40" fmla="*/ 1549082 h 2876550"/>
+              <a:gd name="connsiteX41" fmla="*/ 1385550 w 1961515"/>
+              <a:gd name="connsiteY41" fmla="*/ 1549082 h 2876550"/>
+              <a:gd name="connsiteX42" fmla="*/ 1136190 w 1961515"/>
+              <a:gd name="connsiteY42" fmla="*/ 1549082 h 2876550"/>
+              <a:gd name="connsiteX43" fmla="*/ 1084570 w 1961515"/>
+              <a:gd name="connsiteY43" fmla="*/ 1587107 h 2876550"/>
+              <a:gd name="connsiteX44" fmla="*/ 1084570 w 1961515"/>
+              <a:gd name="connsiteY44" fmla="*/ 1739199 h 2876550"/>
+              <a:gd name="connsiteX45" fmla="*/ 1136190 w 1961515"/>
+              <a:gd name="connsiteY45" fmla="*/ 1777223 h 2876550"/>
+              <a:gd name="connsiteX46" fmla="*/ 1368103 w 1961515"/>
+              <a:gd name="connsiteY46" fmla="*/ 1777223 h 2876550"/>
+              <a:gd name="connsiteX47" fmla="*/ 1958346 w 1961515"/>
+              <a:gd name="connsiteY47" fmla="*/ 1777223 h 2876550"/>
+              <a:gd name="connsiteX48" fmla="*/ 1958549 w 1961515"/>
+              <a:gd name="connsiteY48" fmla="*/ 1806205 h 2876550"/>
+              <a:gd name="connsiteX49" fmla="*/ 1958819 w 1961515"/>
+              <a:gd name="connsiteY49" fmla="*/ 1850144 h 2876550"/>
+              <a:gd name="connsiteX50" fmla="*/ 1202055 w 1961515"/>
+              <a:gd name="connsiteY50" fmla="*/ 1850144 h 2876550"/>
+              <a:gd name="connsiteX51" fmla="*/ 1116034 w 1961515"/>
+              <a:gd name="connsiteY51" fmla="*/ 1850144 h 2876550"/>
+              <a:gd name="connsiteX52" fmla="*/ 1098227 w 1961515"/>
+              <a:gd name="connsiteY52" fmla="*/ 1892340 h 2876550"/>
+              <a:gd name="connsiteX53" fmla="*/ 1098227 w 1961515"/>
+              <a:gd name="connsiteY53" fmla="*/ 2061118 h 2876550"/>
+              <a:gd name="connsiteX54" fmla="*/ 1116034 w 1961515"/>
+              <a:gd name="connsiteY54" fmla="*/ 2103314 h 2876550"/>
+              <a:gd name="connsiteX55" fmla="*/ 1196036 w 1961515"/>
+              <a:gd name="connsiteY55" fmla="*/ 2103314 h 2876550"/>
+              <a:gd name="connsiteX56" fmla="*/ 1960265 w 1961515"/>
+              <a:gd name="connsiteY56" fmla="*/ 2103314 h 2876550"/>
+              <a:gd name="connsiteX57" fmla="*/ 1960551 w 1961515"/>
+              <a:gd name="connsiteY57" fmla="*/ 2159952 h 2876550"/>
+              <a:gd name="connsiteX58" fmla="*/ 1385550 w 1961515"/>
+              <a:gd name="connsiteY58" fmla="*/ 2159952 h 2876550"/>
+              <a:gd name="connsiteX59" fmla="*/ 1136190 w 1961515"/>
+              <a:gd name="connsiteY59" fmla="*/ 2159952 h 2876550"/>
+              <a:gd name="connsiteX60" fmla="*/ 1084570 w 1961515"/>
+              <a:gd name="connsiteY60" fmla="*/ 2197977 h 2876550"/>
+              <a:gd name="connsiteX61" fmla="*/ 1084570 w 1961515"/>
+              <a:gd name="connsiteY61" fmla="*/ 2350069 h 2876550"/>
+              <a:gd name="connsiteX62" fmla="*/ 1136190 w 1961515"/>
+              <a:gd name="connsiteY62" fmla="*/ 2388093 h 2876550"/>
+              <a:gd name="connsiteX63" fmla="*/ 1368103 w 1961515"/>
+              <a:gd name="connsiteY63" fmla="*/ 2388093 h 2876550"/>
+              <a:gd name="connsiteX64" fmla="*/ 1961367 w 1961515"/>
+              <a:gd name="connsiteY64" fmla="*/ 2388093 h 2876550"/>
+              <a:gd name="connsiteX65" fmla="*/ 1961503 w 1961515"/>
+              <a:gd name="connsiteY65" fmla="*/ 2446502 h 2876550"/>
+              <a:gd name="connsiteX66" fmla="*/ 1961515 w 1961515"/>
+              <a:gd name="connsiteY66" fmla="*/ 2465387 h 2876550"/>
+              <a:gd name="connsiteX67" fmla="*/ 1385550 w 1961515"/>
+              <a:gd name="connsiteY67" fmla="*/ 2465387 h 2876550"/>
+              <a:gd name="connsiteX68" fmla="*/ 1136190 w 1961515"/>
+              <a:gd name="connsiteY68" fmla="*/ 2465387 h 2876550"/>
+              <a:gd name="connsiteX69" fmla="*/ 1084570 w 1961515"/>
+              <a:gd name="connsiteY69" fmla="*/ 2503412 h 2876550"/>
+              <a:gd name="connsiteX70" fmla="*/ 1084570 w 1961515"/>
+              <a:gd name="connsiteY70" fmla="*/ 2655504 h 2876550"/>
+              <a:gd name="connsiteX71" fmla="*/ 1136190 w 1961515"/>
+              <a:gd name="connsiteY71" fmla="*/ 2693528 h 2876550"/>
+              <a:gd name="connsiteX72" fmla="*/ 1368103 w 1961515"/>
+              <a:gd name="connsiteY72" fmla="*/ 2693528 h 2876550"/>
+              <a:gd name="connsiteX73" fmla="*/ 1961005 w 1961515"/>
+              <a:gd name="connsiteY73" fmla="*/ 2693528 h 2876550"/>
+              <a:gd name="connsiteX74" fmla="*/ 1960771 w 1961515"/>
+              <a:gd name="connsiteY74" fmla="*/ 2723606 h 2876550"/>
+              <a:gd name="connsiteX75" fmla="*/ 1957086 w 1961515"/>
+              <a:gd name="connsiteY75" fmla="*/ 2828521 h 2876550"/>
+              <a:gd name="connsiteX76" fmla="*/ 206165 w 1961515"/>
+              <a:gd name="connsiteY76" fmla="*/ 2779897 h 2876550"/>
+              <a:gd name="connsiteX77" fmla="*/ 168635 w 1961515"/>
+              <a:gd name="connsiteY77" fmla="*/ 2855823 h 2876550"/>
+              <a:gd name="connsiteX78" fmla="*/ 165525 w 1961515"/>
+              <a:gd name="connsiteY78" fmla="*/ 2866440 h 2876550"/>
+              <a:gd name="connsiteX79" fmla="*/ 156702 w 1961515"/>
+              <a:gd name="connsiteY79" fmla="*/ 2860445 h 2876550"/>
+              <a:gd name="connsiteX80" fmla="*/ 125565 w 1961515"/>
+              <a:gd name="connsiteY80" fmla="*/ 2726593 h 2876550"/>
+              <a:gd name="connsiteX81" fmla="*/ 0 w 1961515"/>
+              <a:gd name="connsiteY81" fmla="*/ 2786323 h 2876550"/>
+              <a:gd name="connsiteX82" fmla="*/ 12273 w 1961515"/>
+              <a:gd name="connsiteY82" fmla="*/ 65804 h 2876550"/>
+              <a:gd name="connsiteX83" fmla="*/ 38547 w 1961515"/>
+              <a:gd name="connsiteY83" fmla="*/ 0 h 2876550"/>
+            </a:gdLst>
+            <a:ahLst/>
+            <a:cxnLst>
+              <a:cxn ang="0">
+                <a:pos x="connsiteX0" y="connsiteY0"/>
+              </a:cxn>
+              <a:cxn ang="0">
+                <a:pos x="connsiteX1" y="connsiteY1"/>
+              </a:cxn>
+              <a:cxn ang="0">
+                <a:pos x="connsiteX2" y="connsiteY2"/>
+              </a:cxn>
+              <a:cxn ang="0">
+                <a:pos x="connsiteX3" y="connsiteY3"/>
+              </a:cxn>
+              <a:cxn ang="0">
+                <a:pos x="connsiteX4" y="connsiteY4"/>
+              </a:cxn>
+              <a:cxn ang="0">
+                <a:pos x="connsiteX5" y="connsiteY5"/>
+              </a:cxn>
+              <a:cxn ang="0">
+                <a:pos x="connsiteX6" y="connsiteY6"/>
+              </a:cxn>
+              <a:cxn ang="0">
+                <a:pos x="connsiteX7" y="connsiteY7"/>
+              </a:cxn>
+              <a:cxn ang="0">
+                <a:pos x="connsiteX8" y="connsiteY8"/>
+              </a:cxn>
+              <a:cxn ang="0">
+                <a:pos x="connsiteX9" y="connsiteY9"/>
+              </a:cxn>
+              <a:cxn ang="0">
+                <a:pos x="connsiteX10" y="connsiteY10"/>
+              </a:cxn>
+              <a:cxn ang="0">
+                <a:pos x="connsiteX11" y="connsiteY11"/>
+              </a:cxn>
+              <a:cxn ang="0">
+                <a:pos x="connsiteX12" y="connsiteY12"/>
+              </a:cxn>
+              <a:cxn ang="0">
+                <a:pos x="connsiteX13" y="connsiteY13"/>
+              </a:cxn>
+              <a:cxn ang="0">
+                <a:pos x="connsiteX14" y="connsiteY14"/>
+              </a:cxn>
+              <a:cxn ang="0">
+                <a:pos x="connsiteX15" y="connsiteY15"/>
+              </a:cxn>
+              <a:cxn ang="0">
+                <a:pos x="connsiteX16" y="connsiteY16"/>
+              </a:cxn>
+              <a:cxn ang="0">
+                <a:pos x="connsiteX17" y="connsiteY17"/>
+              </a:cxn>
+              <a:cxn ang="0">
+                <a:pos x="connsiteX18" y="connsiteY18"/>
+              </a:cxn>
+              <a:cxn ang="0">
+                <a:pos x="connsiteX19" y="connsiteY19"/>
+              </a:cxn>
+              <a:cxn ang="0">
+                <a:pos x="connsiteX20" y="connsiteY20"/>
+              </a:cxn>
+              <a:cxn ang="0">
+                <a:pos x="connsiteX21" y="connsiteY21"/>
+              </a:cxn>
+              <a:cxn ang="0">
+                <a:pos x="connsiteX22" y="connsiteY22"/>
+              </a:cxn>
+              <a:cxn ang="0">
+                <a:pos x="connsiteX23" y="connsiteY23"/>
+              </a:cxn>
+              <a:cxn ang="0">
+                <a:pos x="connsiteX24" y="connsiteY24"/>
+              </a:cxn>
+              <a:cxn ang="0">
+                <a:pos x="connsiteX25" y="connsiteY25"/>
+              </a:cxn>
+              <a:cxn ang="0">
+                <a:pos x="connsiteX26" y="connsiteY26"/>
+              </a:cxn>
+              <a:cxn ang="0">
+                <a:pos x="connsiteX27" y="connsiteY27"/>
+              </a:cxn>
+              <a:cxn ang="0">
+                <a:pos x="connsiteX28" y="connsiteY28"/>
+              </a:cxn>
+              <a:cxn ang="0">
+                <a:pos x="connsiteX29" y="connsiteY29"/>
+              </a:cxn>
+              <a:cxn ang="0">
+                <a:pos x="connsiteX30" y="connsiteY30"/>
+              </a:cxn>
+              <a:cxn ang="0">
+                <a:pos x="connsiteX31" y="connsiteY31"/>
+              </a:cxn>
+              <a:cxn ang="0">
+                <a:pos x="connsiteX32" y="connsiteY32"/>
+              </a:cxn>
+              <a:cxn ang="0">
+                <a:pos x="connsiteX33" y="connsiteY33"/>
+              </a:cxn>
+              <a:cxn ang="0">
+                <a:pos x="connsiteX34" y="connsiteY34"/>
+              </a:cxn>
+              <a:cxn ang="0">
+                <a:pos x="connsiteX35" y="connsiteY35"/>
+              </a:cxn>
+              <a:cxn ang="0">
+                <a:pos x="connsiteX36" y="connsiteY36"/>
+              </a:cxn>
+              <a:cxn ang="0">
+                <a:pos x="connsiteX37" y="connsiteY37"/>
+              </a:cxn>
+              <a:cxn ang="0">
+                <a:pos x="connsiteX38" y="connsiteY38"/>
+              </a:cxn>
+              <a:cxn ang="0">
+                <a:pos x="connsiteX39" y="connsiteY39"/>
+              </a:cxn>
+              <a:cxn ang="0">
+                <a:pos x="connsiteX40" y="connsiteY40"/>
+              </a:cxn>
+              <a:cxn ang="0">
+                <a:pos x="connsiteX41" y="connsiteY41"/>
+              </a:cxn>
+              <a:cxn ang="0">
+                <a:pos x="connsiteX42" y="connsiteY42"/>
+              </a:cxn>
+              <a:cxn ang="0">
+                <a:pos x="connsiteX43" y="connsiteY43"/>
+              </a:cxn>
+              <a:cxn ang="0">
+                <a:pos x="connsiteX44" y="connsiteY44"/>
+              </a:cxn>
+              <a:cxn ang="0">
+                <a:pos x="connsiteX45" y="connsiteY45"/>
+              </a:cxn>
+              <a:cxn ang="0">
+                <a:pos x="connsiteX46" y="connsiteY46"/>
+              </a:cxn>
+              <a:cxn ang="0">
+                <a:pos x="connsiteX47" y="connsiteY47"/>
+              </a:cxn>
+              <a:cxn ang="0">
+                <a:pos x="connsiteX48" y="connsiteY48"/>
+              </a:cxn>
+              <a:cxn ang="0">
+                <a:pos x="connsiteX49" y="connsiteY49"/>
+              </a:cxn>
+              <a:cxn ang="0">
+                <a:pos x="connsiteX50" y="connsiteY50"/>
+              </a:cxn>
+              <a:cxn ang="0">
+                <a:pos x="connsiteX51" y="connsiteY51"/>
+              </a:cxn>
+              <a:cxn ang="0">
+                <a:pos x="connsiteX52" y="connsiteY52"/>
+              </a:cxn>
+              <a:cxn ang="0">
+                <a:pos x="connsiteX53" y="connsiteY53"/>
+              </a:cxn>
+              <a:cxn ang="0">
+                <a:pos x="connsiteX54" y="connsiteY54"/>
+              </a:cxn>
+              <a:cxn ang="0">
+                <a:pos x="connsiteX55" y="connsiteY55"/>
+              </a:cxn>
+              <a:cxn ang="0">
+                <a:pos x="connsiteX56" y="connsiteY56"/>
+              </a:cxn>
+              <a:cxn ang="0">
+                <a:pos x="connsiteX57" y="connsiteY57"/>
+              </a:cxn>
+              <a:cxn ang="0">
+                <a:pos x="connsiteX58" y="connsiteY58"/>
+              </a:cxn>
+              <a:cxn ang="0">
+                <a:pos x="connsiteX59" y="connsiteY59"/>
+              </a:cxn>
+              <a:cxn ang="0">
+                <a:pos x="connsiteX60" y="connsiteY60"/>
+              </a:cxn>
+              <a:cxn ang="0">
+                <a:pos x="connsiteX61" y="connsiteY61"/>
+              </a:cxn>
+              <a:cxn ang="0">
+                <a:pos x="connsiteX62" y="connsiteY62"/>
+              </a:cxn>
+              <a:cxn ang="0">
+                <a:pos x="connsiteX63" y="connsiteY63"/>
+              </a:cxn>
+              <a:cxn ang="0">
+                <a:pos x="connsiteX64" y="connsiteY64"/>
+              </a:cxn>
+              <a:cxn ang="0">
+                <a:pos x="connsiteX65" y="connsiteY65"/>
+              </a:cxn>
+              <a:cxn ang="0">
+                <a:pos x="connsiteX66" y="connsiteY66"/>
+              </a:cxn>
+              <a:cxn ang="0">
+                <a:pos x="connsiteX67" y="connsiteY67"/>
+              </a:cxn>
+              <a:cxn ang="0">
+                <a:pos x="connsiteX68" y="connsiteY68"/>
+              </a:cxn>
+              <a:cxn ang="0">
+                <a:pos x="connsiteX69" y="connsiteY69"/>
+              </a:cxn>
+              <a:cxn ang="0">
+                <a:pos x="connsiteX70" y="connsiteY70"/>
+              </a:cxn>
+              <a:cxn ang="0">
+                <a:pos x="connsiteX71" y="connsiteY71"/>
+              </a:cxn>
+              <a:cxn ang="0">
+                <a:pos x="connsiteX72" y="connsiteY72"/>
+              </a:cxn>
+              <a:cxn ang="0">
+                <a:pos x="connsiteX73" y="connsiteY73"/>
+              </a:cxn>
+              <a:cxn ang="0">
+                <a:pos x="connsiteX74" y="connsiteY74"/>
+              </a:cxn>
+              <a:cxn ang="0">
+                <a:pos x="connsiteX75" y="connsiteY75"/>
+              </a:cxn>
+              <a:cxn ang="0">
+                <a:pos x="connsiteX76" y="connsiteY76"/>
+              </a:cxn>
+              <a:cxn ang="0">
+                <a:pos x="connsiteX77" y="connsiteY77"/>
+              </a:cxn>
+              <a:cxn ang="0">
+                <a:pos x="connsiteX78" y="connsiteY78"/>
+              </a:cxn>
+              <a:cxn ang="0">
+                <a:pos x="connsiteX79" y="connsiteY79"/>
+              </a:cxn>
+              <a:cxn ang="0">
+                <a:pos x="connsiteX80" y="connsiteY80"/>
+              </a:cxn>
+              <a:cxn ang="0">
+                <a:pos x="connsiteX81" y="connsiteY81"/>
+              </a:cxn>
+              <a:cxn ang="0">
+                <a:pos x="connsiteX82" y="connsiteY82"/>
+              </a:cxn>
+              <a:cxn ang="0">
+                <a:pos x="connsiteX83" y="connsiteY83"/>
+              </a:cxn>
+            </a:cxnLst>
+            <a:rect l="l" t="t" r="r" b="b"/>
+            <a:pathLst>
+              <a:path w="1961515" h="2876550">
+                <a:moveTo>
+                  <a:pt x="165525" y="2866440"/>
+                </a:moveTo>
+                <a:lnTo>
+                  <a:pt x="169253" y="2868973"/>
+                </a:lnTo>
+                <a:cubicBezTo>
+                  <a:pt x="169160" y="2875241"/>
+                  <a:pt x="162684" y="2881123"/>
+                  <a:pt x="164084" y="2871363"/>
+                </a:cubicBezTo>
+                <a:close/>
+                <a:moveTo>
+                  <a:pt x="38547" y="0"/>
+                </a:moveTo>
+                <a:cubicBezTo>
+                  <a:pt x="80857" y="0"/>
+                  <a:pt x="103182" y="133458"/>
+                  <a:pt x="165474" y="0"/>
+                </a:cubicBezTo>
+                <a:lnTo>
+                  <a:pt x="1919874" y="0"/>
+                </a:lnTo>
+                <a:cubicBezTo>
+                  <a:pt x="1934385" y="0"/>
+                  <a:pt x="1946148" y="29461"/>
+                  <a:pt x="1946148" y="65804"/>
+                </a:cubicBezTo>
+                <a:lnTo>
+                  <a:pt x="1946148" y="327342"/>
+                </a:lnTo>
+                <a:lnTo>
+                  <a:pt x="1385550" y="327342"/>
+                </a:lnTo>
+                <a:cubicBezTo>
+                  <a:pt x="1263171" y="404460"/>
+                  <a:pt x="1219310" y="327342"/>
+                  <a:pt x="1136190" y="327342"/>
+                </a:cubicBezTo>
+                <a:cubicBezTo>
+                  <a:pt x="1107680" y="327342"/>
+                  <a:pt x="1084570" y="344366"/>
+                  <a:pt x="1084570" y="365367"/>
+                </a:cubicBezTo>
+                <a:lnTo>
+                  <a:pt x="1084570" y="517459"/>
+                </a:lnTo>
+                <a:cubicBezTo>
+                  <a:pt x="1084570" y="538459"/>
+                  <a:pt x="1107680" y="555483"/>
+                  <a:pt x="1136190" y="555483"/>
+                </a:cubicBezTo>
+                <a:cubicBezTo>
+                  <a:pt x="1213493" y="555483"/>
+                  <a:pt x="1203557" y="642241"/>
+                  <a:pt x="1368103" y="555483"/>
+                </a:cubicBezTo>
+                <a:lnTo>
+                  <a:pt x="1948235" y="555483"/>
+                </a:lnTo>
+                <a:lnTo>
+                  <a:pt x="1948401" y="573172"/>
+                </a:lnTo>
+                <a:lnTo>
+                  <a:pt x="1948954" y="632777"/>
+                </a:lnTo>
+                <a:lnTo>
+                  <a:pt x="1385550" y="632777"/>
+                </a:lnTo>
+                <a:cubicBezTo>
+                  <a:pt x="1263171" y="709895"/>
+                  <a:pt x="1219310" y="632777"/>
+                  <a:pt x="1136190" y="632777"/>
+                </a:cubicBezTo>
+                <a:cubicBezTo>
+                  <a:pt x="1107680" y="632777"/>
+                  <a:pt x="1084570" y="649801"/>
+                  <a:pt x="1084570" y="670802"/>
+                </a:cubicBezTo>
+                <a:lnTo>
+                  <a:pt x="1084570" y="822894"/>
+                </a:lnTo>
+                <a:cubicBezTo>
+                  <a:pt x="1084570" y="843894"/>
+                  <a:pt x="1107680" y="860918"/>
+                  <a:pt x="1136190" y="860918"/>
+                </a:cubicBezTo>
+                <a:cubicBezTo>
+                  <a:pt x="1213493" y="860918"/>
+                  <a:pt x="1203557" y="947676"/>
+                  <a:pt x="1368103" y="860918"/>
+                </a:cubicBezTo>
+                <a:lnTo>
+                  <a:pt x="1951037" y="860918"/>
+                </a:lnTo>
+                <a:lnTo>
+                  <a:pt x="1951604" y="925072"/>
+                </a:lnTo>
+                <a:lnTo>
+                  <a:pt x="1199202" y="925072"/>
+                </a:lnTo>
+                <a:cubicBezTo>
+                  <a:pt x="1156985" y="1010651"/>
+                  <a:pt x="1141855" y="925072"/>
+                  <a:pt x="1113181" y="925072"/>
+                </a:cubicBezTo>
+                <a:cubicBezTo>
+                  <a:pt x="1103346" y="925072"/>
+                  <a:pt x="1095374" y="943964"/>
+                  <a:pt x="1095374" y="967268"/>
+                </a:cubicBezTo>
+                <a:lnTo>
+                  <a:pt x="1095374" y="1136046"/>
+                </a:lnTo>
+                <a:cubicBezTo>
+                  <a:pt x="1095374" y="1159350"/>
+                  <a:pt x="1103346" y="1178242"/>
+                  <a:pt x="1113181" y="1178242"/>
+                </a:cubicBezTo>
+                <a:cubicBezTo>
+                  <a:pt x="1139848" y="1178242"/>
+                  <a:pt x="1136421" y="1274518"/>
+                  <a:pt x="1193183" y="1178242"/>
+                </a:cubicBezTo>
+                <a:lnTo>
+                  <a:pt x="1953771" y="1178242"/>
+                </a:lnTo>
+                <a:lnTo>
+                  <a:pt x="1954320" y="1243647"/>
+                </a:lnTo>
+                <a:lnTo>
+                  <a:pt x="1385550" y="1243647"/>
+                </a:lnTo>
+                <a:cubicBezTo>
+                  <a:pt x="1263171" y="1320765"/>
+                  <a:pt x="1219310" y="1243647"/>
+                  <a:pt x="1136190" y="1243647"/>
+                </a:cubicBezTo>
+                <a:cubicBezTo>
+                  <a:pt x="1107680" y="1243647"/>
+                  <a:pt x="1084570" y="1260671"/>
+                  <a:pt x="1084570" y="1281672"/>
+                </a:cubicBezTo>
+                <a:lnTo>
+                  <a:pt x="1084570" y="1433764"/>
+                </a:lnTo>
+                <a:cubicBezTo>
+                  <a:pt x="1084570" y="1454764"/>
+                  <a:pt x="1107680" y="1471788"/>
+                  <a:pt x="1136190" y="1471788"/>
+                </a:cubicBezTo>
+                <a:cubicBezTo>
+                  <a:pt x="1213493" y="1471788"/>
+                  <a:pt x="1203557" y="1558546"/>
+                  <a:pt x="1368103" y="1471788"/>
+                </a:cubicBezTo>
+                <a:lnTo>
+                  <a:pt x="1956131" y="1471788"/>
+                </a:lnTo>
+                <a:lnTo>
+                  <a:pt x="1956731" y="1549082"/>
+                </a:lnTo>
+                <a:lnTo>
+                  <a:pt x="1385550" y="1549082"/>
+                </a:lnTo>
+                <a:cubicBezTo>
+                  <a:pt x="1263171" y="1626200"/>
+                  <a:pt x="1219310" y="1549082"/>
+                  <a:pt x="1136190" y="1549082"/>
+                </a:cubicBezTo>
+                <a:cubicBezTo>
+                  <a:pt x="1107680" y="1549082"/>
+                  <a:pt x="1084570" y="1566106"/>
+                  <a:pt x="1084570" y="1587107"/>
+                </a:cubicBezTo>
+                <a:lnTo>
+                  <a:pt x="1084570" y="1739199"/>
+                </a:lnTo>
+                <a:cubicBezTo>
+                  <a:pt x="1084570" y="1760199"/>
+                  <a:pt x="1107680" y="1777223"/>
+                  <a:pt x="1136190" y="1777223"/>
+                </a:cubicBezTo>
+                <a:cubicBezTo>
+                  <a:pt x="1213493" y="1777223"/>
+                  <a:pt x="1203557" y="1863981"/>
+                  <a:pt x="1368103" y="1777223"/>
+                </a:cubicBezTo>
+                <a:lnTo>
+                  <a:pt x="1958346" y="1777223"/>
+                </a:lnTo>
+                <a:lnTo>
+                  <a:pt x="1958549" y="1806205"/>
+                </a:lnTo>
+                <a:lnTo>
+                  <a:pt x="1958819" y="1850144"/>
+                </a:lnTo>
+                <a:lnTo>
+                  <a:pt x="1202055" y="1850144"/>
+                </a:lnTo>
+                <a:cubicBezTo>
+                  <a:pt x="1159838" y="1935723"/>
+                  <a:pt x="1144708" y="1850144"/>
+                  <a:pt x="1116034" y="1850144"/>
+                </a:cubicBezTo>
+                <a:cubicBezTo>
+                  <a:pt x="1106199" y="1850144"/>
+                  <a:pt x="1098227" y="1869036"/>
+                  <a:pt x="1098227" y="1892340"/>
+                </a:cubicBezTo>
+                <a:lnTo>
+                  <a:pt x="1098227" y="2061118"/>
+                </a:lnTo>
+                <a:cubicBezTo>
+                  <a:pt x="1098227" y="2084422"/>
+                  <a:pt x="1106199" y="2103314"/>
+                  <a:pt x="1116034" y="2103314"/>
+                </a:cubicBezTo>
+                <a:cubicBezTo>
+                  <a:pt x="1142701" y="2103314"/>
+                  <a:pt x="1139274" y="2199590"/>
+                  <a:pt x="1196036" y="2103314"/>
+                </a:cubicBezTo>
+                <a:lnTo>
+                  <a:pt x="1960265" y="2103314"/>
+                </a:lnTo>
+                <a:lnTo>
+                  <a:pt x="1960551" y="2159952"/>
+                </a:lnTo>
+                <a:lnTo>
+                  <a:pt x="1385550" y="2159952"/>
+                </a:lnTo>
+                <a:cubicBezTo>
+                  <a:pt x="1263171" y="2237070"/>
+                  <a:pt x="1219310" y="2159952"/>
+                  <a:pt x="1136190" y="2159952"/>
+                </a:cubicBezTo>
+                <a:cubicBezTo>
+                  <a:pt x="1107680" y="2159952"/>
+                  <a:pt x="1084570" y="2176976"/>
+                  <a:pt x="1084570" y="2197977"/>
+                </a:cubicBezTo>
+                <a:lnTo>
+                  <a:pt x="1084570" y="2350069"/>
+                </a:lnTo>
+                <a:cubicBezTo>
+                  <a:pt x="1084570" y="2371069"/>
+                  <a:pt x="1107680" y="2388093"/>
+                  <a:pt x="1136190" y="2388093"/>
+                </a:cubicBezTo>
+                <a:cubicBezTo>
+                  <a:pt x="1213493" y="2388093"/>
+                  <a:pt x="1203557" y="2474851"/>
+                  <a:pt x="1368103" y="2388093"/>
+                </a:cubicBezTo>
+                <a:lnTo>
+                  <a:pt x="1961367" y="2388093"/>
+                </a:lnTo>
+                <a:lnTo>
+                  <a:pt x="1961503" y="2446502"/>
+                </a:lnTo>
+                <a:lnTo>
+                  <a:pt x="1961515" y="2465387"/>
+                </a:lnTo>
+                <a:lnTo>
+                  <a:pt x="1385550" y="2465387"/>
+                </a:lnTo>
+                <a:cubicBezTo>
+                  <a:pt x="1263171" y="2542505"/>
+                  <a:pt x="1219310" y="2465387"/>
+                  <a:pt x="1136190" y="2465387"/>
+                </a:cubicBezTo>
+                <a:cubicBezTo>
+                  <a:pt x="1107680" y="2465387"/>
+                  <a:pt x="1084570" y="2482411"/>
+                  <a:pt x="1084570" y="2503412"/>
+                </a:cubicBezTo>
+                <a:lnTo>
+                  <a:pt x="1084570" y="2655504"/>
+                </a:lnTo>
+                <a:cubicBezTo>
+                  <a:pt x="1084570" y="2676504"/>
+                  <a:pt x="1107680" y="2693528"/>
+                  <a:pt x="1136190" y="2693528"/>
+                </a:cubicBezTo>
+                <a:cubicBezTo>
+                  <a:pt x="1213493" y="2693528"/>
+                  <a:pt x="1203557" y="2780286"/>
+                  <a:pt x="1368103" y="2693528"/>
+                </a:cubicBezTo>
+                <a:lnTo>
+                  <a:pt x="1961005" y="2693528"/>
+                </a:lnTo>
+                <a:lnTo>
+                  <a:pt x="1960771" y="2723606"/>
+                </a:lnTo>
+                <a:cubicBezTo>
+                  <a:pt x="1960078" y="2790413"/>
+                  <a:pt x="1958891" y="2828521"/>
+                  <a:pt x="1957086" y="2828521"/>
+                </a:cubicBezTo>
+                <a:lnTo>
+                  <a:pt x="206165" y="2779897"/>
+                </a:lnTo>
+                <a:cubicBezTo>
+                  <a:pt x="185226" y="2817432"/>
+                  <a:pt x="174124" y="2841234"/>
+                  <a:pt x="168635" y="2855823"/>
+                </a:cubicBezTo>
+                <a:lnTo>
+                  <a:pt x="165525" y="2866440"/>
+                </a:lnTo>
+                <a:lnTo>
+                  <a:pt x="156702" y="2860445"/>
+                </a:lnTo>
+                <a:cubicBezTo>
+                  <a:pt x="128207" y="2895047"/>
+                  <a:pt x="144152" y="2735326"/>
+                  <a:pt x="125565" y="2726593"/>
+                </a:cubicBezTo>
+                <a:cubicBezTo>
+                  <a:pt x="106978" y="2717860"/>
+                  <a:pt x="145391" y="2771253"/>
+                  <a:pt x="0" y="2786323"/>
+                </a:cubicBezTo>
+                <a:lnTo>
+                  <a:pt x="12273" y="65804"/>
+                </a:lnTo>
+                <a:cubicBezTo>
+                  <a:pt x="12273" y="29461"/>
+                  <a:pt x="24037" y="0"/>
+                  <a:pt x="38547" y="0"/>
+                </a:cubicBezTo>
+                <a:close/>
+              </a:path>
+            </a:pathLst>
+          </a:custGeom>
+        </p:spPr>
+        <p:style>
+          <a:lnRef idx="2">
+            <a:schemeClr val="accent1">
+              <a:shade val="50000"/>
+            </a:schemeClr>
+          </a:lnRef>
+          <a:fillRef idx="1">
+            <a:schemeClr val="accent1"/>
+          </a:fillRef>
+          <a:effectRef idx="0">
+            <a:schemeClr val="accent1"/>
+          </a:effectRef>
+          <a:fontRef idx="minor">
+            <a:schemeClr val="lt1"/>
+          </a:fontRef>
+        </p:style>
+        <p:txBody>
+          <a:bodyPr rot="0" spcFirstLastPara="0" vert="horz" wrap="square" lIns="91440" tIns="45720" rIns="91440" bIns="45720" numCol="1" spcCol="0" rtlCol="0" fromWordArt="0" anchor="t" anchorCtr="0" forceAA="0" compatLnSpc="1">
+            <a:prstTxWarp prst="textNoShape">
+              <a:avLst/>
+            </a:prstTxWarp>
+            <a:noAutofit/>
+          </a:bodyPr>
+          <a:lstStyle/>
+          <a:p>
+            <a:pPr>
+              <a:spcAft>
+                <a:spcPts val="0"/>
+              </a:spcAft>
+            </a:pPr>
+            <a:r>
+              <a:rPr lang="en-US" sz="1200" kern="1200" dirty="0" err="1">
+                <a:solidFill>
+                  <a:srgbClr val="FFFFFF"/>
+                </a:solidFill>
+                <a:effectLst/>
+                <a:ea typeface="新細明體" panose="02020500000000000000" pitchFamily="18" charset="-120"/>
+                <a:cs typeface="Times New Roman" panose="02020603050405020304" pitchFamily="18" charset="0"/>
+              </a:rPr>
+              <a:t>iMi</a:t>
+            </a:r>
+            <a:r>
+              <a:rPr lang="zh-TW" sz="1200" kern="1200" dirty="0">
+                <a:solidFill>
+                  <a:srgbClr val="FFFFFF"/>
+                </a:solidFill>
+                <a:effectLst/>
+                <a:ea typeface="新細明體" panose="02020500000000000000" pitchFamily="18" charset="-120"/>
+                <a:cs typeface="Times New Roman" panose="02020603050405020304" pitchFamily="18" charset="0"/>
+              </a:rPr>
+              <a:t>小車模組</a:t>
+            </a:r>
+            <a:r>
+              <a:rPr lang="en-US" sz="1200" kern="1200" dirty="0">
+                <a:solidFill>
+                  <a:srgbClr val="FFFFFF"/>
+                </a:solidFill>
+                <a:effectLst/>
+                <a:ea typeface="新細明體" panose="02020500000000000000" pitchFamily="18" charset="-120"/>
+                <a:cs typeface="Times New Roman" panose="02020603050405020304" pitchFamily="18" charset="0"/>
+              </a:rPr>
+              <a:t>Mega</a:t>
+            </a:r>
+            <a:r>
+              <a:rPr lang="zh-TW" sz="1200" kern="1200" dirty="0">
+                <a:solidFill>
+                  <a:srgbClr val="FFFFFF"/>
+                </a:solidFill>
+                <a:effectLst/>
+                <a:ea typeface="新細明體" panose="02020500000000000000" pitchFamily="18" charset="-120"/>
+                <a:cs typeface="Times New Roman" panose="02020603050405020304" pitchFamily="18" charset="0"/>
+              </a:rPr>
+              <a:t>初始化</a:t>
+            </a:r>
+            <a:endParaRPr lang="zh-TW" sz="1200" dirty="0">
+              <a:effectLst/>
+              <a:latin typeface="新細明體" panose="02020500000000000000" pitchFamily="18" charset="-120"/>
+              <a:ea typeface="新細明體" panose="02020500000000000000" pitchFamily="18" charset="-120"/>
+              <a:cs typeface="新細明體" panose="02020500000000000000" pitchFamily="18" charset="-120"/>
+            </a:endParaRPr>
+          </a:p>
+          <a:p>
+            <a:pPr>
+              <a:lnSpc>
+                <a:spcPts val="2400"/>
+              </a:lnSpc>
+              <a:spcAft>
+                <a:spcPts val="0"/>
+              </a:spcAft>
+            </a:pPr>
+            <a:r>
+              <a:rPr lang="en-US" sz="1000" kern="1200" dirty="0" err="1">
+                <a:solidFill>
+                  <a:srgbClr val="FFFFFF"/>
+                </a:solidFill>
+                <a:effectLst/>
+                <a:ea typeface="新細明體" panose="02020500000000000000" pitchFamily="18" charset="-120"/>
+                <a:cs typeface="Times New Roman" panose="02020603050405020304" pitchFamily="18" charset="0"/>
+              </a:rPr>
+              <a:t>UART</a:t>
+            </a:r>
+            <a:r>
+              <a:rPr lang="zh-TW" sz="1000" kern="1200" dirty="0">
+                <a:solidFill>
+                  <a:srgbClr val="FFFFFF"/>
+                </a:solidFill>
+                <a:effectLst/>
+                <a:ea typeface="新細明體" panose="02020500000000000000" pitchFamily="18" charset="-120"/>
+                <a:cs typeface="Times New Roman" panose="02020603050405020304" pitchFamily="18" charset="0"/>
+              </a:rPr>
+              <a:t>通訊</a:t>
+            </a:r>
+            <a:endParaRPr lang="zh-TW" sz="1200" dirty="0">
+              <a:effectLst/>
+              <a:latin typeface="新細明體" panose="02020500000000000000" pitchFamily="18" charset="-120"/>
+              <a:ea typeface="新細明體" panose="02020500000000000000" pitchFamily="18" charset="-120"/>
+              <a:cs typeface="新細明體" panose="02020500000000000000" pitchFamily="18" charset="-120"/>
+            </a:endParaRPr>
+          </a:p>
+          <a:p>
+            <a:pPr>
+              <a:lnSpc>
+                <a:spcPts val="2400"/>
+              </a:lnSpc>
+              <a:spcAft>
+                <a:spcPts val="0"/>
+              </a:spcAft>
+            </a:pPr>
+            <a:r>
+              <a:rPr lang="zh-TW" sz="1050" kern="1200" dirty="0">
+                <a:solidFill>
+                  <a:srgbClr val="FFFFFF"/>
+                </a:solidFill>
+                <a:effectLst/>
+                <a:ea typeface="新細明體" panose="02020500000000000000" pitchFamily="18" charset="-120"/>
+                <a:cs typeface="Times New Roman" panose="02020603050405020304" pitchFamily="18" charset="0"/>
+              </a:rPr>
+              <a:t>循跡感測</a:t>
+            </a:r>
+            <a:endParaRPr lang="zh-TW" sz="1200" dirty="0">
+              <a:effectLst/>
+              <a:latin typeface="新細明體" panose="02020500000000000000" pitchFamily="18" charset="-120"/>
+              <a:ea typeface="新細明體" panose="02020500000000000000" pitchFamily="18" charset="-120"/>
+              <a:cs typeface="新細明體" panose="02020500000000000000" pitchFamily="18" charset="-120"/>
+            </a:endParaRPr>
+          </a:p>
+          <a:p>
+            <a:pPr>
+              <a:lnSpc>
+                <a:spcPts val="2400"/>
+              </a:lnSpc>
+              <a:spcAft>
+                <a:spcPts val="0"/>
+              </a:spcAft>
+            </a:pPr>
+            <a:r>
+              <a:rPr lang="zh-TW" sz="1050" kern="1200" dirty="0">
+                <a:solidFill>
+                  <a:srgbClr val="FFFFFF"/>
+                </a:solidFill>
+                <a:effectLst/>
+                <a:ea typeface="新細明體" panose="02020500000000000000" pitchFamily="18" charset="-120"/>
+                <a:cs typeface="Times New Roman" panose="02020603050405020304" pitchFamily="18" charset="0"/>
+              </a:rPr>
+              <a:t>循跡觸發值</a:t>
+            </a:r>
+            <a:endParaRPr lang="zh-TW" sz="1200" dirty="0">
+              <a:effectLst/>
+              <a:latin typeface="新細明體" panose="02020500000000000000" pitchFamily="18" charset="-120"/>
+              <a:ea typeface="新細明體" panose="02020500000000000000" pitchFamily="18" charset="-120"/>
+              <a:cs typeface="新細明體" panose="02020500000000000000" pitchFamily="18" charset="-120"/>
+            </a:endParaRPr>
+          </a:p>
+          <a:p>
+            <a:pPr>
+              <a:lnSpc>
+                <a:spcPts val="2400"/>
+              </a:lnSpc>
+              <a:spcAft>
+                <a:spcPts val="0"/>
+              </a:spcAft>
+            </a:pPr>
+            <a:r>
+              <a:rPr lang="zh-TW" sz="1050" kern="1200" dirty="0">
+                <a:solidFill>
+                  <a:srgbClr val="FFFFFF"/>
+                </a:solidFill>
+                <a:effectLst/>
+                <a:ea typeface="新細明體" panose="02020500000000000000" pitchFamily="18" charset="-120"/>
+                <a:cs typeface="Times New Roman" panose="02020603050405020304" pitchFamily="18" charset="0"/>
+              </a:rPr>
+              <a:t>貨斗伺服馬達</a:t>
+            </a:r>
+            <a:endParaRPr lang="zh-TW" sz="1200" dirty="0">
+              <a:effectLst/>
+              <a:latin typeface="新細明體" panose="02020500000000000000" pitchFamily="18" charset="-120"/>
+              <a:ea typeface="新細明體" panose="02020500000000000000" pitchFamily="18" charset="-120"/>
+              <a:cs typeface="新細明體" panose="02020500000000000000" pitchFamily="18" charset="-120"/>
+            </a:endParaRPr>
+          </a:p>
+          <a:p>
+            <a:pPr>
+              <a:lnSpc>
+                <a:spcPts val="2400"/>
+              </a:lnSpc>
+              <a:spcAft>
+                <a:spcPts val="0"/>
+              </a:spcAft>
+            </a:pPr>
+            <a:r>
+              <a:rPr lang="en-US" sz="1050" kern="1200" dirty="0">
+                <a:solidFill>
+                  <a:srgbClr val="FFFFFF"/>
+                </a:solidFill>
+                <a:effectLst/>
+                <a:ea typeface="新細明體" panose="02020500000000000000" pitchFamily="18" charset="-120"/>
+                <a:cs typeface="Times New Roman" panose="02020603050405020304" pitchFamily="18" charset="0"/>
+              </a:rPr>
+              <a:t>AI</a:t>
+            </a:r>
+            <a:r>
+              <a:rPr lang="zh-TW" sz="1050" kern="1200" dirty="0">
+                <a:solidFill>
+                  <a:srgbClr val="FFFFFF"/>
+                </a:solidFill>
+                <a:effectLst/>
+                <a:ea typeface="新細明體" panose="02020500000000000000" pitchFamily="18" charset="-120"/>
+                <a:cs typeface="Times New Roman" panose="02020603050405020304" pitchFamily="18" charset="0"/>
+              </a:rPr>
+              <a:t>鏡頭伺服馬達</a:t>
+            </a:r>
+            <a:endParaRPr lang="zh-TW" sz="1200" dirty="0">
+              <a:effectLst/>
+              <a:latin typeface="新細明體" panose="02020500000000000000" pitchFamily="18" charset="-120"/>
+              <a:ea typeface="新細明體" panose="02020500000000000000" pitchFamily="18" charset="-120"/>
+              <a:cs typeface="新細明體" panose="02020500000000000000" pitchFamily="18" charset="-120"/>
+            </a:endParaRPr>
+          </a:p>
+          <a:p>
+            <a:pPr>
+              <a:lnSpc>
+                <a:spcPts val="2400"/>
+              </a:lnSpc>
+              <a:spcAft>
+                <a:spcPts val="0"/>
+              </a:spcAft>
+            </a:pPr>
+            <a:r>
+              <a:rPr lang="zh-TW" sz="1050" kern="1200" dirty="0">
+                <a:solidFill>
+                  <a:srgbClr val="FFFFFF"/>
+                </a:solidFill>
+                <a:effectLst/>
+                <a:ea typeface="新細明體" panose="02020500000000000000" pitchFamily="18" charset="-120"/>
+                <a:cs typeface="Times New Roman" panose="02020603050405020304" pitchFamily="18" charset="0"/>
+              </a:rPr>
+              <a:t>簽收鈕腳位</a:t>
+            </a:r>
+            <a:endParaRPr lang="zh-TW" sz="1200" dirty="0">
+              <a:effectLst/>
+              <a:latin typeface="新細明體" panose="02020500000000000000" pitchFamily="18" charset="-120"/>
+              <a:ea typeface="新細明體" panose="02020500000000000000" pitchFamily="18" charset="-120"/>
+              <a:cs typeface="新細明體" panose="02020500000000000000" pitchFamily="18" charset="-120"/>
+            </a:endParaRPr>
+          </a:p>
+          <a:p>
+            <a:pPr>
+              <a:lnSpc>
+                <a:spcPts val="2400"/>
+              </a:lnSpc>
+              <a:spcAft>
+                <a:spcPts val="0"/>
+              </a:spcAft>
+            </a:pPr>
+            <a:r>
+              <a:rPr lang="en-US" sz="1050" kern="1200" dirty="0" err="1">
+                <a:solidFill>
+                  <a:srgbClr val="FFFFFF"/>
+                </a:solidFill>
+                <a:effectLst/>
+                <a:ea typeface="新細明體" panose="02020500000000000000" pitchFamily="18" charset="-120"/>
+                <a:cs typeface="Times New Roman" panose="02020603050405020304" pitchFamily="18" charset="0"/>
+              </a:rPr>
+              <a:t>L298N</a:t>
+            </a:r>
+            <a:r>
+              <a:rPr lang="zh-TW" sz="1050" kern="1200" dirty="0">
+                <a:solidFill>
+                  <a:srgbClr val="FFFFFF"/>
+                </a:solidFill>
+                <a:effectLst/>
+                <a:ea typeface="新細明體" panose="02020500000000000000" pitchFamily="18" charset="-120"/>
+                <a:cs typeface="Times New Roman" panose="02020603050405020304" pitchFamily="18" charset="0"/>
+              </a:rPr>
+              <a:t>馬達腳位</a:t>
+            </a:r>
+            <a:endParaRPr lang="zh-TW" sz="1200" dirty="0">
+              <a:effectLst/>
+              <a:latin typeface="新細明體" panose="02020500000000000000" pitchFamily="18" charset="-120"/>
+              <a:ea typeface="新細明體" panose="02020500000000000000" pitchFamily="18" charset="-120"/>
+              <a:cs typeface="新細明體" panose="02020500000000000000" pitchFamily="18" charset="-120"/>
+            </a:endParaRPr>
+          </a:p>
+          <a:p>
+            <a:pPr>
+              <a:lnSpc>
+                <a:spcPts val="2400"/>
+              </a:lnSpc>
+              <a:spcAft>
+                <a:spcPts val="0"/>
+              </a:spcAft>
+            </a:pPr>
+            <a:r>
+              <a:rPr lang="en-US" sz="1050" kern="1200" dirty="0" err="1">
+                <a:solidFill>
+                  <a:srgbClr val="FFFFFF"/>
+                </a:solidFill>
+                <a:effectLst/>
+                <a:ea typeface="新細明體" panose="02020500000000000000" pitchFamily="18" charset="-120"/>
+                <a:cs typeface="Times New Roman" panose="02020603050405020304" pitchFamily="18" charset="0"/>
+              </a:rPr>
+              <a:t>L298N</a:t>
+            </a:r>
+            <a:r>
+              <a:rPr lang="zh-TW" sz="1000" kern="1200" dirty="0">
+                <a:solidFill>
+                  <a:srgbClr val="FFFFFF"/>
+                </a:solidFill>
+                <a:effectLst/>
+                <a:ea typeface="新細明體" panose="02020500000000000000" pitchFamily="18" charset="-120"/>
+                <a:cs typeface="Times New Roman" panose="02020603050405020304" pitchFamily="18" charset="0"/>
+              </a:rPr>
+              <a:t>使能腳位</a:t>
+            </a:r>
+            <a:endParaRPr lang="zh-TW" sz="1200" dirty="0">
+              <a:effectLst/>
+              <a:latin typeface="新細明體" panose="02020500000000000000" pitchFamily="18" charset="-120"/>
+              <a:ea typeface="新細明體" panose="02020500000000000000" pitchFamily="18" charset="-120"/>
+              <a:cs typeface="新細明體" panose="02020500000000000000" pitchFamily="18" charset="-120"/>
+            </a:endParaRPr>
+          </a:p>
+        </p:txBody>
+      </p:sp>
+    </p:spTree>
+    <p:extLst>
+      <p:ext uri="{BB962C8B-B14F-4D97-AF65-F5344CB8AC3E}">
+        <p14:creationId xmlns:p14="http://schemas.microsoft.com/office/powerpoint/2010/main" val="1488463440"/>
       </p:ext>
     </p:extLst>
   </p:cSld>

--- a/tools/myCustomBlockly/iMi/block.pptx
+++ b/tools/myCustomBlockly/iMi/block.pptx
@@ -245,7 +245,7 @@
           <a:p>
             <a:fld id="{28019EB3-9618-4DC9-9742-E69F5EF18F40}" type="datetimeFigureOut">
               <a:rPr lang="zh-TW" altLang="en-US" smtClean="0"/>
-              <a:t>2023/12/16</a:t>
+              <a:t>2023/12/18</a:t>
             </a:fld>
             <a:endParaRPr lang="zh-TW" altLang="en-US"/>
           </a:p>
@@ -415,7 +415,7 @@
           <a:p>
             <a:fld id="{28019EB3-9618-4DC9-9742-E69F5EF18F40}" type="datetimeFigureOut">
               <a:rPr lang="zh-TW" altLang="en-US" smtClean="0"/>
-              <a:t>2023/12/16</a:t>
+              <a:t>2023/12/18</a:t>
             </a:fld>
             <a:endParaRPr lang="zh-TW" altLang="en-US"/>
           </a:p>
@@ -595,7 +595,7 @@
           <a:p>
             <a:fld id="{28019EB3-9618-4DC9-9742-E69F5EF18F40}" type="datetimeFigureOut">
               <a:rPr lang="zh-TW" altLang="en-US" smtClean="0"/>
-              <a:t>2023/12/16</a:t>
+              <a:t>2023/12/18</a:t>
             </a:fld>
             <a:endParaRPr lang="zh-TW" altLang="en-US"/>
           </a:p>
@@ -765,7 +765,7 @@
           <a:p>
             <a:fld id="{28019EB3-9618-4DC9-9742-E69F5EF18F40}" type="datetimeFigureOut">
               <a:rPr lang="zh-TW" altLang="en-US" smtClean="0"/>
-              <a:t>2023/12/16</a:t>
+              <a:t>2023/12/18</a:t>
             </a:fld>
             <a:endParaRPr lang="zh-TW" altLang="en-US"/>
           </a:p>
@@ -1011,7 +1011,7 @@
           <a:p>
             <a:fld id="{28019EB3-9618-4DC9-9742-E69F5EF18F40}" type="datetimeFigureOut">
               <a:rPr lang="zh-TW" altLang="en-US" smtClean="0"/>
-              <a:t>2023/12/16</a:t>
+              <a:t>2023/12/18</a:t>
             </a:fld>
             <a:endParaRPr lang="zh-TW" altLang="en-US"/>
           </a:p>
@@ -1243,7 +1243,7 @@
           <a:p>
             <a:fld id="{28019EB3-9618-4DC9-9742-E69F5EF18F40}" type="datetimeFigureOut">
               <a:rPr lang="zh-TW" altLang="en-US" smtClean="0"/>
-              <a:t>2023/12/16</a:t>
+              <a:t>2023/12/18</a:t>
             </a:fld>
             <a:endParaRPr lang="zh-TW" altLang="en-US"/>
           </a:p>
@@ -1610,7 +1610,7 @@
           <a:p>
             <a:fld id="{28019EB3-9618-4DC9-9742-E69F5EF18F40}" type="datetimeFigureOut">
               <a:rPr lang="zh-TW" altLang="en-US" smtClean="0"/>
-              <a:t>2023/12/16</a:t>
+              <a:t>2023/12/18</a:t>
             </a:fld>
             <a:endParaRPr lang="zh-TW" altLang="en-US"/>
           </a:p>
@@ -1728,7 +1728,7 @@
           <a:p>
             <a:fld id="{28019EB3-9618-4DC9-9742-E69F5EF18F40}" type="datetimeFigureOut">
               <a:rPr lang="zh-TW" altLang="en-US" smtClean="0"/>
-              <a:t>2023/12/16</a:t>
+              <a:t>2023/12/18</a:t>
             </a:fld>
             <a:endParaRPr lang="zh-TW" altLang="en-US"/>
           </a:p>
@@ -1823,7 +1823,7 @@
           <a:p>
             <a:fld id="{28019EB3-9618-4DC9-9742-E69F5EF18F40}" type="datetimeFigureOut">
               <a:rPr lang="zh-TW" altLang="en-US" smtClean="0"/>
-              <a:t>2023/12/16</a:t>
+              <a:t>2023/12/18</a:t>
             </a:fld>
             <a:endParaRPr lang="zh-TW" altLang="en-US"/>
           </a:p>
@@ -2100,7 +2100,7 @@
           <a:p>
             <a:fld id="{28019EB3-9618-4DC9-9742-E69F5EF18F40}" type="datetimeFigureOut">
               <a:rPr lang="zh-TW" altLang="en-US" smtClean="0"/>
-              <a:t>2023/12/16</a:t>
+              <a:t>2023/12/18</a:t>
             </a:fld>
             <a:endParaRPr lang="zh-TW" altLang="en-US"/>
           </a:p>
@@ -2353,7 +2353,7 @@
           <a:p>
             <a:fld id="{28019EB3-9618-4DC9-9742-E69F5EF18F40}" type="datetimeFigureOut">
               <a:rPr lang="zh-TW" altLang="en-US" smtClean="0"/>
-              <a:t>2023/12/16</a:t>
+              <a:t>2023/12/18</a:t>
             </a:fld>
             <a:endParaRPr lang="zh-TW" altLang="en-US"/>
           </a:p>
@@ -2566,7 +2566,7 @@
           <a:p>
             <a:fld id="{28019EB3-9618-4DC9-9742-E69F5EF18F40}" type="datetimeFigureOut">
               <a:rPr lang="zh-TW" altLang="en-US" smtClean="0"/>
-              <a:t>2023/12/16</a:t>
+              <a:t>2023/12/18</a:t>
             </a:fld>
             <a:endParaRPr lang="zh-TW" altLang="en-US"/>
           </a:p>
@@ -9105,7 +9105,7 @@
         </p:nvSpPr>
         <p:spPr>
           <a:xfrm>
-            <a:off x="4304262" y="4951640"/>
+            <a:off x="7250962" y="2012950"/>
             <a:ext cx="2435260" cy="421640"/>
           </a:xfrm>
           <a:custGeom>
@@ -10835,186 +10835,180 @@
       </p:grpSpPr>
       <p:sp>
         <p:nvSpPr>
-          <p:cNvPr id="82" name="手繪多邊形 81"/>
+          <p:cNvPr id="7" name="圓角矩形 4"/>
           <p:cNvSpPr/>
           <p:nvPr/>
         </p:nvSpPr>
         <p:spPr>
           <a:xfrm>
-            <a:off x="2011362" y="1980565"/>
-            <a:ext cx="1961515" cy="2876550"/>
+            <a:off x="8608060" y="3530600"/>
+            <a:ext cx="2078228" cy="299212"/>
           </a:xfrm>
           <a:custGeom>
             <a:avLst/>
             <a:gdLst>
-              <a:gd name="connsiteX0" fmla="*/ 165525 w 1961515"/>
-              <a:gd name="connsiteY0" fmla="*/ 2866440 h 2876550"/>
-              <a:gd name="connsiteX1" fmla="*/ 169253 w 1961515"/>
-              <a:gd name="connsiteY1" fmla="*/ 2868973 h 2876550"/>
-              <a:gd name="connsiteX2" fmla="*/ 164084 w 1961515"/>
-              <a:gd name="connsiteY2" fmla="*/ 2871363 h 2876550"/>
-              <a:gd name="connsiteX3" fmla="*/ 38547 w 1961515"/>
-              <a:gd name="connsiteY3" fmla="*/ 0 h 2876550"/>
-              <a:gd name="connsiteX4" fmla="*/ 165474 w 1961515"/>
-              <a:gd name="connsiteY4" fmla="*/ 0 h 2876550"/>
-              <a:gd name="connsiteX5" fmla="*/ 1919874 w 1961515"/>
-              <a:gd name="connsiteY5" fmla="*/ 0 h 2876550"/>
-              <a:gd name="connsiteX6" fmla="*/ 1946148 w 1961515"/>
-              <a:gd name="connsiteY6" fmla="*/ 65804 h 2876550"/>
-              <a:gd name="connsiteX7" fmla="*/ 1946148 w 1961515"/>
-              <a:gd name="connsiteY7" fmla="*/ 327342 h 2876550"/>
-              <a:gd name="connsiteX8" fmla="*/ 1385550 w 1961515"/>
-              <a:gd name="connsiteY8" fmla="*/ 327342 h 2876550"/>
-              <a:gd name="connsiteX9" fmla="*/ 1136190 w 1961515"/>
-              <a:gd name="connsiteY9" fmla="*/ 327342 h 2876550"/>
-              <a:gd name="connsiteX10" fmla="*/ 1084570 w 1961515"/>
-              <a:gd name="connsiteY10" fmla="*/ 365367 h 2876550"/>
-              <a:gd name="connsiteX11" fmla="*/ 1084570 w 1961515"/>
-              <a:gd name="connsiteY11" fmla="*/ 517459 h 2876550"/>
-              <a:gd name="connsiteX12" fmla="*/ 1136190 w 1961515"/>
-              <a:gd name="connsiteY12" fmla="*/ 555483 h 2876550"/>
-              <a:gd name="connsiteX13" fmla="*/ 1368103 w 1961515"/>
-              <a:gd name="connsiteY13" fmla="*/ 555483 h 2876550"/>
-              <a:gd name="connsiteX14" fmla="*/ 1948235 w 1961515"/>
-              <a:gd name="connsiteY14" fmla="*/ 555483 h 2876550"/>
-              <a:gd name="connsiteX15" fmla="*/ 1948401 w 1961515"/>
-              <a:gd name="connsiteY15" fmla="*/ 573172 h 2876550"/>
-              <a:gd name="connsiteX16" fmla="*/ 1948954 w 1961515"/>
-              <a:gd name="connsiteY16" fmla="*/ 632777 h 2876550"/>
-              <a:gd name="connsiteX17" fmla="*/ 1385550 w 1961515"/>
-              <a:gd name="connsiteY17" fmla="*/ 632777 h 2876550"/>
-              <a:gd name="connsiteX18" fmla="*/ 1136190 w 1961515"/>
-              <a:gd name="connsiteY18" fmla="*/ 632777 h 2876550"/>
-              <a:gd name="connsiteX19" fmla="*/ 1084570 w 1961515"/>
-              <a:gd name="connsiteY19" fmla="*/ 670802 h 2876550"/>
-              <a:gd name="connsiteX20" fmla="*/ 1084570 w 1961515"/>
-              <a:gd name="connsiteY20" fmla="*/ 822894 h 2876550"/>
-              <a:gd name="connsiteX21" fmla="*/ 1136190 w 1961515"/>
-              <a:gd name="connsiteY21" fmla="*/ 860918 h 2876550"/>
-              <a:gd name="connsiteX22" fmla="*/ 1368103 w 1961515"/>
-              <a:gd name="connsiteY22" fmla="*/ 860918 h 2876550"/>
-              <a:gd name="connsiteX23" fmla="*/ 1951037 w 1961515"/>
-              <a:gd name="connsiteY23" fmla="*/ 860918 h 2876550"/>
-              <a:gd name="connsiteX24" fmla="*/ 1951604 w 1961515"/>
-              <a:gd name="connsiteY24" fmla="*/ 925072 h 2876550"/>
-              <a:gd name="connsiteX25" fmla="*/ 1199202 w 1961515"/>
-              <a:gd name="connsiteY25" fmla="*/ 925072 h 2876550"/>
-              <a:gd name="connsiteX26" fmla="*/ 1113181 w 1961515"/>
-              <a:gd name="connsiteY26" fmla="*/ 925072 h 2876550"/>
-              <a:gd name="connsiteX27" fmla="*/ 1095374 w 1961515"/>
-              <a:gd name="connsiteY27" fmla="*/ 967268 h 2876550"/>
-              <a:gd name="connsiteX28" fmla="*/ 1095374 w 1961515"/>
-              <a:gd name="connsiteY28" fmla="*/ 1136046 h 2876550"/>
-              <a:gd name="connsiteX29" fmla="*/ 1113181 w 1961515"/>
-              <a:gd name="connsiteY29" fmla="*/ 1178242 h 2876550"/>
-              <a:gd name="connsiteX30" fmla="*/ 1193183 w 1961515"/>
-              <a:gd name="connsiteY30" fmla="*/ 1178242 h 2876550"/>
-              <a:gd name="connsiteX31" fmla="*/ 1953771 w 1961515"/>
-              <a:gd name="connsiteY31" fmla="*/ 1178242 h 2876550"/>
-              <a:gd name="connsiteX32" fmla="*/ 1954320 w 1961515"/>
-              <a:gd name="connsiteY32" fmla="*/ 1243647 h 2876550"/>
-              <a:gd name="connsiteX33" fmla="*/ 1385550 w 1961515"/>
-              <a:gd name="connsiteY33" fmla="*/ 1243647 h 2876550"/>
-              <a:gd name="connsiteX34" fmla="*/ 1136190 w 1961515"/>
-              <a:gd name="connsiteY34" fmla="*/ 1243647 h 2876550"/>
-              <a:gd name="connsiteX35" fmla="*/ 1084570 w 1961515"/>
-              <a:gd name="connsiteY35" fmla="*/ 1281672 h 2876550"/>
-              <a:gd name="connsiteX36" fmla="*/ 1084570 w 1961515"/>
-              <a:gd name="connsiteY36" fmla="*/ 1433764 h 2876550"/>
-              <a:gd name="connsiteX37" fmla="*/ 1136190 w 1961515"/>
-              <a:gd name="connsiteY37" fmla="*/ 1471788 h 2876550"/>
-              <a:gd name="connsiteX38" fmla="*/ 1368103 w 1961515"/>
-              <a:gd name="connsiteY38" fmla="*/ 1471788 h 2876550"/>
-              <a:gd name="connsiteX39" fmla="*/ 1956131 w 1961515"/>
-              <a:gd name="connsiteY39" fmla="*/ 1471788 h 2876550"/>
-              <a:gd name="connsiteX40" fmla="*/ 1956731 w 1961515"/>
-              <a:gd name="connsiteY40" fmla="*/ 1549082 h 2876550"/>
-              <a:gd name="connsiteX41" fmla="*/ 1385550 w 1961515"/>
-              <a:gd name="connsiteY41" fmla="*/ 1549082 h 2876550"/>
-              <a:gd name="connsiteX42" fmla="*/ 1136190 w 1961515"/>
-              <a:gd name="connsiteY42" fmla="*/ 1549082 h 2876550"/>
-              <a:gd name="connsiteX43" fmla="*/ 1084570 w 1961515"/>
-              <a:gd name="connsiteY43" fmla="*/ 1587107 h 2876550"/>
-              <a:gd name="connsiteX44" fmla="*/ 1084570 w 1961515"/>
-              <a:gd name="connsiteY44" fmla="*/ 1739199 h 2876550"/>
-              <a:gd name="connsiteX45" fmla="*/ 1136190 w 1961515"/>
-              <a:gd name="connsiteY45" fmla="*/ 1777223 h 2876550"/>
-              <a:gd name="connsiteX46" fmla="*/ 1368103 w 1961515"/>
-              <a:gd name="connsiteY46" fmla="*/ 1777223 h 2876550"/>
-              <a:gd name="connsiteX47" fmla="*/ 1958346 w 1961515"/>
-              <a:gd name="connsiteY47" fmla="*/ 1777223 h 2876550"/>
-              <a:gd name="connsiteX48" fmla="*/ 1958549 w 1961515"/>
-              <a:gd name="connsiteY48" fmla="*/ 1806205 h 2876550"/>
-              <a:gd name="connsiteX49" fmla="*/ 1958819 w 1961515"/>
-              <a:gd name="connsiteY49" fmla="*/ 1850144 h 2876550"/>
-              <a:gd name="connsiteX50" fmla="*/ 1202055 w 1961515"/>
-              <a:gd name="connsiteY50" fmla="*/ 1850144 h 2876550"/>
-              <a:gd name="connsiteX51" fmla="*/ 1116034 w 1961515"/>
-              <a:gd name="connsiteY51" fmla="*/ 1850144 h 2876550"/>
-              <a:gd name="connsiteX52" fmla="*/ 1098227 w 1961515"/>
-              <a:gd name="connsiteY52" fmla="*/ 1892340 h 2876550"/>
-              <a:gd name="connsiteX53" fmla="*/ 1098227 w 1961515"/>
-              <a:gd name="connsiteY53" fmla="*/ 2061118 h 2876550"/>
-              <a:gd name="connsiteX54" fmla="*/ 1116034 w 1961515"/>
-              <a:gd name="connsiteY54" fmla="*/ 2103314 h 2876550"/>
-              <a:gd name="connsiteX55" fmla="*/ 1196036 w 1961515"/>
-              <a:gd name="connsiteY55" fmla="*/ 2103314 h 2876550"/>
-              <a:gd name="connsiteX56" fmla="*/ 1960265 w 1961515"/>
-              <a:gd name="connsiteY56" fmla="*/ 2103314 h 2876550"/>
-              <a:gd name="connsiteX57" fmla="*/ 1960551 w 1961515"/>
-              <a:gd name="connsiteY57" fmla="*/ 2159952 h 2876550"/>
-              <a:gd name="connsiteX58" fmla="*/ 1385550 w 1961515"/>
-              <a:gd name="connsiteY58" fmla="*/ 2159952 h 2876550"/>
-              <a:gd name="connsiteX59" fmla="*/ 1136190 w 1961515"/>
-              <a:gd name="connsiteY59" fmla="*/ 2159952 h 2876550"/>
-              <a:gd name="connsiteX60" fmla="*/ 1084570 w 1961515"/>
-              <a:gd name="connsiteY60" fmla="*/ 2197977 h 2876550"/>
-              <a:gd name="connsiteX61" fmla="*/ 1084570 w 1961515"/>
-              <a:gd name="connsiteY61" fmla="*/ 2350069 h 2876550"/>
-              <a:gd name="connsiteX62" fmla="*/ 1136190 w 1961515"/>
-              <a:gd name="connsiteY62" fmla="*/ 2388093 h 2876550"/>
-              <a:gd name="connsiteX63" fmla="*/ 1368103 w 1961515"/>
-              <a:gd name="connsiteY63" fmla="*/ 2388093 h 2876550"/>
-              <a:gd name="connsiteX64" fmla="*/ 1961367 w 1961515"/>
-              <a:gd name="connsiteY64" fmla="*/ 2388093 h 2876550"/>
-              <a:gd name="connsiteX65" fmla="*/ 1961503 w 1961515"/>
-              <a:gd name="connsiteY65" fmla="*/ 2446502 h 2876550"/>
-              <a:gd name="connsiteX66" fmla="*/ 1961515 w 1961515"/>
-              <a:gd name="connsiteY66" fmla="*/ 2465387 h 2876550"/>
-              <a:gd name="connsiteX67" fmla="*/ 1385550 w 1961515"/>
-              <a:gd name="connsiteY67" fmla="*/ 2465387 h 2876550"/>
-              <a:gd name="connsiteX68" fmla="*/ 1136190 w 1961515"/>
-              <a:gd name="connsiteY68" fmla="*/ 2465387 h 2876550"/>
-              <a:gd name="connsiteX69" fmla="*/ 1084570 w 1961515"/>
-              <a:gd name="connsiteY69" fmla="*/ 2503412 h 2876550"/>
-              <a:gd name="connsiteX70" fmla="*/ 1084570 w 1961515"/>
-              <a:gd name="connsiteY70" fmla="*/ 2655504 h 2876550"/>
-              <a:gd name="connsiteX71" fmla="*/ 1136190 w 1961515"/>
-              <a:gd name="connsiteY71" fmla="*/ 2693528 h 2876550"/>
-              <a:gd name="connsiteX72" fmla="*/ 1368103 w 1961515"/>
-              <a:gd name="connsiteY72" fmla="*/ 2693528 h 2876550"/>
-              <a:gd name="connsiteX73" fmla="*/ 1961005 w 1961515"/>
-              <a:gd name="connsiteY73" fmla="*/ 2693528 h 2876550"/>
-              <a:gd name="connsiteX74" fmla="*/ 1960771 w 1961515"/>
-              <a:gd name="connsiteY74" fmla="*/ 2723606 h 2876550"/>
-              <a:gd name="connsiteX75" fmla="*/ 1957086 w 1961515"/>
-              <a:gd name="connsiteY75" fmla="*/ 2828521 h 2876550"/>
-              <a:gd name="connsiteX76" fmla="*/ 206165 w 1961515"/>
-              <a:gd name="connsiteY76" fmla="*/ 2779897 h 2876550"/>
-              <a:gd name="connsiteX77" fmla="*/ 168635 w 1961515"/>
-              <a:gd name="connsiteY77" fmla="*/ 2855823 h 2876550"/>
-              <a:gd name="connsiteX78" fmla="*/ 165525 w 1961515"/>
-              <a:gd name="connsiteY78" fmla="*/ 2866440 h 2876550"/>
-              <a:gd name="connsiteX79" fmla="*/ 156702 w 1961515"/>
-              <a:gd name="connsiteY79" fmla="*/ 2860445 h 2876550"/>
-              <a:gd name="connsiteX80" fmla="*/ 125565 w 1961515"/>
-              <a:gd name="connsiteY80" fmla="*/ 2726593 h 2876550"/>
-              <a:gd name="connsiteX81" fmla="*/ 0 w 1961515"/>
-              <a:gd name="connsiteY81" fmla="*/ 2786323 h 2876550"/>
-              <a:gd name="connsiteX82" fmla="*/ 12273 w 1961515"/>
-              <a:gd name="connsiteY82" fmla="*/ 65804 h 2876550"/>
-              <a:gd name="connsiteX83" fmla="*/ 38547 w 1961515"/>
-              <a:gd name="connsiteY83" fmla="*/ 0 h 2876550"/>
+              <a:gd name="connsiteX0" fmla="*/ 0 w 4424680"/>
+              <a:gd name="connsiteY0" fmla="*/ 60115 h 360680"/>
+              <a:gd name="connsiteX1" fmla="*/ 60115 w 4424680"/>
+              <a:gd name="connsiteY1" fmla="*/ 0 h 360680"/>
+              <a:gd name="connsiteX2" fmla="*/ 4364565 w 4424680"/>
+              <a:gd name="connsiteY2" fmla="*/ 0 h 360680"/>
+              <a:gd name="connsiteX3" fmla="*/ 4424680 w 4424680"/>
+              <a:gd name="connsiteY3" fmla="*/ 60115 h 360680"/>
+              <a:gd name="connsiteX4" fmla="*/ 4424680 w 4424680"/>
+              <a:gd name="connsiteY4" fmla="*/ 300565 h 360680"/>
+              <a:gd name="connsiteX5" fmla="*/ 4364565 w 4424680"/>
+              <a:gd name="connsiteY5" fmla="*/ 360680 h 360680"/>
+              <a:gd name="connsiteX6" fmla="*/ 60115 w 4424680"/>
+              <a:gd name="connsiteY6" fmla="*/ 360680 h 360680"/>
+              <a:gd name="connsiteX7" fmla="*/ 0 w 4424680"/>
+              <a:gd name="connsiteY7" fmla="*/ 300565 h 360680"/>
+              <a:gd name="connsiteX8" fmla="*/ 0 w 4424680"/>
+              <a:gd name="connsiteY8" fmla="*/ 60115 h 360680"/>
+              <a:gd name="connsiteX0" fmla="*/ 0 w 4424680"/>
+              <a:gd name="connsiteY0" fmla="*/ 60115 h 360680"/>
+              <a:gd name="connsiteX1" fmla="*/ 60115 w 4424680"/>
+              <a:gd name="connsiteY1" fmla="*/ 0 h 360680"/>
+              <a:gd name="connsiteX2" fmla="*/ 279400 w 4424680"/>
+              <a:gd name="connsiteY2" fmla="*/ 0 h 360680"/>
+              <a:gd name="connsiteX3" fmla="*/ 4364565 w 4424680"/>
+              <a:gd name="connsiteY3" fmla="*/ 0 h 360680"/>
+              <a:gd name="connsiteX4" fmla="*/ 4424680 w 4424680"/>
+              <a:gd name="connsiteY4" fmla="*/ 60115 h 360680"/>
+              <a:gd name="connsiteX5" fmla="*/ 4424680 w 4424680"/>
+              <a:gd name="connsiteY5" fmla="*/ 300565 h 360680"/>
+              <a:gd name="connsiteX6" fmla="*/ 4364565 w 4424680"/>
+              <a:gd name="connsiteY6" fmla="*/ 360680 h 360680"/>
+              <a:gd name="connsiteX7" fmla="*/ 60115 w 4424680"/>
+              <a:gd name="connsiteY7" fmla="*/ 360680 h 360680"/>
+              <a:gd name="connsiteX8" fmla="*/ 0 w 4424680"/>
+              <a:gd name="connsiteY8" fmla="*/ 300565 h 360680"/>
+              <a:gd name="connsiteX9" fmla="*/ 0 w 4424680"/>
+              <a:gd name="connsiteY9" fmla="*/ 60115 h 360680"/>
+              <a:gd name="connsiteX0" fmla="*/ 0 w 4424680"/>
+              <a:gd name="connsiteY0" fmla="*/ 60115 h 360680"/>
+              <a:gd name="connsiteX1" fmla="*/ 60115 w 4424680"/>
+              <a:gd name="connsiteY1" fmla="*/ 0 h 360680"/>
+              <a:gd name="connsiteX2" fmla="*/ 4364565 w 4424680"/>
+              <a:gd name="connsiteY2" fmla="*/ 0 h 360680"/>
+              <a:gd name="connsiteX3" fmla="*/ 4424680 w 4424680"/>
+              <a:gd name="connsiteY3" fmla="*/ 60115 h 360680"/>
+              <a:gd name="connsiteX4" fmla="*/ 4424680 w 4424680"/>
+              <a:gd name="connsiteY4" fmla="*/ 300565 h 360680"/>
+              <a:gd name="connsiteX5" fmla="*/ 4364565 w 4424680"/>
+              <a:gd name="connsiteY5" fmla="*/ 360680 h 360680"/>
+              <a:gd name="connsiteX6" fmla="*/ 60115 w 4424680"/>
+              <a:gd name="connsiteY6" fmla="*/ 360680 h 360680"/>
+              <a:gd name="connsiteX7" fmla="*/ 0 w 4424680"/>
+              <a:gd name="connsiteY7" fmla="*/ 300565 h 360680"/>
+              <a:gd name="connsiteX8" fmla="*/ 0 w 4424680"/>
+              <a:gd name="connsiteY8" fmla="*/ 60115 h 360680"/>
+              <a:gd name="connsiteX0" fmla="*/ 0 w 4424680"/>
+              <a:gd name="connsiteY0" fmla="*/ 60115 h 360680"/>
+              <a:gd name="connsiteX1" fmla="*/ 60115 w 4424680"/>
+              <a:gd name="connsiteY1" fmla="*/ 0 h 360680"/>
+              <a:gd name="connsiteX2" fmla="*/ 350520 w 4424680"/>
+              <a:gd name="connsiteY2" fmla="*/ 0 h 360680"/>
+              <a:gd name="connsiteX3" fmla="*/ 4364565 w 4424680"/>
+              <a:gd name="connsiteY3" fmla="*/ 0 h 360680"/>
+              <a:gd name="connsiteX4" fmla="*/ 4424680 w 4424680"/>
+              <a:gd name="connsiteY4" fmla="*/ 60115 h 360680"/>
+              <a:gd name="connsiteX5" fmla="*/ 4424680 w 4424680"/>
+              <a:gd name="connsiteY5" fmla="*/ 300565 h 360680"/>
+              <a:gd name="connsiteX6" fmla="*/ 4364565 w 4424680"/>
+              <a:gd name="connsiteY6" fmla="*/ 360680 h 360680"/>
+              <a:gd name="connsiteX7" fmla="*/ 60115 w 4424680"/>
+              <a:gd name="connsiteY7" fmla="*/ 360680 h 360680"/>
+              <a:gd name="connsiteX8" fmla="*/ 0 w 4424680"/>
+              <a:gd name="connsiteY8" fmla="*/ 300565 h 360680"/>
+              <a:gd name="connsiteX9" fmla="*/ 0 w 4424680"/>
+              <a:gd name="connsiteY9" fmla="*/ 60115 h 360680"/>
+              <a:gd name="connsiteX0" fmla="*/ 0 w 4424680"/>
+              <a:gd name="connsiteY0" fmla="*/ 121075 h 421640"/>
+              <a:gd name="connsiteX1" fmla="*/ 60115 w 4424680"/>
+              <a:gd name="connsiteY1" fmla="*/ 60960 h 421640"/>
+              <a:gd name="connsiteX2" fmla="*/ 350520 w 4424680"/>
+              <a:gd name="connsiteY2" fmla="*/ 60960 h 421640"/>
+              <a:gd name="connsiteX3" fmla="*/ 4364565 w 4424680"/>
+              <a:gd name="connsiteY3" fmla="*/ 60960 h 421640"/>
+              <a:gd name="connsiteX4" fmla="*/ 4424680 w 4424680"/>
+              <a:gd name="connsiteY4" fmla="*/ 121075 h 421640"/>
+              <a:gd name="connsiteX5" fmla="*/ 4424680 w 4424680"/>
+              <a:gd name="connsiteY5" fmla="*/ 361525 h 421640"/>
+              <a:gd name="connsiteX6" fmla="*/ 4364565 w 4424680"/>
+              <a:gd name="connsiteY6" fmla="*/ 421640 h 421640"/>
+              <a:gd name="connsiteX7" fmla="*/ 60115 w 4424680"/>
+              <a:gd name="connsiteY7" fmla="*/ 421640 h 421640"/>
+              <a:gd name="connsiteX8" fmla="*/ 0 w 4424680"/>
+              <a:gd name="connsiteY8" fmla="*/ 361525 h 421640"/>
+              <a:gd name="connsiteX9" fmla="*/ 0 w 4424680"/>
+              <a:gd name="connsiteY9" fmla="*/ 121075 h 421640"/>
+              <a:gd name="connsiteX0" fmla="*/ 0 w 4424680"/>
+              <a:gd name="connsiteY0" fmla="*/ 121075 h 421640"/>
+              <a:gd name="connsiteX1" fmla="*/ 60115 w 4424680"/>
+              <a:gd name="connsiteY1" fmla="*/ 60960 h 421640"/>
+              <a:gd name="connsiteX2" fmla="*/ 350520 w 4424680"/>
+              <a:gd name="connsiteY2" fmla="*/ 60960 h 421640"/>
+              <a:gd name="connsiteX3" fmla="*/ 4364565 w 4424680"/>
+              <a:gd name="connsiteY3" fmla="*/ 60960 h 421640"/>
+              <a:gd name="connsiteX4" fmla="*/ 4424680 w 4424680"/>
+              <a:gd name="connsiteY4" fmla="*/ 121075 h 421640"/>
+              <a:gd name="connsiteX5" fmla="*/ 4424680 w 4424680"/>
+              <a:gd name="connsiteY5" fmla="*/ 361525 h 421640"/>
+              <a:gd name="connsiteX6" fmla="*/ 4364565 w 4424680"/>
+              <a:gd name="connsiteY6" fmla="*/ 421640 h 421640"/>
+              <a:gd name="connsiteX7" fmla="*/ 330200 w 4424680"/>
+              <a:gd name="connsiteY7" fmla="*/ 421640 h 421640"/>
+              <a:gd name="connsiteX8" fmla="*/ 60115 w 4424680"/>
+              <a:gd name="connsiteY8" fmla="*/ 421640 h 421640"/>
+              <a:gd name="connsiteX9" fmla="*/ 0 w 4424680"/>
+              <a:gd name="connsiteY9" fmla="*/ 361525 h 421640"/>
+              <a:gd name="connsiteX10" fmla="*/ 0 w 4424680"/>
+              <a:gd name="connsiteY10" fmla="*/ 121075 h 421640"/>
+              <a:gd name="connsiteX0" fmla="*/ 0 w 4424680"/>
+              <a:gd name="connsiteY0" fmla="*/ 60115 h 360680"/>
+              <a:gd name="connsiteX1" fmla="*/ 60115 w 4424680"/>
+              <a:gd name="connsiteY1" fmla="*/ 0 h 360680"/>
+              <a:gd name="connsiteX2" fmla="*/ 350520 w 4424680"/>
+              <a:gd name="connsiteY2" fmla="*/ 0 h 360680"/>
+              <a:gd name="connsiteX3" fmla="*/ 4364565 w 4424680"/>
+              <a:gd name="connsiteY3" fmla="*/ 0 h 360680"/>
+              <a:gd name="connsiteX4" fmla="*/ 4424680 w 4424680"/>
+              <a:gd name="connsiteY4" fmla="*/ 60115 h 360680"/>
+              <a:gd name="connsiteX5" fmla="*/ 4424680 w 4424680"/>
+              <a:gd name="connsiteY5" fmla="*/ 300565 h 360680"/>
+              <a:gd name="connsiteX6" fmla="*/ 4364565 w 4424680"/>
+              <a:gd name="connsiteY6" fmla="*/ 360680 h 360680"/>
+              <a:gd name="connsiteX7" fmla="*/ 330200 w 4424680"/>
+              <a:gd name="connsiteY7" fmla="*/ 360680 h 360680"/>
+              <a:gd name="connsiteX8" fmla="*/ 60115 w 4424680"/>
+              <a:gd name="connsiteY8" fmla="*/ 360680 h 360680"/>
+              <a:gd name="connsiteX9" fmla="*/ 0 w 4424680"/>
+              <a:gd name="connsiteY9" fmla="*/ 300565 h 360680"/>
+              <a:gd name="connsiteX10" fmla="*/ 0 w 4424680"/>
+              <a:gd name="connsiteY10" fmla="*/ 60115 h 360680"/>
+              <a:gd name="connsiteX0" fmla="*/ 0 w 4424680"/>
+              <a:gd name="connsiteY0" fmla="*/ 60115 h 421640"/>
+              <a:gd name="connsiteX1" fmla="*/ 60115 w 4424680"/>
+              <a:gd name="connsiteY1" fmla="*/ 0 h 421640"/>
+              <a:gd name="connsiteX2" fmla="*/ 350520 w 4424680"/>
+              <a:gd name="connsiteY2" fmla="*/ 0 h 421640"/>
+              <a:gd name="connsiteX3" fmla="*/ 4364565 w 4424680"/>
+              <a:gd name="connsiteY3" fmla="*/ 0 h 421640"/>
+              <a:gd name="connsiteX4" fmla="*/ 4424680 w 4424680"/>
+              <a:gd name="connsiteY4" fmla="*/ 60115 h 421640"/>
+              <a:gd name="connsiteX5" fmla="*/ 4424680 w 4424680"/>
+              <a:gd name="connsiteY5" fmla="*/ 300565 h 421640"/>
+              <a:gd name="connsiteX6" fmla="*/ 4364565 w 4424680"/>
+              <a:gd name="connsiteY6" fmla="*/ 360680 h 421640"/>
+              <a:gd name="connsiteX7" fmla="*/ 330200 w 4424680"/>
+              <a:gd name="connsiteY7" fmla="*/ 360680 h 421640"/>
+              <a:gd name="connsiteX8" fmla="*/ 60115 w 4424680"/>
+              <a:gd name="connsiteY8" fmla="*/ 360680 h 421640"/>
+              <a:gd name="connsiteX9" fmla="*/ 0 w 4424680"/>
+              <a:gd name="connsiteY9" fmla="*/ 300565 h 421640"/>
+              <a:gd name="connsiteX10" fmla="*/ 0 w 4424680"/>
+              <a:gd name="connsiteY10" fmla="*/ 60115 h 421640"/>
             </a:gdLst>
             <a:ahLst/>
             <a:cxnLst>
@@ -11051,561 +11045,537 @@
               <a:cxn ang="0">
                 <a:pos x="connsiteX10" y="connsiteY10"/>
               </a:cxn>
-              <a:cxn ang="0">
-                <a:pos x="connsiteX11" y="connsiteY11"/>
-              </a:cxn>
-              <a:cxn ang="0">
-                <a:pos x="connsiteX12" y="connsiteY12"/>
-              </a:cxn>
-              <a:cxn ang="0">
-                <a:pos x="connsiteX13" y="connsiteY13"/>
-              </a:cxn>
-              <a:cxn ang="0">
-                <a:pos x="connsiteX14" y="connsiteY14"/>
-              </a:cxn>
-              <a:cxn ang="0">
-                <a:pos x="connsiteX15" y="connsiteY15"/>
-              </a:cxn>
-              <a:cxn ang="0">
-                <a:pos x="connsiteX16" y="connsiteY16"/>
-              </a:cxn>
-              <a:cxn ang="0">
-                <a:pos x="connsiteX17" y="connsiteY17"/>
-              </a:cxn>
-              <a:cxn ang="0">
-                <a:pos x="connsiteX18" y="connsiteY18"/>
-              </a:cxn>
-              <a:cxn ang="0">
-                <a:pos x="connsiteX19" y="connsiteY19"/>
-              </a:cxn>
-              <a:cxn ang="0">
-                <a:pos x="connsiteX20" y="connsiteY20"/>
-              </a:cxn>
-              <a:cxn ang="0">
-                <a:pos x="connsiteX21" y="connsiteY21"/>
-              </a:cxn>
-              <a:cxn ang="0">
-                <a:pos x="connsiteX22" y="connsiteY22"/>
-              </a:cxn>
-              <a:cxn ang="0">
-                <a:pos x="connsiteX23" y="connsiteY23"/>
-              </a:cxn>
-              <a:cxn ang="0">
-                <a:pos x="connsiteX24" y="connsiteY24"/>
-              </a:cxn>
-              <a:cxn ang="0">
-                <a:pos x="connsiteX25" y="connsiteY25"/>
-              </a:cxn>
-              <a:cxn ang="0">
-                <a:pos x="connsiteX26" y="connsiteY26"/>
-              </a:cxn>
-              <a:cxn ang="0">
-                <a:pos x="connsiteX27" y="connsiteY27"/>
-              </a:cxn>
-              <a:cxn ang="0">
-                <a:pos x="connsiteX28" y="connsiteY28"/>
-              </a:cxn>
-              <a:cxn ang="0">
-                <a:pos x="connsiteX29" y="connsiteY29"/>
-              </a:cxn>
-              <a:cxn ang="0">
-                <a:pos x="connsiteX30" y="connsiteY30"/>
-              </a:cxn>
-              <a:cxn ang="0">
-                <a:pos x="connsiteX31" y="connsiteY31"/>
-              </a:cxn>
-              <a:cxn ang="0">
-                <a:pos x="connsiteX32" y="connsiteY32"/>
-              </a:cxn>
-              <a:cxn ang="0">
-                <a:pos x="connsiteX33" y="connsiteY33"/>
-              </a:cxn>
-              <a:cxn ang="0">
-                <a:pos x="connsiteX34" y="connsiteY34"/>
-              </a:cxn>
-              <a:cxn ang="0">
-                <a:pos x="connsiteX35" y="connsiteY35"/>
-              </a:cxn>
-              <a:cxn ang="0">
-                <a:pos x="connsiteX36" y="connsiteY36"/>
-              </a:cxn>
-              <a:cxn ang="0">
-                <a:pos x="connsiteX37" y="connsiteY37"/>
-              </a:cxn>
-              <a:cxn ang="0">
-                <a:pos x="connsiteX38" y="connsiteY38"/>
-              </a:cxn>
-              <a:cxn ang="0">
-                <a:pos x="connsiteX39" y="connsiteY39"/>
-              </a:cxn>
-              <a:cxn ang="0">
-                <a:pos x="connsiteX40" y="connsiteY40"/>
-              </a:cxn>
-              <a:cxn ang="0">
-                <a:pos x="connsiteX41" y="connsiteY41"/>
-              </a:cxn>
-              <a:cxn ang="0">
-                <a:pos x="connsiteX42" y="connsiteY42"/>
-              </a:cxn>
-              <a:cxn ang="0">
-                <a:pos x="connsiteX43" y="connsiteY43"/>
-              </a:cxn>
-              <a:cxn ang="0">
-                <a:pos x="connsiteX44" y="connsiteY44"/>
-              </a:cxn>
-              <a:cxn ang="0">
-                <a:pos x="connsiteX45" y="connsiteY45"/>
-              </a:cxn>
-              <a:cxn ang="0">
-                <a:pos x="connsiteX46" y="connsiteY46"/>
-              </a:cxn>
-              <a:cxn ang="0">
-                <a:pos x="connsiteX47" y="connsiteY47"/>
-              </a:cxn>
-              <a:cxn ang="0">
-                <a:pos x="connsiteX48" y="connsiteY48"/>
-              </a:cxn>
-              <a:cxn ang="0">
-                <a:pos x="connsiteX49" y="connsiteY49"/>
-              </a:cxn>
-              <a:cxn ang="0">
-                <a:pos x="connsiteX50" y="connsiteY50"/>
-              </a:cxn>
-              <a:cxn ang="0">
-                <a:pos x="connsiteX51" y="connsiteY51"/>
-              </a:cxn>
-              <a:cxn ang="0">
-                <a:pos x="connsiteX52" y="connsiteY52"/>
-              </a:cxn>
-              <a:cxn ang="0">
-                <a:pos x="connsiteX53" y="connsiteY53"/>
-              </a:cxn>
-              <a:cxn ang="0">
-                <a:pos x="connsiteX54" y="connsiteY54"/>
-              </a:cxn>
-              <a:cxn ang="0">
-                <a:pos x="connsiteX55" y="connsiteY55"/>
-              </a:cxn>
-              <a:cxn ang="0">
-                <a:pos x="connsiteX56" y="connsiteY56"/>
-              </a:cxn>
-              <a:cxn ang="0">
-                <a:pos x="connsiteX57" y="connsiteY57"/>
-              </a:cxn>
-              <a:cxn ang="0">
-                <a:pos x="connsiteX58" y="connsiteY58"/>
-              </a:cxn>
-              <a:cxn ang="0">
-                <a:pos x="connsiteX59" y="connsiteY59"/>
-              </a:cxn>
-              <a:cxn ang="0">
-                <a:pos x="connsiteX60" y="connsiteY60"/>
-              </a:cxn>
-              <a:cxn ang="0">
-                <a:pos x="connsiteX61" y="connsiteY61"/>
-              </a:cxn>
-              <a:cxn ang="0">
-                <a:pos x="connsiteX62" y="connsiteY62"/>
-              </a:cxn>
-              <a:cxn ang="0">
-                <a:pos x="connsiteX63" y="connsiteY63"/>
-              </a:cxn>
-              <a:cxn ang="0">
-                <a:pos x="connsiteX64" y="connsiteY64"/>
-              </a:cxn>
-              <a:cxn ang="0">
-                <a:pos x="connsiteX65" y="connsiteY65"/>
-              </a:cxn>
-              <a:cxn ang="0">
-                <a:pos x="connsiteX66" y="connsiteY66"/>
-              </a:cxn>
-              <a:cxn ang="0">
-                <a:pos x="connsiteX67" y="connsiteY67"/>
-              </a:cxn>
-              <a:cxn ang="0">
-                <a:pos x="connsiteX68" y="connsiteY68"/>
-              </a:cxn>
-              <a:cxn ang="0">
-                <a:pos x="connsiteX69" y="connsiteY69"/>
-              </a:cxn>
-              <a:cxn ang="0">
-                <a:pos x="connsiteX70" y="connsiteY70"/>
-              </a:cxn>
-              <a:cxn ang="0">
-                <a:pos x="connsiteX71" y="connsiteY71"/>
-              </a:cxn>
-              <a:cxn ang="0">
-                <a:pos x="connsiteX72" y="connsiteY72"/>
-              </a:cxn>
-              <a:cxn ang="0">
-                <a:pos x="connsiteX73" y="connsiteY73"/>
-              </a:cxn>
-              <a:cxn ang="0">
-                <a:pos x="connsiteX74" y="connsiteY74"/>
-              </a:cxn>
-              <a:cxn ang="0">
-                <a:pos x="connsiteX75" y="connsiteY75"/>
-              </a:cxn>
-              <a:cxn ang="0">
-                <a:pos x="connsiteX76" y="connsiteY76"/>
-              </a:cxn>
-              <a:cxn ang="0">
-                <a:pos x="connsiteX77" y="connsiteY77"/>
-              </a:cxn>
-              <a:cxn ang="0">
-                <a:pos x="connsiteX78" y="connsiteY78"/>
-              </a:cxn>
-              <a:cxn ang="0">
-                <a:pos x="connsiteX79" y="connsiteY79"/>
-              </a:cxn>
-              <a:cxn ang="0">
-                <a:pos x="connsiteX80" y="connsiteY80"/>
-              </a:cxn>
-              <a:cxn ang="0">
-                <a:pos x="connsiteX81" y="connsiteY81"/>
-              </a:cxn>
-              <a:cxn ang="0">
-                <a:pos x="connsiteX82" y="connsiteY82"/>
-              </a:cxn>
-              <a:cxn ang="0">
-                <a:pos x="connsiteX83" y="connsiteY83"/>
-              </a:cxn>
             </a:cxnLst>
             <a:rect l="l" t="t" r="r" b="b"/>
             <a:pathLst>
-              <a:path w="1961515" h="2876550">
+              <a:path w="4424680" h="421640">
                 <a:moveTo>
-                  <a:pt x="165525" y="2866440"/>
+                  <a:pt x="0" y="60115"/>
+                </a:moveTo>
+                <a:cubicBezTo>
+                  <a:pt x="0" y="26914"/>
+                  <a:pt x="26914" y="0"/>
+                  <a:pt x="60115" y="0"/>
+                </a:cubicBezTo>
+                <a:cubicBezTo>
+                  <a:pt x="156917" y="0"/>
+                  <a:pt x="207998" y="121920"/>
+                  <a:pt x="350520" y="0"/>
+                </a:cubicBezTo>
+                <a:lnTo>
+                  <a:pt x="4364565" y="0"/>
+                </a:lnTo>
+                <a:cubicBezTo>
+                  <a:pt x="4397766" y="0"/>
+                  <a:pt x="4424680" y="26914"/>
+                  <a:pt x="4424680" y="60115"/>
+                </a:cubicBezTo>
+                <a:lnTo>
+                  <a:pt x="4424680" y="300565"/>
+                </a:lnTo>
+                <a:cubicBezTo>
+                  <a:pt x="4424680" y="333766"/>
+                  <a:pt x="4397766" y="360680"/>
+                  <a:pt x="4364565" y="360680"/>
+                </a:cubicBezTo>
+                <a:lnTo>
+                  <a:pt x="330200" y="360680"/>
+                </a:lnTo>
+                <a:cubicBezTo>
+                  <a:pt x="138572" y="497840"/>
+                  <a:pt x="150143" y="360680"/>
+                  <a:pt x="60115" y="360680"/>
+                </a:cubicBezTo>
+                <a:cubicBezTo>
+                  <a:pt x="26914" y="360680"/>
+                  <a:pt x="0" y="333766"/>
+                  <a:pt x="0" y="300565"/>
+                </a:cubicBezTo>
+                <a:lnTo>
+                  <a:pt x="0" y="60115"/>
+                </a:lnTo>
+                <a:close/>
+              </a:path>
+            </a:pathLst>
+          </a:custGeom>
+        </p:spPr>
+        <p:style>
+          <a:lnRef idx="2">
+            <a:schemeClr val="accent1">
+              <a:shade val="50000"/>
+            </a:schemeClr>
+          </a:lnRef>
+          <a:fillRef idx="1">
+            <a:schemeClr val="accent1"/>
+          </a:fillRef>
+          <a:effectRef idx="0">
+            <a:schemeClr val="accent1"/>
+          </a:effectRef>
+          <a:fontRef idx="minor">
+            <a:schemeClr val="lt1"/>
+          </a:fontRef>
+        </p:style>
+        <p:txBody>
+          <a:bodyPr rot="0" spcFirstLastPara="0" vert="horz" wrap="square" lIns="91440" tIns="45720" rIns="91440" bIns="45720" numCol="1" spcCol="0" rtlCol="0" fromWordArt="0" anchor="ctr" anchorCtr="0" forceAA="0" compatLnSpc="1">
+            <a:prstTxWarp prst="textNoShape">
+              <a:avLst/>
+            </a:prstTxWarp>
+            <a:noAutofit/>
+          </a:bodyPr>
+          <a:lstStyle/>
+          <a:p>
+            <a:pPr>
+              <a:spcAft>
+                <a:spcPts val="0"/>
+              </a:spcAft>
+            </a:pPr>
+            <a:r>
+              <a:rPr lang="en-US" sz="1200" kern="100" dirty="0">
+                <a:effectLst/>
+                <a:ea typeface="新細明體" panose="02020500000000000000" pitchFamily="18" charset="-120"/>
+                <a:cs typeface="Times New Roman" panose="02020603050405020304" pitchFamily="18" charset="0"/>
+              </a:rPr>
+              <a:t>4</a:t>
+            </a:r>
+            <a:r>
+              <a:rPr lang="zh-TW" sz="1200" kern="100" dirty="0">
+                <a:effectLst/>
+                <a:ea typeface="新細明體" panose="02020500000000000000" pitchFamily="18" charset="-120"/>
+                <a:cs typeface="Times New Roman" panose="02020603050405020304" pitchFamily="18" charset="0"/>
+              </a:rPr>
+              <a:t>位數字顯示模組 顯示</a:t>
+            </a:r>
+            <a:r>
+              <a:rPr lang="zh-TW" sz="1200" kern="100" dirty="0" smtClean="0">
+                <a:effectLst/>
+                <a:ea typeface="新細明體" panose="02020500000000000000" pitchFamily="18" charset="-120"/>
+                <a:cs typeface="Times New Roman" panose="02020603050405020304" pitchFamily="18" charset="0"/>
+              </a:rPr>
+              <a:t>數字</a:t>
+            </a:r>
+            <a:endParaRPr lang="zh-TW" sz="1200" kern="100" dirty="0">
+              <a:effectLst/>
+              <a:ea typeface="新細明體" panose="02020500000000000000" pitchFamily="18" charset="-120"/>
+              <a:cs typeface="Times New Roman" panose="02020603050405020304" pitchFamily="18" charset="0"/>
+            </a:endParaRPr>
+          </a:p>
+        </p:txBody>
+      </p:sp>
+      <p:sp>
+        <p:nvSpPr>
+          <p:cNvPr id="13" name="手繪多邊形 12"/>
+          <p:cNvSpPr/>
+          <p:nvPr/>
+        </p:nvSpPr>
+        <p:spPr>
+          <a:xfrm>
+            <a:off x="1969799" y="1894332"/>
+            <a:ext cx="1888891" cy="1324356"/>
+          </a:xfrm>
+          <a:custGeom>
+            <a:avLst/>
+            <a:gdLst>
+              <a:gd name="connsiteX0" fmla="*/ 160364 w 1888891"/>
+              <a:gd name="connsiteY0" fmla="*/ 1320015 h 1324356"/>
+              <a:gd name="connsiteX1" fmla="*/ 162989 w 1888891"/>
+              <a:gd name="connsiteY1" fmla="*/ 1320867 h 1324356"/>
+              <a:gd name="connsiteX2" fmla="*/ 158683 w 1888891"/>
+              <a:gd name="connsiteY2" fmla="*/ 1324321 h 1324356"/>
+              <a:gd name="connsiteX3" fmla="*/ 37121 w 1888891"/>
+              <a:gd name="connsiteY3" fmla="*/ 0 h 1324356"/>
+              <a:gd name="connsiteX4" fmla="*/ 159350 w 1888891"/>
+              <a:gd name="connsiteY4" fmla="*/ 0 h 1324356"/>
+              <a:gd name="connsiteX5" fmla="*/ 1848828 w 1888891"/>
+              <a:gd name="connsiteY5" fmla="*/ 0 h 1324356"/>
+              <a:gd name="connsiteX6" fmla="*/ 1874130 w 1888891"/>
+              <a:gd name="connsiteY6" fmla="*/ 30296 h 1324356"/>
+              <a:gd name="connsiteX7" fmla="*/ 1874130 w 1888891"/>
+              <a:gd name="connsiteY7" fmla="*/ 151475 h 1324356"/>
+              <a:gd name="connsiteX8" fmla="*/ 1875409 w 1888891"/>
+              <a:gd name="connsiteY8" fmla="*/ 218558 h 1324356"/>
+              <a:gd name="connsiteX9" fmla="*/ 1875639 w 1888891"/>
+              <a:gd name="connsiteY9" fmla="*/ 230268 h 1324356"/>
+              <a:gd name="connsiteX10" fmla="*/ 1200673 w 1888891"/>
+              <a:gd name="connsiteY10" fmla="*/ 230268 h 1324356"/>
+              <a:gd name="connsiteX11" fmla="*/ 1064273 w 1888891"/>
+              <a:gd name="connsiteY11" fmla="*/ 230268 h 1324356"/>
+              <a:gd name="connsiteX12" fmla="*/ 1036037 w 1888891"/>
+              <a:gd name="connsiteY12" fmla="*/ 272928 h 1324356"/>
+              <a:gd name="connsiteX13" fmla="*/ 1036037 w 1888891"/>
+              <a:gd name="connsiteY13" fmla="*/ 443561 h 1324356"/>
+              <a:gd name="connsiteX14" fmla="*/ 1064273 w 1888891"/>
+              <a:gd name="connsiteY14" fmla="*/ 486221 h 1324356"/>
+              <a:gd name="connsiteX15" fmla="*/ 1191129 w 1888891"/>
+              <a:gd name="connsiteY15" fmla="*/ 486221 h 1324356"/>
+              <a:gd name="connsiteX16" fmla="*/ 1880476 w 1888891"/>
+              <a:gd name="connsiteY16" fmla="*/ 486221 h 1324356"/>
+              <a:gd name="connsiteX17" fmla="*/ 1881147 w 1888891"/>
+              <a:gd name="connsiteY17" fmla="*/ 522938 h 1324356"/>
+              <a:gd name="connsiteX18" fmla="*/ 1882136 w 1888891"/>
+              <a:gd name="connsiteY18" fmla="*/ 582518 h 1324356"/>
+              <a:gd name="connsiteX19" fmla="*/ 1200673 w 1888891"/>
+              <a:gd name="connsiteY19" fmla="*/ 582518 h 1324356"/>
+              <a:gd name="connsiteX20" fmla="*/ 1064273 w 1888891"/>
+              <a:gd name="connsiteY20" fmla="*/ 582518 h 1324356"/>
+              <a:gd name="connsiteX21" fmla="*/ 1036037 w 1888891"/>
+              <a:gd name="connsiteY21" fmla="*/ 625178 h 1324356"/>
+              <a:gd name="connsiteX22" fmla="*/ 1036037 w 1888891"/>
+              <a:gd name="connsiteY22" fmla="*/ 795811 h 1324356"/>
+              <a:gd name="connsiteX23" fmla="*/ 1064273 w 1888891"/>
+              <a:gd name="connsiteY23" fmla="*/ 838471 h 1324356"/>
+              <a:gd name="connsiteX24" fmla="*/ 1191129 w 1888891"/>
+              <a:gd name="connsiteY24" fmla="*/ 838471 h 1324356"/>
+              <a:gd name="connsiteX25" fmla="*/ 1886063 w 1888891"/>
+              <a:gd name="connsiteY25" fmla="*/ 838471 h 1324356"/>
+              <a:gd name="connsiteX26" fmla="*/ 1887129 w 1888891"/>
+              <a:gd name="connsiteY26" fmla="*/ 917242 h 1324356"/>
+              <a:gd name="connsiteX27" fmla="*/ 1200673 w 1888891"/>
+              <a:gd name="connsiteY27" fmla="*/ 917242 h 1324356"/>
+              <a:gd name="connsiteX28" fmla="*/ 1064273 w 1888891"/>
+              <a:gd name="connsiteY28" fmla="*/ 917242 h 1324356"/>
+              <a:gd name="connsiteX29" fmla="*/ 1036037 w 1888891"/>
+              <a:gd name="connsiteY29" fmla="*/ 959902 h 1324356"/>
+              <a:gd name="connsiteX30" fmla="*/ 1036037 w 1888891"/>
+              <a:gd name="connsiteY30" fmla="*/ 1130535 h 1324356"/>
+              <a:gd name="connsiteX31" fmla="*/ 1064273 w 1888891"/>
+              <a:gd name="connsiteY31" fmla="*/ 1173195 h 1324356"/>
+              <a:gd name="connsiteX32" fmla="*/ 1191129 w 1888891"/>
+              <a:gd name="connsiteY32" fmla="*/ 1173195 h 1324356"/>
+              <a:gd name="connsiteX33" fmla="*/ 1888891 w 1888891"/>
+              <a:gd name="connsiteY33" fmla="*/ 1173195 h 1324356"/>
+              <a:gd name="connsiteX34" fmla="*/ 1888880 w 1888891"/>
+              <a:gd name="connsiteY34" fmla="*/ 1197479 h 1324356"/>
+              <a:gd name="connsiteX35" fmla="*/ 1884663 w 1888891"/>
+              <a:gd name="connsiteY35" fmla="*/ 1302244 h 1324356"/>
+              <a:gd name="connsiteX36" fmla="*/ 198535 w 1888891"/>
+              <a:gd name="connsiteY36" fmla="*/ 1279857 h 1324356"/>
+              <a:gd name="connsiteX37" fmla="*/ 162395 w 1888891"/>
+              <a:gd name="connsiteY37" fmla="*/ 1314813 h 1324356"/>
+              <a:gd name="connsiteX38" fmla="*/ 160364 w 1888891"/>
+              <a:gd name="connsiteY38" fmla="*/ 1320015 h 1324356"/>
+              <a:gd name="connsiteX39" fmla="*/ 150903 w 1888891"/>
+              <a:gd name="connsiteY39" fmla="*/ 1316941 h 1324356"/>
+              <a:gd name="connsiteX40" fmla="*/ 120918 w 1888891"/>
+              <a:gd name="connsiteY40" fmla="*/ 1255316 h 1324356"/>
+              <a:gd name="connsiteX41" fmla="*/ 0 w 1888891"/>
+              <a:gd name="connsiteY41" fmla="*/ 1282816 h 1324356"/>
+              <a:gd name="connsiteX42" fmla="*/ 11819 w 1888891"/>
+              <a:gd name="connsiteY42" fmla="*/ 30296 h 1324356"/>
+              <a:gd name="connsiteX43" fmla="*/ 37121 w 1888891"/>
+              <a:gd name="connsiteY43" fmla="*/ 0 h 1324356"/>
+            </a:gdLst>
+            <a:ahLst/>
+            <a:cxnLst>
+              <a:cxn ang="0">
+                <a:pos x="connsiteX0" y="connsiteY0"/>
+              </a:cxn>
+              <a:cxn ang="0">
+                <a:pos x="connsiteX1" y="connsiteY1"/>
+              </a:cxn>
+              <a:cxn ang="0">
+                <a:pos x="connsiteX2" y="connsiteY2"/>
+              </a:cxn>
+              <a:cxn ang="0">
+                <a:pos x="connsiteX3" y="connsiteY3"/>
+              </a:cxn>
+              <a:cxn ang="0">
+                <a:pos x="connsiteX4" y="connsiteY4"/>
+              </a:cxn>
+              <a:cxn ang="0">
+                <a:pos x="connsiteX5" y="connsiteY5"/>
+              </a:cxn>
+              <a:cxn ang="0">
+                <a:pos x="connsiteX6" y="connsiteY6"/>
+              </a:cxn>
+              <a:cxn ang="0">
+                <a:pos x="connsiteX7" y="connsiteY7"/>
+              </a:cxn>
+              <a:cxn ang="0">
+                <a:pos x="connsiteX8" y="connsiteY8"/>
+              </a:cxn>
+              <a:cxn ang="0">
+                <a:pos x="connsiteX9" y="connsiteY9"/>
+              </a:cxn>
+              <a:cxn ang="0">
+                <a:pos x="connsiteX10" y="connsiteY10"/>
+              </a:cxn>
+              <a:cxn ang="0">
+                <a:pos x="connsiteX11" y="connsiteY11"/>
+              </a:cxn>
+              <a:cxn ang="0">
+                <a:pos x="connsiteX12" y="connsiteY12"/>
+              </a:cxn>
+              <a:cxn ang="0">
+                <a:pos x="connsiteX13" y="connsiteY13"/>
+              </a:cxn>
+              <a:cxn ang="0">
+                <a:pos x="connsiteX14" y="connsiteY14"/>
+              </a:cxn>
+              <a:cxn ang="0">
+                <a:pos x="connsiteX15" y="connsiteY15"/>
+              </a:cxn>
+              <a:cxn ang="0">
+                <a:pos x="connsiteX16" y="connsiteY16"/>
+              </a:cxn>
+              <a:cxn ang="0">
+                <a:pos x="connsiteX17" y="connsiteY17"/>
+              </a:cxn>
+              <a:cxn ang="0">
+                <a:pos x="connsiteX18" y="connsiteY18"/>
+              </a:cxn>
+              <a:cxn ang="0">
+                <a:pos x="connsiteX19" y="connsiteY19"/>
+              </a:cxn>
+              <a:cxn ang="0">
+                <a:pos x="connsiteX20" y="connsiteY20"/>
+              </a:cxn>
+              <a:cxn ang="0">
+                <a:pos x="connsiteX21" y="connsiteY21"/>
+              </a:cxn>
+              <a:cxn ang="0">
+                <a:pos x="connsiteX22" y="connsiteY22"/>
+              </a:cxn>
+              <a:cxn ang="0">
+                <a:pos x="connsiteX23" y="connsiteY23"/>
+              </a:cxn>
+              <a:cxn ang="0">
+                <a:pos x="connsiteX24" y="connsiteY24"/>
+              </a:cxn>
+              <a:cxn ang="0">
+                <a:pos x="connsiteX25" y="connsiteY25"/>
+              </a:cxn>
+              <a:cxn ang="0">
+                <a:pos x="connsiteX26" y="connsiteY26"/>
+              </a:cxn>
+              <a:cxn ang="0">
+                <a:pos x="connsiteX27" y="connsiteY27"/>
+              </a:cxn>
+              <a:cxn ang="0">
+                <a:pos x="connsiteX28" y="connsiteY28"/>
+              </a:cxn>
+              <a:cxn ang="0">
+                <a:pos x="connsiteX29" y="connsiteY29"/>
+              </a:cxn>
+              <a:cxn ang="0">
+                <a:pos x="connsiteX30" y="connsiteY30"/>
+              </a:cxn>
+              <a:cxn ang="0">
+                <a:pos x="connsiteX31" y="connsiteY31"/>
+              </a:cxn>
+              <a:cxn ang="0">
+                <a:pos x="connsiteX32" y="connsiteY32"/>
+              </a:cxn>
+              <a:cxn ang="0">
+                <a:pos x="connsiteX33" y="connsiteY33"/>
+              </a:cxn>
+              <a:cxn ang="0">
+                <a:pos x="connsiteX34" y="connsiteY34"/>
+              </a:cxn>
+              <a:cxn ang="0">
+                <a:pos x="connsiteX35" y="connsiteY35"/>
+              </a:cxn>
+              <a:cxn ang="0">
+                <a:pos x="connsiteX36" y="connsiteY36"/>
+              </a:cxn>
+              <a:cxn ang="0">
+                <a:pos x="connsiteX37" y="connsiteY37"/>
+              </a:cxn>
+              <a:cxn ang="0">
+                <a:pos x="connsiteX38" y="connsiteY38"/>
+              </a:cxn>
+              <a:cxn ang="0">
+                <a:pos x="connsiteX39" y="connsiteY39"/>
+              </a:cxn>
+              <a:cxn ang="0">
+                <a:pos x="connsiteX40" y="connsiteY40"/>
+              </a:cxn>
+              <a:cxn ang="0">
+                <a:pos x="connsiteX41" y="connsiteY41"/>
+              </a:cxn>
+              <a:cxn ang="0">
+                <a:pos x="connsiteX42" y="connsiteY42"/>
+              </a:cxn>
+              <a:cxn ang="0">
+                <a:pos x="connsiteX43" y="connsiteY43"/>
+              </a:cxn>
+            </a:cxnLst>
+            <a:rect l="l" t="t" r="r" b="b"/>
+            <a:pathLst>
+              <a:path w="1888891" h="1324356">
+                <a:moveTo>
+                  <a:pt x="160364" y="1320015"/>
                 </a:moveTo>
                 <a:lnTo>
-                  <a:pt x="169253" y="2868973"/>
+                  <a:pt x="162989" y="1320867"/>
                 </a:lnTo>
                 <a:cubicBezTo>
-                  <a:pt x="169160" y="2875241"/>
-                  <a:pt x="162684" y="2881123"/>
-                  <a:pt x="164084" y="2871363"/>
+                  <a:pt x="162930" y="1322791"/>
+                  <a:pt x="160138" y="1324636"/>
+                  <a:pt x="158683" y="1324321"/>
                 </a:cubicBezTo>
                 <a:close/>
                 <a:moveTo>
-                  <a:pt x="38547" y="0"/>
+                  <a:pt x="37121" y="0"/>
                 </a:moveTo>
                 <a:cubicBezTo>
-                  <a:pt x="80857" y="0"/>
-                  <a:pt x="103182" y="133458"/>
-                  <a:pt x="165474" y="0"/>
+                  <a:pt x="77864" y="0"/>
+                  <a:pt x="99364" y="61444"/>
+                  <a:pt x="159350" y="0"/>
                 </a:cubicBezTo>
                 <a:lnTo>
-                  <a:pt x="1919874" y="0"/>
+                  <a:pt x="1848828" y="0"/>
                 </a:lnTo>
                 <a:cubicBezTo>
-                  <a:pt x="1934385" y="0"/>
-                  <a:pt x="1946148" y="29461"/>
-                  <a:pt x="1946148" y="65804"/>
+                  <a:pt x="1862802" y="0"/>
+                  <a:pt x="1874130" y="13564"/>
+                  <a:pt x="1874130" y="30296"/>
                 </a:cubicBezTo>
                 <a:lnTo>
-                  <a:pt x="1946148" y="327342"/>
+                  <a:pt x="1874130" y="151475"/>
+                </a:lnTo>
+                <a:cubicBezTo>
+                  <a:pt x="1874130" y="153828"/>
+                  <a:pt x="1874615" y="178276"/>
+                  <a:pt x="1875409" y="218558"/>
+                </a:cubicBezTo>
+                <a:lnTo>
+                  <a:pt x="1875639" y="230268"/>
                 </a:lnTo>
                 <a:lnTo>
-                  <a:pt x="1385550" y="327342"/>
+                  <a:pt x="1200673" y="230268"/>
                 </a:lnTo>
                 <a:cubicBezTo>
-                  <a:pt x="1263171" y="404460"/>
-                  <a:pt x="1219310" y="327342"/>
-                  <a:pt x="1136190" y="327342"/>
+                  <a:pt x="1133732" y="316787"/>
+                  <a:pt x="1109739" y="230268"/>
+                  <a:pt x="1064273" y="230268"/>
                 </a:cubicBezTo>
                 <a:cubicBezTo>
-                  <a:pt x="1107680" y="327342"/>
-                  <a:pt x="1084570" y="344366"/>
-                  <a:pt x="1084570" y="365367"/>
+                  <a:pt x="1048678" y="230268"/>
+                  <a:pt x="1036037" y="249367"/>
+                  <a:pt x="1036037" y="272928"/>
                 </a:cubicBezTo>
                 <a:lnTo>
-                  <a:pt x="1084570" y="517459"/>
+                  <a:pt x="1036037" y="443561"/>
                 </a:lnTo>
                 <a:cubicBezTo>
-                  <a:pt x="1084570" y="538459"/>
-                  <a:pt x="1107680" y="555483"/>
-                  <a:pt x="1136190" y="555483"/>
+                  <a:pt x="1036037" y="467121"/>
+                  <a:pt x="1048678" y="486221"/>
+                  <a:pt x="1064273" y="486221"/>
                 </a:cubicBezTo>
                 <a:cubicBezTo>
-                  <a:pt x="1213493" y="555483"/>
-                  <a:pt x="1203557" y="642241"/>
-                  <a:pt x="1368103" y="555483"/>
+                  <a:pt x="1106558" y="486221"/>
+                  <a:pt x="1101123" y="583555"/>
+                  <a:pt x="1191129" y="486221"/>
                 </a:cubicBezTo>
                 <a:lnTo>
-                  <a:pt x="1948235" y="555483"/>
+                  <a:pt x="1880476" y="486221"/>
                 </a:lnTo>
                 <a:lnTo>
-                  <a:pt x="1948401" y="573172"/>
+                  <a:pt x="1881147" y="522938"/>
                 </a:lnTo>
                 <a:lnTo>
-                  <a:pt x="1948954" y="632777"/>
+                  <a:pt x="1882136" y="582518"/>
                 </a:lnTo>
                 <a:lnTo>
-                  <a:pt x="1385550" y="632777"/>
+                  <a:pt x="1200673" y="582518"/>
                 </a:lnTo>
                 <a:cubicBezTo>
-                  <a:pt x="1263171" y="709895"/>
-                  <a:pt x="1219310" y="632777"/>
-                  <a:pt x="1136190" y="632777"/>
+                  <a:pt x="1133732" y="669037"/>
+                  <a:pt x="1109739" y="582518"/>
+                  <a:pt x="1064273" y="582518"/>
                 </a:cubicBezTo>
                 <a:cubicBezTo>
-                  <a:pt x="1107680" y="632777"/>
-                  <a:pt x="1084570" y="649801"/>
-                  <a:pt x="1084570" y="670802"/>
+                  <a:pt x="1048678" y="582518"/>
+                  <a:pt x="1036037" y="601617"/>
+                  <a:pt x="1036037" y="625178"/>
                 </a:cubicBezTo>
                 <a:lnTo>
-                  <a:pt x="1084570" y="822894"/>
+                  <a:pt x="1036037" y="795811"/>
                 </a:lnTo>
                 <a:cubicBezTo>
-                  <a:pt x="1084570" y="843894"/>
-                  <a:pt x="1107680" y="860918"/>
-                  <a:pt x="1136190" y="860918"/>
+                  <a:pt x="1036037" y="819371"/>
+                  <a:pt x="1048678" y="838471"/>
+                  <a:pt x="1064273" y="838471"/>
                 </a:cubicBezTo>
                 <a:cubicBezTo>
-                  <a:pt x="1213493" y="860918"/>
-                  <a:pt x="1203557" y="947676"/>
-                  <a:pt x="1368103" y="860918"/>
+                  <a:pt x="1106558" y="838471"/>
+                  <a:pt x="1101123" y="935805"/>
+                  <a:pt x="1191129" y="838471"/>
                 </a:cubicBezTo>
                 <a:lnTo>
-                  <a:pt x="1951037" y="860918"/>
+                  <a:pt x="1886063" y="838471"/>
                 </a:lnTo>
                 <a:lnTo>
-                  <a:pt x="1951604" y="925072"/>
+                  <a:pt x="1887129" y="917242"/>
                 </a:lnTo>
                 <a:lnTo>
-                  <a:pt x="1199202" y="925072"/>
+                  <a:pt x="1200673" y="917242"/>
                 </a:lnTo>
                 <a:cubicBezTo>
-                  <a:pt x="1156985" y="1010651"/>
-                  <a:pt x="1141855" y="925072"/>
-                  <a:pt x="1113181" y="925072"/>
+                  <a:pt x="1133732" y="1003761"/>
+                  <a:pt x="1109739" y="917242"/>
+                  <a:pt x="1064273" y="917242"/>
                 </a:cubicBezTo>
                 <a:cubicBezTo>
-                  <a:pt x="1103346" y="925072"/>
-                  <a:pt x="1095374" y="943964"/>
-                  <a:pt x="1095374" y="967268"/>
+                  <a:pt x="1048678" y="917242"/>
+                  <a:pt x="1036037" y="936341"/>
+                  <a:pt x="1036037" y="959902"/>
                 </a:cubicBezTo>
                 <a:lnTo>
-                  <a:pt x="1095374" y="1136046"/>
+                  <a:pt x="1036037" y="1130535"/>
                 </a:lnTo>
                 <a:cubicBezTo>
-                  <a:pt x="1095374" y="1159350"/>
-                  <a:pt x="1103346" y="1178242"/>
-                  <a:pt x="1113181" y="1178242"/>
+                  <a:pt x="1036037" y="1154095"/>
+                  <a:pt x="1048678" y="1173195"/>
+                  <a:pt x="1064273" y="1173195"/>
                 </a:cubicBezTo>
                 <a:cubicBezTo>
-                  <a:pt x="1139848" y="1178242"/>
-                  <a:pt x="1136421" y="1274518"/>
-                  <a:pt x="1193183" y="1178242"/>
+                  <a:pt x="1106558" y="1173195"/>
+                  <a:pt x="1101123" y="1270529"/>
+                  <a:pt x="1191129" y="1173195"/>
                 </a:cubicBezTo>
                 <a:lnTo>
-                  <a:pt x="1953771" y="1178242"/>
+                  <a:pt x="1888891" y="1173195"/>
                 </a:lnTo>
                 <a:lnTo>
-                  <a:pt x="1954320" y="1243647"/>
+                  <a:pt x="1888880" y="1197479"/>
+                </a:lnTo>
+                <a:cubicBezTo>
+                  <a:pt x="1888551" y="1262375"/>
+                  <a:pt x="1887283" y="1302244"/>
+                  <a:pt x="1884663" y="1302244"/>
+                </a:cubicBezTo>
+                <a:lnTo>
+                  <a:pt x="198535" y="1279857"/>
+                </a:lnTo>
+                <a:cubicBezTo>
+                  <a:pt x="178372" y="1297138"/>
+                  <a:pt x="167681" y="1308097"/>
+                  <a:pt x="162395" y="1314813"/>
+                </a:cubicBezTo>
+                <a:lnTo>
+                  <a:pt x="160364" y="1320015"/>
                 </a:lnTo>
                 <a:lnTo>
-                  <a:pt x="1385550" y="1243647"/>
+                  <a:pt x="150903" y="1316941"/>
                 </a:lnTo>
                 <a:cubicBezTo>
-                  <a:pt x="1263171" y="1320765"/>
-                  <a:pt x="1219310" y="1243647"/>
-                  <a:pt x="1136190" y="1243647"/>
+                  <a:pt x="123463" y="1332872"/>
+                  <a:pt x="138817" y="1259337"/>
+                  <a:pt x="120918" y="1255316"/>
                 </a:cubicBezTo>
                 <a:cubicBezTo>
-                  <a:pt x="1107680" y="1243647"/>
-                  <a:pt x="1084570" y="1260671"/>
-                  <a:pt x="1084570" y="1281672"/>
+                  <a:pt x="103019" y="1251296"/>
+                  <a:pt x="140011" y="1275878"/>
+                  <a:pt x="0" y="1282816"/>
                 </a:cubicBezTo>
                 <a:lnTo>
-                  <a:pt x="1084570" y="1433764"/>
+                  <a:pt x="11819" y="30296"/>
                 </a:lnTo>
                 <a:cubicBezTo>
-                  <a:pt x="1084570" y="1454764"/>
-                  <a:pt x="1107680" y="1471788"/>
-                  <a:pt x="1136190" y="1471788"/>
-                </a:cubicBezTo>
-                <a:cubicBezTo>
-                  <a:pt x="1213493" y="1471788"/>
-                  <a:pt x="1203557" y="1558546"/>
-                  <a:pt x="1368103" y="1471788"/>
-                </a:cubicBezTo>
-                <a:lnTo>
-                  <a:pt x="1956131" y="1471788"/>
-                </a:lnTo>
-                <a:lnTo>
-                  <a:pt x="1956731" y="1549082"/>
-                </a:lnTo>
-                <a:lnTo>
-                  <a:pt x="1385550" y="1549082"/>
-                </a:lnTo>
-                <a:cubicBezTo>
-                  <a:pt x="1263171" y="1626200"/>
-                  <a:pt x="1219310" y="1549082"/>
-                  <a:pt x="1136190" y="1549082"/>
-                </a:cubicBezTo>
-                <a:cubicBezTo>
-                  <a:pt x="1107680" y="1549082"/>
-                  <a:pt x="1084570" y="1566106"/>
-                  <a:pt x="1084570" y="1587107"/>
-                </a:cubicBezTo>
-                <a:lnTo>
-                  <a:pt x="1084570" y="1739199"/>
-                </a:lnTo>
-                <a:cubicBezTo>
-                  <a:pt x="1084570" y="1760199"/>
-                  <a:pt x="1107680" y="1777223"/>
-                  <a:pt x="1136190" y="1777223"/>
-                </a:cubicBezTo>
-                <a:cubicBezTo>
-                  <a:pt x="1213493" y="1777223"/>
-                  <a:pt x="1203557" y="1863981"/>
-                  <a:pt x="1368103" y="1777223"/>
-                </a:cubicBezTo>
-                <a:lnTo>
-                  <a:pt x="1958346" y="1777223"/>
-                </a:lnTo>
-                <a:lnTo>
-                  <a:pt x="1958549" y="1806205"/>
-                </a:lnTo>
-                <a:lnTo>
-                  <a:pt x="1958819" y="1850144"/>
-                </a:lnTo>
-                <a:lnTo>
-                  <a:pt x="1202055" y="1850144"/>
-                </a:lnTo>
-                <a:cubicBezTo>
-                  <a:pt x="1159838" y="1935723"/>
-                  <a:pt x="1144708" y="1850144"/>
-                  <a:pt x="1116034" y="1850144"/>
-                </a:cubicBezTo>
-                <a:cubicBezTo>
-                  <a:pt x="1106199" y="1850144"/>
-                  <a:pt x="1098227" y="1869036"/>
-                  <a:pt x="1098227" y="1892340"/>
-                </a:cubicBezTo>
-                <a:lnTo>
-                  <a:pt x="1098227" y="2061118"/>
-                </a:lnTo>
-                <a:cubicBezTo>
-                  <a:pt x="1098227" y="2084422"/>
-                  <a:pt x="1106199" y="2103314"/>
-                  <a:pt x="1116034" y="2103314"/>
-                </a:cubicBezTo>
-                <a:cubicBezTo>
-                  <a:pt x="1142701" y="2103314"/>
-                  <a:pt x="1139274" y="2199590"/>
-                  <a:pt x="1196036" y="2103314"/>
-                </a:cubicBezTo>
-                <a:lnTo>
-                  <a:pt x="1960265" y="2103314"/>
-                </a:lnTo>
-                <a:lnTo>
-                  <a:pt x="1960551" y="2159952"/>
-                </a:lnTo>
-                <a:lnTo>
-                  <a:pt x="1385550" y="2159952"/>
-                </a:lnTo>
-                <a:cubicBezTo>
-                  <a:pt x="1263171" y="2237070"/>
-                  <a:pt x="1219310" y="2159952"/>
-                  <a:pt x="1136190" y="2159952"/>
-                </a:cubicBezTo>
-                <a:cubicBezTo>
-                  <a:pt x="1107680" y="2159952"/>
-                  <a:pt x="1084570" y="2176976"/>
-                  <a:pt x="1084570" y="2197977"/>
-                </a:cubicBezTo>
-                <a:lnTo>
-                  <a:pt x="1084570" y="2350069"/>
-                </a:lnTo>
-                <a:cubicBezTo>
-                  <a:pt x="1084570" y="2371069"/>
-                  <a:pt x="1107680" y="2388093"/>
-                  <a:pt x="1136190" y="2388093"/>
-                </a:cubicBezTo>
-                <a:cubicBezTo>
-                  <a:pt x="1213493" y="2388093"/>
-                  <a:pt x="1203557" y="2474851"/>
-                  <a:pt x="1368103" y="2388093"/>
-                </a:cubicBezTo>
-                <a:lnTo>
-                  <a:pt x="1961367" y="2388093"/>
-                </a:lnTo>
-                <a:lnTo>
-                  <a:pt x="1961503" y="2446502"/>
-                </a:lnTo>
-                <a:lnTo>
-                  <a:pt x="1961515" y="2465387"/>
-                </a:lnTo>
-                <a:lnTo>
-                  <a:pt x="1385550" y="2465387"/>
-                </a:lnTo>
-                <a:cubicBezTo>
-                  <a:pt x="1263171" y="2542505"/>
-                  <a:pt x="1219310" y="2465387"/>
-                  <a:pt x="1136190" y="2465387"/>
-                </a:cubicBezTo>
-                <a:cubicBezTo>
-                  <a:pt x="1107680" y="2465387"/>
-                  <a:pt x="1084570" y="2482411"/>
-                  <a:pt x="1084570" y="2503412"/>
-                </a:cubicBezTo>
-                <a:lnTo>
-                  <a:pt x="1084570" y="2655504"/>
-                </a:lnTo>
-                <a:cubicBezTo>
-                  <a:pt x="1084570" y="2676504"/>
-                  <a:pt x="1107680" y="2693528"/>
-                  <a:pt x="1136190" y="2693528"/>
-                </a:cubicBezTo>
-                <a:cubicBezTo>
-                  <a:pt x="1213493" y="2693528"/>
-                  <a:pt x="1203557" y="2780286"/>
-                  <a:pt x="1368103" y="2693528"/>
-                </a:cubicBezTo>
-                <a:lnTo>
-                  <a:pt x="1961005" y="2693528"/>
-                </a:lnTo>
-                <a:lnTo>
-                  <a:pt x="1960771" y="2723606"/>
-                </a:lnTo>
-                <a:cubicBezTo>
-                  <a:pt x="1960078" y="2790413"/>
-                  <a:pt x="1958891" y="2828521"/>
-                  <a:pt x="1957086" y="2828521"/>
-                </a:cubicBezTo>
-                <a:lnTo>
-                  <a:pt x="206165" y="2779897"/>
-                </a:lnTo>
-                <a:cubicBezTo>
-                  <a:pt x="185226" y="2817432"/>
-                  <a:pt x="174124" y="2841234"/>
-                  <a:pt x="168635" y="2855823"/>
-                </a:cubicBezTo>
-                <a:lnTo>
-                  <a:pt x="165525" y="2866440"/>
-                </a:lnTo>
-                <a:lnTo>
-                  <a:pt x="156702" y="2860445"/>
-                </a:lnTo>
-                <a:cubicBezTo>
-                  <a:pt x="128207" y="2895047"/>
-                  <a:pt x="144152" y="2735326"/>
-                  <a:pt x="125565" y="2726593"/>
-                </a:cubicBezTo>
-                <a:cubicBezTo>
-                  <a:pt x="106978" y="2717860"/>
-                  <a:pt x="145391" y="2771253"/>
-                  <a:pt x="0" y="2786323"/>
-                </a:cubicBezTo>
-                <a:lnTo>
-                  <a:pt x="12273" y="65804"/>
-                </a:lnTo>
-                <a:cubicBezTo>
-                  <a:pt x="12273" y="29461"/>
-                  <a:pt x="24037" y="0"/>
-                  <a:pt x="38547" y="0"/>
+                  <a:pt x="11819" y="13564"/>
+                  <a:pt x="23147" y="0"/>
+                  <a:pt x="37121" y="0"/>
                 </a:cubicBezTo>
                 <a:close/>
               </a:path>
@@ -11643,53 +11613,67 @@
               </a:spcAft>
             </a:pPr>
             <a:r>
-              <a:rPr lang="en-US" sz="1200" kern="1200" dirty="0" err="1">
-                <a:solidFill>
-                  <a:srgbClr val="FFFFFF"/>
-                </a:solidFill>
-                <a:effectLst/>
+              <a:rPr lang="en-US" altLang="zh-TW" sz="1200" kern="100" dirty="0" err="1" smtClean="0">
                 <a:ea typeface="新細明體" panose="02020500000000000000" pitchFamily="18" charset="-120"/>
                 <a:cs typeface="Times New Roman" panose="02020603050405020304" pitchFamily="18" charset="0"/>
               </a:rPr>
               <a:t>iMi</a:t>
             </a:r>
             <a:r>
-              <a:rPr lang="zh-TW" sz="1200" kern="1200" dirty="0">
-                <a:solidFill>
-                  <a:srgbClr val="FFFFFF"/>
-                </a:solidFill>
-                <a:effectLst/>
+              <a:rPr lang="zh-TW" altLang="en-US" sz="1200" kern="100" dirty="0" smtClean="0">
                 <a:ea typeface="新細明體" panose="02020500000000000000" pitchFamily="18" charset="-120"/>
                 <a:cs typeface="Times New Roman" panose="02020603050405020304" pitchFamily="18" charset="0"/>
               </a:rPr>
-              <a:t>小車模組</a:t>
+              <a:t>物流模組</a:t>
             </a:r>
             <a:r>
-              <a:rPr lang="en-US" sz="1200" kern="1200" dirty="0">
-                <a:solidFill>
-                  <a:srgbClr val="FFFFFF"/>
-                </a:solidFill>
-                <a:effectLst/>
+              <a:rPr lang="en-US" altLang="zh-TW" sz="1200" kern="100" dirty="0" smtClean="0">
                 <a:ea typeface="新細明體" panose="02020500000000000000" pitchFamily="18" charset="-120"/>
                 <a:cs typeface="Times New Roman" panose="02020603050405020304" pitchFamily="18" charset="0"/>
               </a:rPr>
-              <a:t>Mega</a:t>
+              <a:t>UNO</a:t>
             </a:r>
             <a:r>
-              <a:rPr lang="zh-TW" sz="1200" kern="1200" dirty="0">
-                <a:solidFill>
-                  <a:srgbClr val="FFFFFF"/>
-                </a:solidFill>
-                <a:effectLst/>
+              <a:rPr lang="zh-TW" altLang="en-US" sz="1200" kern="100" dirty="0" smtClean="0">
                 <a:ea typeface="新細明體" panose="02020500000000000000" pitchFamily="18" charset="-120"/>
                 <a:cs typeface="Times New Roman" panose="02020603050405020304" pitchFamily="18" charset="0"/>
               </a:rPr>
               <a:t>初始化</a:t>
             </a:r>
-            <a:endParaRPr lang="zh-TW" sz="1200" dirty="0">
-              <a:effectLst/>
+            <a:endParaRPr lang="en-US" altLang="zh-TW" sz="1200" kern="100" dirty="0" smtClean="0">
+              <a:ea typeface="新細明體" panose="02020500000000000000" pitchFamily="18" charset="-120"/>
+              <a:cs typeface="Times New Roman" panose="02020603050405020304" pitchFamily="18" charset="0"/>
+            </a:endParaRPr>
+          </a:p>
+          <a:p>
+            <a:pPr>
+              <a:lnSpc>
+                <a:spcPts val="2400"/>
+              </a:lnSpc>
+              <a:spcAft>
+                <a:spcPts val="0"/>
+              </a:spcAft>
+            </a:pPr>
+            <a:r>
+              <a:rPr lang="en-US" altLang="zh-TW" sz="1100" dirty="0" err="1" smtClean="0">
+                <a:solidFill>
+                  <a:srgbClr val="FFFFFF"/>
+                </a:solidFill>
+                <a:cs typeface="Times New Roman" panose="02020603050405020304" pitchFamily="18" charset="0"/>
+              </a:rPr>
+              <a:t>CNC</a:t>
+            </a:r>
+            <a:r>
+              <a:rPr lang="zh-TW" altLang="en-US" sz="1100" dirty="0" smtClean="0">
+                <a:solidFill>
+                  <a:srgbClr val="FFFFFF"/>
+                </a:solidFill>
+                <a:cs typeface="Times New Roman" panose="02020603050405020304" pitchFamily="18" charset="0"/>
+              </a:rPr>
+              <a:t>腳位</a:t>
+            </a:r>
+            <a:endParaRPr lang="zh-TW" altLang="zh-TW" sz="1100" dirty="0">
               <a:latin typeface="新細明體" panose="02020500000000000000" pitchFamily="18" charset="-120"/>
-              <a:ea typeface="新細明體" panose="02020500000000000000" pitchFamily="18" charset="-120"/>
               <a:cs typeface="新細明體" panose="02020500000000000000" pitchFamily="18" charset="-120"/>
             </a:endParaRPr>
           </a:p>
@@ -11703,31 +11687,25 @@
               </a:spcAft>
             </a:pPr>
             <a:r>
-              <a:rPr lang="en-US" sz="1000" kern="1200" dirty="0" err="1">
+              <a:rPr lang="en-US" altLang="zh-TW" sz="1100" dirty="0" err="1" smtClean="0">
                 <a:solidFill>
                   <a:srgbClr val="FFFFFF"/>
                 </a:solidFill>
-                <a:effectLst/>
-                <a:ea typeface="新細明體" panose="02020500000000000000" pitchFamily="18" charset="-120"/>
                 <a:cs typeface="Times New Roman" panose="02020603050405020304" pitchFamily="18" charset="0"/>
               </a:rPr>
               <a:t>UART</a:t>
             </a:r>
             <a:r>
-              <a:rPr lang="zh-TW" sz="1000" kern="1200" dirty="0">
+              <a:rPr lang="zh-TW" altLang="en-US" sz="1100" dirty="0" smtClean="0">
                 <a:solidFill>
                   <a:srgbClr val="FFFFFF"/>
                 </a:solidFill>
-                <a:effectLst/>
-                <a:ea typeface="新細明體" panose="02020500000000000000" pitchFamily="18" charset="-120"/>
                 <a:cs typeface="Times New Roman" panose="02020603050405020304" pitchFamily="18" charset="0"/>
               </a:rPr>
               <a:t>通訊</a:t>
             </a:r>
-            <a:endParaRPr lang="zh-TW" sz="1200" dirty="0">
-              <a:effectLst/>
+            <a:endParaRPr lang="zh-TW" altLang="zh-TW" sz="1100" dirty="0">
               <a:latin typeface="新細明體" panose="02020500000000000000" pitchFamily="18" charset="-120"/>
-              <a:ea typeface="新細明體" panose="02020500000000000000" pitchFamily="18" charset="-120"/>
               <a:cs typeface="新細明體" panose="02020500000000000000" pitchFamily="18" charset="-120"/>
             </a:endParaRPr>
           </a:p>
@@ -11741,20 +11719,735 @@
               </a:spcAft>
             </a:pPr>
             <a:r>
-              <a:rPr lang="zh-TW" sz="1050" kern="1200" dirty="0">
+              <a:rPr lang="zh-TW" altLang="en-US" sz="1100" dirty="0" smtClean="0">
                 <a:solidFill>
                   <a:srgbClr val="FFFFFF"/>
                 </a:solidFill>
-                <a:effectLst/>
+                <a:cs typeface="Times New Roman" panose="02020603050405020304" pitchFamily="18" charset="0"/>
+              </a:rPr>
+              <a:t>撿貨伺服馬達</a:t>
+            </a:r>
+            <a:endParaRPr lang="zh-TW" altLang="zh-TW" sz="1100" dirty="0">
+              <a:latin typeface="新細明體" panose="02020500000000000000" pitchFamily="18" charset="-120"/>
+              <a:cs typeface="新細明體" panose="02020500000000000000" pitchFamily="18" charset="-120"/>
+            </a:endParaRPr>
+          </a:p>
+        </p:txBody>
+      </p:sp>
+      <p:sp>
+        <p:nvSpPr>
+          <p:cNvPr id="9" name="圓角矩形 4"/>
+          <p:cNvSpPr/>
+          <p:nvPr/>
+        </p:nvSpPr>
+        <p:spPr>
+          <a:xfrm>
+            <a:off x="8480327" y="1498092"/>
+            <a:ext cx="1888969" cy="1269492"/>
+          </a:xfrm>
+          <a:custGeom>
+            <a:avLst/>
+            <a:gdLst>
+              <a:gd name="connsiteX0" fmla="*/ 0 w 4424680"/>
+              <a:gd name="connsiteY0" fmla="*/ 60115 h 360680"/>
+              <a:gd name="connsiteX1" fmla="*/ 60115 w 4424680"/>
+              <a:gd name="connsiteY1" fmla="*/ 0 h 360680"/>
+              <a:gd name="connsiteX2" fmla="*/ 4364565 w 4424680"/>
+              <a:gd name="connsiteY2" fmla="*/ 0 h 360680"/>
+              <a:gd name="connsiteX3" fmla="*/ 4424680 w 4424680"/>
+              <a:gd name="connsiteY3" fmla="*/ 60115 h 360680"/>
+              <a:gd name="connsiteX4" fmla="*/ 4424680 w 4424680"/>
+              <a:gd name="connsiteY4" fmla="*/ 300565 h 360680"/>
+              <a:gd name="connsiteX5" fmla="*/ 4364565 w 4424680"/>
+              <a:gd name="connsiteY5" fmla="*/ 360680 h 360680"/>
+              <a:gd name="connsiteX6" fmla="*/ 60115 w 4424680"/>
+              <a:gd name="connsiteY6" fmla="*/ 360680 h 360680"/>
+              <a:gd name="connsiteX7" fmla="*/ 0 w 4424680"/>
+              <a:gd name="connsiteY7" fmla="*/ 300565 h 360680"/>
+              <a:gd name="connsiteX8" fmla="*/ 0 w 4424680"/>
+              <a:gd name="connsiteY8" fmla="*/ 60115 h 360680"/>
+              <a:gd name="connsiteX0" fmla="*/ 0 w 4424680"/>
+              <a:gd name="connsiteY0" fmla="*/ 60115 h 360680"/>
+              <a:gd name="connsiteX1" fmla="*/ 60115 w 4424680"/>
+              <a:gd name="connsiteY1" fmla="*/ 0 h 360680"/>
+              <a:gd name="connsiteX2" fmla="*/ 279400 w 4424680"/>
+              <a:gd name="connsiteY2" fmla="*/ 0 h 360680"/>
+              <a:gd name="connsiteX3" fmla="*/ 4364565 w 4424680"/>
+              <a:gd name="connsiteY3" fmla="*/ 0 h 360680"/>
+              <a:gd name="connsiteX4" fmla="*/ 4424680 w 4424680"/>
+              <a:gd name="connsiteY4" fmla="*/ 60115 h 360680"/>
+              <a:gd name="connsiteX5" fmla="*/ 4424680 w 4424680"/>
+              <a:gd name="connsiteY5" fmla="*/ 300565 h 360680"/>
+              <a:gd name="connsiteX6" fmla="*/ 4364565 w 4424680"/>
+              <a:gd name="connsiteY6" fmla="*/ 360680 h 360680"/>
+              <a:gd name="connsiteX7" fmla="*/ 60115 w 4424680"/>
+              <a:gd name="connsiteY7" fmla="*/ 360680 h 360680"/>
+              <a:gd name="connsiteX8" fmla="*/ 0 w 4424680"/>
+              <a:gd name="connsiteY8" fmla="*/ 300565 h 360680"/>
+              <a:gd name="connsiteX9" fmla="*/ 0 w 4424680"/>
+              <a:gd name="connsiteY9" fmla="*/ 60115 h 360680"/>
+              <a:gd name="connsiteX0" fmla="*/ 0 w 4424680"/>
+              <a:gd name="connsiteY0" fmla="*/ 60115 h 360680"/>
+              <a:gd name="connsiteX1" fmla="*/ 60115 w 4424680"/>
+              <a:gd name="connsiteY1" fmla="*/ 0 h 360680"/>
+              <a:gd name="connsiteX2" fmla="*/ 4364565 w 4424680"/>
+              <a:gd name="connsiteY2" fmla="*/ 0 h 360680"/>
+              <a:gd name="connsiteX3" fmla="*/ 4424680 w 4424680"/>
+              <a:gd name="connsiteY3" fmla="*/ 60115 h 360680"/>
+              <a:gd name="connsiteX4" fmla="*/ 4424680 w 4424680"/>
+              <a:gd name="connsiteY4" fmla="*/ 300565 h 360680"/>
+              <a:gd name="connsiteX5" fmla="*/ 4364565 w 4424680"/>
+              <a:gd name="connsiteY5" fmla="*/ 360680 h 360680"/>
+              <a:gd name="connsiteX6" fmla="*/ 60115 w 4424680"/>
+              <a:gd name="connsiteY6" fmla="*/ 360680 h 360680"/>
+              <a:gd name="connsiteX7" fmla="*/ 0 w 4424680"/>
+              <a:gd name="connsiteY7" fmla="*/ 300565 h 360680"/>
+              <a:gd name="connsiteX8" fmla="*/ 0 w 4424680"/>
+              <a:gd name="connsiteY8" fmla="*/ 60115 h 360680"/>
+              <a:gd name="connsiteX0" fmla="*/ 0 w 4424680"/>
+              <a:gd name="connsiteY0" fmla="*/ 60115 h 360680"/>
+              <a:gd name="connsiteX1" fmla="*/ 60115 w 4424680"/>
+              <a:gd name="connsiteY1" fmla="*/ 0 h 360680"/>
+              <a:gd name="connsiteX2" fmla="*/ 350520 w 4424680"/>
+              <a:gd name="connsiteY2" fmla="*/ 0 h 360680"/>
+              <a:gd name="connsiteX3" fmla="*/ 4364565 w 4424680"/>
+              <a:gd name="connsiteY3" fmla="*/ 0 h 360680"/>
+              <a:gd name="connsiteX4" fmla="*/ 4424680 w 4424680"/>
+              <a:gd name="connsiteY4" fmla="*/ 60115 h 360680"/>
+              <a:gd name="connsiteX5" fmla="*/ 4424680 w 4424680"/>
+              <a:gd name="connsiteY5" fmla="*/ 300565 h 360680"/>
+              <a:gd name="connsiteX6" fmla="*/ 4364565 w 4424680"/>
+              <a:gd name="connsiteY6" fmla="*/ 360680 h 360680"/>
+              <a:gd name="connsiteX7" fmla="*/ 60115 w 4424680"/>
+              <a:gd name="connsiteY7" fmla="*/ 360680 h 360680"/>
+              <a:gd name="connsiteX8" fmla="*/ 0 w 4424680"/>
+              <a:gd name="connsiteY8" fmla="*/ 300565 h 360680"/>
+              <a:gd name="connsiteX9" fmla="*/ 0 w 4424680"/>
+              <a:gd name="connsiteY9" fmla="*/ 60115 h 360680"/>
+              <a:gd name="connsiteX0" fmla="*/ 0 w 4424680"/>
+              <a:gd name="connsiteY0" fmla="*/ 121075 h 421640"/>
+              <a:gd name="connsiteX1" fmla="*/ 60115 w 4424680"/>
+              <a:gd name="connsiteY1" fmla="*/ 60960 h 421640"/>
+              <a:gd name="connsiteX2" fmla="*/ 350520 w 4424680"/>
+              <a:gd name="connsiteY2" fmla="*/ 60960 h 421640"/>
+              <a:gd name="connsiteX3" fmla="*/ 4364565 w 4424680"/>
+              <a:gd name="connsiteY3" fmla="*/ 60960 h 421640"/>
+              <a:gd name="connsiteX4" fmla="*/ 4424680 w 4424680"/>
+              <a:gd name="connsiteY4" fmla="*/ 121075 h 421640"/>
+              <a:gd name="connsiteX5" fmla="*/ 4424680 w 4424680"/>
+              <a:gd name="connsiteY5" fmla="*/ 361525 h 421640"/>
+              <a:gd name="connsiteX6" fmla="*/ 4364565 w 4424680"/>
+              <a:gd name="connsiteY6" fmla="*/ 421640 h 421640"/>
+              <a:gd name="connsiteX7" fmla="*/ 60115 w 4424680"/>
+              <a:gd name="connsiteY7" fmla="*/ 421640 h 421640"/>
+              <a:gd name="connsiteX8" fmla="*/ 0 w 4424680"/>
+              <a:gd name="connsiteY8" fmla="*/ 361525 h 421640"/>
+              <a:gd name="connsiteX9" fmla="*/ 0 w 4424680"/>
+              <a:gd name="connsiteY9" fmla="*/ 121075 h 421640"/>
+              <a:gd name="connsiteX0" fmla="*/ 0 w 4424680"/>
+              <a:gd name="connsiteY0" fmla="*/ 121075 h 421640"/>
+              <a:gd name="connsiteX1" fmla="*/ 60115 w 4424680"/>
+              <a:gd name="connsiteY1" fmla="*/ 60960 h 421640"/>
+              <a:gd name="connsiteX2" fmla="*/ 350520 w 4424680"/>
+              <a:gd name="connsiteY2" fmla="*/ 60960 h 421640"/>
+              <a:gd name="connsiteX3" fmla="*/ 4364565 w 4424680"/>
+              <a:gd name="connsiteY3" fmla="*/ 60960 h 421640"/>
+              <a:gd name="connsiteX4" fmla="*/ 4424680 w 4424680"/>
+              <a:gd name="connsiteY4" fmla="*/ 121075 h 421640"/>
+              <a:gd name="connsiteX5" fmla="*/ 4424680 w 4424680"/>
+              <a:gd name="connsiteY5" fmla="*/ 361525 h 421640"/>
+              <a:gd name="connsiteX6" fmla="*/ 4364565 w 4424680"/>
+              <a:gd name="connsiteY6" fmla="*/ 421640 h 421640"/>
+              <a:gd name="connsiteX7" fmla="*/ 330200 w 4424680"/>
+              <a:gd name="connsiteY7" fmla="*/ 421640 h 421640"/>
+              <a:gd name="connsiteX8" fmla="*/ 60115 w 4424680"/>
+              <a:gd name="connsiteY8" fmla="*/ 421640 h 421640"/>
+              <a:gd name="connsiteX9" fmla="*/ 0 w 4424680"/>
+              <a:gd name="connsiteY9" fmla="*/ 361525 h 421640"/>
+              <a:gd name="connsiteX10" fmla="*/ 0 w 4424680"/>
+              <a:gd name="connsiteY10" fmla="*/ 121075 h 421640"/>
+              <a:gd name="connsiteX0" fmla="*/ 0 w 4424680"/>
+              <a:gd name="connsiteY0" fmla="*/ 60115 h 360680"/>
+              <a:gd name="connsiteX1" fmla="*/ 60115 w 4424680"/>
+              <a:gd name="connsiteY1" fmla="*/ 0 h 360680"/>
+              <a:gd name="connsiteX2" fmla="*/ 350520 w 4424680"/>
+              <a:gd name="connsiteY2" fmla="*/ 0 h 360680"/>
+              <a:gd name="connsiteX3" fmla="*/ 4364565 w 4424680"/>
+              <a:gd name="connsiteY3" fmla="*/ 0 h 360680"/>
+              <a:gd name="connsiteX4" fmla="*/ 4424680 w 4424680"/>
+              <a:gd name="connsiteY4" fmla="*/ 60115 h 360680"/>
+              <a:gd name="connsiteX5" fmla="*/ 4424680 w 4424680"/>
+              <a:gd name="connsiteY5" fmla="*/ 300565 h 360680"/>
+              <a:gd name="connsiteX6" fmla="*/ 4364565 w 4424680"/>
+              <a:gd name="connsiteY6" fmla="*/ 360680 h 360680"/>
+              <a:gd name="connsiteX7" fmla="*/ 330200 w 4424680"/>
+              <a:gd name="connsiteY7" fmla="*/ 360680 h 360680"/>
+              <a:gd name="connsiteX8" fmla="*/ 60115 w 4424680"/>
+              <a:gd name="connsiteY8" fmla="*/ 360680 h 360680"/>
+              <a:gd name="connsiteX9" fmla="*/ 0 w 4424680"/>
+              <a:gd name="connsiteY9" fmla="*/ 300565 h 360680"/>
+              <a:gd name="connsiteX10" fmla="*/ 0 w 4424680"/>
+              <a:gd name="connsiteY10" fmla="*/ 60115 h 360680"/>
+              <a:gd name="connsiteX0" fmla="*/ 0 w 4424680"/>
+              <a:gd name="connsiteY0" fmla="*/ 60115 h 421640"/>
+              <a:gd name="connsiteX1" fmla="*/ 60115 w 4424680"/>
+              <a:gd name="connsiteY1" fmla="*/ 0 h 421640"/>
+              <a:gd name="connsiteX2" fmla="*/ 350520 w 4424680"/>
+              <a:gd name="connsiteY2" fmla="*/ 0 h 421640"/>
+              <a:gd name="connsiteX3" fmla="*/ 4364565 w 4424680"/>
+              <a:gd name="connsiteY3" fmla="*/ 0 h 421640"/>
+              <a:gd name="connsiteX4" fmla="*/ 4424680 w 4424680"/>
+              <a:gd name="connsiteY4" fmla="*/ 60115 h 421640"/>
+              <a:gd name="connsiteX5" fmla="*/ 4424680 w 4424680"/>
+              <a:gd name="connsiteY5" fmla="*/ 300565 h 421640"/>
+              <a:gd name="connsiteX6" fmla="*/ 4364565 w 4424680"/>
+              <a:gd name="connsiteY6" fmla="*/ 360680 h 421640"/>
+              <a:gd name="connsiteX7" fmla="*/ 330200 w 4424680"/>
+              <a:gd name="connsiteY7" fmla="*/ 360680 h 421640"/>
+              <a:gd name="connsiteX8" fmla="*/ 60115 w 4424680"/>
+              <a:gd name="connsiteY8" fmla="*/ 360680 h 421640"/>
+              <a:gd name="connsiteX9" fmla="*/ 0 w 4424680"/>
+              <a:gd name="connsiteY9" fmla="*/ 300565 h 421640"/>
+              <a:gd name="connsiteX10" fmla="*/ 0 w 4424680"/>
+              <a:gd name="connsiteY10" fmla="*/ 60115 h 421640"/>
+              <a:gd name="connsiteX0" fmla="*/ 0 w 4449704"/>
+              <a:gd name="connsiteY0" fmla="*/ 60115 h 2375415"/>
+              <a:gd name="connsiteX1" fmla="*/ 60115 w 4449704"/>
+              <a:gd name="connsiteY1" fmla="*/ 0 h 2375415"/>
+              <a:gd name="connsiteX2" fmla="*/ 350520 w 4449704"/>
+              <a:gd name="connsiteY2" fmla="*/ 0 h 2375415"/>
+              <a:gd name="connsiteX3" fmla="*/ 4364565 w 4449704"/>
+              <a:gd name="connsiteY3" fmla="*/ 0 h 2375415"/>
+              <a:gd name="connsiteX4" fmla="*/ 4424680 w 4449704"/>
+              <a:gd name="connsiteY4" fmla="*/ 60115 h 2375415"/>
+              <a:gd name="connsiteX5" fmla="*/ 4424680 w 4449704"/>
+              <a:gd name="connsiteY5" fmla="*/ 300565 h 2375415"/>
+              <a:gd name="connsiteX6" fmla="*/ 4437706 w 4449704"/>
+              <a:gd name="connsiteY6" fmla="*/ 2375415 h 2375415"/>
+              <a:gd name="connsiteX7" fmla="*/ 330200 w 4449704"/>
+              <a:gd name="connsiteY7" fmla="*/ 360680 h 2375415"/>
+              <a:gd name="connsiteX8" fmla="*/ 60115 w 4449704"/>
+              <a:gd name="connsiteY8" fmla="*/ 360680 h 2375415"/>
+              <a:gd name="connsiteX9" fmla="*/ 0 w 4449704"/>
+              <a:gd name="connsiteY9" fmla="*/ 300565 h 2375415"/>
+              <a:gd name="connsiteX10" fmla="*/ 0 w 4449704"/>
+              <a:gd name="connsiteY10" fmla="*/ 60115 h 2375415"/>
+              <a:gd name="connsiteX0" fmla="*/ 0 w 4449705"/>
+              <a:gd name="connsiteY0" fmla="*/ 60115 h 2551042"/>
+              <a:gd name="connsiteX1" fmla="*/ 60115 w 4449705"/>
+              <a:gd name="connsiteY1" fmla="*/ 0 h 2551042"/>
+              <a:gd name="connsiteX2" fmla="*/ 350520 w 4449705"/>
+              <a:gd name="connsiteY2" fmla="*/ 0 h 2551042"/>
+              <a:gd name="connsiteX3" fmla="*/ 4364565 w 4449705"/>
+              <a:gd name="connsiteY3" fmla="*/ 0 h 2551042"/>
+              <a:gd name="connsiteX4" fmla="*/ 4424680 w 4449705"/>
+              <a:gd name="connsiteY4" fmla="*/ 60115 h 2551042"/>
+              <a:gd name="connsiteX5" fmla="*/ 4424680 w 4449705"/>
+              <a:gd name="connsiteY5" fmla="*/ 300565 h 2551042"/>
+              <a:gd name="connsiteX6" fmla="*/ 4437706 w 4449705"/>
+              <a:gd name="connsiteY6" fmla="*/ 2375415 h 2551042"/>
+              <a:gd name="connsiteX7" fmla="*/ 330200 w 4449705"/>
+              <a:gd name="connsiteY7" fmla="*/ 360680 h 2551042"/>
+              <a:gd name="connsiteX8" fmla="*/ 96684 w 4449705"/>
+              <a:gd name="connsiteY8" fmla="*/ 2551043 h 2551042"/>
+              <a:gd name="connsiteX9" fmla="*/ 0 w 4449705"/>
+              <a:gd name="connsiteY9" fmla="*/ 300565 h 2551042"/>
+              <a:gd name="connsiteX10" fmla="*/ 0 w 4449705"/>
+              <a:gd name="connsiteY10" fmla="*/ 60115 h 2551042"/>
+              <a:gd name="connsiteX0" fmla="*/ 48759 w 4498464"/>
+              <a:gd name="connsiteY0" fmla="*/ 60115 h 2594369"/>
+              <a:gd name="connsiteX1" fmla="*/ 108874 w 4498464"/>
+              <a:gd name="connsiteY1" fmla="*/ 0 h 2594369"/>
+              <a:gd name="connsiteX2" fmla="*/ 399279 w 4498464"/>
+              <a:gd name="connsiteY2" fmla="*/ 0 h 2594369"/>
+              <a:gd name="connsiteX3" fmla="*/ 4413324 w 4498464"/>
+              <a:gd name="connsiteY3" fmla="*/ 0 h 2594369"/>
+              <a:gd name="connsiteX4" fmla="*/ 4473439 w 4498464"/>
+              <a:gd name="connsiteY4" fmla="*/ 60115 h 2594369"/>
+              <a:gd name="connsiteX5" fmla="*/ 4473439 w 4498464"/>
+              <a:gd name="connsiteY5" fmla="*/ 300565 h 2594369"/>
+              <a:gd name="connsiteX6" fmla="*/ 4486465 w 4498464"/>
+              <a:gd name="connsiteY6" fmla="*/ 2375415 h 2594369"/>
+              <a:gd name="connsiteX7" fmla="*/ 378959 w 4498464"/>
+              <a:gd name="connsiteY7" fmla="*/ 360680 h 2594369"/>
+              <a:gd name="connsiteX8" fmla="*/ 145443 w 4498464"/>
+              <a:gd name="connsiteY8" fmla="*/ 2551043 h 2594369"/>
+              <a:gd name="connsiteX9" fmla="*/ 0 w 4498464"/>
+              <a:gd name="connsiteY9" fmla="*/ 2585168 h 2594369"/>
+              <a:gd name="connsiteX10" fmla="*/ 48759 w 4498464"/>
+              <a:gd name="connsiteY10" fmla="*/ 60115 h 2594369"/>
+              <a:gd name="connsiteX0" fmla="*/ 48759 w 4498464"/>
+              <a:gd name="connsiteY0" fmla="*/ 60115 h 2594369"/>
+              <a:gd name="connsiteX1" fmla="*/ 108874 w 4498464"/>
+              <a:gd name="connsiteY1" fmla="*/ 0 h 2594369"/>
+              <a:gd name="connsiteX2" fmla="*/ 399279 w 4498464"/>
+              <a:gd name="connsiteY2" fmla="*/ 0 h 2594369"/>
+              <a:gd name="connsiteX3" fmla="*/ 4413324 w 4498464"/>
+              <a:gd name="connsiteY3" fmla="*/ 0 h 2594369"/>
+              <a:gd name="connsiteX4" fmla="*/ 4473439 w 4498464"/>
+              <a:gd name="connsiteY4" fmla="*/ 60115 h 2594369"/>
+              <a:gd name="connsiteX5" fmla="*/ 4473439 w 4498464"/>
+              <a:gd name="connsiteY5" fmla="*/ 300565 h 2594369"/>
+              <a:gd name="connsiteX6" fmla="*/ 4486465 w 4498464"/>
+              <a:gd name="connsiteY6" fmla="*/ 2375415 h 2594369"/>
+              <a:gd name="connsiteX7" fmla="*/ 549626 w 4498464"/>
+              <a:gd name="connsiteY7" fmla="*/ 2515862 h 2594369"/>
+              <a:gd name="connsiteX8" fmla="*/ 145443 w 4498464"/>
+              <a:gd name="connsiteY8" fmla="*/ 2551043 h 2594369"/>
+              <a:gd name="connsiteX9" fmla="*/ 0 w 4498464"/>
+              <a:gd name="connsiteY9" fmla="*/ 2585168 h 2594369"/>
+              <a:gd name="connsiteX10" fmla="*/ 48759 w 4498464"/>
+              <a:gd name="connsiteY10" fmla="*/ 60115 h 2594369"/>
+              <a:gd name="connsiteX0" fmla="*/ 48759 w 4498464"/>
+              <a:gd name="connsiteY0" fmla="*/ 60115 h 2594369"/>
+              <a:gd name="connsiteX1" fmla="*/ 108874 w 4498464"/>
+              <a:gd name="connsiteY1" fmla="*/ 0 h 2594369"/>
+              <a:gd name="connsiteX2" fmla="*/ 399279 w 4498464"/>
+              <a:gd name="connsiteY2" fmla="*/ 0 h 2594369"/>
+              <a:gd name="connsiteX3" fmla="*/ 4413324 w 4498464"/>
+              <a:gd name="connsiteY3" fmla="*/ 0 h 2594369"/>
+              <a:gd name="connsiteX4" fmla="*/ 4473439 w 4498464"/>
+              <a:gd name="connsiteY4" fmla="*/ 60115 h 2594369"/>
+              <a:gd name="connsiteX5" fmla="*/ 4473439 w 4498464"/>
+              <a:gd name="connsiteY5" fmla="*/ 300565 h 2594369"/>
+              <a:gd name="connsiteX6" fmla="*/ 4486465 w 4498464"/>
+              <a:gd name="connsiteY6" fmla="*/ 2375415 h 2594369"/>
+              <a:gd name="connsiteX7" fmla="*/ 513055 w 4498464"/>
+              <a:gd name="connsiteY7" fmla="*/ 2410445 h 2594369"/>
+              <a:gd name="connsiteX8" fmla="*/ 145443 w 4498464"/>
+              <a:gd name="connsiteY8" fmla="*/ 2551043 h 2594369"/>
+              <a:gd name="connsiteX9" fmla="*/ 0 w 4498464"/>
+              <a:gd name="connsiteY9" fmla="*/ 2585168 h 2594369"/>
+              <a:gd name="connsiteX10" fmla="*/ 48759 w 4498464"/>
+              <a:gd name="connsiteY10" fmla="*/ 60115 h 2594369"/>
+              <a:gd name="connsiteX0" fmla="*/ 48759 w 4498464"/>
+              <a:gd name="connsiteY0" fmla="*/ 60115 h 2633034"/>
+              <a:gd name="connsiteX1" fmla="*/ 108874 w 4498464"/>
+              <a:gd name="connsiteY1" fmla="*/ 0 h 2633034"/>
+              <a:gd name="connsiteX2" fmla="*/ 399279 w 4498464"/>
+              <a:gd name="connsiteY2" fmla="*/ 0 h 2633034"/>
+              <a:gd name="connsiteX3" fmla="*/ 4413324 w 4498464"/>
+              <a:gd name="connsiteY3" fmla="*/ 0 h 2633034"/>
+              <a:gd name="connsiteX4" fmla="*/ 4473439 w 4498464"/>
+              <a:gd name="connsiteY4" fmla="*/ 60115 h 2633034"/>
+              <a:gd name="connsiteX5" fmla="*/ 4473439 w 4498464"/>
+              <a:gd name="connsiteY5" fmla="*/ 300565 h 2633034"/>
+              <a:gd name="connsiteX6" fmla="*/ 4486465 w 4498464"/>
+              <a:gd name="connsiteY6" fmla="*/ 2375415 h 2633034"/>
+              <a:gd name="connsiteX7" fmla="*/ 513055 w 4498464"/>
+              <a:gd name="connsiteY7" fmla="*/ 2410445 h 2633034"/>
+              <a:gd name="connsiteX8" fmla="*/ 255158 w 4498464"/>
+              <a:gd name="connsiteY8" fmla="*/ 2633034 h 2633034"/>
+              <a:gd name="connsiteX9" fmla="*/ 0 w 4498464"/>
+              <a:gd name="connsiteY9" fmla="*/ 2585168 h 2633034"/>
+              <a:gd name="connsiteX10" fmla="*/ 48759 w 4498464"/>
+              <a:gd name="connsiteY10" fmla="*/ 60115 h 2633034"/>
+              <a:gd name="connsiteX0" fmla="*/ 48759 w 4498464"/>
+              <a:gd name="connsiteY0" fmla="*/ 60115 h 2775446"/>
+              <a:gd name="connsiteX1" fmla="*/ 108874 w 4498464"/>
+              <a:gd name="connsiteY1" fmla="*/ 0 h 2775446"/>
+              <a:gd name="connsiteX2" fmla="*/ 399279 w 4498464"/>
+              <a:gd name="connsiteY2" fmla="*/ 0 h 2775446"/>
+              <a:gd name="connsiteX3" fmla="*/ 4413324 w 4498464"/>
+              <a:gd name="connsiteY3" fmla="*/ 0 h 2775446"/>
+              <a:gd name="connsiteX4" fmla="*/ 4473439 w 4498464"/>
+              <a:gd name="connsiteY4" fmla="*/ 60115 h 2775446"/>
+              <a:gd name="connsiteX5" fmla="*/ 4473439 w 4498464"/>
+              <a:gd name="connsiteY5" fmla="*/ 300565 h 2775446"/>
+              <a:gd name="connsiteX6" fmla="*/ 4486465 w 4498464"/>
+              <a:gd name="connsiteY6" fmla="*/ 2375415 h 2775446"/>
+              <a:gd name="connsiteX7" fmla="*/ 513055 w 4498464"/>
+              <a:gd name="connsiteY7" fmla="*/ 2410445 h 2775446"/>
+              <a:gd name="connsiteX8" fmla="*/ 255158 w 4498464"/>
+              <a:gd name="connsiteY8" fmla="*/ 2633034 h 2775446"/>
+              <a:gd name="connsiteX9" fmla="*/ 121892 w 4498464"/>
+              <a:gd name="connsiteY9" fmla="*/ 2600113 h 2775446"/>
+              <a:gd name="connsiteX10" fmla="*/ 0 w 4498464"/>
+              <a:gd name="connsiteY10" fmla="*/ 2585168 h 2775446"/>
+              <a:gd name="connsiteX11" fmla="*/ 48759 w 4498464"/>
+              <a:gd name="connsiteY11" fmla="*/ 60115 h 2775446"/>
+              <a:gd name="connsiteX0" fmla="*/ 48759 w 4498464"/>
+              <a:gd name="connsiteY0" fmla="*/ 60115 h 2775446"/>
+              <a:gd name="connsiteX1" fmla="*/ 108874 w 4498464"/>
+              <a:gd name="connsiteY1" fmla="*/ 0 h 2775446"/>
+              <a:gd name="connsiteX2" fmla="*/ 399279 w 4498464"/>
+              <a:gd name="connsiteY2" fmla="*/ 0 h 2775446"/>
+              <a:gd name="connsiteX3" fmla="*/ 4413324 w 4498464"/>
+              <a:gd name="connsiteY3" fmla="*/ 0 h 2775446"/>
+              <a:gd name="connsiteX4" fmla="*/ 4473439 w 4498464"/>
+              <a:gd name="connsiteY4" fmla="*/ 60115 h 2775446"/>
+              <a:gd name="connsiteX5" fmla="*/ 4473439 w 4498464"/>
+              <a:gd name="connsiteY5" fmla="*/ 300565 h 2775446"/>
+              <a:gd name="connsiteX6" fmla="*/ 4486465 w 4498464"/>
+              <a:gd name="connsiteY6" fmla="*/ 2375415 h 2775446"/>
+              <a:gd name="connsiteX7" fmla="*/ 513055 w 4498464"/>
+              <a:gd name="connsiteY7" fmla="*/ 2410445 h 2775446"/>
+              <a:gd name="connsiteX8" fmla="*/ 513598 w 4498464"/>
+              <a:gd name="connsiteY8" fmla="*/ 2672763 h 2775446"/>
+              <a:gd name="connsiteX9" fmla="*/ 121892 w 4498464"/>
+              <a:gd name="connsiteY9" fmla="*/ 2600113 h 2775446"/>
+              <a:gd name="connsiteX10" fmla="*/ 0 w 4498464"/>
+              <a:gd name="connsiteY10" fmla="*/ 2585168 h 2775446"/>
+              <a:gd name="connsiteX11" fmla="*/ 48759 w 4498464"/>
+              <a:gd name="connsiteY11" fmla="*/ 60115 h 2775446"/>
+              <a:gd name="connsiteX0" fmla="*/ 48759 w 4498464"/>
+              <a:gd name="connsiteY0" fmla="*/ 60115 h 2729290"/>
+              <a:gd name="connsiteX1" fmla="*/ 108874 w 4498464"/>
+              <a:gd name="connsiteY1" fmla="*/ 0 h 2729290"/>
+              <a:gd name="connsiteX2" fmla="*/ 399279 w 4498464"/>
+              <a:gd name="connsiteY2" fmla="*/ 0 h 2729290"/>
+              <a:gd name="connsiteX3" fmla="*/ 4413324 w 4498464"/>
+              <a:gd name="connsiteY3" fmla="*/ 0 h 2729290"/>
+              <a:gd name="connsiteX4" fmla="*/ 4473439 w 4498464"/>
+              <a:gd name="connsiteY4" fmla="*/ 60115 h 2729290"/>
+              <a:gd name="connsiteX5" fmla="*/ 4473439 w 4498464"/>
+              <a:gd name="connsiteY5" fmla="*/ 300565 h 2729290"/>
+              <a:gd name="connsiteX6" fmla="*/ 4486465 w 4498464"/>
+              <a:gd name="connsiteY6" fmla="*/ 2375415 h 2729290"/>
+              <a:gd name="connsiteX7" fmla="*/ 513055 w 4498464"/>
+              <a:gd name="connsiteY7" fmla="*/ 2410445 h 2729290"/>
+              <a:gd name="connsiteX8" fmla="*/ 513598 w 4498464"/>
+              <a:gd name="connsiteY8" fmla="*/ 2672763 h 2729290"/>
+              <a:gd name="connsiteX9" fmla="*/ 307968 w 4498464"/>
+              <a:gd name="connsiteY9" fmla="*/ 2371664 h 2729290"/>
+              <a:gd name="connsiteX10" fmla="*/ 0 w 4498464"/>
+              <a:gd name="connsiteY10" fmla="*/ 2585168 h 2729290"/>
+              <a:gd name="connsiteX11" fmla="*/ 48759 w 4498464"/>
+              <a:gd name="connsiteY11" fmla="*/ 60115 h 2729290"/>
+              <a:gd name="connsiteX0" fmla="*/ 48759 w 4498464"/>
+              <a:gd name="connsiteY0" fmla="*/ 60115 h 2674928"/>
+              <a:gd name="connsiteX1" fmla="*/ 108874 w 4498464"/>
+              <a:gd name="connsiteY1" fmla="*/ 0 h 2674928"/>
+              <a:gd name="connsiteX2" fmla="*/ 399279 w 4498464"/>
+              <a:gd name="connsiteY2" fmla="*/ 0 h 2674928"/>
+              <a:gd name="connsiteX3" fmla="*/ 4413324 w 4498464"/>
+              <a:gd name="connsiteY3" fmla="*/ 0 h 2674928"/>
+              <a:gd name="connsiteX4" fmla="*/ 4473439 w 4498464"/>
+              <a:gd name="connsiteY4" fmla="*/ 60115 h 2674928"/>
+              <a:gd name="connsiteX5" fmla="*/ 4473439 w 4498464"/>
+              <a:gd name="connsiteY5" fmla="*/ 300565 h 2674928"/>
+              <a:gd name="connsiteX6" fmla="*/ 4486465 w 4498464"/>
+              <a:gd name="connsiteY6" fmla="*/ 2375415 h 2674928"/>
+              <a:gd name="connsiteX7" fmla="*/ 513055 w 4498464"/>
+              <a:gd name="connsiteY7" fmla="*/ 2410445 h 2674928"/>
+              <a:gd name="connsiteX8" fmla="*/ 513598 w 4498464"/>
+              <a:gd name="connsiteY8" fmla="*/ 2672763 h 2674928"/>
+              <a:gd name="connsiteX9" fmla="*/ 307968 w 4498464"/>
+              <a:gd name="connsiteY9" fmla="*/ 2371664 h 2674928"/>
+              <a:gd name="connsiteX10" fmla="*/ 0 w 4498464"/>
+              <a:gd name="connsiteY10" fmla="*/ 2585168 h 2674928"/>
+              <a:gd name="connsiteX11" fmla="*/ 48759 w 4498464"/>
+              <a:gd name="connsiteY11" fmla="*/ 60115 h 2674928"/>
+              <a:gd name="connsiteX0" fmla="*/ 48759 w 4498464"/>
+              <a:gd name="connsiteY0" fmla="*/ 60115 h 2676064"/>
+              <a:gd name="connsiteX1" fmla="*/ 108874 w 4498464"/>
+              <a:gd name="connsiteY1" fmla="*/ 0 h 2676064"/>
+              <a:gd name="connsiteX2" fmla="*/ 399279 w 4498464"/>
+              <a:gd name="connsiteY2" fmla="*/ 0 h 2676064"/>
+              <a:gd name="connsiteX3" fmla="*/ 4413324 w 4498464"/>
+              <a:gd name="connsiteY3" fmla="*/ 0 h 2676064"/>
+              <a:gd name="connsiteX4" fmla="*/ 4473439 w 4498464"/>
+              <a:gd name="connsiteY4" fmla="*/ 60115 h 2676064"/>
+              <a:gd name="connsiteX5" fmla="*/ 4473439 w 4498464"/>
+              <a:gd name="connsiteY5" fmla="*/ 300565 h 2676064"/>
+              <a:gd name="connsiteX6" fmla="*/ 4486465 w 4498464"/>
+              <a:gd name="connsiteY6" fmla="*/ 2375415 h 2676064"/>
+              <a:gd name="connsiteX7" fmla="*/ 513055 w 4498464"/>
+              <a:gd name="connsiteY7" fmla="*/ 2410445 h 2676064"/>
+              <a:gd name="connsiteX8" fmla="*/ 513598 w 4498464"/>
+              <a:gd name="connsiteY8" fmla="*/ 2672763 h 2676064"/>
+              <a:gd name="connsiteX9" fmla="*/ 307968 w 4498464"/>
+              <a:gd name="connsiteY9" fmla="*/ 2490873 h 2676064"/>
+              <a:gd name="connsiteX10" fmla="*/ 0 w 4498464"/>
+              <a:gd name="connsiteY10" fmla="*/ 2585168 h 2676064"/>
+              <a:gd name="connsiteX11" fmla="*/ 48759 w 4498464"/>
+              <a:gd name="connsiteY11" fmla="*/ 60115 h 2676064"/>
+              <a:gd name="connsiteX0" fmla="*/ 48759 w 4498464"/>
+              <a:gd name="connsiteY0" fmla="*/ 60115 h 2617628"/>
+              <a:gd name="connsiteX1" fmla="*/ 108874 w 4498464"/>
+              <a:gd name="connsiteY1" fmla="*/ 0 h 2617628"/>
+              <a:gd name="connsiteX2" fmla="*/ 399279 w 4498464"/>
+              <a:gd name="connsiteY2" fmla="*/ 0 h 2617628"/>
+              <a:gd name="connsiteX3" fmla="*/ 4413324 w 4498464"/>
+              <a:gd name="connsiteY3" fmla="*/ 0 h 2617628"/>
+              <a:gd name="connsiteX4" fmla="*/ 4473439 w 4498464"/>
+              <a:gd name="connsiteY4" fmla="*/ 60115 h 2617628"/>
+              <a:gd name="connsiteX5" fmla="*/ 4473439 w 4498464"/>
+              <a:gd name="connsiteY5" fmla="*/ 300565 h 2617628"/>
+              <a:gd name="connsiteX6" fmla="*/ 4486465 w 4498464"/>
+              <a:gd name="connsiteY6" fmla="*/ 2375415 h 2617628"/>
+              <a:gd name="connsiteX7" fmla="*/ 513055 w 4498464"/>
+              <a:gd name="connsiteY7" fmla="*/ 2410445 h 2617628"/>
+              <a:gd name="connsiteX8" fmla="*/ 379209 w 4498464"/>
+              <a:gd name="connsiteY8" fmla="*/ 2613153 h 2617628"/>
+              <a:gd name="connsiteX9" fmla="*/ 307968 w 4498464"/>
+              <a:gd name="connsiteY9" fmla="*/ 2490873 h 2617628"/>
+              <a:gd name="connsiteX10" fmla="*/ 0 w 4498464"/>
+              <a:gd name="connsiteY10" fmla="*/ 2585168 h 2617628"/>
+              <a:gd name="connsiteX11" fmla="*/ 48759 w 4498464"/>
+              <a:gd name="connsiteY11" fmla="*/ 60115 h 2617628"/>
+              <a:gd name="connsiteX0" fmla="*/ 48759 w 4498464"/>
+              <a:gd name="connsiteY0" fmla="*/ 60115 h 2627867"/>
+              <a:gd name="connsiteX1" fmla="*/ 108874 w 4498464"/>
+              <a:gd name="connsiteY1" fmla="*/ 0 h 2627867"/>
+              <a:gd name="connsiteX2" fmla="*/ 399279 w 4498464"/>
+              <a:gd name="connsiteY2" fmla="*/ 0 h 2627867"/>
+              <a:gd name="connsiteX3" fmla="*/ 4413324 w 4498464"/>
+              <a:gd name="connsiteY3" fmla="*/ 0 h 2627867"/>
+              <a:gd name="connsiteX4" fmla="*/ 4473439 w 4498464"/>
+              <a:gd name="connsiteY4" fmla="*/ 60115 h 2627867"/>
+              <a:gd name="connsiteX5" fmla="*/ 4473439 w 4498464"/>
+              <a:gd name="connsiteY5" fmla="*/ 300565 h 2627867"/>
+              <a:gd name="connsiteX6" fmla="*/ 4486465 w 4498464"/>
+              <a:gd name="connsiteY6" fmla="*/ 2375415 h 2627867"/>
+              <a:gd name="connsiteX7" fmla="*/ 492379 w 4498464"/>
+              <a:gd name="connsiteY7" fmla="*/ 2539569 h 2627867"/>
+              <a:gd name="connsiteX8" fmla="*/ 379209 w 4498464"/>
+              <a:gd name="connsiteY8" fmla="*/ 2613153 h 2627867"/>
+              <a:gd name="connsiteX9" fmla="*/ 307968 w 4498464"/>
+              <a:gd name="connsiteY9" fmla="*/ 2490873 h 2627867"/>
+              <a:gd name="connsiteX10" fmla="*/ 0 w 4498464"/>
+              <a:gd name="connsiteY10" fmla="*/ 2585168 h 2627867"/>
+              <a:gd name="connsiteX11" fmla="*/ 48759 w 4498464"/>
+              <a:gd name="connsiteY11" fmla="*/ 60115 h 2627867"/>
+              <a:gd name="connsiteX0" fmla="*/ 48759 w 4508696"/>
+              <a:gd name="connsiteY0" fmla="*/ 60115 h 2627866"/>
+              <a:gd name="connsiteX1" fmla="*/ 108874 w 4508696"/>
+              <a:gd name="connsiteY1" fmla="*/ 0 h 2627866"/>
+              <a:gd name="connsiteX2" fmla="*/ 399279 w 4508696"/>
+              <a:gd name="connsiteY2" fmla="*/ 0 h 2627866"/>
+              <a:gd name="connsiteX3" fmla="*/ 4413324 w 4508696"/>
+              <a:gd name="connsiteY3" fmla="*/ 0 h 2627866"/>
+              <a:gd name="connsiteX4" fmla="*/ 4473439 w 4508696"/>
+              <a:gd name="connsiteY4" fmla="*/ 60115 h 2627866"/>
+              <a:gd name="connsiteX5" fmla="*/ 4473439 w 4508696"/>
+              <a:gd name="connsiteY5" fmla="*/ 300565 h 2627866"/>
+              <a:gd name="connsiteX6" fmla="*/ 4498464 w 4508696"/>
+              <a:gd name="connsiteY6" fmla="*/ 2583989 h 2627866"/>
+              <a:gd name="connsiteX7" fmla="*/ 492379 w 4508696"/>
+              <a:gd name="connsiteY7" fmla="*/ 2539569 h 2627866"/>
+              <a:gd name="connsiteX8" fmla="*/ 379209 w 4508696"/>
+              <a:gd name="connsiteY8" fmla="*/ 2613153 h 2627866"/>
+              <a:gd name="connsiteX9" fmla="*/ 307968 w 4508696"/>
+              <a:gd name="connsiteY9" fmla="*/ 2490873 h 2627866"/>
+              <a:gd name="connsiteX10" fmla="*/ 0 w 4508696"/>
+              <a:gd name="connsiteY10" fmla="*/ 2585168 h 2627866"/>
+              <a:gd name="connsiteX11" fmla="*/ 48759 w 4508696"/>
+              <a:gd name="connsiteY11" fmla="*/ 60115 h 2627866"/>
+              <a:gd name="connsiteX0" fmla="*/ 28081 w 4488017"/>
+              <a:gd name="connsiteY0" fmla="*/ 60115 h 2627866"/>
+              <a:gd name="connsiteX1" fmla="*/ 88196 w 4488017"/>
+              <a:gd name="connsiteY1" fmla="*/ 0 h 2627866"/>
+              <a:gd name="connsiteX2" fmla="*/ 378601 w 4488017"/>
+              <a:gd name="connsiteY2" fmla="*/ 0 h 2627866"/>
+              <a:gd name="connsiteX3" fmla="*/ 4392646 w 4488017"/>
+              <a:gd name="connsiteY3" fmla="*/ 0 h 2627866"/>
+              <a:gd name="connsiteX4" fmla="*/ 4452761 w 4488017"/>
+              <a:gd name="connsiteY4" fmla="*/ 60115 h 2627866"/>
+              <a:gd name="connsiteX5" fmla="*/ 4452761 w 4488017"/>
+              <a:gd name="connsiteY5" fmla="*/ 300565 h 2627866"/>
+              <a:gd name="connsiteX6" fmla="*/ 4477786 w 4488017"/>
+              <a:gd name="connsiteY6" fmla="*/ 2583989 h 2627866"/>
+              <a:gd name="connsiteX7" fmla="*/ 471701 w 4488017"/>
+              <a:gd name="connsiteY7" fmla="*/ 2539569 h 2627866"/>
+              <a:gd name="connsiteX8" fmla="*/ 358531 w 4488017"/>
+              <a:gd name="connsiteY8" fmla="*/ 2613153 h 2627866"/>
+              <a:gd name="connsiteX9" fmla="*/ 287290 w 4488017"/>
+              <a:gd name="connsiteY9" fmla="*/ 2490873 h 2627866"/>
+              <a:gd name="connsiteX10" fmla="*/ 0 w 4488017"/>
+              <a:gd name="connsiteY10" fmla="*/ 2545439 h 2627866"/>
+              <a:gd name="connsiteX11" fmla="*/ 28081 w 4488017"/>
+              <a:gd name="connsiteY11" fmla="*/ 60115 h 2627866"/>
+            </a:gdLst>
+            <a:ahLst/>
+            <a:cxnLst>
+              <a:cxn ang="0">
+                <a:pos x="connsiteX0" y="connsiteY0"/>
+              </a:cxn>
+              <a:cxn ang="0">
+                <a:pos x="connsiteX1" y="connsiteY1"/>
+              </a:cxn>
+              <a:cxn ang="0">
+                <a:pos x="connsiteX2" y="connsiteY2"/>
+              </a:cxn>
+              <a:cxn ang="0">
+                <a:pos x="connsiteX3" y="connsiteY3"/>
+              </a:cxn>
+              <a:cxn ang="0">
+                <a:pos x="connsiteX4" y="connsiteY4"/>
+              </a:cxn>
+              <a:cxn ang="0">
+                <a:pos x="connsiteX5" y="connsiteY5"/>
+              </a:cxn>
+              <a:cxn ang="0">
+                <a:pos x="connsiteX6" y="connsiteY6"/>
+              </a:cxn>
+              <a:cxn ang="0">
+                <a:pos x="connsiteX7" y="connsiteY7"/>
+              </a:cxn>
+              <a:cxn ang="0">
+                <a:pos x="connsiteX8" y="connsiteY8"/>
+              </a:cxn>
+              <a:cxn ang="0">
+                <a:pos x="connsiteX9" y="connsiteY9"/>
+              </a:cxn>
+              <a:cxn ang="0">
+                <a:pos x="connsiteX10" y="connsiteY10"/>
+              </a:cxn>
+              <a:cxn ang="0">
+                <a:pos x="connsiteX11" y="connsiteY11"/>
+              </a:cxn>
+            </a:cxnLst>
+            <a:rect l="l" t="t" r="r" b="b"/>
+            <a:pathLst>
+              <a:path w="4488017" h="2627866">
+                <a:moveTo>
+                  <a:pt x="28081" y="60115"/>
+                </a:moveTo>
+                <a:cubicBezTo>
+                  <a:pt x="28081" y="26914"/>
+                  <a:pt x="54995" y="0"/>
+                  <a:pt x="88196" y="0"/>
+                </a:cubicBezTo>
+                <a:cubicBezTo>
+                  <a:pt x="184998" y="0"/>
+                  <a:pt x="236079" y="121920"/>
+                  <a:pt x="378601" y="0"/>
+                </a:cubicBezTo>
+                <a:lnTo>
+                  <a:pt x="4392646" y="0"/>
+                </a:lnTo>
+                <a:cubicBezTo>
+                  <a:pt x="4425847" y="0"/>
+                  <a:pt x="4452761" y="26914"/>
+                  <a:pt x="4452761" y="60115"/>
+                </a:cubicBezTo>
+                <a:lnTo>
+                  <a:pt x="4452761" y="300565"/>
+                </a:lnTo>
+                <a:cubicBezTo>
+                  <a:pt x="4452761" y="333766"/>
+                  <a:pt x="4510987" y="2583989"/>
+                  <a:pt x="4477786" y="2583989"/>
+                </a:cubicBezTo>
+                <a:lnTo>
+                  <a:pt x="471701" y="2539569"/>
+                </a:lnTo>
+                <a:cubicBezTo>
+                  <a:pt x="280073" y="2676729"/>
+                  <a:pt x="448559" y="2613153"/>
+                  <a:pt x="358531" y="2613153"/>
+                </a:cubicBezTo>
+                <a:cubicBezTo>
+                  <a:pt x="293337" y="2644764"/>
+                  <a:pt x="329816" y="2498851"/>
+                  <a:pt x="287290" y="2490873"/>
+                </a:cubicBezTo>
+                <a:cubicBezTo>
+                  <a:pt x="244764" y="2482895"/>
+                  <a:pt x="332653" y="2531672"/>
+                  <a:pt x="0" y="2545439"/>
+                </a:cubicBezTo>
+                <a:lnTo>
+                  <a:pt x="28081" y="60115"/>
+                </a:lnTo>
+                <a:close/>
+              </a:path>
+            </a:pathLst>
+          </a:custGeom>
+        </p:spPr>
+        <p:style>
+          <a:lnRef idx="2">
+            <a:schemeClr val="accent1">
+              <a:shade val="50000"/>
+            </a:schemeClr>
+          </a:lnRef>
+          <a:fillRef idx="1">
+            <a:schemeClr val="accent1"/>
+          </a:fillRef>
+          <a:effectRef idx="0">
+            <a:schemeClr val="accent1"/>
+          </a:effectRef>
+          <a:fontRef idx="minor">
+            <a:schemeClr val="lt1"/>
+          </a:fontRef>
+        </p:style>
+        <p:txBody>
+          <a:bodyPr rot="0" spcFirstLastPara="0" vert="horz" wrap="square" lIns="91440" tIns="45720" rIns="91440" bIns="45720" numCol="1" spcCol="0" rtlCol="0" fromWordArt="0" anchor="t" anchorCtr="0" forceAA="0" compatLnSpc="1">
+            <a:prstTxWarp prst="textNoShape">
+              <a:avLst/>
+            </a:prstTxWarp>
+            <a:noAutofit/>
+          </a:bodyPr>
+          <a:lstStyle/>
+          <a:p>
+            <a:pPr>
+              <a:spcAft>
+                <a:spcPts val="0"/>
+              </a:spcAft>
+            </a:pPr>
+            <a:r>
+              <a:rPr lang="en-US" altLang="zh-TW" sz="1200" kern="100" dirty="0" err="1" smtClean="0">
                 <a:ea typeface="新細明體" panose="02020500000000000000" pitchFamily="18" charset="-120"/>
                 <a:cs typeface="Times New Roman" panose="02020603050405020304" pitchFamily="18" charset="0"/>
               </a:rPr>
-              <a:t>循跡感測</a:t>
+              <a:t>iMi</a:t>
             </a:r>
-            <a:endParaRPr lang="zh-TW" sz="1200" dirty="0">
-              <a:effectLst/>
+            <a:r>
+              <a:rPr lang="zh-TW" altLang="en-US" sz="1200" kern="100" dirty="0" smtClean="0">
+                <a:ea typeface="新細明體" panose="02020500000000000000" pitchFamily="18" charset="-120"/>
+                <a:cs typeface="Times New Roman" panose="02020603050405020304" pitchFamily="18" charset="0"/>
+              </a:rPr>
+              <a:t>物流模組</a:t>
+            </a:r>
+            <a:r>
+              <a:rPr lang="en-US" altLang="zh-TW" sz="1200" kern="100" dirty="0" smtClean="0">
+                <a:ea typeface="新細明體" panose="02020500000000000000" pitchFamily="18" charset="-120"/>
+                <a:cs typeface="Times New Roman" panose="02020603050405020304" pitchFamily="18" charset="0"/>
+              </a:rPr>
+              <a:t>UNO</a:t>
+            </a:r>
+            <a:r>
+              <a:rPr lang="zh-TW" altLang="en-US" sz="1200" kern="100" dirty="0" smtClean="0">
+                <a:ea typeface="新細明體" panose="02020500000000000000" pitchFamily="18" charset="-120"/>
+                <a:cs typeface="Times New Roman" panose="02020603050405020304" pitchFamily="18" charset="0"/>
+              </a:rPr>
+              <a:t>初始化</a:t>
+            </a:r>
+            <a:endParaRPr lang="en-US" altLang="zh-TW" sz="1200" kern="100" dirty="0" smtClean="0">
+              <a:ea typeface="新細明體" panose="02020500000000000000" pitchFamily="18" charset="-120"/>
+              <a:cs typeface="Times New Roman" panose="02020603050405020304" pitchFamily="18" charset="0"/>
+            </a:endParaRPr>
+          </a:p>
+          <a:p>
+            <a:pPr>
+              <a:lnSpc>
+                <a:spcPts val="2400"/>
+              </a:lnSpc>
+              <a:spcAft>
+                <a:spcPts val="0"/>
+              </a:spcAft>
+            </a:pPr>
+            <a:r>
+              <a:rPr lang="en-US" altLang="zh-TW" sz="1100" dirty="0" err="1" smtClean="0">
+                <a:solidFill>
+                  <a:srgbClr val="FFFFFF"/>
+                </a:solidFill>
+                <a:cs typeface="Times New Roman" panose="02020603050405020304" pitchFamily="18" charset="0"/>
+              </a:rPr>
+              <a:t>CNC</a:t>
+            </a:r>
+            <a:r>
+              <a:rPr lang="zh-TW" altLang="en-US" sz="1100" dirty="0" smtClean="0">
+                <a:solidFill>
+                  <a:srgbClr val="FFFFFF"/>
+                </a:solidFill>
+                <a:cs typeface="Times New Roman" panose="02020603050405020304" pitchFamily="18" charset="0"/>
+              </a:rPr>
+              <a:t>腳位</a:t>
+            </a:r>
+            <a:endParaRPr lang="zh-TW" altLang="zh-TW" sz="1100" dirty="0">
               <a:latin typeface="新細明體" panose="02020500000000000000" pitchFamily="18" charset="-120"/>
-              <a:ea typeface="新細明體" panose="02020500000000000000" pitchFamily="18" charset="-120"/>
               <a:cs typeface="新細明體" panose="02020500000000000000" pitchFamily="18" charset="-120"/>
             </a:endParaRPr>
           </a:p>
@@ -11768,20 +12461,25 @@
               </a:spcAft>
             </a:pPr>
             <a:r>
-              <a:rPr lang="zh-TW" sz="1050" kern="1200" dirty="0">
+              <a:rPr lang="en-US" altLang="zh-TW" sz="1100" dirty="0" err="1" smtClean="0">
                 <a:solidFill>
                   <a:srgbClr val="FFFFFF"/>
                 </a:solidFill>
-                <a:effectLst/>
-                <a:ea typeface="新細明體" panose="02020500000000000000" pitchFamily="18" charset="-120"/>
                 <a:cs typeface="Times New Roman" panose="02020603050405020304" pitchFamily="18" charset="0"/>
               </a:rPr>
-              <a:t>循跡觸發值</a:t>
+              <a:t>UART</a:t>
             </a:r>
-            <a:endParaRPr lang="zh-TW" sz="1200" dirty="0">
-              <a:effectLst/>
+            <a:r>
+              <a:rPr lang="zh-TW" altLang="en-US" sz="1100" dirty="0" smtClean="0">
+                <a:solidFill>
+                  <a:srgbClr val="FFFFFF"/>
+                </a:solidFill>
+                <a:cs typeface="Times New Roman" panose="02020603050405020304" pitchFamily="18" charset="0"/>
+              </a:rPr>
+              <a:t>通訊</a:t>
+            </a:r>
+            <a:endParaRPr lang="zh-TW" altLang="zh-TW" sz="1100" dirty="0">
               <a:latin typeface="新細明體" panose="02020500000000000000" pitchFamily="18" charset="-120"/>
-              <a:ea typeface="新細明體" panose="02020500000000000000" pitchFamily="18" charset="-120"/>
               <a:cs typeface="新細明體" panose="02020500000000000000" pitchFamily="18" charset="-120"/>
             </a:endParaRPr>
           </a:p>
@@ -11795,161 +12493,16 @@
               </a:spcAft>
             </a:pPr>
             <a:r>
-              <a:rPr lang="zh-TW" sz="1050" kern="1200" dirty="0">
+              <a:rPr lang="zh-TW" altLang="en-US" sz="1100" dirty="0" smtClean="0">
                 <a:solidFill>
                   <a:srgbClr val="FFFFFF"/>
                 </a:solidFill>
-                <a:effectLst/>
-                <a:ea typeface="新細明體" panose="02020500000000000000" pitchFamily="18" charset="-120"/>
                 <a:cs typeface="Times New Roman" panose="02020603050405020304" pitchFamily="18" charset="0"/>
               </a:rPr>
-              <a:t>貨斗伺服馬達</a:t>
+              <a:t>撿貨伺服馬達</a:t>
             </a:r>
-            <a:endParaRPr lang="zh-TW" sz="1200" dirty="0">
-              <a:effectLst/>
+            <a:endParaRPr lang="zh-TW" altLang="zh-TW" sz="1100" dirty="0">
               <a:latin typeface="新細明體" panose="02020500000000000000" pitchFamily="18" charset="-120"/>
-              <a:ea typeface="新細明體" panose="02020500000000000000" pitchFamily="18" charset="-120"/>
-              <a:cs typeface="新細明體" panose="02020500000000000000" pitchFamily="18" charset="-120"/>
-            </a:endParaRPr>
-          </a:p>
-          <a:p>
-            <a:pPr>
-              <a:lnSpc>
-                <a:spcPts val="2400"/>
-              </a:lnSpc>
-              <a:spcAft>
-                <a:spcPts val="0"/>
-              </a:spcAft>
-            </a:pPr>
-            <a:r>
-              <a:rPr lang="en-US" sz="1050" kern="1200" dirty="0">
-                <a:solidFill>
-                  <a:srgbClr val="FFFFFF"/>
-                </a:solidFill>
-                <a:effectLst/>
-                <a:ea typeface="新細明體" panose="02020500000000000000" pitchFamily="18" charset="-120"/>
-                <a:cs typeface="Times New Roman" panose="02020603050405020304" pitchFamily="18" charset="0"/>
-              </a:rPr>
-              <a:t>AI</a:t>
-            </a:r>
-            <a:r>
-              <a:rPr lang="zh-TW" sz="1050" kern="1200" dirty="0">
-                <a:solidFill>
-                  <a:srgbClr val="FFFFFF"/>
-                </a:solidFill>
-                <a:effectLst/>
-                <a:ea typeface="新細明體" panose="02020500000000000000" pitchFamily="18" charset="-120"/>
-                <a:cs typeface="Times New Roman" panose="02020603050405020304" pitchFamily="18" charset="0"/>
-              </a:rPr>
-              <a:t>鏡頭伺服馬達</a:t>
-            </a:r>
-            <a:endParaRPr lang="zh-TW" sz="1200" dirty="0">
-              <a:effectLst/>
-              <a:latin typeface="新細明體" panose="02020500000000000000" pitchFamily="18" charset="-120"/>
-              <a:ea typeface="新細明體" panose="02020500000000000000" pitchFamily="18" charset="-120"/>
-              <a:cs typeface="新細明體" panose="02020500000000000000" pitchFamily="18" charset="-120"/>
-            </a:endParaRPr>
-          </a:p>
-          <a:p>
-            <a:pPr>
-              <a:lnSpc>
-                <a:spcPts val="2400"/>
-              </a:lnSpc>
-              <a:spcAft>
-                <a:spcPts val="0"/>
-              </a:spcAft>
-            </a:pPr>
-            <a:r>
-              <a:rPr lang="zh-TW" sz="1050" kern="1200" dirty="0">
-                <a:solidFill>
-                  <a:srgbClr val="FFFFFF"/>
-                </a:solidFill>
-                <a:effectLst/>
-                <a:ea typeface="新細明體" panose="02020500000000000000" pitchFamily="18" charset="-120"/>
-                <a:cs typeface="Times New Roman" panose="02020603050405020304" pitchFamily="18" charset="0"/>
-              </a:rPr>
-              <a:t>簽收鈕腳位</a:t>
-            </a:r>
-            <a:endParaRPr lang="zh-TW" sz="1200" dirty="0">
-              <a:effectLst/>
-              <a:latin typeface="新細明體" panose="02020500000000000000" pitchFamily="18" charset="-120"/>
-              <a:ea typeface="新細明體" panose="02020500000000000000" pitchFamily="18" charset="-120"/>
-              <a:cs typeface="新細明體" panose="02020500000000000000" pitchFamily="18" charset="-120"/>
-            </a:endParaRPr>
-          </a:p>
-          <a:p>
-            <a:pPr>
-              <a:lnSpc>
-                <a:spcPts val="2400"/>
-              </a:lnSpc>
-              <a:spcAft>
-                <a:spcPts val="0"/>
-              </a:spcAft>
-            </a:pPr>
-            <a:r>
-              <a:rPr lang="en-US" sz="1050" kern="1200" dirty="0" err="1">
-                <a:solidFill>
-                  <a:srgbClr val="FFFFFF"/>
-                </a:solidFill>
-                <a:effectLst/>
-                <a:ea typeface="新細明體" panose="02020500000000000000" pitchFamily="18" charset="-120"/>
-                <a:cs typeface="Times New Roman" panose="02020603050405020304" pitchFamily="18" charset="0"/>
-              </a:rPr>
-              <a:t>L298N</a:t>
-            </a:r>
-            <a:r>
-              <a:rPr lang="zh-TW" sz="1050" kern="1200" dirty="0">
-                <a:solidFill>
-                  <a:srgbClr val="FFFFFF"/>
-                </a:solidFill>
-                <a:effectLst/>
-                <a:ea typeface="新細明體" panose="02020500000000000000" pitchFamily="18" charset="-120"/>
-                <a:cs typeface="Times New Roman" panose="02020603050405020304" pitchFamily="18" charset="0"/>
-              </a:rPr>
-              <a:t>馬達腳位</a:t>
-            </a:r>
-            <a:endParaRPr lang="zh-TW" sz="1200" dirty="0">
-              <a:effectLst/>
-              <a:latin typeface="新細明體" panose="02020500000000000000" pitchFamily="18" charset="-120"/>
-              <a:ea typeface="新細明體" panose="02020500000000000000" pitchFamily="18" charset="-120"/>
-              <a:cs typeface="新細明體" panose="02020500000000000000" pitchFamily="18" charset="-120"/>
-            </a:endParaRPr>
-          </a:p>
-          <a:p>
-            <a:pPr>
-              <a:lnSpc>
-                <a:spcPts val="2400"/>
-              </a:lnSpc>
-              <a:spcAft>
-                <a:spcPts val="0"/>
-              </a:spcAft>
-            </a:pPr>
-            <a:r>
-              <a:rPr lang="en-US" sz="1050" kern="1200" dirty="0" err="1">
-                <a:solidFill>
-                  <a:srgbClr val="FFFFFF"/>
-                </a:solidFill>
-                <a:effectLst/>
-                <a:ea typeface="新細明體" panose="02020500000000000000" pitchFamily="18" charset="-120"/>
-                <a:cs typeface="Times New Roman" panose="02020603050405020304" pitchFamily="18" charset="0"/>
-              </a:rPr>
-              <a:t>L298N</a:t>
-            </a:r>
-            <a:r>
-              <a:rPr lang="zh-TW" sz="1000" kern="1200" dirty="0">
-                <a:solidFill>
-                  <a:srgbClr val="FFFFFF"/>
-                </a:solidFill>
-                <a:effectLst/>
-                <a:ea typeface="新細明體" panose="02020500000000000000" pitchFamily="18" charset="-120"/>
-                <a:cs typeface="Times New Roman" panose="02020603050405020304" pitchFamily="18" charset="0"/>
-              </a:rPr>
-              <a:t>使能腳位</a:t>
-            </a:r>
-            <a:endParaRPr lang="zh-TW" sz="1200" dirty="0">
-              <a:effectLst/>
-              <a:latin typeface="新細明體" panose="02020500000000000000" pitchFamily="18" charset="-120"/>
-              <a:ea typeface="新細明體" panose="02020500000000000000" pitchFamily="18" charset="-120"/>
               <a:cs typeface="新細明體" panose="02020500000000000000" pitchFamily="18" charset="-120"/>
             </a:endParaRPr>
           </a:p>

--- a/tools/myCustomBlockly/iMi/block.pptx
+++ b/tools/myCustomBlockly/iMi/block.pptx
@@ -245,7 +245,7 @@
           <a:p>
             <a:fld id="{28019EB3-9618-4DC9-9742-E69F5EF18F40}" type="datetimeFigureOut">
               <a:rPr lang="zh-TW" altLang="en-US" smtClean="0"/>
-              <a:t>2023/12/18</a:t>
+              <a:t>2023/12/19</a:t>
             </a:fld>
             <a:endParaRPr lang="zh-TW" altLang="en-US"/>
           </a:p>
@@ -415,7 +415,7 @@
           <a:p>
             <a:fld id="{28019EB3-9618-4DC9-9742-E69F5EF18F40}" type="datetimeFigureOut">
               <a:rPr lang="zh-TW" altLang="en-US" smtClean="0"/>
-              <a:t>2023/12/18</a:t>
+              <a:t>2023/12/19</a:t>
             </a:fld>
             <a:endParaRPr lang="zh-TW" altLang="en-US"/>
           </a:p>
@@ -595,7 +595,7 @@
           <a:p>
             <a:fld id="{28019EB3-9618-4DC9-9742-E69F5EF18F40}" type="datetimeFigureOut">
               <a:rPr lang="zh-TW" altLang="en-US" smtClean="0"/>
-              <a:t>2023/12/18</a:t>
+              <a:t>2023/12/19</a:t>
             </a:fld>
             <a:endParaRPr lang="zh-TW" altLang="en-US"/>
           </a:p>
@@ -765,7 +765,7 @@
           <a:p>
             <a:fld id="{28019EB3-9618-4DC9-9742-E69F5EF18F40}" type="datetimeFigureOut">
               <a:rPr lang="zh-TW" altLang="en-US" smtClean="0"/>
-              <a:t>2023/12/18</a:t>
+              <a:t>2023/12/19</a:t>
             </a:fld>
             <a:endParaRPr lang="zh-TW" altLang="en-US"/>
           </a:p>
@@ -1011,7 +1011,7 @@
           <a:p>
             <a:fld id="{28019EB3-9618-4DC9-9742-E69F5EF18F40}" type="datetimeFigureOut">
               <a:rPr lang="zh-TW" altLang="en-US" smtClean="0"/>
-              <a:t>2023/12/18</a:t>
+              <a:t>2023/12/19</a:t>
             </a:fld>
             <a:endParaRPr lang="zh-TW" altLang="en-US"/>
           </a:p>
@@ -1243,7 +1243,7 @@
           <a:p>
             <a:fld id="{28019EB3-9618-4DC9-9742-E69F5EF18F40}" type="datetimeFigureOut">
               <a:rPr lang="zh-TW" altLang="en-US" smtClean="0"/>
-              <a:t>2023/12/18</a:t>
+              <a:t>2023/12/19</a:t>
             </a:fld>
             <a:endParaRPr lang="zh-TW" altLang="en-US"/>
           </a:p>
@@ -1610,7 +1610,7 @@
           <a:p>
             <a:fld id="{28019EB3-9618-4DC9-9742-E69F5EF18F40}" type="datetimeFigureOut">
               <a:rPr lang="zh-TW" altLang="en-US" smtClean="0"/>
-              <a:t>2023/12/18</a:t>
+              <a:t>2023/12/19</a:t>
             </a:fld>
             <a:endParaRPr lang="zh-TW" altLang="en-US"/>
           </a:p>
@@ -1728,7 +1728,7 @@
           <a:p>
             <a:fld id="{28019EB3-9618-4DC9-9742-E69F5EF18F40}" type="datetimeFigureOut">
               <a:rPr lang="zh-TW" altLang="en-US" smtClean="0"/>
-              <a:t>2023/12/18</a:t>
+              <a:t>2023/12/19</a:t>
             </a:fld>
             <a:endParaRPr lang="zh-TW" altLang="en-US"/>
           </a:p>
@@ -1823,7 +1823,7 @@
           <a:p>
             <a:fld id="{28019EB3-9618-4DC9-9742-E69F5EF18F40}" type="datetimeFigureOut">
               <a:rPr lang="zh-TW" altLang="en-US" smtClean="0"/>
-              <a:t>2023/12/18</a:t>
+              <a:t>2023/12/19</a:t>
             </a:fld>
             <a:endParaRPr lang="zh-TW" altLang="en-US"/>
           </a:p>
@@ -2100,7 +2100,7 @@
           <a:p>
             <a:fld id="{28019EB3-9618-4DC9-9742-E69F5EF18F40}" type="datetimeFigureOut">
               <a:rPr lang="zh-TW" altLang="en-US" smtClean="0"/>
-              <a:t>2023/12/18</a:t>
+              <a:t>2023/12/19</a:t>
             </a:fld>
             <a:endParaRPr lang="zh-TW" altLang="en-US"/>
           </a:p>
@@ -2353,7 +2353,7 @@
           <a:p>
             <a:fld id="{28019EB3-9618-4DC9-9742-E69F5EF18F40}" type="datetimeFigureOut">
               <a:rPr lang="zh-TW" altLang="en-US" smtClean="0"/>
-              <a:t>2023/12/18</a:t>
+              <a:t>2023/12/19</a:t>
             </a:fld>
             <a:endParaRPr lang="zh-TW" altLang="en-US"/>
           </a:p>
@@ -2566,7 +2566,7 @@
           <a:p>
             <a:fld id="{28019EB3-9618-4DC9-9742-E69F5EF18F40}" type="datetimeFigureOut">
               <a:rPr lang="zh-TW" altLang="en-US" smtClean="0"/>
-              <a:t>2023/12/18</a:t>
+              <a:t>2023/12/19</a:t>
             </a:fld>
             <a:endParaRPr lang="zh-TW" altLang="en-US"/>
           </a:p>
@@ -10792,6 +10792,1355 @@
           </p:txBody>
         </p:sp>
       </p:grpSp>
+      <p:grpSp>
+        <p:nvGrpSpPr>
+          <p:cNvPr id="4" name="群組 3"/>
+          <p:cNvGrpSpPr/>
+          <p:nvPr/>
+        </p:nvGrpSpPr>
+        <p:grpSpPr>
+          <a:xfrm>
+            <a:off x="2593654" y="1343880"/>
+            <a:ext cx="3320024" cy="413020"/>
+            <a:chOff x="2593654" y="1343880"/>
+            <a:chExt cx="3320024" cy="413020"/>
+          </a:xfrm>
+        </p:grpSpPr>
+        <p:sp>
+          <p:nvSpPr>
+            <p:cNvPr id="84" name="圓角矩形 4"/>
+            <p:cNvSpPr/>
+            <p:nvPr/>
+          </p:nvSpPr>
+          <p:spPr>
+            <a:xfrm>
+              <a:off x="2593654" y="1343880"/>
+              <a:ext cx="3320024" cy="413020"/>
+            </a:xfrm>
+            <a:custGeom>
+              <a:avLst/>
+              <a:gdLst>
+                <a:gd name="connsiteX0" fmla="*/ 0 w 4424680"/>
+                <a:gd name="connsiteY0" fmla="*/ 60115 h 360680"/>
+                <a:gd name="connsiteX1" fmla="*/ 60115 w 4424680"/>
+                <a:gd name="connsiteY1" fmla="*/ 0 h 360680"/>
+                <a:gd name="connsiteX2" fmla="*/ 4364565 w 4424680"/>
+                <a:gd name="connsiteY2" fmla="*/ 0 h 360680"/>
+                <a:gd name="connsiteX3" fmla="*/ 4424680 w 4424680"/>
+                <a:gd name="connsiteY3" fmla="*/ 60115 h 360680"/>
+                <a:gd name="connsiteX4" fmla="*/ 4424680 w 4424680"/>
+                <a:gd name="connsiteY4" fmla="*/ 300565 h 360680"/>
+                <a:gd name="connsiteX5" fmla="*/ 4364565 w 4424680"/>
+                <a:gd name="connsiteY5" fmla="*/ 360680 h 360680"/>
+                <a:gd name="connsiteX6" fmla="*/ 60115 w 4424680"/>
+                <a:gd name="connsiteY6" fmla="*/ 360680 h 360680"/>
+                <a:gd name="connsiteX7" fmla="*/ 0 w 4424680"/>
+                <a:gd name="connsiteY7" fmla="*/ 300565 h 360680"/>
+                <a:gd name="connsiteX8" fmla="*/ 0 w 4424680"/>
+                <a:gd name="connsiteY8" fmla="*/ 60115 h 360680"/>
+                <a:gd name="connsiteX0" fmla="*/ 0 w 4424680"/>
+                <a:gd name="connsiteY0" fmla="*/ 60115 h 360680"/>
+                <a:gd name="connsiteX1" fmla="*/ 60115 w 4424680"/>
+                <a:gd name="connsiteY1" fmla="*/ 0 h 360680"/>
+                <a:gd name="connsiteX2" fmla="*/ 279400 w 4424680"/>
+                <a:gd name="connsiteY2" fmla="*/ 0 h 360680"/>
+                <a:gd name="connsiteX3" fmla="*/ 4364565 w 4424680"/>
+                <a:gd name="connsiteY3" fmla="*/ 0 h 360680"/>
+                <a:gd name="connsiteX4" fmla="*/ 4424680 w 4424680"/>
+                <a:gd name="connsiteY4" fmla="*/ 60115 h 360680"/>
+                <a:gd name="connsiteX5" fmla="*/ 4424680 w 4424680"/>
+                <a:gd name="connsiteY5" fmla="*/ 300565 h 360680"/>
+                <a:gd name="connsiteX6" fmla="*/ 4364565 w 4424680"/>
+                <a:gd name="connsiteY6" fmla="*/ 360680 h 360680"/>
+                <a:gd name="connsiteX7" fmla="*/ 60115 w 4424680"/>
+                <a:gd name="connsiteY7" fmla="*/ 360680 h 360680"/>
+                <a:gd name="connsiteX8" fmla="*/ 0 w 4424680"/>
+                <a:gd name="connsiteY8" fmla="*/ 300565 h 360680"/>
+                <a:gd name="connsiteX9" fmla="*/ 0 w 4424680"/>
+                <a:gd name="connsiteY9" fmla="*/ 60115 h 360680"/>
+                <a:gd name="connsiteX0" fmla="*/ 0 w 4424680"/>
+                <a:gd name="connsiteY0" fmla="*/ 60115 h 360680"/>
+                <a:gd name="connsiteX1" fmla="*/ 60115 w 4424680"/>
+                <a:gd name="connsiteY1" fmla="*/ 0 h 360680"/>
+                <a:gd name="connsiteX2" fmla="*/ 4364565 w 4424680"/>
+                <a:gd name="connsiteY2" fmla="*/ 0 h 360680"/>
+                <a:gd name="connsiteX3" fmla="*/ 4424680 w 4424680"/>
+                <a:gd name="connsiteY3" fmla="*/ 60115 h 360680"/>
+                <a:gd name="connsiteX4" fmla="*/ 4424680 w 4424680"/>
+                <a:gd name="connsiteY4" fmla="*/ 300565 h 360680"/>
+                <a:gd name="connsiteX5" fmla="*/ 4364565 w 4424680"/>
+                <a:gd name="connsiteY5" fmla="*/ 360680 h 360680"/>
+                <a:gd name="connsiteX6" fmla="*/ 60115 w 4424680"/>
+                <a:gd name="connsiteY6" fmla="*/ 360680 h 360680"/>
+                <a:gd name="connsiteX7" fmla="*/ 0 w 4424680"/>
+                <a:gd name="connsiteY7" fmla="*/ 300565 h 360680"/>
+                <a:gd name="connsiteX8" fmla="*/ 0 w 4424680"/>
+                <a:gd name="connsiteY8" fmla="*/ 60115 h 360680"/>
+                <a:gd name="connsiteX0" fmla="*/ 0 w 4424680"/>
+                <a:gd name="connsiteY0" fmla="*/ 60115 h 360680"/>
+                <a:gd name="connsiteX1" fmla="*/ 60115 w 4424680"/>
+                <a:gd name="connsiteY1" fmla="*/ 0 h 360680"/>
+                <a:gd name="connsiteX2" fmla="*/ 350520 w 4424680"/>
+                <a:gd name="connsiteY2" fmla="*/ 0 h 360680"/>
+                <a:gd name="connsiteX3" fmla="*/ 4364565 w 4424680"/>
+                <a:gd name="connsiteY3" fmla="*/ 0 h 360680"/>
+                <a:gd name="connsiteX4" fmla="*/ 4424680 w 4424680"/>
+                <a:gd name="connsiteY4" fmla="*/ 60115 h 360680"/>
+                <a:gd name="connsiteX5" fmla="*/ 4424680 w 4424680"/>
+                <a:gd name="connsiteY5" fmla="*/ 300565 h 360680"/>
+                <a:gd name="connsiteX6" fmla="*/ 4364565 w 4424680"/>
+                <a:gd name="connsiteY6" fmla="*/ 360680 h 360680"/>
+                <a:gd name="connsiteX7" fmla="*/ 60115 w 4424680"/>
+                <a:gd name="connsiteY7" fmla="*/ 360680 h 360680"/>
+                <a:gd name="connsiteX8" fmla="*/ 0 w 4424680"/>
+                <a:gd name="connsiteY8" fmla="*/ 300565 h 360680"/>
+                <a:gd name="connsiteX9" fmla="*/ 0 w 4424680"/>
+                <a:gd name="connsiteY9" fmla="*/ 60115 h 360680"/>
+                <a:gd name="connsiteX0" fmla="*/ 0 w 4424680"/>
+                <a:gd name="connsiteY0" fmla="*/ 121075 h 421640"/>
+                <a:gd name="connsiteX1" fmla="*/ 60115 w 4424680"/>
+                <a:gd name="connsiteY1" fmla="*/ 60960 h 421640"/>
+                <a:gd name="connsiteX2" fmla="*/ 350520 w 4424680"/>
+                <a:gd name="connsiteY2" fmla="*/ 60960 h 421640"/>
+                <a:gd name="connsiteX3" fmla="*/ 4364565 w 4424680"/>
+                <a:gd name="connsiteY3" fmla="*/ 60960 h 421640"/>
+                <a:gd name="connsiteX4" fmla="*/ 4424680 w 4424680"/>
+                <a:gd name="connsiteY4" fmla="*/ 121075 h 421640"/>
+                <a:gd name="connsiteX5" fmla="*/ 4424680 w 4424680"/>
+                <a:gd name="connsiteY5" fmla="*/ 361525 h 421640"/>
+                <a:gd name="connsiteX6" fmla="*/ 4364565 w 4424680"/>
+                <a:gd name="connsiteY6" fmla="*/ 421640 h 421640"/>
+                <a:gd name="connsiteX7" fmla="*/ 60115 w 4424680"/>
+                <a:gd name="connsiteY7" fmla="*/ 421640 h 421640"/>
+                <a:gd name="connsiteX8" fmla="*/ 0 w 4424680"/>
+                <a:gd name="connsiteY8" fmla="*/ 361525 h 421640"/>
+                <a:gd name="connsiteX9" fmla="*/ 0 w 4424680"/>
+                <a:gd name="connsiteY9" fmla="*/ 121075 h 421640"/>
+                <a:gd name="connsiteX0" fmla="*/ 0 w 4424680"/>
+                <a:gd name="connsiteY0" fmla="*/ 121075 h 421640"/>
+                <a:gd name="connsiteX1" fmla="*/ 60115 w 4424680"/>
+                <a:gd name="connsiteY1" fmla="*/ 60960 h 421640"/>
+                <a:gd name="connsiteX2" fmla="*/ 350520 w 4424680"/>
+                <a:gd name="connsiteY2" fmla="*/ 60960 h 421640"/>
+                <a:gd name="connsiteX3" fmla="*/ 4364565 w 4424680"/>
+                <a:gd name="connsiteY3" fmla="*/ 60960 h 421640"/>
+                <a:gd name="connsiteX4" fmla="*/ 4424680 w 4424680"/>
+                <a:gd name="connsiteY4" fmla="*/ 121075 h 421640"/>
+                <a:gd name="connsiteX5" fmla="*/ 4424680 w 4424680"/>
+                <a:gd name="connsiteY5" fmla="*/ 361525 h 421640"/>
+                <a:gd name="connsiteX6" fmla="*/ 4364565 w 4424680"/>
+                <a:gd name="connsiteY6" fmla="*/ 421640 h 421640"/>
+                <a:gd name="connsiteX7" fmla="*/ 330200 w 4424680"/>
+                <a:gd name="connsiteY7" fmla="*/ 421640 h 421640"/>
+                <a:gd name="connsiteX8" fmla="*/ 60115 w 4424680"/>
+                <a:gd name="connsiteY8" fmla="*/ 421640 h 421640"/>
+                <a:gd name="connsiteX9" fmla="*/ 0 w 4424680"/>
+                <a:gd name="connsiteY9" fmla="*/ 361525 h 421640"/>
+                <a:gd name="connsiteX10" fmla="*/ 0 w 4424680"/>
+                <a:gd name="connsiteY10" fmla="*/ 121075 h 421640"/>
+                <a:gd name="connsiteX0" fmla="*/ 0 w 4424680"/>
+                <a:gd name="connsiteY0" fmla="*/ 60115 h 360680"/>
+                <a:gd name="connsiteX1" fmla="*/ 60115 w 4424680"/>
+                <a:gd name="connsiteY1" fmla="*/ 0 h 360680"/>
+                <a:gd name="connsiteX2" fmla="*/ 350520 w 4424680"/>
+                <a:gd name="connsiteY2" fmla="*/ 0 h 360680"/>
+                <a:gd name="connsiteX3" fmla="*/ 4364565 w 4424680"/>
+                <a:gd name="connsiteY3" fmla="*/ 0 h 360680"/>
+                <a:gd name="connsiteX4" fmla="*/ 4424680 w 4424680"/>
+                <a:gd name="connsiteY4" fmla="*/ 60115 h 360680"/>
+                <a:gd name="connsiteX5" fmla="*/ 4424680 w 4424680"/>
+                <a:gd name="connsiteY5" fmla="*/ 300565 h 360680"/>
+                <a:gd name="connsiteX6" fmla="*/ 4364565 w 4424680"/>
+                <a:gd name="connsiteY6" fmla="*/ 360680 h 360680"/>
+                <a:gd name="connsiteX7" fmla="*/ 330200 w 4424680"/>
+                <a:gd name="connsiteY7" fmla="*/ 360680 h 360680"/>
+                <a:gd name="connsiteX8" fmla="*/ 60115 w 4424680"/>
+                <a:gd name="connsiteY8" fmla="*/ 360680 h 360680"/>
+                <a:gd name="connsiteX9" fmla="*/ 0 w 4424680"/>
+                <a:gd name="connsiteY9" fmla="*/ 300565 h 360680"/>
+                <a:gd name="connsiteX10" fmla="*/ 0 w 4424680"/>
+                <a:gd name="connsiteY10" fmla="*/ 60115 h 360680"/>
+                <a:gd name="connsiteX0" fmla="*/ 0 w 4424680"/>
+                <a:gd name="connsiteY0" fmla="*/ 60115 h 421640"/>
+                <a:gd name="connsiteX1" fmla="*/ 60115 w 4424680"/>
+                <a:gd name="connsiteY1" fmla="*/ 0 h 421640"/>
+                <a:gd name="connsiteX2" fmla="*/ 350520 w 4424680"/>
+                <a:gd name="connsiteY2" fmla="*/ 0 h 421640"/>
+                <a:gd name="connsiteX3" fmla="*/ 4364565 w 4424680"/>
+                <a:gd name="connsiteY3" fmla="*/ 0 h 421640"/>
+                <a:gd name="connsiteX4" fmla="*/ 4424680 w 4424680"/>
+                <a:gd name="connsiteY4" fmla="*/ 60115 h 421640"/>
+                <a:gd name="connsiteX5" fmla="*/ 4424680 w 4424680"/>
+                <a:gd name="connsiteY5" fmla="*/ 300565 h 421640"/>
+                <a:gd name="connsiteX6" fmla="*/ 4364565 w 4424680"/>
+                <a:gd name="connsiteY6" fmla="*/ 360680 h 421640"/>
+                <a:gd name="connsiteX7" fmla="*/ 330200 w 4424680"/>
+                <a:gd name="connsiteY7" fmla="*/ 360680 h 421640"/>
+                <a:gd name="connsiteX8" fmla="*/ 60115 w 4424680"/>
+                <a:gd name="connsiteY8" fmla="*/ 360680 h 421640"/>
+                <a:gd name="connsiteX9" fmla="*/ 0 w 4424680"/>
+                <a:gd name="connsiteY9" fmla="*/ 300565 h 421640"/>
+                <a:gd name="connsiteX10" fmla="*/ 0 w 4424680"/>
+                <a:gd name="connsiteY10" fmla="*/ 60115 h 421640"/>
+              </a:gdLst>
+              <a:ahLst/>
+              <a:cxnLst>
+                <a:cxn ang="0">
+                  <a:pos x="connsiteX0" y="connsiteY0"/>
+                </a:cxn>
+                <a:cxn ang="0">
+                  <a:pos x="connsiteX1" y="connsiteY1"/>
+                </a:cxn>
+                <a:cxn ang="0">
+                  <a:pos x="connsiteX2" y="connsiteY2"/>
+                </a:cxn>
+                <a:cxn ang="0">
+                  <a:pos x="connsiteX3" y="connsiteY3"/>
+                </a:cxn>
+                <a:cxn ang="0">
+                  <a:pos x="connsiteX4" y="connsiteY4"/>
+                </a:cxn>
+                <a:cxn ang="0">
+                  <a:pos x="connsiteX5" y="connsiteY5"/>
+                </a:cxn>
+                <a:cxn ang="0">
+                  <a:pos x="connsiteX6" y="connsiteY6"/>
+                </a:cxn>
+                <a:cxn ang="0">
+                  <a:pos x="connsiteX7" y="connsiteY7"/>
+                </a:cxn>
+                <a:cxn ang="0">
+                  <a:pos x="connsiteX8" y="connsiteY8"/>
+                </a:cxn>
+                <a:cxn ang="0">
+                  <a:pos x="connsiteX9" y="connsiteY9"/>
+                </a:cxn>
+                <a:cxn ang="0">
+                  <a:pos x="connsiteX10" y="connsiteY10"/>
+                </a:cxn>
+              </a:cxnLst>
+              <a:rect l="l" t="t" r="r" b="b"/>
+              <a:pathLst>
+                <a:path w="4424680" h="421640">
+                  <a:moveTo>
+                    <a:pt x="0" y="60115"/>
+                  </a:moveTo>
+                  <a:cubicBezTo>
+                    <a:pt x="0" y="26914"/>
+                    <a:pt x="26914" y="0"/>
+                    <a:pt x="60115" y="0"/>
+                  </a:cubicBezTo>
+                  <a:cubicBezTo>
+                    <a:pt x="156917" y="0"/>
+                    <a:pt x="207998" y="121920"/>
+                    <a:pt x="350520" y="0"/>
+                  </a:cubicBezTo>
+                  <a:lnTo>
+                    <a:pt x="4364565" y="0"/>
+                  </a:lnTo>
+                  <a:cubicBezTo>
+                    <a:pt x="4397766" y="0"/>
+                    <a:pt x="4424680" y="26914"/>
+                    <a:pt x="4424680" y="60115"/>
+                  </a:cubicBezTo>
+                  <a:lnTo>
+                    <a:pt x="4424680" y="300565"/>
+                  </a:lnTo>
+                  <a:cubicBezTo>
+                    <a:pt x="4424680" y="333766"/>
+                    <a:pt x="4397766" y="360680"/>
+                    <a:pt x="4364565" y="360680"/>
+                  </a:cubicBezTo>
+                  <a:lnTo>
+                    <a:pt x="330200" y="360680"/>
+                  </a:lnTo>
+                  <a:cubicBezTo>
+                    <a:pt x="138572" y="497840"/>
+                    <a:pt x="150143" y="360680"/>
+                    <a:pt x="60115" y="360680"/>
+                  </a:cubicBezTo>
+                  <a:cubicBezTo>
+                    <a:pt x="26914" y="360680"/>
+                    <a:pt x="0" y="333766"/>
+                    <a:pt x="0" y="300565"/>
+                  </a:cubicBezTo>
+                  <a:lnTo>
+                    <a:pt x="0" y="60115"/>
+                  </a:lnTo>
+                  <a:close/>
+                </a:path>
+              </a:pathLst>
+            </a:custGeom>
+          </p:spPr>
+          <p:style>
+            <a:lnRef idx="2">
+              <a:schemeClr val="accent1">
+                <a:shade val="50000"/>
+              </a:schemeClr>
+            </a:lnRef>
+            <a:fillRef idx="1">
+              <a:schemeClr val="accent1"/>
+            </a:fillRef>
+            <a:effectRef idx="0">
+              <a:schemeClr val="accent1"/>
+            </a:effectRef>
+            <a:fontRef idx="minor">
+              <a:schemeClr val="lt1"/>
+            </a:fontRef>
+          </p:style>
+          <p:txBody>
+            <a:bodyPr rot="0" spcFirstLastPara="0" vert="horz" wrap="square" lIns="91440" tIns="45720" rIns="91440" bIns="45720" numCol="1" spcCol="0" rtlCol="0" fromWordArt="0" anchor="ctr" anchorCtr="0" forceAA="0" compatLnSpc="1">
+              <a:prstTxWarp prst="textNoShape">
+                <a:avLst/>
+              </a:prstTxWarp>
+              <a:noAutofit/>
+            </a:bodyPr>
+            <a:lstStyle/>
+            <a:p>
+              <a:pPr>
+                <a:spcAft>
+                  <a:spcPts val="0"/>
+                </a:spcAft>
+              </a:pPr>
+              <a:r>
+                <a:rPr lang="zh-TW" altLang="en-US" sz="1000" kern="100" dirty="0" smtClean="0">
+                  <a:ea typeface="新細明體" panose="02020500000000000000" pitchFamily="18" charset="-120"/>
+                  <a:cs typeface="Times New Roman" panose="02020603050405020304" pitchFamily="18" charset="0"/>
+                </a:rPr>
+                <a:t>讀取</a:t>
+              </a:r>
+              <a:r>
+                <a:rPr lang="en-US" altLang="zh-TW" sz="1000" kern="100" dirty="0" smtClean="0">
+                  <a:ea typeface="新細明體" panose="02020500000000000000" pitchFamily="18" charset="-120"/>
+                  <a:cs typeface="Times New Roman" panose="02020603050405020304" pitchFamily="18" charset="0"/>
+                </a:rPr>
+                <a:t>Google</a:t>
+              </a:r>
+              <a:r>
+                <a:rPr lang="zh-TW" altLang="en-US" sz="1000" kern="100" dirty="0" smtClean="0">
+                  <a:ea typeface="新細明體" panose="02020500000000000000" pitchFamily="18" charset="-120"/>
+                  <a:cs typeface="Times New Roman" panose="02020603050405020304" pitchFamily="18" charset="0"/>
+                </a:rPr>
+                <a:t>試算表                欄位為                             的資料</a:t>
+              </a:r>
+              <a:endParaRPr lang="zh-TW" sz="1000" kern="100" dirty="0">
+                <a:effectLst/>
+                <a:ea typeface="新細明體" panose="02020500000000000000" pitchFamily="18" charset="-120"/>
+                <a:cs typeface="Times New Roman" panose="02020603050405020304" pitchFamily="18" charset="0"/>
+              </a:endParaRPr>
+            </a:p>
+          </p:txBody>
+        </p:sp>
+        <p:sp>
+          <p:nvSpPr>
+            <p:cNvPr id="95" name="手繪多邊形: 圖案 10"/>
+            <p:cNvSpPr/>
+            <p:nvPr/>
+          </p:nvSpPr>
+          <p:spPr>
+            <a:xfrm>
+              <a:off x="3705295" y="1459902"/>
+              <a:ext cx="396875" cy="180975"/>
+            </a:xfrm>
+            <a:custGeom>
+              <a:avLst/>
+              <a:gdLst>
+                <a:gd name="connsiteX0" fmla="*/ 84890 w 453390"/>
+                <a:gd name="connsiteY0" fmla="*/ 0 h 263525"/>
+                <a:gd name="connsiteX1" fmla="*/ 453390 w 453390"/>
+                <a:gd name="connsiteY1" fmla="*/ 0 h 263525"/>
+                <a:gd name="connsiteX2" fmla="*/ 453390 w 453390"/>
+                <a:gd name="connsiteY2" fmla="*/ 263525 h 263525"/>
+                <a:gd name="connsiteX3" fmla="*/ 84890 w 453390"/>
+                <a:gd name="connsiteY3" fmla="*/ 263525 h 263525"/>
+                <a:gd name="connsiteX4" fmla="*/ 59217 w 453390"/>
+                <a:gd name="connsiteY4" fmla="*/ 168771 h 263525"/>
+                <a:gd name="connsiteX5" fmla="*/ 4819 w 453390"/>
+                <a:gd name="connsiteY5" fmla="*/ 221542 h 263525"/>
+                <a:gd name="connsiteX6" fmla="*/ 0 w 453390"/>
+                <a:gd name="connsiteY6" fmla="*/ 54571 h 263525"/>
+                <a:gd name="connsiteX7" fmla="*/ 55658 w 453390"/>
+                <a:gd name="connsiteY7" fmla="*/ 89403 h 263525"/>
+                <a:gd name="connsiteX8" fmla="*/ 84890 w 453390"/>
+                <a:gd name="connsiteY8" fmla="*/ 0 h 263525"/>
+              </a:gdLst>
+              <a:ahLst/>
+              <a:cxnLst>
+                <a:cxn ang="0">
+                  <a:pos x="connsiteX0" y="connsiteY0"/>
+                </a:cxn>
+                <a:cxn ang="0">
+                  <a:pos x="connsiteX1" y="connsiteY1"/>
+                </a:cxn>
+                <a:cxn ang="0">
+                  <a:pos x="connsiteX2" y="connsiteY2"/>
+                </a:cxn>
+                <a:cxn ang="0">
+                  <a:pos x="connsiteX3" y="connsiteY3"/>
+                </a:cxn>
+                <a:cxn ang="0">
+                  <a:pos x="connsiteX4" y="connsiteY4"/>
+                </a:cxn>
+                <a:cxn ang="0">
+                  <a:pos x="connsiteX5" y="connsiteY5"/>
+                </a:cxn>
+                <a:cxn ang="0">
+                  <a:pos x="connsiteX6" y="connsiteY6"/>
+                </a:cxn>
+                <a:cxn ang="0">
+                  <a:pos x="connsiteX7" y="connsiteY7"/>
+                </a:cxn>
+                <a:cxn ang="0">
+                  <a:pos x="connsiteX8" y="connsiteY8"/>
+                </a:cxn>
+              </a:cxnLst>
+              <a:rect l="l" t="t" r="r" b="b"/>
+              <a:pathLst>
+                <a:path w="453390" h="263525">
+                  <a:moveTo>
+                    <a:pt x="84890" y="0"/>
+                  </a:moveTo>
+                  <a:lnTo>
+                    <a:pt x="453390" y="0"/>
+                  </a:lnTo>
+                  <a:lnTo>
+                    <a:pt x="453390" y="263525"/>
+                  </a:lnTo>
+                  <a:lnTo>
+                    <a:pt x="84890" y="263525"/>
+                  </a:lnTo>
+                  <a:cubicBezTo>
+                    <a:pt x="68745" y="263525"/>
+                    <a:pt x="59217" y="193028"/>
+                    <a:pt x="59217" y="168771"/>
+                  </a:cubicBezTo>
+                  <a:lnTo>
+                    <a:pt x="4819" y="221542"/>
+                  </a:lnTo>
+                  <a:lnTo>
+                    <a:pt x="0" y="54571"/>
+                  </a:lnTo>
+                  <a:lnTo>
+                    <a:pt x="55658" y="89403"/>
+                  </a:lnTo>
+                  <a:cubicBezTo>
+                    <a:pt x="55658" y="65146"/>
+                    <a:pt x="68745" y="0"/>
+                    <a:pt x="84890" y="0"/>
+                  </a:cubicBezTo>
+                  <a:close/>
+                </a:path>
+              </a:pathLst>
+            </a:custGeom>
+          </p:spPr>
+          <p:style>
+            <a:lnRef idx="2">
+              <a:schemeClr val="accent6">
+                <a:shade val="50000"/>
+              </a:schemeClr>
+            </a:lnRef>
+            <a:fillRef idx="1">
+              <a:schemeClr val="accent6"/>
+            </a:fillRef>
+            <a:effectRef idx="0">
+              <a:schemeClr val="accent6"/>
+            </a:effectRef>
+            <a:fontRef idx="minor">
+              <a:schemeClr val="lt1"/>
+            </a:fontRef>
+          </p:style>
+          <p:txBody>
+            <a:bodyPr rot="0" spcFirstLastPara="0" vert="horz" wrap="square" lIns="0" tIns="0" rIns="0" bIns="0" numCol="1" spcCol="0" rtlCol="0" fromWordArt="0" anchor="ctr" anchorCtr="0" forceAA="0" compatLnSpc="1">
+              <a:prstTxWarp prst="textNoShape">
+                <a:avLst/>
+              </a:prstTxWarp>
+              <a:noAutofit/>
+            </a:bodyPr>
+            <a:lstStyle/>
+            <a:p>
+              <a:pPr indent="73025">
+                <a:spcAft>
+                  <a:spcPts val="0"/>
+                </a:spcAft>
+              </a:pPr>
+              <a:r>
+                <a:rPr lang="en-US" sz="1200" kern="100" dirty="0" smtClean="0">
+                  <a:solidFill>
+                    <a:srgbClr val="FFFFFF"/>
+                  </a:solidFill>
+                  <a:effectLst/>
+                  <a:ea typeface="新細明體" panose="02020500000000000000" pitchFamily="18" charset="-120"/>
+                  <a:cs typeface="Times New Roman" panose="02020603050405020304" pitchFamily="18" charset="0"/>
+                </a:rPr>
+                <a:t>“A“</a:t>
+              </a:r>
+              <a:endParaRPr lang="zh-TW" sz="1200" kern="100" dirty="0">
+                <a:effectLst/>
+                <a:ea typeface="新細明體" panose="02020500000000000000" pitchFamily="18" charset="-120"/>
+                <a:cs typeface="Times New Roman" panose="02020603050405020304" pitchFamily="18" charset="0"/>
+              </a:endParaRPr>
+            </a:p>
+          </p:txBody>
+        </p:sp>
+        <p:sp>
+          <p:nvSpPr>
+            <p:cNvPr id="96" name="手繪多邊形: 圖案 10"/>
+            <p:cNvSpPr/>
+            <p:nvPr/>
+          </p:nvSpPr>
+          <p:spPr>
+            <a:xfrm>
+              <a:off x="4533979" y="1463204"/>
+              <a:ext cx="757349" cy="177673"/>
+            </a:xfrm>
+            <a:custGeom>
+              <a:avLst/>
+              <a:gdLst>
+                <a:gd name="connsiteX0" fmla="*/ 84890 w 453390"/>
+                <a:gd name="connsiteY0" fmla="*/ 0 h 263525"/>
+                <a:gd name="connsiteX1" fmla="*/ 453390 w 453390"/>
+                <a:gd name="connsiteY1" fmla="*/ 0 h 263525"/>
+                <a:gd name="connsiteX2" fmla="*/ 453390 w 453390"/>
+                <a:gd name="connsiteY2" fmla="*/ 263525 h 263525"/>
+                <a:gd name="connsiteX3" fmla="*/ 84890 w 453390"/>
+                <a:gd name="connsiteY3" fmla="*/ 263525 h 263525"/>
+                <a:gd name="connsiteX4" fmla="*/ 59217 w 453390"/>
+                <a:gd name="connsiteY4" fmla="*/ 168771 h 263525"/>
+                <a:gd name="connsiteX5" fmla="*/ 4819 w 453390"/>
+                <a:gd name="connsiteY5" fmla="*/ 221542 h 263525"/>
+                <a:gd name="connsiteX6" fmla="*/ 0 w 453390"/>
+                <a:gd name="connsiteY6" fmla="*/ 54571 h 263525"/>
+                <a:gd name="connsiteX7" fmla="*/ 55658 w 453390"/>
+                <a:gd name="connsiteY7" fmla="*/ 89403 h 263525"/>
+                <a:gd name="connsiteX8" fmla="*/ 84890 w 453390"/>
+                <a:gd name="connsiteY8" fmla="*/ 0 h 263525"/>
+              </a:gdLst>
+              <a:ahLst/>
+              <a:cxnLst>
+                <a:cxn ang="0">
+                  <a:pos x="connsiteX0" y="connsiteY0"/>
+                </a:cxn>
+                <a:cxn ang="0">
+                  <a:pos x="connsiteX1" y="connsiteY1"/>
+                </a:cxn>
+                <a:cxn ang="0">
+                  <a:pos x="connsiteX2" y="connsiteY2"/>
+                </a:cxn>
+                <a:cxn ang="0">
+                  <a:pos x="connsiteX3" y="connsiteY3"/>
+                </a:cxn>
+                <a:cxn ang="0">
+                  <a:pos x="connsiteX4" y="connsiteY4"/>
+                </a:cxn>
+                <a:cxn ang="0">
+                  <a:pos x="connsiteX5" y="connsiteY5"/>
+                </a:cxn>
+                <a:cxn ang="0">
+                  <a:pos x="connsiteX6" y="connsiteY6"/>
+                </a:cxn>
+                <a:cxn ang="0">
+                  <a:pos x="connsiteX7" y="connsiteY7"/>
+                </a:cxn>
+                <a:cxn ang="0">
+                  <a:pos x="connsiteX8" y="connsiteY8"/>
+                </a:cxn>
+              </a:cxnLst>
+              <a:rect l="l" t="t" r="r" b="b"/>
+              <a:pathLst>
+                <a:path w="453390" h="263525">
+                  <a:moveTo>
+                    <a:pt x="84890" y="0"/>
+                  </a:moveTo>
+                  <a:lnTo>
+                    <a:pt x="453390" y="0"/>
+                  </a:lnTo>
+                  <a:lnTo>
+                    <a:pt x="453390" y="263525"/>
+                  </a:lnTo>
+                  <a:lnTo>
+                    <a:pt x="84890" y="263525"/>
+                  </a:lnTo>
+                  <a:cubicBezTo>
+                    <a:pt x="68745" y="263525"/>
+                    <a:pt x="59217" y="193028"/>
+                    <a:pt x="59217" y="168771"/>
+                  </a:cubicBezTo>
+                  <a:lnTo>
+                    <a:pt x="4819" y="221542"/>
+                  </a:lnTo>
+                  <a:lnTo>
+                    <a:pt x="0" y="54571"/>
+                  </a:lnTo>
+                  <a:lnTo>
+                    <a:pt x="55658" y="89403"/>
+                  </a:lnTo>
+                  <a:cubicBezTo>
+                    <a:pt x="55658" y="65146"/>
+                    <a:pt x="68745" y="0"/>
+                    <a:pt x="84890" y="0"/>
+                  </a:cubicBezTo>
+                  <a:close/>
+                </a:path>
+              </a:pathLst>
+            </a:custGeom>
+          </p:spPr>
+          <p:style>
+            <a:lnRef idx="2">
+              <a:schemeClr val="accent6">
+                <a:shade val="50000"/>
+              </a:schemeClr>
+            </a:lnRef>
+            <a:fillRef idx="1">
+              <a:schemeClr val="accent6"/>
+            </a:fillRef>
+            <a:effectRef idx="0">
+              <a:schemeClr val="accent6"/>
+            </a:effectRef>
+            <a:fontRef idx="minor">
+              <a:schemeClr val="lt1"/>
+            </a:fontRef>
+          </p:style>
+          <p:txBody>
+            <a:bodyPr rot="0" spcFirstLastPara="0" vert="horz" wrap="square" lIns="0" tIns="0" rIns="0" bIns="0" numCol="1" spcCol="0" rtlCol="0" fromWordArt="0" anchor="ctr" anchorCtr="0" forceAA="0" compatLnSpc="1">
+              <a:prstTxWarp prst="textNoShape">
+                <a:avLst/>
+              </a:prstTxWarp>
+              <a:noAutofit/>
+            </a:bodyPr>
+            <a:lstStyle/>
+            <a:p>
+              <a:pPr indent="73025">
+                <a:spcAft>
+                  <a:spcPts val="0"/>
+                </a:spcAft>
+              </a:pPr>
+              <a:r>
+                <a:rPr lang="en-US" sz="1200" kern="100" dirty="0" smtClean="0">
+                  <a:solidFill>
+                    <a:srgbClr val="FFFFFF"/>
+                  </a:solidFill>
+                  <a:effectLst/>
+                  <a:ea typeface="新細明體" panose="02020500000000000000" pitchFamily="18" charset="-120"/>
+                  <a:cs typeface="Times New Roman" panose="02020603050405020304" pitchFamily="18" charset="0"/>
+                </a:rPr>
+                <a:t>“</a:t>
+              </a:r>
+              <a:r>
+                <a:rPr lang="zh-TW" altLang="en-US" sz="1200" kern="100" dirty="0" smtClean="0">
+                  <a:solidFill>
+                    <a:srgbClr val="FFFFFF"/>
+                  </a:solidFill>
+                  <a:ea typeface="新細明體" panose="02020500000000000000" pitchFamily="18" charset="-120"/>
+                  <a:cs typeface="Times New Roman" panose="02020603050405020304" pitchFamily="18" charset="0"/>
+                </a:rPr>
+                <a:t>陳大春</a:t>
+              </a:r>
+              <a:r>
+                <a:rPr lang="en-US" sz="1200" kern="100" dirty="0" smtClean="0">
+                  <a:solidFill>
+                    <a:srgbClr val="FFFFFF"/>
+                  </a:solidFill>
+                  <a:effectLst/>
+                  <a:ea typeface="新細明體" panose="02020500000000000000" pitchFamily="18" charset="-120"/>
+                  <a:cs typeface="Times New Roman" panose="02020603050405020304" pitchFamily="18" charset="0"/>
+                </a:rPr>
+                <a:t>“</a:t>
+              </a:r>
+              <a:endParaRPr lang="zh-TW" sz="1200" kern="100" dirty="0">
+                <a:effectLst/>
+                <a:ea typeface="新細明體" panose="02020500000000000000" pitchFamily="18" charset="-120"/>
+                <a:cs typeface="Times New Roman" panose="02020603050405020304" pitchFamily="18" charset="0"/>
+              </a:endParaRPr>
+            </a:p>
+          </p:txBody>
+        </p:sp>
+      </p:grpSp>
+      <p:sp>
+        <p:nvSpPr>
+          <p:cNvPr id="105" name="圓角矩形 4"/>
+          <p:cNvSpPr/>
+          <p:nvPr/>
+        </p:nvSpPr>
+        <p:spPr>
+          <a:xfrm>
+            <a:off x="6429321" y="1388428"/>
+            <a:ext cx="2785294" cy="395614"/>
+          </a:xfrm>
+          <a:custGeom>
+            <a:avLst/>
+            <a:gdLst>
+              <a:gd name="connsiteX0" fmla="*/ 0 w 4424680"/>
+              <a:gd name="connsiteY0" fmla="*/ 60115 h 360680"/>
+              <a:gd name="connsiteX1" fmla="*/ 60115 w 4424680"/>
+              <a:gd name="connsiteY1" fmla="*/ 0 h 360680"/>
+              <a:gd name="connsiteX2" fmla="*/ 4364565 w 4424680"/>
+              <a:gd name="connsiteY2" fmla="*/ 0 h 360680"/>
+              <a:gd name="connsiteX3" fmla="*/ 4424680 w 4424680"/>
+              <a:gd name="connsiteY3" fmla="*/ 60115 h 360680"/>
+              <a:gd name="connsiteX4" fmla="*/ 4424680 w 4424680"/>
+              <a:gd name="connsiteY4" fmla="*/ 300565 h 360680"/>
+              <a:gd name="connsiteX5" fmla="*/ 4364565 w 4424680"/>
+              <a:gd name="connsiteY5" fmla="*/ 360680 h 360680"/>
+              <a:gd name="connsiteX6" fmla="*/ 60115 w 4424680"/>
+              <a:gd name="connsiteY6" fmla="*/ 360680 h 360680"/>
+              <a:gd name="connsiteX7" fmla="*/ 0 w 4424680"/>
+              <a:gd name="connsiteY7" fmla="*/ 300565 h 360680"/>
+              <a:gd name="connsiteX8" fmla="*/ 0 w 4424680"/>
+              <a:gd name="connsiteY8" fmla="*/ 60115 h 360680"/>
+              <a:gd name="connsiteX0" fmla="*/ 0 w 4424680"/>
+              <a:gd name="connsiteY0" fmla="*/ 60115 h 360680"/>
+              <a:gd name="connsiteX1" fmla="*/ 60115 w 4424680"/>
+              <a:gd name="connsiteY1" fmla="*/ 0 h 360680"/>
+              <a:gd name="connsiteX2" fmla="*/ 279400 w 4424680"/>
+              <a:gd name="connsiteY2" fmla="*/ 0 h 360680"/>
+              <a:gd name="connsiteX3" fmla="*/ 4364565 w 4424680"/>
+              <a:gd name="connsiteY3" fmla="*/ 0 h 360680"/>
+              <a:gd name="connsiteX4" fmla="*/ 4424680 w 4424680"/>
+              <a:gd name="connsiteY4" fmla="*/ 60115 h 360680"/>
+              <a:gd name="connsiteX5" fmla="*/ 4424680 w 4424680"/>
+              <a:gd name="connsiteY5" fmla="*/ 300565 h 360680"/>
+              <a:gd name="connsiteX6" fmla="*/ 4364565 w 4424680"/>
+              <a:gd name="connsiteY6" fmla="*/ 360680 h 360680"/>
+              <a:gd name="connsiteX7" fmla="*/ 60115 w 4424680"/>
+              <a:gd name="connsiteY7" fmla="*/ 360680 h 360680"/>
+              <a:gd name="connsiteX8" fmla="*/ 0 w 4424680"/>
+              <a:gd name="connsiteY8" fmla="*/ 300565 h 360680"/>
+              <a:gd name="connsiteX9" fmla="*/ 0 w 4424680"/>
+              <a:gd name="connsiteY9" fmla="*/ 60115 h 360680"/>
+              <a:gd name="connsiteX0" fmla="*/ 0 w 4424680"/>
+              <a:gd name="connsiteY0" fmla="*/ 60115 h 360680"/>
+              <a:gd name="connsiteX1" fmla="*/ 60115 w 4424680"/>
+              <a:gd name="connsiteY1" fmla="*/ 0 h 360680"/>
+              <a:gd name="connsiteX2" fmla="*/ 4364565 w 4424680"/>
+              <a:gd name="connsiteY2" fmla="*/ 0 h 360680"/>
+              <a:gd name="connsiteX3" fmla="*/ 4424680 w 4424680"/>
+              <a:gd name="connsiteY3" fmla="*/ 60115 h 360680"/>
+              <a:gd name="connsiteX4" fmla="*/ 4424680 w 4424680"/>
+              <a:gd name="connsiteY4" fmla="*/ 300565 h 360680"/>
+              <a:gd name="connsiteX5" fmla="*/ 4364565 w 4424680"/>
+              <a:gd name="connsiteY5" fmla="*/ 360680 h 360680"/>
+              <a:gd name="connsiteX6" fmla="*/ 60115 w 4424680"/>
+              <a:gd name="connsiteY6" fmla="*/ 360680 h 360680"/>
+              <a:gd name="connsiteX7" fmla="*/ 0 w 4424680"/>
+              <a:gd name="connsiteY7" fmla="*/ 300565 h 360680"/>
+              <a:gd name="connsiteX8" fmla="*/ 0 w 4424680"/>
+              <a:gd name="connsiteY8" fmla="*/ 60115 h 360680"/>
+              <a:gd name="connsiteX0" fmla="*/ 0 w 4424680"/>
+              <a:gd name="connsiteY0" fmla="*/ 60115 h 360680"/>
+              <a:gd name="connsiteX1" fmla="*/ 60115 w 4424680"/>
+              <a:gd name="connsiteY1" fmla="*/ 0 h 360680"/>
+              <a:gd name="connsiteX2" fmla="*/ 350520 w 4424680"/>
+              <a:gd name="connsiteY2" fmla="*/ 0 h 360680"/>
+              <a:gd name="connsiteX3" fmla="*/ 4364565 w 4424680"/>
+              <a:gd name="connsiteY3" fmla="*/ 0 h 360680"/>
+              <a:gd name="connsiteX4" fmla="*/ 4424680 w 4424680"/>
+              <a:gd name="connsiteY4" fmla="*/ 60115 h 360680"/>
+              <a:gd name="connsiteX5" fmla="*/ 4424680 w 4424680"/>
+              <a:gd name="connsiteY5" fmla="*/ 300565 h 360680"/>
+              <a:gd name="connsiteX6" fmla="*/ 4364565 w 4424680"/>
+              <a:gd name="connsiteY6" fmla="*/ 360680 h 360680"/>
+              <a:gd name="connsiteX7" fmla="*/ 60115 w 4424680"/>
+              <a:gd name="connsiteY7" fmla="*/ 360680 h 360680"/>
+              <a:gd name="connsiteX8" fmla="*/ 0 w 4424680"/>
+              <a:gd name="connsiteY8" fmla="*/ 300565 h 360680"/>
+              <a:gd name="connsiteX9" fmla="*/ 0 w 4424680"/>
+              <a:gd name="connsiteY9" fmla="*/ 60115 h 360680"/>
+              <a:gd name="connsiteX0" fmla="*/ 0 w 4424680"/>
+              <a:gd name="connsiteY0" fmla="*/ 121075 h 421640"/>
+              <a:gd name="connsiteX1" fmla="*/ 60115 w 4424680"/>
+              <a:gd name="connsiteY1" fmla="*/ 60960 h 421640"/>
+              <a:gd name="connsiteX2" fmla="*/ 350520 w 4424680"/>
+              <a:gd name="connsiteY2" fmla="*/ 60960 h 421640"/>
+              <a:gd name="connsiteX3" fmla="*/ 4364565 w 4424680"/>
+              <a:gd name="connsiteY3" fmla="*/ 60960 h 421640"/>
+              <a:gd name="connsiteX4" fmla="*/ 4424680 w 4424680"/>
+              <a:gd name="connsiteY4" fmla="*/ 121075 h 421640"/>
+              <a:gd name="connsiteX5" fmla="*/ 4424680 w 4424680"/>
+              <a:gd name="connsiteY5" fmla="*/ 361525 h 421640"/>
+              <a:gd name="connsiteX6" fmla="*/ 4364565 w 4424680"/>
+              <a:gd name="connsiteY6" fmla="*/ 421640 h 421640"/>
+              <a:gd name="connsiteX7" fmla="*/ 60115 w 4424680"/>
+              <a:gd name="connsiteY7" fmla="*/ 421640 h 421640"/>
+              <a:gd name="connsiteX8" fmla="*/ 0 w 4424680"/>
+              <a:gd name="connsiteY8" fmla="*/ 361525 h 421640"/>
+              <a:gd name="connsiteX9" fmla="*/ 0 w 4424680"/>
+              <a:gd name="connsiteY9" fmla="*/ 121075 h 421640"/>
+              <a:gd name="connsiteX0" fmla="*/ 0 w 4424680"/>
+              <a:gd name="connsiteY0" fmla="*/ 121075 h 421640"/>
+              <a:gd name="connsiteX1" fmla="*/ 60115 w 4424680"/>
+              <a:gd name="connsiteY1" fmla="*/ 60960 h 421640"/>
+              <a:gd name="connsiteX2" fmla="*/ 350520 w 4424680"/>
+              <a:gd name="connsiteY2" fmla="*/ 60960 h 421640"/>
+              <a:gd name="connsiteX3" fmla="*/ 4364565 w 4424680"/>
+              <a:gd name="connsiteY3" fmla="*/ 60960 h 421640"/>
+              <a:gd name="connsiteX4" fmla="*/ 4424680 w 4424680"/>
+              <a:gd name="connsiteY4" fmla="*/ 121075 h 421640"/>
+              <a:gd name="connsiteX5" fmla="*/ 4424680 w 4424680"/>
+              <a:gd name="connsiteY5" fmla="*/ 361525 h 421640"/>
+              <a:gd name="connsiteX6" fmla="*/ 4364565 w 4424680"/>
+              <a:gd name="connsiteY6" fmla="*/ 421640 h 421640"/>
+              <a:gd name="connsiteX7" fmla="*/ 330200 w 4424680"/>
+              <a:gd name="connsiteY7" fmla="*/ 421640 h 421640"/>
+              <a:gd name="connsiteX8" fmla="*/ 60115 w 4424680"/>
+              <a:gd name="connsiteY8" fmla="*/ 421640 h 421640"/>
+              <a:gd name="connsiteX9" fmla="*/ 0 w 4424680"/>
+              <a:gd name="connsiteY9" fmla="*/ 361525 h 421640"/>
+              <a:gd name="connsiteX10" fmla="*/ 0 w 4424680"/>
+              <a:gd name="connsiteY10" fmla="*/ 121075 h 421640"/>
+              <a:gd name="connsiteX0" fmla="*/ 0 w 4424680"/>
+              <a:gd name="connsiteY0" fmla="*/ 60115 h 360680"/>
+              <a:gd name="connsiteX1" fmla="*/ 60115 w 4424680"/>
+              <a:gd name="connsiteY1" fmla="*/ 0 h 360680"/>
+              <a:gd name="connsiteX2" fmla="*/ 350520 w 4424680"/>
+              <a:gd name="connsiteY2" fmla="*/ 0 h 360680"/>
+              <a:gd name="connsiteX3" fmla="*/ 4364565 w 4424680"/>
+              <a:gd name="connsiteY3" fmla="*/ 0 h 360680"/>
+              <a:gd name="connsiteX4" fmla="*/ 4424680 w 4424680"/>
+              <a:gd name="connsiteY4" fmla="*/ 60115 h 360680"/>
+              <a:gd name="connsiteX5" fmla="*/ 4424680 w 4424680"/>
+              <a:gd name="connsiteY5" fmla="*/ 300565 h 360680"/>
+              <a:gd name="connsiteX6" fmla="*/ 4364565 w 4424680"/>
+              <a:gd name="connsiteY6" fmla="*/ 360680 h 360680"/>
+              <a:gd name="connsiteX7" fmla="*/ 330200 w 4424680"/>
+              <a:gd name="connsiteY7" fmla="*/ 360680 h 360680"/>
+              <a:gd name="connsiteX8" fmla="*/ 60115 w 4424680"/>
+              <a:gd name="connsiteY8" fmla="*/ 360680 h 360680"/>
+              <a:gd name="connsiteX9" fmla="*/ 0 w 4424680"/>
+              <a:gd name="connsiteY9" fmla="*/ 300565 h 360680"/>
+              <a:gd name="connsiteX10" fmla="*/ 0 w 4424680"/>
+              <a:gd name="connsiteY10" fmla="*/ 60115 h 360680"/>
+              <a:gd name="connsiteX0" fmla="*/ 0 w 4424680"/>
+              <a:gd name="connsiteY0" fmla="*/ 60115 h 421640"/>
+              <a:gd name="connsiteX1" fmla="*/ 60115 w 4424680"/>
+              <a:gd name="connsiteY1" fmla="*/ 0 h 421640"/>
+              <a:gd name="connsiteX2" fmla="*/ 350520 w 4424680"/>
+              <a:gd name="connsiteY2" fmla="*/ 0 h 421640"/>
+              <a:gd name="connsiteX3" fmla="*/ 4364565 w 4424680"/>
+              <a:gd name="connsiteY3" fmla="*/ 0 h 421640"/>
+              <a:gd name="connsiteX4" fmla="*/ 4424680 w 4424680"/>
+              <a:gd name="connsiteY4" fmla="*/ 60115 h 421640"/>
+              <a:gd name="connsiteX5" fmla="*/ 4424680 w 4424680"/>
+              <a:gd name="connsiteY5" fmla="*/ 300565 h 421640"/>
+              <a:gd name="connsiteX6" fmla="*/ 4364565 w 4424680"/>
+              <a:gd name="connsiteY6" fmla="*/ 360680 h 421640"/>
+              <a:gd name="connsiteX7" fmla="*/ 330200 w 4424680"/>
+              <a:gd name="connsiteY7" fmla="*/ 360680 h 421640"/>
+              <a:gd name="connsiteX8" fmla="*/ 60115 w 4424680"/>
+              <a:gd name="connsiteY8" fmla="*/ 360680 h 421640"/>
+              <a:gd name="connsiteX9" fmla="*/ 0 w 4424680"/>
+              <a:gd name="connsiteY9" fmla="*/ 300565 h 421640"/>
+              <a:gd name="connsiteX10" fmla="*/ 0 w 4424680"/>
+              <a:gd name="connsiteY10" fmla="*/ 60115 h 421640"/>
+            </a:gdLst>
+            <a:ahLst/>
+            <a:cxnLst>
+              <a:cxn ang="0">
+                <a:pos x="connsiteX0" y="connsiteY0"/>
+              </a:cxn>
+              <a:cxn ang="0">
+                <a:pos x="connsiteX1" y="connsiteY1"/>
+              </a:cxn>
+              <a:cxn ang="0">
+                <a:pos x="connsiteX2" y="connsiteY2"/>
+              </a:cxn>
+              <a:cxn ang="0">
+                <a:pos x="connsiteX3" y="connsiteY3"/>
+              </a:cxn>
+              <a:cxn ang="0">
+                <a:pos x="connsiteX4" y="connsiteY4"/>
+              </a:cxn>
+              <a:cxn ang="0">
+                <a:pos x="connsiteX5" y="connsiteY5"/>
+              </a:cxn>
+              <a:cxn ang="0">
+                <a:pos x="connsiteX6" y="connsiteY6"/>
+              </a:cxn>
+              <a:cxn ang="0">
+                <a:pos x="connsiteX7" y="connsiteY7"/>
+              </a:cxn>
+              <a:cxn ang="0">
+                <a:pos x="connsiteX8" y="connsiteY8"/>
+              </a:cxn>
+              <a:cxn ang="0">
+                <a:pos x="connsiteX9" y="connsiteY9"/>
+              </a:cxn>
+              <a:cxn ang="0">
+                <a:pos x="connsiteX10" y="connsiteY10"/>
+              </a:cxn>
+            </a:cxnLst>
+            <a:rect l="l" t="t" r="r" b="b"/>
+            <a:pathLst>
+              <a:path w="4424680" h="421640">
+                <a:moveTo>
+                  <a:pt x="0" y="60115"/>
+                </a:moveTo>
+                <a:cubicBezTo>
+                  <a:pt x="0" y="26914"/>
+                  <a:pt x="26914" y="0"/>
+                  <a:pt x="60115" y="0"/>
+                </a:cubicBezTo>
+                <a:cubicBezTo>
+                  <a:pt x="156917" y="0"/>
+                  <a:pt x="207998" y="121920"/>
+                  <a:pt x="350520" y="0"/>
+                </a:cubicBezTo>
+                <a:lnTo>
+                  <a:pt x="4364565" y="0"/>
+                </a:lnTo>
+                <a:cubicBezTo>
+                  <a:pt x="4397766" y="0"/>
+                  <a:pt x="4424680" y="26914"/>
+                  <a:pt x="4424680" y="60115"/>
+                </a:cubicBezTo>
+                <a:lnTo>
+                  <a:pt x="4424680" y="300565"/>
+                </a:lnTo>
+                <a:cubicBezTo>
+                  <a:pt x="4424680" y="333766"/>
+                  <a:pt x="4397766" y="360680"/>
+                  <a:pt x="4364565" y="360680"/>
+                </a:cubicBezTo>
+                <a:lnTo>
+                  <a:pt x="330200" y="360680"/>
+                </a:lnTo>
+                <a:cubicBezTo>
+                  <a:pt x="138572" y="497840"/>
+                  <a:pt x="150143" y="360680"/>
+                  <a:pt x="60115" y="360680"/>
+                </a:cubicBezTo>
+                <a:cubicBezTo>
+                  <a:pt x="26914" y="360680"/>
+                  <a:pt x="0" y="333766"/>
+                  <a:pt x="0" y="300565"/>
+                </a:cubicBezTo>
+                <a:lnTo>
+                  <a:pt x="0" y="60115"/>
+                </a:lnTo>
+                <a:close/>
+              </a:path>
+            </a:pathLst>
+          </a:custGeom>
+        </p:spPr>
+        <p:style>
+          <a:lnRef idx="2">
+            <a:schemeClr val="accent1">
+              <a:shade val="50000"/>
+            </a:schemeClr>
+          </a:lnRef>
+          <a:fillRef idx="1">
+            <a:schemeClr val="accent1"/>
+          </a:fillRef>
+          <a:effectRef idx="0">
+            <a:schemeClr val="accent1"/>
+          </a:effectRef>
+          <a:fontRef idx="minor">
+            <a:schemeClr val="lt1"/>
+          </a:fontRef>
+        </p:style>
+        <p:txBody>
+          <a:bodyPr rot="0" spcFirstLastPara="0" vert="horz" wrap="square" lIns="91440" tIns="45720" rIns="91440" bIns="45720" numCol="1" spcCol="0" rtlCol="0" fromWordArt="0" anchor="ctr" anchorCtr="0" forceAA="0" compatLnSpc="1">
+            <a:prstTxWarp prst="textNoShape">
+              <a:avLst/>
+            </a:prstTxWarp>
+            <a:noAutofit/>
+          </a:bodyPr>
+          <a:lstStyle/>
+          <a:p>
+            <a:pPr>
+              <a:spcAft>
+                <a:spcPts val="0"/>
+              </a:spcAft>
+            </a:pPr>
+            <a:r>
+              <a:rPr lang="en-US" altLang="zh-TW" sz="1000" kern="100" dirty="0" smtClean="0">
+                <a:effectLst/>
+                <a:ea typeface="新細明體" panose="02020500000000000000" pitchFamily="18" charset="-120"/>
+                <a:cs typeface="Times New Roman" panose="02020603050405020304" pitchFamily="18" charset="0"/>
+              </a:rPr>
+              <a:t>AI</a:t>
+            </a:r>
+            <a:r>
+              <a:rPr lang="zh-TW" altLang="en-US" sz="1000" kern="100" dirty="0" smtClean="0">
+                <a:effectLst/>
+                <a:ea typeface="新細明體" panose="02020500000000000000" pitchFamily="18" charset="-120"/>
+                <a:cs typeface="Times New Roman" panose="02020603050405020304" pitchFamily="18" charset="0"/>
+              </a:rPr>
+              <a:t>識別模式切換為</a:t>
+            </a:r>
+            <a:r>
+              <a:rPr lang="en-US" altLang="zh-TW" sz="1000" kern="100" dirty="0" smtClean="0">
+                <a:effectLst/>
+                <a:ea typeface="新細明體" panose="02020500000000000000" pitchFamily="18" charset="-120"/>
+                <a:cs typeface="Times New Roman" panose="02020603050405020304" pitchFamily="18" charset="0"/>
+              </a:rPr>
+              <a:t>:</a:t>
+            </a:r>
+            <a:endParaRPr lang="zh-TW" sz="1000" kern="100" dirty="0">
+              <a:effectLst/>
+              <a:ea typeface="新細明體" panose="02020500000000000000" pitchFamily="18" charset="-120"/>
+              <a:cs typeface="Times New Roman" panose="02020603050405020304" pitchFamily="18" charset="0"/>
+            </a:endParaRPr>
+          </a:p>
+        </p:txBody>
+      </p:sp>
+      <p:sp>
+        <p:nvSpPr>
+          <p:cNvPr id="113" name="圓角矩形 4"/>
+          <p:cNvSpPr/>
+          <p:nvPr/>
+        </p:nvSpPr>
+        <p:spPr>
+          <a:xfrm>
+            <a:off x="3391125" y="5025465"/>
+            <a:ext cx="2553869" cy="395614"/>
+          </a:xfrm>
+          <a:custGeom>
+            <a:avLst/>
+            <a:gdLst>
+              <a:gd name="connsiteX0" fmla="*/ 0 w 4424680"/>
+              <a:gd name="connsiteY0" fmla="*/ 60115 h 360680"/>
+              <a:gd name="connsiteX1" fmla="*/ 60115 w 4424680"/>
+              <a:gd name="connsiteY1" fmla="*/ 0 h 360680"/>
+              <a:gd name="connsiteX2" fmla="*/ 4364565 w 4424680"/>
+              <a:gd name="connsiteY2" fmla="*/ 0 h 360680"/>
+              <a:gd name="connsiteX3" fmla="*/ 4424680 w 4424680"/>
+              <a:gd name="connsiteY3" fmla="*/ 60115 h 360680"/>
+              <a:gd name="connsiteX4" fmla="*/ 4424680 w 4424680"/>
+              <a:gd name="connsiteY4" fmla="*/ 300565 h 360680"/>
+              <a:gd name="connsiteX5" fmla="*/ 4364565 w 4424680"/>
+              <a:gd name="connsiteY5" fmla="*/ 360680 h 360680"/>
+              <a:gd name="connsiteX6" fmla="*/ 60115 w 4424680"/>
+              <a:gd name="connsiteY6" fmla="*/ 360680 h 360680"/>
+              <a:gd name="connsiteX7" fmla="*/ 0 w 4424680"/>
+              <a:gd name="connsiteY7" fmla="*/ 300565 h 360680"/>
+              <a:gd name="connsiteX8" fmla="*/ 0 w 4424680"/>
+              <a:gd name="connsiteY8" fmla="*/ 60115 h 360680"/>
+              <a:gd name="connsiteX0" fmla="*/ 0 w 4424680"/>
+              <a:gd name="connsiteY0" fmla="*/ 60115 h 360680"/>
+              <a:gd name="connsiteX1" fmla="*/ 60115 w 4424680"/>
+              <a:gd name="connsiteY1" fmla="*/ 0 h 360680"/>
+              <a:gd name="connsiteX2" fmla="*/ 279400 w 4424680"/>
+              <a:gd name="connsiteY2" fmla="*/ 0 h 360680"/>
+              <a:gd name="connsiteX3" fmla="*/ 4364565 w 4424680"/>
+              <a:gd name="connsiteY3" fmla="*/ 0 h 360680"/>
+              <a:gd name="connsiteX4" fmla="*/ 4424680 w 4424680"/>
+              <a:gd name="connsiteY4" fmla="*/ 60115 h 360680"/>
+              <a:gd name="connsiteX5" fmla="*/ 4424680 w 4424680"/>
+              <a:gd name="connsiteY5" fmla="*/ 300565 h 360680"/>
+              <a:gd name="connsiteX6" fmla="*/ 4364565 w 4424680"/>
+              <a:gd name="connsiteY6" fmla="*/ 360680 h 360680"/>
+              <a:gd name="connsiteX7" fmla="*/ 60115 w 4424680"/>
+              <a:gd name="connsiteY7" fmla="*/ 360680 h 360680"/>
+              <a:gd name="connsiteX8" fmla="*/ 0 w 4424680"/>
+              <a:gd name="connsiteY8" fmla="*/ 300565 h 360680"/>
+              <a:gd name="connsiteX9" fmla="*/ 0 w 4424680"/>
+              <a:gd name="connsiteY9" fmla="*/ 60115 h 360680"/>
+              <a:gd name="connsiteX0" fmla="*/ 0 w 4424680"/>
+              <a:gd name="connsiteY0" fmla="*/ 60115 h 360680"/>
+              <a:gd name="connsiteX1" fmla="*/ 60115 w 4424680"/>
+              <a:gd name="connsiteY1" fmla="*/ 0 h 360680"/>
+              <a:gd name="connsiteX2" fmla="*/ 4364565 w 4424680"/>
+              <a:gd name="connsiteY2" fmla="*/ 0 h 360680"/>
+              <a:gd name="connsiteX3" fmla="*/ 4424680 w 4424680"/>
+              <a:gd name="connsiteY3" fmla="*/ 60115 h 360680"/>
+              <a:gd name="connsiteX4" fmla="*/ 4424680 w 4424680"/>
+              <a:gd name="connsiteY4" fmla="*/ 300565 h 360680"/>
+              <a:gd name="connsiteX5" fmla="*/ 4364565 w 4424680"/>
+              <a:gd name="connsiteY5" fmla="*/ 360680 h 360680"/>
+              <a:gd name="connsiteX6" fmla="*/ 60115 w 4424680"/>
+              <a:gd name="connsiteY6" fmla="*/ 360680 h 360680"/>
+              <a:gd name="connsiteX7" fmla="*/ 0 w 4424680"/>
+              <a:gd name="connsiteY7" fmla="*/ 300565 h 360680"/>
+              <a:gd name="connsiteX8" fmla="*/ 0 w 4424680"/>
+              <a:gd name="connsiteY8" fmla="*/ 60115 h 360680"/>
+              <a:gd name="connsiteX0" fmla="*/ 0 w 4424680"/>
+              <a:gd name="connsiteY0" fmla="*/ 60115 h 360680"/>
+              <a:gd name="connsiteX1" fmla="*/ 60115 w 4424680"/>
+              <a:gd name="connsiteY1" fmla="*/ 0 h 360680"/>
+              <a:gd name="connsiteX2" fmla="*/ 350520 w 4424680"/>
+              <a:gd name="connsiteY2" fmla="*/ 0 h 360680"/>
+              <a:gd name="connsiteX3" fmla="*/ 4364565 w 4424680"/>
+              <a:gd name="connsiteY3" fmla="*/ 0 h 360680"/>
+              <a:gd name="connsiteX4" fmla="*/ 4424680 w 4424680"/>
+              <a:gd name="connsiteY4" fmla="*/ 60115 h 360680"/>
+              <a:gd name="connsiteX5" fmla="*/ 4424680 w 4424680"/>
+              <a:gd name="connsiteY5" fmla="*/ 300565 h 360680"/>
+              <a:gd name="connsiteX6" fmla="*/ 4364565 w 4424680"/>
+              <a:gd name="connsiteY6" fmla="*/ 360680 h 360680"/>
+              <a:gd name="connsiteX7" fmla="*/ 60115 w 4424680"/>
+              <a:gd name="connsiteY7" fmla="*/ 360680 h 360680"/>
+              <a:gd name="connsiteX8" fmla="*/ 0 w 4424680"/>
+              <a:gd name="connsiteY8" fmla="*/ 300565 h 360680"/>
+              <a:gd name="connsiteX9" fmla="*/ 0 w 4424680"/>
+              <a:gd name="connsiteY9" fmla="*/ 60115 h 360680"/>
+              <a:gd name="connsiteX0" fmla="*/ 0 w 4424680"/>
+              <a:gd name="connsiteY0" fmla="*/ 121075 h 421640"/>
+              <a:gd name="connsiteX1" fmla="*/ 60115 w 4424680"/>
+              <a:gd name="connsiteY1" fmla="*/ 60960 h 421640"/>
+              <a:gd name="connsiteX2" fmla="*/ 350520 w 4424680"/>
+              <a:gd name="connsiteY2" fmla="*/ 60960 h 421640"/>
+              <a:gd name="connsiteX3" fmla="*/ 4364565 w 4424680"/>
+              <a:gd name="connsiteY3" fmla="*/ 60960 h 421640"/>
+              <a:gd name="connsiteX4" fmla="*/ 4424680 w 4424680"/>
+              <a:gd name="connsiteY4" fmla="*/ 121075 h 421640"/>
+              <a:gd name="connsiteX5" fmla="*/ 4424680 w 4424680"/>
+              <a:gd name="connsiteY5" fmla="*/ 361525 h 421640"/>
+              <a:gd name="connsiteX6" fmla="*/ 4364565 w 4424680"/>
+              <a:gd name="connsiteY6" fmla="*/ 421640 h 421640"/>
+              <a:gd name="connsiteX7" fmla="*/ 60115 w 4424680"/>
+              <a:gd name="connsiteY7" fmla="*/ 421640 h 421640"/>
+              <a:gd name="connsiteX8" fmla="*/ 0 w 4424680"/>
+              <a:gd name="connsiteY8" fmla="*/ 361525 h 421640"/>
+              <a:gd name="connsiteX9" fmla="*/ 0 w 4424680"/>
+              <a:gd name="connsiteY9" fmla="*/ 121075 h 421640"/>
+              <a:gd name="connsiteX0" fmla="*/ 0 w 4424680"/>
+              <a:gd name="connsiteY0" fmla="*/ 121075 h 421640"/>
+              <a:gd name="connsiteX1" fmla="*/ 60115 w 4424680"/>
+              <a:gd name="connsiteY1" fmla="*/ 60960 h 421640"/>
+              <a:gd name="connsiteX2" fmla="*/ 350520 w 4424680"/>
+              <a:gd name="connsiteY2" fmla="*/ 60960 h 421640"/>
+              <a:gd name="connsiteX3" fmla="*/ 4364565 w 4424680"/>
+              <a:gd name="connsiteY3" fmla="*/ 60960 h 421640"/>
+              <a:gd name="connsiteX4" fmla="*/ 4424680 w 4424680"/>
+              <a:gd name="connsiteY4" fmla="*/ 121075 h 421640"/>
+              <a:gd name="connsiteX5" fmla="*/ 4424680 w 4424680"/>
+              <a:gd name="connsiteY5" fmla="*/ 361525 h 421640"/>
+              <a:gd name="connsiteX6" fmla="*/ 4364565 w 4424680"/>
+              <a:gd name="connsiteY6" fmla="*/ 421640 h 421640"/>
+              <a:gd name="connsiteX7" fmla="*/ 330200 w 4424680"/>
+              <a:gd name="connsiteY7" fmla="*/ 421640 h 421640"/>
+              <a:gd name="connsiteX8" fmla="*/ 60115 w 4424680"/>
+              <a:gd name="connsiteY8" fmla="*/ 421640 h 421640"/>
+              <a:gd name="connsiteX9" fmla="*/ 0 w 4424680"/>
+              <a:gd name="connsiteY9" fmla="*/ 361525 h 421640"/>
+              <a:gd name="connsiteX10" fmla="*/ 0 w 4424680"/>
+              <a:gd name="connsiteY10" fmla="*/ 121075 h 421640"/>
+              <a:gd name="connsiteX0" fmla="*/ 0 w 4424680"/>
+              <a:gd name="connsiteY0" fmla="*/ 60115 h 360680"/>
+              <a:gd name="connsiteX1" fmla="*/ 60115 w 4424680"/>
+              <a:gd name="connsiteY1" fmla="*/ 0 h 360680"/>
+              <a:gd name="connsiteX2" fmla="*/ 350520 w 4424680"/>
+              <a:gd name="connsiteY2" fmla="*/ 0 h 360680"/>
+              <a:gd name="connsiteX3" fmla="*/ 4364565 w 4424680"/>
+              <a:gd name="connsiteY3" fmla="*/ 0 h 360680"/>
+              <a:gd name="connsiteX4" fmla="*/ 4424680 w 4424680"/>
+              <a:gd name="connsiteY4" fmla="*/ 60115 h 360680"/>
+              <a:gd name="connsiteX5" fmla="*/ 4424680 w 4424680"/>
+              <a:gd name="connsiteY5" fmla="*/ 300565 h 360680"/>
+              <a:gd name="connsiteX6" fmla="*/ 4364565 w 4424680"/>
+              <a:gd name="connsiteY6" fmla="*/ 360680 h 360680"/>
+              <a:gd name="connsiteX7" fmla="*/ 330200 w 4424680"/>
+              <a:gd name="connsiteY7" fmla="*/ 360680 h 360680"/>
+              <a:gd name="connsiteX8" fmla="*/ 60115 w 4424680"/>
+              <a:gd name="connsiteY8" fmla="*/ 360680 h 360680"/>
+              <a:gd name="connsiteX9" fmla="*/ 0 w 4424680"/>
+              <a:gd name="connsiteY9" fmla="*/ 300565 h 360680"/>
+              <a:gd name="connsiteX10" fmla="*/ 0 w 4424680"/>
+              <a:gd name="connsiteY10" fmla="*/ 60115 h 360680"/>
+              <a:gd name="connsiteX0" fmla="*/ 0 w 4424680"/>
+              <a:gd name="connsiteY0" fmla="*/ 60115 h 421640"/>
+              <a:gd name="connsiteX1" fmla="*/ 60115 w 4424680"/>
+              <a:gd name="connsiteY1" fmla="*/ 0 h 421640"/>
+              <a:gd name="connsiteX2" fmla="*/ 350520 w 4424680"/>
+              <a:gd name="connsiteY2" fmla="*/ 0 h 421640"/>
+              <a:gd name="connsiteX3" fmla="*/ 4364565 w 4424680"/>
+              <a:gd name="connsiteY3" fmla="*/ 0 h 421640"/>
+              <a:gd name="connsiteX4" fmla="*/ 4424680 w 4424680"/>
+              <a:gd name="connsiteY4" fmla="*/ 60115 h 421640"/>
+              <a:gd name="connsiteX5" fmla="*/ 4424680 w 4424680"/>
+              <a:gd name="connsiteY5" fmla="*/ 300565 h 421640"/>
+              <a:gd name="connsiteX6" fmla="*/ 4364565 w 4424680"/>
+              <a:gd name="connsiteY6" fmla="*/ 360680 h 421640"/>
+              <a:gd name="connsiteX7" fmla="*/ 330200 w 4424680"/>
+              <a:gd name="connsiteY7" fmla="*/ 360680 h 421640"/>
+              <a:gd name="connsiteX8" fmla="*/ 60115 w 4424680"/>
+              <a:gd name="connsiteY8" fmla="*/ 360680 h 421640"/>
+              <a:gd name="connsiteX9" fmla="*/ 0 w 4424680"/>
+              <a:gd name="connsiteY9" fmla="*/ 300565 h 421640"/>
+              <a:gd name="connsiteX10" fmla="*/ 0 w 4424680"/>
+              <a:gd name="connsiteY10" fmla="*/ 60115 h 421640"/>
+            </a:gdLst>
+            <a:ahLst/>
+            <a:cxnLst>
+              <a:cxn ang="0">
+                <a:pos x="connsiteX0" y="connsiteY0"/>
+              </a:cxn>
+              <a:cxn ang="0">
+                <a:pos x="connsiteX1" y="connsiteY1"/>
+              </a:cxn>
+              <a:cxn ang="0">
+                <a:pos x="connsiteX2" y="connsiteY2"/>
+              </a:cxn>
+              <a:cxn ang="0">
+                <a:pos x="connsiteX3" y="connsiteY3"/>
+              </a:cxn>
+              <a:cxn ang="0">
+                <a:pos x="connsiteX4" y="connsiteY4"/>
+              </a:cxn>
+              <a:cxn ang="0">
+                <a:pos x="connsiteX5" y="connsiteY5"/>
+              </a:cxn>
+              <a:cxn ang="0">
+                <a:pos x="connsiteX6" y="connsiteY6"/>
+              </a:cxn>
+              <a:cxn ang="0">
+                <a:pos x="connsiteX7" y="connsiteY7"/>
+              </a:cxn>
+              <a:cxn ang="0">
+                <a:pos x="connsiteX8" y="connsiteY8"/>
+              </a:cxn>
+              <a:cxn ang="0">
+                <a:pos x="connsiteX9" y="connsiteY9"/>
+              </a:cxn>
+              <a:cxn ang="0">
+                <a:pos x="connsiteX10" y="connsiteY10"/>
+              </a:cxn>
+            </a:cxnLst>
+            <a:rect l="l" t="t" r="r" b="b"/>
+            <a:pathLst>
+              <a:path w="4424680" h="421640">
+                <a:moveTo>
+                  <a:pt x="0" y="60115"/>
+                </a:moveTo>
+                <a:cubicBezTo>
+                  <a:pt x="0" y="26914"/>
+                  <a:pt x="26914" y="0"/>
+                  <a:pt x="60115" y="0"/>
+                </a:cubicBezTo>
+                <a:cubicBezTo>
+                  <a:pt x="156917" y="0"/>
+                  <a:pt x="207998" y="121920"/>
+                  <a:pt x="350520" y="0"/>
+                </a:cubicBezTo>
+                <a:lnTo>
+                  <a:pt x="4364565" y="0"/>
+                </a:lnTo>
+                <a:cubicBezTo>
+                  <a:pt x="4397766" y="0"/>
+                  <a:pt x="4424680" y="26914"/>
+                  <a:pt x="4424680" y="60115"/>
+                </a:cubicBezTo>
+                <a:lnTo>
+                  <a:pt x="4424680" y="300565"/>
+                </a:lnTo>
+                <a:cubicBezTo>
+                  <a:pt x="4424680" y="333766"/>
+                  <a:pt x="4397766" y="360680"/>
+                  <a:pt x="4364565" y="360680"/>
+                </a:cubicBezTo>
+                <a:lnTo>
+                  <a:pt x="330200" y="360680"/>
+                </a:lnTo>
+                <a:cubicBezTo>
+                  <a:pt x="138572" y="497840"/>
+                  <a:pt x="150143" y="360680"/>
+                  <a:pt x="60115" y="360680"/>
+                </a:cubicBezTo>
+                <a:cubicBezTo>
+                  <a:pt x="26914" y="360680"/>
+                  <a:pt x="0" y="333766"/>
+                  <a:pt x="0" y="300565"/>
+                </a:cubicBezTo>
+                <a:lnTo>
+                  <a:pt x="0" y="60115"/>
+                </a:lnTo>
+                <a:close/>
+              </a:path>
+            </a:pathLst>
+          </a:custGeom>
+        </p:spPr>
+        <p:style>
+          <a:lnRef idx="2">
+            <a:schemeClr val="accent1">
+              <a:shade val="50000"/>
+            </a:schemeClr>
+          </a:lnRef>
+          <a:fillRef idx="1">
+            <a:schemeClr val="accent1"/>
+          </a:fillRef>
+          <a:effectRef idx="0">
+            <a:schemeClr val="accent1"/>
+          </a:effectRef>
+          <a:fontRef idx="minor">
+            <a:schemeClr val="lt1"/>
+          </a:fontRef>
+        </p:style>
+        <p:txBody>
+          <a:bodyPr rot="0" spcFirstLastPara="0" vert="horz" wrap="square" lIns="91440" tIns="45720" rIns="91440" bIns="45720" numCol="1" spcCol="0" rtlCol="0" fromWordArt="0" anchor="ctr" anchorCtr="0" forceAA="0" compatLnSpc="1">
+            <a:prstTxWarp prst="textNoShape">
+              <a:avLst/>
+            </a:prstTxWarp>
+            <a:noAutofit/>
+          </a:bodyPr>
+          <a:lstStyle/>
+          <a:p>
+            <a:pPr>
+              <a:spcAft>
+                <a:spcPts val="0"/>
+              </a:spcAft>
+            </a:pPr>
+            <a:r>
+              <a:rPr lang="en-US" altLang="zh-TW" sz="1000" kern="100" dirty="0" smtClean="0">
+                <a:cs typeface="Times New Roman" panose="02020603050405020304" pitchFamily="18" charset="0"/>
+              </a:rPr>
+              <a:t>[</a:t>
+            </a:r>
+            <a:r>
+              <a:rPr lang="zh-TW" altLang="en-US" sz="1000" kern="100" dirty="0" smtClean="0">
+                <a:cs typeface="Times New Roman" panose="02020603050405020304" pitchFamily="18" charset="0"/>
+              </a:rPr>
+              <a:t>傳送</a:t>
+            </a:r>
+            <a:r>
+              <a:rPr lang="en-US" altLang="zh-TW" sz="1000" kern="100" dirty="0" smtClean="0">
+                <a:cs typeface="Times New Roman" panose="02020603050405020304" pitchFamily="18" charset="0"/>
+              </a:rPr>
+              <a:t>]</a:t>
+            </a:r>
+            <a:r>
+              <a:rPr lang="zh-TW" altLang="en-US" sz="1000" kern="100" dirty="0" smtClean="0">
+                <a:cs typeface="Times New Roman" panose="02020603050405020304" pitchFamily="18" charset="0"/>
+              </a:rPr>
+              <a:t>訊息</a:t>
+            </a:r>
+            <a:r>
+              <a:rPr lang="zh-TW" altLang="en-US" sz="1000" kern="100" dirty="0">
+                <a:cs typeface="Times New Roman" panose="02020603050405020304" pitchFamily="18" charset="0"/>
+              </a:rPr>
+              <a:t>至</a:t>
+            </a:r>
+            <a:r>
+              <a:rPr lang="en-US" altLang="zh-TW" sz="1000" kern="100" dirty="0">
+                <a:cs typeface="Times New Roman" panose="02020603050405020304" pitchFamily="18" charset="0"/>
+              </a:rPr>
+              <a:t>UNO:</a:t>
+            </a:r>
+            <a:r>
+              <a:rPr lang="zh-TW" altLang="en-US" sz="1000" kern="100" dirty="0">
+                <a:cs typeface="Times New Roman" panose="02020603050405020304" pitchFamily="18" charset="0"/>
+              </a:rPr>
+              <a:t>依商品</a:t>
+            </a:r>
+            <a:r>
+              <a:rPr lang="en-US" altLang="zh-TW" sz="1000" kern="100" dirty="0" err="1">
+                <a:cs typeface="Times New Roman" panose="02020603050405020304" pitchFamily="18" charset="0"/>
+              </a:rPr>
+              <a:t>xy</a:t>
+            </a:r>
+            <a:r>
+              <a:rPr lang="zh-TW" altLang="en-US" sz="1000" kern="100" dirty="0">
+                <a:cs typeface="Times New Roman" panose="02020603050405020304" pitchFamily="18" charset="0"/>
+              </a:rPr>
+              <a:t>座標 自動撿貨</a:t>
+            </a:r>
+            <a:endParaRPr lang="zh-TW" sz="1000" kern="100" dirty="0">
+              <a:effectLst/>
+              <a:ea typeface="新細明體" panose="02020500000000000000" pitchFamily="18" charset="-120"/>
+              <a:cs typeface="Times New Roman" panose="02020603050405020304" pitchFamily="18" charset="0"/>
+            </a:endParaRPr>
+          </a:p>
+        </p:txBody>
+      </p:sp>
     </p:spTree>
     <p:extLst>
       <p:ext uri="{BB962C8B-B14F-4D97-AF65-F5344CB8AC3E}">
@@ -11157,579 +12506,6 @@
               <a:effectLst/>
               <a:ea typeface="新細明體" panose="02020500000000000000" pitchFamily="18" charset="-120"/>
               <a:cs typeface="Times New Roman" panose="02020603050405020304" pitchFamily="18" charset="0"/>
-            </a:endParaRPr>
-          </a:p>
-        </p:txBody>
-      </p:sp>
-      <p:sp>
-        <p:nvSpPr>
-          <p:cNvPr id="13" name="手繪多邊形 12"/>
-          <p:cNvSpPr/>
-          <p:nvPr/>
-        </p:nvSpPr>
-        <p:spPr>
-          <a:xfrm>
-            <a:off x="1969799" y="1894332"/>
-            <a:ext cx="1888891" cy="1324356"/>
-          </a:xfrm>
-          <a:custGeom>
-            <a:avLst/>
-            <a:gdLst>
-              <a:gd name="connsiteX0" fmla="*/ 160364 w 1888891"/>
-              <a:gd name="connsiteY0" fmla="*/ 1320015 h 1324356"/>
-              <a:gd name="connsiteX1" fmla="*/ 162989 w 1888891"/>
-              <a:gd name="connsiteY1" fmla="*/ 1320867 h 1324356"/>
-              <a:gd name="connsiteX2" fmla="*/ 158683 w 1888891"/>
-              <a:gd name="connsiteY2" fmla="*/ 1324321 h 1324356"/>
-              <a:gd name="connsiteX3" fmla="*/ 37121 w 1888891"/>
-              <a:gd name="connsiteY3" fmla="*/ 0 h 1324356"/>
-              <a:gd name="connsiteX4" fmla="*/ 159350 w 1888891"/>
-              <a:gd name="connsiteY4" fmla="*/ 0 h 1324356"/>
-              <a:gd name="connsiteX5" fmla="*/ 1848828 w 1888891"/>
-              <a:gd name="connsiteY5" fmla="*/ 0 h 1324356"/>
-              <a:gd name="connsiteX6" fmla="*/ 1874130 w 1888891"/>
-              <a:gd name="connsiteY6" fmla="*/ 30296 h 1324356"/>
-              <a:gd name="connsiteX7" fmla="*/ 1874130 w 1888891"/>
-              <a:gd name="connsiteY7" fmla="*/ 151475 h 1324356"/>
-              <a:gd name="connsiteX8" fmla="*/ 1875409 w 1888891"/>
-              <a:gd name="connsiteY8" fmla="*/ 218558 h 1324356"/>
-              <a:gd name="connsiteX9" fmla="*/ 1875639 w 1888891"/>
-              <a:gd name="connsiteY9" fmla="*/ 230268 h 1324356"/>
-              <a:gd name="connsiteX10" fmla="*/ 1200673 w 1888891"/>
-              <a:gd name="connsiteY10" fmla="*/ 230268 h 1324356"/>
-              <a:gd name="connsiteX11" fmla="*/ 1064273 w 1888891"/>
-              <a:gd name="connsiteY11" fmla="*/ 230268 h 1324356"/>
-              <a:gd name="connsiteX12" fmla="*/ 1036037 w 1888891"/>
-              <a:gd name="connsiteY12" fmla="*/ 272928 h 1324356"/>
-              <a:gd name="connsiteX13" fmla="*/ 1036037 w 1888891"/>
-              <a:gd name="connsiteY13" fmla="*/ 443561 h 1324356"/>
-              <a:gd name="connsiteX14" fmla="*/ 1064273 w 1888891"/>
-              <a:gd name="connsiteY14" fmla="*/ 486221 h 1324356"/>
-              <a:gd name="connsiteX15" fmla="*/ 1191129 w 1888891"/>
-              <a:gd name="connsiteY15" fmla="*/ 486221 h 1324356"/>
-              <a:gd name="connsiteX16" fmla="*/ 1880476 w 1888891"/>
-              <a:gd name="connsiteY16" fmla="*/ 486221 h 1324356"/>
-              <a:gd name="connsiteX17" fmla="*/ 1881147 w 1888891"/>
-              <a:gd name="connsiteY17" fmla="*/ 522938 h 1324356"/>
-              <a:gd name="connsiteX18" fmla="*/ 1882136 w 1888891"/>
-              <a:gd name="connsiteY18" fmla="*/ 582518 h 1324356"/>
-              <a:gd name="connsiteX19" fmla="*/ 1200673 w 1888891"/>
-              <a:gd name="connsiteY19" fmla="*/ 582518 h 1324356"/>
-              <a:gd name="connsiteX20" fmla="*/ 1064273 w 1888891"/>
-              <a:gd name="connsiteY20" fmla="*/ 582518 h 1324356"/>
-              <a:gd name="connsiteX21" fmla="*/ 1036037 w 1888891"/>
-              <a:gd name="connsiteY21" fmla="*/ 625178 h 1324356"/>
-              <a:gd name="connsiteX22" fmla="*/ 1036037 w 1888891"/>
-              <a:gd name="connsiteY22" fmla="*/ 795811 h 1324356"/>
-              <a:gd name="connsiteX23" fmla="*/ 1064273 w 1888891"/>
-              <a:gd name="connsiteY23" fmla="*/ 838471 h 1324356"/>
-              <a:gd name="connsiteX24" fmla="*/ 1191129 w 1888891"/>
-              <a:gd name="connsiteY24" fmla="*/ 838471 h 1324356"/>
-              <a:gd name="connsiteX25" fmla="*/ 1886063 w 1888891"/>
-              <a:gd name="connsiteY25" fmla="*/ 838471 h 1324356"/>
-              <a:gd name="connsiteX26" fmla="*/ 1887129 w 1888891"/>
-              <a:gd name="connsiteY26" fmla="*/ 917242 h 1324356"/>
-              <a:gd name="connsiteX27" fmla="*/ 1200673 w 1888891"/>
-              <a:gd name="connsiteY27" fmla="*/ 917242 h 1324356"/>
-              <a:gd name="connsiteX28" fmla="*/ 1064273 w 1888891"/>
-              <a:gd name="connsiteY28" fmla="*/ 917242 h 1324356"/>
-              <a:gd name="connsiteX29" fmla="*/ 1036037 w 1888891"/>
-              <a:gd name="connsiteY29" fmla="*/ 959902 h 1324356"/>
-              <a:gd name="connsiteX30" fmla="*/ 1036037 w 1888891"/>
-              <a:gd name="connsiteY30" fmla="*/ 1130535 h 1324356"/>
-              <a:gd name="connsiteX31" fmla="*/ 1064273 w 1888891"/>
-              <a:gd name="connsiteY31" fmla="*/ 1173195 h 1324356"/>
-              <a:gd name="connsiteX32" fmla="*/ 1191129 w 1888891"/>
-              <a:gd name="connsiteY32" fmla="*/ 1173195 h 1324356"/>
-              <a:gd name="connsiteX33" fmla="*/ 1888891 w 1888891"/>
-              <a:gd name="connsiteY33" fmla="*/ 1173195 h 1324356"/>
-              <a:gd name="connsiteX34" fmla="*/ 1888880 w 1888891"/>
-              <a:gd name="connsiteY34" fmla="*/ 1197479 h 1324356"/>
-              <a:gd name="connsiteX35" fmla="*/ 1884663 w 1888891"/>
-              <a:gd name="connsiteY35" fmla="*/ 1302244 h 1324356"/>
-              <a:gd name="connsiteX36" fmla="*/ 198535 w 1888891"/>
-              <a:gd name="connsiteY36" fmla="*/ 1279857 h 1324356"/>
-              <a:gd name="connsiteX37" fmla="*/ 162395 w 1888891"/>
-              <a:gd name="connsiteY37" fmla="*/ 1314813 h 1324356"/>
-              <a:gd name="connsiteX38" fmla="*/ 160364 w 1888891"/>
-              <a:gd name="connsiteY38" fmla="*/ 1320015 h 1324356"/>
-              <a:gd name="connsiteX39" fmla="*/ 150903 w 1888891"/>
-              <a:gd name="connsiteY39" fmla="*/ 1316941 h 1324356"/>
-              <a:gd name="connsiteX40" fmla="*/ 120918 w 1888891"/>
-              <a:gd name="connsiteY40" fmla="*/ 1255316 h 1324356"/>
-              <a:gd name="connsiteX41" fmla="*/ 0 w 1888891"/>
-              <a:gd name="connsiteY41" fmla="*/ 1282816 h 1324356"/>
-              <a:gd name="connsiteX42" fmla="*/ 11819 w 1888891"/>
-              <a:gd name="connsiteY42" fmla="*/ 30296 h 1324356"/>
-              <a:gd name="connsiteX43" fmla="*/ 37121 w 1888891"/>
-              <a:gd name="connsiteY43" fmla="*/ 0 h 1324356"/>
-            </a:gdLst>
-            <a:ahLst/>
-            <a:cxnLst>
-              <a:cxn ang="0">
-                <a:pos x="connsiteX0" y="connsiteY0"/>
-              </a:cxn>
-              <a:cxn ang="0">
-                <a:pos x="connsiteX1" y="connsiteY1"/>
-              </a:cxn>
-              <a:cxn ang="0">
-                <a:pos x="connsiteX2" y="connsiteY2"/>
-              </a:cxn>
-              <a:cxn ang="0">
-                <a:pos x="connsiteX3" y="connsiteY3"/>
-              </a:cxn>
-              <a:cxn ang="0">
-                <a:pos x="connsiteX4" y="connsiteY4"/>
-              </a:cxn>
-              <a:cxn ang="0">
-                <a:pos x="connsiteX5" y="connsiteY5"/>
-              </a:cxn>
-              <a:cxn ang="0">
-                <a:pos x="connsiteX6" y="connsiteY6"/>
-              </a:cxn>
-              <a:cxn ang="0">
-                <a:pos x="connsiteX7" y="connsiteY7"/>
-              </a:cxn>
-              <a:cxn ang="0">
-                <a:pos x="connsiteX8" y="connsiteY8"/>
-              </a:cxn>
-              <a:cxn ang="0">
-                <a:pos x="connsiteX9" y="connsiteY9"/>
-              </a:cxn>
-              <a:cxn ang="0">
-                <a:pos x="connsiteX10" y="connsiteY10"/>
-              </a:cxn>
-              <a:cxn ang="0">
-                <a:pos x="connsiteX11" y="connsiteY11"/>
-              </a:cxn>
-              <a:cxn ang="0">
-                <a:pos x="connsiteX12" y="connsiteY12"/>
-              </a:cxn>
-              <a:cxn ang="0">
-                <a:pos x="connsiteX13" y="connsiteY13"/>
-              </a:cxn>
-              <a:cxn ang="0">
-                <a:pos x="connsiteX14" y="connsiteY14"/>
-              </a:cxn>
-              <a:cxn ang="0">
-                <a:pos x="connsiteX15" y="connsiteY15"/>
-              </a:cxn>
-              <a:cxn ang="0">
-                <a:pos x="connsiteX16" y="connsiteY16"/>
-              </a:cxn>
-              <a:cxn ang="0">
-                <a:pos x="connsiteX17" y="connsiteY17"/>
-              </a:cxn>
-              <a:cxn ang="0">
-                <a:pos x="connsiteX18" y="connsiteY18"/>
-              </a:cxn>
-              <a:cxn ang="0">
-                <a:pos x="connsiteX19" y="connsiteY19"/>
-              </a:cxn>
-              <a:cxn ang="0">
-                <a:pos x="connsiteX20" y="connsiteY20"/>
-              </a:cxn>
-              <a:cxn ang="0">
-                <a:pos x="connsiteX21" y="connsiteY21"/>
-              </a:cxn>
-              <a:cxn ang="0">
-                <a:pos x="connsiteX22" y="connsiteY22"/>
-              </a:cxn>
-              <a:cxn ang="0">
-                <a:pos x="connsiteX23" y="connsiteY23"/>
-              </a:cxn>
-              <a:cxn ang="0">
-                <a:pos x="connsiteX24" y="connsiteY24"/>
-              </a:cxn>
-              <a:cxn ang="0">
-                <a:pos x="connsiteX25" y="connsiteY25"/>
-              </a:cxn>
-              <a:cxn ang="0">
-                <a:pos x="connsiteX26" y="connsiteY26"/>
-              </a:cxn>
-              <a:cxn ang="0">
-                <a:pos x="connsiteX27" y="connsiteY27"/>
-              </a:cxn>
-              <a:cxn ang="0">
-                <a:pos x="connsiteX28" y="connsiteY28"/>
-              </a:cxn>
-              <a:cxn ang="0">
-                <a:pos x="connsiteX29" y="connsiteY29"/>
-              </a:cxn>
-              <a:cxn ang="0">
-                <a:pos x="connsiteX30" y="connsiteY30"/>
-              </a:cxn>
-              <a:cxn ang="0">
-                <a:pos x="connsiteX31" y="connsiteY31"/>
-              </a:cxn>
-              <a:cxn ang="0">
-                <a:pos x="connsiteX32" y="connsiteY32"/>
-              </a:cxn>
-              <a:cxn ang="0">
-                <a:pos x="connsiteX33" y="connsiteY33"/>
-              </a:cxn>
-              <a:cxn ang="0">
-                <a:pos x="connsiteX34" y="connsiteY34"/>
-              </a:cxn>
-              <a:cxn ang="0">
-                <a:pos x="connsiteX35" y="connsiteY35"/>
-              </a:cxn>
-              <a:cxn ang="0">
-                <a:pos x="connsiteX36" y="connsiteY36"/>
-              </a:cxn>
-              <a:cxn ang="0">
-                <a:pos x="connsiteX37" y="connsiteY37"/>
-              </a:cxn>
-              <a:cxn ang="0">
-                <a:pos x="connsiteX38" y="connsiteY38"/>
-              </a:cxn>
-              <a:cxn ang="0">
-                <a:pos x="connsiteX39" y="connsiteY39"/>
-              </a:cxn>
-              <a:cxn ang="0">
-                <a:pos x="connsiteX40" y="connsiteY40"/>
-              </a:cxn>
-              <a:cxn ang="0">
-                <a:pos x="connsiteX41" y="connsiteY41"/>
-              </a:cxn>
-              <a:cxn ang="0">
-                <a:pos x="connsiteX42" y="connsiteY42"/>
-              </a:cxn>
-              <a:cxn ang="0">
-                <a:pos x="connsiteX43" y="connsiteY43"/>
-              </a:cxn>
-            </a:cxnLst>
-            <a:rect l="l" t="t" r="r" b="b"/>
-            <a:pathLst>
-              <a:path w="1888891" h="1324356">
-                <a:moveTo>
-                  <a:pt x="160364" y="1320015"/>
-                </a:moveTo>
-                <a:lnTo>
-                  <a:pt x="162989" y="1320867"/>
-                </a:lnTo>
-                <a:cubicBezTo>
-                  <a:pt x="162930" y="1322791"/>
-                  <a:pt x="160138" y="1324636"/>
-                  <a:pt x="158683" y="1324321"/>
-                </a:cubicBezTo>
-                <a:close/>
-                <a:moveTo>
-                  <a:pt x="37121" y="0"/>
-                </a:moveTo>
-                <a:cubicBezTo>
-                  <a:pt x="77864" y="0"/>
-                  <a:pt x="99364" y="61444"/>
-                  <a:pt x="159350" y="0"/>
-                </a:cubicBezTo>
-                <a:lnTo>
-                  <a:pt x="1848828" y="0"/>
-                </a:lnTo>
-                <a:cubicBezTo>
-                  <a:pt x="1862802" y="0"/>
-                  <a:pt x="1874130" y="13564"/>
-                  <a:pt x="1874130" y="30296"/>
-                </a:cubicBezTo>
-                <a:lnTo>
-                  <a:pt x="1874130" y="151475"/>
-                </a:lnTo>
-                <a:cubicBezTo>
-                  <a:pt x="1874130" y="153828"/>
-                  <a:pt x="1874615" y="178276"/>
-                  <a:pt x="1875409" y="218558"/>
-                </a:cubicBezTo>
-                <a:lnTo>
-                  <a:pt x="1875639" y="230268"/>
-                </a:lnTo>
-                <a:lnTo>
-                  <a:pt x="1200673" y="230268"/>
-                </a:lnTo>
-                <a:cubicBezTo>
-                  <a:pt x="1133732" y="316787"/>
-                  <a:pt x="1109739" y="230268"/>
-                  <a:pt x="1064273" y="230268"/>
-                </a:cubicBezTo>
-                <a:cubicBezTo>
-                  <a:pt x="1048678" y="230268"/>
-                  <a:pt x="1036037" y="249367"/>
-                  <a:pt x="1036037" y="272928"/>
-                </a:cubicBezTo>
-                <a:lnTo>
-                  <a:pt x="1036037" y="443561"/>
-                </a:lnTo>
-                <a:cubicBezTo>
-                  <a:pt x="1036037" y="467121"/>
-                  <a:pt x="1048678" y="486221"/>
-                  <a:pt x="1064273" y="486221"/>
-                </a:cubicBezTo>
-                <a:cubicBezTo>
-                  <a:pt x="1106558" y="486221"/>
-                  <a:pt x="1101123" y="583555"/>
-                  <a:pt x="1191129" y="486221"/>
-                </a:cubicBezTo>
-                <a:lnTo>
-                  <a:pt x="1880476" y="486221"/>
-                </a:lnTo>
-                <a:lnTo>
-                  <a:pt x="1881147" y="522938"/>
-                </a:lnTo>
-                <a:lnTo>
-                  <a:pt x="1882136" y="582518"/>
-                </a:lnTo>
-                <a:lnTo>
-                  <a:pt x="1200673" y="582518"/>
-                </a:lnTo>
-                <a:cubicBezTo>
-                  <a:pt x="1133732" y="669037"/>
-                  <a:pt x="1109739" y="582518"/>
-                  <a:pt x="1064273" y="582518"/>
-                </a:cubicBezTo>
-                <a:cubicBezTo>
-                  <a:pt x="1048678" y="582518"/>
-                  <a:pt x="1036037" y="601617"/>
-                  <a:pt x="1036037" y="625178"/>
-                </a:cubicBezTo>
-                <a:lnTo>
-                  <a:pt x="1036037" y="795811"/>
-                </a:lnTo>
-                <a:cubicBezTo>
-                  <a:pt x="1036037" y="819371"/>
-                  <a:pt x="1048678" y="838471"/>
-                  <a:pt x="1064273" y="838471"/>
-                </a:cubicBezTo>
-                <a:cubicBezTo>
-                  <a:pt x="1106558" y="838471"/>
-                  <a:pt x="1101123" y="935805"/>
-                  <a:pt x="1191129" y="838471"/>
-                </a:cubicBezTo>
-                <a:lnTo>
-                  <a:pt x="1886063" y="838471"/>
-                </a:lnTo>
-                <a:lnTo>
-                  <a:pt x="1887129" y="917242"/>
-                </a:lnTo>
-                <a:lnTo>
-                  <a:pt x="1200673" y="917242"/>
-                </a:lnTo>
-                <a:cubicBezTo>
-                  <a:pt x="1133732" y="1003761"/>
-                  <a:pt x="1109739" y="917242"/>
-                  <a:pt x="1064273" y="917242"/>
-                </a:cubicBezTo>
-                <a:cubicBezTo>
-                  <a:pt x="1048678" y="917242"/>
-                  <a:pt x="1036037" y="936341"/>
-                  <a:pt x="1036037" y="959902"/>
-                </a:cubicBezTo>
-                <a:lnTo>
-                  <a:pt x="1036037" y="1130535"/>
-                </a:lnTo>
-                <a:cubicBezTo>
-                  <a:pt x="1036037" y="1154095"/>
-                  <a:pt x="1048678" y="1173195"/>
-                  <a:pt x="1064273" y="1173195"/>
-                </a:cubicBezTo>
-                <a:cubicBezTo>
-                  <a:pt x="1106558" y="1173195"/>
-                  <a:pt x="1101123" y="1270529"/>
-                  <a:pt x="1191129" y="1173195"/>
-                </a:cubicBezTo>
-                <a:lnTo>
-                  <a:pt x="1888891" y="1173195"/>
-                </a:lnTo>
-                <a:lnTo>
-                  <a:pt x="1888880" y="1197479"/>
-                </a:lnTo>
-                <a:cubicBezTo>
-                  <a:pt x="1888551" y="1262375"/>
-                  <a:pt x="1887283" y="1302244"/>
-                  <a:pt x="1884663" y="1302244"/>
-                </a:cubicBezTo>
-                <a:lnTo>
-                  <a:pt x="198535" y="1279857"/>
-                </a:lnTo>
-                <a:cubicBezTo>
-                  <a:pt x="178372" y="1297138"/>
-                  <a:pt x="167681" y="1308097"/>
-                  <a:pt x="162395" y="1314813"/>
-                </a:cubicBezTo>
-                <a:lnTo>
-                  <a:pt x="160364" y="1320015"/>
-                </a:lnTo>
-                <a:lnTo>
-                  <a:pt x="150903" y="1316941"/>
-                </a:lnTo>
-                <a:cubicBezTo>
-                  <a:pt x="123463" y="1332872"/>
-                  <a:pt x="138817" y="1259337"/>
-                  <a:pt x="120918" y="1255316"/>
-                </a:cubicBezTo>
-                <a:cubicBezTo>
-                  <a:pt x="103019" y="1251296"/>
-                  <a:pt x="140011" y="1275878"/>
-                  <a:pt x="0" y="1282816"/>
-                </a:cubicBezTo>
-                <a:lnTo>
-                  <a:pt x="11819" y="30296"/>
-                </a:lnTo>
-                <a:cubicBezTo>
-                  <a:pt x="11819" y="13564"/>
-                  <a:pt x="23147" y="0"/>
-                  <a:pt x="37121" y="0"/>
-                </a:cubicBezTo>
-                <a:close/>
-              </a:path>
-            </a:pathLst>
-          </a:custGeom>
-        </p:spPr>
-        <p:style>
-          <a:lnRef idx="2">
-            <a:schemeClr val="accent1">
-              <a:shade val="50000"/>
-            </a:schemeClr>
-          </a:lnRef>
-          <a:fillRef idx="1">
-            <a:schemeClr val="accent1"/>
-          </a:fillRef>
-          <a:effectRef idx="0">
-            <a:schemeClr val="accent1"/>
-          </a:effectRef>
-          <a:fontRef idx="minor">
-            <a:schemeClr val="lt1"/>
-          </a:fontRef>
-        </p:style>
-        <p:txBody>
-          <a:bodyPr rot="0" spcFirstLastPara="0" vert="horz" wrap="square" lIns="91440" tIns="45720" rIns="91440" bIns="45720" numCol="1" spcCol="0" rtlCol="0" fromWordArt="0" anchor="t" anchorCtr="0" forceAA="0" compatLnSpc="1">
-            <a:prstTxWarp prst="textNoShape">
-              <a:avLst/>
-            </a:prstTxWarp>
-            <a:noAutofit/>
-          </a:bodyPr>
-          <a:lstStyle/>
-          <a:p>
-            <a:pPr>
-              <a:spcAft>
-                <a:spcPts val="0"/>
-              </a:spcAft>
-            </a:pPr>
-            <a:r>
-              <a:rPr lang="en-US" altLang="zh-TW" sz="1200" kern="100" dirty="0" err="1" smtClean="0">
-                <a:ea typeface="新細明體" panose="02020500000000000000" pitchFamily="18" charset="-120"/>
-                <a:cs typeface="Times New Roman" panose="02020603050405020304" pitchFamily="18" charset="0"/>
-              </a:rPr>
-              <a:t>iMi</a:t>
-            </a:r>
-            <a:r>
-              <a:rPr lang="zh-TW" altLang="en-US" sz="1200" kern="100" dirty="0" smtClean="0">
-                <a:ea typeface="新細明體" panose="02020500000000000000" pitchFamily="18" charset="-120"/>
-                <a:cs typeface="Times New Roman" panose="02020603050405020304" pitchFamily="18" charset="0"/>
-              </a:rPr>
-              <a:t>物流模組</a:t>
-            </a:r>
-            <a:r>
-              <a:rPr lang="en-US" altLang="zh-TW" sz="1200" kern="100" dirty="0" smtClean="0">
-                <a:ea typeface="新細明體" panose="02020500000000000000" pitchFamily="18" charset="-120"/>
-                <a:cs typeface="Times New Roman" panose="02020603050405020304" pitchFamily="18" charset="0"/>
-              </a:rPr>
-              <a:t>UNO</a:t>
-            </a:r>
-            <a:r>
-              <a:rPr lang="zh-TW" altLang="en-US" sz="1200" kern="100" dirty="0" smtClean="0">
-                <a:ea typeface="新細明體" panose="02020500000000000000" pitchFamily="18" charset="-120"/>
-                <a:cs typeface="Times New Roman" panose="02020603050405020304" pitchFamily="18" charset="0"/>
-              </a:rPr>
-              <a:t>初始化</a:t>
-            </a:r>
-            <a:endParaRPr lang="en-US" altLang="zh-TW" sz="1200" kern="100" dirty="0" smtClean="0">
-              <a:ea typeface="新細明體" panose="02020500000000000000" pitchFamily="18" charset="-120"/>
-              <a:cs typeface="Times New Roman" panose="02020603050405020304" pitchFamily="18" charset="0"/>
-            </a:endParaRPr>
-          </a:p>
-          <a:p>
-            <a:pPr>
-              <a:lnSpc>
-                <a:spcPts val="2400"/>
-              </a:lnSpc>
-              <a:spcAft>
-                <a:spcPts val="0"/>
-              </a:spcAft>
-            </a:pPr>
-            <a:r>
-              <a:rPr lang="en-US" altLang="zh-TW" sz="1100" dirty="0" err="1" smtClean="0">
-                <a:solidFill>
-                  <a:srgbClr val="FFFFFF"/>
-                </a:solidFill>
-                <a:cs typeface="Times New Roman" panose="02020603050405020304" pitchFamily="18" charset="0"/>
-              </a:rPr>
-              <a:t>CNC</a:t>
-            </a:r>
-            <a:r>
-              <a:rPr lang="zh-TW" altLang="en-US" sz="1100" dirty="0" smtClean="0">
-                <a:solidFill>
-                  <a:srgbClr val="FFFFFF"/>
-                </a:solidFill>
-                <a:cs typeface="Times New Roman" panose="02020603050405020304" pitchFamily="18" charset="0"/>
-              </a:rPr>
-              <a:t>腳位</a:t>
-            </a:r>
-            <a:endParaRPr lang="zh-TW" altLang="zh-TW" sz="1100" dirty="0">
-              <a:latin typeface="新細明體" panose="02020500000000000000" pitchFamily="18" charset="-120"/>
-              <a:cs typeface="新細明體" panose="02020500000000000000" pitchFamily="18" charset="-120"/>
-            </a:endParaRPr>
-          </a:p>
-          <a:p>
-            <a:pPr>
-              <a:lnSpc>
-                <a:spcPts val="2400"/>
-              </a:lnSpc>
-              <a:spcAft>
-                <a:spcPts val="0"/>
-              </a:spcAft>
-            </a:pPr>
-            <a:r>
-              <a:rPr lang="en-US" altLang="zh-TW" sz="1100" dirty="0" err="1" smtClean="0">
-                <a:solidFill>
-                  <a:srgbClr val="FFFFFF"/>
-                </a:solidFill>
-                <a:cs typeface="Times New Roman" panose="02020603050405020304" pitchFamily="18" charset="0"/>
-              </a:rPr>
-              <a:t>UART</a:t>
-            </a:r>
-            <a:r>
-              <a:rPr lang="zh-TW" altLang="en-US" sz="1100" dirty="0" smtClean="0">
-                <a:solidFill>
-                  <a:srgbClr val="FFFFFF"/>
-                </a:solidFill>
-                <a:cs typeface="Times New Roman" panose="02020603050405020304" pitchFamily="18" charset="0"/>
-              </a:rPr>
-              <a:t>通訊</a:t>
-            </a:r>
-            <a:endParaRPr lang="zh-TW" altLang="zh-TW" sz="1100" dirty="0">
-              <a:latin typeface="新細明體" panose="02020500000000000000" pitchFamily="18" charset="-120"/>
-              <a:cs typeface="新細明體" panose="02020500000000000000" pitchFamily="18" charset="-120"/>
-            </a:endParaRPr>
-          </a:p>
-          <a:p>
-            <a:pPr>
-              <a:lnSpc>
-                <a:spcPts val="2400"/>
-              </a:lnSpc>
-              <a:spcAft>
-                <a:spcPts val="0"/>
-              </a:spcAft>
-            </a:pPr>
-            <a:r>
-              <a:rPr lang="zh-TW" altLang="en-US" sz="1100" dirty="0" smtClean="0">
-                <a:solidFill>
-                  <a:srgbClr val="FFFFFF"/>
-                </a:solidFill>
-                <a:cs typeface="Times New Roman" panose="02020603050405020304" pitchFamily="18" charset="0"/>
-              </a:rPr>
-              <a:t>撿貨伺服馬達</a:t>
-            </a:r>
-            <a:endParaRPr lang="zh-TW" altLang="zh-TW" sz="1100" dirty="0">
-              <a:latin typeface="新細明體" panose="02020500000000000000" pitchFamily="18" charset="-120"/>
-              <a:cs typeface="新細明體" panose="02020500000000000000" pitchFamily="18" charset="-120"/>
             </a:endParaRPr>
           </a:p>
         </p:txBody>
@@ -12508,6 +13284,705 @@
           </a:p>
         </p:txBody>
       </p:sp>
+      <p:sp>
+        <p:nvSpPr>
+          <p:cNvPr id="12" name="手繪多邊形 11"/>
+          <p:cNvSpPr/>
+          <p:nvPr/>
+        </p:nvSpPr>
+        <p:spPr>
+          <a:xfrm>
+            <a:off x="2884199" y="2132838"/>
+            <a:ext cx="1888939" cy="1696974"/>
+          </a:xfrm>
+          <a:custGeom>
+            <a:avLst/>
+            <a:gdLst>
+              <a:gd name="connsiteX0" fmla="*/ 159400 w 1888939"/>
+              <a:gd name="connsiteY0" fmla="*/ 1691010 h 1696974"/>
+              <a:gd name="connsiteX1" fmla="*/ 162989 w 1888939"/>
+              <a:gd name="connsiteY1" fmla="*/ 1692504 h 1696974"/>
+              <a:gd name="connsiteX2" fmla="*/ 158011 w 1888939"/>
+              <a:gd name="connsiteY2" fmla="*/ 1693914 h 1696974"/>
+              <a:gd name="connsiteX3" fmla="*/ 37121 w 1888939"/>
+              <a:gd name="connsiteY3" fmla="*/ 0 h 1696974"/>
+              <a:gd name="connsiteX4" fmla="*/ 159350 w 1888939"/>
+              <a:gd name="connsiteY4" fmla="*/ 0 h 1696974"/>
+              <a:gd name="connsiteX5" fmla="*/ 1848828 w 1888939"/>
+              <a:gd name="connsiteY5" fmla="*/ 0 h 1696974"/>
+              <a:gd name="connsiteX6" fmla="*/ 1874130 w 1888939"/>
+              <a:gd name="connsiteY6" fmla="*/ 38820 h 1696974"/>
+              <a:gd name="connsiteX7" fmla="*/ 1874130 w 1888939"/>
+              <a:gd name="connsiteY7" fmla="*/ 194093 h 1696974"/>
+              <a:gd name="connsiteX8" fmla="*/ 1875156 w 1888939"/>
+              <a:gd name="connsiteY8" fmla="*/ 263608 h 1696974"/>
+              <a:gd name="connsiteX9" fmla="*/ 1875535 w 1888939"/>
+              <a:gd name="connsiteY9" fmla="*/ 288290 h 1696974"/>
+              <a:gd name="connsiteX10" fmla="*/ 1109120 w 1888939"/>
+              <a:gd name="connsiteY10" fmla="*/ 288290 h 1696974"/>
+              <a:gd name="connsiteX11" fmla="*/ 972720 w 1888939"/>
+              <a:gd name="connsiteY11" fmla="*/ 288290 h 1696974"/>
+              <a:gd name="connsiteX12" fmla="*/ 944484 w 1888939"/>
+              <a:gd name="connsiteY12" fmla="*/ 330950 h 1696974"/>
+              <a:gd name="connsiteX13" fmla="*/ 944484 w 1888939"/>
+              <a:gd name="connsiteY13" fmla="*/ 501583 h 1696974"/>
+              <a:gd name="connsiteX14" fmla="*/ 972720 w 1888939"/>
+              <a:gd name="connsiteY14" fmla="*/ 544243 h 1696974"/>
+              <a:gd name="connsiteX15" fmla="*/ 1099576 w 1888939"/>
+              <a:gd name="connsiteY15" fmla="*/ 544243 h 1696974"/>
+              <a:gd name="connsiteX16" fmla="*/ 1879368 w 1888939"/>
+              <a:gd name="connsiteY16" fmla="*/ 544243 h 1696974"/>
+              <a:gd name="connsiteX17" fmla="*/ 1879388 w 1888939"/>
+              <a:gd name="connsiteY17" fmla="*/ 545591 h 1696974"/>
+              <a:gd name="connsiteX18" fmla="*/ 1880265 w 1888939"/>
+              <a:gd name="connsiteY18" fmla="*/ 608245 h 1696974"/>
+              <a:gd name="connsiteX19" fmla="*/ 1109120 w 1888939"/>
+              <a:gd name="connsiteY19" fmla="*/ 608245 h 1696974"/>
+              <a:gd name="connsiteX20" fmla="*/ 972720 w 1888939"/>
+              <a:gd name="connsiteY20" fmla="*/ 608245 h 1696974"/>
+              <a:gd name="connsiteX21" fmla="*/ 944484 w 1888939"/>
+              <a:gd name="connsiteY21" fmla="*/ 650905 h 1696974"/>
+              <a:gd name="connsiteX22" fmla="*/ 944484 w 1888939"/>
+              <a:gd name="connsiteY22" fmla="*/ 821538 h 1696974"/>
+              <a:gd name="connsiteX23" fmla="*/ 972720 w 1888939"/>
+              <a:gd name="connsiteY23" fmla="*/ 864198 h 1696974"/>
+              <a:gd name="connsiteX24" fmla="*/ 1099576 w 1888939"/>
+              <a:gd name="connsiteY24" fmla="*/ 864198 h 1696974"/>
+              <a:gd name="connsiteX25" fmla="*/ 1883693 w 1888939"/>
+              <a:gd name="connsiteY25" fmla="*/ 864198 h 1696974"/>
+              <a:gd name="connsiteX26" fmla="*/ 1884221 w 1888939"/>
+              <a:gd name="connsiteY26" fmla="*/ 905101 h 1696974"/>
+              <a:gd name="connsiteX27" fmla="*/ 1884490 w 1888939"/>
+              <a:gd name="connsiteY27" fmla="*/ 928200 h 1696974"/>
+              <a:gd name="connsiteX28" fmla="*/ 1109120 w 1888939"/>
+              <a:gd name="connsiteY28" fmla="*/ 928200 h 1696974"/>
+              <a:gd name="connsiteX29" fmla="*/ 972720 w 1888939"/>
+              <a:gd name="connsiteY29" fmla="*/ 928200 h 1696974"/>
+              <a:gd name="connsiteX30" fmla="*/ 944484 w 1888939"/>
+              <a:gd name="connsiteY30" fmla="*/ 970860 h 1696974"/>
+              <a:gd name="connsiteX31" fmla="*/ 944484 w 1888939"/>
+              <a:gd name="connsiteY31" fmla="*/ 1141493 h 1696974"/>
+              <a:gd name="connsiteX32" fmla="*/ 972720 w 1888939"/>
+              <a:gd name="connsiteY32" fmla="*/ 1184153 h 1696974"/>
+              <a:gd name="connsiteX33" fmla="*/ 1099576 w 1888939"/>
+              <a:gd name="connsiteY33" fmla="*/ 1184153 h 1696974"/>
+              <a:gd name="connsiteX34" fmla="*/ 1887258 w 1888939"/>
+              <a:gd name="connsiteY34" fmla="*/ 1184153 h 1696974"/>
+              <a:gd name="connsiteX35" fmla="*/ 1887774 w 1888939"/>
+              <a:gd name="connsiteY35" fmla="*/ 1248156 h 1696974"/>
+              <a:gd name="connsiteX36" fmla="*/ 1109120 w 1888939"/>
+              <a:gd name="connsiteY36" fmla="*/ 1248156 h 1696974"/>
+              <a:gd name="connsiteX37" fmla="*/ 972720 w 1888939"/>
+              <a:gd name="connsiteY37" fmla="*/ 1248156 h 1696974"/>
+              <a:gd name="connsiteX38" fmla="*/ 944484 w 1888939"/>
+              <a:gd name="connsiteY38" fmla="*/ 1290816 h 1696974"/>
+              <a:gd name="connsiteX39" fmla="*/ 944484 w 1888939"/>
+              <a:gd name="connsiteY39" fmla="*/ 1461449 h 1696974"/>
+              <a:gd name="connsiteX40" fmla="*/ 972720 w 1888939"/>
+              <a:gd name="connsiteY40" fmla="*/ 1504109 h 1696974"/>
+              <a:gd name="connsiteX41" fmla="*/ 1099576 w 1888939"/>
+              <a:gd name="connsiteY41" fmla="*/ 1504109 h 1696974"/>
+              <a:gd name="connsiteX42" fmla="*/ 1888939 w 1888939"/>
+              <a:gd name="connsiteY42" fmla="*/ 1504109 h 1696974"/>
+              <a:gd name="connsiteX43" fmla="*/ 1888938 w 1888939"/>
+              <a:gd name="connsiteY43" fmla="*/ 1515361 h 1696974"/>
+              <a:gd name="connsiteX44" fmla="*/ 1884663 w 1888939"/>
+              <a:gd name="connsiteY44" fmla="*/ 1668640 h 1696974"/>
+              <a:gd name="connsiteX45" fmla="*/ 198535 w 1888939"/>
+              <a:gd name="connsiteY45" fmla="*/ 1639955 h 1696974"/>
+              <a:gd name="connsiteX46" fmla="*/ 162395 w 1888939"/>
+              <a:gd name="connsiteY46" fmla="*/ 1684747 h 1696974"/>
+              <a:gd name="connsiteX47" fmla="*/ 159400 w 1888939"/>
+              <a:gd name="connsiteY47" fmla="*/ 1691010 h 1696974"/>
+              <a:gd name="connsiteX48" fmla="*/ 150903 w 1888939"/>
+              <a:gd name="connsiteY48" fmla="*/ 1687473 h 1696974"/>
+              <a:gd name="connsiteX49" fmla="*/ 120918 w 1888939"/>
+              <a:gd name="connsiteY49" fmla="*/ 1608509 h 1696974"/>
+              <a:gd name="connsiteX50" fmla="*/ 0 w 1888939"/>
+              <a:gd name="connsiteY50" fmla="*/ 1643746 h 1696974"/>
+              <a:gd name="connsiteX51" fmla="*/ 11819 w 1888939"/>
+              <a:gd name="connsiteY51" fmla="*/ 38820 h 1696974"/>
+              <a:gd name="connsiteX52" fmla="*/ 37121 w 1888939"/>
+              <a:gd name="connsiteY52" fmla="*/ 0 h 1696974"/>
+            </a:gdLst>
+            <a:ahLst/>
+            <a:cxnLst>
+              <a:cxn ang="0">
+                <a:pos x="connsiteX0" y="connsiteY0"/>
+              </a:cxn>
+              <a:cxn ang="0">
+                <a:pos x="connsiteX1" y="connsiteY1"/>
+              </a:cxn>
+              <a:cxn ang="0">
+                <a:pos x="connsiteX2" y="connsiteY2"/>
+              </a:cxn>
+              <a:cxn ang="0">
+                <a:pos x="connsiteX3" y="connsiteY3"/>
+              </a:cxn>
+              <a:cxn ang="0">
+                <a:pos x="connsiteX4" y="connsiteY4"/>
+              </a:cxn>
+              <a:cxn ang="0">
+                <a:pos x="connsiteX5" y="connsiteY5"/>
+              </a:cxn>
+              <a:cxn ang="0">
+                <a:pos x="connsiteX6" y="connsiteY6"/>
+              </a:cxn>
+              <a:cxn ang="0">
+                <a:pos x="connsiteX7" y="connsiteY7"/>
+              </a:cxn>
+              <a:cxn ang="0">
+                <a:pos x="connsiteX8" y="connsiteY8"/>
+              </a:cxn>
+              <a:cxn ang="0">
+                <a:pos x="connsiteX9" y="connsiteY9"/>
+              </a:cxn>
+              <a:cxn ang="0">
+                <a:pos x="connsiteX10" y="connsiteY10"/>
+              </a:cxn>
+              <a:cxn ang="0">
+                <a:pos x="connsiteX11" y="connsiteY11"/>
+              </a:cxn>
+              <a:cxn ang="0">
+                <a:pos x="connsiteX12" y="connsiteY12"/>
+              </a:cxn>
+              <a:cxn ang="0">
+                <a:pos x="connsiteX13" y="connsiteY13"/>
+              </a:cxn>
+              <a:cxn ang="0">
+                <a:pos x="connsiteX14" y="connsiteY14"/>
+              </a:cxn>
+              <a:cxn ang="0">
+                <a:pos x="connsiteX15" y="connsiteY15"/>
+              </a:cxn>
+              <a:cxn ang="0">
+                <a:pos x="connsiteX16" y="connsiteY16"/>
+              </a:cxn>
+              <a:cxn ang="0">
+                <a:pos x="connsiteX17" y="connsiteY17"/>
+              </a:cxn>
+              <a:cxn ang="0">
+                <a:pos x="connsiteX18" y="connsiteY18"/>
+              </a:cxn>
+              <a:cxn ang="0">
+                <a:pos x="connsiteX19" y="connsiteY19"/>
+              </a:cxn>
+              <a:cxn ang="0">
+                <a:pos x="connsiteX20" y="connsiteY20"/>
+              </a:cxn>
+              <a:cxn ang="0">
+                <a:pos x="connsiteX21" y="connsiteY21"/>
+              </a:cxn>
+              <a:cxn ang="0">
+                <a:pos x="connsiteX22" y="connsiteY22"/>
+              </a:cxn>
+              <a:cxn ang="0">
+                <a:pos x="connsiteX23" y="connsiteY23"/>
+              </a:cxn>
+              <a:cxn ang="0">
+                <a:pos x="connsiteX24" y="connsiteY24"/>
+              </a:cxn>
+              <a:cxn ang="0">
+                <a:pos x="connsiteX25" y="connsiteY25"/>
+              </a:cxn>
+              <a:cxn ang="0">
+                <a:pos x="connsiteX26" y="connsiteY26"/>
+              </a:cxn>
+              <a:cxn ang="0">
+                <a:pos x="connsiteX27" y="connsiteY27"/>
+              </a:cxn>
+              <a:cxn ang="0">
+                <a:pos x="connsiteX28" y="connsiteY28"/>
+              </a:cxn>
+              <a:cxn ang="0">
+                <a:pos x="connsiteX29" y="connsiteY29"/>
+              </a:cxn>
+              <a:cxn ang="0">
+                <a:pos x="connsiteX30" y="connsiteY30"/>
+              </a:cxn>
+              <a:cxn ang="0">
+                <a:pos x="connsiteX31" y="connsiteY31"/>
+              </a:cxn>
+              <a:cxn ang="0">
+                <a:pos x="connsiteX32" y="connsiteY32"/>
+              </a:cxn>
+              <a:cxn ang="0">
+                <a:pos x="connsiteX33" y="connsiteY33"/>
+              </a:cxn>
+              <a:cxn ang="0">
+                <a:pos x="connsiteX34" y="connsiteY34"/>
+              </a:cxn>
+              <a:cxn ang="0">
+                <a:pos x="connsiteX35" y="connsiteY35"/>
+              </a:cxn>
+              <a:cxn ang="0">
+                <a:pos x="connsiteX36" y="connsiteY36"/>
+              </a:cxn>
+              <a:cxn ang="0">
+                <a:pos x="connsiteX37" y="connsiteY37"/>
+              </a:cxn>
+              <a:cxn ang="0">
+                <a:pos x="connsiteX38" y="connsiteY38"/>
+              </a:cxn>
+              <a:cxn ang="0">
+                <a:pos x="connsiteX39" y="connsiteY39"/>
+              </a:cxn>
+              <a:cxn ang="0">
+                <a:pos x="connsiteX40" y="connsiteY40"/>
+              </a:cxn>
+              <a:cxn ang="0">
+                <a:pos x="connsiteX41" y="connsiteY41"/>
+              </a:cxn>
+              <a:cxn ang="0">
+                <a:pos x="connsiteX42" y="connsiteY42"/>
+              </a:cxn>
+              <a:cxn ang="0">
+                <a:pos x="connsiteX43" y="connsiteY43"/>
+              </a:cxn>
+              <a:cxn ang="0">
+                <a:pos x="connsiteX44" y="connsiteY44"/>
+              </a:cxn>
+              <a:cxn ang="0">
+                <a:pos x="connsiteX45" y="connsiteY45"/>
+              </a:cxn>
+              <a:cxn ang="0">
+                <a:pos x="connsiteX46" y="connsiteY46"/>
+              </a:cxn>
+              <a:cxn ang="0">
+                <a:pos x="connsiteX47" y="connsiteY47"/>
+              </a:cxn>
+              <a:cxn ang="0">
+                <a:pos x="connsiteX48" y="connsiteY48"/>
+              </a:cxn>
+              <a:cxn ang="0">
+                <a:pos x="connsiteX49" y="connsiteY49"/>
+              </a:cxn>
+              <a:cxn ang="0">
+                <a:pos x="connsiteX50" y="connsiteY50"/>
+              </a:cxn>
+              <a:cxn ang="0">
+                <a:pos x="connsiteX51" y="connsiteY51"/>
+              </a:cxn>
+              <a:cxn ang="0">
+                <a:pos x="connsiteX52" y="connsiteY52"/>
+              </a:cxn>
+            </a:cxnLst>
+            <a:rect l="l" t="t" r="r" b="b"/>
+            <a:pathLst>
+              <a:path w="1888939" h="1696974">
+                <a:moveTo>
+                  <a:pt x="159400" y="1691010"/>
+                </a:moveTo>
+                <a:lnTo>
+                  <a:pt x="162989" y="1692504"/>
+                </a:lnTo>
+                <a:cubicBezTo>
+                  <a:pt x="162900" y="1696201"/>
+                  <a:pt x="156664" y="1699672"/>
+                  <a:pt x="158011" y="1693914"/>
+                </a:cubicBezTo>
+                <a:close/>
+                <a:moveTo>
+                  <a:pt x="37121" y="0"/>
+                </a:moveTo>
+                <a:cubicBezTo>
+                  <a:pt x="77864" y="0"/>
+                  <a:pt x="99364" y="78731"/>
+                  <a:pt x="159350" y="0"/>
+                </a:cubicBezTo>
+                <a:lnTo>
+                  <a:pt x="1848828" y="0"/>
+                </a:lnTo>
+                <a:cubicBezTo>
+                  <a:pt x="1862802" y="0"/>
+                  <a:pt x="1874130" y="17380"/>
+                  <a:pt x="1874130" y="38820"/>
+                </a:cubicBezTo>
+                <a:lnTo>
+                  <a:pt x="1874130" y="194093"/>
+                </a:lnTo>
+                <a:cubicBezTo>
+                  <a:pt x="1874130" y="196773"/>
+                  <a:pt x="1874513" y="221823"/>
+                  <a:pt x="1875156" y="263608"/>
+                </a:cubicBezTo>
+                <a:lnTo>
+                  <a:pt x="1875535" y="288290"/>
+                </a:lnTo>
+                <a:lnTo>
+                  <a:pt x="1109120" y="288290"/>
+                </a:lnTo>
+                <a:cubicBezTo>
+                  <a:pt x="1042179" y="374809"/>
+                  <a:pt x="1018186" y="288290"/>
+                  <a:pt x="972720" y="288290"/>
+                </a:cubicBezTo>
+                <a:cubicBezTo>
+                  <a:pt x="957125" y="288290"/>
+                  <a:pt x="944484" y="307389"/>
+                  <a:pt x="944484" y="330950"/>
+                </a:cubicBezTo>
+                <a:lnTo>
+                  <a:pt x="944484" y="501583"/>
+                </a:lnTo>
+                <a:cubicBezTo>
+                  <a:pt x="944484" y="525143"/>
+                  <a:pt x="957125" y="544243"/>
+                  <a:pt x="972720" y="544243"/>
+                </a:cubicBezTo>
+                <a:cubicBezTo>
+                  <a:pt x="1015005" y="544243"/>
+                  <a:pt x="1009570" y="641577"/>
+                  <a:pt x="1099576" y="544243"/>
+                </a:cubicBezTo>
+                <a:lnTo>
+                  <a:pt x="1879368" y="544243"/>
+                </a:lnTo>
+                <a:lnTo>
+                  <a:pt x="1879388" y="545591"/>
+                </a:lnTo>
+                <a:lnTo>
+                  <a:pt x="1880265" y="608245"/>
+                </a:lnTo>
+                <a:lnTo>
+                  <a:pt x="1109120" y="608245"/>
+                </a:lnTo>
+                <a:cubicBezTo>
+                  <a:pt x="1042179" y="694764"/>
+                  <a:pt x="1018186" y="608245"/>
+                  <a:pt x="972720" y="608245"/>
+                </a:cubicBezTo>
+                <a:cubicBezTo>
+                  <a:pt x="957125" y="608245"/>
+                  <a:pt x="944484" y="627344"/>
+                  <a:pt x="944484" y="650905"/>
+                </a:cubicBezTo>
+                <a:lnTo>
+                  <a:pt x="944484" y="821538"/>
+                </a:lnTo>
+                <a:cubicBezTo>
+                  <a:pt x="944484" y="845098"/>
+                  <a:pt x="957125" y="864198"/>
+                  <a:pt x="972720" y="864198"/>
+                </a:cubicBezTo>
+                <a:cubicBezTo>
+                  <a:pt x="1015005" y="864198"/>
+                  <a:pt x="1009570" y="961532"/>
+                  <a:pt x="1099576" y="864198"/>
+                </a:cubicBezTo>
+                <a:lnTo>
+                  <a:pt x="1883693" y="864198"/>
+                </a:lnTo>
+                <a:lnTo>
+                  <a:pt x="1884221" y="905101"/>
+                </a:lnTo>
+                <a:lnTo>
+                  <a:pt x="1884490" y="928200"/>
+                </a:lnTo>
+                <a:lnTo>
+                  <a:pt x="1109120" y="928200"/>
+                </a:lnTo>
+                <a:cubicBezTo>
+                  <a:pt x="1042179" y="1014719"/>
+                  <a:pt x="1018186" y="928200"/>
+                  <a:pt x="972720" y="928200"/>
+                </a:cubicBezTo>
+                <a:cubicBezTo>
+                  <a:pt x="957125" y="928200"/>
+                  <a:pt x="944484" y="947299"/>
+                  <a:pt x="944484" y="970860"/>
+                </a:cubicBezTo>
+                <a:lnTo>
+                  <a:pt x="944484" y="1141493"/>
+                </a:lnTo>
+                <a:cubicBezTo>
+                  <a:pt x="944484" y="1165053"/>
+                  <a:pt x="957125" y="1184153"/>
+                  <a:pt x="972720" y="1184153"/>
+                </a:cubicBezTo>
+                <a:cubicBezTo>
+                  <a:pt x="1015005" y="1184153"/>
+                  <a:pt x="1009570" y="1281487"/>
+                  <a:pt x="1099576" y="1184153"/>
+                </a:cubicBezTo>
+                <a:lnTo>
+                  <a:pt x="1887258" y="1184153"/>
+                </a:lnTo>
+                <a:lnTo>
+                  <a:pt x="1887774" y="1248156"/>
+                </a:lnTo>
+                <a:lnTo>
+                  <a:pt x="1109120" y="1248156"/>
+                </a:lnTo>
+                <a:cubicBezTo>
+                  <a:pt x="1042179" y="1334675"/>
+                  <a:pt x="1018186" y="1248156"/>
+                  <a:pt x="972720" y="1248156"/>
+                </a:cubicBezTo>
+                <a:cubicBezTo>
+                  <a:pt x="957125" y="1248156"/>
+                  <a:pt x="944484" y="1267255"/>
+                  <a:pt x="944484" y="1290816"/>
+                </a:cubicBezTo>
+                <a:lnTo>
+                  <a:pt x="944484" y="1461449"/>
+                </a:lnTo>
+                <a:cubicBezTo>
+                  <a:pt x="944484" y="1485009"/>
+                  <a:pt x="957125" y="1504109"/>
+                  <a:pt x="972720" y="1504109"/>
+                </a:cubicBezTo>
+                <a:cubicBezTo>
+                  <a:pt x="1015005" y="1504109"/>
+                  <a:pt x="1009570" y="1601443"/>
+                  <a:pt x="1099576" y="1504109"/>
+                </a:cubicBezTo>
+                <a:lnTo>
+                  <a:pt x="1888939" y="1504109"/>
+                </a:lnTo>
+                <a:lnTo>
+                  <a:pt x="1888938" y="1515361"/>
+                </a:lnTo>
+                <a:cubicBezTo>
+                  <a:pt x="1888731" y="1609690"/>
+                  <a:pt x="1887478" y="1668640"/>
+                  <a:pt x="1884663" y="1668640"/>
+                </a:cubicBezTo>
+                <a:lnTo>
+                  <a:pt x="198535" y="1639955"/>
+                </a:lnTo>
+                <a:cubicBezTo>
+                  <a:pt x="178372" y="1662099"/>
+                  <a:pt x="167681" y="1676140"/>
+                  <a:pt x="162395" y="1684747"/>
+                </a:cubicBezTo>
+                <a:lnTo>
+                  <a:pt x="159400" y="1691010"/>
+                </a:lnTo>
+                <a:lnTo>
+                  <a:pt x="150903" y="1687473"/>
+                </a:lnTo>
+                <a:cubicBezTo>
+                  <a:pt x="123463" y="1707886"/>
+                  <a:pt x="138817" y="1613661"/>
+                  <a:pt x="120918" y="1608509"/>
+                </a:cubicBezTo>
+                <a:cubicBezTo>
+                  <a:pt x="103019" y="1603358"/>
+                  <a:pt x="140011" y="1634856"/>
+                  <a:pt x="0" y="1643746"/>
+                </a:cubicBezTo>
+                <a:lnTo>
+                  <a:pt x="11819" y="38820"/>
+                </a:lnTo>
+                <a:cubicBezTo>
+                  <a:pt x="11819" y="17380"/>
+                  <a:pt x="23147" y="0"/>
+                  <a:pt x="37121" y="0"/>
+                </a:cubicBezTo>
+                <a:close/>
+              </a:path>
+            </a:pathLst>
+          </a:custGeom>
+        </p:spPr>
+        <p:style>
+          <a:lnRef idx="2">
+            <a:schemeClr val="accent1">
+              <a:shade val="50000"/>
+            </a:schemeClr>
+          </a:lnRef>
+          <a:fillRef idx="1">
+            <a:schemeClr val="accent1"/>
+          </a:fillRef>
+          <a:effectRef idx="0">
+            <a:schemeClr val="accent1"/>
+          </a:effectRef>
+          <a:fontRef idx="minor">
+            <a:schemeClr val="lt1"/>
+          </a:fontRef>
+        </p:style>
+        <p:txBody>
+          <a:bodyPr rot="0" spcFirstLastPara="0" vert="horz" wrap="square" lIns="91440" tIns="45720" rIns="91440" bIns="45720" numCol="1" spcCol="0" rtlCol="0" fromWordArt="0" anchor="t" anchorCtr="0" forceAA="0" compatLnSpc="1">
+            <a:prstTxWarp prst="textNoShape">
+              <a:avLst/>
+            </a:prstTxWarp>
+            <a:noAutofit/>
+          </a:bodyPr>
+          <a:lstStyle/>
+          <a:p>
+            <a:pPr>
+              <a:spcAft>
+                <a:spcPts val="0"/>
+              </a:spcAft>
+            </a:pPr>
+            <a:r>
+              <a:rPr lang="en-US" altLang="zh-TW" sz="1200" kern="100" dirty="0" err="1" smtClean="0">
+                <a:ea typeface="新細明體" panose="02020500000000000000" pitchFamily="18" charset="-120"/>
+                <a:cs typeface="Times New Roman" panose="02020603050405020304" pitchFamily="18" charset="0"/>
+              </a:rPr>
+              <a:t>iMi</a:t>
+            </a:r>
+            <a:r>
+              <a:rPr lang="zh-TW" altLang="en-US" sz="1200" kern="100" dirty="0" smtClean="0">
+                <a:ea typeface="新細明體" panose="02020500000000000000" pitchFamily="18" charset="-120"/>
+                <a:cs typeface="Times New Roman" panose="02020603050405020304" pitchFamily="18" charset="0"/>
+              </a:rPr>
+              <a:t>物流</a:t>
+            </a:r>
+            <a:r>
+              <a:rPr lang="zh-TW" altLang="en-US" sz="1200" kern="100" dirty="0" smtClean="0">
+                <a:ea typeface="新細明體" panose="02020500000000000000" pitchFamily="18" charset="-120"/>
+                <a:cs typeface="Times New Roman" panose="02020603050405020304" pitchFamily="18" charset="0"/>
+              </a:rPr>
+              <a:t>模組</a:t>
+            </a:r>
+            <a:r>
+              <a:rPr lang="en-US" altLang="zh-TW" sz="1200" kern="100" dirty="0" err="1" smtClean="0">
+                <a:ea typeface="新細明體" panose="02020500000000000000" pitchFamily="18" charset="-120"/>
+                <a:cs typeface="Times New Roman" panose="02020603050405020304" pitchFamily="18" charset="0"/>
+              </a:rPr>
+              <a:t>ESP32</a:t>
+            </a:r>
+            <a:r>
+              <a:rPr lang="zh-TW" altLang="en-US" sz="1200" kern="100" dirty="0" smtClean="0">
+                <a:ea typeface="新細明體" panose="02020500000000000000" pitchFamily="18" charset="-120"/>
+                <a:cs typeface="Times New Roman" panose="02020603050405020304" pitchFamily="18" charset="0"/>
+              </a:rPr>
+              <a:t>初始化</a:t>
+            </a:r>
+            <a:endParaRPr lang="en-US" altLang="zh-TW" sz="1200" kern="100" dirty="0" smtClean="0">
+              <a:ea typeface="新細明體" panose="02020500000000000000" pitchFamily="18" charset="-120"/>
+              <a:cs typeface="Times New Roman" panose="02020603050405020304" pitchFamily="18" charset="0"/>
+            </a:endParaRPr>
+          </a:p>
+          <a:p>
+            <a:pPr>
+              <a:lnSpc>
+                <a:spcPts val="2400"/>
+              </a:lnSpc>
+              <a:spcAft>
+                <a:spcPts val="0"/>
+              </a:spcAft>
+            </a:pPr>
+            <a:r>
+              <a:rPr lang="en-US" altLang="zh-TW" sz="1100" dirty="0" err="1" smtClean="0">
+                <a:solidFill>
+                  <a:srgbClr val="FFFFFF"/>
+                </a:solidFill>
+                <a:cs typeface="Times New Roman" panose="02020603050405020304" pitchFamily="18" charset="0"/>
+              </a:rPr>
+              <a:t>WiFi</a:t>
+            </a:r>
+            <a:r>
+              <a:rPr lang="zh-TW" altLang="en-US" sz="1100" dirty="0" smtClean="0">
+                <a:solidFill>
+                  <a:srgbClr val="FFFFFF"/>
+                </a:solidFill>
+                <a:cs typeface="Times New Roman" panose="02020603050405020304" pitchFamily="18" charset="0"/>
+              </a:rPr>
+              <a:t>設定</a:t>
+            </a:r>
+            <a:endParaRPr lang="zh-TW" altLang="zh-TW" sz="1100" dirty="0">
+              <a:latin typeface="新細明體" panose="02020500000000000000" pitchFamily="18" charset="-120"/>
+              <a:cs typeface="新細明體" panose="02020500000000000000" pitchFamily="18" charset="-120"/>
+            </a:endParaRPr>
+          </a:p>
+          <a:p>
+            <a:pPr>
+              <a:lnSpc>
+                <a:spcPts val="2400"/>
+              </a:lnSpc>
+              <a:spcAft>
+                <a:spcPts val="0"/>
+              </a:spcAft>
+            </a:pPr>
+            <a:r>
+              <a:rPr lang="en-US" altLang="zh-TW" sz="1100" dirty="0" err="1" smtClean="0">
+                <a:solidFill>
+                  <a:srgbClr val="FFFFFF"/>
+                </a:solidFill>
+                <a:cs typeface="Times New Roman" panose="02020603050405020304" pitchFamily="18" charset="0"/>
+              </a:rPr>
+              <a:t>MQTT</a:t>
+            </a:r>
+            <a:r>
+              <a:rPr lang="zh-TW" altLang="en-US" sz="1100" dirty="0" smtClean="0">
+                <a:solidFill>
+                  <a:srgbClr val="FFFFFF"/>
+                </a:solidFill>
+                <a:cs typeface="Times New Roman" panose="02020603050405020304" pitchFamily="18" charset="0"/>
+              </a:rPr>
+              <a:t>設定</a:t>
+            </a:r>
+            <a:endParaRPr lang="zh-TW" altLang="zh-TW" sz="1100" dirty="0">
+              <a:latin typeface="新細明體" panose="02020500000000000000" pitchFamily="18" charset="-120"/>
+              <a:cs typeface="新細明體" panose="02020500000000000000" pitchFamily="18" charset="-120"/>
+            </a:endParaRPr>
+          </a:p>
+          <a:p>
+            <a:pPr>
+              <a:lnSpc>
+                <a:spcPts val="2400"/>
+              </a:lnSpc>
+              <a:spcAft>
+                <a:spcPts val="0"/>
+              </a:spcAft>
+            </a:pPr>
+            <a:r>
+              <a:rPr lang="en-US" altLang="zh-TW" sz="1100" dirty="0" err="1" smtClean="0">
+                <a:solidFill>
+                  <a:srgbClr val="FFFFFF"/>
+                </a:solidFill>
+                <a:cs typeface="Times New Roman" panose="02020603050405020304" pitchFamily="18" charset="0"/>
+              </a:rPr>
+              <a:t>UART</a:t>
+            </a:r>
+            <a:r>
+              <a:rPr lang="zh-TW" altLang="en-US" sz="1100" dirty="0" smtClean="0">
+                <a:solidFill>
+                  <a:srgbClr val="FFFFFF"/>
+                </a:solidFill>
+                <a:cs typeface="Times New Roman" panose="02020603050405020304" pitchFamily="18" charset="0"/>
+              </a:rPr>
+              <a:t>通訊</a:t>
+            </a:r>
+            <a:endParaRPr lang="en-US" altLang="zh-TW" sz="1100" dirty="0" smtClean="0">
+              <a:solidFill>
+                <a:srgbClr val="FFFFFF"/>
+              </a:solidFill>
+              <a:cs typeface="Times New Roman" panose="02020603050405020304" pitchFamily="18" charset="0"/>
+            </a:endParaRPr>
+          </a:p>
+          <a:p>
+            <a:pPr>
+              <a:lnSpc>
+                <a:spcPts val="2400"/>
+              </a:lnSpc>
+              <a:spcAft>
+                <a:spcPts val="0"/>
+              </a:spcAft>
+            </a:pPr>
+            <a:r>
+              <a:rPr lang="en-US" altLang="zh-TW" sz="1100" dirty="0" smtClean="0">
+                <a:latin typeface="新細明體" panose="02020500000000000000" pitchFamily="18" charset="-120"/>
+                <a:cs typeface="新細明體" panose="02020500000000000000" pitchFamily="18" charset="-120"/>
+              </a:rPr>
+              <a:t>Google</a:t>
+            </a:r>
+            <a:r>
+              <a:rPr lang="zh-TW" altLang="en-US" sz="1100" dirty="0" smtClean="0">
+                <a:latin typeface="新細明體" panose="02020500000000000000" pitchFamily="18" charset="-120"/>
+                <a:cs typeface="新細明體" panose="02020500000000000000" pitchFamily="18" charset="-120"/>
+              </a:rPr>
+              <a:t>試算表</a:t>
+            </a:r>
+            <a:endParaRPr lang="zh-TW" altLang="zh-TW" sz="1100" dirty="0">
+              <a:latin typeface="新細明體" panose="02020500000000000000" pitchFamily="18" charset="-120"/>
+              <a:cs typeface="新細明體" panose="02020500000000000000" pitchFamily="18" charset="-120"/>
+            </a:endParaRPr>
+          </a:p>
+        </p:txBody>
+      </p:sp>
     </p:spTree>
     <p:extLst>
       <p:ext uri="{BB962C8B-B14F-4D97-AF65-F5344CB8AC3E}">

--- a/tools/myCustomBlockly/iMi/block.pptx
+++ b/tools/myCustomBlockly/iMi/block.pptx
@@ -156,10 +156,9 @@
           </a:lstStyle>
           <a:p>
             <a:r>
-              <a:rPr lang="zh-TW" altLang="en-US" smtClean="0"/>
+              <a:rPr lang="zh-TW" altLang="en-US"/>
               <a:t>按一下以編輯母片標題樣式</a:t>
             </a:r>
-            <a:endParaRPr lang="zh-TW" altLang="en-US"/>
           </a:p>
         </p:txBody>
       </p:sp>
@@ -221,10 +220,9 @@
           </a:lstStyle>
           <a:p>
             <a:r>
-              <a:rPr lang="zh-TW" altLang="en-US" smtClean="0"/>
+              <a:rPr lang="zh-TW" altLang="en-US"/>
               <a:t>按一下以編輯母片副標題樣式</a:t>
             </a:r>
-            <a:endParaRPr lang="zh-TW" altLang="en-US"/>
           </a:p>
         </p:txBody>
       </p:sp>
@@ -245,7 +243,7 @@
           <a:p>
             <a:fld id="{28019EB3-9618-4DC9-9742-E69F5EF18F40}" type="datetimeFigureOut">
               <a:rPr lang="zh-TW" altLang="en-US" smtClean="0"/>
-              <a:t>2023/12/19</a:t>
+              <a:t>2023/12/20</a:t>
             </a:fld>
             <a:endParaRPr lang="zh-TW" altLang="en-US"/>
           </a:p>
@@ -339,10 +337,9 @@
           <a:lstStyle/>
           <a:p>
             <a:r>
-              <a:rPr lang="zh-TW" altLang="en-US" smtClean="0"/>
+              <a:rPr lang="zh-TW" altLang="en-US"/>
               <a:t>按一下以編輯母片標題樣式</a:t>
             </a:r>
-            <a:endParaRPr lang="zh-TW" altLang="en-US"/>
           </a:p>
         </p:txBody>
       </p:sp>
@@ -363,38 +360,37 @@
           <a:p>
             <a:pPr lvl="0"/>
             <a:r>
-              <a:rPr lang="zh-TW" altLang="en-US" smtClean="0"/>
+              <a:rPr lang="zh-TW" altLang="en-US"/>
               <a:t>編輯母片文字樣式</a:t>
             </a:r>
           </a:p>
           <a:p>
             <a:pPr lvl="1"/>
             <a:r>
-              <a:rPr lang="zh-TW" altLang="en-US" smtClean="0"/>
+              <a:rPr lang="zh-TW" altLang="en-US"/>
               <a:t>第二層</a:t>
             </a:r>
           </a:p>
           <a:p>
             <a:pPr lvl="2"/>
             <a:r>
-              <a:rPr lang="zh-TW" altLang="en-US" smtClean="0"/>
+              <a:rPr lang="zh-TW" altLang="en-US"/>
               <a:t>第三層</a:t>
             </a:r>
           </a:p>
           <a:p>
             <a:pPr lvl="3"/>
             <a:r>
-              <a:rPr lang="zh-TW" altLang="en-US" smtClean="0"/>
+              <a:rPr lang="zh-TW" altLang="en-US"/>
               <a:t>第四層</a:t>
             </a:r>
           </a:p>
           <a:p>
             <a:pPr lvl="4"/>
             <a:r>
-              <a:rPr lang="zh-TW" altLang="en-US" smtClean="0"/>
+              <a:rPr lang="zh-TW" altLang="en-US"/>
               <a:t>第五層</a:t>
             </a:r>
-            <a:endParaRPr lang="zh-TW" altLang="en-US"/>
           </a:p>
         </p:txBody>
       </p:sp>
@@ -415,7 +411,7 @@
           <a:p>
             <a:fld id="{28019EB3-9618-4DC9-9742-E69F5EF18F40}" type="datetimeFigureOut">
               <a:rPr lang="zh-TW" altLang="en-US" smtClean="0"/>
-              <a:t>2023/12/19</a:t>
+              <a:t>2023/12/20</a:t>
             </a:fld>
             <a:endParaRPr lang="zh-TW" altLang="en-US"/>
           </a:p>
@@ -514,10 +510,9 @@
           <a:lstStyle/>
           <a:p>
             <a:r>
-              <a:rPr lang="zh-TW" altLang="en-US" smtClean="0"/>
+              <a:rPr lang="zh-TW" altLang="en-US"/>
               <a:t>按一下以編輯母片標題樣式</a:t>
             </a:r>
-            <a:endParaRPr lang="zh-TW" altLang="en-US"/>
           </a:p>
         </p:txBody>
       </p:sp>
@@ -543,38 +538,37 @@
           <a:p>
             <a:pPr lvl="0"/>
             <a:r>
-              <a:rPr lang="zh-TW" altLang="en-US" smtClean="0"/>
+              <a:rPr lang="zh-TW" altLang="en-US"/>
               <a:t>編輯母片文字樣式</a:t>
             </a:r>
           </a:p>
           <a:p>
             <a:pPr lvl="1"/>
             <a:r>
-              <a:rPr lang="zh-TW" altLang="en-US" smtClean="0"/>
+              <a:rPr lang="zh-TW" altLang="en-US"/>
               <a:t>第二層</a:t>
             </a:r>
           </a:p>
           <a:p>
             <a:pPr lvl="2"/>
             <a:r>
-              <a:rPr lang="zh-TW" altLang="en-US" smtClean="0"/>
+              <a:rPr lang="zh-TW" altLang="en-US"/>
               <a:t>第三層</a:t>
             </a:r>
           </a:p>
           <a:p>
             <a:pPr lvl="3"/>
             <a:r>
-              <a:rPr lang="zh-TW" altLang="en-US" smtClean="0"/>
+              <a:rPr lang="zh-TW" altLang="en-US"/>
               <a:t>第四層</a:t>
             </a:r>
           </a:p>
           <a:p>
             <a:pPr lvl="4"/>
             <a:r>
-              <a:rPr lang="zh-TW" altLang="en-US" smtClean="0"/>
+              <a:rPr lang="zh-TW" altLang="en-US"/>
               <a:t>第五層</a:t>
             </a:r>
-            <a:endParaRPr lang="zh-TW" altLang="en-US"/>
           </a:p>
         </p:txBody>
       </p:sp>
@@ -595,7 +589,7 @@
           <a:p>
             <a:fld id="{28019EB3-9618-4DC9-9742-E69F5EF18F40}" type="datetimeFigureOut">
               <a:rPr lang="zh-TW" altLang="en-US" smtClean="0"/>
-              <a:t>2023/12/19</a:t>
+              <a:t>2023/12/20</a:t>
             </a:fld>
             <a:endParaRPr lang="zh-TW" altLang="en-US"/>
           </a:p>
@@ -689,10 +683,9 @@
           <a:lstStyle/>
           <a:p>
             <a:r>
-              <a:rPr lang="zh-TW" altLang="en-US" smtClean="0"/>
+              <a:rPr lang="zh-TW" altLang="en-US"/>
               <a:t>按一下以編輯母片標題樣式</a:t>
             </a:r>
-            <a:endParaRPr lang="zh-TW" altLang="en-US"/>
           </a:p>
         </p:txBody>
       </p:sp>
@@ -713,38 +706,37 @@
           <a:p>
             <a:pPr lvl="0"/>
             <a:r>
-              <a:rPr lang="zh-TW" altLang="en-US" smtClean="0"/>
+              <a:rPr lang="zh-TW" altLang="en-US"/>
               <a:t>編輯母片文字樣式</a:t>
             </a:r>
           </a:p>
           <a:p>
             <a:pPr lvl="1"/>
             <a:r>
-              <a:rPr lang="zh-TW" altLang="en-US" smtClean="0"/>
+              <a:rPr lang="zh-TW" altLang="en-US"/>
               <a:t>第二層</a:t>
             </a:r>
           </a:p>
           <a:p>
             <a:pPr lvl="2"/>
             <a:r>
-              <a:rPr lang="zh-TW" altLang="en-US" smtClean="0"/>
+              <a:rPr lang="zh-TW" altLang="en-US"/>
               <a:t>第三層</a:t>
             </a:r>
           </a:p>
           <a:p>
             <a:pPr lvl="3"/>
             <a:r>
-              <a:rPr lang="zh-TW" altLang="en-US" smtClean="0"/>
+              <a:rPr lang="zh-TW" altLang="en-US"/>
               <a:t>第四層</a:t>
             </a:r>
           </a:p>
           <a:p>
             <a:pPr lvl="4"/>
             <a:r>
-              <a:rPr lang="zh-TW" altLang="en-US" smtClean="0"/>
+              <a:rPr lang="zh-TW" altLang="en-US"/>
               <a:t>第五層</a:t>
             </a:r>
-            <a:endParaRPr lang="zh-TW" altLang="en-US"/>
           </a:p>
         </p:txBody>
       </p:sp>
@@ -765,7 +757,7 @@
           <a:p>
             <a:fld id="{28019EB3-9618-4DC9-9742-E69F5EF18F40}" type="datetimeFigureOut">
               <a:rPr lang="zh-TW" altLang="en-US" smtClean="0"/>
-              <a:t>2023/12/19</a:t>
+              <a:t>2023/12/20</a:t>
             </a:fld>
             <a:endParaRPr lang="zh-TW" altLang="en-US"/>
           </a:p>
@@ -868,10 +860,9 @@
           </a:lstStyle>
           <a:p>
             <a:r>
-              <a:rPr lang="zh-TW" altLang="en-US" smtClean="0"/>
+              <a:rPr lang="zh-TW" altLang="en-US"/>
               <a:t>按一下以編輯母片標題樣式</a:t>
             </a:r>
-            <a:endParaRPr lang="zh-TW" altLang="en-US"/>
           </a:p>
         </p:txBody>
       </p:sp>
@@ -988,7 +979,7 @@
           <a:p>
             <a:pPr lvl="0"/>
             <a:r>
-              <a:rPr lang="zh-TW" altLang="en-US" smtClean="0"/>
+              <a:rPr lang="zh-TW" altLang="en-US"/>
               <a:t>編輯母片文字樣式</a:t>
             </a:r>
           </a:p>
@@ -1011,7 +1002,7 @@
           <a:p>
             <a:fld id="{28019EB3-9618-4DC9-9742-E69F5EF18F40}" type="datetimeFigureOut">
               <a:rPr lang="zh-TW" altLang="en-US" smtClean="0"/>
-              <a:t>2023/12/19</a:t>
+              <a:t>2023/12/20</a:t>
             </a:fld>
             <a:endParaRPr lang="zh-TW" altLang="en-US"/>
           </a:p>
@@ -1105,10 +1096,9 @@
           <a:lstStyle/>
           <a:p>
             <a:r>
-              <a:rPr lang="zh-TW" altLang="en-US" smtClean="0"/>
+              <a:rPr lang="zh-TW" altLang="en-US"/>
               <a:t>按一下以編輯母片標題樣式</a:t>
             </a:r>
-            <a:endParaRPr lang="zh-TW" altLang="en-US"/>
           </a:p>
         </p:txBody>
       </p:sp>
@@ -1134,38 +1124,37 @@
           <a:p>
             <a:pPr lvl="0"/>
             <a:r>
-              <a:rPr lang="zh-TW" altLang="en-US" smtClean="0"/>
+              <a:rPr lang="zh-TW" altLang="en-US"/>
               <a:t>編輯母片文字樣式</a:t>
             </a:r>
           </a:p>
           <a:p>
             <a:pPr lvl="1"/>
             <a:r>
-              <a:rPr lang="zh-TW" altLang="en-US" smtClean="0"/>
+              <a:rPr lang="zh-TW" altLang="en-US"/>
               <a:t>第二層</a:t>
             </a:r>
           </a:p>
           <a:p>
             <a:pPr lvl="2"/>
             <a:r>
-              <a:rPr lang="zh-TW" altLang="en-US" smtClean="0"/>
+              <a:rPr lang="zh-TW" altLang="en-US"/>
               <a:t>第三層</a:t>
             </a:r>
           </a:p>
           <a:p>
             <a:pPr lvl="3"/>
             <a:r>
-              <a:rPr lang="zh-TW" altLang="en-US" smtClean="0"/>
+              <a:rPr lang="zh-TW" altLang="en-US"/>
               <a:t>第四層</a:t>
             </a:r>
           </a:p>
           <a:p>
             <a:pPr lvl="4"/>
             <a:r>
-              <a:rPr lang="zh-TW" altLang="en-US" smtClean="0"/>
+              <a:rPr lang="zh-TW" altLang="en-US"/>
               <a:t>第五層</a:t>
             </a:r>
-            <a:endParaRPr lang="zh-TW" altLang="en-US"/>
           </a:p>
         </p:txBody>
       </p:sp>
@@ -1191,38 +1180,37 @@
           <a:p>
             <a:pPr lvl="0"/>
             <a:r>
-              <a:rPr lang="zh-TW" altLang="en-US" smtClean="0"/>
+              <a:rPr lang="zh-TW" altLang="en-US"/>
               <a:t>編輯母片文字樣式</a:t>
             </a:r>
           </a:p>
           <a:p>
             <a:pPr lvl="1"/>
             <a:r>
-              <a:rPr lang="zh-TW" altLang="en-US" smtClean="0"/>
+              <a:rPr lang="zh-TW" altLang="en-US"/>
               <a:t>第二層</a:t>
             </a:r>
           </a:p>
           <a:p>
             <a:pPr lvl="2"/>
             <a:r>
-              <a:rPr lang="zh-TW" altLang="en-US" smtClean="0"/>
+              <a:rPr lang="zh-TW" altLang="en-US"/>
               <a:t>第三層</a:t>
             </a:r>
           </a:p>
           <a:p>
             <a:pPr lvl="3"/>
             <a:r>
-              <a:rPr lang="zh-TW" altLang="en-US" smtClean="0"/>
+              <a:rPr lang="zh-TW" altLang="en-US"/>
               <a:t>第四層</a:t>
             </a:r>
           </a:p>
           <a:p>
             <a:pPr lvl="4"/>
             <a:r>
-              <a:rPr lang="zh-TW" altLang="en-US" smtClean="0"/>
+              <a:rPr lang="zh-TW" altLang="en-US"/>
               <a:t>第五層</a:t>
             </a:r>
-            <a:endParaRPr lang="zh-TW" altLang="en-US"/>
           </a:p>
         </p:txBody>
       </p:sp>
@@ -1243,7 +1231,7 @@
           <a:p>
             <a:fld id="{28019EB3-9618-4DC9-9742-E69F5EF18F40}" type="datetimeFigureOut">
               <a:rPr lang="zh-TW" altLang="en-US" smtClean="0"/>
-              <a:t>2023/12/19</a:t>
+              <a:t>2023/12/20</a:t>
             </a:fld>
             <a:endParaRPr lang="zh-TW" altLang="en-US"/>
           </a:p>
@@ -1342,10 +1330,9 @@
           <a:lstStyle/>
           <a:p>
             <a:r>
-              <a:rPr lang="zh-TW" altLang="en-US" smtClean="0"/>
+              <a:rPr lang="zh-TW" altLang="en-US"/>
               <a:t>按一下以編輯母片標題樣式</a:t>
             </a:r>
-            <a:endParaRPr lang="zh-TW" altLang="en-US"/>
           </a:p>
         </p:txBody>
       </p:sp>
@@ -1408,7 +1395,7 @@
           <a:p>
             <a:pPr lvl="0"/>
             <a:r>
-              <a:rPr lang="zh-TW" altLang="en-US" smtClean="0"/>
+              <a:rPr lang="zh-TW" altLang="en-US"/>
               <a:t>編輯母片文字樣式</a:t>
             </a:r>
           </a:p>
@@ -1436,38 +1423,37 @@
           <a:p>
             <a:pPr lvl="0"/>
             <a:r>
-              <a:rPr lang="zh-TW" altLang="en-US" smtClean="0"/>
+              <a:rPr lang="zh-TW" altLang="en-US"/>
               <a:t>編輯母片文字樣式</a:t>
             </a:r>
           </a:p>
           <a:p>
             <a:pPr lvl="1"/>
             <a:r>
-              <a:rPr lang="zh-TW" altLang="en-US" smtClean="0"/>
+              <a:rPr lang="zh-TW" altLang="en-US"/>
               <a:t>第二層</a:t>
             </a:r>
           </a:p>
           <a:p>
             <a:pPr lvl="2"/>
             <a:r>
-              <a:rPr lang="zh-TW" altLang="en-US" smtClean="0"/>
+              <a:rPr lang="zh-TW" altLang="en-US"/>
               <a:t>第三層</a:t>
             </a:r>
           </a:p>
           <a:p>
             <a:pPr lvl="3"/>
             <a:r>
-              <a:rPr lang="zh-TW" altLang="en-US" smtClean="0"/>
+              <a:rPr lang="zh-TW" altLang="en-US"/>
               <a:t>第四層</a:t>
             </a:r>
           </a:p>
           <a:p>
             <a:pPr lvl="4"/>
             <a:r>
-              <a:rPr lang="zh-TW" altLang="en-US" smtClean="0"/>
+              <a:rPr lang="zh-TW" altLang="en-US"/>
               <a:t>第五層</a:t>
             </a:r>
-            <a:endParaRPr lang="zh-TW" altLang="en-US"/>
           </a:p>
         </p:txBody>
       </p:sp>
@@ -1530,7 +1516,7 @@
           <a:p>
             <a:pPr lvl="0"/>
             <a:r>
-              <a:rPr lang="zh-TW" altLang="en-US" smtClean="0"/>
+              <a:rPr lang="zh-TW" altLang="en-US"/>
               <a:t>編輯母片文字樣式</a:t>
             </a:r>
           </a:p>
@@ -1558,38 +1544,37 @@
           <a:p>
             <a:pPr lvl="0"/>
             <a:r>
-              <a:rPr lang="zh-TW" altLang="en-US" smtClean="0"/>
+              <a:rPr lang="zh-TW" altLang="en-US"/>
               <a:t>編輯母片文字樣式</a:t>
             </a:r>
           </a:p>
           <a:p>
             <a:pPr lvl="1"/>
             <a:r>
-              <a:rPr lang="zh-TW" altLang="en-US" smtClean="0"/>
+              <a:rPr lang="zh-TW" altLang="en-US"/>
               <a:t>第二層</a:t>
             </a:r>
           </a:p>
           <a:p>
             <a:pPr lvl="2"/>
             <a:r>
-              <a:rPr lang="zh-TW" altLang="en-US" smtClean="0"/>
+              <a:rPr lang="zh-TW" altLang="en-US"/>
               <a:t>第三層</a:t>
             </a:r>
           </a:p>
           <a:p>
             <a:pPr lvl="3"/>
             <a:r>
-              <a:rPr lang="zh-TW" altLang="en-US" smtClean="0"/>
+              <a:rPr lang="zh-TW" altLang="en-US"/>
               <a:t>第四層</a:t>
             </a:r>
           </a:p>
           <a:p>
             <a:pPr lvl="4"/>
             <a:r>
-              <a:rPr lang="zh-TW" altLang="en-US" smtClean="0"/>
+              <a:rPr lang="zh-TW" altLang="en-US"/>
               <a:t>第五層</a:t>
             </a:r>
-            <a:endParaRPr lang="zh-TW" altLang="en-US"/>
           </a:p>
         </p:txBody>
       </p:sp>
@@ -1610,7 +1595,7 @@
           <a:p>
             <a:fld id="{28019EB3-9618-4DC9-9742-E69F5EF18F40}" type="datetimeFigureOut">
               <a:rPr lang="zh-TW" altLang="en-US" smtClean="0"/>
-              <a:t>2023/12/19</a:t>
+              <a:t>2023/12/20</a:t>
             </a:fld>
             <a:endParaRPr lang="zh-TW" altLang="en-US"/>
           </a:p>
@@ -1704,10 +1689,9 @@
           <a:lstStyle/>
           <a:p>
             <a:r>
-              <a:rPr lang="zh-TW" altLang="en-US" smtClean="0"/>
+              <a:rPr lang="zh-TW" altLang="en-US"/>
               <a:t>按一下以編輯母片標題樣式</a:t>
             </a:r>
-            <a:endParaRPr lang="zh-TW" altLang="en-US"/>
           </a:p>
         </p:txBody>
       </p:sp>
@@ -1728,7 +1712,7 @@
           <a:p>
             <a:fld id="{28019EB3-9618-4DC9-9742-E69F5EF18F40}" type="datetimeFigureOut">
               <a:rPr lang="zh-TW" altLang="en-US" smtClean="0"/>
-              <a:t>2023/12/19</a:t>
+              <a:t>2023/12/20</a:t>
             </a:fld>
             <a:endParaRPr lang="zh-TW" altLang="en-US"/>
           </a:p>
@@ -1823,7 +1807,7 @@
           <a:p>
             <a:fld id="{28019EB3-9618-4DC9-9742-E69F5EF18F40}" type="datetimeFigureOut">
               <a:rPr lang="zh-TW" altLang="en-US" smtClean="0"/>
-              <a:t>2023/12/19</a:t>
+              <a:t>2023/12/20</a:t>
             </a:fld>
             <a:endParaRPr lang="zh-TW" altLang="en-US"/>
           </a:p>
@@ -1926,10 +1910,9 @@
           </a:lstStyle>
           <a:p>
             <a:r>
-              <a:rPr lang="zh-TW" altLang="en-US" smtClean="0"/>
+              <a:rPr lang="zh-TW" altLang="en-US"/>
               <a:t>按一下以編輯母片標題樣式</a:t>
             </a:r>
-            <a:endParaRPr lang="zh-TW" altLang="en-US"/>
           </a:p>
         </p:txBody>
       </p:sp>
@@ -1983,38 +1966,37 @@
           <a:p>
             <a:pPr lvl="0"/>
             <a:r>
-              <a:rPr lang="zh-TW" altLang="en-US" smtClean="0"/>
+              <a:rPr lang="zh-TW" altLang="en-US"/>
               <a:t>編輯母片文字樣式</a:t>
             </a:r>
           </a:p>
           <a:p>
             <a:pPr lvl="1"/>
             <a:r>
-              <a:rPr lang="zh-TW" altLang="en-US" smtClean="0"/>
+              <a:rPr lang="zh-TW" altLang="en-US"/>
               <a:t>第二層</a:t>
             </a:r>
           </a:p>
           <a:p>
             <a:pPr lvl="2"/>
             <a:r>
-              <a:rPr lang="zh-TW" altLang="en-US" smtClean="0"/>
+              <a:rPr lang="zh-TW" altLang="en-US"/>
               <a:t>第三層</a:t>
             </a:r>
           </a:p>
           <a:p>
             <a:pPr lvl="3"/>
             <a:r>
-              <a:rPr lang="zh-TW" altLang="en-US" smtClean="0"/>
+              <a:rPr lang="zh-TW" altLang="en-US"/>
               <a:t>第四層</a:t>
             </a:r>
           </a:p>
           <a:p>
             <a:pPr lvl="4"/>
             <a:r>
-              <a:rPr lang="zh-TW" altLang="en-US" smtClean="0"/>
+              <a:rPr lang="zh-TW" altLang="en-US"/>
               <a:t>第五層</a:t>
             </a:r>
-            <a:endParaRPr lang="zh-TW" altLang="en-US"/>
           </a:p>
         </p:txBody>
       </p:sp>
@@ -2077,7 +2059,7 @@
           <a:p>
             <a:pPr lvl="0"/>
             <a:r>
-              <a:rPr lang="zh-TW" altLang="en-US" smtClean="0"/>
+              <a:rPr lang="zh-TW" altLang="en-US"/>
               <a:t>編輯母片文字樣式</a:t>
             </a:r>
           </a:p>
@@ -2100,7 +2082,7 @@
           <a:p>
             <a:fld id="{28019EB3-9618-4DC9-9742-E69F5EF18F40}" type="datetimeFigureOut">
               <a:rPr lang="zh-TW" altLang="en-US" smtClean="0"/>
-              <a:t>2023/12/19</a:t>
+              <a:t>2023/12/20</a:t>
             </a:fld>
             <a:endParaRPr lang="zh-TW" altLang="en-US"/>
           </a:p>
@@ -2203,10 +2185,9 @@
           </a:lstStyle>
           <a:p>
             <a:r>
-              <a:rPr lang="zh-TW" altLang="en-US" smtClean="0"/>
+              <a:rPr lang="zh-TW" altLang="en-US"/>
               <a:t>按一下以編輯母片標題樣式</a:t>
             </a:r>
-            <a:endParaRPr lang="zh-TW" altLang="en-US"/>
           </a:p>
         </p:txBody>
       </p:sp>
@@ -2330,7 +2311,7 @@
           <a:p>
             <a:pPr lvl="0"/>
             <a:r>
-              <a:rPr lang="zh-TW" altLang="en-US" smtClean="0"/>
+              <a:rPr lang="zh-TW" altLang="en-US"/>
               <a:t>編輯母片文字樣式</a:t>
             </a:r>
           </a:p>
@@ -2353,7 +2334,7 @@
           <a:p>
             <a:fld id="{28019EB3-9618-4DC9-9742-E69F5EF18F40}" type="datetimeFigureOut">
               <a:rPr lang="zh-TW" altLang="en-US" smtClean="0"/>
-              <a:t>2023/12/19</a:t>
+              <a:t>2023/12/20</a:t>
             </a:fld>
             <a:endParaRPr lang="zh-TW" altLang="en-US"/>
           </a:p>
@@ -2462,10 +2443,9 @@
           <a:lstStyle/>
           <a:p>
             <a:r>
-              <a:rPr lang="zh-TW" altLang="en-US" smtClean="0"/>
+              <a:rPr lang="zh-TW" altLang="en-US"/>
               <a:t>按一下以編輯母片標題樣式</a:t>
             </a:r>
-            <a:endParaRPr lang="zh-TW" altLang="en-US"/>
           </a:p>
         </p:txBody>
       </p:sp>
@@ -2496,38 +2476,37 @@
           <a:p>
             <a:pPr lvl="0"/>
             <a:r>
-              <a:rPr lang="zh-TW" altLang="en-US" smtClean="0"/>
+              <a:rPr lang="zh-TW" altLang="en-US"/>
               <a:t>編輯母片文字樣式</a:t>
             </a:r>
           </a:p>
           <a:p>
             <a:pPr lvl="1"/>
             <a:r>
-              <a:rPr lang="zh-TW" altLang="en-US" smtClean="0"/>
+              <a:rPr lang="zh-TW" altLang="en-US"/>
               <a:t>第二層</a:t>
             </a:r>
           </a:p>
           <a:p>
             <a:pPr lvl="2"/>
             <a:r>
-              <a:rPr lang="zh-TW" altLang="en-US" smtClean="0"/>
+              <a:rPr lang="zh-TW" altLang="en-US"/>
               <a:t>第三層</a:t>
             </a:r>
           </a:p>
           <a:p>
             <a:pPr lvl="3"/>
             <a:r>
-              <a:rPr lang="zh-TW" altLang="en-US" smtClean="0"/>
+              <a:rPr lang="zh-TW" altLang="en-US"/>
               <a:t>第四層</a:t>
             </a:r>
           </a:p>
           <a:p>
             <a:pPr lvl="4"/>
             <a:r>
-              <a:rPr lang="zh-TW" altLang="en-US" smtClean="0"/>
+              <a:rPr lang="zh-TW" altLang="en-US"/>
               <a:t>第五層</a:t>
             </a:r>
-            <a:endParaRPr lang="zh-TW" altLang="en-US"/>
           </a:p>
         </p:txBody>
       </p:sp>
@@ -2566,7 +2545,7 @@
           <a:p>
             <a:fld id="{28019EB3-9618-4DC9-9742-E69F5EF18F40}" type="datetimeFigureOut">
               <a:rPr lang="zh-TW" altLang="en-US" smtClean="0"/>
-              <a:t>2023/12/19</a:t>
+              <a:t>2023/12/20</a:t>
             </a:fld>
             <a:endParaRPr lang="zh-TW" altLang="en-US"/>
           </a:p>
@@ -3649,7 +3628,7 @@
               </a:spcAft>
             </a:pPr>
             <a:r>
-              <a:rPr lang="zh-TW" altLang="en-US" sz="1200" kern="100" dirty="0" smtClean="0">
+              <a:rPr lang="zh-TW" altLang="en-US" sz="1200" kern="100" dirty="0">
                 <a:ea typeface="新細明體" panose="02020500000000000000" pitchFamily="18" charset="-120"/>
                 <a:cs typeface="Times New Roman" panose="02020603050405020304" pitchFamily="18" charset="0"/>
               </a:rPr>
@@ -3974,7 +3953,7 @@
                 </a:spcAft>
               </a:pPr>
               <a:r>
-                <a:rPr lang="en-US" altLang="zh-TW" sz="1200" kern="100" dirty="0" err="1" smtClean="0">
+                <a:rPr lang="en-US" altLang="zh-TW" sz="1200" kern="100" dirty="0" err="1">
                   <a:ea typeface="新細明體" panose="02020500000000000000" pitchFamily="18" charset="-120"/>
                   <a:cs typeface="Times New Roman" panose="02020603050405020304" pitchFamily="18" charset="0"/>
                 </a:rPr>
@@ -5146,7 +5125,7 @@
               </a:spcAft>
             </a:pPr>
             <a:r>
-              <a:rPr lang="zh-TW" altLang="en-US" sz="1200" kern="100" dirty="0" smtClean="0">
+              <a:rPr lang="zh-TW" altLang="en-US" sz="1200" kern="100" dirty="0">
                 <a:solidFill>
                   <a:srgbClr val="FFFFFF"/>
                 </a:solidFill>
@@ -5157,7 +5136,7 @@
               <a:t>當</a:t>
             </a:r>
             <a:r>
-              <a:rPr lang="zh-TW" sz="1200" kern="100" dirty="0" smtClean="0">
+              <a:rPr lang="zh-TW" sz="1200" kern="100" dirty="0">
                 <a:solidFill>
                   <a:srgbClr val="FFFFFF"/>
                 </a:solidFill>
@@ -5168,7 +5147,7 @@
               <a:t>接收</a:t>
             </a:r>
             <a:r>
-              <a:rPr lang="en-US" sz="1200" kern="100" dirty="0" err="1" smtClean="0">
+              <a:rPr lang="en-US" sz="1200" kern="100" dirty="0" err="1">
                 <a:solidFill>
                   <a:srgbClr val="FFFFFF"/>
                 </a:solidFill>
@@ -5179,7 +5158,7 @@
               <a:t>ESP32</a:t>
             </a:r>
             <a:r>
-              <a:rPr lang="zh-TW" sz="1200" kern="100" dirty="0" smtClean="0">
+              <a:rPr lang="zh-TW" sz="1200" kern="100" dirty="0">
                 <a:solidFill>
                   <a:srgbClr val="FFFFFF"/>
                 </a:solidFill>
@@ -5190,7 +5169,7 @@
               <a:t>訊息</a:t>
             </a:r>
             <a:r>
-              <a:rPr lang="zh-TW" altLang="en-US" sz="1200" kern="100" dirty="0" smtClean="0">
+              <a:rPr lang="zh-TW" altLang="en-US" sz="1200" kern="100" dirty="0">
                 <a:solidFill>
                   <a:srgbClr val="FFFFFF"/>
                 </a:solidFill>
@@ -5595,7 +5574,7 @@
               </a:spcAft>
             </a:pPr>
             <a:r>
-              <a:rPr lang="zh-TW" altLang="en-US" sz="1200" kern="100" dirty="0" smtClean="0">
+              <a:rPr lang="zh-TW" altLang="en-US" sz="1200" kern="100" dirty="0">
                 <a:effectLst/>
                 <a:ea typeface="新細明體" panose="02020500000000000000" pitchFamily="18" charset="-120"/>
                 <a:cs typeface="Times New Roman" panose="02020603050405020304" pitchFamily="18" charset="0"/>
@@ -5603,7 +5582,7 @@
               <a:t>取得</a:t>
             </a:r>
             <a:r>
-              <a:rPr lang="en-US" altLang="zh-TW" sz="1200" kern="100" dirty="0" err="1" smtClean="0">
+              <a:rPr lang="en-US" altLang="zh-TW" sz="1200" kern="100" dirty="0" err="1">
                 <a:effectLst/>
                 <a:ea typeface="新細明體" panose="02020500000000000000" pitchFamily="18" charset="-120"/>
                 <a:cs typeface="Times New Roman" panose="02020603050405020304" pitchFamily="18" charset="0"/>
@@ -5611,7 +5590,7 @@
               <a:t>ESP32</a:t>
             </a:r>
             <a:r>
-              <a:rPr lang="zh-TW" altLang="en-US" sz="1200" kern="100" dirty="0" smtClean="0">
+              <a:rPr lang="zh-TW" altLang="en-US" sz="1200" kern="100" dirty="0">
                 <a:ea typeface="新細明體" panose="02020500000000000000" pitchFamily="18" charset="-120"/>
                 <a:cs typeface="Times New Roman" panose="02020603050405020304" pitchFamily="18" charset="0"/>
               </a:rPr>
@@ -6012,7 +5991,7 @@
               </a:spcAft>
             </a:pPr>
             <a:r>
-              <a:rPr lang="zh-TW" altLang="en-US" sz="1200" kern="100" dirty="0" smtClean="0">
+              <a:rPr lang="zh-TW" altLang="en-US" sz="1200" kern="100" dirty="0">
                 <a:effectLst/>
                 <a:ea typeface="新細明體" panose="02020500000000000000" pitchFamily="18" charset="-120"/>
                 <a:cs typeface="Times New Roman" panose="02020603050405020304" pitchFamily="18" charset="0"/>
@@ -6085,7 +6064,7 @@
                 </a:spcAft>
               </a:pPr>
               <a:r>
-                <a:rPr lang="en-US" sz="1200" b="1" kern="100" dirty="0" smtClean="0">
+                <a:rPr lang="en-US" sz="1200" b="1" kern="100" dirty="0">
                   <a:effectLst/>
                   <a:ea typeface="新細明體" panose="02020500000000000000" pitchFamily="18" charset="-120"/>
                   <a:cs typeface="Times New Roman" panose="02020603050405020304" pitchFamily="18" charset="0"/>
@@ -6562,7 +6541,7 @@
                 </a:spcAft>
               </a:pPr>
               <a:r>
-                <a:rPr lang="en-US" sz="1200" kern="100" dirty="0" smtClean="0">
+                <a:rPr lang="en-US" sz="1200" kern="100" dirty="0">
                   <a:effectLst/>
                   <a:ea typeface="新細明體" panose="02020500000000000000" pitchFamily="18" charset="-120"/>
                   <a:cs typeface="Times New Roman" panose="02020603050405020304" pitchFamily="18" charset="0"/>
@@ -6570,7 +6549,7 @@
                 <a:t>                                       </a:t>
               </a:r>
               <a:r>
-                <a:rPr lang="zh-TW" altLang="en-US" sz="1200" kern="100" dirty="0" smtClean="0">
+                <a:rPr lang="zh-TW" altLang="en-US" sz="1200" kern="100" dirty="0">
                   <a:effectLst/>
                   <a:ea typeface="新細明體" panose="02020500000000000000" pitchFamily="18" charset="-120"/>
                   <a:cs typeface="Times New Roman" panose="02020603050405020304" pitchFamily="18" charset="0"/>
@@ -6643,7 +6622,7 @@
                   </a:spcAft>
                 </a:pPr>
                 <a:r>
-                  <a:rPr lang="zh-TW" altLang="en-US" sz="1200" kern="100" dirty="0" smtClean="0">
+                  <a:rPr lang="zh-TW" altLang="en-US" sz="1200" kern="100" dirty="0">
                     <a:effectLst/>
                     <a:ea typeface="新細明體" panose="02020500000000000000" pitchFamily="18" charset="-120"/>
                     <a:cs typeface="Times New Roman" panose="02020603050405020304" pitchFamily="18" charset="0"/>
@@ -6759,7 +6738,7 @@
                   </a:spcAft>
                 </a:pPr>
                 <a:r>
-                  <a:rPr lang="zh-TW" altLang="en-US" sz="1200" kern="100" dirty="0" smtClean="0">
+                  <a:rPr lang="zh-TW" altLang="en-US" sz="1200" kern="100" dirty="0">
                     <a:effectLst/>
                     <a:ea typeface="新細明體" panose="02020500000000000000" pitchFamily="18" charset="-120"/>
                     <a:cs typeface="Times New Roman" panose="02020603050405020304" pitchFamily="18" charset="0"/>
@@ -7115,13 +7094,13 @@
               </a:spcAft>
             </a:pPr>
             <a:r>
-              <a:rPr lang="en-US" altLang="zh-TW" sz="1200" kern="100" dirty="0" smtClean="0">
+              <a:rPr lang="en-US" altLang="zh-TW" sz="1200" kern="100" dirty="0">
                 <a:cs typeface="Times New Roman" panose="02020603050405020304" pitchFamily="18" charset="0"/>
               </a:rPr>
               <a:t>Statements</a:t>
             </a:r>
             <a:r>
-              <a:rPr lang="zh-TW" altLang="en-US" sz="1200" kern="100" dirty="0" smtClean="0">
+              <a:rPr lang="zh-TW" altLang="en-US" sz="1200" kern="100" dirty="0">
                 <a:cs typeface="Times New Roman" panose="02020603050405020304" pitchFamily="18" charset="0"/>
               </a:rPr>
               <a:t>區塊</a:t>
@@ -7192,7 +7171,7 @@
                 </a:spcAft>
               </a:pPr>
               <a:r>
-                <a:rPr lang="zh-TW" altLang="en-US" sz="1000" kern="100" dirty="0" smtClean="0">
+                <a:rPr lang="zh-TW" altLang="en-US" sz="1000" kern="100" dirty="0">
                   <a:effectLst/>
                   <a:ea typeface="新細明體" panose="02020500000000000000" pitchFamily="18" charset="-120"/>
                   <a:cs typeface="Times New Roman" panose="02020603050405020304" pitchFamily="18" charset="0"/>
@@ -7561,7 +7540,7 @@
                 </a:spcAft>
               </a:pPr>
               <a:r>
-                <a:rPr lang="en-US" altLang="zh-TW" sz="1000" kern="100" dirty="0" smtClean="0">
+                <a:rPr lang="en-US" altLang="zh-TW" sz="1000" kern="100" dirty="0">
                   <a:effectLst/>
                   <a:ea typeface="新細明體" panose="02020500000000000000" pitchFamily="18" charset="-120"/>
                   <a:cs typeface="Times New Roman" panose="02020603050405020304" pitchFamily="18" charset="0"/>
@@ -7569,7 +7548,7 @@
                 <a:t>AI</a:t>
               </a:r>
               <a:r>
-                <a:rPr lang="zh-TW" altLang="en-US" sz="1000" kern="100" dirty="0" smtClean="0">
+                <a:rPr lang="zh-TW" altLang="en-US" sz="1000" kern="100" dirty="0">
                   <a:effectLst/>
                   <a:ea typeface="新細明體" panose="02020500000000000000" pitchFamily="18" charset="-120"/>
                   <a:cs typeface="Times New Roman" panose="02020603050405020304" pitchFamily="18" charset="0"/>
@@ -7577,7 +7556,7 @@
                 <a:t>識別模式切換為</a:t>
               </a:r>
               <a:r>
-                <a:rPr lang="en-US" altLang="zh-TW" sz="1000" kern="100" dirty="0" smtClean="0">
+                <a:rPr lang="en-US" altLang="zh-TW" sz="1000" kern="100" dirty="0">
                   <a:effectLst/>
                   <a:ea typeface="新細明體" panose="02020500000000000000" pitchFamily="18" charset="-120"/>
                   <a:cs typeface="Times New Roman" panose="02020603050405020304" pitchFamily="18" charset="0"/>
@@ -8108,7 +8087,7 @@
                 </a:spcAft>
               </a:pPr>
               <a:r>
-                <a:rPr lang="en-US" altLang="zh-TW" sz="1000" kern="100" dirty="0" smtClean="0">
+                <a:rPr lang="en-US" altLang="zh-TW" sz="1000" kern="100" dirty="0">
                   <a:effectLst/>
                   <a:ea typeface="新細明體" panose="02020500000000000000" pitchFamily="18" charset="-120"/>
                   <a:cs typeface="Times New Roman" panose="02020603050405020304" pitchFamily="18" charset="0"/>
@@ -8116,7 +8095,7 @@
                 <a:t>                     </a:t>
               </a:r>
               <a:r>
-                <a:rPr lang="zh-TW" altLang="en-US" sz="1000" kern="100" dirty="0" smtClean="0">
+                <a:rPr lang="zh-TW" altLang="en-US" sz="1000" kern="100" dirty="0">
                   <a:ea typeface="新細明體" panose="02020500000000000000" pitchFamily="18" charset="-120"/>
                   <a:cs typeface="Times New Roman" panose="02020603050405020304" pitchFamily="18" charset="0"/>
                 </a:rPr>
@@ -8188,7 +8167,7 @@
                   </a:spcAft>
                 </a:pPr>
                 <a:r>
-                  <a:rPr lang="zh-TW" altLang="en-US" sz="1050" kern="100" dirty="0" smtClean="0">
+                  <a:rPr lang="zh-TW" altLang="en-US" sz="1050" kern="100" dirty="0">
                     <a:effectLst/>
                     <a:ea typeface="新細明體" panose="02020500000000000000" pitchFamily="18" charset="-120"/>
                     <a:cs typeface="Times New Roman" panose="02020603050405020304" pitchFamily="18" charset="0"/>
@@ -8558,7 +8537,7 @@
                 </a:spcAft>
               </a:pPr>
               <a:r>
-                <a:rPr lang="zh-TW" altLang="en-US" sz="1000" kern="100" dirty="0" smtClean="0">
+                <a:rPr lang="zh-TW" altLang="en-US" sz="1000" kern="100" dirty="0">
                   <a:ea typeface="新細明體" panose="02020500000000000000" pitchFamily="18" charset="-120"/>
                   <a:cs typeface="Times New Roman" panose="02020603050405020304" pitchFamily="18" charset="0"/>
                 </a:rPr>
@@ -8630,7 +8609,7 @@
                   </a:spcAft>
                 </a:pPr>
                 <a:r>
-                  <a:rPr lang="zh-TW" altLang="en-US" sz="1000" kern="100" dirty="0" smtClean="0">
+                  <a:rPr lang="zh-TW" altLang="en-US" sz="1000" kern="100" dirty="0">
                     <a:ea typeface="新細明體" panose="02020500000000000000" pitchFamily="18" charset="-120"/>
                     <a:cs typeface="Times New Roman" panose="02020603050405020304" pitchFamily="18" charset="0"/>
                   </a:rPr>
@@ -9075,7 +9054,7 @@
               </a:spcAft>
             </a:pPr>
             <a:r>
-              <a:rPr lang="en-US" altLang="zh-TW" sz="1200" kern="100" dirty="0" smtClean="0">
+              <a:rPr lang="en-US" altLang="zh-TW" sz="1200" kern="100" dirty="0">
                 <a:effectLst/>
                 <a:ea typeface="新細明體" panose="02020500000000000000" pitchFamily="18" charset="-120"/>
                 <a:cs typeface="Times New Roman" panose="02020603050405020304" pitchFamily="18" charset="0"/>
@@ -9083,7 +9062,7 @@
               <a:t>A*</a:t>
             </a:r>
             <a:r>
-              <a:rPr lang="zh-TW" altLang="en-US" sz="1200" kern="100" dirty="0" smtClean="0">
+              <a:rPr lang="zh-TW" altLang="en-US" sz="1200" kern="100" dirty="0">
                 <a:ea typeface="新細明體" panose="02020500000000000000" pitchFamily="18" charset="-120"/>
                 <a:cs typeface="Times New Roman" panose="02020603050405020304" pitchFamily="18" charset="0"/>
               </a:rPr>
@@ -10253,7 +10232,7 @@
                   </a:spcAft>
                 </a:pPr>
                 <a:r>
-                  <a:rPr lang="zh-TW" altLang="en-US" sz="1000" dirty="0" smtClean="0">
+                  <a:rPr lang="zh-TW" altLang="en-US" sz="1000" dirty="0">
                     <a:solidFill>
                       <a:srgbClr val="000000"/>
                     </a:solidFill>
@@ -10626,7 +10605,7 @@
                 </a:spcAft>
               </a:pPr>
               <a:r>
-                <a:rPr lang="zh-TW" altLang="en-US" sz="1200" kern="100" dirty="0" smtClean="0">
+                <a:rPr lang="zh-TW" altLang="en-US" sz="1200" kern="100" dirty="0">
                   <a:ea typeface="新細明體" panose="02020500000000000000" pitchFamily="18" charset="-120"/>
                   <a:cs typeface="Times New Roman" panose="02020603050405020304" pitchFamily="18" charset="0"/>
                 </a:rPr>
@@ -10773,7 +10752,7 @@
                 </a:spcAft>
               </a:pPr>
               <a:r>
-                <a:rPr lang="en-US" sz="1200" kern="100" dirty="0" smtClean="0">
+                <a:rPr lang="en-US" sz="1200" kern="100" dirty="0">
                   <a:solidFill>
                     <a:srgbClr val="FFFFFF"/>
                   </a:solidFill>
@@ -11103,21 +11082,21 @@
                 </a:spcAft>
               </a:pPr>
               <a:r>
-                <a:rPr lang="zh-TW" altLang="en-US" sz="1000" kern="100" dirty="0" smtClean="0">
+                <a:rPr lang="zh-TW" altLang="en-US" sz="1000" kern="100" dirty="0">
                   <a:ea typeface="新細明體" panose="02020500000000000000" pitchFamily="18" charset="-120"/>
                   <a:cs typeface="Times New Roman" panose="02020603050405020304" pitchFamily="18" charset="0"/>
                 </a:rPr>
                 <a:t>讀取</a:t>
               </a:r>
               <a:r>
-                <a:rPr lang="en-US" altLang="zh-TW" sz="1000" kern="100" dirty="0" smtClean="0">
+                <a:rPr lang="en-US" altLang="zh-TW" sz="1000" kern="100" dirty="0">
                   <a:ea typeface="新細明體" panose="02020500000000000000" pitchFamily="18" charset="-120"/>
                   <a:cs typeface="Times New Roman" panose="02020603050405020304" pitchFamily="18" charset="0"/>
                 </a:rPr>
                 <a:t>Google</a:t>
               </a:r>
               <a:r>
-                <a:rPr lang="zh-TW" altLang="en-US" sz="1000" kern="100" dirty="0" smtClean="0">
+                <a:rPr lang="zh-TW" altLang="en-US" sz="1000" kern="100" dirty="0">
                   <a:ea typeface="新細明體" panose="02020500000000000000" pitchFamily="18" charset="-120"/>
                   <a:cs typeface="Times New Roman" panose="02020603050405020304" pitchFamily="18" charset="0"/>
                 </a:rPr>
@@ -11264,7 +11243,7 @@
                 </a:spcAft>
               </a:pPr>
               <a:r>
-                <a:rPr lang="en-US" sz="1200" kern="100" dirty="0" smtClean="0">
+                <a:rPr lang="en-US" sz="1200" kern="100" dirty="0">
                   <a:solidFill>
                     <a:srgbClr val="FFFFFF"/>
                   </a:solidFill>
@@ -11415,7 +11394,7 @@
                 </a:spcAft>
               </a:pPr>
               <a:r>
-                <a:rPr lang="en-US" sz="1200" kern="100" dirty="0" smtClean="0">
+                <a:rPr lang="en-US" sz="1200" kern="100" dirty="0">
                   <a:solidFill>
                     <a:srgbClr val="FFFFFF"/>
                   </a:solidFill>
@@ -11426,7 +11405,7 @@
                 <a:t>“</a:t>
               </a:r>
               <a:r>
-                <a:rPr lang="zh-TW" altLang="en-US" sz="1200" kern="100" dirty="0" smtClean="0">
+                <a:rPr lang="zh-TW" altLang="en-US" sz="1200" kern="100" dirty="0">
                   <a:solidFill>
                     <a:srgbClr val="FFFFFF"/>
                   </a:solidFill>
@@ -11436,7 +11415,7 @@
                 <a:t>陳大春</a:t>
               </a:r>
               <a:r>
-                <a:rPr lang="en-US" sz="1200" kern="100" dirty="0" smtClean="0">
+                <a:rPr lang="en-US" sz="1200" kern="100" dirty="0">
                   <a:solidFill>
                     <a:srgbClr val="FFFFFF"/>
                   </a:solidFill>
@@ -11752,7 +11731,7 @@
               </a:spcAft>
             </a:pPr>
             <a:r>
-              <a:rPr lang="en-US" altLang="zh-TW" sz="1000" kern="100" dirty="0" smtClean="0">
+              <a:rPr lang="en-US" altLang="zh-TW" sz="1000" kern="100" dirty="0">
                 <a:effectLst/>
                 <a:ea typeface="新細明體" panose="02020500000000000000" pitchFamily="18" charset="-120"/>
                 <a:cs typeface="Times New Roman" panose="02020603050405020304" pitchFamily="18" charset="0"/>
@@ -11760,7 +11739,7 @@
               <a:t>AI</a:t>
             </a:r>
             <a:r>
-              <a:rPr lang="zh-TW" altLang="en-US" sz="1000" kern="100" dirty="0" smtClean="0">
+              <a:rPr lang="zh-TW" altLang="en-US" sz="1000" kern="100" dirty="0">
                 <a:effectLst/>
                 <a:ea typeface="新細明體" panose="02020500000000000000" pitchFamily="18" charset="-120"/>
                 <a:cs typeface="Times New Roman" panose="02020603050405020304" pitchFamily="18" charset="0"/>
@@ -11768,7 +11747,7 @@
               <a:t>識別模式切換為</a:t>
             </a:r>
             <a:r>
-              <a:rPr lang="en-US" altLang="zh-TW" sz="1000" kern="100" dirty="0" smtClean="0">
+              <a:rPr lang="en-US" altLang="zh-TW" sz="1000" kern="100" dirty="0">
                 <a:effectLst/>
                 <a:ea typeface="新細明體" panose="02020500000000000000" pitchFamily="18" charset="-120"/>
                 <a:cs typeface="Times New Roman" panose="02020603050405020304" pitchFamily="18" charset="0"/>
@@ -12080,34 +12059,28 @@
               </a:spcAft>
             </a:pPr>
             <a:r>
-              <a:rPr lang="en-US" altLang="zh-TW" sz="1000" kern="100" dirty="0" smtClean="0">
+              <a:rPr lang="en-US" altLang="zh-TW" sz="1000" kern="100" dirty="0">
                 <a:cs typeface="Times New Roman" panose="02020603050405020304" pitchFamily="18" charset="0"/>
               </a:rPr>
               <a:t>[</a:t>
             </a:r>
             <a:r>
-              <a:rPr lang="zh-TW" altLang="en-US" sz="1000" kern="100" dirty="0" smtClean="0">
+              <a:rPr lang="zh-TW" altLang="en-US" sz="1000" kern="100" dirty="0">
                 <a:cs typeface="Times New Roman" panose="02020603050405020304" pitchFamily="18" charset="0"/>
               </a:rPr>
               <a:t>傳送</a:t>
             </a:r>
             <a:r>
-              <a:rPr lang="en-US" altLang="zh-TW" sz="1000" kern="100" dirty="0" smtClean="0">
+              <a:rPr lang="en-US" altLang="zh-TW" sz="1000" kern="100" dirty="0">
                 <a:cs typeface="Times New Roman" panose="02020603050405020304" pitchFamily="18" charset="0"/>
               </a:rPr>
               <a:t>]</a:t>
             </a:r>
             <a:r>
-              <a:rPr lang="zh-TW" altLang="en-US" sz="1000" kern="100" dirty="0" smtClean="0">
-                <a:cs typeface="Times New Roman" panose="02020603050405020304" pitchFamily="18" charset="0"/>
-              </a:rPr>
-              <a:t>訊息</a:t>
-            </a:r>
-            <a:r>
               <a:rPr lang="zh-TW" altLang="en-US" sz="1000" kern="100" dirty="0">
                 <a:cs typeface="Times New Roman" panose="02020603050405020304" pitchFamily="18" charset="0"/>
               </a:rPr>
-              <a:t>至</a:t>
+              <a:t>訊息至</a:t>
             </a:r>
             <a:r>
               <a:rPr lang="en-US" altLang="zh-TW" sz="1000" kern="100" dirty="0">
@@ -12141,6 +12114,592 @@
           </a:p>
         </p:txBody>
       </p:sp>
+      <p:grpSp>
+        <p:nvGrpSpPr>
+          <p:cNvPr id="5" name="群組 4">
+            <a:extLst>
+              <a:ext uri="{FF2B5EF4-FFF2-40B4-BE49-F238E27FC236}">
+                <a16:creationId xmlns:a16="http://schemas.microsoft.com/office/drawing/2014/main" id="{657FB28A-AD22-40A1-8C2B-781BEABE24EA}"/>
+              </a:ext>
+            </a:extLst>
+          </p:cNvPr>
+          <p:cNvGrpSpPr/>
+          <p:nvPr/>
+        </p:nvGrpSpPr>
+        <p:grpSpPr>
+          <a:xfrm>
+            <a:off x="2446242" y="1969175"/>
+            <a:ext cx="883189" cy="263525"/>
+            <a:chOff x="2446242" y="1969175"/>
+            <a:chExt cx="883189" cy="263525"/>
+          </a:xfrm>
+        </p:grpSpPr>
+        <p:sp>
+          <p:nvSpPr>
+            <p:cNvPr id="80" name="圓角矩形 48">
+              <a:extLst>
+                <a:ext uri="{FF2B5EF4-FFF2-40B4-BE49-F238E27FC236}">
+                  <a16:creationId xmlns:a16="http://schemas.microsoft.com/office/drawing/2014/main" id="{8E9195B3-C462-4D6E-BE7A-CB5032C12816}"/>
+                </a:ext>
+              </a:extLst>
+            </p:cNvPr>
+            <p:cNvSpPr/>
+            <p:nvPr/>
+          </p:nvSpPr>
+          <p:spPr>
+            <a:xfrm>
+              <a:off x="2446242" y="1969175"/>
+              <a:ext cx="883189" cy="263525"/>
+            </a:xfrm>
+            <a:custGeom>
+              <a:avLst/>
+              <a:gdLst>
+                <a:gd name="connsiteX0" fmla="*/ 0 w 4506685"/>
+                <a:gd name="connsiteY0" fmla="*/ 62594 h 375557"/>
+                <a:gd name="connsiteX1" fmla="*/ 62594 w 4506685"/>
+                <a:gd name="connsiteY1" fmla="*/ 0 h 375557"/>
+                <a:gd name="connsiteX2" fmla="*/ 4444091 w 4506685"/>
+                <a:gd name="connsiteY2" fmla="*/ 0 h 375557"/>
+                <a:gd name="connsiteX3" fmla="*/ 4506685 w 4506685"/>
+                <a:gd name="connsiteY3" fmla="*/ 62594 h 375557"/>
+                <a:gd name="connsiteX4" fmla="*/ 4506685 w 4506685"/>
+                <a:gd name="connsiteY4" fmla="*/ 312963 h 375557"/>
+                <a:gd name="connsiteX5" fmla="*/ 4444091 w 4506685"/>
+                <a:gd name="connsiteY5" fmla="*/ 375557 h 375557"/>
+                <a:gd name="connsiteX6" fmla="*/ 62594 w 4506685"/>
+                <a:gd name="connsiteY6" fmla="*/ 375557 h 375557"/>
+                <a:gd name="connsiteX7" fmla="*/ 0 w 4506685"/>
+                <a:gd name="connsiteY7" fmla="*/ 312963 h 375557"/>
+                <a:gd name="connsiteX8" fmla="*/ 0 w 4506685"/>
+                <a:gd name="connsiteY8" fmla="*/ 62594 h 375557"/>
+                <a:gd name="connsiteX0" fmla="*/ 0 w 4506685"/>
+                <a:gd name="connsiteY0" fmla="*/ 62594 h 375557"/>
+                <a:gd name="connsiteX1" fmla="*/ 62594 w 4506685"/>
+                <a:gd name="connsiteY1" fmla="*/ 0 h 375557"/>
+                <a:gd name="connsiteX2" fmla="*/ 4444091 w 4506685"/>
+                <a:gd name="connsiteY2" fmla="*/ 0 h 375557"/>
+                <a:gd name="connsiteX3" fmla="*/ 4506685 w 4506685"/>
+                <a:gd name="connsiteY3" fmla="*/ 62594 h 375557"/>
+                <a:gd name="connsiteX4" fmla="*/ 4506685 w 4506685"/>
+                <a:gd name="connsiteY4" fmla="*/ 312963 h 375557"/>
+                <a:gd name="connsiteX5" fmla="*/ 4444091 w 4506685"/>
+                <a:gd name="connsiteY5" fmla="*/ 375557 h 375557"/>
+                <a:gd name="connsiteX6" fmla="*/ 62594 w 4506685"/>
+                <a:gd name="connsiteY6" fmla="*/ 375557 h 375557"/>
+                <a:gd name="connsiteX7" fmla="*/ 0 w 4506685"/>
+                <a:gd name="connsiteY7" fmla="*/ 312963 h 375557"/>
+                <a:gd name="connsiteX8" fmla="*/ 5443 w 4506685"/>
+                <a:gd name="connsiteY8" fmla="*/ 163286 h 375557"/>
+                <a:gd name="connsiteX9" fmla="*/ 0 w 4506685"/>
+                <a:gd name="connsiteY9" fmla="*/ 62594 h 375557"/>
+                <a:gd name="connsiteX0" fmla="*/ 310249 w 4816934"/>
+                <a:gd name="connsiteY0" fmla="*/ 62594 h 375557"/>
+                <a:gd name="connsiteX1" fmla="*/ 372843 w 4816934"/>
+                <a:gd name="connsiteY1" fmla="*/ 0 h 375557"/>
+                <a:gd name="connsiteX2" fmla="*/ 4754340 w 4816934"/>
+                <a:gd name="connsiteY2" fmla="*/ 0 h 375557"/>
+                <a:gd name="connsiteX3" fmla="*/ 4816934 w 4816934"/>
+                <a:gd name="connsiteY3" fmla="*/ 62594 h 375557"/>
+                <a:gd name="connsiteX4" fmla="*/ 4816934 w 4816934"/>
+                <a:gd name="connsiteY4" fmla="*/ 312963 h 375557"/>
+                <a:gd name="connsiteX5" fmla="*/ 4754340 w 4816934"/>
+                <a:gd name="connsiteY5" fmla="*/ 375557 h 375557"/>
+                <a:gd name="connsiteX6" fmla="*/ 372843 w 4816934"/>
+                <a:gd name="connsiteY6" fmla="*/ 375557 h 375557"/>
+                <a:gd name="connsiteX7" fmla="*/ 310249 w 4816934"/>
+                <a:gd name="connsiteY7" fmla="*/ 312963 h 375557"/>
+                <a:gd name="connsiteX8" fmla="*/ 0 w 4816934"/>
+                <a:gd name="connsiteY8" fmla="*/ 146945 h 375557"/>
+                <a:gd name="connsiteX9" fmla="*/ 310249 w 4816934"/>
+                <a:gd name="connsiteY9" fmla="*/ 62594 h 375557"/>
+                <a:gd name="connsiteX0" fmla="*/ 310249 w 4816934"/>
+                <a:gd name="connsiteY0" fmla="*/ 62594 h 375557"/>
+                <a:gd name="connsiteX1" fmla="*/ 372843 w 4816934"/>
+                <a:gd name="connsiteY1" fmla="*/ 0 h 375557"/>
+                <a:gd name="connsiteX2" fmla="*/ 4754340 w 4816934"/>
+                <a:gd name="connsiteY2" fmla="*/ 0 h 375557"/>
+                <a:gd name="connsiteX3" fmla="*/ 4816934 w 4816934"/>
+                <a:gd name="connsiteY3" fmla="*/ 62594 h 375557"/>
+                <a:gd name="connsiteX4" fmla="*/ 4816934 w 4816934"/>
+                <a:gd name="connsiteY4" fmla="*/ 312963 h 375557"/>
+                <a:gd name="connsiteX5" fmla="*/ 4754340 w 4816934"/>
+                <a:gd name="connsiteY5" fmla="*/ 375557 h 375557"/>
+                <a:gd name="connsiteX6" fmla="*/ 372843 w 4816934"/>
+                <a:gd name="connsiteY6" fmla="*/ 375557 h 375557"/>
+                <a:gd name="connsiteX7" fmla="*/ 310249 w 4816934"/>
+                <a:gd name="connsiteY7" fmla="*/ 312963 h 375557"/>
+                <a:gd name="connsiteX8" fmla="*/ 190500 w 4816934"/>
+                <a:gd name="connsiteY8" fmla="*/ 261257 h 375557"/>
+                <a:gd name="connsiteX9" fmla="*/ 0 w 4816934"/>
+                <a:gd name="connsiteY9" fmla="*/ 146945 h 375557"/>
+                <a:gd name="connsiteX10" fmla="*/ 310249 w 4816934"/>
+                <a:gd name="connsiteY10" fmla="*/ 62594 h 375557"/>
+                <a:gd name="connsiteX0" fmla="*/ 321154 w 4827839"/>
+                <a:gd name="connsiteY0" fmla="*/ 62594 h 375557"/>
+                <a:gd name="connsiteX1" fmla="*/ 383748 w 4827839"/>
+                <a:gd name="connsiteY1" fmla="*/ 0 h 375557"/>
+                <a:gd name="connsiteX2" fmla="*/ 4765245 w 4827839"/>
+                <a:gd name="connsiteY2" fmla="*/ 0 h 375557"/>
+                <a:gd name="connsiteX3" fmla="*/ 4827839 w 4827839"/>
+                <a:gd name="connsiteY3" fmla="*/ 62594 h 375557"/>
+                <a:gd name="connsiteX4" fmla="*/ 4827839 w 4827839"/>
+                <a:gd name="connsiteY4" fmla="*/ 312963 h 375557"/>
+                <a:gd name="connsiteX5" fmla="*/ 4765245 w 4827839"/>
+                <a:gd name="connsiteY5" fmla="*/ 375557 h 375557"/>
+                <a:gd name="connsiteX6" fmla="*/ 383748 w 4827839"/>
+                <a:gd name="connsiteY6" fmla="*/ 375557 h 375557"/>
+                <a:gd name="connsiteX7" fmla="*/ 321154 w 4827839"/>
+                <a:gd name="connsiteY7" fmla="*/ 312963 h 375557"/>
+                <a:gd name="connsiteX8" fmla="*/ 0 w 4827839"/>
+                <a:gd name="connsiteY8" fmla="*/ 321173 h 375557"/>
+                <a:gd name="connsiteX9" fmla="*/ 10905 w 4827839"/>
+                <a:gd name="connsiteY9" fmla="*/ 146945 h 375557"/>
+                <a:gd name="connsiteX10" fmla="*/ 321154 w 4827839"/>
+                <a:gd name="connsiteY10" fmla="*/ 62594 h 375557"/>
+                <a:gd name="connsiteX0" fmla="*/ 321154 w 4827839"/>
+                <a:gd name="connsiteY0" fmla="*/ 62594 h 375557"/>
+                <a:gd name="connsiteX1" fmla="*/ 383748 w 4827839"/>
+                <a:gd name="connsiteY1" fmla="*/ 0 h 375557"/>
+                <a:gd name="connsiteX2" fmla="*/ 4765245 w 4827839"/>
+                <a:gd name="connsiteY2" fmla="*/ 0 h 375557"/>
+                <a:gd name="connsiteX3" fmla="*/ 4827839 w 4827839"/>
+                <a:gd name="connsiteY3" fmla="*/ 62594 h 375557"/>
+                <a:gd name="connsiteX4" fmla="*/ 4827839 w 4827839"/>
+                <a:gd name="connsiteY4" fmla="*/ 312963 h 375557"/>
+                <a:gd name="connsiteX5" fmla="*/ 4765245 w 4827839"/>
+                <a:gd name="connsiteY5" fmla="*/ 375557 h 375557"/>
+                <a:gd name="connsiteX6" fmla="*/ 383748 w 4827839"/>
+                <a:gd name="connsiteY6" fmla="*/ 375557 h 375557"/>
+                <a:gd name="connsiteX7" fmla="*/ 321154 w 4827839"/>
+                <a:gd name="connsiteY7" fmla="*/ 312963 h 375557"/>
+                <a:gd name="connsiteX8" fmla="*/ 0 w 4827839"/>
+                <a:gd name="connsiteY8" fmla="*/ 321173 h 375557"/>
+                <a:gd name="connsiteX9" fmla="*/ 38122 w 4827839"/>
+                <a:gd name="connsiteY9" fmla="*/ 97924 h 375557"/>
+                <a:gd name="connsiteX10" fmla="*/ 321154 w 4827839"/>
+                <a:gd name="connsiteY10" fmla="*/ 62594 h 375557"/>
+                <a:gd name="connsiteX0" fmla="*/ 283032 w 4789717"/>
+                <a:gd name="connsiteY0" fmla="*/ 62594 h 375557"/>
+                <a:gd name="connsiteX1" fmla="*/ 345626 w 4789717"/>
+                <a:gd name="connsiteY1" fmla="*/ 0 h 375557"/>
+                <a:gd name="connsiteX2" fmla="*/ 4727123 w 4789717"/>
+                <a:gd name="connsiteY2" fmla="*/ 0 h 375557"/>
+                <a:gd name="connsiteX3" fmla="*/ 4789717 w 4789717"/>
+                <a:gd name="connsiteY3" fmla="*/ 62594 h 375557"/>
+                <a:gd name="connsiteX4" fmla="*/ 4789717 w 4789717"/>
+                <a:gd name="connsiteY4" fmla="*/ 312963 h 375557"/>
+                <a:gd name="connsiteX5" fmla="*/ 4727123 w 4789717"/>
+                <a:gd name="connsiteY5" fmla="*/ 375557 h 375557"/>
+                <a:gd name="connsiteX6" fmla="*/ 345626 w 4789717"/>
+                <a:gd name="connsiteY6" fmla="*/ 375557 h 375557"/>
+                <a:gd name="connsiteX7" fmla="*/ 283032 w 4789717"/>
+                <a:gd name="connsiteY7" fmla="*/ 312963 h 375557"/>
+                <a:gd name="connsiteX8" fmla="*/ 21756 w 4789717"/>
+                <a:gd name="connsiteY8" fmla="*/ 315726 h 375557"/>
+                <a:gd name="connsiteX9" fmla="*/ 0 w 4789717"/>
+                <a:gd name="connsiteY9" fmla="*/ 97924 h 375557"/>
+                <a:gd name="connsiteX10" fmla="*/ 283032 w 4789717"/>
+                <a:gd name="connsiteY10" fmla="*/ 62594 h 375557"/>
+                <a:gd name="connsiteX0" fmla="*/ 261276 w 4767961"/>
+                <a:gd name="connsiteY0" fmla="*/ 62594 h 375557"/>
+                <a:gd name="connsiteX1" fmla="*/ 323870 w 4767961"/>
+                <a:gd name="connsiteY1" fmla="*/ 0 h 375557"/>
+                <a:gd name="connsiteX2" fmla="*/ 4705367 w 4767961"/>
+                <a:gd name="connsiteY2" fmla="*/ 0 h 375557"/>
+                <a:gd name="connsiteX3" fmla="*/ 4767961 w 4767961"/>
+                <a:gd name="connsiteY3" fmla="*/ 62594 h 375557"/>
+                <a:gd name="connsiteX4" fmla="*/ 4767961 w 4767961"/>
+                <a:gd name="connsiteY4" fmla="*/ 312963 h 375557"/>
+                <a:gd name="connsiteX5" fmla="*/ 4705367 w 4767961"/>
+                <a:gd name="connsiteY5" fmla="*/ 375557 h 375557"/>
+                <a:gd name="connsiteX6" fmla="*/ 323870 w 4767961"/>
+                <a:gd name="connsiteY6" fmla="*/ 375557 h 375557"/>
+                <a:gd name="connsiteX7" fmla="*/ 261276 w 4767961"/>
+                <a:gd name="connsiteY7" fmla="*/ 312963 h 375557"/>
+                <a:gd name="connsiteX8" fmla="*/ 0 w 4767961"/>
+                <a:gd name="connsiteY8" fmla="*/ 315726 h 375557"/>
+                <a:gd name="connsiteX9" fmla="*/ 92557 w 4767961"/>
+                <a:gd name="connsiteY9" fmla="*/ 81583 h 375557"/>
+                <a:gd name="connsiteX10" fmla="*/ 261276 w 4767961"/>
+                <a:gd name="connsiteY10" fmla="*/ 62594 h 375557"/>
+                <a:gd name="connsiteX0" fmla="*/ 168719 w 4675404"/>
+                <a:gd name="connsiteY0" fmla="*/ 62594 h 375557"/>
+                <a:gd name="connsiteX1" fmla="*/ 231313 w 4675404"/>
+                <a:gd name="connsiteY1" fmla="*/ 0 h 375557"/>
+                <a:gd name="connsiteX2" fmla="*/ 4612810 w 4675404"/>
+                <a:gd name="connsiteY2" fmla="*/ 0 h 375557"/>
+                <a:gd name="connsiteX3" fmla="*/ 4675404 w 4675404"/>
+                <a:gd name="connsiteY3" fmla="*/ 62594 h 375557"/>
+                <a:gd name="connsiteX4" fmla="*/ 4675404 w 4675404"/>
+                <a:gd name="connsiteY4" fmla="*/ 312963 h 375557"/>
+                <a:gd name="connsiteX5" fmla="*/ 4612810 w 4675404"/>
+                <a:gd name="connsiteY5" fmla="*/ 375557 h 375557"/>
+                <a:gd name="connsiteX6" fmla="*/ 231313 w 4675404"/>
+                <a:gd name="connsiteY6" fmla="*/ 375557 h 375557"/>
+                <a:gd name="connsiteX7" fmla="*/ 168719 w 4675404"/>
+                <a:gd name="connsiteY7" fmla="*/ 312963 h 375557"/>
+                <a:gd name="connsiteX8" fmla="*/ 59855 w 4675404"/>
+                <a:gd name="connsiteY8" fmla="*/ 315726 h 375557"/>
+                <a:gd name="connsiteX9" fmla="*/ 0 w 4675404"/>
+                <a:gd name="connsiteY9" fmla="*/ 81583 h 375557"/>
+                <a:gd name="connsiteX10" fmla="*/ 168719 w 4675404"/>
+                <a:gd name="connsiteY10" fmla="*/ 62594 h 375557"/>
+                <a:gd name="connsiteX0" fmla="*/ 119183 w 4625868"/>
+                <a:gd name="connsiteY0" fmla="*/ 62594 h 375557"/>
+                <a:gd name="connsiteX1" fmla="*/ 181777 w 4625868"/>
+                <a:gd name="connsiteY1" fmla="*/ 0 h 375557"/>
+                <a:gd name="connsiteX2" fmla="*/ 4563274 w 4625868"/>
+                <a:gd name="connsiteY2" fmla="*/ 0 h 375557"/>
+                <a:gd name="connsiteX3" fmla="*/ 4625868 w 4625868"/>
+                <a:gd name="connsiteY3" fmla="*/ 62594 h 375557"/>
+                <a:gd name="connsiteX4" fmla="*/ 4625868 w 4625868"/>
+                <a:gd name="connsiteY4" fmla="*/ 312963 h 375557"/>
+                <a:gd name="connsiteX5" fmla="*/ 4563274 w 4625868"/>
+                <a:gd name="connsiteY5" fmla="*/ 375557 h 375557"/>
+                <a:gd name="connsiteX6" fmla="*/ 181777 w 4625868"/>
+                <a:gd name="connsiteY6" fmla="*/ 375557 h 375557"/>
+                <a:gd name="connsiteX7" fmla="*/ 119183 w 4625868"/>
+                <a:gd name="connsiteY7" fmla="*/ 312963 h 375557"/>
+                <a:gd name="connsiteX8" fmla="*/ 10319 w 4625868"/>
+                <a:gd name="connsiteY8" fmla="*/ 315726 h 375557"/>
+                <a:gd name="connsiteX9" fmla="*/ 0 w 4625868"/>
+                <a:gd name="connsiteY9" fmla="*/ 77770 h 375557"/>
+                <a:gd name="connsiteX10" fmla="*/ 119183 w 4625868"/>
+                <a:gd name="connsiteY10" fmla="*/ 62594 h 375557"/>
+                <a:gd name="connsiteX0" fmla="*/ 119183 w 4625868"/>
+                <a:gd name="connsiteY0" fmla="*/ 127411 h 375557"/>
+                <a:gd name="connsiteX1" fmla="*/ 181777 w 4625868"/>
+                <a:gd name="connsiteY1" fmla="*/ 0 h 375557"/>
+                <a:gd name="connsiteX2" fmla="*/ 4563274 w 4625868"/>
+                <a:gd name="connsiteY2" fmla="*/ 0 h 375557"/>
+                <a:gd name="connsiteX3" fmla="*/ 4625868 w 4625868"/>
+                <a:gd name="connsiteY3" fmla="*/ 62594 h 375557"/>
+                <a:gd name="connsiteX4" fmla="*/ 4625868 w 4625868"/>
+                <a:gd name="connsiteY4" fmla="*/ 312963 h 375557"/>
+                <a:gd name="connsiteX5" fmla="*/ 4563274 w 4625868"/>
+                <a:gd name="connsiteY5" fmla="*/ 375557 h 375557"/>
+                <a:gd name="connsiteX6" fmla="*/ 181777 w 4625868"/>
+                <a:gd name="connsiteY6" fmla="*/ 375557 h 375557"/>
+                <a:gd name="connsiteX7" fmla="*/ 119183 w 4625868"/>
+                <a:gd name="connsiteY7" fmla="*/ 312963 h 375557"/>
+                <a:gd name="connsiteX8" fmla="*/ 10319 w 4625868"/>
+                <a:gd name="connsiteY8" fmla="*/ 315726 h 375557"/>
+                <a:gd name="connsiteX9" fmla="*/ 0 w 4625868"/>
+                <a:gd name="connsiteY9" fmla="*/ 77770 h 375557"/>
+                <a:gd name="connsiteX10" fmla="*/ 119183 w 4625868"/>
+                <a:gd name="connsiteY10" fmla="*/ 127411 h 375557"/>
+                <a:gd name="connsiteX0" fmla="*/ 119183 w 4625868"/>
+                <a:gd name="connsiteY0" fmla="*/ 127411 h 375557"/>
+                <a:gd name="connsiteX1" fmla="*/ 181777 w 4625868"/>
+                <a:gd name="connsiteY1" fmla="*/ 0 h 375557"/>
+                <a:gd name="connsiteX2" fmla="*/ 4563274 w 4625868"/>
+                <a:gd name="connsiteY2" fmla="*/ 0 h 375557"/>
+                <a:gd name="connsiteX3" fmla="*/ 4625868 w 4625868"/>
+                <a:gd name="connsiteY3" fmla="*/ 62594 h 375557"/>
+                <a:gd name="connsiteX4" fmla="*/ 4625868 w 4625868"/>
+                <a:gd name="connsiteY4" fmla="*/ 312963 h 375557"/>
+                <a:gd name="connsiteX5" fmla="*/ 4563274 w 4625868"/>
+                <a:gd name="connsiteY5" fmla="*/ 375557 h 375557"/>
+                <a:gd name="connsiteX6" fmla="*/ 181777 w 4625868"/>
+                <a:gd name="connsiteY6" fmla="*/ 375557 h 375557"/>
+                <a:gd name="connsiteX7" fmla="*/ 126803 w 4625868"/>
+                <a:gd name="connsiteY7" fmla="*/ 240520 h 375557"/>
+                <a:gd name="connsiteX8" fmla="*/ 10319 w 4625868"/>
+                <a:gd name="connsiteY8" fmla="*/ 315726 h 375557"/>
+                <a:gd name="connsiteX9" fmla="*/ 0 w 4625868"/>
+                <a:gd name="connsiteY9" fmla="*/ 77770 h 375557"/>
+                <a:gd name="connsiteX10" fmla="*/ 119183 w 4625868"/>
+                <a:gd name="connsiteY10" fmla="*/ 127411 h 375557"/>
+              </a:gdLst>
+              <a:ahLst/>
+              <a:cxnLst>
+                <a:cxn ang="0">
+                  <a:pos x="connsiteX0" y="connsiteY0"/>
+                </a:cxn>
+                <a:cxn ang="0">
+                  <a:pos x="connsiteX1" y="connsiteY1"/>
+                </a:cxn>
+                <a:cxn ang="0">
+                  <a:pos x="connsiteX2" y="connsiteY2"/>
+                </a:cxn>
+                <a:cxn ang="0">
+                  <a:pos x="connsiteX3" y="connsiteY3"/>
+                </a:cxn>
+                <a:cxn ang="0">
+                  <a:pos x="connsiteX4" y="connsiteY4"/>
+                </a:cxn>
+                <a:cxn ang="0">
+                  <a:pos x="connsiteX5" y="connsiteY5"/>
+                </a:cxn>
+                <a:cxn ang="0">
+                  <a:pos x="connsiteX6" y="connsiteY6"/>
+                </a:cxn>
+                <a:cxn ang="0">
+                  <a:pos x="connsiteX7" y="connsiteY7"/>
+                </a:cxn>
+                <a:cxn ang="0">
+                  <a:pos x="connsiteX8" y="connsiteY8"/>
+                </a:cxn>
+                <a:cxn ang="0">
+                  <a:pos x="connsiteX9" y="connsiteY9"/>
+                </a:cxn>
+                <a:cxn ang="0">
+                  <a:pos x="connsiteX10" y="connsiteY10"/>
+                </a:cxn>
+              </a:cxnLst>
+              <a:rect l="l" t="t" r="r" b="b"/>
+              <a:pathLst>
+                <a:path w="4625868" h="375557">
+                  <a:moveTo>
+                    <a:pt x="119183" y="127411"/>
+                  </a:moveTo>
+                  <a:cubicBezTo>
+                    <a:pt x="119183" y="92841"/>
+                    <a:pt x="147207" y="0"/>
+                    <a:pt x="181777" y="0"/>
+                  </a:cubicBezTo>
+                  <a:lnTo>
+                    <a:pt x="4563274" y="0"/>
+                  </a:lnTo>
+                  <a:cubicBezTo>
+                    <a:pt x="4597844" y="0"/>
+                    <a:pt x="4625868" y="28024"/>
+                    <a:pt x="4625868" y="62594"/>
+                  </a:cubicBezTo>
+                  <a:lnTo>
+                    <a:pt x="4625868" y="312963"/>
+                  </a:lnTo>
+                  <a:cubicBezTo>
+                    <a:pt x="4625868" y="347533"/>
+                    <a:pt x="4597844" y="375557"/>
+                    <a:pt x="4563274" y="375557"/>
+                  </a:cubicBezTo>
+                  <a:lnTo>
+                    <a:pt x="181777" y="375557"/>
+                  </a:lnTo>
+                  <a:cubicBezTo>
+                    <a:pt x="147207" y="375557"/>
+                    <a:pt x="126803" y="275090"/>
+                    <a:pt x="126803" y="240520"/>
+                  </a:cubicBezTo>
+                  <a:lnTo>
+                    <a:pt x="10319" y="315726"/>
+                  </a:lnTo>
+                  <a:lnTo>
+                    <a:pt x="0" y="77770"/>
+                  </a:lnTo>
+                  <a:lnTo>
+                    <a:pt x="119183" y="127411"/>
+                  </a:lnTo>
+                  <a:close/>
+                </a:path>
+              </a:pathLst>
+            </a:custGeom>
+          </p:spPr>
+          <p:style>
+            <a:lnRef idx="2">
+              <a:schemeClr val="accent4">
+                <a:shade val="50000"/>
+              </a:schemeClr>
+            </a:lnRef>
+            <a:fillRef idx="1">
+              <a:schemeClr val="accent4"/>
+            </a:fillRef>
+            <a:effectRef idx="0">
+              <a:schemeClr val="accent4"/>
+            </a:effectRef>
+            <a:fontRef idx="minor">
+              <a:schemeClr val="lt1"/>
+            </a:fontRef>
+          </p:style>
+          <p:txBody>
+            <a:bodyPr rot="0" spcFirstLastPara="0" vert="horz" wrap="square" lIns="0" tIns="0" rIns="0" bIns="0" numCol="1" spcCol="0" rtlCol="0" fromWordArt="0" anchor="ctr" anchorCtr="0" forceAA="0" compatLnSpc="1">
+              <a:prstTxWarp prst="textNoShape">
+                <a:avLst/>
+              </a:prstTxWarp>
+              <a:noAutofit/>
+            </a:bodyPr>
+            <a:lstStyle/>
+            <a:p>
+              <a:pPr indent="63500">
+                <a:spcAft>
+                  <a:spcPts val="0"/>
+                </a:spcAft>
+              </a:pPr>
+              <a:r>
+                <a:rPr lang="zh-TW" altLang="en-US" sz="1200" kern="100" dirty="0">
+                  <a:effectLst/>
+                  <a:ea typeface="新細明體" panose="02020500000000000000" pitchFamily="18" charset="-120"/>
+                  <a:cs typeface="Times New Roman" panose="02020603050405020304" pitchFamily="18" charset="0"/>
+                </a:rPr>
+                <a:t>腳位</a:t>
+              </a:r>
+              <a:endParaRPr lang="zh-TW" sz="1200" kern="100" dirty="0">
+                <a:effectLst/>
+                <a:ea typeface="新細明體" panose="02020500000000000000" pitchFamily="18" charset="-120"/>
+                <a:cs typeface="Times New Roman" panose="02020603050405020304" pitchFamily="18" charset="0"/>
+              </a:endParaRPr>
+            </a:p>
+          </p:txBody>
+        </p:sp>
+        <p:sp>
+          <p:nvSpPr>
+            <p:cNvPr id="87" name="手繪多邊形: 圖案 10">
+              <a:extLst>
+                <a:ext uri="{FF2B5EF4-FFF2-40B4-BE49-F238E27FC236}">
+                  <a16:creationId xmlns:a16="http://schemas.microsoft.com/office/drawing/2014/main" id="{7E327A97-9582-43DD-B207-B0A8F6FDDACB}"/>
+                </a:ext>
+              </a:extLst>
+            </p:cNvPr>
+            <p:cNvSpPr/>
+            <p:nvPr/>
+          </p:nvSpPr>
+          <p:spPr>
+            <a:xfrm>
+              <a:off x="2867598" y="2020079"/>
+              <a:ext cx="390525" cy="175260"/>
+            </a:xfrm>
+            <a:custGeom>
+              <a:avLst/>
+              <a:gdLst>
+                <a:gd name="connsiteX0" fmla="*/ 84890 w 453390"/>
+                <a:gd name="connsiteY0" fmla="*/ 0 h 263525"/>
+                <a:gd name="connsiteX1" fmla="*/ 453390 w 453390"/>
+                <a:gd name="connsiteY1" fmla="*/ 0 h 263525"/>
+                <a:gd name="connsiteX2" fmla="*/ 453390 w 453390"/>
+                <a:gd name="connsiteY2" fmla="*/ 263525 h 263525"/>
+                <a:gd name="connsiteX3" fmla="*/ 84890 w 453390"/>
+                <a:gd name="connsiteY3" fmla="*/ 263525 h 263525"/>
+                <a:gd name="connsiteX4" fmla="*/ 59217 w 453390"/>
+                <a:gd name="connsiteY4" fmla="*/ 168771 h 263525"/>
+                <a:gd name="connsiteX5" fmla="*/ 4819 w 453390"/>
+                <a:gd name="connsiteY5" fmla="*/ 221542 h 263525"/>
+                <a:gd name="connsiteX6" fmla="*/ 0 w 453390"/>
+                <a:gd name="connsiteY6" fmla="*/ 54571 h 263525"/>
+                <a:gd name="connsiteX7" fmla="*/ 55658 w 453390"/>
+                <a:gd name="connsiteY7" fmla="*/ 89403 h 263525"/>
+                <a:gd name="connsiteX8" fmla="*/ 84890 w 453390"/>
+                <a:gd name="connsiteY8" fmla="*/ 0 h 263525"/>
+              </a:gdLst>
+              <a:ahLst/>
+              <a:cxnLst>
+                <a:cxn ang="0">
+                  <a:pos x="connsiteX0" y="connsiteY0"/>
+                </a:cxn>
+                <a:cxn ang="0">
+                  <a:pos x="connsiteX1" y="connsiteY1"/>
+                </a:cxn>
+                <a:cxn ang="0">
+                  <a:pos x="connsiteX2" y="connsiteY2"/>
+                </a:cxn>
+                <a:cxn ang="0">
+                  <a:pos x="connsiteX3" y="connsiteY3"/>
+                </a:cxn>
+                <a:cxn ang="0">
+                  <a:pos x="connsiteX4" y="connsiteY4"/>
+                </a:cxn>
+                <a:cxn ang="0">
+                  <a:pos x="connsiteX5" y="connsiteY5"/>
+                </a:cxn>
+                <a:cxn ang="0">
+                  <a:pos x="connsiteX6" y="connsiteY6"/>
+                </a:cxn>
+                <a:cxn ang="0">
+                  <a:pos x="connsiteX7" y="connsiteY7"/>
+                </a:cxn>
+                <a:cxn ang="0">
+                  <a:pos x="connsiteX8" y="connsiteY8"/>
+                </a:cxn>
+              </a:cxnLst>
+              <a:rect l="l" t="t" r="r" b="b"/>
+              <a:pathLst>
+                <a:path w="453390" h="263525">
+                  <a:moveTo>
+                    <a:pt x="84890" y="0"/>
+                  </a:moveTo>
+                  <a:lnTo>
+                    <a:pt x="453390" y="0"/>
+                  </a:lnTo>
+                  <a:lnTo>
+                    <a:pt x="453390" y="263525"/>
+                  </a:lnTo>
+                  <a:lnTo>
+                    <a:pt x="84890" y="263525"/>
+                  </a:lnTo>
+                  <a:cubicBezTo>
+                    <a:pt x="68745" y="263525"/>
+                    <a:pt x="59217" y="193028"/>
+                    <a:pt x="59217" y="168771"/>
+                  </a:cubicBezTo>
+                  <a:lnTo>
+                    <a:pt x="4819" y="221542"/>
+                  </a:lnTo>
+                  <a:lnTo>
+                    <a:pt x="0" y="54571"/>
+                  </a:lnTo>
+                  <a:lnTo>
+                    <a:pt x="55658" y="89403"/>
+                  </a:lnTo>
+                  <a:cubicBezTo>
+                    <a:pt x="55658" y="65146"/>
+                    <a:pt x="68745" y="0"/>
+                    <a:pt x="84890" y="0"/>
+                  </a:cubicBezTo>
+                  <a:close/>
+                </a:path>
+              </a:pathLst>
+            </a:custGeom>
+          </p:spPr>
+          <p:style>
+            <a:lnRef idx="2">
+              <a:schemeClr val="accent5">
+                <a:shade val="50000"/>
+              </a:schemeClr>
+            </a:lnRef>
+            <a:fillRef idx="1">
+              <a:schemeClr val="accent5"/>
+            </a:fillRef>
+            <a:effectRef idx="0">
+              <a:schemeClr val="accent5"/>
+            </a:effectRef>
+            <a:fontRef idx="minor">
+              <a:schemeClr val="lt1"/>
+            </a:fontRef>
+          </p:style>
+          <p:txBody>
+            <a:bodyPr rot="0" spcFirstLastPara="0" vert="horz" wrap="square" lIns="0" tIns="0" rIns="0" bIns="0" numCol="1" spcCol="0" rtlCol="0" fromWordArt="0" anchor="ctr" anchorCtr="0" forceAA="0" compatLnSpc="1">
+              <a:prstTxWarp prst="textNoShape">
+                <a:avLst/>
+              </a:prstTxWarp>
+              <a:noAutofit/>
+            </a:bodyPr>
+            <a:lstStyle/>
+            <a:p>
+              <a:pPr indent="73025" algn="ctr">
+                <a:spcAft>
+                  <a:spcPts val="0"/>
+                </a:spcAft>
+              </a:pPr>
+              <a:r>
+                <a:rPr lang="en-US" sz="1200" kern="100" dirty="0">
+                  <a:solidFill>
+                    <a:srgbClr val="FFFFFF"/>
+                  </a:solidFill>
+                  <a:effectLst/>
+                  <a:ea typeface="新細明體" panose="02020500000000000000" pitchFamily="18" charset="-120"/>
+                  <a:cs typeface="Times New Roman" panose="02020603050405020304" pitchFamily="18" charset="0"/>
+                </a:rPr>
+                <a:t>0</a:t>
+              </a:r>
+              <a:endParaRPr lang="zh-TW" sz="1200" kern="100" dirty="0">
+                <a:effectLst/>
+                <a:ea typeface="新細明體" panose="02020500000000000000" pitchFamily="18" charset="-120"/>
+                <a:cs typeface="Times New Roman" panose="02020603050405020304" pitchFamily="18" charset="0"/>
+              </a:endParaRPr>
+            </a:p>
+          </p:txBody>
+        </p:sp>
+      </p:grpSp>
     </p:spTree>
     <p:extLst>
       <p:ext uri="{BB962C8B-B14F-4D97-AF65-F5344CB8AC3E}">
@@ -12492,21 +13051,8 @@
                 <a:ea typeface="新細明體" panose="02020500000000000000" pitchFamily="18" charset="-120"/>
                 <a:cs typeface="Times New Roman" panose="02020603050405020304" pitchFamily="18" charset="0"/>
               </a:rPr>
-              <a:t>位數字顯示模組 顯示</a:t>
+              <a:t>位數字顯示模組 顯示數字</a:t>
             </a:r>
-            <a:r>
-              <a:rPr lang="zh-TW" sz="1200" kern="100" dirty="0" smtClean="0">
-                <a:effectLst/>
-                <a:ea typeface="新細明體" panose="02020500000000000000" pitchFamily="18" charset="-120"/>
-                <a:cs typeface="Times New Roman" panose="02020603050405020304" pitchFamily="18" charset="0"/>
-              </a:rPr>
-              <a:t>數字</a:t>
-            </a:r>
-            <a:endParaRPr lang="zh-TW" sz="1200" kern="100" dirty="0">
-              <a:effectLst/>
-              <a:ea typeface="新細明體" panose="02020500000000000000" pitchFamily="18" charset="-120"/>
-              <a:cs typeface="Times New Roman" panose="02020603050405020304" pitchFamily="18" charset="0"/>
-            </a:endParaRPr>
           </a:p>
         </p:txBody>
       </p:sp>
@@ -13163,34 +13709,34 @@
               </a:spcAft>
             </a:pPr>
             <a:r>
-              <a:rPr lang="en-US" altLang="zh-TW" sz="1200" kern="100" dirty="0" err="1" smtClean="0">
+              <a:rPr lang="en-US" altLang="zh-TW" sz="1200" kern="100" dirty="0" err="1">
                 <a:ea typeface="新細明體" panose="02020500000000000000" pitchFamily="18" charset="-120"/>
                 <a:cs typeface="Times New Roman" panose="02020603050405020304" pitchFamily="18" charset="0"/>
               </a:rPr>
               <a:t>iMi</a:t>
             </a:r>
             <a:r>
-              <a:rPr lang="zh-TW" altLang="en-US" sz="1200" kern="100" dirty="0" smtClean="0">
+              <a:rPr lang="zh-TW" altLang="en-US" sz="1200" kern="100" dirty="0">
                 <a:ea typeface="新細明體" panose="02020500000000000000" pitchFamily="18" charset="-120"/>
                 <a:cs typeface="Times New Roman" panose="02020603050405020304" pitchFamily="18" charset="0"/>
               </a:rPr>
               <a:t>物流模組</a:t>
             </a:r>
             <a:r>
-              <a:rPr lang="en-US" altLang="zh-TW" sz="1200" kern="100" dirty="0" smtClean="0">
+              <a:rPr lang="en-US" altLang="zh-TW" sz="1200" kern="100" dirty="0">
                 <a:ea typeface="新細明體" panose="02020500000000000000" pitchFamily="18" charset="-120"/>
                 <a:cs typeface="Times New Roman" panose="02020603050405020304" pitchFamily="18" charset="0"/>
               </a:rPr>
               <a:t>UNO</a:t>
             </a:r>
             <a:r>
-              <a:rPr lang="zh-TW" altLang="en-US" sz="1200" kern="100" dirty="0" smtClean="0">
+              <a:rPr lang="zh-TW" altLang="en-US" sz="1200" kern="100" dirty="0">
                 <a:ea typeface="新細明體" panose="02020500000000000000" pitchFamily="18" charset="-120"/>
                 <a:cs typeface="Times New Roman" panose="02020603050405020304" pitchFamily="18" charset="0"/>
               </a:rPr>
               <a:t>初始化</a:t>
             </a:r>
-            <a:endParaRPr lang="en-US" altLang="zh-TW" sz="1200" kern="100" dirty="0" smtClean="0">
+            <a:endParaRPr lang="en-US" altLang="zh-TW" sz="1200" kern="100" dirty="0">
               <a:ea typeface="新細明體" panose="02020500000000000000" pitchFamily="18" charset="-120"/>
               <a:cs typeface="Times New Roman" panose="02020603050405020304" pitchFamily="18" charset="0"/>
             </a:endParaRPr>
@@ -13205,7 +13751,7 @@
               </a:spcAft>
             </a:pPr>
             <a:r>
-              <a:rPr lang="en-US" altLang="zh-TW" sz="1100" dirty="0" err="1" smtClean="0">
+              <a:rPr lang="en-US" altLang="zh-TW" sz="1100" dirty="0" err="1">
                 <a:solidFill>
                   <a:srgbClr val="FFFFFF"/>
                 </a:solidFill>
@@ -13214,7 +13760,7 @@
               <a:t>CNC</a:t>
             </a:r>
             <a:r>
-              <a:rPr lang="zh-TW" altLang="en-US" sz="1100" dirty="0" smtClean="0">
+              <a:rPr lang="zh-TW" altLang="en-US" sz="1100" dirty="0">
                 <a:solidFill>
                   <a:srgbClr val="FFFFFF"/>
                 </a:solidFill>
@@ -13237,7 +13783,7 @@
               </a:spcAft>
             </a:pPr>
             <a:r>
-              <a:rPr lang="en-US" altLang="zh-TW" sz="1100" dirty="0" err="1" smtClean="0">
+              <a:rPr lang="en-US" altLang="zh-TW" sz="1100" dirty="0" err="1">
                 <a:solidFill>
                   <a:srgbClr val="FFFFFF"/>
                 </a:solidFill>
@@ -13246,7 +13792,7 @@
               <a:t>UART</a:t>
             </a:r>
             <a:r>
-              <a:rPr lang="zh-TW" altLang="en-US" sz="1100" dirty="0" smtClean="0">
+              <a:rPr lang="zh-TW" altLang="en-US" sz="1100" dirty="0">
                 <a:solidFill>
                   <a:srgbClr val="FFFFFF"/>
                 </a:solidFill>
@@ -13269,7 +13815,7 @@
               </a:spcAft>
             </a:pPr>
             <a:r>
-              <a:rPr lang="zh-TW" altLang="en-US" sz="1100" dirty="0" smtClean="0">
+              <a:rPr lang="zh-TW" altLang="en-US" sz="1100" dirty="0">
                 <a:solidFill>
                   <a:srgbClr val="FFFFFF"/>
                 </a:solidFill>
@@ -13292,7 +13838,7 @@
         </p:nvSpPr>
         <p:spPr>
           <a:xfrm>
-            <a:off x="2884199" y="2132838"/>
+            <a:off x="6096000" y="1036066"/>
             <a:ext cx="1888939" cy="1696974"/>
           </a:xfrm>
           <a:custGeom>
@@ -13816,41 +14362,34 @@
               </a:spcAft>
             </a:pPr>
             <a:r>
-              <a:rPr lang="en-US" altLang="zh-TW" sz="1200" kern="100" dirty="0" err="1" smtClean="0">
+              <a:rPr lang="en-US" altLang="zh-TW" sz="1200" kern="100" dirty="0" err="1">
                 <a:ea typeface="新細明體" panose="02020500000000000000" pitchFamily="18" charset="-120"/>
                 <a:cs typeface="Times New Roman" panose="02020603050405020304" pitchFamily="18" charset="0"/>
               </a:rPr>
               <a:t>iMi</a:t>
             </a:r>
             <a:r>
-              <a:rPr lang="zh-TW" altLang="en-US" sz="1200" kern="100" dirty="0" smtClean="0">
+              <a:rPr lang="zh-TW" altLang="en-US" sz="1200" kern="100" dirty="0">
                 <a:ea typeface="新細明體" panose="02020500000000000000" pitchFamily="18" charset="-120"/>
                 <a:cs typeface="Times New Roman" panose="02020603050405020304" pitchFamily="18" charset="0"/>
               </a:rPr>
-              <a:t>物流</a:t>
+              <a:t>物流模組</a:t>
             </a:r>
             <a:r>
-              <a:rPr lang="zh-TW" altLang="en-US" sz="1200" kern="100" dirty="0" smtClean="0">
-                <a:ea typeface="新細明體" panose="02020500000000000000" pitchFamily="18" charset="-120"/>
-                <a:cs typeface="Times New Roman" panose="02020603050405020304" pitchFamily="18" charset="0"/>
-              </a:rPr>
-              <a:t>模組</a:t>
-            </a:r>
-            <a:r>
-              <a:rPr lang="en-US" altLang="zh-TW" sz="1200" kern="100" dirty="0" err="1" smtClean="0">
+              <a:rPr lang="en-US" altLang="zh-TW" sz="1200" kern="100" dirty="0" err="1">
                 <a:ea typeface="新細明體" panose="02020500000000000000" pitchFamily="18" charset="-120"/>
                 <a:cs typeface="Times New Roman" panose="02020603050405020304" pitchFamily="18" charset="0"/>
               </a:rPr>
               <a:t>ESP32</a:t>
             </a:r>
             <a:r>
-              <a:rPr lang="zh-TW" altLang="en-US" sz="1200" kern="100" dirty="0" smtClean="0">
+              <a:rPr lang="zh-TW" altLang="en-US" sz="1200" kern="100" dirty="0">
                 <a:ea typeface="新細明體" panose="02020500000000000000" pitchFamily="18" charset="-120"/>
                 <a:cs typeface="Times New Roman" panose="02020603050405020304" pitchFamily="18" charset="0"/>
               </a:rPr>
               <a:t>初始化</a:t>
             </a:r>
-            <a:endParaRPr lang="en-US" altLang="zh-TW" sz="1200" kern="100" dirty="0" smtClean="0">
+            <a:endParaRPr lang="en-US" altLang="zh-TW" sz="1200" kern="100" dirty="0">
               <a:ea typeface="新細明體" panose="02020500000000000000" pitchFamily="18" charset="-120"/>
               <a:cs typeface="Times New Roman" panose="02020603050405020304" pitchFamily="18" charset="0"/>
             </a:endParaRPr>
@@ -13865,7 +14404,7 @@
               </a:spcAft>
             </a:pPr>
             <a:r>
-              <a:rPr lang="en-US" altLang="zh-TW" sz="1100" dirty="0" err="1" smtClean="0">
+              <a:rPr lang="en-US" altLang="zh-TW" sz="1100" dirty="0" err="1">
                 <a:solidFill>
                   <a:srgbClr val="FFFFFF"/>
                 </a:solidFill>
@@ -13874,7 +14413,7 @@
               <a:t>WiFi</a:t>
             </a:r>
             <a:r>
-              <a:rPr lang="zh-TW" altLang="en-US" sz="1100" dirty="0" smtClean="0">
+              <a:rPr lang="zh-TW" altLang="en-US" sz="1100" dirty="0">
                 <a:solidFill>
                   <a:srgbClr val="FFFFFF"/>
                 </a:solidFill>
@@ -13897,7 +14436,7 @@
               </a:spcAft>
             </a:pPr>
             <a:r>
-              <a:rPr lang="en-US" altLang="zh-TW" sz="1100" dirty="0" err="1" smtClean="0">
+              <a:rPr lang="en-US" altLang="zh-TW" sz="1100" dirty="0" err="1">
                 <a:solidFill>
                   <a:srgbClr val="FFFFFF"/>
                 </a:solidFill>
@@ -13906,7 +14445,7 @@
               <a:t>MQTT</a:t>
             </a:r>
             <a:r>
-              <a:rPr lang="zh-TW" altLang="en-US" sz="1100" dirty="0" smtClean="0">
+              <a:rPr lang="zh-TW" altLang="en-US" sz="1100" dirty="0">
                 <a:solidFill>
                   <a:srgbClr val="FFFFFF"/>
                 </a:solidFill>
@@ -13929,7 +14468,7 @@
               </a:spcAft>
             </a:pPr>
             <a:r>
-              <a:rPr lang="en-US" altLang="zh-TW" sz="1100" dirty="0" err="1" smtClean="0">
+              <a:rPr lang="en-US" altLang="zh-TW" sz="1100" dirty="0" err="1">
                 <a:solidFill>
                   <a:srgbClr val="FFFFFF"/>
                 </a:solidFill>
@@ -13938,7 +14477,7 @@
               <a:t>UART</a:t>
             </a:r>
             <a:r>
-              <a:rPr lang="zh-TW" altLang="en-US" sz="1100" dirty="0" smtClean="0">
+              <a:rPr lang="zh-TW" altLang="en-US" sz="1100" dirty="0">
                 <a:solidFill>
                   <a:srgbClr val="FFFFFF"/>
                 </a:solidFill>
@@ -13946,7 +14485,7 @@
               </a:rPr>
               <a:t>通訊</a:t>
             </a:r>
-            <a:endParaRPr lang="en-US" altLang="zh-TW" sz="1100" dirty="0" smtClean="0">
+            <a:endParaRPr lang="en-US" altLang="zh-TW" sz="1100" dirty="0">
               <a:solidFill>
                 <a:srgbClr val="FFFFFF"/>
               </a:solidFill>
@@ -13963,14 +14502,14 @@
               </a:spcAft>
             </a:pPr>
             <a:r>
-              <a:rPr lang="en-US" altLang="zh-TW" sz="1100" dirty="0" smtClean="0">
+              <a:rPr lang="en-US" altLang="zh-TW" sz="1100" dirty="0">
                 <a:latin typeface="新細明體" panose="02020500000000000000" pitchFamily="18" charset="-120"/>
                 <a:cs typeface="新細明體" panose="02020500000000000000" pitchFamily="18" charset="-120"/>
               </a:rPr>
               <a:t>Google</a:t>
             </a:r>
             <a:r>
-              <a:rPr lang="zh-TW" altLang="en-US" sz="1100" dirty="0" smtClean="0">
+              <a:rPr lang="zh-TW" altLang="en-US" sz="1100" dirty="0">
                 <a:latin typeface="新細明體" panose="02020500000000000000" pitchFamily="18" charset="-120"/>
                 <a:cs typeface="新細明體" panose="02020500000000000000" pitchFamily="18" charset="-120"/>
               </a:rPr>
@@ -13983,6 +14522,4233 @@
           </a:p>
         </p:txBody>
       </p:sp>
+      <p:grpSp>
+        <p:nvGrpSpPr>
+          <p:cNvPr id="3" name="群組 2">
+            <a:extLst>
+              <a:ext uri="{FF2B5EF4-FFF2-40B4-BE49-F238E27FC236}">
+                <a16:creationId xmlns:a16="http://schemas.microsoft.com/office/drawing/2014/main" id="{6B4FC413-B9ED-4482-96AB-23A8233D89B1}"/>
+              </a:ext>
+            </a:extLst>
+          </p:cNvPr>
+          <p:cNvGrpSpPr/>
+          <p:nvPr/>
+        </p:nvGrpSpPr>
+        <p:grpSpPr>
+          <a:xfrm>
+            <a:off x="1281587" y="2639695"/>
+            <a:ext cx="2078228" cy="1380910"/>
+            <a:chOff x="1281587" y="2639695"/>
+            <a:chExt cx="2078228" cy="1380910"/>
+          </a:xfrm>
+        </p:grpSpPr>
+        <p:sp>
+          <p:nvSpPr>
+            <p:cNvPr id="15" name="圓角矩形 4">
+              <a:extLst>
+                <a:ext uri="{FF2B5EF4-FFF2-40B4-BE49-F238E27FC236}">
+                  <a16:creationId xmlns:a16="http://schemas.microsoft.com/office/drawing/2014/main" id="{D33D39FB-6B6B-486D-A3E6-0993B69B93CF}"/>
+                </a:ext>
+              </a:extLst>
+            </p:cNvPr>
+            <p:cNvSpPr/>
+            <p:nvPr/>
+          </p:nvSpPr>
+          <p:spPr>
+            <a:xfrm>
+              <a:off x="1281587" y="2639695"/>
+              <a:ext cx="2078228" cy="1380910"/>
+            </a:xfrm>
+            <a:custGeom>
+              <a:avLst/>
+              <a:gdLst>
+                <a:gd name="connsiteX0" fmla="*/ 0 w 4424680"/>
+                <a:gd name="connsiteY0" fmla="*/ 60115 h 360680"/>
+                <a:gd name="connsiteX1" fmla="*/ 60115 w 4424680"/>
+                <a:gd name="connsiteY1" fmla="*/ 0 h 360680"/>
+                <a:gd name="connsiteX2" fmla="*/ 4364565 w 4424680"/>
+                <a:gd name="connsiteY2" fmla="*/ 0 h 360680"/>
+                <a:gd name="connsiteX3" fmla="*/ 4424680 w 4424680"/>
+                <a:gd name="connsiteY3" fmla="*/ 60115 h 360680"/>
+                <a:gd name="connsiteX4" fmla="*/ 4424680 w 4424680"/>
+                <a:gd name="connsiteY4" fmla="*/ 300565 h 360680"/>
+                <a:gd name="connsiteX5" fmla="*/ 4364565 w 4424680"/>
+                <a:gd name="connsiteY5" fmla="*/ 360680 h 360680"/>
+                <a:gd name="connsiteX6" fmla="*/ 60115 w 4424680"/>
+                <a:gd name="connsiteY6" fmla="*/ 360680 h 360680"/>
+                <a:gd name="connsiteX7" fmla="*/ 0 w 4424680"/>
+                <a:gd name="connsiteY7" fmla="*/ 300565 h 360680"/>
+                <a:gd name="connsiteX8" fmla="*/ 0 w 4424680"/>
+                <a:gd name="connsiteY8" fmla="*/ 60115 h 360680"/>
+                <a:gd name="connsiteX0" fmla="*/ 0 w 4424680"/>
+                <a:gd name="connsiteY0" fmla="*/ 60115 h 360680"/>
+                <a:gd name="connsiteX1" fmla="*/ 60115 w 4424680"/>
+                <a:gd name="connsiteY1" fmla="*/ 0 h 360680"/>
+                <a:gd name="connsiteX2" fmla="*/ 279400 w 4424680"/>
+                <a:gd name="connsiteY2" fmla="*/ 0 h 360680"/>
+                <a:gd name="connsiteX3" fmla="*/ 4364565 w 4424680"/>
+                <a:gd name="connsiteY3" fmla="*/ 0 h 360680"/>
+                <a:gd name="connsiteX4" fmla="*/ 4424680 w 4424680"/>
+                <a:gd name="connsiteY4" fmla="*/ 60115 h 360680"/>
+                <a:gd name="connsiteX5" fmla="*/ 4424680 w 4424680"/>
+                <a:gd name="connsiteY5" fmla="*/ 300565 h 360680"/>
+                <a:gd name="connsiteX6" fmla="*/ 4364565 w 4424680"/>
+                <a:gd name="connsiteY6" fmla="*/ 360680 h 360680"/>
+                <a:gd name="connsiteX7" fmla="*/ 60115 w 4424680"/>
+                <a:gd name="connsiteY7" fmla="*/ 360680 h 360680"/>
+                <a:gd name="connsiteX8" fmla="*/ 0 w 4424680"/>
+                <a:gd name="connsiteY8" fmla="*/ 300565 h 360680"/>
+                <a:gd name="connsiteX9" fmla="*/ 0 w 4424680"/>
+                <a:gd name="connsiteY9" fmla="*/ 60115 h 360680"/>
+                <a:gd name="connsiteX0" fmla="*/ 0 w 4424680"/>
+                <a:gd name="connsiteY0" fmla="*/ 60115 h 360680"/>
+                <a:gd name="connsiteX1" fmla="*/ 60115 w 4424680"/>
+                <a:gd name="connsiteY1" fmla="*/ 0 h 360680"/>
+                <a:gd name="connsiteX2" fmla="*/ 4364565 w 4424680"/>
+                <a:gd name="connsiteY2" fmla="*/ 0 h 360680"/>
+                <a:gd name="connsiteX3" fmla="*/ 4424680 w 4424680"/>
+                <a:gd name="connsiteY3" fmla="*/ 60115 h 360680"/>
+                <a:gd name="connsiteX4" fmla="*/ 4424680 w 4424680"/>
+                <a:gd name="connsiteY4" fmla="*/ 300565 h 360680"/>
+                <a:gd name="connsiteX5" fmla="*/ 4364565 w 4424680"/>
+                <a:gd name="connsiteY5" fmla="*/ 360680 h 360680"/>
+                <a:gd name="connsiteX6" fmla="*/ 60115 w 4424680"/>
+                <a:gd name="connsiteY6" fmla="*/ 360680 h 360680"/>
+                <a:gd name="connsiteX7" fmla="*/ 0 w 4424680"/>
+                <a:gd name="connsiteY7" fmla="*/ 300565 h 360680"/>
+                <a:gd name="connsiteX8" fmla="*/ 0 w 4424680"/>
+                <a:gd name="connsiteY8" fmla="*/ 60115 h 360680"/>
+                <a:gd name="connsiteX0" fmla="*/ 0 w 4424680"/>
+                <a:gd name="connsiteY0" fmla="*/ 60115 h 360680"/>
+                <a:gd name="connsiteX1" fmla="*/ 60115 w 4424680"/>
+                <a:gd name="connsiteY1" fmla="*/ 0 h 360680"/>
+                <a:gd name="connsiteX2" fmla="*/ 350520 w 4424680"/>
+                <a:gd name="connsiteY2" fmla="*/ 0 h 360680"/>
+                <a:gd name="connsiteX3" fmla="*/ 4364565 w 4424680"/>
+                <a:gd name="connsiteY3" fmla="*/ 0 h 360680"/>
+                <a:gd name="connsiteX4" fmla="*/ 4424680 w 4424680"/>
+                <a:gd name="connsiteY4" fmla="*/ 60115 h 360680"/>
+                <a:gd name="connsiteX5" fmla="*/ 4424680 w 4424680"/>
+                <a:gd name="connsiteY5" fmla="*/ 300565 h 360680"/>
+                <a:gd name="connsiteX6" fmla="*/ 4364565 w 4424680"/>
+                <a:gd name="connsiteY6" fmla="*/ 360680 h 360680"/>
+                <a:gd name="connsiteX7" fmla="*/ 60115 w 4424680"/>
+                <a:gd name="connsiteY7" fmla="*/ 360680 h 360680"/>
+                <a:gd name="connsiteX8" fmla="*/ 0 w 4424680"/>
+                <a:gd name="connsiteY8" fmla="*/ 300565 h 360680"/>
+                <a:gd name="connsiteX9" fmla="*/ 0 w 4424680"/>
+                <a:gd name="connsiteY9" fmla="*/ 60115 h 360680"/>
+                <a:gd name="connsiteX0" fmla="*/ 0 w 4424680"/>
+                <a:gd name="connsiteY0" fmla="*/ 121075 h 421640"/>
+                <a:gd name="connsiteX1" fmla="*/ 60115 w 4424680"/>
+                <a:gd name="connsiteY1" fmla="*/ 60960 h 421640"/>
+                <a:gd name="connsiteX2" fmla="*/ 350520 w 4424680"/>
+                <a:gd name="connsiteY2" fmla="*/ 60960 h 421640"/>
+                <a:gd name="connsiteX3" fmla="*/ 4364565 w 4424680"/>
+                <a:gd name="connsiteY3" fmla="*/ 60960 h 421640"/>
+                <a:gd name="connsiteX4" fmla="*/ 4424680 w 4424680"/>
+                <a:gd name="connsiteY4" fmla="*/ 121075 h 421640"/>
+                <a:gd name="connsiteX5" fmla="*/ 4424680 w 4424680"/>
+                <a:gd name="connsiteY5" fmla="*/ 361525 h 421640"/>
+                <a:gd name="connsiteX6" fmla="*/ 4364565 w 4424680"/>
+                <a:gd name="connsiteY6" fmla="*/ 421640 h 421640"/>
+                <a:gd name="connsiteX7" fmla="*/ 60115 w 4424680"/>
+                <a:gd name="connsiteY7" fmla="*/ 421640 h 421640"/>
+                <a:gd name="connsiteX8" fmla="*/ 0 w 4424680"/>
+                <a:gd name="connsiteY8" fmla="*/ 361525 h 421640"/>
+                <a:gd name="connsiteX9" fmla="*/ 0 w 4424680"/>
+                <a:gd name="connsiteY9" fmla="*/ 121075 h 421640"/>
+                <a:gd name="connsiteX0" fmla="*/ 0 w 4424680"/>
+                <a:gd name="connsiteY0" fmla="*/ 121075 h 421640"/>
+                <a:gd name="connsiteX1" fmla="*/ 60115 w 4424680"/>
+                <a:gd name="connsiteY1" fmla="*/ 60960 h 421640"/>
+                <a:gd name="connsiteX2" fmla="*/ 350520 w 4424680"/>
+                <a:gd name="connsiteY2" fmla="*/ 60960 h 421640"/>
+                <a:gd name="connsiteX3" fmla="*/ 4364565 w 4424680"/>
+                <a:gd name="connsiteY3" fmla="*/ 60960 h 421640"/>
+                <a:gd name="connsiteX4" fmla="*/ 4424680 w 4424680"/>
+                <a:gd name="connsiteY4" fmla="*/ 121075 h 421640"/>
+                <a:gd name="connsiteX5" fmla="*/ 4424680 w 4424680"/>
+                <a:gd name="connsiteY5" fmla="*/ 361525 h 421640"/>
+                <a:gd name="connsiteX6" fmla="*/ 4364565 w 4424680"/>
+                <a:gd name="connsiteY6" fmla="*/ 421640 h 421640"/>
+                <a:gd name="connsiteX7" fmla="*/ 330200 w 4424680"/>
+                <a:gd name="connsiteY7" fmla="*/ 421640 h 421640"/>
+                <a:gd name="connsiteX8" fmla="*/ 60115 w 4424680"/>
+                <a:gd name="connsiteY8" fmla="*/ 421640 h 421640"/>
+                <a:gd name="connsiteX9" fmla="*/ 0 w 4424680"/>
+                <a:gd name="connsiteY9" fmla="*/ 361525 h 421640"/>
+                <a:gd name="connsiteX10" fmla="*/ 0 w 4424680"/>
+                <a:gd name="connsiteY10" fmla="*/ 121075 h 421640"/>
+                <a:gd name="connsiteX0" fmla="*/ 0 w 4424680"/>
+                <a:gd name="connsiteY0" fmla="*/ 60115 h 360680"/>
+                <a:gd name="connsiteX1" fmla="*/ 60115 w 4424680"/>
+                <a:gd name="connsiteY1" fmla="*/ 0 h 360680"/>
+                <a:gd name="connsiteX2" fmla="*/ 350520 w 4424680"/>
+                <a:gd name="connsiteY2" fmla="*/ 0 h 360680"/>
+                <a:gd name="connsiteX3" fmla="*/ 4364565 w 4424680"/>
+                <a:gd name="connsiteY3" fmla="*/ 0 h 360680"/>
+                <a:gd name="connsiteX4" fmla="*/ 4424680 w 4424680"/>
+                <a:gd name="connsiteY4" fmla="*/ 60115 h 360680"/>
+                <a:gd name="connsiteX5" fmla="*/ 4424680 w 4424680"/>
+                <a:gd name="connsiteY5" fmla="*/ 300565 h 360680"/>
+                <a:gd name="connsiteX6" fmla="*/ 4364565 w 4424680"/>
+                <a:gd name="connsiteY6" fmla="*/ 360680 h 360680"/>
+                <a:gd name="connsiteX7" fmla="*/ 330200 w 4424680"/>
+                <a:gd name="connsiteY7" fmla="*/ 360680 h 360680"/>
+                <a:gd name="connsiteX8" fmla="*/ 60115 w 4424680"/>
+                <a:gd name="connsiteY8" fmla="*/ 360680 h 360680"/>
+                <a:gd name="connsiteX9" fmla="*/ 0 w 4424680"/>
+                <a:gd name="connsiteY9" fmla="*/ 300565 h 360680"/>
+                <a:gd name="connsiteX10" fmla="*/ 0 w 4424680"/>
+                <a:gd name="connsiteY10" fmla="*/ 60115 h 360680"/>
+                <a:gd name="connsiteX0" fmla="*/ 0 w 4424680"/>
+                <a:gd name="connsiteY0" fmla="*/ 60115 h 421640"/>
+                <a:gd name="connsiteX1" fmla="*/ 60115 w 4424680"/>
+                <a:gd name="connsiteY1" fmla="*/ 0 h 421640"/>
+                <a:gd name="connsiteX2" fmla="*/ 350520 w 4424680"/>
+                <a:gd name="connsiteY2" fmla="*/ 0 h 421640"/>
+                <a:gd name="connsiteX3" fmla="*/ 4364565 w 4424680"/>
+                <a:gd name="connsiteY3" fmla="*/ 0 h 421640"/>
+                <a:gd name="connsiteX4" fmla="*/ 4424680 w 4424680"/>
+                <a:gd name="connsiteY4" fmla="*/ 60115 h 421640"/>
+                <a:gd name="connsiteX5" fmla="*/ 4424680 w 4424680"/>
+                <a:gd name="connsiteY5" fmla="*/ 300565 h 421640"/>
+                <a:gd name="connsiteX6" fmla="*/ 4364565 w 4424680"/>
+                <a:gd name="connsiteY6" fmla="*/ 360680 h 421640"/>
+                <a:gd name="connsiteX7" fmla="*/ 330200 w 4424680"/>
+                <a:gd name="connsiteY7" fmla="*/ 360680 h 421640"/>
+                <a:gd name="connsiteX8" fmla="*/ 60115 w 4424680"/>
+                <a:gd name="connsiteY8" fmla="*/ 360680 h 421640"/>
+                <a:gd name="connsiteX9" fmla="*/ 0 w 4424680"/>
+                <a:gd name="connsiteY9" fmla="*/ 300565 h 421640"/>
+                <a:gd name="connsiteX10" fmla="*/ 0 w 4424680"/>
+                <a:gd name="connsiteY10" fmla="*/ 60115 h 421640"/>
+                <a:gd name="connsiteX0" fmla="*/ 0 w 4424680"/>
+                <a:gd name="connsiteY0" fmla="*/ 60115 h 421640"/>
+                <a:gd name="connsiteX1" fmla="*/ 60115 w 4424680"/>
+                <a:gd name="connsiteY1" fmla="*/ 0 h 421640"/>
+                <a:gd name="connsiteX2" fmla="*/ 350520 w 4424680"/>
+                <a:gd name="connsiteY2" fmla="*/ 0 h 421640"/>
+                <a:gd name="connsiteX3" fmla="*/ 4364565 w 4424680"/>
+                <a:gd name="connsiteY3" fmla="*/ 0 h 421640"/>
+                <a:gd name="connsiteX4" fmla="*/ 4424680 w 4424680"/>
+                <a:gd name="connsiteY4" fmla="*/ 60115 h 421640"/>
+                <a:gd name="connsiteX5" fmla="*/ 4424680 w 4424680"/>
+                <a:gd name="connsiteY5" fmla="*/ 300565 h 421640"/>
+                <a:gd name="connsiteX6" fmla="*/ 4364565 w 4424680"/>
+                <a:gd name="connsiteY6" fmla="*/ 360680 h 421640"/>
+                <a:gd name="connsiteX7" fmla="*/ 330200 w 4424680"/>
+                <a:gd name="connsiteY7" fmla="*/ 360680 h 421640"/>
+                <a:gd name="connsiteX8" fmla="*/ 60115 w 4424680"/>
+                <a:gd name="connsiteY8" fmla="*/ 360680 h 421640"/>
+                <a:gd name="connsiteX9" fmla="*/ 0 w 4424680"/>
+                <a:gd name="connsiteY9" fmla="*/ 300565 h 421640"/>
+                <a:gd name="connsiteX10" fmla="*/ 0 w 4424680"/>
+                <a:gd name="connsiteY10" fmla="*/ 60115 h 421640"/>
+                <a:gd name="connsiteX0" fmla="*/ 0 w 4424680"/>
+                <a:gd name="connsiteY0" fmla="*/ 60115 h 377646"/>
+                <a:gd name="connsiteX1" fmla="*/ 60115 w 4424680"/>
+                <a:gd name="connsiteY1" fmla="*/ 0 h 377646"/>
+                <a:gd name="connsiteX2" fmla="*/ 350520 w 4424680"/>
+                <a:gd name="connsiteY2" fmla="*/ 0 h 377646"/>
+                <a:gd name="connsiteX3" fmla="*/ 4364565 w 4424680"/>
+                <a:gd name="connsiteY3" fmla="*/ 0 h 377646"/>
+                <a:gd name="connsiteX4" fmla="*/ 4424680 w 4424680"/>
+                <a:gd name="connsiteY4" fmla="*/ 60115 h 377646"/>
+                <a:gd name="connsiteX5" fmla="*/ 4424680 w 4424680"/>
+                <a:gd name="connsiteY5" fmla="*/ 300565 h 377646"/>
+                <a:gd name="connsiteX6" fmla="*/ 4364565 w 4424680"/>
+                <a:gd name="connsiteY6" fmla="*/ 360680 h 377646"/>
+                <a:gd name="connsiteX7" fmla="*/ 330200 w 4424680"/>
+                <a:gd name="connsiteY7" fmla="*/ 360680 h 377646"/>
+                <a:gd name="connsiteX8" fmla="*/ 60115 w 4424680"/>
+                <a:gd name="connsiteY8" fmla="*/ 360680 h 377646"/>
+                <a:gd name="connsiteX9" fmla="*/ 0 w 4424680"/>
+                <a:gd name="connsiteY9" fmla="*/ 300565 h 377646"/>
+                <a:gd name="connsiteX10" fmla="*/ 0 w 4424680"/>
+                <a:gd name="connsiteY10" fmla="*/ 60115 h 377646"/>
+              </a:gdLst>
+              <a:ahLst/>
+              <a:cxnLst>
+                <a:cxn ang="0">
+                  <a:pos x="connsiteX0" y="connsiteY0"/>
+                </a:cxn>
+                <a:cxn ang="0">
+                  <a:pos x="connsiteX1" y="connsiteY1"/>
+                </a:cxn>
+                <a:cxn ang="0">
+                  <a:pos x="connsiteX2" y="connsiteY2"/>
+                </a:cxn>
+                <a:cxn ang="0">
+                  <a:pos x="connsiteX3" y="connsiteY3"/>
+                </a:cxn>
+                <a:cxn ang="0">
+                  <a:pos x="connsiteX4" y="connsiteY4"/>
+                </a:cxn>
+                <a:cxn ang="0">
+                  <a:pos x="connsiteX5" y="connsiteY5"/>
+                </a:cxn>
+                <a:cxn ang="0">
+                  <a:pos x="connsiteX6" y="connsiteY6"/>
+                </a:cxn>
+                <a:cxn ang="0">
+                  <a:pos x="connsiteX7" y="connsiteY7"/>
+                </a:cxn>
+                <a:cxn ang="0">
+                  <a:pos x="connsiteX8" y="connsiteY8"/>
+                </a:cxn>
+                <a:cxn ang="0">
+                  <a:pos x="connsiteX9" y="connsiteY9"/>
+                </a:cxn>
+                <a:cxn ang="0">
+                  <a:pos x="connsiteX10" y="connsiteY10"/>
+                </a:cxn>
+              </a:cxnLst>
+              <a:rect l="l" t="t" r="r" b="b"/>
+              <a:pathLst>
+                <a:path w="4424680" h="377646">
+                  <a:moveTo>
+                    <a:pt x="0" y="60115"/>
+                  </a:moveTo>
+                  <a:cubicBezTo>
+                    <a:pt x="0" y="26914"/>
+                    <a:pt x="26914" y="0"/>
+                    <a:pt x="60115" y="0"/>
+                  </a:cubicBezTo>
+                  <a:cubicBezTo>
+                    <a:pt x="156917" y="0"/>
+                    <a:pt x="127388" y="56799"/>
+                    <a:pt x="350520" y="0"/>
+                  </a:cubicBezTo>
+                  <a:lnTo>
+                    <a:pt x="4364565" y="0"/>
+                  </a:lnTo>
+                  <a:cubicBezTo>
+                    <a:pt x="4397766" y="0"/>
+                    <a:pt x="4424680" y="26914"/>
+                    <a:pt x="4424680" y="60115"/>
+                  </a:cubicBezTo>
+                  <a:lnTo>
+                    <a:pt x="4424680" y="300565"/>
+                  </a:lnTo>
+                  <a:cubicBezTo>
+                    <a:pt x="4424680" y="333766"/>
+                    <a:pt x="4397766" y="360680"/>
+                    <a:pt x="4364565" y="360680"/>
+                  </a:cubicBezTo>
+                  <a:lnTo>
+                    <a:pt x="330200" y="360680"/>
+                  </a:lnTo>
+                  <a:cubicBezTo>
+                    <a:pt x="170817" y="398855"/>
+                    <a:pt x="150143" y="360680"/>
+                    <a:pt x="60115" y="360680"/>
+                  </a:cubicBezTo>
+                  <a:cubicBezTo>
+                    <a:pt x="26914" y="360680"/>
+                    <a:pt x="0" y="333766"/>
+                    <a:pt x="0" y="300565"/>
+                  </a:cubicBezTo>
+                  <a:lnTo>
+                    <a:pt x="0" y="60115"/>
+                  </a:lnTo>
+                  <a:close/>
+                </a:path>
+              </a:pathLst>
+            </a:custGeom>
+          </p:spPr>
+          <p:style>
+            <a:lnRef idx="2">
+              <a:schemeClr val="accent1">
+                <a:shade val="50000"/>
+              </a:schemeClr>
+            </a:lnRef>
+            <a:fillRef idx="1">
+              <a:schemeClr val="accent1"/>
+            </a:fillRef>
+            <a:effectRef idx="0">
+              <a:schemeClr val="accent1"/>
+            </a:effectRef>
+            <a:fontRef idx="minor">
+              <a:schemeClr val="lt1"/>
+            </a:fontRef>
+          </p:style>
+          <p:txBody>
+            <a:bodyPr rot="0" spcFirstLastPara="0" vert="horz" wrap="square" lIns="36000" tIns="0" rIns="36000" bIns="0" numCol="1" spcCol="0" rtlCol="0" fromWordArt="0" anchor="ctr" anchorCtr="0" forceAA="0" compatLnSpc="1">
+              <a:prstTxWarp prst="textNoShape">
+                <a:avLst/>
+              </a:prstTxWarp>
+              <a:noAutofit/>
+            </a:bodyPr>
+            <a:lstStyle/>
+            <a:p>
+              <a:pPr>
+                <a:spcAft>
+                  <a:spcPts val="0"/>
+                </a:spcAft>
+              </a:pPr>
+              <a:endParaRPr lang="zh-TW" sz="1200" kern="100" dirty="0">
+                <a:effectLst/>
+                <a:ea typeface="新細明體" panose="02020500000000000000" pitchFamily="18" charset="-120"/>
+                <a:cs typeface="Times New Roman" panose="02020603050405020304" pitchFamily="18" charset="0"/>
+              </a:endParaRPr>
+            </a:p>
+          </p:txBody>
+        </p:sp>
+        <p:grpSp>
+          <p:nvGrpSpPr>
+            <p:cNvPr id="2" name="群組 1">
+              <a:extLst>
+                <a:ext uri="{FF2B5EF4-FFF2-40B4-BE49-F238E27FC236}">
+                  <a16:creationId xmlns:a16="http://schemas.microsoft.com/office/drawing/2014/main" id="{0133ABE0-05F0-400E-B8BB-5F59A535954B}"/>
+                </a:ext>
+              </a:extLst>
+            </p:cNvPr>
+            <p:cNvGrpSpPr/>
+            <p:nvPr/>
+          </p:nvGrpSpPr>
+          <p:grpSpPr>
+            <a:xfrm>
+              <a:off x="1503044" y="2736215"/>
+              <a:ext cx="1630687" cy="175260"/>
+              <a:chOff x="1503044" y="2736215"/>
+              <a:chExt cx="1630687" cy="175260"/>
+            </a:xfrm>
+          </p:grpSpPr>
+          <p:sp>
+            <p:nvSpPr>
+              <p:cNvPr id="16" name="手繪多邊形: 圖案 10">
+                <a:extLst>
+                  <a:ext uri="{FF2B5EF4-FFF2-40B4-BE49-F238E27FC236}">
+                    <a16:creationId xmlns:a16="http://schemas.microsoft.com/office/drawing/2014/main" id="{E050214A-C520-4593-84B6-0C03801F78F4}"/>
+                  </a:ext>
+                </a:extLst>
+              </p:cNvPr>
+              <p:cNvSpPr/>
+              <p:nvPr/>
+            </p:nvSpPr>
+            <p:spPr>
+              <a:xfrm>
+                <a:off x="1503044" y="2736215"/>
+                <a:ext cx="219078" cy="175260"/>
+              </a:xfrm>
+              <a:custGeom>
+                <a:avLst/>
+                <a:gdLst>
+                  <a:gd name="connsiteX0" fmla="*/ 84890 w 453390"/>
+                  <a:gd name="connsiteY0" fmla="*/ 0 h 263525"/>
+                  <a:gd name="connsiteX1" fmla="*/ 453390 w 453390"/>
+                  <a:gd name="connsiteY1" fmla="*/ 0 h 263525"/>
+                  <a:gd name="connsiteX2" fmla="*/ 453390 w 453390"/>
+                  <a:gd name="connsiteY2" fmla="*/ 263525 h 263525"/>
+                  <a:gd name="connsiteX3" fmla="*/ 84890 w 453390"/>
+                  <a:gd name="connsiteY3" fmla="*/ 263525 h 263525"/>
+                  <a:gd name="connsiteX4" fmla="*/ 59217 w 453390"/>
+                  <a:gd name="connsiteY4" fmla="*/ 168771 h 263525"/>
+                  <a:gd name="connsiteX5" fmla="*/ 4819 w 453390"/>
+                  <a:gd name="connsiteY5" fmla="*/ 221542 h 263525"/>
+                  <a:gd name="connsiteX6" fmla="*/ 0 w 453390"/>
+                  <a:gd name="connsiteY6" fmla="*/ 54571 h 263525"/>
+                  <a:gd name="connsiteX7" fmla="*/ 55658 w 453390"/>
+                  <a:gd name="connsiteY7" fmla="*/ 89403 h 263525"/>
+                  <a:gd name="connsiteX8" fmla="*/ 84890 w 453390"/>
+                  <a:gd name="connsiteY8" fmla="*/ 0 h 263525"/>
+                </a:gdLst>
+                <a:ahLst/>
+                <a:cxnLst>
+                  <a:cxn ang="0">
+                    <a:pos x="connsiteX0" y="connsiteY0"/>
+                  </a:cxn>
+                  <a:cxn ang="0">
+                    <a:pos x="connsiteX1" y="connsiteY1"/>
+                  </a:cxn>
+                  <a:cxn ang="0">
+                    <a:pos x="connsiteX2" y="connsiteY2"/>
+                  </a:cxn>
+                  <a:cxn ang="0">
+                    <a:pos x="connsiteX3" y="connsiteY3"/>
+                  </a:cxn>
+                  <a:cxn ang="0">
+                    <a:pos x="connsiteX4" y="connsiteY4"/>
+                  </a:cxn>
+                  <a:cxn ang="0">
+                    <a:pos x="connsiteX5" y="connsiteY5"/>
+                  </a:cxn>
+                  <a:cxn ang="0">
+                    <a:pos x="connsiteX6" y="connsiteY6"/>
+                  </a:cxn>
+                  <a:cxn ang="0">
+                    <a:pos x="connsiteX7" y="connsiteY7"/>
+                  </a:cxn>
+                  <a:cxn ang="0">
+                    <a:pos x="connsiteX8" y="connsiteY8"/>
+                  </a:cxn>
+                </a:cxnLst>
+                <a:rect l="l" t="t" r="r" b="b"/>
+                <a:pathLst>
+                  <a:path w="453390" h="263525">
+                    <a:moveTo>
+                      <a:pt x="84890" y="0"/>
+                    </a:moveTo>
+                    <a:lnTo>
+                      <a:pt x="453390" y="0"/>
+                    </a:lnTo>
+                    <a:lnTo>
+                      <a:pt x="453390" y="263525"/>
+                    </a:lnTo>
+                    <a:lnTo>
+                      <a:pt x="84890" y="263525"/>
+                    </a:lnTo>
+                    <a:cubicBezTo>
+                      <a:pt x="68745" y="263525"/>
+                      <a:pt x="59217" y="193028"/>
+                      <a:pt x="59217" y="168771"/>
+                    </a:cubicBezTo>
+                    <a:lnTo>
+                      <a:pt x="4819" y="221542"/>
+                    </a:lnTo>
+                    <a:lnTo>
+                      <a:pt x="0" y="54571"/>
+                    </a:lnTo>
+                    <a:lnTo>
+                      <a:pt x="55658" y="89403"/>
+                    </a:lnTo>
+                    <a:cubicBezTo>
+                      <a:pt x="55658" y="65146"/>
+                      <a:pt x="68745" y="0"/>
+                      <a:pt x="84890" y="0"/>
+                    </a:cubicBezTo>
+                    <a:close/>
+                  </a:path>
+                </a:pathLst>
+              </a:custGeom>
+            </p:spPr>
+            <p:style>
+              <a:lnRef idx="2">
+                <a:schemeClr val="accent5">
+                  <a:shade val="50000"/>
+                </a:schemeClr>
+              </a:lnRef>
+              <a:fillRef idx="1">
+                <a:schemeClr val="accent5"/>
+              </a:fillRef>
+              <a:effectRef idx="0">
+                <a:schemeClr val="accent5"/>
+              </a:effectRef>
+              <a:fontRef idx="minor">
+                <a:schemeClr val="lt1"/>
+              </a:fontRef>
+            </p:style>
+            <p:txBody>
+              <a:bodyPr rot="0" spcFirstLastPara="0" vert="horz" wrap="square" lIns="0" tIns="0" rIns="0" bIns="0" numCol="1" spcCol="0" rtlCol="0" fromWordArt="0" anchor="ctr" anchorCtr="0" forceAA="0" compatLnSpc="1">
+                <a:prstTxWarp prst="textNoShape">
+                  <a:avLst/>
+                </a:prstTxWarp>
+                <a:noAutofit/>
+              </a:bodyPr>
+              <a:lstStyle/>
+              <a:p>
+                <a:pPr indent="73025" algn="ctr">
+                  <a:spcAft>
+                    <a:spcPts val="0"/>
+                  </a:spcAft>
+                </a:pPr>
+                <a:r>
+                  <a:rPr lang="en-US" sz="1200" kern="100" dirty="0">
+                    <a:solidFill>
+                      <a:srgbClr val="FFFFFF"/>
+                    </a:solidFill>
+                    <a:effectLst/>
+                    <a:ea typeface="新細明體" panose="02020500000000000000" pitchFamily="18" charset="-120"/>
+                    <a:cs typeface="Times New Roman" panose="02020603050405020304" pitchFamily="18" charset="0"/>
+                  </a:rPr>
+                  <a:t>1</a:t>
+                </a:r>
+                <a:endParaRPr lang="zh-TW" sz="1200" kern="100" dirty="0">
+                  <a:effectLst/>
+                  <a:ea typeface="新細明體" panose="02020500000000000000" pitchFamily="18" charset="-120"/>
+                  <a:cs typeface="Times New Roman" panose="02020603050405020304" pitchFamily="18" charset="0"/>
+                </a:endParaRPr>
+              </a:p>
+            </p:txBody>
+          </p:sp>
+          <p:sp>
+            <p:nvSpPr>
+              <p:cNvPr id="17" name="手繪多邊形: 圖案 10">
+                <a:extLst>
+                  <a:ext uri="{FF2B5EF4-FFF2-40B4-BE49-F238E27FC236}">
+                    <a16:creationId xmlns:a16="http://schemas.microsoft.com/office/drawing/2014/main" id="{E9BBC750-3901-4944-B70C-0FBF310C9B3B}"/>
+                  </a:ext>
+                </a:extLst>
+              </p:cNvPr>
+              <p:cNvSpPr/>
+              <p:nvPr/>
+            </p:nvSpPr>
+            <p:spPr>
+              <a:xfrm>
+                <a:off x="1784030" y="2736215"/>
+                <a:ext cx="219078" cy="175260"/>
+              </a:xfrm>
+              <a:custGeom>
+                <a:avLst/>
+                <a:gdLst>
+                  <a:gd name="connsiteX0" fmla="*/ 84890 w 453390"/>
+                  <a:gd name="connsiteY0" fmla="*/ 0 h 263525"/>
+                  <a:gd name="connsiteX1" fmla="*/ 453390 w 453390"/>
+                  <a:gd name="connsiteY1" fmla="*/ 0 h 263525"/>
+                  <a:gd name="connsiteX2" fmla="*/ 453390 w 453390"/>
+                  <a:gd name="connsiteY2" fmla="*/ 263525 h 263525"/>
+                  <a:gd name="connsiteX3" fmla="*/ 84890 w 453390"/>
+                  <a:gd name="connsiteY3" fmla="*/ 263525 h 263525"/>
+                  <a:gd name="connsiteX4" fmla="*/ 59217 w 453390"/>
+                  <a:gd name="connsiteY4" fmla="*/ 168771 h 263525"/>
+                  <a:gd name="connsiteX5" fmla="*/ 4819 w 453390"/>
+                  <a:gd name="connsiteY5" fmla="*/ 221542 h 263525"/>
+                  <a:gd name="connsiteX6" fmla="*/ 0 w 453390"/>
+                  <a:gd name="connsiteY6" fmla="*/ 54571 h 263525"/>
+                  <a:gd name="connsiteX7" fmla="*/ 55658 w 453390"/>
+                  <a:gd name="connsiteY7" fmla="*/ 89403 h 263525"/>
+                  <a:gd name="connsiteX8" fmla="*/ 84890 w 453390"/>
+                  <a:gd name="connsiteY8" fmla="*/ 0 h 263525"/>
+                </a:gdLst>
+                <a:ahLst/>
+                <a:cxnLst>
+                  <a:cxn ang="0">
+                    <a:pos x="connsiteX0" y="connsiteY0"/>
+                  </a:cxn>
+                  <a:cxn ang="0">
+                    <a:pos x="connsiteX1" y="connsiteY1"/>
+                  </a:cxn>
+                  <a:cxn ang="0">
+                    <a:pos x="connsiteX2" y="connsiteY2"/>
+                  </a:cxn>
+                  <a:cxn ang="0">
+                    <a:pos x="connsiteX3" y="connsiteY3"/>
+                  </a:cxn>
+                  <a:cxn ang="0">
+                    <a:pos x="connsiteX4" y="connsiteY4"/>
+                  </a:cxn>
+                  <a:cxn ang="0">
+                    <a:pos x="connsiteX5" y="connsiteY5"/>
+                  </a:cxn>
+                  <a:cxn ang="0">
+                    <a:pos x="connsiteX6" y="connsiteY6"/>
+                  </a:cxn>
+                  <a:cxn ang="0">
+                    <a:pos x="connsiteX7" y="connsiteY7"/>
+                  </a:cxn>
+                  <a:cxn ang="0">
+                    <a:pos x="connsiteX8" y="connsiteY8"/>
+                  </a:cxn>
+                </a:cxnLst>
+                <a:rect l="l" t="t" r="r" b="b"/>
+                <a:pathLst>
+                  <a:path w="453390" h="263525">
+                    <a:moveTo>
+                      <a:pt x="84890" y="0"/>
+                    </a:moveTo>
+                    <a:lnTo>
+                      <a:pt x="453390" y="0"/>
+                    </a:lnTo>
+                    <a:lnTo>
+                      <a:pt x="453390" y="263525"/>
+                    </a:lnTo>
+                    <a:lnTo>
+                      <a:pt x="84890" y="263525"/>
+                    </a:lnTo>
+                    <a:cubicBezTo>
+                      <a:pt x="68745" y="263525"/>
+                      <a:pt x="59217" y="193028"/>
+                      <a:pt x="59217" y="168771"/>
+                    </a:cubicBezTo>
+                    <a:lnTo>
+                      <a:pt x="4819" y="221542"/>
+                    </a:lnTo>
+                    <a:lnTo>
+                      <a:pt x="0" y="54571"/>
+                    </a:lnTo>
+                    <a:lnTo>
+                      <a:pt x="55658" y="89403"/>
+                    </a:lnTo>
+                    <a:cubicBezTo>
+                      <a:pt x="55658" y="65146"/>
+                      <a:pt x="68745" y="0"/>
+                      <a:pt x="84890" y="0"/>
+                    </a:cubicBezTo>
+                    <a:close/>
+                  </a:path>
+                </a:pathLst>
+              </a:custGeom>
+            </p:spPr>
+            <p:style>
+              <a:lnRef idx="2">
+                <a:schemeClr val="accent5">
+                  <a:shade val="50000"/>
+                </a:schemeClr>
+              </a:lnRef>
+              <a:fillRef idx="1">
+                <a:schemeClr val="accent5"/>
+              </a:fillRef>
+              <a:effectRef idx="0">
+                <a:schemeClr val="accent5"/>
+              </a:effectRef>
+              <a:fontRef idx="minor">
+                <a:schemeClr val="lt1"/>
+              </a:fontRef>
+            </p:style>
+            <p:txBody>
+              <a:bodyPr rot="0" spcFirstLastPara="0" vert="horz" wrap="square" lIns="0" tIns="0" rIns="0" bIns="0" numCol="1" spcCol="0" rtlCol="0" fromWordArt="0" anchor="ctr" anchorCtr="0" forceAA="0" compatLnSpc="1">
+                <a:prstTxWarp prst="textNoShape">
+                  <a:avLst/>
+                </a:prstTxWarp>
+                <a:noAutofit/>
+              </a:bodyPr>
+              <a:lstStyle/>
+              <a:p>
+                <a:pPr indent="73025" algn="ctr">
+                  <a:spcAft>
+                    <a:spcPts val="0"/>
+                  </a:spcAft>
+                </a:pPr>
+                <a:r>
+                  <a:rPr lang="en-US" sz="1200" kern="100" dirty="0">
+                    <a:solidFill>
+                      <a:srgbClr val="FFFFFF"/>
+                    </a:solidFill>
+                    <a:effectLst/>
+                    <a:ea typeface="新細明體" panose="02020500000000000000" pitchFamily="18" charset="-120"/>
+                    <a:cs typeface="Times New Roman" panose="02020603050405020304" pitchFamily="18" charset="0"/>
+                  </a:rPr>
+                  <a:t>1</a:t>
+                </a:r>
+                <a:endParaRPr lang="zh-TW" sz="1200" kern="100" dirty="0">
+                  <a:effectLst/>
+                  <a:ea typeface="新細明體" panose="02020500000000000000" pitchFamily="18" charset="-120"/>
+                  <a:cs typeface="Times New Roman" panose="02020603050405020304" pitchFamily="18" charset="0"/>
+                </a:endParaRPr>
+              </a:p>
+            </p:txBody>
+          </p:sp>
+          <p:sp>
+            <p:nvSpPr>
+              <p:cNvPr id="18" name="手繪多邊形: 圖案 10">
+                <a:extLst>
+                  <a:ext uri="{FF2B5EF4-FFF2-40B4-BE49-F238E27FC236}">
+                    <a16:creationId xmlns:a16="http://schemas.microsoft.com/office/drawing/2014/main" id="{88305C79-F0FE-4F62-8A1E-9B23FCE4CD53}"/>
+                  </a:ext>
+                </a:extLst>
+              </p:cNvPr>
+              <p:cNvSpPr/>
+              <p:nvPr/>
+            </p:nvSpPr>
+            <p:spPr>
+              <a:xfrm>
+                <a:off x="2065016" y="2736215"/>
+                <a:ext cx="219078" cy="175260"/>
+              </a:xfrm>
+              <a:custGeom>
+                <a:avLst/>
+                <a:gdLst>
+                  <a:gd name="connsiteX0" fmla="*/ 84890 w 453390"/>
+                  <a:gd name="connsiteY0" fmla="*/ 0 h 263525"/>
+                  <a:gd name="connsiteX1" fmla="*/ 453390 w 453390"/>
+                  <a:gd name="connsiteY1" fmla="*/ 0 h 263525"/>
+                  <a:gd name="connsiteX2" fmla="*/ 453390 w 453390"/>
+                  <a:gd name="connsiteY2" fmla="*/ 263525 h 263525"/>
+                  <a:gd name="connsiteX3" fmla="*/ 84890 w 453390"/>
+                  <a:gd name="connsiteY3" fmla="*/ 263525 h 263525"/>
+                  <a:gd name="connsiteX4" fmla="*/ 59217 w 453390"/>
+                  <a:gd name="connsiteY4" fmla="*/ 168771 h 263525"/>
+                  <a:gd name="connsiteX5" fmla="*/ 4819 w 453390"/>
+                  <a:gd name="connsiteY5" fmla="*/ 221542 h 263525"/>
+                  <a:gd name="connsiteX6" fmla="*/ 0 w 453390"/>
+                  <a:gd name="connsiteY6" fmla="*/ 54571 h 263525"/>
+                  <a:gd name="connsiteX7" fmla="*/ 55658 w 453390"/>
+                  <a:gd name="connsiteY7" fmla="*/ 89403 h 263525"/>
+                  <a:gd name="connsiteX8" fmla="*/ 84890 w 453390"/>
+                  <a:gd name="connsiteY8" fmla="*/ 0 h 263525"/>
+                </a:gdLst>
+                <a:ahLst/>
+                <a:cxnLst>
+                  <a:cxn ang="0">
+                    <a:pos x="connsiteX0" y="connsiteY0"/>
+                  </a:cxn>
+                  <a:cxn ang="0">
+                    <a:pos x="connsiteX1" y="connsiteY1"/>
+                  </a:cxn>
+                  <a:cxn ang="0">
+                    <a:pos x="connsiteX2" y="connsiteY2"/>
+                  </a:cxn>
+                  <a:cxn ang="0">
+                    <a:pos x="connsiteX3" y="connsiteY3"/>
+                  </a:cxn>
+                  <a:cxn ang="0">
+                    <a:pos x="connsiteX4" y="connsiteY4"/>
+                  </a:cxn>
+                  <a:cxn ang="0">
+                    <a:pos x="connsiteX5" y="connsiteY5"/>
+                  </a:cxn>
+                  <a:cxn ang="0">
+                    <a:pos x="connsiteX6" y="connsiteY6"/>
+                  </a:cxn>
+                  <a:cxn ang="0">
+                    <a:pos x="connsiteX7" y="connsiteY7"/>
+                  </a:cxn>
+                  <a:cxn ang="0">
+                    <a:pos x="connsiteX8" y="connsiteY8"/>
+                  </a:cxn>
+                </a:cxnLst>
+                <a:rect l="l" t="t" r="r" b="b"/>
+                <a:pathLst>
+                  <a:path w="453390" h="263525">
+                    <a:moveTo>
+                      <a:pt x="84890" y="0"/>
+                    </a:moveTo>
+                    <a:lnTo>
+                      <a:pt x="453390" y="0"/>
+                    </a:lnTo>
+                    <a:lnTo>
+                      <a:pt x="453390" y="263525"/>
+                    </a:lnTo>
+                    <a:lnTo>
+                      <a:pt x="84890" y="263525"/>
+                    </a:lnTo>
+                    <a:cubicBezTo>
+                      <a:pt x="68745" y="263525"/>
+                      <a:pt x="59217" y="193028"/>
+                      <a:pt x="59217" y="168771"/>
+                    </a:cubicBezTo>
+                    <a:lnTo>
+                      <a:pt x="4819" y="221542"/>
+                    </a:lnTo>
+                    <a:lnTo>
+                      <a:pt x="0" y="54571"/>
+                    </a:lnTo>
+                    <a:lnTo>
+                      <a:pt x="55658" y="89403"/>
+                    </a:lnTo>
+                    <a:cubicBezTo>
+                      <a:pt x="55658" y="65146"/>
+                      <a:pt x="68745" y="0"/>
+                      <a:pt x="84890" y="0"/>
+                    </a:cubicBezTo>
+                    <a:close/>
+                  </a:path>
+                </a:pathLst>
+              </a:custGeom>
+            </p:spPr>
+            <p:style>
+              <a:lnRef idx="2">
+                <a:schemeClr val="accent5">
+                  <a:shade val="50000"/>
+                </a:schemeClr>
+              </a:lnRef>
+              <a:fillRef idx="1">
+                <a:schemeClr val="accent5"/>
+              </a:fillRef>
+              <a:effectRef idx="0">
+                <a:schemeClr val="accent5"/>
+              </a:effectRef>
+              <a:fontRef idx="minor">
+                <a:schemeClr val="lt1"/>
+              </a:fontRef>
+            </p:style>
+            <p:txBody>
+              <a:bodyPr rot="0" spcFirstLastPara="0" vert="horz" wrap="square" lIns="0" tIns="0" rIns="0" bIns="0" numCol="1" spcCol="0" rtlCol="0" fromWordArt="0" anchor="ctr" anchorCtr="0" forceAA="0" compatLnSpc="1">
+                <a:prstTxWarp prst="textNoShape">
+                  <a:avLst/>
+                </a:prstTxWarp>
+                <a:noAutofit/>
+              </a:bodyPr>
+              <a:lstStyle/>
+              <a:p>
+                <a:pPr indent="73025" algn="ctr">
+                  <a:spcAft>
+                    <a:spcPts val="0"/>
+                  </a:spcAft>
+                </a:pPr>
+                <a:r>
+                  <a:rPr lang="en-US" sz="1200" kern="100" dirty="0">
+                    <a:solidFill>
+                      <a:srgbClr val="FFFFFF"/>
+                    </a:solidFill>
+                    <a:effectLst/>
+                    <a:ea typeface="新細明體" panose="02020500000000000000" pitchFamily="18" charset="-120"/>
+                    <a:cs typeface="Times New Roman" panose="02020603050405020304" pitchFamily="18" charset="0"/>
+                  </a:rPr>
+                  <a:t>1</a:t>
+                </a:r>
+                <a:endParaRPr lang="zh-TW" sz="1200" kern="100" dirty="0">
+                  <a:effectLst/>
+                  <a:ea typeface="新細明體" panose="02020500000000000000" pitchFamily="18" charset="-120"/>
+                  <a:cs typeface="Times New Roman" panose="02020603050405020304" pitchFamily="18" charset="0"/>
+                </a:endParaRPr>
+              </a:p>
+            </p:txBody>
+          </p:sp>
+          <p:sp>
+            <p:nvSpPr>
+              <p:cNvPr id="19" name="手繪多邊形: 圖案 10">
+                <a:extLst>
+                  <a:ext uri="{FF2B5EF4-FFF2-40B4-BE49-F238E27FC236}">
+                    <a16:creationId xmlns:a16="http://schemas.microsoft.com/office/drawing/2014/main" id="{57EAB87F-B250-4D76-A521-AD65BB805D50}"/>
+                  </a:ext>
+                </a:extLst>
+              </p:cNvPr>
+              <p:cNvSpPr/>
+              <p:nvPr/>
+            </p:nvSpPr>
+            <p:spPr>
+              <a:xfrm>
+                <a:off x="2346002" y="2736215"/>
+                <a:ext cx="219078" cy="175260"/>
+              </a:xfrm>
+              <a:custGeom>
+                <a:avLst/>
+                <a:gdLst>
+                  <a:gd name="connsiteX0" fmla="*/ 84890 w 453390"/>
+                  <a:gd name="connsiteY0" fmla="*/ 0 h 263525"/>
+                  <a:gd name="connsiteX1" fmla="*/ 453390 w 453390"/>
+                  <a:gd name="connsiteY1" fmla="*/ 0 h 263525"/>
+                  <a:gd name="connsiteX2" fmla="*/ 453390 w 453390"/>
+                  <a:gd name="connsiteY2" fmla="*/ 263525 h 263525"/>
+                  <a:gd name="connsiteX3" fmla="*/ 84890 w 453390"/>
+                  <a:gd name="connsiteY3" fmla="*/ 263525 h 263525"/>
+                  <a:gd name="connsiteX4" fmla="*/ 59217 w 453390"/>
+                  <a:gd name="connsiteY4" fmla="*/ 168771 h 263525"/>
+                  <a:gd name="connsiteX5" fmla="*/ 4819 w 453390"/>
+                  <a:gd name="connsiteY5" fmla="*/ 221542 h 263525"/>
+                  <a:gd name="connsiteX6" fmla="*/ 0 w 453390"/>
+                  <a:gd name="connsiteY6" fmla="*/ 54571 h 263525"/>
+                  <a:gd name="connsiteX7" fmla="*/ 55658 w 453390"/>
+                  <a:gd name="connsiteY7" fmla="*/ 89403 h 263525"/>
+                  <a:gd name="connsiteX8" fmla="*/ 84890 w 453390"/>
+                  <a:gd name="connsiteY8" fmla="*/ 0 h 263525"/>
+                </a:gdLst>
+                <a:ahLst/>
+                <a:cxnLst>
+                  <a:cxn ang="0">
+                    <a:pos x="connsiteX0" y="connsiteY0"/>
+                  </a:cxn>
+                  <a:cxn ang="0">
+                    <a:pos x="connsiteX1" y="connsiteY1"/>
+                  </a:cxn>
+                  <a:cxn ang="0">
+                    <a:pos x="connsiteX2" y="connsiteY2"/>
+                  </a:cxn>
+                  <a:cxn ang="0">
+                    <a:pos x="connsiteX3" y="connsiteY3"/>
+                  </a:cxn>
+                  <a:cxn ang="0">
+                    <a:pos x="connsiteX4" y="connsiteY4"/>
+                  </a:cxn>
+                  <a:cxn ang="0">
+                    <a:pos x="connsiteX5" y="connsiteY5"/>
+                  </a:cxn>
+                  <a:cxn ang="0">
+                    <a:pos x="connsiteX6" y="connsiteY6"/>
+                  </a:cxn>
+                  <a:cxn ang="0">
+                    <a:pos x="connsiteX7" y="connsiteY7"/>
+                  </a:cxn>
+                  <a:cxn ang="0">
+                    <a:pos x="connsiteX8" y="connsiteY8"/>
+                  </a:cxn>
+                </a:cxnLst>
+                <a:rect l="l" t="t" r="r" b="b"/>
+                <a:pathLst>
+                  <a:path w="453390" h="263525">
+                    <a:moveTo>
+                      <a:pt x="84890" y="0"/>
+                    </a:moveTo>
+                    <a:lnTo>
+                      <a:pt x="453390" y="0"/>
+                    </a:lnTo>
+                    <a:lnTo>
+                      <a:pt x="453390" y="263525"/>
+                    </a:lnTo>
+                    <a:lnTo>
+                      <a:pt x="84890" y="263525"/>
+                    </a:lnTo>
+                    <a:cubicBezTo>
+                      <a:pt x="68745" y="263525"/>
+                      <a:pt x="59217" y="193028"/>
+                      <a:pt x="59217" y="168771"/>
+                    </a:cubicBezTo>
+                    <a:lnTo>
+                      <a:pt x="4819" y="221542"/>
+                    </a:lnTo>
+                    <a:lnTo>
+                      <a:pt x="0" y="54571"/>
+                    </a:lnTo>
+                    <a:lnTo>
+                      <a:pt x="55658" y="89403"/>
+                    </a:lnTo>
+                    <a:cubicBezTo>
+                      <a:pt x="55658" y="65146"/>
+                      <a:pt x="68745" y="0"/>
+                      <a:pt x="84890" y="0"/>
+                    </a:cubicBezTo>
+                    <a:close/>
+                  </a:path>
+                </a:pathLst>
+              </a:custGeom>
+            </p:spPr>
+            <p:style>
+              <a:lnRef idx="2">
+                <a:schemeClr val="accent5">
+                  <a:shade val="50000"/>
+                </a:schemeClr>
+              </a:lnRef>
+              <a:fillRef idx="1">
+                <a:schemeClr val="accent5"/>
+              </a:fillRef>
+              <a:effectRef idx="0">
+                <a:schemeClr val="accent5"/>
+              </a:effectRef>
+              <a:fontRef idx="minor">
+                <a:schemeClr val="lt1"/>
+              </a:fontRef>
+            </p:style>
+            <p:txBody>
+              <a:bodyPr rot="0" spcFirstLastPara="0" vert="horz" wrap="square" lIns="0" tIns="0" rIns="0" bIns="0" numCol="1" spcCol="0" rtlCol="0" fromWordArt="0" anchor="ctr" anchorCtr="0" forceAA="0" compatLnSpc="1">
+                <a:prstTxWarp prst="textNoShape">
+                  <a:avLst/>
+                </a:prstTxWarp>
+                <a:noAutofit/>
+              </a:bodyPr>
+              <a:lstStyle/>
+              <a:p>
+                <a:pPr indent="73025" algn="ctr">
+                  <a:spcAft>
+                    <a:spcPts val="0"/>
+                  </a:spcAft>
+                </a:pPr>
+                <a:r>
+                  <a:rPr lang="en-US" sz="1200" kern="100" dirty="0">
+                    <a:solidFill>
+                      <a:srgbClr val="FFFFFF"/>
+                    </a:solidFill>
+                    <a:effectLst/>
+                    <a:ea typeface="新細明體" panose="02020500000000000000" pitchFamily="18" charset="-120"/>
+                    <a:cs typeface="Times New Roman" panose="02020603050405020304" pitchFamily="18" charset="0"/>
+                  </a:rPr>
+                  <a:t>1</a:t>
+                </a:r>
+                <a:endParaRPr lang="zh-TW" sz="1200" kern="100" dirty="0">
+                  <a:effectLst/>
+                  <a:ea typeface="新細明體" panose="02020500000000000000" pitchFamily="18" charset="-120"/>
+                  <a:cs typeface="Times New Roman" panose="02020603050405020304" pitchFamily="18" charset="0"/>
+                </a:endParaRPr>
+              </a:p>
+            </p:txBody>
+          </p:sp>
+          <p:sp>
+            <p:nvSpPr>
+              <p:cNvPr id="20" name="手繪多邊形: 圖案 10">
+                <a:extLst>
+                  <a:ext uri="{FF2B5EF4-FFF2-40B4-BE49-F238E27FC236}">
+                    <a16:creationId xmlns:a16="http://schemas.microsoft.com/office/drawing/2014/main" id="{E12FA86B-02A5-4F12-B152-14AC62BAACFA}"/>
+                  </a:ext>
+                </a:extLst>
+              </p:cNvPr>
+              <p:cNvSpPr/>
+              <p:nvPr/>
+            </p:nvSpPr>
+            <p:spPr>
+              <a:xfrm>
+                <a:off x="2633667" y="2736215"/>
+                <a:ext cx="219078" cy="175260"/>
+              </a:xfrm>
+              <a:custGeom>
+                <a:avLst/>
+                <a:gdLst>
+                  <a:gd name="connsiteX0" fmla="*/ 84890 w 453390"/>
+                  <a:gd name="connsiteY0" fmla="*/ 0 h 263525"/>
+                  <a:gd name="connsiteX1" fmla="*/ 453390 w 453390"/>
+                  <a:gd name="connsiteY1" fmla="*/ 0 h 263525"/>
+                  <a:gd name="connsiteX2" fmla="*/ 453390 w 453390"/>
+                  <a:gd name="connsiteY2" fmla="*/ 263525 h 263525"/>
+                  <a:gd name="connsiteX3" fmla="*/ 84890 w 453390"/>
+                  <a:gd name="connsiteY3" fmla="*/ 263525 h 263525"/>
+                  <a:gd name="connsiteX4" fmla="*/ 59217 w 453390"/>
+                  <a:gd name="connsiteY4" fmla="*/ 168771 h 263525"/>
+                  <a:gd name="connsiteX5" fmla="*/ 4819 w 453390"/>
+                  <a:gd name="connsiteY5" fmla="*/ 221542 h 263525"/>
+                  <a:gd name="connsiteX6" fmla="*/ 0 w 453390"/>
+                  <a:gd name="connsiteY6" fmla="*/ 54571 h 263525"/>
+                  <a:gd name="connsiteX7" fmla="*/ 55658 w 453390"/>
+                  <a:gd name="connsiteY7" fmla="*/ 89403 h 263525"/>
+                  <a:gd name="connsiteX8" fmla="*/ 84890 w 453390"/>
+                  <a:gd name="connsiteY8" fmla="*/ 0 h 263525"/>
+                </a:gdLst>
+                <a:ahLst/>
+                <a:cxnLst>
+                  <a:cxn ang="0">
+                    <a:pos x="connsiteX0" y="connsiteY0"/>
+                  </a:cxn>
+                  <a:cxn ang="0">
+                    <a:pos x="connsiteX1" y="connsiteY1"/>
+                  </a:cxn>
+                  <a:cxn ang="0">
+                    <a:pos x="connsiteX2" y="connsiteY2"/>
+                  </a:cxn>
+                  <a:cxn ang="0">
+                    <a:pos x="connsiteX3" y="connsiteY3"/>
+                  </a:cxn>
+                  <a:cxn ang="0">
+                    <a:pos x="connsiteX4" y="connsiteY4"/>
+                  </a:cxn>
+                  <a:cxn ang="0">
+                    <a:pos x="connsiteX5" y="connsiteY5"/>
+                  </a:cxn>
+                  <a:cxn ang="0">
+                    <a:pos x="connsiteX6" y="connsiteY6"/>
+                  </a:cxn>
+                  <a:cxn ang="0">
+                    <a:pos x="connsiteX7" y="connsiteY7"/>
+                  </a:cxn>
+                  <a:cxn ang="0">
+                    <a:pos x="connsiteX8" y="connsiteY8"/>
+                  </a:cxn>
+                </a:cxnLst>
+                <a:rect l="l" t="t" r="r" b="b"/>
+                <a:pathLst>
+                  <a:path w="453390" h="263525">
+                    <a:moveTo>
+                      <a:pt x="84890" y="0"/>
+                    </a:moveTo>
+                    <a:lnTo>
+                      <a:pt x="453390" y="0"/>
+                    </a:lnTo>
+                    <a:lnTo>
+                      <a:pt x="453390" y="263525"/>
+                    </a:lnTo>
+                    <a:lnTo>
+                      <a:pt x="84890" y="263525"/>
+                    </a:lnTo>
+                    <a:cubicBezTo>
+                      <a:pt x="68745" y="263525"/>
+                      <a:pt x="59217" y="193028"/>
+                      <a:pt x="59217" y="168771"/>
+                    </a:cubicBezTo>
+                    <a:lnTo>
+                      <a:pt x="4819" y="221542"/>
+                    </a:lnTo>
+                    <a:lnTo>
+                      <a:pt x="0" y="54571"/>
+                    </a:lnTo>
+                    <a:lnTo>
+                      <a:pt x="55658" y="89403"/>
+                    </a:lnTo>
+                    <a:cubicBezTo>
+                      <a:pt x="55658" y="65146"/>
+                      <a:pt x="68745" y="0"/>
+                      <a:pt x="84890" y="0"/>
+                    </a:cubicBezTo>
+                    <a:close/>
+                  </a:path>
+                </a:pathLst>
+              </a:custGeom>
+            </p:spPr>
+            <p:style>
+              <a:lnRef idx="2">
+                <a:schemeClr val="accent5">
+                  <a:shade val="50000"/>
+                </a:schemeClr>
+              </a:lnRef>
+              <a:fillRef idx="1">
+                <a:schemeClr val="accent5"/>
+              </a:fillRef>
+              <a:effectRef idx="0">
+                <a:schemeClr val="accent5"/>
+              </a:effectRef>
+              <a:fontRef idx="minor">
+                <a:schemeClr val="lt1"/>
+              </a:fontRef>
+            </p:style>
+            <p:txBody>
+              <a:bodyPr rot="0" spcFirstLastPara="0" vert="horz" wrap="square" lIns="0" tIns="0" rIns="0" bIns="0" numCol="1" spcCol="0" rtlCol="0" fromWordArt="0" anchor="ctr" anchorCtr="0" forceAA="0" compatLnSpc="1">
+                <a:prstTxWarp prst="textNoShape">
+                  <a:avLst/>
+                </a:prstTxWarp>
+                <a:noAutofit/>
+              </a:bodyPr>
+              <a:lstStyle/>
+              <a:p>
+                <a:pPr indent="73025" algn="ctr">
+                  <a:spcAft>
+                    <a:spcPts val="0"/>
+                  </a:spcAft>
+                </a:pPr>
+                <a:r>
+                  <a:rPr lang="en-US" sz="1200" kern="100" dirty="0">
+                    <a:solidFill>
+                      <a:srgbClr val="FFFFFF"/>
+                    </a:solidFill>
+                    <a:effectLst/>
+                    <a:ea typeface="新細明體" panose="02020500000000000000" pitchFamily="18" charset="-120"/>
+                    <a:cs typeface="Times New Roman" panose="02020603050405020304" pitchFamily="18" charset="0"/>
+                  </a:rPr>
+                  <a:t>1</a:t>
+                </a:r>
+                <a:endParaRPr lang="zh-TW" sz="1200" kern="100" dirty="0">
+                  <a:effectLst/>
+                  <a:ea typeface="新細明體" panose="02020500000000000000" pitchFamily="18" charset="-120"/>
+                  <a:cs typeface="Times New Roman" panose="02020603050405020304" pitchFamily="18" charset="0"/>
+                </a:endParaRPr>
+              </a:p>
+            </p:txBody>
+          </p:sp>
+          <p:sp>
+            <p:nvSpPr>
+              <p:cNvPr id="21" name="手繪多邊形: 圖案 10">
+                <a:extLst>
+                  <a:ext uri="{FF2B5EF4-FFF2-40B4-BE49-F238E27FC236}">
+                    <a16:creationId xmlns:a16="http://schemas.microsoft.com/office/drawing/2014/main" id="{10723A31-625F-430A-8DD0-305ACCE78561}"/>
+                  </a:ext>
+                </a:extLst>
+              </p:cNvPr>
+              <p:cNvSpPr/>
+              <p:nvPr/>
+            </p:nvSpPr>
+            <p:spPr>
+              <a:xfrm>
+                <a:off x="2914653" y="2736215"/>
+                <a:ext cx="219078" cy="175260"/>
+              </a:xfrm>
+              <a:custGeom>
+                <a:avLst/>
+                <a:gdLst>
+                  <a:gd name="connsiteX0" fmla="*/ 84890 w 453390"/>
+                  <a:gd name="connsiteY0" fmla="*/ 0 h 263525"/>
+                  <a:gd name="connsiteX1" fmla="*/ 453390 w 453390"/>
+                  <a:gd name="connsiteY1" fmla="*/ 0 h 263525"/>
+                  <a:gd name="connsiteX2" fmla="*/ 453390 w 453390"/>
+                  <a:gd name="connsiteY2" fmla="*/ 263525 h 263525"/>
+                  <a:gd name="connsiteX3" fmla="*/ 84890 w 453390"/>
+                  <a:gd name="connsiteY3" fmla="*/ 263525 h 263525"/>
+                  <a:gd name="connsiteX4" fmla="*/ 59217 w 453390"/>
+                  <a:gd name="connsiteY4" fmla="*/ 168771 h 263525"/>
+                  <a:gd name="connsiteX5" fmla="*/ 4819 w 453390"/>
+                  <a:gd name="connsiteY5" fmla="*/ 221542 h 263525"/>
+                  <a:gd name="connsiteX6" fmla="*/ 0 w 453390"/>
+                  <a:gd name="connsiteY6" fmla="*/ 54571 h 263525"/>
+                  <a:gd name="connsiteX7" fmla="*/ 55658 w 453390"/>
+                  <a:gd name="connsiteY7" fmla="*/ 89403 h 263525"/>
+                  <a:gd name="connsiteX8" fmla="*/ 84890 w 453390"/>
+                  <a:gd name="connsiteY8" fmla="*/ 0 h 263525"/>
+                </a:gdLst>
+                <a:ahLst/>
+                <a:cxnLst>
+                  <a:cxn ang="0">
+                    <a:pos x="connsiteX0" y="connsiteY0"/>
+                  </a:cxn>
+                  <a:cxn ang="0">
+                    <a:pos x="connsiteX1" y="connsiteY1"/>
+                  </a:cxn>
+                  <a:cxn ang="0">
+                    <a:pos x="connsiteX2" y="connsiteY2"/>
+                  </a:cxn>
+                  <a:cxn ang="0">
+                    <a:pos x="connsiteX3" y="connsiteY3"/>
+                  </a:cxn>
+                  <a:cxn ang="0">
+                    <a:pos x="connsiteX4" y="connsiteY4"/>
+                  </a:cxn>
+                  <a:cxn ang="0">
+                    <a:pos x="connsiteX5" y="connsiteY5"/>
+                  </a:cxn>
+                  <a:cxn ang="0">
+                    <a:pos x="connsiteX6" y="connsiteY6"/>
+                  </a:cxn>
+                  <a:cxn ang="0">
+                    <a:pos x="connsiteX7" y="connsiteY7"/>
+                  </a:cxn>
+                  <a:cxn ang="0">
+                    <a:pos x="connsiteX8" y="connsiteY8"/>
+                  </a:cxn>
+                </a:cxnLst>
+                <a:rect l="l" t="t" r="r" b="b"/>
+                <a:pathLst>
+                  <a:path w="453390" h="263525">
+                    <a:moveTo>
+                      <a:pt x="84890" y="0"/>
+                    </a:moveTo>
+                    <a:lnTo>
+                      <a:pt x="453390" y="0"/>
+                    </a:lnTo>
+                    <a:lnTo>
+                      <a:pt x="453390" y="263525"/>
+                    </a:lnTo>
+                    <a:lnTo>
+                      <a:pt x="84890" y="263525"/>
+                    </a:lnTo>
+                    <a:cubicBezTo>
+                      <a:pt x="68745" y="263525"/>
+                      <a:pt x="59217" y="193028"/>
+                      <a:pt x="59217" y="168771"/>
+                    </a:cubicBezTo>
+                    <a:lnTo>
+                      <a:pt x="4819" y="221542"/>
+                    </a:lnTo>
+                    <a:lnTo>
+                      <a:pt x="0" y="54571"/>
+                    </a:lnTo>
+                    <a:lnTo>
+                      <a:pt x="55658" y="89403"/>
+                    </a:lnTo>
+                    <a:cubicBezTo>
+                      <a:pt x="55658" y="65146"/>
+                      <a:pt x="68745" y="0"/>
+                      <a:pt x="84890" y="0"/>
+                    </a:cubicBezTo>
+                    <a:close/>
+                  </a:path>
+                </a:pathLst>
+              </a:custGeom>
+            </p:spPr>
+            <p:style>
+              <a:lnRef idx="2">
+                <a:schemeClr val="accent5">
+                  <a:shade val="50000"/>
+                </a:schemeClr>
+              </a:lnRef>
+              <a:fillRef idx="1">
+                <a:schemeClr val="accent5"/>
+              </a:fillRef>
+              <a:effectRef idx="0">
+                <a:schemeClr val="accent5"/>
+              </a:effectRef>
+              <a:fontRef idx="minor">
+                <a:schemeClr val="lt1"/>
+              </a:fontRef>
+            </p:style>
+            <p:txBody>
+              <a:bodyPr rot="0" spcFirstLastPara="0" vert="horz" wrap="square" lIns="0" tIns="0" rIns="0" bIns="0" numCol="1" spcCol="0" rtlCol="0" fromWordArt="0" anchor="ctr" anchorCtr="0" forceAA="0" compatLnSpc="1">
+                <a:prstTxWarp prst="textNoShape">
+                  <a:avLst/>
+                </a:prstTxWarp>
+                <a:noAutofit/>
+              </a:bodyPr>
+              <a:lstStyle/>
+              <a:p>
+                <a:pPr indent="73025" algn="ctr">
+                  <a:spcAft>
+                    <a:spcPts val="0"/>
+                  </a:spcAft>
+                </a:pPr>
+                <a:r>
+                  <a:rPr lang="en-US" sz="1200" kern="100" dirty="0">
+                    <a:solidFill>
+                      <a:srgbClr val="FFFFFF"/>
+                    </a:solidFill>
+                    <a:effectLst/>
+                    <a:ea typeface="新細明體" panose="02020500000000000000" pitchFamily="18" charset="-120"/>
+                    <a:cs typeface="Times New Roman" panose="02020603050405020304" pitchFamily="18" charset="0"/>
+                  </a:rPr>
+                  <a:t>1</a:t>
+                </a:r>
+                <a:endParaRPr lang="zh-TW" sz="1200" kern="100" dirty="0">
+                  <a:effectLst/>
+                  <a:ea typeface="新細明體" panose="02020500000000000000" pitchFamily="18" charset="-120"/>
+                  <a:cs typeface="Times New Roman" panose="02020603050405020304" pitchFamily="18" charset="0"/>
+                </a:endParaRPr>
+              </a:p>
+            </p:txBody>
+          </p:sp>
+        </p:grpSp>
+        <p:grpSp>
+          <p:nvGrpSpPr>
+            <p:cNvPr id="24" name="群組 23">
+              <a:extLst>
+                <a:ext uri="{FF2B5EF4-FFF2-40B4-BE49-F238E27FC236}">
+                  <a16:creationId xmlns:a16="http://schemas.microsoft.com/office/drawing/2014/main" id="{84E99C5D-CBF1-4126-A42C-10EBDE2C7616}"/>
+                </a:ext>
+              </a:extLst>
+            </p:cNvPr>
+            <p:cNvGrpSpPr/>
+            <p:nvPr/>
+          </p:nvGrpSpPr>
+          <p:grpSpPr>
+            <a:xfrm>
+              <a:off x="1503044" y="3045672"/>
+              <a:ext cx="1630687" cy="175260"/>
+              <a:chOff x="1503044" y="2736215"/>
+              <a:chExt cx="1630687" cy="175260"/>
+            </a:xfrm>
+          </p:grpSpPr>
+          <p:sp>
+            <p:nvSpPr>
+              <p:cNvPr id="25" name="手繪多邊形: 圖案 10">
+                <a:extLst>
+                  <a:ext uri="{FF2B5EF4-FFF2-40B4-BE49-F238E27FC236}">
+                    <a16:creationId xmlns:a16="http://schemas.microsoft.com/office/drawing/2014/main" id="{E64B2C10-9892-4BB3-BF6E-DBABAECA64AA}"/>
+                  </a:ext>
+                </a:extLst>
+              </p:cNvPr>
+              <p:cNvSpPr/>
+              <p:nvPr/>
+            </p:nvSpPr>
+            <p:spPr>
+              <a:xfrm>
+                <a:off x="1503044" y="2736215"/>
+                <a:ext cx="219078" cy="175260"/>
+              </a:xfrm>
+              <a:custGeom>
+                <a:avLst/>
+                <a:gdLst>
+                  <a:gd name="connsiteX0" fmla="*/ 84890 w 453390"/>
+                  <a:gd name="connsiteY0" fmla="*/ 0 h 263525"/>
+                  <a:gd name="connsiteX1" fmla="*/ 453390 w 453390"/>
+                  <a:gd name="connsiteY1" fmla="*/ 0 h 263525"/>
+                  <a:gd name="connsiteX2" fmla="*/ 453390 w 453390"/>
+                  <a:gd name="connsiteY2" fmla="*/ 263525 h 263525"/>
+                  <a:gd name="connsiteX3" fmla="*/ 84890 w 453390"/>
+                  <a:gd name="connsiteY3" fmla="*/ 263525 h 263525"/>
+                  <a:gd name="connsiteX4" fmla="*/ 59217 w 453390"/>
+                  <a:gd name="connsiteY4" fmla="*/ 168771 h 263525"/>
+                  <a:gd name="connsiteX5" fmla="*/ 4819 w 453390"/>
+                  <a:gd name="connsiteY5" fmla="*/ 221542 h 263525"/>
+                  <a:gd name="connsiteX6" fmla="*/ 0 w 453390"/>
+                  <a:gd name="connsiteY6" fmla="*/ 54571 h 263525"/>
+                  <a:gd name="connsiteX7" fmla="*/ 55658 w 453390"/>
+                  <a:gd name="connsiteY7" fmla="*/ 89403 h 263525"/>
+                  <a:gd name="connsiteX8" fmla="*/ 84890 w 453390"/>
+                  <a:gd name="connsiteY8" fmla="*/ 0 h 263525"/>
+                </a:gdLst>
+                <a:ahLst/>
+                <a:cxnLst>
+                  <a:cxn ang="0">
+                    <a:pos x="connsiteX0" y="connsiteY0"/>
+                  </a:cxn>
+                  <a:cxn ang="0">
+                    <a:pos x="connsiteX1" y="connsiteY1"/>
+                  </a:cxn>
+                  <a:cxn ang="0">
+                    <a:pos x="connsiteX2" y="connsiteY2"/>
+                  </a:cxn>
+                  <a:cxn ang="0">
+                    <a:pos x="connsiteX3" y="connsiteY3"/>
+                  </a:cxn>
+                  <a:cxn ang="0">
+                    <a:pos x="connsiteX4" y="connsiteY4"/>
+                  </a:cxn>
+                  <a:cxn ang="0">
+                    <a:pos x="connsiteX5" y="connsiteY5"/>
+                  </a:cxn>
+                  <a:cxn ang="0">
+                    <a:pos x="connsiteX6" y="connsiteY6"/>
+                  </a:cxn>
+                  <a:cxn ang="0">
+                    <a:pos x="connsiteX7" y="connsiteY7"/>
+                  </a:cxn>
+                  <a:cxn ang="0">
+                    <a:pos x="connsiteX8" y="connsiteY8"/>
+                  </a:cxn>
+                </a:cxnLst>
+                <a:rect l="l" t="t" r="r" b="b"/>
+                <a:pathLst>
+                  <a:path w="453390" h="263525">
+                    <a:moveTo>
+                      <a:pt x="84890" y="0"/>
+                    </a:moveTo>
+                    <a:lnTo>
+                      <a:pt x="453390" y="0"/>
+                    </a:lnTo>
+                    <a:lnTo>
+                      <a:pt x="453390" y="263525"/>
+                    </a:lnTo>
+                    <a:lnTo>
+                      <a:pt x="84890" y="263525"/>
+                    </a:lnTo>
+                    <a:cubicBezTo>
+                      <a:pt x="68745" y="263525"/>
+                      <a:pt x="59217" y="193028"/>
+                      <a:pt x="59217" y="168771"/>
+                    </a:cubicBezTo>
+                    <a:lnTo>
+                      <a:pt x="4819" y="221542"/>
+                    </a:lnTo>
+                    <a:lnTo>
+                      <a:pt x="0" y="54571"/>
+                    </a:lnTo>
+                    <a:lnTo>
+                      <a:pt x="55658" y="89403"/>
+                    </a:lnTo>
+                    <a:cubicBezTo>
+                      <a:pt x="55658" y="65146"/>
+                      <a:pt x="68745" y="0"/>
+                      <a:pt x="84890" y="0"/>
+                    </a:cubicBezTo>
+                    <a:close/>
+                  </a:path>
+                </a:pathLst>
+              </a:custGeom>
+            </p:spPr>
+            <p:style>
+              <a:lnRef idx="2">
+                <a:schemeClr val="accent5">
+                  <a:shade val="50000"/>
+                </a:schemeClr>
+              </a:lnRef>
+              <a:fillRef idx="1">
+                <a:schemeClr val="accent5"/>
+              </a:fillRef>
+              <a:effectRef idx="0">
+                <a:schemeClr val="accent5"/>
+              </a:effectRef>
+              <a:fontRef idx="minor">
+                <a:schemeClr val="lt1"/>
+              </a:fontRef>
+            </p:style>
+            <p:txBody>
+              <a:bodyPr rot="0" spcFirstLastPara="0" vert="horz" wrap="square" lIns="0" tIns="0" rIns="0" bIns="0" numCol="1" spcCol="0" rtlCol="0" fromWordArt="0" anchor="ctr" anchorCtr="0" forceAA="0" compatLnSpc="1">
+                <a:prstTxWarp prst="textNoShape">
+                  <a:avLst/>
+                </a:prstTxWarp>
+                <a:noAutofit/>
+              </a:bodyPr>
+              <a:lstStyle/>
+              <a:p>
+                <a:pPr indent="73025" algn="ctr">
+                  <a:spcAft>
+                    <a:spcPts val="0"/>
+                  </a:spcAft>
+                </a:pPr>
+                <a:r>
+                  <a:rPr lang="en-US" sz="1200" kern="100" dirty="0">
+                    <a:solidFill>
+                      <a:srgbClr val="FFFFFF"/>
+                    </a:solidFill>
+                    <a:effectLst/>
+                    <a:ea typeface="新細明體" panose="02020500000000000000" pitchFamily="18" charset="-120"/>
+                    <a:cs typeface="Times New Roman" panose="02020603050405020304" pitchFamily="18" charset="0"/>
+                  </a:rPr>
+                  <a:t>1</a:t>
+                </a:r>
+                <a:endParaRPr lang="zh-TW" sz="1200" kern="100" dirty="0">
+                  <a:effectLst/>
+                  <a:ea typeface="新細明體" panose="02020500000000000000" pitchFamily="18" charset="-120"/>
+                  <a:cs typeface="Times New Roman" panose="02020603050405020304" pitchFamily="18" charset="0"/>
+                </a:endParaRPr>
+              </a:p>
+            </p:txBody>
+          </p:sp>
+          <p:sp>
+            <p:nvSpPr>
+              <p:cNvPr id="26" name="手繪多邊形: 圖案 10">
+                <a:extLst>
+                  <a:ext uri="{FF2B5EF4-FFF2-40B4-BE49-F238E27FC236}">
+                    <a16:creationId xmlns:a16="http://schemas.microsoft.com/office/drawing/2014/main" id="{91BF5181-0009-4702-87FB-4C00CDD80A87}"/>
+                  </a:ext>
+                </a:extLst>
+              </p:cNvPr>
+              <p:cNvSpPr/>
+              <p:nvPr/>
+            </p:nvSpPr>
+            <p:spPr>
+              <a:xfrm>
+                <a:off x="1784030" y="2736215"/>
+                <a:ext cx="219078" cy="175260"/>
+              </a:xfrm>
+              <a:custGeom>
+                <a:avLst/>
+                <a:gdLst>
+                  <a:gd name="connsiteX0" fmla="*/ 84890 w 453390"/>
+                  <a:gd name="connsiteY0" fmla="*/ 0 h 263525"/>
+                  <a:gd name="connsiteX1" fmla="*/ 453390 w 453390"/>
+                  <a:gd name="connsiteY1" fmla="*/ 0 h 263525"/>
+                  <a:gd name="connsiteX2" fmla="*/ 453390 w 453390"/>
+                  <a:gd name="connsiteY2" fmla="*/ 263525 h 263525"/>
+                  <a:gd name="connsiteX3" fmla="*/ 84890 w 453390"/>
+                  <a:gd name="connsiteY3" fmla="*/ 263525 h 263525"/>
+                  <a:gd name="connsiteX4" fmla="*/ 59217 w 453390"/>
+                  <a:gd name="connsiteY4" fmla="*/ 168771 h 263525"/>
+                  <a:gd name="connsiteX5" fmla="*/ 4819 w 453390"/>
+                  <a:gd name="connsiteY5" fmla="*/ 221542 h 263525"/>
+                  <a:gd name="connsiteX6" fmla="*/ 0 w 453390"/>
+                  <a:gd name="connsiteY6" fmla="*/ 54571 h 263525"/>
+                  <a:gd name="connsiteX7" fmla="*/ 55658 w 453390"/>
+                  <a:gd name="connsiteY7" fmla="*/ 89403 h 263525"/>
+                  <a:gd name="connsiteX8" fmla="*/ 84890 w 453390"/>
+                  <a:gd name="connsiteY8" fmla="*/ 0 h 263525"/>
+                </a:gdLst>
+                <a:ahLst/>
+                <a:cxnLst>
+                  <a:cxn ang="0">
+                    <a:pos x="connsiteX0" y="connsiteY0"/>
+                  </a:cxn>
+                  <a:cxn ang="0">
+                    <a:pos x="connsiteX1" y="connsiteY1"/>
+                  </a:cxn>
+                  <a:cxn ang="0">
+                    <a:pos x="connsiteX2" y="connsiteY2"/>
+                  </a:cxn>
+                  <a:cxn ang="0">
+                    <a:pos x="connsiteX3" y="connsiteY3"/>
+                  </a:cxn>
+                  <a:cxn ang="0">
+                    <a:pos x="connsiteX4" y="connsiteY4"/>
+                  </a:cxn>
+                  <a:cxn ang="0">
+                    <a:pos x="connsiteX5" y="connsiteY5"/>
+                  </a:cxn>
+                  <a:cxn ang="0">
+                    <a:pos x="connsiteX6" y="connsiteY6"/>
+                  </a:cxn>
+                  <a:cxn ang="0">
+                    <a:pos x="connsiteX7" y="connsiteY7"/>
+                  </a:cxn>
+                  <a:cxn ang="0">
+                    <a:pos x="connsiteX8" y="connsiteY8"/>
+                  </a:cxn>
+                </a:cxnLst>
+                <a:rect l="l" t="t" r="r" b="b"/>
+                <a:pathLst>
+                  <a:path w="453390" h="263525">
+                    <a:moveTo>
+                      <a:pt x="84890" y="0"/>
+                    </a:moveTo>
+                    <a:lnTo>
+                      <a:pt x="453390" y="0"/>
+                    </a:lnTo>
+                    <a:lnTo>
+                      <a:pt x="453390" y="263525"/>
+                    </a:lnTo>
+                    <a:lnTo>
+                      <a:pt x="84890" y="263525"/>
+                    </a:lnTo>
+                    <a:cubicBezTo>
+                      <a:pt x="68745" y="263525"/>
+                      <a:pt x="59217" y="193028"/>
+                      <a:pt x="59217" y="168771"/>
+                    </a:cubicBezTo>
+                    <a:lnTo>
+                      <a:pt x="4819" y="221542"/>
+                    </a:lnTo>
+                    <a:lnTo>
+                      <a:pt x="0" y="54571"/>
+                    </a:lnTo>
+                    <a:lnTo>
+                      <a:pt x="55658" y="89403"/>
+                    </a:lnTo>
+                    <a:cubicBezTo>
+                      <a:pt x="55658" y="65146"/>
+                      <a:pt x="68745" y="0"/>
+                      <a:pt x="84890" y="0"/>
+                    </a:cubicBezTo>
+                    <a:close/>
+                  </a:path>
+                </a:pathLst>
+              </a:custGeom>
+            </p:spPr>
+            <p:style>
+              <a:lnRef idx="2">
+                <a:schemeClr val="accent5">
+                  <a:shade val="50000"/>
+                </a:schemeClr>
+              </a:lnRef>
+              <a:fillRef idx="1">
+                <a:schemeClr val="accent5"/>
+              </a:fillRef>
+              <a:effectRef idx="0">
+                <a:schemeClr val="accent5"/>
+              </a:effectRef>
+              <a:fontRef idx="minor">
+                <a:schemeClr val="lt1"/>
+              </a:fontRef>
+            </p:style>
+            <p:txBody>
+              <a:bodyPr rot="0" spcFirstLastPara="0" vert="horz" wrap="square" lIns="0" tIns="0" rIns="0" bIns="0" numCol="1" spcCol="0" rtlCol="0" fromWordArt="0" anchor="ctr" anchorCtr="0" forceAA="0" compatLnSpc="1">
+                <a:prstTxWarp prst="textNoShape">
+                  <a:avLst/>
+                </a:prstTxWarp>
+                <a:noAutofit/>
+              </a:bodyPr>
+              <a:lstStyle/>
+              <a:p>
+                <a:pPr indent="73025" algn="ctr">
+                  <a:spcAft>
+                    <a:spcPts val="0"/>
+                  </a:spcAft>
+                </a:pPr>
+                <a:r>
+                  <a:rPr lang="en-US" sz="1200" kern="100" dirty="0">
+                    <a:solidFill>
+                      <a:srgbClr val="FFFFFF"/>
+                    </a:solidFill>
+                    <a:effectLst/>
+                    <a:ea typeface="新細明體" panose="02020500000000000000" pitchFamily="18" charset="-120"/>
+                    <a:cs typeface="Times New Roman" panose="02020603050405020304" pitchFamily="18" charset="0"/>
+                  </a:rPr>
+                  <a:t>1</a:t>
+                </a:r>
+                <a:endParaRPr lang="zh-TW" sz="1200" kern="100" dirty="0">
+                  <a:effectLst/>
+                  <a:ea typeface="新細明體" panose="02020500000000000000" pitchFamily="18" charset="-120"/>
+                  <a:cs typeface="Times New Roman" panose="02020603050405020304" pitchFamily="18" charset="0"/>
+                </a:endParaRPr>
+              </a:p>
+            </p:txBody>
+          </p:sp>
+          <p:sp>
+            <p:nvSpPr>
+              <p:cNvPr id="27" name="手繪多邊形: 圖案 10">
+                <a:extLst>
+                  <a:ext uri="{FF2B5EF4-FFF2-40B4-BE49-F238E27FC236}">
+                    <a16:creationId xmlns:a16="http://schemas.microsoft.com/office/drawing/2014/main" id="{96E8A11A-E923-48B1-997C-B6B0B5A9C284}"/>
+                  </a:ext>
+                </a:extLst>
+              </p:cNvPr>
+              <p:cNvSpPr/>
+              <p:nvPr/>
+            </p:nvSpPr>
+            <p:spPr>
+              <a:xfrm>
+                <a:off x="2065016" y="2736215"/>
+                <a:ext cx="219078" cy="175260"/>
+              </a:xfrm>
+              <a:custGeom>
+                <a:avLst/>
+                <a:gdLst>
+                  <a:gd name="connsiteX0" fmla="*/ 84890 w 453390"/>
+                  <a:gd name="connsiteY0" fmla="*/ 0 h 263525"/>
+                  <a:gd name="connsiteX1" fmla="*/ 453390 w 453390"/>
+                  <a:gd name="connsiteY1" fmla="*/ 0 h 263525"/>
+                  <a:gd name="connsiteX2" fmla="*/ 453390 w 453390"/>
+                  <a:gd name="connsiteY2" fmla="*/ 263525 h 263525"/>
+                  <a:gd name="connsiteX3" fmla="*/ 84890 w 453390"/>
+                  <a:gd name="connsiteY3" fmla="*/ 263525 h 263525"/>
+                  <a:gd name="connsiteX4" fmla="*/ 59217 w 453390"/>
+                  <a:gd name="connsiteY4" fmla="*/ 168771 h 263525"/>
+                  <a:gd name="connsiteX5" fmla="*/ 4819 w 453390"/>
+                  <a:gd name="connsiteY5" fmla="*/ 221542 h 263525"/>
+                  <a:gd name="connsiteX6" fmla="*/ 0 w 453390"/>
+                  <a:gd name="connsiteY6" fmla="*/ 54571 h 263525"/>
+                  <a:gd name="connsiteX7" fmla="*/ 55658 w 453390"/>
+                  <a:gd name="connsiteY7" fmla="*/ 89403 h 263525"/>
+                  <a:gd name="connsiteX8" fmla="*/ 84890 w 453390"/>
+                  <a:gd name="connsiteY8" fmla="*/ 0 h 263525"/>
+                </a:gdLst>
+                <a:ahLst/>
+                <a:cxnLst>
+                  <a:cxn ang="0">
+                    <a:pos x="connsiteX0" y="connsiteY0"/>
+                  </a:cxn>
+                  <a:cxn ang="0">
+                    <a:pos x="connsiteX1" y="connsiteY1"/>
+                  </a:cxn>
+                  <a:cxn ang="0">
+                    <a:pos x="connsiteX2" y="connsiteY2"/>
+                  </a:cxn>
+                  <a:cxn ang="0">
+                    <a:pos x="connsiteX3" y="connsiteY3"/>
+                  </a:cxn>
+                  <a:cxn ang="0">
+                    <a:pos x="connsiteX4" y="connsiteY4"/>
+                  </a:cxn>
+                  <a:cxn ang="0">
+                    <a:pos x="connsiteX5" y="connsiteY5"/>
+                  </a:cxn>
+                  <a:cxn ang="0">
+                    <a:pos x="connsiteX6" y="connsiteY6"/>
+                  </a:cxn>
+                  <a:cxn ang="0">
+                    <a:pos x="connsiteX7" y="connsiteY7"/>
+                  </a:cxn>
+                  <a:cxn ang="0">
+                    <a:pos x="connsiteX8" y="connsiteY8"/>
+                  </a:cxn>
+                </a:cxnLst>
+                <a:rect l="l" t="t" r="r" b="b"/>
+                <a:pathLst>
+                  <a:path w="453390" h="263525">
+                    <a:moveTo>
+                      <a:pt x="84890" y="0"/>
+                    </a:moveTo>
+                    <a:lnTo>
+                      <a:pt x="453390" y="0"/>
+                    </a:lnTo>
+                    <a:lnTo>
+                      <a:pt x="453390" y="263525"/>
+                    </a:lnTo>
+                    <a:lnTo>
+                      <a:pt x="84890" y="263525"/>
+                    </a:lnTo>
+                    <a:cubicBezTo>
+                      <a:pt x="68745" y="263525"/>
+                      <a:pt x="59217" y="193028"/>
+                      <a:pt x="59217" y="168771"/>
+                    </a:cubicBezTo>
+                    <a:lnTo>
+                      <a:pt x="4819" y="221542"/>
+                    </a:lnTo>
+                    <a:lnTo>
+                      <a:pt x="0" y="54571"/>
+                    </a:lnTo>
+                    <a:lnTo>
+                      <a:pt x="55658" y="89403"/>
+                    </a:lnTo>
+                    <a:cubicBezTo>
+                      <a:pt x="55658" y="65146"/>
+                      <a:pt x="68745" y="0"/>
+                      <a:pt x="84890" y="0"/>
+                    </a:cubicBezTo>
+                    <a:close/>
+                  </a:path>
+                </a:pathLst>
+              </a:custGeom>
+            </p:spPr>
+            <p:style>
+              <a:lnRef idx="2">
+                <a:schemeClr val="accent5">
+                  <a:shade val="50000"/>
+                </a:schemeClr>
+              </a:lnRef>
+              <a:fillRef idx="1">
+                <a:schemeClr val="accent5"/>
+              </a:fillRef>
+              <a:effectRef idx="0">
+                <a:schemeClr val="accent5"/>
+              </a:effectRef>
+              <a:fontRef idx="minor">
+                <a:schemeClr val="lt1"/>
+              </a:fontRef>
+            </p:style>
+            <p:txBody>
+              <a:bodyPr rot="0" spcFirstLastPara="0" vert="horz" wrap="square" lIns="0" tIns="0" rIns="0" bIns="0" numCol="1" spcCol="0" rtlCol="0" fromWordArt="0" anchor="ctr" anchorCtr="0" forceAA="0" compatLnSpc="1">
+                <a:prstTxWarp prst="textNoShape">
+                  <a:avLst/>
+                </a:prstTxWarp>
+                <a:noAutofit/>
+              </a:bodyPr>
+              <a:lstStyle/>
+              <a:p>
+                <a:pPr indent="73025" algn="ctr">
+                  <a:spcAft>
+                    <a:spcPts val="0"/>
+                  </a:spcAft>
+                </a:pPr>
+                <a:r>
+                  <a:rPr lang="en-US" sz="1200" kern="100" dirty="0">
+                    <a:solidFill>
+                      <a:srgbClr val="FFFFFF"/>
+                    </a:solidFill>
+                    <a:effectLst/>
+                    <a:ea typeface="新細明體" panose="02020500000000000000" pitchFamily="18" charset="-120"/>
+                    <a:cs typeface="Times New Roman" panose="02020603050405020304" pitchFamily="18" charset="0"/>
+                  </a:rPr>
+                  <a:t>1</a:t>
+                </a:r>
+                <a:endParaRPr lang="zh-TW" sz="1200" kern="100" dirty="0">
+                  <a:effectLst/>
+                  <a:ea typeface="新細明體" panose="02020500000000000000" pitchFamily="18" charset="-120"/>
+                  <a:cs typeface="Times New Roman" panose="02020603050405020304" pitchFamily="18" charset="0"/>
+                </a:endParaRPr>
+              </a:p>
+            </p:txBody>
+          </p:sp>
+          <p:sp>
+            <p:nvSpPr>
+              <p:cNvPr id="28" name="手繪多邊形: 圖案 10">
+                <a:extLst>
+                  <a:ext uri="{FF2B5EF4-FFF2-40B4-BE49-F238E27FC236}">
+                    <a16:creationId xmlns:a16="http://schemas.microsoft.com/office/drawing/2014/main" id="{630A0910-1B39-4CAE-8CF2-E1E459468F8D}"/>
+                  </a:ext>
+                </a:extLst>
+              </p:cNvPr>
+              <p:cNvSpPr/>
+              <p:nvPr/>
+            </p:nvSpPr>
+            <p:spPr>
+              <a:xfrm>
+                <a:off x="2346002" y="2736215"/>
+                <a:ext cx="219078" cy="175260"/>
+              </a:xfrm>
+              <a:custGeom>
+                <a:avLst/>
+                <a:gdLst>
+                  <a:gd name="connsiteX0" fmla="*/ 84890 w 453390"/>
+                  <a:gd name="connsiteY0" fmla="*/ 0 h 263525"/>
+                  <a:gd name="connsiteX1" fmla="*/ 453390 w 453390"/>
+                  <a:gd name="connsiteY1" fmla="*/ 0 h 263525"/>
+                  <a:gd name="connsiteX2" fmla="*/ 453390 w 453390"/>
+                  <a:gd name="connsiteY2" fmla="*/ 263525 h 263525"/>
+                  <a:gd name="connsiteX3" fmla="*/ 84890 w 453390"/>
+                  <a:gd name="connsiteY3" fmla="*/ 263525 h 263525"/>
+                  <a:gd name="connsiteX4" fmla="*/ 59217 w 453390"/>
+                  <a:gd name="connsiteY4" fmla="*/ 168771 h 263525"/>
+                  <a:gd name="connsiteX5" fmla="*/ 4819 w 453390"/>
+                  <a:gd name="connsiteY5" fmla="*/ 221542 h 263525"/>
+                  <a:gd name="connsiteX6" fmla="*/ 0 w 453390"/>
+                  <a:gd name="connsiteY6" fmla="*/ 54571 h 263525"/>
+                  <a:gd name="connsiteX7" fmla="*/ 55658 w 453390"/>
+                  <a:gd name="connsiteY7" fmla="*/ 89403 h 263525"/>
+                  <a:gd name="connsiteX8" fmla="*/ 84890 w 453390"/>
+                  <a:gd name="connsiteY8" fmla="*/ 0 h 263525"/>
+                </a:gdLst>
+                <a:ahLst/>
+                <a:cxnLst>
+                  <a:cxn ang="0">
+                    <a:pos x="connsiteX0" y="connsiteY0"/>
+                  </a:cxn>
+                  <a:cxn ang="0">
+                    <a:pos x="connsiteX1" y="connsiteY1"/>
+                  </a:cxn>
+                  <a:cxn ang="0">
+                    <a:pos x="connsiteX2" y="connsiteY2"/>
+                  </a:cxn>
+                  <a:cxn ang="0">
+                    <a:pos x="connsiteX3" y="connsiteY3"/>
+                  </a:cxn>
+                  <a:cxn ang="0">
+                    <a:pos x="connsiteX4" y="connsiteY4"/>
+                  </a:cxn>
+                  <a:cxn ang="0">
+                    <a:pos x="connsiteX5" y="connsiteY5"/>
+                  </a:cxn>
+                  <a:cxn ang="0">
+                    <a:pos x="connsiteX6" y="connsiteY6"/>
+                  </a:cxn>
+                  <a:cxn ang="0">
+                    <a:pos x="connsiteX7" y="connsiteY7"/>
+                  </a:cxn>
+                  <a:cxn ang="0">
+                    <a:pos x="connsiteX8" y="connsiteY8"/>
+                  </a:cxn>
+                </a:cxnLst>
+                <a:rect l="l" t="t" r="r" b="b"/>
+                <a:pathLst>
+                  <a:path w="453390" h="263525">
+                    <a:moveTo>
+                      <a:pt x="84890" y="0"/>
+                    </a:moveTo>
+                    <a:lnTo>
+                      <a:pt x="453390" y="0"/>
+                    </a:lnTo>
+                    <a:lnTo>
+                      <a:pt x="453390" y="263525"/>
+                    </a:lnTo>
+                    <a:lnTo>
+                      <a:pt x="84890" y="263525"/>
+                    </a:lnTo>
+                    <a:cubicBezTo>
+                      <a:pt x="68745" y="263525"/>
+                      <a:pt x="59217" y="193028"/>
+                      <a:pt x="59217" y="168771"/>
+                    </a:cubicBezTo>
+                    <a:lnTo>
+                      <a:pt x="4819" y="221542"/>
+                    </a:lnTo>
+                    <a:lnTo>
+                      <a:pt x="0" y="54571"/>
+                    </a:lnTo>
+                    <a:lnTo>
+                      <a:pt x="55658" y="89403"/>
+                    </a:lnTo>
+                    <a:cubicBezTo>
+                      <a:pt x="55658" y="65146"/>
+                      <a:pt x="68745" y="0"/>
+                      <a:pt x="84890" y="0"/>
+                    </a:cubicBezTo>
+                    <a:close/>
+                  </a:path>
+                </a:pathLst>
+              </a:custGeom>
+            </p:spPr>
+            <p:style>
+              <a:lnRef idx="2">
+                <a:schemeClr val="accent5">
+                  <a:shade val="50000"/>
+                </a:schemeClr>
+              </a:lnRef>
+              <a:fillRef idx="1">
+                <a:schemeClr val="accent5"/>
+              </a:fillRef>
+              <a:effectRef idx="0">
+                <a:schemeClr val="accent5"/>
+              </a:effectRef>
+              <a:fontRef idx="minor">
+                <a:schemeClr val="lt1"/>
+              </a:fontRef>
+            </p:style>
+            <p:txBody>
+              <a:bodyPr rot="0" spcFirstLastPara="0" vert="horz" wrap="square" lIns="0" tIns="0" rIns="0" bIns="0" numCol="1" spcCol="0" rtlCol="0" fromWordArt="0" anchor="ctr" anchorCtr="0" forceAA="0" compatLnSpc="1">
+                <a:prstTxWarp prst="textNoShape">
+                  <a:avLst/>
+                </a:prstTxWarp>
+                <a:noAutofit/>
+              </a:bodyPr>
+              <a:lstStyle/>
+              <a:p>
+                <a:pPr indent="73025" algn="ctr">
+                  <a:spcAft>
+                    <a:spcPts val="0"/>
+                  </a:spcAft>
+                </a:pPr>
+                <a:r>
+                  <a:rPr lang="en-US" sz="1200" kern="100" dirty="0">
+                    <a:solidFill>
+                      <a:srgbClr val="FFFFFF"/>
+                    </a:solidFill>
+                    <a:effectLst/>
+                    <a:ea typeface="新細明體" panose="02020500000000000000" pitchFamily="18" charset="-120"/>
+                    <a:cs typeface="Times New Roman" panose="02020603050405020304" pitchFamily="18" charset="0"/>
+                  </a:rPr>
+                  <a:t>1</a:t>
+                </a:r>
+                <a:endParaRPr lang="zh-TW" sz="1200" kern="100" dirty="0">
+                  <a:effectLst/>
+                  <a:ea typeface="新細明體" panose="02020500000000000000" pitchFamily="18" charset="-120"/>
+                  <a:cs typeface="Times New Roman" panose="02020603050405020304" pitchFamily="18" charset="0"/>
+                </a:endParaRPr>
+              </a:p>
+            </p:txBody>
+          </p:sp>
+          <p:sp>
+            <p:nvSpPr>
+              <p:cNvPr id="29" name="手繪多邊形: 圖案 10">
+                <a:extLst>
+                  <a:ext uri="{FF2B5EF4-FFF2-40B4-BE49-F238E27FC236}">
+                    <a16:creationId xmlns:a16="http://schemas.microsoft.com/office/drawing/2014/main" id="{87EE1B68-EC0E-40FC-96FC-3A0791CF5D9E}"/>
+                  </a:ext>
+                </a:extLst>
+              </p:cNvPr>
+              <p:cNvSpPr/>
+              <p:nvPr/>
+            </p:nvSpPr>
+            <p:spPr>
+              <a:xfrm>
+                <a:off x="2633667" y="2736215"/>
+                <a:ext cx="219078" cy="175260"/>
+              </a:xfrm>
+              <a:custGeom>
+                <a:avLst/>
+                <a:gdLst>
+                  <a:gd name="connsiteX0" fmla="*/ 84890 w 453390"/>
+                  <a:gd name="connsiteY0" fmla="*/ 0 h 263525"/>
+                  <a:gd name="connsiteX1" fmla="*/ 453390 w 453390"/>
+                  <a:gd name="connsiteY1" fmla="*/ 0 h 263525"/>
+                  <a:gd name="connsiteX2" fmla="*/ 453390 w 453390"/>
+                  <a:gd name="connsiteY2" fmla="*/ 263525 h 263525"/>
+                  <a:gd name="connsiteX3" fmla="*/ 84890 w 453390"/>
+                  <a:gd name="connsiteY3" fmla="*/ 263525 h 263525"/>
+                  <a:gd name="connsiteX4" fmla="*/ 59217 w 453390"/>
+                  <a:gd name="connsiteY4" fmla="*/ 168771 h 263525"/>
+                  <a:gd name="connsiteX5" fmla="*/ 4819 w 453390"/>
+                  <a:gd name="connsiteY5" fmla="*/ 221542 h 263525"/>
+                  <a:gd name="connsiteX6" fmla="*/ 0 w 453390"/>
+                  <a:gd name="connsiteY6" fmla="*/ 54571 h 263525"/>
+                  <a:gd name="connsiteX7" fmla="*/ 55658 w 453390"/>
+                  <a:gd name="connsiteY7" fmla="*/ 89403 h 263525"/>
+                  <a:gd name="connsiteX8" fmla="*/ 84890 w 453390"/>
+                  <a:gd name="connsiteY8" fmla="*/ 0 h 263525"/>
+                </a:gdLst>
+                <a:ahLst/>
+                <a:cxnLst>
+                  <a:cxn ang="0">
+                    <a:pos x="connsiteX0" y="connsiteY0"/>
+                  </a:cxn>
+                  <a:cxn ang="0">
+                    <a:pos x="connsiteX1" y="connsiteY1"/>
+                  </a:cxn>
+                  <a:cxn ang="0">
+                    <a:pos x="connsiteX2" y="connsiteY2"/>
+                  </a:cxn>
+                  <a:cxn ang="0">
+                    <a:pos x="connsiteX3" y="connsiteY3"/>
+                  </a:cxn>
+                  <a:cxn ang="0">
+                    <a:pos x="connsiteX4" y="connsiteY4"/>
+                  </a:cxn>
+                  <a:cxn ang="0">
+                    <a:pos x="connsiteX5" y="connsiteY5"/>
+                  </a:cxn>
+                  <a:cxn ang="0">
+                    <a:pos x="connsiteX6" y="connsiteY6"/>
+                  </a:cxn>
+                  <a:cxn ang="0">
+                    <a:pos x="connsiteX7" y="connsiteY7"/>
+                  </a:cxn>
+                  <a:cxn ang="0">
+                    <a:pos x="connsiteX8" y="connsiteY8"/>
+                  </a:cxn>
+                </a:cxnLst>
+                <a:rect l="l" t="t" r="r" b="b"/>
+                <a:pathLst>
+                  <a:path w="453390" h="263525">
+                    <a:moveTo>
+                      <a:pt x="84890" y="0"/>
+                    </a:moveTo>
+                    <a:lnTo>
+                      <a:pt x="453390" y="0"/>
+                    </a:lnTo>
+                    <a:lnTo>
+                      <a:pt x="453390" y="263525"/>
+                    </a:lnTo>
+                    <a:lnTo>
+                      <a:pt x="84890" y="263525"/>
+                    </a:lnTo>
+                    <a:cubicBezTo>
+                      <a:pt x="68745" y="263525"/>
+                      <a:pt x="59217" y="193028"/>
+                      <a:pt x="59217" y="168771"/>
+                    </a:cubicBezTo>
+                    <a:lnTo>
+                      <a:pt x="4819" y="221542"/>
+                    </a:lnTo>
+                    <a:lnTo>
+                      <a:pt x="0" y="54571"/>
+                    </a:lnTo>
+                    <a:lnTo>
+                      <a:pt x="55658" y="89403"/>
+                    </a:lnTo>
+                    <a:cubicBezTo>
+                      <a:pt x="55658" y="65146"/>
+                      <a:pt x="68745" y="0"/>
+                      <a:pt x="84890" y="0"/>
+                    </a:cubicBezTo>
+                    <a:close/>
+                  </a:path>
+                </a:pathLst>
+              </a:custGeom>
+            </p:spPr>
+            <p:style>
+              <a:lnRef idx="2">
+                <a:schemeClr val="accent5">
+                  <a:shade val="50000"/>
+                </a:schemeClr>
+              </a:lnRef>
+              <a:fillRef idx="1">
+                <a:schemeClr val="accent5"/>
+              </a:fillRef>
+              <a:effectRef idx="0">
+                <a:schemeClr val="accent5"/>
+              </a:effectRef>
+              <a:fontRef idx="minor">
+                <a:schemeClr val="lt1"/>
+              </a:fontRef>
+            </p:style>
+            <p:txBody>
+              <a:bodyPr rot="0" spcFirstLastPara="0" vert="horz" wrap="square" lIns="0" tIns="0" rIns="0" bIns="0" numCol="1" spcCol="0" rtlCol="0" fromWordArt="0" anchor="ctr" anchorCtr="0" forceAA="0" compatLnSpc="1">
+                <a:prstTxWarp prst="textNoShape">
+                  <a:avLst/>
+                </a:prstTxWarp>
+                <a:noAutofit/>
+              </a:bodyPr>
+              <a:lstStyle/>
+              <a:p>
+                <a:pPr indent="73025" algn="ctr">
+                  <a:spcAft>
+                    <a:spcPts val="0"/>
+                  </a:spcAft>
+                </a:pPr>
+                <a:r>
+                  <a:rPr lang="en-US" sz="1200" kern="100" dirty="0">
+                    <a:solidFill>
+                      <a:srgbClr val="FFFFFF"/>
+                    </a:solidFill>
+                    <a:effectLst/>
+                    <a:ea typeface="新細明體" panose="02020500000000000000" pitchFamily="18" charset="-120"/>
+                    <a:cs typeface="Times New Roman" panose="02020603050405020304" pitchFamily="18" charset="0"/>
+                  </a:rPr>
+                  <a:t>1</a:t>
+                </a:r>
+                <a:endParaRPr lang="zh-TW" sz="1200" kern="100" dirty="0">
+                  <a:effectLst/>
+                  <a:ea typeface="新細明體" panose="02020500000000000000" pitchFamily="18" charset="-120"/>
+                  <a:cs typeface="Times New Roman" panose="02020603050405020304" pitchFamily="18" charset="0"/>
+                </a:endParaRPr>
+              </a:p>
+            </p:txBody>
+          </p:sp>
+          <p:sp>
+            <p:nvSpPr>
+              <p:cNvPr id="30" name="手繪多邊形: 圖案 10">
+                <a:extLst>
+                  <a:ext uri="{FF2B5EF4-FFF2-40B4-BE49-F238E27FC236}">
+                    <a16:creationId xmlns:a16="http://schemas.microsoft.com/office/drawing/2014/main" id="{A3655E71-5A30-4BEC-8B1D-F1C2C5B267CE}"/>
+                  </a:ext>
+                </a:extLst>
+              </p:cNvPr>
+              <p:cNvSpPr/>
+              <p:nvPr/>
+            </p:nvSpPr>
+            <p:spPr>
+              <a:xfrm>
+                <a:off x="2914653" y="2736215"/>
+                <a:ext cx="219078" cy="175260"/>
+              </a:xfrm>
+              <a:custGeom>
+                <a:avLst/>
+                <a:gdLst>
+                  <a:gd name="connsiteX0" fmla="*/ 84890 w 453390"/>
+                  <a:gd name="connsiteY0" fmla="*/ 0 h 263525"/>
+                  <a:gd name="connsiteX1" fmla="*/ 453390 w 453390"/>
+                  <a:gd name="connsiteY1" fmla="*/ 0 h 263525"/>
+                  <a:gd name="connsiteX2" fmla="*/ 453390 w 453390"/>
+                  <a:gd name="connsiteY2" fmla="*/ 263525 h 263525"/>
+                  <a:gd name="connsiteX3" fmla="*/ 84890 w 453390"/>
+                  <a:gd name="connsiteY3" fmla="*/ 263525 h 263525"/>
+                  <a:gd name="connsiteX4" fmla="*/ 59217 w 453390"/>
+                  <a:gd name="connsiteY4" fmla="*/ 168771 h 263525"/>
+                  <a:gd name="connsiteX5" fmla="*/ 4819 w 453390"/>
+                  <a:gd name="connsiteY5" fmla="*/ 221542 h 263525"/>
+                  <a:gd name="connsiteX6" fmla="*/ 0 w 453390"/>
+                  <a:gd name="connsiteY6" fmla="*/ 54571 h 263525"/>
+                  <a:gd name="connsiteX7" fmla="*/ 55658 w 453390"/>
+                  <a:gd name="connsiteY7" fmla="*/ 89403 h 263525"/>
+                  <a:gd name="connsiteX8" fmla="*/ 84890 w 453390"/>
+                  <a:gd name="connsiteY8" fmla="*/ 0 h 263525"/>
+                </a:gdLst>
+                <a:ahLst/>
+                <a:cxnLst>
+                  <a:cxn ang="0">
+                    <a:pos x="connsiteX0" y="connsiteY0"/>
+                  </a:cxn>
+                  <a:cxn ang="0">
+                    <a:pos x="connsiteX1" y="connsiteY1"/>
+                  </a:cxn>
+                  <a:cxn ang="0">
+                    <a:pos x="connsiteX2" y="connsiteY2"/>
+                  </a:cxn>
+                  <a:cxn ang="0">
+                    <a:pos x="connsiteX3" y="connsiteY3"/>
+                  </a:cxn>
+                  <a:cxn ang="0">
+                    <a:pos x="connsiteX4" y="connsiteY4"/>
+                  </a:cxn>
+                  <a:cxn ang="0">
+                    <a:pos x="connsiteX5" y="connsiteY5"/>
+                  </a:cxn>
+                  <a:cxn ang="0">
+                    <a:pos x="connsiteX6" y="connsiteY6"/>
+                  </a:cxn>
+                  <a:cxn ang="0">
+                    <a:pos x="connsiteX7" y="connsiteY7"/>
+                  </a:cxn>
+                  <a:cxn ang="0">
+                    <a:pos x="connsiteX8" y="connsiteY8"/>
+                  </a:cxn>
+                </a:cxnLst>
+                <a:rect l="l" t="t" r="r" b="b"/>
+                <a:pathLst>
+                  <a:path w="453390" h="263525">
+                    <a:moveTo>
+                      <a:pt x="84890" y="0"/>
+                    </a:moveTo>
+                    <a:lnTo>
+                      <a:pt x="453390" y="0"/>
+                    </a:lnTo>
+                    <a:lnTo>
+                      <a:pt x="453390" y="263525"/>
+                    </a:lnTo>
+                    <a:lnTo>
+                      <a:pt x="84890" y="263525"/>
+                    </a:lnTo>
+                    <a:cubicBezTo>
+                      <a:pt x="68745" y="263525"/>
+                      <a:pt x="59217" y="193028"/>
+                      <a:pt x="59217" y="168771"/>
+                    </a:cubicBezTo>
+                    <a:lnTo>
+                      <a:pt x="4819" y="221542"/>
+                    </a:lnTo>
+                    <a:lnTo>
+                      <a:pt x="0" y="54571"/>
+                    </a:lnTo>
+                    <a:lnTo>
+                      <a:pt x="55658" y="89403"/>
+                    </a:lnTo>
+                    <a:cubicBezTo>
+                      <a:pt x="55658" y="65146"/>
+                      <a:pt x="68745" y="0"/>
+                      <a:pt x="84890" y="0"/>
+                    </a:cubicBezTo>
+                    <a:close/>
+                  </a:path>
+                </a:pathLst>
+              </a:custGeom>
+            </p:spPr>
+            <p:style>
+              <a:lnRef idx="2">
+                <a:schemeClr val="accent5">
+                  <a:shade val="50000"/>
+                </a:schemeClr>
+              </a:lnRef>
+              <a:fillRef idx="1">
+                <a:schemeClr val="accent5"/>
+              </a:fillRef>
+              <a:effectRef idx="0">
+                <a:schemeClr val="accent5"/>
+              </a:effectRef>
+              <a:fontRef idx="minor">
+                <a:schemeClr val="lt1"/>
+              </a:fontRef>
+            </p:style>
+            <p:txBody>
+              <a:bodyPr rot="0" spcFirstLastPara="0" vert="horz" wrap="square" lIns="0" tIns="0" rIns="0" bIns="0" numCol="1" spcCol="0" rtlCol="0" fromWordArt="0" anchor="ctr" anchorCtr="0" forceAA="0" compatLnSpc="1">
+                <a:prstTxWarp prst="textNoShape">
+                  <a:avLst/>
+                </a:prstTxWarp>
+                <a:noAutofit/>
+              </a:bodyPr>
+              <a:lstStyle/>
+              <a:p>
+                <a:pPr indent="73025" algn="ctr">
+                  <a:spcAft>
+                    <a:spcPts val="0"/>
+                  </a:spcAft>
+                </a:pPr>
+                <a:r>
+                  <a:rPr lang="en-US" sz="1200" kern="100" dirty="0">
+                    <a:solidFill>
+                      <a:srgbClr val="FFFFFF"/>
+                    </a:solidFill>
+                    <a:effectLst/>
+                    <a:ea typeface="新細明體" panose="02020500000000000000" pitchFamily="18" charset="-120"/>
+                    <a:cs typeface="Times New Roman" panose="02020603050405020304" pitchFamily="18" charset="0"/>
+                  </a:rPr>
+                  <a:t>1</a:t>
+                </a:r>
+                <a:endParaRPr lang="zh-TW" sz="1200" kern="100" dirty="0">
+                  <a:effectLst/>
+                  <a:ea typeface="新細明體" panose="02020500000000000000" pitchFamily="18" charset="-120"/>
+                  <a:cs typeface="Times New Roman" panose="02020603050405020304" pitchFamily="18" charset="0"/>
+                </a:endParaRPr>
+              </a:p>
+            </p:txBody>
+          </p:sp>
+        </p:grpSp>
+        <p:grpSp>
+          <p:nvGrpSpPr>
+            <p:cNvPr id="31" name="群組 30">
+              <a:extLst>
+                <a:ext uri="{FF2B5EF4-FFF2-40B4-BE49-F238E27FC236}">
+                  <a16:creationId xmlns:a16="http://schemas.microsoft.com/office/drawing/2014/main" id="{AD10FC0F-4136-4F8F-8A66-B6A414E9A2E8}"/>
+                </a:ext>
+              </a:extLst>
+            </p:cNvPr>
+            <p:cNvGrpSpPr/>
+            <p:nvPr/>
+          </p:nvGrpSpPr>
+          <p:grpSpPr>
+            <a:xfrm>
+              <a:off x="1503044" y="3355129"/>
+              <a:ext cx="1630687" cy="175260"/>
+              <a:chOff x="1503044" y="2736215"/>
+              <a:chExt cx="1630687" cy="175260"/>
+            </a:xfrm>
+          </p:grpSpPr>
+          <p:sp>
+            <p:nvSpPr>
+              <p:cNvPr id="32" name="手繪多邊形: 圖案 10">
+                <a:extLst>
+                  <a:ext uri="{FF2B5EF4-FFF2-40B4-BE49-F238E27FC236}">
+                    <a16:creationId xmlns:a16="http://schemas.microsoft.com/office/drawing/2014/main" id="{AC81421F-8E5E-45B8-ABEE-4FD1B6A29AE6}"/>
+                  </a:ext>
+                </a:extLst>
+              </p:cNvPr>
+              <p:cNvSpPr/>
+              <p:nvPr/>
+            </p:nvSpPr>
+            <p:spPr>
+              <a:xfrm>
+                <a:off x="1503044" y="2736215"/>
+                <a:ext cx="219078" cy="175260"/>
+              </a:xfrm>
+              <a:custGeom>
+                <a:avLst/>
+                <a:gdLst>
+                  <a:gd name="connsiteX0" fmla="*/ 84890 w 453390"/>
+                  <a:gd name="connsiteY0" fmla="*/ 0 h 263525"/>
+                  <a:gd name="connsiteX1" fmla="*/ 453390 w 453390"/>
+                  <a:gd name="connsiteY1" fmla="*/ 0 h 263525"/>
+                  <a:gd name="connsiteX2" fmla="*/ 453390 w 453390"/>
+                  <a:gd name="connsiteY2" fmla="*/ 263525 h 263525"/>
+                  <a:gd name="connsiteX3" fmla="*/ 84890 w 453390"/>
+                  <a:gd name="connsiteY3" fmla="*/ 263525 h 263525"/>
+                  <a:gd name="connsiteX4" fmla="*/ 59217 w 453390"/>
+                  <a:gd name="connsiteY4" fmla="*/ 168771 h 263525"/>
+                  <a:gd name="connsiteX5" fmla="*/ 4819 w 453390"/>
+                  <a:gd name="connsiteY5" fmla="*/ 221542 h 263525"/>
+                  <a:gd name="connsiteX6" fmla="*/ 0 w 453390"/>
+                  <a:gd name="connsiteY6" fmla="*/ 54571 h 263525"/>
+                  <a:gd name="connsiteX7" fmla="*/ 55658 w 453390"/>
+                  <a:gd name="connsiteY7" fmla="*/ 89403 h 263525"/>
+                  <a:gd name="connsiteX8" fmla="*/ 84890 w 453390"/>
+                  <a:gd name="connsiteY8" fmla="*/ 0 h 263525"/>
+                </a:gdLst>
+                <a:ahLst/>
+                <a:cxnLst>
+                  <a:cxn ang="0">
+                    <a:pos x="connsiteX0" y="connsiteY0"/>
+                  </a:cxn>
+                  <a:cxn ang="0">
+                    <a:pos x="connsiteX1" y="connsiteY1"/>
+                  </a:cxn>
+                  <a:cxn ang="0">
+                    <a:pos x="connsiteX2" y="connsiteY2"/>
+                  </a:cxn>
+                  <a:cxn ang="0">
+                    <a:pos x="connsiteX3" y="connsiteY3"/>
+                  </a:cxn>
+                  <a:cxn ang="0">
+                    <a:pos x="connsiteX4" y="connsiteY4"/>
+                  </a:cxn>
+                  <a:cxn ang="0">
+                    <a:pos x="connsiteX5" y="connsiteY5"/>
+                  </a:cxn>
+                  <a:cxn ang="0">
+                    <a:pos x="connsiteX6" y="connsiteY6"/>
+                  </a:cxn>
+                  <a:cxn ang="0">
+                    <a:pos x="connsiteX7" y="connsiteY7"/>
+                  </a:cxn>
+                  <a:cxn ang="0">
+                    <a:pos x="connsiteX8" y="connsiteY8"/>
+                  </a:cxn>
+                </a:cxnLst>
+                <a:rect l="l" t="t" r="r" b="b"/>
+                <a:pathLst>
+                  <a:path w="453390" h="263525">
+                    <a:moveTo>
+                      <a:pt x="84890" y="0"/>
+                    </a:moveTo>
+                    <a:lnTo>
+                      <a:pt x="453390" y="0"/>
+                    </a:lnTo>
+                    <a:lnTo>
+                      <a:pt x="453390" y="263525"/>
+                    </a:lnTo>
+                    <a:lnTo>
+                      <a:pt x="84890" y="263525"/>
+                    </a:lnTo>
+                    <a:cubicBezTo>
+                      <a:pt x="68745" y="263525"/>
+                      <a:pt x="59217" y="193028"/>
+                      <a:pt x="59217" y="168771"/>
+                    </a:cubicBezTo>
+                    <a:lnTo>
+                      <a:pt x="4819" y="221542"/>
+                    </a:lnTo>
+                    <a:lnTo>
+                      <a:pt x="0" y="54571"/>
+                    </a:lnTo>
+                    <a:lnTo>
+                      <a:pt x="55658" y="89403"/>
+                    </a:lnTo>
+                    <a:cubicBezTo>
+                      <a:pt x="55658" y="65146"/>
+                      <a:pt x="68745" y="0"/>
+                      <a:pt x="84890" y="0"/>
+                    </a:cubicBezTo>
+                    <a:close/>
+                  </a:path>
+                </a:pathLst>
+              </a:custGeom>
+            </p:spPr>
+            <p:style>
+              <a:lnRef idx="2">
+                <a:schemeClr val="accent5">
+                  <a:shade val="50000"/>
+                </a:schemeClr>
+              </a:lnRef>
+              <a:fillRef idx="1">
+                <a:schemeClr val="accent5"/>
+              </a:fillRef>
+              <a:effectRef idx="0">
+                <a:schemeClr val="accent5"/>
+              </a:effectRef>
+              <a:fontRef idx="minor">
+                <a:schemeClr val="lt1"/>
+              </a:fontRef>
+            </p:style>
+            <p:txBody>
+              <a:bodyPr rot="0" spcFirstLastPara="0" vert="horz" wrap="square" lIns="0" tIns="0" rIns="0" bIns="0" numCol="1" spcCol="0" rtlCol="0" fromWordArt="0" anchor="ctr" anchorCtr="0" forceAA="0" compatLnSpc="1">
+                <a:prstTxWarp prst="textNoShape">
+                  <a:avLst/>
+                </a:prstTxWarp>
+                <a:noAutofit/>
+              </a:bodyPr>
+              <a:lstStyle/>
+              <a:p>
+                <a:pPr indent="73025" algn="ctr">
+                  <a:spcAft>
+                    <a:spcPts val="0"/>
+                  </a:spcAft>
+                </a:pPr>
+                <a:r>
+                  <a:rPr lang="en-US" sz="1200" kern="100" dirty="0">
+                    <a:solidFill>
+                      <a:srgbClr val="FFFFFF"/>
+                    </a:solidFill>
+                    <a:effectLst/>
+                    <a:ea typeface="新細明體" panose="02020500000000000000" pitchFamily="18" charset="-120"/>
+                    <a:cs typeface="Times New Roman" panose="02020603050405020304" pitchFamily="18" charset="0"/>
+                  </a:rPr>
+                  <a:t>1</a:t>
+                </a:r>
+                <a:endParaRPr lang="zh-TW" sz="1200" kern="100" dirty="0">
+                  <a:effectLst/>
+                  <a:ea typeface="新細明體" panose="02020500000000000000" pitchFamily="18" charset="-120"/>
+                  <a:cs typeface="Times New Roman" panose="02020603050405020304" pitchFamily="18" charset="0"/>
+                </a:endParaRPr>
+              </a:p>
+            </p:txBody>
+          </p:sp>
+          <p:sp>
+            <p:nvSpPr>
+              <p:cNvPr id="33" name="手繪多邊形: 圖案 10">
+                <a:extLst>
+                  <a:ext uri="{FF2B5EF4-FFF2-40B4-BE49-F238E27FC236}">
+                    <a16:creationId xmlns:a16="http://schemas.microsoft.com/office/drawing/2014/main" id="{C3011F18-7831-467D-84A1-3D6E48BFF79B}"/>
+                  </a:ext>
+                </a:extLst>
+              </p:cNvPr>
+              <p:cNvSpPr/>
+              <p:nvPr/>
+            </p:nvSpPr>
+            <p:spPr>
+              <a:xfrm>
+                <a:off x="1784030" y="2736215"/>
+                <a:ext cx="219078" cy="175260"/>
+              </a:xfrm>
+              <a:custGeom>
+                <a:avLst/>
+                <a:gdLst>
+                  <a:gd name="connsiteX0" fmla="*/ 84890 w 453390"/>
+                  <a:gd name="connsiteY0" fmla="*/ 0 h 263525"/>
+                  <a:gd name="connsiteX1" fmla="*/ 453390 w 453390"/>
+                  <a:gd name="connsiteY1" fmla="*/ 0 h 263525"/>
+                  <a:gd name="connsiteX2" fmla="*/ 453390 w 453390"/>
+                  <a:gd name="connsiteY2" fmla="*/ 263525 h 263525"/>
+                  <a:gd name="connsiteX3" fmla="*/ 84890 w 453390"/>
+                  <a:gd name="connsiteY3" fmla="*/ 263525 h 263525"/>
+                  <a:gd name="connsiteX4" fmla="*/ 59217 w 453390"/>
+                  <a:gd name="connsiteY4" fmla="*/ 168771 h 263525"/>
+                  <a:gd name="connsiteX5" fmla="*/ 4819 w 453390"/>
+                  <a:gd name="connsiteY5" fmla="*/ 221542 h 263525"/>
+                  <a:gd name="connsiteX6" fmla="*/ 0 w 453390"/>
+                  <a:gd name="connsiteY6" fmla="*/ 54571 h 263525"/>
+                  <a:gd name="connsiteX7" fmla="*/ 55658 w 453390"/>
+                  <a:gd name="connsiteY7" fmla="*/ 89403 h 263525"/>
+                  <a:gd name="connsiteX8" fmla="*/ 84890 w 453390"/>
+                  <a:gd name="connsiteY8" fmla="*/ 0 h 263525"/>
+                </a:gdLst>
+                <a:ahLst/>
+                <a:cxnLst>
+                  <a:cxn ang="0">
+                    <a:pos x="connsiteX0" y="connsiteY0"/>
+                  </a:cxn>
+                  <a:cxn ang="0">
+                    <a:pos x="connsiteX1" y="connsiteY1"/>
+                  </a:cxn>
+                  <a:cxn ang="0">
+                    <a:pos x="connsiteX2" y="connsiteY2"/>
+                  </a:cxn>
+                  <a:cxn ang="0">
+                    <a:pos x="connsiteX3" y="connsiteY3"/>
+                  </a:cxn>
+                  <a:cxn ang="0">
+                    <a:pos x="connsiteX4" y="connsiteY4"/>
+                  </a:cxn>
+                  <a:cxn ang="0">
+                    <a:pos x="connsiteX5" y="connsiteY5"/>
+                  </a:cxn>
+                  <a:cxn ang="0">
+                    <a:pos x="connsiteX6" y="connsiteY6"/>
+                  </a:cxn>
+                  <a:cxn ang="0">
+                    <a:pos x="connsiteX7" y="connsiteY7"/>
+                  </a:cxn>
+                  <a:cxn ang="0">
+                    <a:pos x="connsiteX8" y="connsiteY8"/>
+                  </a:cxn>
+                </a:cxnLst>
+                <a:rect l="l" t="t" r="r" b="b"/>
+                <a:pathLst>
+                  <a:path w="453390" h="263525">
+                    <a:moveTo>
+                      <a:pt x="84890" y="0"/>
+                    </a:moveTo>
+                    <a:lnTo>
+                      <a:pt x="453390" y="0"/>
+                    </a:lnTo>
+                    <a:lnTo>
+                      <a:pt x="453390" y="263525"/>
+                    </a:lnTo>
+                    <a:lnTo>
+                      <a:pt x="84890" y="263525"/>
+                    </a:lnTo>
+                    <a:cubicBezTo>
+                      <a:pt x="68745" y="263525"/>
+                      <a:pt x="59217" y="193028"/>
+                      <a:pt x="59217" y="168771"/>
+                    </a:cubicBezTo>
+                    <a:lnTo>
+                      <a:pt x="4819" y="221542"/>
+                    </a:lnTo>
+                    <a:lnTo>
+                      <a:pt x="0" y="54571"/>
+                    </a:lnTo>
+                    <a:lnTo>
+                      <a:pt x="55658" y="89403"/>
+                    </a:lnTo>
+                    <a:cubicBezTo>
+                      <a:pt x="55658" y="65146"/>
+                      <a:pt x="68745" y="0"/>
+                      <a:pt x="84890" y="0"/>
+                    </a:cubicBezTo>
+                    <a:close/>
+                  </a:path>
+                </a:pathLst>
+              </a:custGeom>
+            </p:spPr>
+            <p:style>
+              <a:lnRef idx="2">
+                <a:schemeClr val="accent5">
+                  <a:shade val="50000"/>
+                </a:schemeClr>
+              </a:lnRef>
+              <a:fillRef idx="1">
+                <a:schemeClr val="accent5"/>
+              </a:fillRef>
+              <a:effectRef idx="0">
+                <a:schemeClr val="accent5"/>
+              </a:effectRef>
+              <a:fontRef idx="minor">
+                <a:schemeClr val="lt1"/>
+              </a:fontRef>
+            </p:style>
+            <p:txBody>
+              <a:bodyPr rot="0" spcFirstLastPara="0" vert="horz" wrap="square" lIns="0" tIns="0" rIns="0" bIns="0" numCol="1" spcCol="0" rtlCol="0" fromWordArt="0" anchor="ctr" anchorCtr="0" forceAA="0" compatLnSpc="1">
+                <a:prstTxWarp prst="textNoShape">
+                  <a:avLst/>
+                </a:prstTxWarp>
+                <a:noAutofit/>
+              </a:bodyPr>
+              <a:lstStyle/>
+              <a:p>
+                <a:pPr indent="73025" algn="ctr">
+                  <a:spcAft>
+                    <a:spcPts val="0"/>
+                  </a:spcAft>
+                </a:pPr>
+                <a:r>
+                  <a:rPr lang="en-US" sz="1200" kern="100" dirty="0">
+                    <a:solidFill>
+                      <a:srgbClr val="FFFFFF"/>
+                    </a:solidFill>
+                    <a:effectLst/>
+                    <a:ea typeface="新細明體" panose="02020500000000000000" pitchFamily="18" charset="-120"/>
+                    <a:cs typeface="Times New Roman" panose="02020603050405020304" pitchFamily="18" charset="0"/>
+                  </a:rPr>
+                  <a:t>1</a:t>
+                </a:r>
+                <a:endParaRPr lang="zh-TW" sz="1200" kern="100" dirty="0">
+                  <a:effectLst/>
+                  <a:ea typeface="新細明體" panose="02020500000000000000" pitchFamily="18" charset="-120"/>
+                  <a:cs typeface="Times New Roman" panose="02020603050405020304" pitchFamily="18" charset="0"/>
+                </a:endParaRPr>
+              </a:p>
+            </p:txBody>
+          </p:sp>
+          <p:sp>
+            <p:nvSpPr>
+              <p:cNvPr id="34" name="手繪多邊形: 圖案 10">
+                <a:extLst>
+                  <a:ext uri="{FF2B5EF4-FFF2-40B4-BE49-F238E27FC236}">
+                    <a16:creationId xmlns:a16="http://schemas.microsoft.com/office/drawing/2014/main" id="{9483881D-8CF9-4E4C-B147-53F94EF2EA90}"/>
+                  </a:ext>
+                </a:extLst>
+              </p:cNvPr>
+              <p:cNvSpPr/>
+              <p:nvPr/>
+            </p:nvSpPr>
+            <p:spPr>
+              <a:xfrm>
+                <a:off x="2065016" y="2736215"/>
+                <a:ext cx="219078" cy="175260"/>
+              </a:xfrm>
+              <a:custGeom>
+                <a:avLst/>
+                <a:gdLst>
+                  <a:gd name="connsiteX0" fmla="*/ 84890 w 453390"/>
+                  <a:gd name="connsiteY0" fmla="*/ 0 h 263525"/>
+                  <a:gd name="connsiteX1" fmla="*/ 453390 w 453390"/>
+                  <a:gd name="connsiteY1" fmla="*/ 0 h 263525"/>
+                  <a:gd name="connsiteX2" fmla="*/ 453390 w 453390"/>
+                  <a:gd name="connsiteY2" fmla="*/ 263525 h 263525"/>
+                  <a:gd name="connsiteX3" fmla="*/ 84890 w 453390"/>
+                  <a:gd name="connsiteY3" fmla="*/ 263525 h 263525"/>
+                  <a:gd name="connsiteX4" fmla="*/ 59217 w 453390"/>
+                  <a:gd name="connsiteY4" fmla="*/ 168771 h 263525"/>
+                  <a:gd name="connsiteX5" fmla="*/ 4819 w 453390"/>
+                  <a:gd name="connsiteY5" fmla="*/ 221542 h 263525"/>
+                  <a:gd name="connsiteX6" fmla="*/ 0 w 453390"/>
+                  <a:gd name="connsiteY6" fmla="*/ 54571 h 263525"/>
+                  <a:gd name="connsiteX7" fmla="*/ 55658 w 453390"/>
+                  <a:gd name="connsiteY7" fmla="*/ 89403 h 263525"/>
+                  <a:gd name="connsiteX8" fmla="*/ 84890 w 453390"/>
+                  <a:gd name="connsiteY8" fmla="*/ 0 h 263525"/>
+                </a:gdLst>
+                <a:ahLst/>
+                <a:cxnLst>
+                  <a:cxn ang="0">
+                    <a:pos x="connsiteX0" y="connsiteY0"/>
+                  </a:cxn>
+                  <a:cxn ang="0">
+                    <a:pos x="connsiteX1" y="connsiteY1"/>
+                  </a:cxn>
+                  <a:cxn ang="0">
+                    <a:pos x="connsiteX2" y="connsiteY2"/>
+                  </a:cxn>
+                  <a:cxn ang="0">
+                    <a:pos x="connsiteX3" y="connsiteY3"/>
+                  </a:cxn>
+                  <a:cxn ang="0">
+                    <a:pos x="connsiteX4" y="connsiteY4"/>
+                  </a:cxn>
+                  <a:cxn ang="0">
+                    <a:pos x="connsiteX5" y="connsiteY5"/>
+                  </a:cxn>
+                  <a:cxn ang="0">
+                    <a:pos x="connsiteX6" y="connsiteY6"/>
+                  </a:cxn>
+                  <a:cxn ang="0">
+                    <a:pos x="connsiteX7" y="connsiteY7"/>
+                  </a:cxn>
+                  <a:cxn ang="0">
+                    <a:pos x="connsiteX8" y="connsiteY8"/>
+                  </a:cxn>
+                </a:cxnLst>
+                <a:rect l="l" t="t" r="r" b="b"/>
+                <a:pathLst>
+                  <a:path w="453390" h="263525">
+                    <a:moveTo>
+                      <a:pt x="84890" y="0"/>
+                    </a:moveTo>
+                    <a:lnTo>
+                      <a:pt x="453390" y="0"/>
+                    </a:lnTo>
+                    <a:lnTo>
+                      <a:pt x="453390" y="263525"/>
+                    </a:lnTo>
+                    <a:lnTo>
+                      <a:pt x="84890" y="263525"/>
+                    </a:lnTo>
+                    <a:cubicBezTo>
+                      <a:pt x="68745" y="263525"/>
+                      <a:pt x="59217" y="193028"/>
+                      <a:pt x="59217" y="168771"/>
+                    </a:cubicBezTo>
+                    <a:lnTo>
+                      <a:pt x="4819" y="221542"/>
+                    </a:lnTo>
+                    <a:lnTo>
+                      <a:pt x="0" y="54571"/>
+                    </a:lnTo>
+                    <a:lnTo>
+                      <a:pt x="55658" y="89403"/>
+                    </a:lnTo>
+                    <a:cubicBezTo>
+                      <a:pt x="55658" y="65146"/>
+                      <a:pt x="68745" y="0"/>
+                      <a:pt x="84890" y="0"/>
+                    </a:cubicBezTo>
+                    <a:close/>
+                  </a:path>
+                </a:pathLst>
+              </a:custGeom>
+            </p:spPr>
+            <p:style>
+              <a:lnRef idx="2">
+                <a:schemeClr val="accent5">
+                  <a:shade val="50000"/>
+                </a:schemeClr>
+              </a:lnRef>
+              <a:fillRef idx="1">
+                <a:schemeClr val="accent5"/>
+              </a:fillRef>
+              <a:effectRef idx="0">
+                <a:schemeClr val="accent5"/>
+              </a:effectRef>
+              <a:fontRef idx="minor">
+                <a:schemeClr val="lt1"/>
+              </a:fontRef>
+            </p:style>
+            <p:txBody>
+              <a:bodyPr rot="0" spcFirstLastPara="0" vert="horz" wrap="square" lIns="0" tIns="0" rIns="0" bIns="0" numCol="1" spcCol="0" rtlCol="0" fromWordArt="0" anchor="ctr" anchorCtr="0" forceAA="0" compatLnSpc="1">
+                <a:prstTxWarp prst="textNoShape">
+                  <a:avLst/>
+                </a:prstTxWarp>
+                <a:noAutofit/>
+              </a:bodyPr>
+              <a:lstStyle/>
+              <a:p>
+                <a:pPr indent="73025" algn="ctr">
+                  <a:spcAft>
+                    <a:spcPts val="0"/>
+                  </a:spcAft>
+                </a:pPr>
+                <a:r>
+                  <a:rPr lang="en-US" sz="1200" kern="100" dirty="0">
+                    <a:solidFill>
+                      <a:srgbClr val="FFFFFF"/>
+                    </a:solidFill>
+                    <a:effectLst/>
+                    <a:ea typeface="新細明體" panose="02020500000000000000" pitchFamily="18" charset="-120"/>
+                    <a:cs typeface="Times New Roman" panose="02020603050405020304" pitchFamily="18" charset="0"/>
+                  </a:rPr>
+                  <a:t>1</a:t>
+                </a:r>
+                <a:endParaRPr lang="zh-TW" sz="1200" kern="100" dirty="0">
+                  <a:effectLst/>
+                  <a:ea typeface="新細明體" panose="02020500000000000000" pitchFamily="18" charset="-120"/>
+                  <a:cs typeface="Times New Roman" panose="02020603050405020304" pitchFamily="18" charset="0"/>
+                </a:endParaRPr>
+              </a:p>
+            </p:txBody>
+          </p:sp>
+          <p:sp>
+            <p:nvSpPr>
+              <p:cNvPr id="35" name="手繪多邊形: 圖案 10">
+                <a:extLst>
+                  <a:ext uri="{FF2B5EF4-FFF2-40B4-BE49-F238E27FC236}">
+                    <a16:creationId xmlns:a16="http://schemas.microsoft.com/office/drawing/2014/main" id="{427C3B60-6D99-425D-8398-9796AF693D84}"/>
+                  </a:ext>
+                </a:extLst>
+              </p:cNvPr>
+              <p:cNvSpPr/>
+              <p:nvPr/>
+            </p:nvSpPr>
+            <p:spPr>
+              <a:xfrm>
+                <a:off x="2346002" y="2736215"/>
+                <a:ext cx="219078" cy="175260"/>
+              </a:xfrm>
+              <a:custGeom>
+                <a:avLst/>
+                <a:gdLst>
+                  <a:gd name="connsiteX0" fmla="*/ 84890 w 453390"/>
+                  <a:gd name="connsiteY0" fmla="*/ 0 h 263525"/>
+                  <a:gd name="connsiteX1" fmla="*/ 453390 w 453390"/>
+                  <a:gd name="connsiteY1" fmla="*/ 0 h 263525"/>
+                  <a:gd name="connsiteX2" fmla="*/ 453390 w 453390"/>
+                  <a:gd name="connsiteY2" fmla="*/ 263525 h 263525"/>
+                  <a:gd name="connsiteX3" fmla="*/ 84890 w 453390"/>
+                  <a:gd name="connsiteY3" fmla="*/ 263525 h 263525"/>
+                  <a:gd name="connsiteX4" fmla="*/ 59217 w 453390"/>
+                  <a:gd name="connsiteY4" fmla="*/ 168771 h 263525"/>
+                  <a:gd name="connsiteX5" fmla="*/ 4819 w 453390"/>
+                  <a:gd name="connsiteY5" fmla="*/ 221542 h 263525"/>
+                  <a:gd name="connsiteX6" fmla="*/ 0 w 453390"/>
+                  <a:gd name="connsiteY6" fmla="*/ 54571 h 263525"/>
+                  <a:gd name="connsiteX7" fmla="*/ 55658 w 453390"/>
+                  <a:gd name="connsiteY7" fmla="*/ 89403 h 263525"/>
+                  <a:gd name="connsiteX8" fmla="*/ 84890 w 453390"/>
+                  <a:gd name="connsiteY8" fmla="*/ 0 h 263525"/>
+                </a:gdLst>
+                <a:ahLst/>
+                <a:cxnLst>
+                  <a:cxn ang="0">
+                    <a:pos x="connsiteX0" y="connsiteY0"/>
+                  </a:cxn>
+                  <a:cxn ang="0">
+                    <a:pos x="connsiteX1" y="connsiteY1"/>
+                  </a:cxn>
+                  <a:cxn ang="0">
+                    <a:pos x="connsiteX2" y="connsiteY2"/>
+                  </a:cxn>
+                  <a:cxn ang="0">
+                    <a:pos x="connsiteX3" y="connsiteY3"/>
+                  </a:cxn>
+                  <a:cxn ang="0">
+                    <a:pos x="connsiteX4" y="connsiteY4"/>
+                  </a:cxn>
+                  <a:cxn ang="0">
+                    <a:pos x="connsiteX5" y="connsiteY5"/>
+                  </a:cxn>
+                  <a:cxn ang="0">
+                    <a:pos x="connsiteX6" y="connsiteY6"/>
+                  </a:cxn>
+                  <a:cxn ang="0">
+                    <a:pos x="connsiteX7" y="connsiteY7"/>
+                  </a:cxn>
+                  <a:cxn ang="0">
+                    <a:pos x="connsiteX8" y="connsiteY8"/>
+                  </a:cxn>
+                </a:cxnLst>
+                <a:rect l="l" t="t" r="r" b="b"/>
+                <a:pathLst>
+                  <a:path w="453390" h="263525">
+                    <a:moveTo>
+                      <a:pt x="84890" y="0"/>
+                    </a:moveTo>
+                    <a:lnTo>
+                      <a:pt x="453390" y="0"/>
+                    </a:lnTo>
+                    <a:lnTo>
+                      <a:pt x="453390" y="263525"/>
+                    </a:lnTo>
+                    <a:lnTo>
+                      <a:pt x="84890" y="263525"/>
+                    </a:lnTo>
+                    <a:cubicBezTo>
+                      <a:pt x="68745" y="263525"/>
+                      <a:pt x="59217" y="193028"/>
+                      <a:pt x="59217" y="168771"/>
+                    </a:cubicBezTo>
+                    <a:lnTo>
+                      <a:pt x="4819" y="221542"/>
+                    </a:lnTo>
+                    <a:lnTo>
+                      <a:pt x="0" y="54571"/>
+                    </a:lnTo>
+                    <a:lnTo>
+                      <a:pt x="55658" y="89403"/>
+                    </a:lnTo>
+                    <a:cubicBezTo>
+                      <a:pt x="55658" y="65146"/>
+                      <a:pt x="68745" y="0"/>
+                      <a:pt x="84890" y="0"/>
+                    </a:cubicBezTo>
+                    <a:close/>
+                  </a:path>
+                </a:pathLst>
+              </a:custGeom>
+            </p:spPr>
+            <p:style>
+              <a:lnRef idx="2">
+                <a:schemeClr val="accent5">
+                  <a:shade val="50000"/>
+                </a:schemeClr>
+              </a:lnRef>
+              <a:fillRef idx="1">
+                <a:schemeClr val="accent5"/>
+              </a:fillRef>
+              <a:effectRef idx="0">
+                <a:schemeClr val="accent5"/>
+              </a:effectRef>
+              <a:fontRef idx="minor">
+                <a:schemeClr val="lt1"/>
+              </a:fontRef>
+            </p:style>
+            <p:txBody>
+              <a:bodyPr rot="0" spcFirstLastPara="0" vert="horz" wrap="square" lIns="0" tIns="0" rIns="0" bIns="0" numCol="1" spcCol="0" rtlCol="0" fromWordArt="0" anchor="ctr" anchorCtr="0" forceAA="0" compatLnSpc="1">
+                <a:prstTxWarp prst="textNoShape">
+                  <a:avLst/>
+                </a:prstTxWarp>
+                <a:noAutofit/>
+              </a:bodyPr>
+              <a:lstStyle/>
+              <a:p>
+                <a:pPr indent="73025" algn="ctr">
+                  <a:spcAft>
+                    <a:spcPts val="0"/>
+                  </a:spcAft>
+                </a:pPr>
+                <a:r>
+                  <a:rPr lang="en-US" sz="1200" kern="100" dirty="0">
+                    <a:solidFill>
+                      <a:srgbClr val="FFFFFF"/>
+                    </a:solidFill>
+                    <a:effectLst/>
+                    <a:ea typeface="新細明體" panose="02020500000000000000" pitchFamily="18" charset="-120"/>
+                    <a:cs typeface="Times New Roman" panose="02020603050405020304" pitchFamily="18" charset="0"/>
+                  </a:rPr>
+                  <a:t>1</a:t>
+                </a:r>
+                <a:endParaRPr lang="zh-TW" sz="1200" kern="100" dirty="0">
+                  <a:effectLst/>
+                  <a:ea typeface="新細明體" panose="02020500000000000000" pitchFamily="18" charset="-120"/>
+                  <a:cs typeface="Times New Roman" panose="02020603050405020304" pitchFamily="18" charset="0"/>
+                </a:endParaRPr>
+              </a:p>
+            </p:txBody>
+          </p:sp>
+          <p:sp>
+            <p:nvSpPr>
+              <p:cNvPr id="36" name="手繪多邊形: 圖案 10">
+                <a:extLst>
+                  <a:ext uri="{FF2B5EF4-FFF2-40B4-BE49-F238E27FC236}">
+                    <a16:creationId xmlns:a16="http://schemas.microsoft.com/office/drawing/2014/main" id="{5560B283-7234-41D6-B1AD-A541FB63B2B6}"/>
+                  </a:ext>
+                </a:extLst>
+              </p:cNvPr>
+              <p:cNvSpPr/>
+              <p:nvPr/>
+            </p:nvSpPr>
+            <p:spPr>
+              <a:xfrm>
+                <a:off x="2633667" y="2736215"/>
+                <a:ext cx="219078" cy="175260"/>
+              </a:xfrm>
+              <a:custGeom>
+                <a:avLst/>
+                <a:gdLst>
+                  <a:gd name="connsiteX0" fmla="*/ 84890 w 453390"/>
+                  <a:gd name="connsiteY0" fmla="*/ 0 h 263525"/>
+                  <a:gd name="connsiteX1" fmla="*/ 453390 w 453390"/>
+                  <a:gd name="connsiteY1" fmla="*/ 0 h 263525"/>
+                  <a:gd name="connsiteX2" fmla="*/ 453390 w 453390"/>
+                  <a:gd name="connsiteY2" fmla="*/ 263525 h 263525"/>
+                  <a:gd name="connsiteX3" fmla="*/ 84890 w 453390"/>
+                  <a:gd name="connsiteY3" fmla="*/ 263525 h 263525"/>
+                  <a:gd name="connsiteX4" fmla="*/ 59217 w 453390"/>
+                  <a:gd name="connsiteY4" fmla="*/ 168771 h 263525"/>
+                  <a:gd name="connsiteX5" fmla="*/ 4819 w 453390"/>
+                  <a:gd name="connsiteY5" fmla="*/ 221542 h 263525"/>
+                  <a:gd name="connsiteX6" fmla="*/ 0 w 453390"/>
+                  <a:gd name="connsiteY6" fmla="*/ 54571 h 263525"/>
+                  <a:gd name="connsiteX7" fmla="*/ 55658 w 453390"/>
+                  <a:gd name="connsiteY7" fmla="*/ 89403 h 263525"/>
+                  <a:gd name="connsiteX8" fmla="*/ 84890 w 453390"/>
+                  <a:gd name="connsiteY8" fmla="*/ 0 h 263525"/>
+                </a:gdLst>
+                <a:ahLst/>
+                <a:cxnLst>
+                  <a:cxn ang="0">
+                    <a:pos x="connsiteX0" y="connsiteY0"/>
+                  </a:cxn>
+                  <a:cxn ang="0">
+                    <a:pos x="connsiteX1" y="connsiteY1"/>
+                  </a:cxn>
+                  <a:cxn ang="0">
+                    <a:pos x="connsiteX2" y="connsiteY2"/>
+                  </a:cxn>
+                  <a:cxn ang="0">
+                    <a:pos x="connsiteX3" y="connsiteY3"/>
+                  </a:cxn>
+                  <a:cxn ang="0">
+                    <a:pos x="connsiteX4" y="connsiteY4"/>
+                  </a:cxn>
+                  <a:cxn ang="0">
+                    <a:pos x="connsiteX5" y="connsiteY5"/>
+                  </a:cxn>
+                  <a:cxn ang="0">
+                    <a:pos x="connsiteX6" y="connsiteY6"/>
+                  </a:cxn>
+                  <a:cxn ang="0">
+                    <a:pos x="connsiteX7" y="connsiteY7"/>
+                  </a:cxn>
+                  <a:cxn ang="0">
+                    <a:pos x="connsiteX8" y="connsiteY8"/>
+                  </a:cxn>
+                </a:cxnLst>
+                <a:rect l="l" t="t" r="r" b="b"/>
+                <a:pathLst>
+                  <a:path w="453390" h="263525">
+                    <a:moveTo>
+                      <a:pt x="84890" y="0"/>
+                    </a:moveTo>
+                    <a:lnTo>
+                      <a:pt x="453390" y="0"/>
+                    </a:lnTo>
+                    <a:lnTo>
+                      <a:pt x="453390" y="263525"/>
+                    </a:lnTo>
+                    <a:lnTo>
+                      <a:pt x="84890" y="263525"/>
+                    </a:lnTo>
+                    <a:cubicBezTo>
+                      <a:pt x="68745" y="263525"/>
+                      <a:pt x="59217" y="193028"/>
+                      <a:pt x="59217" y="168771"/>
+                    </a:cubicBezTo>
+                    <a:lnTo>
+                      <a:pt x="4819" y="221542"/>
+                    </a:lnTo>
+                    <a:lnTo>
+                      <a:pt x="0" y="54571"/>
+                    </a:lnTo>
+                    <a:lnTo>
+                      <a:pt x="55658" y="89403"/>
+                    </a:lnTo>
+                    <a:cubicBezTo>
+                      <a:pt x="55658" y="65146"/>
+                      <a:pt x="68745" y="0"/>
+                      <a:pt x="84890" y="0"/>
+                    </a:cubicBezTo>
+                    <a:close/>
+                  </a:path>
+                </a:pathLst>
+              </a:custGeom>
+            </p:spPr>
+            <p:style>
+              <a:lnRef idx="2">
+                <a:schemeClr val="accent5">
+                  <a:shade val="50000"/>
+                </a:schemeClr>
+              </a:lnRef>
+              <a:fillRef idx="1">
+                <a:schemeClr val="accent5"/>
+              </a:fillRef>
+              <a:effectRef idx="0">
+                <a:schemeClr val="accent5"/>
+              </a:effectRef>
+              <a:fontRef idx="minor">
+                <a:schemeClr val="lt1"/>
+              </a:fontRef>
+            </p:style>
+            <p:txBody>
+              <a:bodyPr rot="0" spcFirstLastPara="0" vert="horz" wrap="square" lIns="0" tIns="0" rIns="0" bIns="0" numCol="1" spcCol="0" rtlCol="0" fromWordArt="0" anchor="ctr" anchorCtr="0" forceAA="0" compatLnSpc="1">
+                <a:prstTxWarp prst="textNoShape">
+                  <a:avLst/>
+                </a:prstTxWarp>
+                <a:noAutofit/>
+              </a:bodyPr>
+              <a:lstStyle/>
+              <a:p>
+                <a:pPr indent="73025" algn="ctr">
+                  <a:spcAft>
+                    <a:spcPts val="0"/>
+                  </a:spcAft>
+                </a:pPr>
+                <a:r>
+                  <a:rPr lang="en-US" sz="1200" kern="100" dirty="0">
+                    <a:solidFill>
+                      <a:srgbClr val="FFFFFF"/>
+                    </a:solidFill>
+                    <a:effectLst/>
+                    <a:ea typeface="新細明體" panose="02020500000000000000" pitchFamily="18" charset="-120"/>
+                    <a:cs typeface="Times New Roman" panose="02020603050405020304" pitchFamily="18" charset="0"/>
+                  </a:rPr>
+                  <a:t>1</a:t>
+                </a:r>
+                <a:endParaRPr lang="zh-TW" sz="1200" kern="100" dirty="0">
+                  <a:effectLst/>
+                  <a:ea typeface="新細明體" panose="02020500000000000000" pitchFamily="18" charset="-120"/>
+                  <a:cs typeface="Times New Roman" panose="02020603050405020304" pitchFamily="18" charset="0"/>
+                </a:endParaRPr>
+              </a:p>
+            </p:txBody>
+          </p:sp>
+          <p:sp>
+            <p:nvSpPr>
+              <p:cNvPr id="37" name="手繪多邊形: 圖案 10">
+                <a:extLst>
+                  <a:ext uri="{FF2B5EF4-FFF2-40B4-BE49-F238E27FC236}">
+                    <a16:creationId xmlns:a16="http://schemas.microsoft.com/office/drawing/2014/main" id="{CB13022C-D744-47C6-91A0-288305D50156}"/>
+                  </a:ext>
+                </a:extLst>
+              </p:cNvPr>
+              <p:cNvSpPr/>
+              <p:nvPr/>
+            </p:nvSpPr>
+            <p:spPr>
+              <a:xfrm>
+                <a:off x="2914653" y="2736215"/>
+                <a:ext cx="219078" cy="175260"/>
+              </a:xfrm>
+              <a:custGeom>
+                <a:avLst/>
+                <a:gdLst>
+                  <a:gd name="connsiteX0" fmla="*/ 84890 w 453390"/>
+                  <a:gd name="connsiteY0" fmla="*/ 0 h 263525"/>
+                  <a:gd name="connsiteX1" fmla="*/ 453390 w 453390"/>
+                  <a:gd name="connsiteY1" fmla="*/ 0 h 263525"/>
+                  <a:gd name="connsiteX2" fmla="*/ 453390 w 453390"/>
+                  <a:gd name="connsiteY2" fmla="*/ 263525 h 263525"/>
+                  <a:gd name="connsiteX3" fmla="*/ 84890 w 453390"/>
+                  <a:gd name="connsiteY3" fmla="*/ 263525 h 263525"/>
+                  <a:gd name="connsiteX4" fmla="*/ 59217 w 453390"/>
+                  <a:gd name="connsiteY4" fmla="*/ 168771 h 263525"/>
+                  <a:gd name="connsiteX5" fmla="*/ 4819 w 453390"/>
+                  <a:gd name="connsiteY5" fmla="*/ 221542 h 263525"/>
+                  <a:gd name="connsiteX6" fmla="*/ 0 w 453390"/>
+                  <a:gd name="connsiteY6" fmla="*/ 54571 h 263525"/>
+                  <a:gd name="connsiteX7" fmla="*/ 55658 w 453390"/>
+                  <a:gd name="connsiteY7" fmla="*/ 89403 h 263525"/>
+                  <a:gd name="connsiteX8" fmla="*/ 84890 w 453390"/>
+                  <a:gd name="connsiteY8" fmla="*/ 0 h 263525"/>
+                </a:gdLst>
+                <a:ahLst/>
+                <a:cxnLst>
+                  <a:cxn ang="0">
+                    <a:pos x="connsiteX0" y="connsiteY0"/>
+                  </a:cxn>
+                  <a:cxn ang="0">
+                    <a:pos x="connsiteX1" y="connsiteY1"/>
+                  </a:cxn>
+                  <a:cxn ang="0">
+                    <a:pos x="connsiteX2" y="connsiteY2"/>
+                  </a:cxn>
+                  <a:cxn ang="0">
+                    <a:pos x="connsiteX3" y="connsiteY3"/>
+                  </a:cxn>
+                  <a:cxn ang="0">
+                    <a:pos x="connsiteX4" y="connsiteY4"/>
+                  </a:cxn>
+                  <a:cxn ang="0">
+                    <a:pos x="connsiteX5" y="connsiteY5"/>
+                  </a:cxn>
+                  <a:cxn ang="0">
+                    <a:pos x="connsiteX6" y="connsiteY6"/>
+                  </a:cxn>
+                  <a:cxn ang="0">
+                    <a:pos x="connsiteX7" y="connsiteY7"/>
+                  </a:cxn>
+                  <a:cxn ang="0">
+                    <a:pos x="connsiteX8" y="connsiteY8"/>
+                  </a:cxn>
+                </a:cxnLst>
+                <a:rect l="l" t="t" r="r" b="b"/>
+                <a:pathLst>
+                  <a:path w="453390" h="263525">
+                    <a:moveTo>
+                      <a:pt x="84890" y="0"/>
+                    </a:moveTo>
+                    <a:lnTo>
+                      <a:pt x="453390" y="0"/>
+                    </a:lnTo>
+                    <a:lnTo>
+                      <a:pt x="453390" y="263525"/>
+                    </a:lnTo>
+                    <a:lnTo>
+                      <a:pt x="84890" y="263525"/>
+                    </a:lnTo>
+                    <a:cubicBezTo>
+                      <a:pt x="68745" y="263525"/>
+                      <a:pt x="59217" y="193028"/>
+                      <a:pt x="59217" y="168771"/>
+                    </a:cubicBezTo>
+                    <a:lnTo>
+                      <a:pt x="4819" y="221542"/>
+                    </a:lnTo>
+                    <a:lnTo>
+                      <a:pt x="0" y="54571"/>
+                    </a:lnTo>
+                    <a:lnTo>
+                      <a:pt x="55658" y="89403"/>
+                    </a:lnTo>
+                    <a:cubicBezTo>
+                      <a:pt x="55658" y="65146"/>
+                      <a:pt x="68745" y="0"/>
+                      <a:pt x="84890" y="0"/>
+                    </a:cubicBezTo>
+                    <a:close/>
+                  </a:path>
+                </a:pathLst>
+              </a:custGeom>
+            </p:spPr>
+            <p:style>
+              <a:lnRef idx="2">
+                <a:schemeClr val="accent5">
+                  <a:shade val="50000"/>
+                </a:schemeClr>
+              </a:lnRef>
+              <a:fillRef idx="1">
+                <a:schemeClr val="accent5"/>
+              </a:fillRef>
+              <a:effectRef idx="0">
+                <a:schemeClr val="accent5"/>
+              </a:effectRef>
+              <a:fontRef idx="minor">
+                <a:schemeClr val="lt1"/>
+              </a:fontRef>
+            </p:style>
+            <p:txBody>
+              <a:bodyPr rot="0" spcFirstLastPara="0" vert="horz" wrap="square" lIns="0" tIns="0" rIns="0" bIns="0" numCol="1" spcCol="0" rtlCol="0" fromWordArt="0" anchor="ctr" anchorCtr="0" forceAA="0" compatLnSpc="1">
+                <a:prstTxWarp prst="textNoShape">
+                  <a:avLst/>
+                </a:prstTxWarp>
+                <a:noAutofit/>
+              </a:bodyPr>
+              <a:lstStyle/>
+              <a:p>
+                <a:pPr indent="73025" algn="ctr">
+                  <a:spcAft>
+                    <a:spcPts val="0"/>
+                  </a:spcAft>
+                </a:pPr>
+                <a:r>
+                  <a:rPr lang="en-US" sz="1200" kern="100" dirty="0">
+                    <a:solidFill>
+                      <a:srgbClr val="FFFFFF"/>
+                    </a:solidFill>
+                    <a:effectLst/>
+                    <a:ea typeface="新細明體" panose="02020500000000000000" pitchFamily="18" charset="-120"/>
+                    <a:cs typeface="Times New Roman" panose="02020603050405020304" pitchFamily="18" charset="0"/>
+                  </a:rPr>
+                  <a:t>1</a:t>
+                </a:r>
+                <a:endParaRPr lang="zh-TW" sz="1200" kern="100" dirty="0">
+                  <a:effectLst/>
+                  <a:ea typeface="新細明體" panose="02020500000000000000" pitchFamily="18" charset="-120"/>
+                  <a:cs typeface="Times New Roman" panose="02020603050405020304" pitchFamily="18" charset="0"/>
+                </a:endParaRPr>
+              </a:p>
+            </p:txBody>
+          </p:sp>
+        </p:grpSp>
+        <p:grpSp>
+          <p:nvGrpSpPr>
+            <p:cNvPr id="38" name="群組 37">
+              <a:extLst>
+                <a:ext uri="{FF2B5EF4-FFF2-40B4-BE49-F238E27FC236}">
+                  <a16:creationId xmlns:a16="http://schemas.microsoft.com/office/drawing/2014/main" id="{4DD02529-DD7A-4EC2-B18A-79D7BADC84CD}"/>
+                </a:ext>
+              </a:extLst>
+            </p:cNvPr>
+            <p:cNvGrpSpPr/>
+            <p:nvPr/>
+          </p:nvGrpSpPr>
+          <p:grpSpPr>
+            <a:xfrm>
+              <a:off x="1503044" y="3664586"/>
+              <a:ext cx="1630687" cy="175260"/>
+              <a:chOff x="1503044" y="2736215"/>
+              <a:chExt cx="1630687" cy="175260"/>
+            </a:xfrm>
+          </p:grpSpPr>
+          <p:sp>
+            <p:nvSpPr>
+              <p:cNvPr id="39" name="手繪多邊形: 圖案 10">
+                <a:extLst>
+                  <a:ext uri="{FF2B5EF4-FFF2-40B4-BE49-F238E27FC236}">
+                    <a16:creationId xmlns:a16="http://schemas.microsoft.com/office/drawing/2014/main" id="{F7C65FE9-5F33-42C0-BEA9-29DE4B66D00B}"/>
+                  </a:ext>
+                </a:extLst>
+              </p:cNvPr>
+              <p:cNvSpPr/>
+              <p:nvPr/>
+            </p:nvSpPr>
+            <p:spPr>
+              <a:xfrm>
+                <a:off x="1503044" y="2736215"/>
+                <a:ext cx="219078" cy="175260"/>
+              </a:xfrm>
+              <a:custGeom>
+                <a:avLst/>
+                <a:gdLst>
+                  <a:gd name="connsiteX0" fmla="*/ 84890 w 453390"/>
+                  <a:gd name="connsiteY0" fmla="*/ 0 h 263525"/>
+                  <a:gd name="connsiteX1" fmla="*/ 453390 w 453390"/>
+                  <a:gd name="connsiteY1" fmla="*/ 0 h 263525"/>
+                  <a:gd name="connsiteX2" fmla="*/ 453390 w 453390"/>
+                  <a:gd name="connsiteY2" fmla="*/ 263525 h 263525"/>
+                  <a:gd name="connsiteX3" fmla="*/ 84890 w 453390"/>
+                  <a:gd name="connsiteY3" fmla="*/ 263525 h 263525"/>
+                  <a:gd name="connsiteX4" fmla="*/ 59217 w 453390"/>
+                  <a:gd name="connsiteY4" fmla="*/ 168771 h 263525"/>
+                  <a:gd name="connsiteX5" fmla="*/ 4819 w 453390"/>
+                  <a:gd name="connsiteY5" fmla="*/ 221542 h 263525"/>
+                  <a:gd name="connsiteX6" fmla="*/ 0 w 453390"/>
+                  <a:gd name="connsiteY6" fmla="*/ 54571 h 263525"/>
+                  <a:gd name="connsiteX7" fmla="*/ 55658 w 453390"/>
+                  <a:gd name="connsiteY7" fmla="*/ 89403 h 263525"/>
+                  <a:gd name="connsiteX8" fmla="*/ 84890 w 453390"/>
+                  <a:gd name="connsiteY8" fmla="*/ 0 h 263525"/>
+                </a:gdLst>
+                <a:ahLst/>
+                <a:cxnLst>
+                  <a:cxn ang="0">
+                    <a:pos x="connsiteX0" y="connsiteY0"/>
+                  </a:cxn>
+                  <a:cxn ang="0">
+                    <a:pos x="connsiteX1" y="connsiteY1"/>
+                  </a:cxn>
+                  <a:cxn ang="0">
+                    <a:pos x="connsiteX2" y="connsiteY2"/>
+                  </a:cxn>
+                  <a:cxn ang="0">
+                    <a:pos x="connsiteX3" y="connsiteY3"/>
+                  </a:cxn>
+                  <a:cxn ang="0">
+                    <a:pos x="connsiteX4" y="connsiteY4"/>
+                  </a:cxn>
+                  <a:cxn ang="0">
+                    <a:pos x="connsiteX5" y="connsiteY5"/>
+                  </a:cxn>
+                  <a:cxn ang="0">
+                    <a:pos x="connsiteX6" y="connsiteY6"/>
+                  </a:cxn>
+                  <a:cxn ang="0">
+                    <a:pos x="connsiteX7" y="connsiteY7"/>
+                  </a:cxn>
+                  <a:cxn ang="0">
+                    <a:pos x="connsiteX8" y="connsiteY8"/>
+                  </a:cxn>
+                </a:cxnLst>
+                <a:rect l="l" t="t" r="r" b="b"/>
+                <a:pathLst>
+                  <a:path w="453390" h="263525">
+                    <a:moveTo>
+                      <a:pt x="84890" y="0"/>
+                    </a:moveTo>
+                    <a:lnTo>
+                      <a:pt x="453390" y="0"/>
+                    </a:lnTo>
+                    <a:lnTo>
+                      <a:pt x="453390" y="263525"/>
+                    </a:lnTo>
+                    <a:lnTo>
+                      <a:pt x="84890" y="263525"/>
+                    </a:lnTo>
+                    <a:cubicBezTo>
+                      <a:pt x="68745" y="263525"/>
+                      <a:pt x="59217" y="193028"/>
+                      <a:pt x="59217" y="168771"/>
+                    </a:cubicBezTo>
+                    <a:lnTo>
+                      <a:pt x="4819" y="221542"/>
+                    </a:lnTo>
+                    <a:lnTo>
+                      <a:pt x="0" y="54571"/>
+                    </a:lnTo>
+                    <a:lnTo>
+                      <a:pt x="55658" y="89403"/>
+                    </a:lnTo>
+                    <a:cubicBezTo>
+                      <a:pt x="55658" y="65146"/>
+                      <a:pt x="68745" y="0"/>
+                      <a:pt x="84890" y="0"/>
+                    </a:cubicBezTo>
+                    <a:close/>
+                  </a:path>
+                </a:pathLst>
+              </a:custGeom>
+            </p:spPr>
+            <p:style>
+              <a:lnRef idx="2">
+                <a:schemeClr val="accent5">
+                  <a:shade val="50000"/>
+                </a:schemeClr>
+              </a:lnRef>
+              <a:fillRef idx="1">
+                <a:schemeClr val="accent5"/>
+              </a:fillRef>
+              <a:effectRef idx="0">
+                <a:schemeClr val="accent5"/>
+              </a:effectRef>
+              <a:fontRef idx="minor">
+                <a:schemeClr val="lt1"/>
+              </a:fontRef>
+            </p:style>
+            <p:txBody>
+              <a:bodyPr rot="0" spcFirstLastPara="0" vert="horz" wrap="square" lIns="0" tIns="0" rIns="0" bIns="0" numCol="1" spcCol="0" rtlCol="0" fromWordArt="0" anchor="ctr" anchorCtr="0" forceAA="0" compatLnSpc="1">
+                <a:prstTxWarp prst="textNoShape">
+                  <a:avLst/>
+                </a:prstTxWarp>
+                <a:noAutofit/>
+              </a:bodyPr>
+              <a:lstStyle/>
+              <a:p>
+                <a:pPr indent="73025" algn="ctr">
+                  <a:spcAft>
+                    <a:spcPts val="0"/>
+                  </a:spcAft>
+                </a:pPr>
+                <a:r>
+                  <a:rPr lang="en-US" sz="1200" kern="100" dirty="0">
+                    <a:solidFill>
+                      <a:srgbClr val="FFFFFF"/>
+                    </a:solidFill>
+                    <a:effectLst/>
+                    <a:ea typeface="新細明體" panose="02020500000000000000" pitchFamily="18" charset="-120"/>
+                    <a:cs typeface="Times New Roman" panose="02020603050405020304" pitchFamily="18" charset="0"/>
+                  </a:rPr>
+                  <a:t>1</a:t>
+                </a:r>
+                <a:endParaRPr lang="zh-TW" sz="1200" kern="100" dirty="0">
+                  <a:effectLst/>
+                  <a:ea typeface="新細明體" panose="02020500000000000000" pitchFamily="18" charset="-120"/>
+                  <a:cs typeface="Times New Roman" panose="02020603050405020304" pitchFamily="18" charset="0"/>
+                </a:endParaRPr>
+              </a:p>
+            </p:txBody>
+          </p:sp>
+          <p:sp>
+            <p:nvSpPr>
+              <p:cNvPr id="40" name="手繪多邊形: 圖案 10">
+                <a:extLst>
+                  <a:ext uri="{FF2B5EF4-FFF2-40B4-BE49-F238E27FC236}">
+                    <a16:creationId xmlns:a16="http://schemas.microsoft.com/office/drawing/2014/main" id="{D8DE5067-687D-443B-83A3-66EA9AC7EBA9}"/>
+                  </a:ext>
+                </a:extLst>
+              </p:cNvPr>
+              <p:cNvSpPr/>
+              <p:nvPr/>
+            </p:nvSpPr>
+            <p:spPr>
+              <a:xfrm>
+                <a:off x="1784030" y="2736215"/>
+                <a:ext cx="219078" cy="175260"/>
+              </a:xfrm>
+              <a:custGeom>
+                <a:avLst/>
+                <a:gdLst>
+                  <a:gd name="connsiteX0" fmla="*/ 84890 w 453390"/>
+                  <a:gd name="connsiteY0" fmla="*/ 0 h 263525"/>
+                  <a:gd name="connsiteX1" fmla="*/ 453390 w 453390"/>
+                  <a:gd name="connsiteY1" fmla="*/ 0 h 263525"/>
+                  <a:gd name="connsiteX2" fmla="*/ 453390 w 453390"/>
+                  <a:gd name="connsiteY2" fmla="*/ 263525 h 263525"/>
+                  <a:gd name="connsiteX3" fmla="*/ 84890 w 453390"/>
+                  <a:gd name="connsiteY3" fmla="*/ 263525 h 263525"/>
+                  <a:gd name="connsiteX4" fmla="*/ 59217 w 453390"/>
+                  <a:gd name="connsiteY4" fmla="*/ 168771 h 263525"/>
+                  <a:gd name="connsiteX5" fmla="*/ 4819 w 453390"/>
+                  <a:gd name="connsiteY5" fmla="*/ 221542 h 263525"/>
+                  <a:gd name="connsiteX6" fmla="*/ 0 w 453390"/>
+                  <a:gd name="connsiteY6" fmla="*/ 54571 h 263525"/>
+                  <a:gd name="connsiteX7" fmla="*/ 55658 w 453390"/>
+                  <a:gd name="connsiteY7" fmla="*/ 89403 h 263525"/>
+                  <a:gd name="connsiteX8" fmla="*/ 84890 w 453390"/>
+                  <a:gd name="connsiteY8" fmla="*/ 0 h 263525"/>
+                </a:gdLst>
+                <a:ahLst/>
+                <a:cxnLst>
+                  <a:cxn ang="0">
+                    <a:pos x="connsiteX0" y="connsiteY0"/>
+                  </a:cxn>
+                  <a:cxn ang="0">
+                    <a:pos x="connsiteX1" y="connsiteY1"/>
+                  </a:cxn>
+                  <a:cxn ang="0">
+                    <a:pos x="connsiteX2" y="connsiteY2"/>
+                  </a:cxn>
+                  <a:cxn ang="0">
+                    <a:pos x="connsiteX3" y="connsiteY3"/>
+                  </a:cxn>
+                  <a:cxn ang="0">
+                    <a:pos x="connsiteX4" y="connsiteY4"/>
+                  </a:cxn>
+                  <a:cxn ang="0">
+                    <a:pos x="connsiteX5" y="connsiteY5"/>
+                  </a:cxn>
+                  <a:cxn ang="0">
+                    <a:pos x="connsiteX6" y="connsiteY6"/>
+                  </a:cxn>
+                  <a:cxn ang="0">
+                    <a:pos x="connsiteX7" y="connsiteY7"/>
+                  </a:cxn>
+                  <a:cxn ang="0">
+                    <a:pos x="connsiteX8" y="connsiteY8"/>
+                  </a:cxn>
+                </a:cxnLst>
+                <a:rect l="l" t="t" r="r" b="b"/>
+                <a:pathLst>
+                  <a:path w="453390" h="263525">
+                    <a:moveTo>
+                      <a:pt x="84890" y="0"/>
+                    </a:moveTo>
+                    <a:lnTo>
+                      <a:pt x="453390" y="0"/>
+                    </a:lnTo>
+                    <a:lnTo>
+                      <a:pt x="453390" y="263525"/>
+                    </a:lnTo>
+                    <a:lnTo>
+                      <a:pt x="84890" y="263525"/>
+                    </a:lnTo>
+                    <a:cubicBezTo>
+                      <a:pt x="68745" y="263525"/>
+                      <a:pt x="59217" y="193028"/>
+                      <a:pt x="59217" y="168771"/>
+                    </a:cubicBezTo>
+                    <a:lnTo>
+                      <a:pt x="4819" y="221542"/>
+                    </a:lnTo>
+                    <a:lnTo>
+                      <a:pt x="0" y="54571"/>
+                    </a:lnTo>
+                    <a:lnTo>
+                      <a:pt x="55658" y="89403"/>
+                    </a:lnTo>
+                    <a:cubicBezTo>
+                      <a:pt x="55658" y="65146"/>
+                      <a:pt x="68745" y="0"/>
+                      <a:pt x="84890" y="0"/>
+                    </a:cubicBezTo>
+                    <a:close/>
+                  </a:path>
+                </a:pathLst>
+              </a:custGeom>
+            </p:spPr>
+            <p:style>
+              <a:lnRef idx="2">
+                <a:schemeClr val="accent5">
+                  <a:shade val="50000"/>
+                </a:schemeClr>
+              </a:lnRef>
+              <a:fillRef idx="1">
+                <a:schemeClr val="accent5"/>
+              </a:fillRef>
+              <a:effectRef idx="0">
+                <a:schemeClr val="accent5"/>
+              </a:effectRef>
+              <a:fontRef idx="minor">
+                <a:schemeClr val="lt1"/>
+              </a:fontRef>
+            </p:style>
+            <p:txBody>
+              <a:bodyPr rot="0" spcFirstLastPara="0" vert="horz" wrap="square" lIns="0" tIns="0" rIns="0" bIns="0" numCol="1" spcCol="0" rtlCol="0" fromWordArt="0" anchor="ctr" anchorCtr="0" forceAA="0" compatLnSpc="1">
+                <a:prstTxWarp prst="textNoShape">
+                  <a:avLst/>
+                </a:prstTxWarp>
+                <a:noAutofit/>
+              </a:bodyPr>
+              <a:lstStyle/>
+              <a:p>
+                <a:pPr indent="73025" algn="ctr">
+                  <a:spcAft>
+                    <a:spcPts val="0"/>
+                  </a:spcAft>
+                </a:pPr>
+                <a:r>
+                  <a:rPr lang="en-US" sz="1200" kern="100" dirty="0">
+                    <a:solidFill>
+                      <a:srgbClr val="FFFFFF"/>
+                    </a:solidFill>
+                    <a:effectLst/>
+                    <a:ea typeface="新細明體" panose="02020500000000000000" pitchFamily="18" charset="-120"/>
+                    <a:cs typeface="Times New Roman" panose="02020603050405020304" pitchFamily="18" charset="0"/>
+                  </a:rPr>
+                  <a:t>1</a:t>
+                </a:r>
+                <a:endParaRPr lang="zh-TW" sz="1200" kern="100" dirty="0">
+                  <a:effectLst/>
+                  <a:ea typeface="新細明體" panose="02020500000000000000" pitchFamily="18" charset="-120"/>
+                  <a:cs typeface="Times New Roman" panose="02020603050405020304" pitchFamily="18" charset="0"/>
+                </a:endParaRPr>
+              </a:p>
+            </p:txBody>
+          </p:sp>
+          <p:sp>
+            <p:nvSpPr>
+              <p:cNvPr id="41" name="手繪多邊形: 圖案 10">
+                <a:extLst>
+                  <a:ext uri="{FF2B5EF4-FFF2-40B4-BE49-F238E27FC236}">
+                    <a16:creationId xmlns:a16="http://schemas.microsoft.com/office/drawing/2014/main" id="{8C260ABF-518C-401F-9A7F-53D3085AA6B1}"/>
+                  </a:ext>
+                </a:extLst>
+              </p:cNvPr>
+              <p:cNvSpPr/>
+              <p:nvPr/>
+            </p:nvSpPr>
+            <p:spPr>
+              <a:xfrm>
+                <a:off x="2065016" y="2736215"/>
+                <a:ext cx="219078" cy="175260"/>
+              </a:xfrm>
+              <a:custGeom>
+                <a:avLst/>
+                <a:gdLst>
+                  <a:gd name="connsiteX0" fmla="*/ 84890 w 453390"/>
+                  <a:gd name="connsiteY0" fmla="*/ 0 h 263525"/>
+                  <a:gd name="connsiteX1" fmla="*/ 453390 w 453390"/>
+                  <a:gd name="connsiteY1" fmla="*/ 0 h 263525"/>
+                  <a:gd name="connsiteX2" fmla="*/ 453390 w 453390"/>
+                  <a:gd name="connsiteY2" fmla="*/ 263525 h 263525"/>
+                  <a:gd name="connsiteX3" fmla="*/ 84890 w 453390"/>
+                  <a:gd name="connsiteY3" fmla="*/ 263525 h 263525"/>
+                  <a:gd name="connsiteX4" fmla="*/ 59217 w 453390"/>
+                  <a:gd name="connsiteY4" fmla="*/ 168771 h 263525"/>
+                  <a:gd name="connsiteX5" fmla="*/ 4819 w 453390"/>
+                  <a:gd name="connsiteY5" fmla="*/ 221542 h 263525"/>
+                  <a:gd name="connsiteX6" fmla="*/ 0 w 453390"/>
+                  <a:gd name="connsiteY6" fmla="*/ 54571 h 263525"/>
+                  <a:gd name="connsiteX7" fmla="*/ 55658 w 453390"/>
+                  <a:gd name="connsiteY7" fmla="*/ 89403 h 263525"/>
+                  <a:gd name="connsiteX8" fmla="*/ 84890 w 453390"/>
+                  <a:gd name="connsiteY8" fmla="*/ 0 h 263525"/>
+                </a:gdLst>
+                <a:ahLst/>
+                <a:cxnLst>
+                  <a:cxn ang="0">
+                    <a:pos x="connsiteX0" y="connsiteY0"/>
+                  </a:cxn>
+                  <a:cxn ang="0">
+                    <a:pos x="connsiteX1" y="connsiteY1"/>
+                  </a:cxn>
+                  <a:cxn ang="0">
+                    <a:pos x="connsiteX2" y="connsiteY2"/>
+                  </a:cxn>
+                  <a:cxn ang="0">
+                    <a:pos x="connsiteX3" y="connsiteY3"/>
+                  </a:cxn>
+                  <a:cxn ang="0">
+                    <a:pos x="connsiteX4" y="connsiteY4"/>
+                  </a:cxn>
+                  <a:cxn ang="0">
+                    <a:pos x="connsiteX5" y="connsiteY5"/>
+                  </a:cxn>
+                  <a:cxn ang="0">
+                    <a:pos x="connsiteX6" y="connsiteY6"/>
+                  </a:cxn>
+                  <a:cxn ang="0">
+                    <a:pos x="connsiteX7" y="connsiteY7"/>
+                  </a:cxn>
+                  <a:cxn ang="0">
+                    <a:pos x="connsiteX8" y="connsiteY8"/>
+                  </a:cxn>
+                </a:cxnLst>
+                <a:rect l="l" t="t" r="r" b="b"/>
+                <a:pathLst>
+                  <a:path w="453390" h="263525">
+                    <a:moveTo>
+                      <a:pt x="84890" y="0"/>
+                    </a:moveTo>
+                    <a:lnTo>
+                      <a:pt x="453390" y="0"/>
+                    </a:lnTo>
+                    <a:lnTo>
+                      <a:pt x="453390" y="263525"/>
+                    </a:lnTo>
+                    <a:lnTo>
+                      <a:pt x="84890" y="263525"/>
+                    </a:lnTo>
+                    <a:cubicBezTo>
+                      <a:pt x="68745" y="263525"/>
+                      <a:pt x="59217" y="193028"/>
+                      <a:pt x="59217" y="168771"/>
+                    </a:cubicBezTo>
+                    <a:lnTo>
+                      <a:pt x="4819" y="221542"/>
+                    </a:lnTo>
+                    <a:lnTo>
+                      <a:pt x="0" y="54571"/>
+                    </a:lnTo>
+                    <a:lnTo>
+                      <a:pt x="55658" y="89403"/>
+                    </a:lnTo>
+                    <a:cubicBezTo>
+                      <a:pt x="55658" y="65146"/>
+                      <a:pt x="68745" y="0"/>
+                      <a:pt x="84890" y="0"/>
+                    </a:cubicBezTo>
+                    <a:close/>
+                  </a:path>
+                </a:pathLst>
+              </a:custGeom>
+            </p:spPr>
+            <p:style>
+              <a:lnRef idx="2">
+                <a:schemeClr val="accent5">
+                  <a:shade val="50000"/>
+                </a:schemeClr>
+              </a:lnRef>
+              <a:fillRef idx="1">
+                <a:schemeClr val="accent5"/>
+              </a:fillRef>
+              <a:effectRef idx="0">
+                <a:schemeClr val="accent5"/>
+              </a:effectRef>
+              <a:fontRef idx="minor">
+                <a:schemeClr val="lt1"/>
+              </a:fontRef>
+            </p:style>
+            <p:txBody>
+              <a:bodyPr rot="0" spcFirstLastPara="0" vert="horz" wrap="square" lIns="0" tIns="0" rIns="0" bIns="0" numCol="1" spcCol="0" rtlCol="0" fromWordArt="0" anchor="ctr" anchorCtr="0" forceAA="0" compatLnSpc="1">
+                <a:prstTxWarp prst="textNoShape">
+                  <a:avLst/>
+                </a:prstTxWarp>
+                <a:noAutofit/>
+              </a:bodyPr>
+              <a:lstStyle/>
+              <a:p>
+                <a:pPr indent="73025" algn="ctr">
+                  <a:spcAft>
+                    <a:spcPts val="0"/>
+                  </a:spcAft>
+                </a:pPr>
+                <a:r>
+                  <a:rPr lang="en-US" sz="1200" kern="100" dirty="0">
+                    <a:solidFill>
+                      <a:srgbClr val="FFFFFF"/>
+                    </a:solidFill>
+                    <a:effectLst/>
+                    <a:ea typeface="新細明體" panose="02020500000000000000" pitchFamily="18" charset="-120"/>
+                    <a:cs typeface="Times New Roman" panose="02020603050405020304" pitchFamily="18" charset="0"/>
+                  </a:rPr>
+                  <a:t>1</a:t>
+                </a:r>
+                <a:endParaRPr lang="zh-TW" sz="1200" kern="100" dirty="0">
+                  <a:effectLst/>
+                  <a:ea typeface="新細明體" panose="02020500000000000000" pitchFamily="18" charset="-120"/>
+                  <a:cs typeface="Times New Roman" panose="02020603050405020304" pitchFamily="18" charset="0"/>
+                </a:endParaRPr>
+              </a:p>
+            </p:txBody>
+          </p:sp>
+          <p:sp>
+            <p:nvSpPr>
+              <p:cNvPr id="42" name="手繪多邊形: 圖案 10">
+                <a:extLst>
+                  <a:ext uri="{FF2B5EF4-FFF2-40B4-BE49-F238E27FC236}">
+                    <a16:creationId xmlns:a16="http://schemas.microsoft.com/office/drawing/2014/main" id="{ABA8DBF4-117A-4E2B-A55B-3DEB9E71F330}"/>
+                  </a:ext>
+                </a:extLst>
+              </p:cNvPr>
+              <p:cNvSpPr/>
+              <p:nvPr/>
+            </p:nvSpPr>
+            <p:spPr>
+              <a:xfrm>
+                <a:off x="2346002" y="2736215"/>
+                <a:ext cx="219078" cy="175260"/>
+              </a:xfrm>
+              <a:custGeom>
+                <a:avLst/>
+                <a:gdLst>
+                  <a:gd name="connsiteX0" fmla="*/ 84890 w 453390"/>
+                  <a:gd name="connsiteY0" fmla="*/ 0 h 263525"/>
+                  <a:gd name="connsiteX1" fmla="*/ 453390 w 453390"/>
+                  <a:gd name="connsiteY1" fmla="*/ 0 h 263525"/>
+                  <a:gd name="connsiteX2" fmla="*/ 453390 w 453390"/>
+                  <a:gd name="connsiteY2" fmla="*/ 263525 h 263525"/>
+                  <a:gd name="connsiteX3" fmla="*/ 84890 w 453390"/>
+                  <a:gd name="connsiteY3" fmla="*/ 263525 h 263525"/>
+                  <a:gd name="connsiteX4" fmla="*/ 59217 w 453390"/>
+                  <a:gd name="connsiteY4" fmla="*/ 168771 h 263525"/>
+                  <a:gd name="connsiteX5" fmla="*/ 4819 w 453390"/>
+                  <a:gd name="connsiteY5" fmla="*/ 221542 h 263525"/>
+                  <a:gd name="connsiteX6" fmla="*/ 0 w 453390"/>
+                  <a:gd name="connsiteY6" fmla="*/ 54571 h 263525"/>
+                  <a:gd name="connsiteX7" fmla="*/ 55658 w 453390"/>
+                  <a:gd name="connsiteY7" fmla="*/ 89403 h 263525"/>
+                  <a:gd name="connsiteX8" fmla="*/ 84890 w 453390"/>
+                  <a:gd name="connsiteY8" fmla="*/ 0 h 263525"/>
+                </a:gdLst>
+                <a:ahLst/>
+                <a:cxnLst>
+                  <a:cxn ang="0">
+                    <a:pos x="connsiteX0" y="connsiteY0"/>
+                  </a:cxn>
+                  <a:cxn ang="0">
+                    <a:pos x="connsiteX1" y="connsiteY1"/>
+                  </a:cxn>
+                  <a:cxn ang="0">
+                    <a:pos x="connsiteX2" y="connsiteY2"/>
+                  </a:cxn>
+                  <a:cxn ang="0">
+                    <a:pos x="connsiteX3" y="connsiteY3"/>
+                  </a:cxn>
+                  <a:cxn ang="0">
+                    <a:pos x="connsiteX4" y="connsiteY4"/>
+                  </a:cxn>
+                  <a:cxn ang="0">
+                    <a:pos x="connsiteX5" y="connsiteY5"/>
+                  </a:cxn>
+                  <a:cxn ang="0">
+                    <a:pos x="connsiteX6" y="connsiteY6"/>
+                  </a:cxn>
+                  <a:cxn ang="0">
+                    <a:pos x="connsiteX7" y="connsiteY7"/>
+                  </a:cxn>
+                  <a:cxn ang="0">
+                    <a:pos x="connsiteX8" y="connsiteY8"/>
+                  </a:cxn>
+                </a:cxnLst>
+                <a:rect l="l" t="t" r="r" b="b"/>
+                <a:pathLst>
+                  <a:path w="453390" h="263525">
+                    <a:moveTo>
+                      <a:pt x="84890" y="0"/>
+                    </a:moveTo>
+                    <a:lnTo>
+                      <a:pt x="453390" y="0"/>
+                    </a:lnTo>
+                    <a:lnTo>
+                      <a:pt x="453390" y="263525"/>
+                    </a:lnTo>
+                    <a:lnTo>
+                      <a:pt x="84890" y="263525"/>
+                    </a:lnTo>
+                    <a:cubicBezTo>
+                      <a:pt x="68745" y="263525"/>
+                      <a:pt x="59217" y="193028"/>
+                      <a:pt x="59217" y="168771"/>
+                    </a:cubicBezTo>
+                    <a:lnTo>
+                      <a:pt x="4819" y="221542"/>
+                    </a:lnTo>
+                    <a:lnTo>
+                      <a:pt x="0" y="54571"/>
+                    </a:lnTo>
+                    <a:lnTo>
+                      <a:pt x="55658" y="89403"/>
+                    </a:lnTo>
+                    <a:cubicBezTo>
+                      <a:pt x="55658" y="65146"/>
+                      <a:pt x="68745" y="0"/>
+                      <a:pt x="84890" y="0"/>
+                    </a:cubicBezTo>
+                    <a:close/>
+                  </a:path>
+                </a:pathLst>
+              </a:custGeom>
+            </p:spPr>
+            <p:style>
+              <a:lnRef idx="2">
+                <a:schemeClr val="accent5">
+                  <a:shade val="50000"/>
+                </a:schemeClr>
+              </a:lnRef>
+              <a:fillRef idx="1">
+                <a:schemeClr val="accent5"/>
+              </a:fillRef>
+              <a:effectRef idx="0">
+                <a:schemeClr val="accent5"/>
+              </a:effectRef>
+              <a:fontRef idx="minor">
+                <a:schemeClr val="lt1"/>
+              </a:fontRef>
+            </p:style>
+            <p:txBody>
+              <a:bodyPr rot="0" spcFirstLastPara="0" vert="horz" wrap="square" lIns="0" tIns="0" rIns="0" bIns="0" numCol="1" spcCol="0" rtlCol="0" fromWordArt="0" anchor="ctr" anchorCtr="0" forceAA="0" compatLnSpc="1">
+                <a:prstTxWarp prst="textNoShape">
+                  <a:avLst/>
+                </a:prstTxWarp>
+                <a:noAutofit/>
+              </a:bodyPr>
+              <a:lstStyle/>
+              <a:p>
+                <a:pPr indent="73025" algn="ctr">
+                  <a:spcAft>
+                    <a:spcPts val="0"/>
+                  </a:spcAft>
+                </a:pPr>
+                <a:r>
+                  <a:rPr lang="en-US" sz="1200" kern="100" dirty="0">
+                    <a:solidFill>
+                      <a:srgbClr val="FFFFFF"/>
+                    </a:solidFill>
+                    <a:effectLst/>
+                    <a:ea typeface="新細明體" panose="02020500000000000000" pitchFamily="18" charset="-120"/>
+                    <a:cs typeface="Times New Roman" panose="02020603050405020304" pitchFamily="18" charset="0"/>
+                  </a:rPr>
+                  <a:t>1</a:t>
+                </a:r>
+                <a:endParaRPr lang="zh-TW" sz="1200" kern="100" dirty="0">
+                  <a:effectLst/>
+                  <a:ea typeface="新細明體" panose="02020500000000000000" pitchFamily="18" charset="-120"/>
+                  <a:cs typeface="Times New Roman" panose="02020603050405020304" pitchFamily="18" charset="0"/>
+                </a:endParaRPr>
+              </a:p>
+            </p:txBody>
+          </p:sp>
+          <p:sp>
+            <p:nvSpPr>
+              <p:cNvPr id="43" name="手繪多邊形: 圖案 10">
+                <a:extLst>
+                  <a:ext uri="{FF2B5EF4-FFF2-40B4-BE49-F238E27FC236}">
+                    <a16:creationId xmlns:a16="http://schemas.microsoft.com/office/drawing/2014/main" id="{DD957D04-C10F-459C-9451-0B24A7FD1707}"/>
+                  </a:ext>
+                </a:extLst>
+              </p:cNvPr>
+              <p:cNvSpPr/>
+              <p:nvPr/>
+            </p:nvSpPr>
+            <p:spPr>
+              <a:xfrm>
+                <a:off x="2633667" y="2736215"/>
+                <a:ext cx="219078" cy="175260"/>
+              </a:xfrm>
+              <a:custGeom>
+                <a:avLst/>
+                <a:gdLst>
+                  <a:gd name="connsiteX0" fmla="*/ 84890 w 453390"/>
+                  <a:gd name="connsiteY0" fmla="*/ 0 h 263525"/>
+                  <a:gd name="connsiteX1" fmla="*/ 453390 w 453390"/>
+                  <a:gd name="connsiteY1" fmla="*/ 0 h 263525"/>
+                  <a:gd name="connsiteX2" fmla="*/ 453390 w 453390"/>
+                  <a:gd name="connsiteY2" fmla="*/ 263525 h 263525"/>
+                  <a:gd name="connsiteX3" fmla="*/ 84890 w 453390"/>
+                  <a:gd name="connsiteY3" fmla="*/ 263525 h 263525"/>
+                  <a:gd name="connsiteX4" fmla="*/ 59217 w 453390"/>
+                  <a:gd name="connsiteY4" fmla="*/ 168771 h 263525"/>
+                  <a:gd name="connsiteX5" fmla="*/ 4819 w 453390"/>
+                  <a:gd name="connsiteY5" fmla="*/ 221542 h 263525"/>
+                  <a:gd name="connsiteX6" fmla="*/ 0 w 453390"/>
+                  <a:gd name="connsiteY6" fmla="*/ 54571 h 263525"/>
+                  <a:gd name="connsiteX7" fmla="*/ 55658 w 453390"/>
+                  <a:gd name="connsiteY7" fmla="*/ 89403 h 263525"/>
+                  <a:gd name="connsiteX8" fmla="*/ 84890 w 453390"/>
+                  <a:gd name="connsiteY8" fmla="*/ 0 h 263525"/>
+                </a:gdLst>
+                <a:ahLst/>
+                <a:cxnLst>
+                  <a:cxn ang="0">
+                    <a:pos x="connsiteX0" y="connsiteY0"/>
+                  </a:cxn>
+                  <a:cxn ang="0">
+                    <a:pos x="connsiteX1" y="connsiteY1"/>
+                  </a:cxn>
+                  <a:cxn ang="0">
+                    <a:pos x="connsiteX2" y="connsiteY2"/>
+                  </a:cxn>
+                  <a:cxn ang="0">
+                    <a:pos x="connsiteX3" y="connsiteY3"/>
+                  </a:cxn>
+                  <a:cxn ang="0">
+                    <a:pos x="connsiteX4" y="connsiteY4"/>
+                  </a:cxn>
+                  <a:cxn ang="0">
+                    <a:pos x="connsiteX5" y="connsiteY5"/>
+                  </a:cxn>
+                  <a:cxn ang="0">
+                    <a:pos x="connsiteX6" y="connsiteY6"/>
+                  </a:cxn>
+                  <a:cxn ang="0">
+                    <a:pos x="connsiteX7" y="connsiteY7"/>
+                  </a:cxn>
+                  <a:cxn ang="0">
+                    <a:pos x="connsiteX8" y="connsiteY8"/>
+                  </a:cxn>
+                </a:cxnLst>
+                <a:rect l="l" t="t" r="r" b="b"/>
+                <a:pathLst>
+                  <a:path w="453390" h="263525">
+                    <a:moveTo>
+                      <a:pt x="84890" y="0"/>
+                    </a:moveTo>
+                    <a:lnTo>
+                      <a:pt x="453390" y="0"/>
+                    </a:lnTo>
+                    <a:lnTo>
+                      <a:pt x="453390" y="263525"/>
+                    </a:lnTo>
+                    <a:lnTo>
+                      <a:pt x="84890" y="263525"/>
+                    </a:lnTo>
+                    <a:cubicBezTo>
+                      <a:pt x="68745" y="263525"/>
+                      <a:pt x="59217" y="193028"/>
+                      <a:pt x="59217" y="168771"/>
+                    </a:cubicBezTo>
+                    <a:lnTo>
+                      <a:pt x="4819" y="221542"/>
+                    </a:lnTo>
+                    <a:lnTo>
+                      <a:pt x="0" y="54571"/>
+                    </a:lnTo>
+                    <a:lnTo>
+                      <a:pt x="55658" y="89403"/>
+                    </a:lnTo>
+                    <a:cubicBezTo>
+                      <a:pt x="55658" y="65146"/>
+                      <a:pt x="68745" y="0"/>
+                      <a:pt x="84890" y="0"/>
+                    </a:cubicBezTo>
+                    <a:close/>
+                  </a:path>
+                </a:pathLst>
+              </a:custGeom>
+            </p:spPr>
+            <p:style>
+              <a:lnRef idx="2">
+                <a:schemeClr val="accent5">
+                  <a:shade val="50000"/>
+                </a:schemeClr>
+              </a:lnRef>
+              <a:fillRef idx="1">
+                <a:schemeClr val="accent5"/>
+              </a:fillRef>
+              <a:effectRef idx="0">
+                <a:schemeClr val="accent5"/>
+              </a:effectRef>
+              <a:fontRef idx="minor">
+                <a:schemeClr val="lt1"/>
+              </a:fontRef>
+            </p:style>
+            <p:txBody>
+              <a:bodyPr rot="0" spcFirstLastPara="0" vert="horz" wrap="square" lIns="0" tIns="0" rIns="0" bIns="0" numCol="1" spcCol="0" rtlCol="0" fromWordArt="0" anchor="ctr" anchorCtr="0" forceAA="0" compatLnSpc="1">
+                <a:prstTxWarp prst="textNoShape">
+                  <a:avLst/>
+                </a:prstTxWarp>
+                <a:noAutofit/>
+              </a:bodyPr>
+              <a:lstStyle/>
+              <a:p>
+                <a:pPr indent="73025" algn="ctr">
+                  <a:spcAft>
+                    <a:spcPts val="0"/>
+                  </a:spcAft>
+                </a:pPr>
+                <a:r>
+                  <a:rPr lang="en-US" sz="1200" kern="100" dirty="0">
+                    <a:solidFill>
+                      <a:srgbClr val="FFFFFF"/>
+                    </a:solidFill>
+                    <a:effectLst/>
+                    <a:ea typeface="新細明體" panose="02020500000000000000" pitchFamily="18" charset="-120"/>
+                    <a:cs typeface="Times New Roman" panose="02020603050405020304" pitchFamily="18" charset="0"/>
+                  </a:rPr>
+                  <a:t>1</a:t>
+                </a:r>
+                <a:endParaRPr lang="zh-TW" sz="1200" kern="100" dirty="0">
+                  <a:effectLst/>
+                  <a:ea typeface="新細明體" panose="02020500000000000000" pitchFamily="18" charset="-120"/>
+                  <a:cs typeface="Times New Roman" panose="02020603050405020304" pitchFamily="18" charset="0"/>
+                </a:endParaRPr>
+              </a:p>
+            </p:txBody>
+          </p:sp>
+          <p:sp>
+            <p:nvSpPr>
+              <p:cNvPr id="44" name="手繪多邊形: 圖案 10">
+                <a:extLst>
+                  <a:ext uri="{FF2B5EF4-FFF2-40B4-BE49-F238E27FC236}">
+                    <a16:creationId xmlns:a16="http://schemas.microsoft.com/office/drawing/2014/main" id="{F6367CBF-4995-4BF9-8DF9-A0BBE6DBE543}"/>
+                  </a:ext>
+                </a:extLst>
+              </p:cNvPr>
+              <p:cNvSpPr/>
+              <p:nvPr/>
+            </p:nvSpPr>
+            <p:spPr>
+              <a:xfrm>
+                <a:off x="2914653" y="2736215"/>
+                <a:ext cx="219078" cy="175260"/>
+              </a:xfrm>
+              <a:custGeom>
+                <a:avLst/>
+                <a:gdLst>
+                  <a:gd name="connsiteX0" fmla="*/ 84890 w 453390"/>
+                  <a:gd name="connsiteY0" fmla="*/ 0 h 263525"/>
+                  <a:gd name="connsiteX1" fmla="*/ 453390 w 453390"/>
+                  <a:gd name="connsiteY1" fmla="*/ 0 h 263525"/>
+                  <a:gd name="connsiteX2" fmla="*/ 453390 w 453390"/>
+                  <a:gd name="connsiteY2" fmla="*/ 263525 h 263525"/>
+                  <a:gd name="connsiteX3" fmla="*/ 84890 w 453390"/>
+                  <a:gd name="connsiteY3" fmla="*/ 263525 h 263525"/>
+                  <a:gd name="connsiteX4" fmla="*/ 59217 w 453390"/>
+                  <a:gd name="connsiteY4" fmla="*/ 168771 h 263525"/>
+                  <a:gd name="connsiteX5" fmla="*/ 4819 w 453390"/>
+                  <a:gd name="connsiteY5" fmla="*/ 221542 h 263525"/>
+                  <a:gd name="connsiteX6" fmla="*/ 0 w 453390"/>
+                  <a:gd name="connsiteY6" fmla="*/ 54571 h 263525"/>
+                  <a:gd name="connsiteX7" fmla="*/ 55658 w 453390"/>
+                  <a:gd name="connsiteY7" fmla="*/ 89403 h 263525"/>
+                  <a:gd name="connsiteX8" fmla="*/ 84890 w 453390"/>
+                  <a:gd name="connsiteY8" fmla="*/ 0 h 263525"/>
+                </a:gdLst>
+                <a:ahLst/>
+                <a:cxnLst>
+                  <a:cxn ang="0">
+                    <a:pos x="connsiteX0" y="connsiteY0"/>
+                  </a:cxn>
+                  <a:cxn ang="0">
+                    <a:pos x="connsiteX1" y="connsiteY1"/>
+                  </a:cxn>
+                  <a:cxn ang="0">
+                    <a:pos x="connsiteX2" y="connsiteY2"/>
+                  </a:cxn>
+                  <a:cxn ang="0">
+                    <a:pos x="connsiteX3" y="connsiteY3"/>
+                  </a:cxn>
+                  <a:cxn ang="0">
+                    <a:pos x="connsiteX4" y="connsiteY4"/>
+                  </a:cxn>
+                  <a:cxn ang="0">
+                    <a:pos x="connsiteX5" y="connsiteY5"/>
+                  </a:cxn>
+                  <a:cxn ang="0">
+                    <a:pos x="connsiteX6" y="connsiteY6"/>
+                  </a:cxn>
+                  <a:cxn ang="0">
+                    <a:pos x="connsiteX7" y="connsiteY7"/>
+                  </a:cxn>
+                  <a:cxn ang="0">
+                    <a:pos x="connsiteX8" y="connsiteY8"/>
+                  </a:cxn>
+                </a:cxnLst>
+                <a:rect l="l" t="t" r="r" b="b"/>
+                <a:pathLst>
+                  <a:path w="453390" h="263525">
+                    <a:moveTo>
+                      <a:pt x="84890" y="0"/>
+                    </a:moveTo>
+                    <a:lnTo>
+                      <a:pt x="453390" y="0"/>
+                    </a:lnTo>
+                    <a:lnTo>
+                      <a:pt x="453390" y="263525"/>
+                    </a:lnTo>
+                    <a:lnTo>
+                      <a:pt x="84890" y="263525"/>
+                    </a:lnTo>
+                    <a:cubicBezTo>
+                      <a:pt x="68745" y="263525"/>
+                      <a:pt x="59217" y="193028"/>
+                      <a:pt x="59217" y="168771"/>
+                    </a:cubicBezTo>
+                    <a:lnTo>
+                      <a:pt x="4819" y="221542"/>
+                    </a:lnTo>
+                    <a:lnTo>
+                      <a:pt x="0" y="54571"/>
+                    </a:lnTo>
+                    <a:lnTo>
+                      <a:pt x="55658" y="89403"/>
+                    </a:lnTo>
+                    <a:cubicBezTo>
+                      <a:pt x="55658" y="65146"/>
+                      <a:pt x="68745" y="0"/>
+                      <a:pt x="84890" y="0"/>
+                    </a:cubicBezTo>
+                    <a:close/>
+                  </a:path>
+                </a:pathLst>
+              </a:custGeom>
+            </p:spPr>
+            <p:style>
+              <a:lnRef idx="2">
+                <a:schemeClr val="accent5">
+                  <a:shade val="50000"/>
+                </a:schemeClr>
+              </a:lnRef>
+              <a:fillRef idx="1">
+                <a:schemeClr val="accent5"/>
+              </a:fillRef>
+              <a:effectRef idx="0">
+                <a:schemeClr val="accent5"/>
+              </a:effectRef>
+              <a:fontRef idx="minor">
+                <a:schemeClr val="lt1"/>
+              </a:fontRef>
+            </p:style>
+            <p:txBody>
+              <a:bodyPr rot="0" spcFirstLastPara="0" vert="horz" wrap="square" lIns="0" tIns="0" rIns="0" bIns="0" numCol="1" spcCol="0" rtlCol="0" fromWordArt="0" anchor="ctr" anchorCtr="0" forceAA="0" compatLnSpc="1">
+                <a:prstTxWarp prst="textNoShape">
+                  <a:avLst/>
+                </a:prstTxWarp>
+                <a:noAutofit/>
+              </a:bodyPr>
+              <a:lstStyle/>
+              <a:p>
+                <a:pPr indent="73025" algn="ctr">
+                  <a:spcAft>
+                    <a:spcPts val="0"/>
+                  </a:spcAft>
+                </a:pPr>
+                <a:r>
+                  <a:rPr lang="en-US" sz="1200" kern="100" dirty="0">
+                    <a:solidFill>
+                      <a:srgbClr val="FFFFFF"/>
+                    </a:solidFill>
+                    <a:effectLst/>
+                    <a:ea typeface="新細明體" panose="02020500000000000000" pitchFamily="18" charset="-120"/>
+                    <a:cs typeface="Times New Roman" panose="02020603050405020304" pitchFamily="18" charset="0"/>
+                  </a:rPr>
+                  <a:t>1</a:t>
+                </a:r>
+                <a:endParaRPr lang="zh-TW" sz="1200" kern="100" dirty="0">
+                  <a:effectLst/>
+                  <a:ea typeface="新細明體" panose="02020500000000000000" pitchFamily="18" charset="-120"/>
+                  <a:cs typeface="Times New Roman" panose="02020603050405020304" pitchFamily="18" charset="0"/>
+                </a:endParaRPr>
+              </a:p>
+            </p:txBody>
+          </p:sp>
+        </p:grpSp>
+      </p:grpSp>
     </p:spTree>
     <p:extLst>
       <p:ext uri="{BB962C8B-B14F-4D97-AF65-F5344CB8AC3E}">

--- a/tools/myCustomBlockly/iMi/block.pptx
+++ b/tools/myCustomBlockly/iMi/block.pptx
@@ -18749,6 +18749,1344 @@
           </p:sp>
         </p:grpSp>
       </p:grpSp>
+      <p:grpSp>
+        <p:nvGrpSpPr>
+          <p:cNvPr id="4" name="群組 3">
+            <a:extLst>
+              <a:ext uri="{FF2B5EF4-FFF2-40B4-BE49-F238E27FC236}">
+                <a16:creationId xmlns:a16="http://schemas.microsoft.com/office/drawing/2014/main" id="{A02F5007-4DEE-4075-9ACC-DB56FAFD055B}"/>
+              </a:ext>
+            </a:extLst>
+          </p:cNvPr>
+          <p:cNvGrpSpPr/>
+          <p:nvPr/>
+        </p:nvGrpSpPr>
+        <p:grpSpPr>
+          <a:xfrm>
+            <a:off x="4453412" y="3664586"/>
+            <a:ext cx="2078228" cy="356019"/>
+            <a:chOff x="4453412" y="3664586"/>
+            <a:chExt cx="2078228" cy="356019"/>
+          </a:xfrm>
+        </p:grpSpPr>
+        <p:sp>
+          <p:nvSpPr>
+            <p:cNvPr id="46" name="圓角矩形 4">
+              <a:extLst>
+                <a:ext uri="{FF2B5EF4-FFF2-40B4-BE49-F238E27FC236}">
+                  <a16:creationId xmlns:a16="http://schemas.microsoft.com/office/drawing/2014/main" id="{12693324-BB8A-4EF0-911F-120B52AF01D0}"/>
+                </a:ext>
+              </a:extLst>
+            </p:cNvPr>
+            <p:cNvSpPr/>
+            <p:nvPr/>
+          </p:nvSpPr>
+          <p:spPr>
+            <a:xfrm>
+              <a:off x="4453412" y="3664586"/>
+              <a:ext cx="2078228" cy="356019"/>
+            </a:xfrm>
+            <a:custGeom>
+              <a:avLst/>
+              <a:gdLst>
+                <a:gd name="connsiteX0" fmla="*/ 0 w 4424680"/>
+                <a:gd name="connsiteY0" fmla="*/ 60115 h 360680"/>
+                <a:gd name="connsiteX1" fmla="*/ 60115 w 4424680"/>
+                <a:gd name="connsiteY1" fmla="*/ 0 h 360680"/>
+                <a:gd name="connsiteX2" fmla="*/ 4364565 w 4424680"/>
+                <a:gd name="connsiteY2" fmla="*/ 0 h 360680"/>
+                <a:gd name="connsiteX3" fmla="*/ 4424680 w 4424680"/>
+                <a:gd name="connsiteY3" fmla="*/ 60115 h 360680"/>
+                <a:gd name="connsiteX4" fmla="*/ 4424680 w 4424680"/>
+                <a:gd name="connsiteY4" fmla="*/ 300565 h 360680"/>
+                <a:gd name="connsiteX5" fmla="*/ 4364565 w 4424680"/>
+                <a:gd name="connsiteY5" fmla="*/ 360680 h 360680"/>
+                <a:gd name="connsiteX6" fmla="*/ 60115 w 4424680"/>
+                <a:gd name="connsiteY6" fmla="*/ 360680 h 360680"/>
+                <a:gd name="connsiteX7" fmla="*/ 0 w 4424680"/>
+                <a:gd name="connsiteY7" fmla="*/ 300565 h 360680"/>
+                <a:gd name="connsiteX8" fmla="*/ 0 w 4424680"/>
+                <a:gd name="connsiteY8" fmla="*/ 60115 h 360680"/>
+                <a:gd name="connsiteX0" fmla="*/ 0 w 4424680"/>
+                <a:gd name="connsiteY0" fmla="*/ 60115 h 360680"/>
+                <a:gd name="connsiteX1" fmla="*/ 60115 w 4424680"/>
+                <a:gd name="connsiteY1" fmla="*/ 0 h 360680"/>
+                <a:gd name="connsiteX2" fmla="*/ 279400 w 4424680"/>
+                <a:gd name="connsiteY2" fmla="*/ 0 h 360680"/>
+                <a:gd name="connsiteX3" fmla="*/ 4364565 w 4424680"/>
+                <a:gd name="connsiteY3" fmla="*/ 0 h 360680"/>
+                <a:gd name="connsiteX4" fmla="*/ 4424680 w 4424680"/>
+                <a:gd name="connsiteY4" fmla="*/ 60115 h 360680"/>
+                <a:gd name="connsiteX5" fmla="*/ 4424680 w 4424680"/>
+                <a:gd name="connsiteY5" fmla="*/ 300565 h 360680"/>
+                <a:gd name="connsiteX6" fmla="*/ 4364565 w 4424680"/>
+                <a:gd name="connsiteY6" fmla="*/ 360680 h 360680"/>
+                <a:gd name="connsiteX7" fmla="*/ 60115 w 4424680"/>
+                <a:gd name="connsiteY7" fmla="*/ 360680 h 360680"/>
+                <a:gd name="connsiteX8" fmla="*/ 0 w 4424680"/>
+                <a:gd name="connsiteY8" fmla="*/ 300565 h 360680"/>
+                <a:gd name="connsiteX9" fmla="*/ 0 w 4424680"/>
+                <a:gd name="connsiteY9" fmla="*/ 60115 h 360680"/>
+                <a:gd name="connsiteX0" fmla="*/ 0 w 4424680"/>
+                <a:gd name="connsiteY0" fmla="*/ 60115 h 360680"/>
+                <a:gd name="connsiteX1" fmla="*/ 60115 w 4424680"/>
+                <a:gd name="connsiteY1" fmla="*/ 0 h 360680"/>
+                <a:gd name="connsiteX2" fmla="*/ 4364565 w 4424680"/>
+                <a:gd name="connsiteY2" fmla="*/ 0 h 360680"/>
+                <a:gd name="connsiteX3" fmla="*/ 4424680 w 4424680"/>
+                <a:gd name="connsiteY3" fmla="*/ 60115 h 360680"/>
+                <a:gd name="connsiteX4" fmla="*/ 4424680 w 4424680"/>
+                <a:gd name="connsiteY4" fmla="*/ 300565 h 360680"/>
+                <a:gd name="connsiteX5" fmla="*/ 4364565 w 4424680"/>
+                <a:gd name="connsiteY5" fmla="*/ 360680 h 360680"/>
+                <a:gd name="connsiteX6" fmla="*/ 60115 w 4424680"/>
+                <a:gd name="connsiteY6" fmla="*/ 360680 h 360680"/>
+                <a:gd name="connsiteX7" fmla="*/ 0 w 4424680"/>
+                <a:gd name="connsiteY7" fmla="*/ 300565 h 360680"/>
+                <a:gd name="connsiteX8" fmla="*/ 0 w 4424680"/>
+                <a:gd name="connsiteY8" fmla="*/ 60115 h 360680"/>
+                <a:gd name="connsiteX0" fmla="*/ 0 w 4424680"/>
+                <a:gd name="connsiteY0" fmla="*/ 60115 h 360680"/>
+                <a:gd name="connsiteX1" fmla="*/ 60115 w 4424680"/>
+                <a:gd name="connsiteY1" fmla="*/ 0 h 360680"/>
+                <a:gd name="connsiteX2" fmla="*/ 350520 w 4424680"/>
+                <a:gd name="connsiteY2" fmla="*/ 0 h 360680"/>
+                <a:gd name="connsiteX3" fmla="*/ 4364565 w 4424680"/>
+                <a:gd name="connsiteY3" fmla="*/ 0 h 360680"/>
+                <a:gd name="connsiteX4" fmla="*/ 4424680 w 4424680"/>
+                <a:gd name="connsiteY4" fmla="*/ 60115 h 360680"/>
+                <a:gd name="connsiteX5" fmla="*/ 4424680 w 4424680"/>
+                <a:gd name="connsiteY5" fmla="*/ 300565 h 360680"/>
+                <a:gd name="connsiteX6" fmla="*/ 4364565 w 4424680"/>
+                <a:gd name="connsiteY6" fmla="*/ 360680 h 360680"/>
+                <a:gd name="connsiteX7" fmla="*/ 60115 w 4424680"/>
+                <a:gd name="connsiteY7" fmla="*/ 360680 h 360680"/>
+                <a:gd name="connsiteX8" fmla="*/ 0 w 4424680"/>
+                <a:gd name="connsiteY8" fmla="*/ 300565 h 360680"/>
+                <a:gd name="connsiteX9" fmla="*/ 0 w 4424680"/>
+                <a:gd name="connsiteY9" fmla="*/ 60115 h 360680"/>
+                <a:gd name="connsiteX0" fmla="*/ 0 w 4424680"/>
+                <a:gd name="connsiteY0" fmla="*/ 121075 h 421640"/>
+                <a:gd name="connsiteX1" fmla="*/ 60115 w 4424680"/>
+                <a:gd name="connsiteY1" fmla="*/ 60960 h 421640"/>
+                <a:gd name="connsiteX2" fmla="*/ 350520 w 4424680"/>
+                <a:gd name="connsiteY2" fmla="*/ 60960 h 421640"/>
+                <a:gd name="connsiteX3" fmla="*/ 4364565 w 4424680"/>
+                <a:gd name="connsiteY3" fmla="*/ 60960 h 421640"/>
+                <a:gd name="connsiteX4" fmla="*/ 4424680 w 4424680"/>
+                <a:gd name="connsiteY4" fmla="*/ 121075 h 421640"/>
+                <a:gd name="connsiteX5" fmla="*/ 4424680 w 4424680"/>
+                <a:gd name="connsiteY5" fmla="*/ 361525 h 421640"/>
+                <a:gd name="connsiteX6" fmla="*/ 4364565 w 4424680"/>
+                <a:gd name="connsiteY6" fmla="*/ 421640 h 421640"/>
+                <a:gd name="connsiteX7" fmla="*/ 60115 w 4424680"/>
+                <a:gd name="connsiteY7" fmla="*/ 421640 h 421640"/>
+                <a:gd name="connsiteX8" fmla="*/ 0 w 4424680"/>
+                <a:gd name="connsiteY8" fmla="*/ 361525 h 421640"/>
+                <a:gd name="connsiteX9" fmla="*/ 0 w 4424680"/>
+                <a:gd name="connsiteY9" fmla="*/ 121075 h 421640"/>
+                <a:gd name="connsiteX0" fmla="*/ 0 w 4424680"/>
+                <a:gd name="connsiteY0" fmla="*/ 121075 h 421640"/>
+                <a:gd name="connsiteX1" fmla="*/ 60115 w 4424680"/>
+                <a:gd name="connsiteY1" fmla="*/ 60960 h 421640"/>
+                <a:gd name="connsiteX2" fmla="*/ 350520 w 4424680"/>
+                <a:gd name="connsiteY2" fmla="*/ 60960 h 421640"/>
+                <a:gd name="connsiteX3" fmla="*/ 4364565 w 4424680"/>
+                <a:gd name="connsiteY3" fmla="*/ 60960 h 421640"/>
+                <a:gd name="connsiteX4" fmla="*/ 4424680 w 4424680"/>
+                <a:gd name="connsiteY4" fmla="*/ 121075 h 421640"/>
+                <a:gd name="connsiteX5" fmla="*/ 4424680 w 4424680"/>
+                <a:gd name="connsiteY5" fmla="*/ 361525 h 421640"/>
+                <a:gd name="connsiteX6" fmla="*/ 4364565 w 4424680"/>
+                <a:gd name="connsiteY6" fmla="*/ 421640 h 421640"/>
+                <a:gd name="connsiteX7" fmla="*/ 330200 w 4424680"/>
+                <a:gd name="connsiteY7" fmla="*/ 421640 h 421640"/>
+                <a:gd name="connsiteX8" fmla="*/ 60115 w 4424680"/>
+                <a:gd name="connsiteY8" fmla="*/ 421640 h 421640"/>
+                <a:gd name="connsiteX9" fmla="*/ 0 w 4424680"/>
+                <a:gd name="connsiteY9" fmla="*/ 361525 h 421640"/>
+                <a:gd name="connsiteX10" fmla="*/ 0 w 4424680"/>
+                <a:gd name="connsiteY10" fmla="*/ 121075 h 421640"/>
+                <a:gd name="connsiteX0" fmla="*/ 0 w 4424680"/>
+                <a:gd name="connsiteY0" fmla="*/ 60115 h 360680"/>
+                <a:gd name="connsiteX1" fmla="*/ 60115 w 4424680"/>
+                <a:gd name="connsiteY1" fmla="*/ 0 h 360680"/>
+                <a:gd name="connsiteX2" fmla="*/ 350520 w 4424680"/>
+                <a:gd name="connsiteY2" fmla="*/ 0 h 360680"/>
+                <a:gd name="connsiteX3" fmla="*/ 4364565 w 4424680"/>
+                <a:gd name="connsiteY3" fmla="*/ 0 h 360680"/>
+                <a:gd name="connsiteX4" fmla="*/ 4424680 w 4424680"/>
+                <a:gd name="connsiteY4" fmla="*/ 60115 h 360680"/>
+                <a:gd name="connsiteX5" fmla="*/ 4424680 w 4424680"/>
+                <a:gd name="connsiteY5" fmla="*/ 300565 h 360680"/>
+                <a:gd name="connsiteX6" fmla="*/ 4364565 w 4424680"/>
+                <a:gd name="connsiteY6" fmla="*/ 360680 h 360680"/>
+                <a:gd name="connsiteX7" fmla="*/ 330200 w 4424680"/>
+                <a:gd name="connsiteY7" fmla="*/ 360680 h 360680"/>
+                <a:gd name="connsiteX8" fmla="*/ 60115 w 4424680"/>
+                <a:gd name="connsiteY8" fmla="*/ 360680 h 360680"/>
+                <a:gd name="connsiteX9" fmla="*/ 0 w 4424680"/>
+                <a:gd name="connsiteY9" fmla="*/ 300565 h 360680"/>
+                <a:gd name="connsiteX10" fmla="*/ 0 w 4424680"/>
+                <a:gd name="connsiteY10" fmla="*/ 60115 h 360680"/>
+                <a:gd name="connsiteX0" fmla="*/ 0 w 4424680"/>
+                <a:gd name="connsiteY0" fmla="*/ 60115 h 421640"/>
+                <a:gd name="connsiteX1" fmla="*/ 60115 w 4424680"/>
+                <a:gd name="connsiteY1" fmla="*/ 0 h 421640"/>
+                <a:gd name="connsiteX2" fmla="*/ 350520 w 4424680"/>
+                <a:gd name="connsiteY2" fmla="*/ 0 h 421640"/>
+                <a:gd name="connsiteX3" fmla="*/ 4364565 w 4424680"/>
+                <a:gd name="connsiteY3" fmla="*/ 0 h 421640"/>
+                <a:gd name="connsiteX4" fmla="*/ 4424680 w 4424680"/>
+                <a:gd name="connsiteY4" fmla="*/ 60115 h 421640"/>
+                <a:gd name="connsiteX5" fmla="*/ 4424680 w 4424680"/>
+                <a:gd name="connsiteY5" fmla="*/ 300565 h 421640"/>
+                <a:gd name="connsiteX6" fmla="*/ 4364565 w 4424680"/>
+                <a:gd name="connsiteY6" fmla="*/ 360680 h 421640"/>
+                <a:gd name="connsiteX7" fmla="*/ 330200 w 4424680"/>
+                <a:gd name="connsiteY7" fmla="*/ 360680 h 421640"/>
+                <a:gd name="connsiteX8" fmla="*/ 60115 w 4424680"/>
+                <a:gd name="connsiteY8" fmla="*/ 360680 h 421640"/>
+                <a:gd name="connsiteX9" fmla="*/ 0 w 4424680"/>
+                <a:gd name="connsiteY9" fmla="*/ 300565 h 421640"/>
+                <a:gd name="connsiteX10" fmla="*/ 0 w 4424680"/>
+                <a:gd name="connsiteY10" fmla="*/ 60115 h 421640"/>
+                <a:gd name="connsiteX0" fmla="*/ 0 w 4424680"/>
+                <a:gd name="connsiteY0" fmla="*/ 60115 h 421640"/>
+                <a:gd name="connsiteX1" fmla="*/ 60115 w 4424680"/>
+                <a:gd name="connsiteY1" fmla="*/ 0 h 421640"/>
+                <a:gd name="connsiteX2" fmla="*/ 350520 w 4424680"/>
+                <a:gd name="connsiteY2" fmla="*/ 0 h 421640"/>
+                <a:gd name="connsiteX3" fmla="*/ 4364565 w 4424680"/>
+                <a:gd name="connsiteY3" fmla="*/ 0 h 421640"/>
+                <a:gd name="connsiteX4" fmla="*/ 4424680 w 4424680"/>
+                <a:gd name="connsiteY4" fmla="*/ 60115 h 421640"/>
+                <a:gd name="connsiteX5" fmla="*/ 4424680 w 4424680"/>
+                <a:gd name="connsiteY5" fmla="*/ 300565 h 421640"/>
+                <a:gd name="connsiteX6" fmla="*/ 4364565 w 4424680"/>
+                <a:gd name="connsiteY6" fmla="*/ 360680 h 421640"/>
+                <a:gd name="connsiteX7" fmla="*/ 330200 w 4424680"/>
+                <a:gd name="connsiteY7" fmla="*/ 360680 h 421640"/>
+                <a:gd name="connsiteX8" fmla="*/ 60115 w 4424680"/>
+                <a:gd name="connsiteY8" fmla="*/ 360680 h 421640"/>
+                <a:gd name="connsiteX9" fmla="*/ 0 w 4424680"/>
+                <a:gd name="connsiteY9" fmla="*/ 300565 h 421640"/>
+                <a:gd name="connsiteX10" fmla="*/ 0 w 4424680"/>
+                <a:gd name="connsiteY10" fmla="*/ 60115 h 421640"/>
+                <a:gd name="connsiteX0" fmla="*/ 0 w 4424680"/>
+                <a:gd name="connsiteY0" fmla="*/ 60115 h 377646"/>
+                <a:gd name="connsiteX1" fmla="*/ 60115 w 4424680"/>
+                <a:gd name="connsiteY1" fmla="*/ 0 h 377646"/>
+                <a:gd name="connsiteX2" fmla="*/ 350520 w 4424680"/>
+                <a:gd name="connsiteY2" fmla="*/ 0 h 377646"/>
+                <a:gd name="connsiteX3" fmla="*/ 4364565 w 4424680"/>
+                <a:gd name="connsiteY3" fmla="*/ 0 h 377646"/>
+                <a:gd name="connsiteX4" fmla="*/ 4424680 w 4424680"/>
+                <a:gd name="connsiteY4" fmla="*/ 60115 h 377646"/>
+                <a:gd name="connsiteX5" fmla="*/ 4424680 w 4424680"/>
+                <a:gd name="connsiteY5" fmla="*/ 300565 h 377646"/>
+                <a:gd name="connsiteX6" fmla="*/ 4364565 w 4424680"/>
+                <a:gd name="connsiteY6" fmla="*/ 360680 h 377646"/>
+                <a:gd name="connsiteX7" fmla="*/ 330200 w 4424680"/>
+                <a:gd name="connsiteY7" fmla="*/ 360680 h 377646"/>
+                <a:gd name="connsiteX8" fmla="*/ 60115 w 4424680"/>
+                <a:gd name="connsiteY8" fmla="*/ 360680 h 377646"/>
+                <a:gd name="connsiteX9" fmla="*/ 0 w 4424680"/>
+                <a:gd name="connsiteY9" fmla="*/ 300565 h 377646"/>
+                <a:gd name="connsiteX10" fmla="*/ 0 w 4424680"/>
+                <a:gd name="connsiteY10" fmla="*/ 60115 h 377646"/>
+              </a:gdLst>
+              <a:ahLst/>
+              <a:cxnLst>
+                <a:cxn ang="0">
+                  <a:pos x="connsiteX0" y="connsiteY0"/>
+                </a:cxn>
+                <a:cxn ang="0">
+                  <a:pos x="connsiteX1" y="connsiteY1"/>
+                </a:cxn>
+                <a:cxn ang="0">
+                  <a:pos x="connsiteX2" y="connsiteY2"/>
+                </a:cxn>
+                <a:cxn ang="0">
+                  <a:pos x="connsiteX3" y="connsiteY3"/>
+                </a:cxn>
+                <a:cxn ang="0">
+                  <a:pos x="connsiteX4" y="connsiteY4"/>
+                </a:cxn>
+                <a:cxn ang="0">
+                  <a:pos x="connsiteX5" y="connsiteY5"/>
+                </a:cxn>
+                <a:cxn ang="0">
+                  <a:pos x="connsiteX6" y="connsiteY6"/>
+                </a:cxn>
+                <a:cxn ang="0">
+                  <a:pos x="connsiteX7" y="connsiteY7"/>
+                </a:cxn>
+                <a:cxn ang="0">
+                  <a:pos x="connsiteX8" y="connsiteY8"/>
+                </a:cxn>
+                <a:cxn ang="0">
+                  <a:pos x="connsiteX9" y="connsiteY9"/>
+                </a:cxn>
+                <a:cxn ang="0">
+                  <a:pos x="connsiteX10" y="connsiteY10"/>
+                </a:cxn>
+              </a:cxnLst>
+              <a:rect l="l" t="t" r="r" b="b"/>
+              <a:pathLst>
+                <a:path w="4424680" h="377646">
+                  <a:moveTo>
+                    <a:pt x="0" y="60115"/>
+                  </a:moveTo>
+                  <a:cubicBezTo>
+                    <a:pt x="0" y="26914"/>
+                    <a:pt x="26914" y="0"/>
+                    <a:pt x="60115" y="0"/>
+                  </a:cubicBezTo>
+                  <a:cubicBezTo>
+                    <a:pt x="156917" y="0"/>
+                    <a:pt x="127388" y="56799"/>
+                    <a:pt x="350520" y="0"/>
+                  </a:cubicBezTo>
+                  <a:lnTo>
+                    <a:pt x="4364565" y="0"/>
+                  </a:lnTo>
+                  <a:cubicBezTo>
+                    <a:pt x="4397766" y="0"/>
+                    <a:pt x="4424680" y="26914"/>
+                    <a:pt x="4424680" y="60115"/>
+                  </a:cubicBezTo>
+                  <a:lnTo>
+                    <a:pt x="4424680" y="300565"/>
+                  </a:lnTo>
+                  <a:cubicBezTo>
+                    <a:pt x="4424680" y="333766"/>
+                    <a:pt x="4397766" y="360680"/>
+                    <a:pt x="4364565" y="360680"/>
+                  </a:cubicBezTo>
+                  <a:lnTo>
+                    <a:pt x="330200" y="360680"/>
+                  </a:lnTo>
+                  <a:cubicBezTo>
+                    <a:pt x="170817" y="398855"/>
+                    <a:pt x="150143" y="360680"/>
+                    <a:pt x="60115" y="360680"/>
+                  </a:cubicBezTo>
+                  <a:cubicBezTo>
+                    <a:pt x="26914" y="360680"/>
+                    <a:pt x="0" y="333766"/>
+                    <a:pt x="0" y="300565"/>
+                  </a:cubicBezTo>
+                  <a:lnTo>
+                    <a:pt x="0" y="60115"/>
+                  </a:lnTo>
+                  <a:close/>
+                </a:path>
+              </a:pathLst>
+            </a:custGeom>
+          </p:spPr>
+          <p:style>
+            <a:lnRef idx="2">
+              <a:schemeClr val="accent1">
+                <a:shade val="50000"/>
+              </a:schemeClr>
+            </a:lnRef>
+            <a:fillRef idx="1">
+              <a:schemeClr val="accent1"/>
+            </a:fillRef>
+            <a:effectRef idx="0">
+              <a:schemeClr val="accent1"/>
+            </a:effectRef>
+            <a:fontRef idx="minor">
+              <a:schemeClr val="lt1"/>
+            </a:fontRef>
+          </p:style>
+          <p:txBody>
+            <a:bodyPr rot="0" spcFirstLastPara="0" vert="horz" wrap="square" lIns="36000" tIns="0" rIns="36000" bIns="0" numCol="1" spcCol="0" rtlCol="0" fromWordArt="0" anchor="ctr" anchorCtr="0" forceAA="0" compatLnSpc="1">
+              <a:prstTxWarp prst="textNoShape">
+                <a:avLst/>
+              </a:prstTxWarp>
+              <a:noAutofit/>
+            </a:bodyPr>
+            <a:lstStyle/>
+            <a:p>
+              <a:pPr>
+                <a:spcAft>
+                  <a:spcPts val="0"/>
+                </a:spcAft>
+              </a:pPr>
+              <a:endParaRPr lang="zh-TW" sz="1200" kern="100" dirty="0">
+                <a:effectLst/>
+                <a:ea typeface="新細明體" panose="02020500000000000000" pitchFamily="18" charset="-120"/>
+                <a:cs typeface="Times New Roman" panose="02020603050405020304" pitchFamily="18" charset="0"/>
+              </a:endParaRPr>
+            </a:p>
+          </p:txBody>
+        </p:sp>
+        <p:grpSp>
+          <p:nvGrpSpPr>
+            <p:cNvPr id="47" name="群組 46">
+              <a:extLst>
+                <a:ext uri="{FF2B5EF4-FFF2-40B4-BE49-F238E27FC236}">
+                  <a16:creationId xmlns:a16="http://schemas.microsoft.com/office/drawing/2014/main" id="{B3D6B8DE-20C5-4DB9-9BC7-6B43F9F9D937}"/>
+                </a:ext>
+              </a:extLst>
+            </p:cNvPr>
+            <p:cNvGrpSpPr/>
+            <p:nvPr/>
+          </p:nvGrpSpPr>
+          <p:grpSpPr>
+            <a:xfrm>
+              <a:off x="4674869" y="3761106"/>
+              <a:ext cx="1630687" cy="175260"/>
+              <a:chOff x="1503044" y="2736215"/>
+              <a:chExt cx="1630687" cy="175260"/>
+            </a:xfrm>
+          </p:grpSpPr>
+          <p:sp>
+            <p:nvSpPr>
+              <p:cNvPr id="69" name="手繪多邊形: 圖案 10">
+                <a:extLst>
+                  <a:ext uri="{FF2B5EF4-FFF2-40B4-BE49-F238E27FC236}">
+                    <a16:creationId xmlns:a16="http://schemas.microsoft.com/office/drawing/2014/main" id="{CA69C971-2702-4CBF-B887-2808C3511312}"/>
+                  </a:ext>
+                </a:extLst>
+              </p:cNvPr>
+              <p:cNvSpPr/>
+              <p:nvPr/>
+            </p:nvSpPr>
+            <p:spPr>
+              <a:xfrm>
+                <a:off x="1503044" y="2736215"/>
+                <a:ext cx="219078" cy="175260"/>
+              </a:xfrm>
+              <a:custGeom>
+                <a:avLst/>
+                <a:gdLst>
+                  <a:gd name="connsiteX0" fmla="*/ 84890 w 453390"/>
+                  <a:gd name="connsiteY0" fmla="*/ 0 h 263525"/>
+                  <a:gd name="connsiteX1" fmla="*/ 453390 w 453390"/>
+                  <a:gd name="connsiteY1" fmla="*/ 0 h 263525"/>
+                  <a:gd name="connsiteX2" fmla="*/ 453390 w 453390"/>
+                  <a:gd name="connsiteY2" fmla="*/ 263525 h 263525"/>
+                  <a:gd name="connsiteX3" fmla="*/ 84890 w 453390"/>
+                  <a:gd name="connsiteY3" fmla="*/ 263525 h 263525"/>
+                  <a:gd name="connsiteX4" fmla="*/ 59217 w 453390"/>
+                  <a:gd name="connsiteY4" fmla="*/ 168771 h 263525"/>
+                  <a:gd name="connsiteX5" fmla="*/ 4819 w 453390"/>
+                  <a:gd name="connsiteY5" fmla="*/ 221542 h 263525"/>
+                  <a:gd name="connsiteX6" fmla="*/ 0 w 453390"/>
+                  <a:gd name="connsiteY6" fmla="*/ 54571 h 263525"/>
+                  <a:gd name="connsiteX7" fmla="*/ 55658 w 453390"/>
+                  <a:gd name="connsiteY7" fmla="*/ 89403 h 263525"/>
+                  <a:gd name="connsiteX8" fmla="*/ 84890 w 453390"/>
+                  <a:gd name="connsiteY8" fmla="*/ 0 h 263525"/>
+                </a:gdLst>
+                <a:ahLst/>
+                <a:cxnLst>
+                  <a:cxn ang="0">
+                    <a:pos x="connsiteX0" y="connsiteY0"/>
+                  </a:cxn>
+                  <a:cxn ang="0">
+                    <a:pos x="connsiteX1" y="connsiteY1"/>
+                  </a:cxn>
+                  <a:cxn ang="0">
+                    <a:pos x="connsiteX2" y="connsiteY2"/>
+                  </a:cxn>
+                  <a:cxn ang="0">
+                    <a:pos x="connsiteX3" y="connsiteY3"/>
+                  </a:cxn>
+                  <a:cxn ang="0">
+                    <a:pos x="connsiteX4" y="connsiteY4"/>
+                  </a:cxn>
+                  <a:cxn ang="0">
+                    <a:pos x="connsiteX5" y="connsiteY5"/>
+                  </a:cxn>
+                  <a:cxn ang="0">
+                    <a:pos x="connsiteX6" y="connsiteY6"/>
+                  </a:cxn>
+                  <a:cxn ang="0">
+                    <a:pos x="connsiteX7" y="connsiteY7"/>
+                  </a:cxn>
+                  <a:cxn ang="0">
+                    <a:pos x="connsiteX8" y="connsiteY8"/>
+                  </a:cxn>
+                </a:cxnLst>
+                <a:rect l="l" t="t" r="r" b="b"/>
+                <a:pathLst>
+                  <a:path w="453390" h="263525">
+                    <a:moveTo>
+                      <a:pt x="84890" y="0"/>
+                    </a:moveTo>
+                    <a:lnTo>
+                      <a:pt x="453390" y="0"/>
+                    </a:lnTo>
+                    <a:lnTo>
+                      <a:pt x="453390" y="263525"/>
+                    </a:lnTo>
+                    <a:lnTo>
+                      <a:pt x="84890" y="263525"/>
+                    </a:lnTo>
+                    <a:cubicBezTo>
+                      <a:pt x="68745" y="263525"/>
+                      <a:pt x="59217" y="193028"/>
+                      <a:pt x="59217" y="168771"/>
+                    </a:cubicBezTo>
+                    <a:lnTo>
+                      <a:pt x="4819" y="221542"/>
+                    </a:lnTo>
+                    <a:lnTo>
+                      <a:pt x="0" y="54571"/>
+                    </a:lnTo>
+                    <a:lnTo>
+                      <a:pt x="55658" y="89403"/>
+                    </a:lnTo>
+                    <a:cubicBezTo>
+                      <a:pt x="55658" y="65146"/>
+                      <a:pt x="68745" y="0"/>
+                      <a:pt x="84890" y="0"/>
+                    </a:cubicBezTo>
+                    <a:close/>
+                  </a:path>
+                </a:pathLst>
+              </a:custGeom>
+            </p:spPr>
+            <p:style>
+              <a:lnRef idx="2">
+                <a:schemeClr val="accent5">
+                  <a:shade val="50000"/>
+                </a:schemeClr>
+              </a:lnRef>
+              <a:fillRef idx="1">
+                <a:schemeClr val="accent5"/>
+              </a:fillRef>
+              <a:effectRef idx="0">
+                <a:schemeClr val="accent5"/>
+              </a:effectRef>
+              <a:fontRef idx="minor">
+                <a:schemeClr val="lt1"/>
+              </a:fontRef>
+            </p:style>
+            <p:txBody>
+              <a:bodyPr rot="0" spcFirstLastPara="0" vert="horz" wrap="square" lIns="0" tIns="0" rIns="0" bIns="0" numCol="1" spcCol="0" rtlCol="0" fromWordArt="0" anchor="ctr" anchorCtr="0" forceAA="0" compatLnSpc="1">
+                <a:prstTxWarp prst="textNoShape">
+                  <a:avLst/>
+                </a:prstTxWarp>
+                <a:noAutofit/>
+              </a:bodyPr>
+              <a:lstStyle/>
+              <a:p>
+                <a:pPr indent="73025" algn="ctr">
+                  <a:spcAft>
+                    <a:spcPts val="0"/>
+                  </a:spcAft>
+                </a:pPr>
+                <a:r>
+                  <a:rPr lang="en-US" sz="1200" kern="100" dirty="0">
+                    <a:solidFill>
+                      <a:srgbClr val="FFFFFF"/>
+                    </a:solidFill>
+                    <a:effectLst/>
+                    <a:ea typeface="新細明體" panose="02020500000000000000" pitchFamily="18" charset="-120"/>
+                    <a:cs typeface="Times New Roman" panose="02020603050405020304" pitchFamily="18" charset="0"/>
+                  </a:rPr>
+                  <a:t>1</a:t>
+                </a:r>
+                <a:endParaRPr lang="zh-TW" sz="1200" kern="100" dirty="0">
+                  <a:effectLst/>
+                  <a:ea typeface="新細明體" panose="02020500000000000000" pitchFamily="18" charset="-120"/>
+                  <a:cs typeface="Times New Roman" panose="02020603050405020304" pitchFamily="18" charset="0"/>
+                </a:endParaRPr>
+              </a:p>
+            </p:txBody>
+          </p:sp>
+          <p:sp>
+            <p:nvSpPr>
+              <p:cNvPr id="70" name="手繪多邊形: 圖案 10">
+                <a:extLst>
+                  <a:ext uri="{FF2B5EF4-FFF2-40B4-BE49-F238E27FC236}">
+                    <a16:creationId xmlns:a16="http://schemas.microsoft.com/office/drawing/2014/main" id="{DC3ECA74-FB0E-4100-B7F7-0500A237D421}"/>
+                  </a:ext>
+                </a:extLst>
+              </p:cNvPr>
+              <p:cNvSpPr/>
+              <p:nvPr/>
+            </p:nvSpPr>
+            <p:spPr>
+              <a:xfrm>
+                <a:off x="1784030" y="2736215"/>
+                <a:ext cx="219078" cy="175260"/>
+              </a:xfrm>
+              <a:custGeom>
+                <a:avLst/>
+                <a:gdLst>
+                  <a:gd name="connsiteX0" fmla="*/ 84890 w 453390"/>
+                  <a:gd name="connsiteY0" fmla="*/ 0 h 263525"/>
+                  <a:gd name="connsiteX1" fmla="*/ 453390 w 453390"/>
+                  <a:gd name="connsiteY1" fmla="*/ 0 h 263525"/>
+                  <a:gd name="connsiteX2" fmla="*/ 453390 w 453390"/>
+                  <a:gd name="connsiteY2" fmla="*/ 263525 h 263525"/>
+                  <a:gd name="connsiteX3" fmla="*/ 84890 w 453390"/>
+                  <a:gd name="connsiteY3" fmla="*/ 263525 h 263525"/>
+                  <a:gd name="connsiteX4" fmla="*/ 59217 w 453390"/>
+                  <a:gd name="connsiteY4" fmla="*/ 168771 h 263525"/>
+                  <a:gd name="connsiteX5" fmla="*/ 4819 w 453390"/>
+                  <a:gd name="connsiteY5" fmla="*/ 221542 h 263525"/>
+                  <a:gd name="connsiteX6" fmla="*/ 0 w 453390"/>
+                  <a:gd name="connsiteY6" fmla="*/ 54571 h 263525"/>
+                  <a:gd name="connsiteX7" fmla="*/ 55658 w 453390"/>
+                  <a:gd name="connsiteY7" fmla="*/ 89403 h 263525"/>
+                  <a:gd name="connsiteX8" fmla="*/ 84890 w 453390"/>
+                  <a:gd name="connsiteY8" fmla="*/ 0 h 263525"/>
+                </a:gdLst>
+                <a:ahLst/>
+                <a:cxnLst>
+                  <a:cxn ang="0">
+                    <a:pos x="connsiteX0" y="connsiteY0"/>
+                  </a:cxn>
+                  <a:cxn ang="0">
+                    <a:pos x="connsiteX1" y="connsiteY1"/>
+                  </a:cxn>
+                  <a:cxn ang="0">
+                    <a:pos x="connsiteX2" y="connsiteY2"/>
+                  </a:cxn>
+                  <a:cxn ang="0">
+                    <a:pos x="connsiteX3" y="connsiteY3"/>
+                  </a:cxn>
+                  <a:cxn ang="0">
+                    <a:pos x="connsiteX4" y="connsiteY4"/>
+                  </a:cxn>
+                  <a:cxn ang="0">
+                    <a:pos x="connsiteX5" y="connsiteY5"/>
+                  </a:cxn>
+                  <a:cxn ang="0">
+                    <a:pos x="connsiteX6" y="connsiteY6"/>
+                  </a:cxn>
+                  <a:cxn ang="0">
+                    <a:pos x="connsiteX7" y="connsiteY7"/>
+                  </a:cxn>
+                  <a:cxn ang="0">
+                    <a:pos x="connsiteX8" y="connsiteY8"/>
+                  </a:cxn>
+                </a:cxnLst>
+                <a:rect l="l" t="t" r="r" b="b"/>
+                <a:pathLst>
+                  <a:path w="453390" h="263525">
+                    <a:moveTo>
+                      <a:pt x="84890" y="0"/>
+                    </a:moveTo>
+                    <a:lnTo>
+                      <a:pt x="453390" y="0"/>
+                    </a:lnTo>
+                    <a:lnTo>
+                      <a:pt x="453390" y="263525"/>
+                    </a:lnTo>
+                    <a:lnTo>
+                      <a:pt x="84890" y="263525"/>
+                    </a:lnTo>
+                    <a:cubicBezTo>
+                      <a:pt x="68745" y="263525"/>
+                      <a:pt x="59217" y="193028"/>
+                      <a:pt x="59217" y="168771"/>
+                    </a:cubicBezTo>
+                    <a:lnTo>
+                      <a:pt x="4819" y="221542"/>
+                    </a:lnTo>
+                    <a:lnTo>
+                      <a:pt x="0" y="54571"/>
+                    </a:lnTo>
+                    <a:lnTo>
+                      <a:pt x="55658" y="89403"/>
+                    </a:lnTo>
+                    <a:cubicBezTo>
+                      <a:pt x="55658" y="65146"/>
+                      <a:pt x="68745" y="0"/>
+                      <a:pt x="84890" y="0"/>
+                    </a:cubicBezTo>
+                    <a:close/>
+                  </a:path>
+                </a:pathLst>
+              </a:custGeom>
+            </p:spPr>
+            <p:style>
+              <a:lnRef idx="2">
+                <a:schemeClr val="accent5">
+                  <a:shade val="50000"/>
+                </a:schemeClr>
+              </a:lnRef>
+              <a:fillRef idx="1">
+                <a:schemeClr val="accent5"/>
+              </a:fillRef>
+              <a:effectRef idx="0">
+                <a:schemeClr val="accent5"/>
+              </a:effectRef>
+              <a:fontRef idx="minor">
+                <a:schemeClr val="lt1"/>
+              </a:fontRef>
+            </p:style>
+            <p:txBody>
+              <a:bodyPr rot="0" spcFirstLastPara="0" vert="horz" wrap="square" lIns="0" tIns="0" rIns="0" bIns="0" numCol="1" spcCol="0" rtlCol="0" fromWordArt="0" anchor="ctr" anchorCtr="0" forceAA="0" compatLnSpc="1">
+                <a:prstTxWarp prst="textNoShape">
+                  <a:avLst/>
+                </a:prstTxWarp>
+                <a:noAutofit/>
+              </a:bodyPr>
+              <a:lstStyle/>
+              <a:p>
+                <a:pPr indent="73025" algn="ctr">
+                  <a:spcAft>
+                    <a:spcPts val="0"/>
+                  </a:spcAft>
+                </a:pPr>
+                <a:r>
+                  <a:rPr lang="en-US" sz="1200" kern="100" dirty="0">
+                    <a:solidFill>
+                      <a:srgbClr val="FFFFFF"/>
+                    </a:solidFill>
+                    <a:effectLst/>
+                    <a:ea typeface="新細明體" panose="02020500000000000000" pitchFamily="18" charset="-120"/>
+                    <a:cs typeface="Times New Roman" panose="02020603050405020304" pitchFamily="18" charset="0"/>
+                  </a:rPr>
+                  <a:t>1</a:t>
+                </a:r>
+                <a:endParaRPr lang="zh-TW" sz="1200" kern="100" dirty="0">
+                  <a:effectLst/>
+                  <a:ea typeface="新細明體" panose="02020500000000000000" pitchFamily="18" charset="-120"/>
+                  <a:cs typeface="Times New Roman" panose="02020603050405020304" pitchFamily="18" charset="0"/>
+                </a:endParaRPr>
+              </a:p>
+            </p:txBody>
+          </p:sp>
+          <p:sp>
+            <p:nvSpPr>
+              <p:cNvPr id="71" name="手繪多邊形: 圖案 10">
+                <a:extLst>
+                  <a:ext uri="{FF2B5EF4-FFF2-40B4-BE49-F238E27FC236}">
+                    <a16:creationId xmlns:a16="http://schemas.microsoft.com/office/drawing/2014/main" id="{78138566-24AD-4699-928B-2EB8A9FEF365}"/>
+                  </a:ext>
+                </a:extLst>
+              </p:cNvPr>
+              <p:cNvSpPr/>
+              <p:nvPr/>
+            </p:nvSpPr>
+            <p:spPr>
+              <a:xfrm>
+                <a:off x="2065016" y="2736215"/>
+                <a:ext cx="219078" cy="175260"/>
+              </a:xfrm>
+              <a:custGeom>
+                <a:avLst/>
+                <a:gdLst>
+                  <a:gd name="connsiteX0" fmla="*/ 84890 w 453390"/>
+                  <a:gd name="connsiteY0" fmla="*/ 0 h 263525"/>
+                  <a:gd name="connsiteX1" fmla="*/ 453390 w 453390"/>
+                  <a:gd name="connsiteY1" fmla="*/ 0 h 263525"/>
+                  <a:gd name="connsiteX2" fmla="*/ 453390 w 453390"/>
+                  <a:gd name="connsiteY2" fmla="*/ 263525 h 263525"/>
+                  <a:gd name="connsiteX3" fmla="*/ 84890 w 453390"/>
+                  <a:gd name="connsiteY3" fmla="*/ 263525 h 263525"/>
+                  <a:gd name="connsiteX4" fmla="*/ 59217 w 453390"/>
+                  <a:gd name="connsiteY4" fmla="*/ 168771 h 263525"/>
+                  <a:gd name="connsiteX5" fmla="*/ 4819 w 453390"/>
+                  <a:gd name="connsiteY5" fmla="*/ 221542 h 263525"/>
+                  <a:gd name="connsiteX6" fmla="*/ 0 w 453390"/>
+                  <a:gd name="connsiteY6" fmla="*/ 54571 h 263525"/>
+                  <a:gd name="connsiteX7" fmla="*/ 55658 w 453390"/>
+                  <a:gd name="connsiteY7" fmla="*/ 89403 h 263525"/>
+                  <a:gd name="connsiteX8" fmla="*/ 84890 w 453390"/>
+                  <a:gd name="connsiteY8" fmla="*/ 0 h 263525"/>
+                </a:gdLst>
+                <a:ahLst/>
+                <a:cxnLst>
+                  <a:cxn ang="0">
+                    <a:pos x="connsiteX0" y="connsiteY0"/>
+                  </a:cxn>
+                  <a:cxn ang="0">
+                    <a:pos x="connsiteX1" y="connsiteY1"/>
+                  </a:cxn>
+                  <a:cxn ang="0">
+                    <a:pos x="connsiteX2" y="connsiteY2"/>
+                  </a:cxn>
+                  <a:cxn ang="0">
+                    <a:pos x="connsiteX3" y="connsiteY3"/>
+                  </a:cxn>
+                  <a:cxn ang="0">
+                    <a:pos x="connsiteX4" y="connsiteY4"/>
+                  </a:cxn>
+                  <a:cxn ang="0">
+                    <a:pos x="connsiteX5" y="connsiteY5"/>
+                  </a:cxn>
+                  <a:cxn ang="0">
+                    <a:pos x="connsiteX6" y="connsiteY6"/>
+                  </a:cxn>
+                  <a:cxn ang="0">
+                    <a:pos x="connsiteX7" y="connsiteY7"/>
+                  </a:cxn>
+                  <a:cxn ang="0">
+                    <a:pos x="connsiteX8" y="connsiteY8"/>
+                  </a:cxn>
+                </a:cxnLst>
+                <a:rect l="l" t="t" r="r" b="b"/>
+                <a:pathLst>
+                  <a:path w="453390" h="263525">
+                    <a:moveTo>
+                      <a:pt x="84890" y="0"/>
+                    </a:moveTo>
+                    <a:lnTo>
+                      <a:pt x="453390" y="0"/>
+                    </a:lnTo>
+                    <a:lnTo>
+                      <a:pt x="453390" y="263525"/>
+                    </a:lnTo>
+                    <a:lnTo>
+                      <a:pt x="84890" y="263525"/>
+                    </a:lnTo>
+                    <a:cubicBezTo>
+                      <a:pt x="68745" y="263525"/>
+                      <a:pt x="59217" y="193028"/>
+                      <a:pt x="59217" y="168771"/>
+                    </a:cubicBezTo>
+                    <a:lnTo>
+                      <a:pt x="4819" y="221542"/>
+                    </a:lnTo>
+                    <a:lnTo>
+                      <a:pt x="0" y="54571"/>
+                    </a:lnTo>
+                    <a:lnTo>
+                      <a:pt x="55658" y="89403"/>
+                    </a:lnTo>
+                    <a:cubicBezTo>
+                      <a:pt x="55658" y="65146"/>
+                      <a:pt x="68745" y="0"/>
+                      <a:pt x="84890" y="0"/>
+                    </a:cubicBezTo>
+                    <a:close/>
+                  </a:path>
+                </a:pathLst>
+              </a:custGeom>
+            </p:spPr>
+            <p:style>
+              <a:lnRef idx="2">
+                <a:schemeClr val="accent5">
+                  <a:shade val="50000"/>
+                </a:schemeClr>
+              </a:lnRef>
+              <a:fillRef idx="1">
+                <a:schemeClr val="accent5"/>
+              </a:fillRef>
+              <a:effectRef idx="0">
+                <a:schemeClr val="accent5"/>
+              </a:effectRef>
+              <a:fontRef idx="minor">
+                <a:schemeClr val="lt1"/>
+              </a:fontRef>
+            </p:style>
+            <p:txBody>
+              <a:bodyPr rot="0" spcFirstLastPara="0" vert="horz" wrap="square" lIns="0" tIns="0" rIns="0" bIns="0" numCol="1" spcCol="0" rtlCol="0" fromWordArt="0" anchor="ctr" anchorCtr="0" forceAA="0" compatLnSpc="1">
+                <a:prstTxWarp prst="textNoShape">
+                  <a:avLst/>
+                </a:prstTxWarp>
+                <a:noAutofit/>
+              </a:bodyPr>
+              <a:lstStyle/>
+              <a:p>
+                <a:pPr indent="73025" algn="ctr">
+                  <a:spcAft>
+                    <a:spcPts val="0"/>
+                  </a:spcAft>
+                </a:pPr>
+                <a:r>
+                  <a:rPr lang="en-US" sz="1200" kern="100" dirty="0">
+                    <a:solidFill>
+                      <a:srgbClr val="FFFFFF"/>
+                    </a:solidFill>
+                    <a:effectLst/>
+                    <a:ea typeface="新細明體" panose="02020500000000000000" pitchFamily="18" charset="-120"/>
+                    <a:cs typeface="Times New Roman" panose="02020603050405020304" pitchFamily="18" charset="0"/>
+                  </a:rPr>
+                  <a:t>1</a:t>
+                </a:r>
+                <a:endParaRPr lang="zh-TW" sz="1200" kern="100" dirty="0">
+                  <a:effectLst/>
+                  <a:ea typeface="新細明體" panose="02020500000000000000" pitchFamily="18" charset="-120"/>
+                  <a:cs typeface="Times New Roman" panose="02020603050405020304" pitchFamily="18" charset="0"/>
+                </a:endParaRPr>
+              </a:p>
+            </p:txBody>
+          </p:sp>
+          <p:sp>
+            <p:nvSpPr>
+              <p:cNvPr id="72" name="手繪多邊形: 圖案 10">
+                <a:extLst>
+                  <a:ext uri="{FF2B5EF4-FFF2-40B4-BE49-F238E27FC236}">
+                    <a16:creationId xmlns:a16="http://schemas.microsoft.com/office/drawing/2014/main" id="{E5EE9EAE-AF7F-4C0E-ADFC-6090D13F9E2B}"/>
+                  </a:ext>
+                </a:extLst>
+              </p:cNvPr>
+              <p:cNvSpPr/>
+              <p:nvPr/>
+            </p:nvSpPr>
+            <p:spPr>
+              <a:xfrm>
+                <a:off x="2346002" y="2736215"/>
+                <a:ext cx="219078" cy="175260"/>
+              </a:xfrm>
+              <a:custGeom>
+                <a:avLst/>
+                <a:gdLst>
+                  <a:gd name="connsiteX0" fmla="*/ 84890 w 453390"/>
+                  <a:gd name="connsiteY0" fmla="*/ 0 h 263525"/>
+                  <a:gd name="connsiteX1" fmla="*/ 453390 w 453390"/>
+                  <a:gd name="connsiteY1" fmla="*/ 0 h 263525"/>
+                  <a:gd name="connsiteX2" fmla="*/ 453390 w 453390"/>
+                  <a:gd name="connsiteY2" fmla="*/ 263525 h 263525"/>
+                  <a:gd name="connsiteX3" fmla="*/ 84890 w 453390"/>
+                  <a:gd name="connsiteY3" fmla="*/ 263525 h 263525"/>
+                  <a:gd name="connsiteX4" fmla="*/ 59217 w 453390"/>
+                  <a:gd name="connsiteY4" fmla="*/ 168771 h 263525"/>
+                  <a:gd name="connsiteX5" fmla="*/ 4819 w 453390"/>
+                  <a:gd name="connsiteY5" fmla="*/ 221542 h 263525"/>
+                  <a:gd name="connsiteX6" fmla="*/ 0 w 453390"/>
+                  <a:gd name="connsiteY6" fmla="*/ 54571 h 263525"/>
+                  <a:gd name="connsiteX7" fmla="*/ 55658 w 453390"/>
+                  <a:gd name="connsiteY7" fmla="*/ 89403 h 263525"/>
+                  <a:gd name="connsiteX8" fmla="*/ 84890 w 453390"/>
+                  <a:gd name="connsiteY8" fmla="*/ 0 h 263525"/>
+                </a:gdLst>
+                <a:ahLst/>
+                <a:cxnLst>
+                  <a:cxn ang="0">
+                    <a:pos x="connsiteX0" y="connsiteY0"/>
+                  </a:cxn>
+                  <a:cxn ang="0">
+                    <a:pos x="connsiteX1" y="connsiteY1"/>
+                  </a:cxn>
+                  <a:cxn ang="0">
+                    <a:pos x="connsiteX2" y="connsiteY2"/>
+                  </a:cxn>
+                  <a:cxn ang="0">
+                    <a:pos x="connsiteX3" y="connsiteY3"/>
+                  </a:cxn>
+                  <a:cxn ang="0">
+                    <a:pos x="connsiteX4" y="connsiteY4"/>
+                  </a:cxn>
+                  <a:cxn ang="0">
+                    <a:pos x="connsiteX5" y="connsiteY5"/>
+                  </a:cxn>
+                  <a:cxn ang="0">
+                    <a:pos x="connsiteX6" y="connsiteY6"/>
+                  </a:cxn>
+                  <a:cxn ang="0">
+                    <a:pos x="connsiteX7" y="connsiteY7"/>
+                  </a:cxn>
+                  <a:cxn ang="0">
+                    <a:pos x="connsiteX8" y="connsiteY8"/>
+                  </a:cxn>
+                </a:cxnLst>
+                <a:rect l="l" t="t" r="r" b="b"/>
+                <a:pathLst>
+                  <a:path w="453390" h="263525">
+                    <a:moveTo>
+                      <a:pt x="84890" y="0"/>
+                    </a:moveTo>
+                    <a:lnTo>
+                      <a:pt x="453390" y="0"/>
+                    </a:lnTo>
+                    <a:lnTo>
+                      <a:pt x="453390" y="263525"/>
+                    </a:lnTo>
+                    <a:lnTo>
+                      <a:pt x="84890" y="263525"/>
+                    </a:lnTo>
+                    <a:cubicBezTo>
+                      <a:pt x="68745" y="263525"/>
+                      <a:pt x="59217" y="193028"/>
+                      <a:pt x="59217" y="168771"/>
+                    </a:cubicBezTo>
+                    <a:lnTo>
+                      <a:pt x="4819" y="221542"/>
+                    </a:lnTo>
+                    <a:lnTo>
+                      <a:pt x="0" y="54571"/>
+                    </a:lnTo>
+                    <a:lnTo>
+                      <a:pt x="55658" y="89403"/>
+                    </a:lnTo>
+                    <a:cubicBezTo>
+                      <a:pt x="55658" y="65146"/>
+                      <a:pt x="68745" y="0"/>
+                      <a:pt x="84890" y="0"/>
+                    </a:cubicBezTo>
+                    <a:close/>
+                  </a:path>
+                </a:pathLst>
+              </a:custGeom>
+            </p:spPr>
+            <p:style>
+              <a:lnRef idx="2">
+                <a:schemeClr val="accent5">
+                  <a:shade val="50000"/>
+                </a:schemeClr>
+              </a:lnRef>
+              <a:fillRef idx="1">
+                <a:schemeClr val="accent5"/>
+              </a:fillRef>
+              <a:effectRef idx="0">
+                <a:schemeClr val="accent5"/>
+              </a:effectRef>
+              <a:fontRef idx="minor">
+                <a:schemeClr val="lt1"/>
+              </a:fontRef>
+            </p:style>
+            <p:txBody>
+              <a:bodyPr rot="0" spcFirstLastPara="0" vert="horz" wrap="square" lIns="0" tIns="0" rIns="0" bIns="0" numCol="1" spcCol="0" rtlCol="0" fromWordArt="0" anchor="ctr" anchorCtr="0" forceAA="0" compatLnSpc="1">
+                <a:prstTxWarp prst="textNoShape">
+                  <a:avLst/>
+                </a:prstTxWarp>
+                <a:noAutofit/>
+              </a:bodyPr>
+              <a:lstStyle/>
+              <a:p>
+                <a:pPr indent="73025" algn="ctr">
+                  <a:spcAft>
+                    <a:spcPts val="0"/>
+                  </a:spcAft>
+                </a:pPr>
+                <a:r>
+                  <a:rPr lang="en-US" sz="1200" kern="100" dirty="0">
+                    <a:solidFill>
+                      <a:srgbClr val="FFFFFF"/>
+                    </a:solidFill>
+                    <a:effectLst/>
+                    <a:ea typeface="新細明體" panose="02020500000000000000" pitchFamily="18" charset="-120"/>
+                    <a:cs typeface="Times New Roman" panose="02020603050405020304" pitchFamily="18" charset="0"/>
+                  </a:rPr>
+                  <a:t>1</a:t>
+                </a:r>
+                <a:endParaRPr lang="zh-TW" sz="1200" kern="100" dirty="0">
+                  <a:effectLst/>
+                  <a:ea typeface="新細明體" panose="02020500000000000000" pitchFamily="18" charset="-120"/>
+                  <a:cs typeface="Times New Roman" panose="02020603050405020304" pitchFamily="18" charset="0"/>
+                </a:endParaRPr>
+              </a:p>
+            </p:txBody>
+          </p:sp>
+          <p:sp>
+            <p:nvSpPr>
+              <p:cNvPr id="73" name="手繪多邊形: 圖案 10">
+                <a:extLst>
+                  <a:ext uri="{FF2B5EF4-FFF2-40B4-BE49-F238E27FC236}">
+                    <a16:creationId xmlns:a16="http://schemas.microsoft.com/office/drawing/2014/main" id="{FB5B7E53-40D1-4385-B45F-5DA60EF3CDE8}"/>
+                  </a:ext>
+                </a:extLst>
+              </p:cNvPr>
+              <p:cNvSpPr/>
+              <p:nvPr/>
+            </p:nvSpPr>
+            <p:spPr>
+              <a:xfrm>
+                <a:off x="2633667" y="2736215"/>
+                <a:ext cx="219078" cy="175260"/>
+              </a:xfrm>
+              <a:custGeom>
+                <a:avLst/>
+                <a:gdLst>
+                  <a:gd name="connsiteX0" fmla="*/ 84890 w 453390"/>
+                  <a:gd name="connsiteY0" fmla="*/ 0 h 263525"/>
+                  <a:gd name="connsiteX1" fmla="*/ 453390 w 453390"/>
+                  <a:gd name="connsiteY1" fmla="*/ 0 h 263525"/>
+                  <a:gd name="connsiteX2" fmla="*/ 453390 w 453390"/>
+                  <a:gd name="connsiteY2" fmla="*/ 263525 h 263525"/>
+                  <a:gd name="connsiteX3" fmla="*/ 84890 w 453390"/>
+                  <a:gd name="connsiteY3" fmla="*/ 263525 h 263525"/>
+                  <a:gd name="connsiteX4" fmla="*/ 59217 w 453390"/>
+                  <a:gd name="connsiteY4" fmla="*/ 168771 h 263525"/>
+                  <a:gd name="connsiteX5" fmla="*/ 4819 w 453390"/>
+                  <a:gd name="connsiteY5" fmla="*/ 221542 h 263525"/>
+                  <a:gd name="connsiteX6" fmla="*/ 0 w 453390"/>
+                  <a:gd name="connsiteY6" fmla="*/ 54571 h 263525"/>
+                  <a:gd name="connsiteX7" fmla="*/ 55658 w 453390"/>
+                  <a:gd name="connsiteY7" fmla="*/ 89403 h 263525"/>
+                  <a:gd name="connsiteX8" fmla="*/ 84890 w 453390"/>
+                  <a:gd name="connsiteY8" fmla="*/ 0 h 263525"/>
+                </a:gdLst>
+                <a:ahLst/>
+                <a:cxnLst>
+                  <a:cxn ang="0">
+                    <a:pos x="connsiteX0" y="connsiteY0"/>
+                  </a:cxn>
+                  <a:cxn ang="0">
+                    <a:pos x="connsiteX1" y="connsiteY1"/>
+                  </a:cxn>
+                  <a:cxn ang="0">
+                    <a:pos x="connsiteX2" y="connsiteY2"/>
+                  </a:cxn>
+                  <a:cxn ang="0">
+                    <a:pos x="connsiteX3" y="connsiteY3"/>
+                  </a:cxn>
+                  <a:cxn ang="0">
+                    <a:pos x="connsiteX4" y="connsiteY4"/>
+                  </a:cxn>
+                  <a:cxn ang="0">
+                    <a:pos x="connsiteX5" y="connsiteY5"/>
+                  </a:cxn>
+                  <a:cxn ang="0">
+                    <a:pos x="connsiteX6" y="connsiteY6"/>
+                  </a:cxn>
+                  <a:cxn ang="0">
+                    <a:pos x="connsiteX7" y="connsiteY7"/>
+                  </a:cxn>
+                  <a:cxn ang="0">
+                    <a:pos x="connsiteX8" y="connsiteY8"/>
+                  </a:cxn>
+                </a:cxnLst>
+                <a:rect l="l" t="t" r="r" b="b"/>
+                <a:pathLst>
+                  <a:path w="453390" h="263525">
+                    <a:moveTo>
+                      <a:pt x="84890" y="0"/>
+                    </a:moveTo>
+                    <a:lnTo>
+                      <a:pt x="453390" y="0"/>
+                    </a:lnTo>
+                    <a:lnTo>
+                      <a:pt x="453390" y="263525"/>
+                    </a:lnTo>
+                    <a:lnTo>
+                      <a:pt x="84890" y="263525"/>
+                    </a:lnTo>
+                    <a:cubicBezTo>
+                      <a:pt x="68745" y="263525"/>
+                      <a:pt x="59217" y="193028"/>
+                      <a:pt x="59217" y="168771"/>
+                    </a:cubicBezTo>
+                    <a:lnTo>
+                      <a:pt x="4819" y="221542"/>
+                    </a:lnTo>
+                    <a:lnTo>
+                      <a:pt x="0" y="54571"/>
+                    </a:lnTo>
+                    <a:lnTo>
+                      <a:pt x="55658" y="89403"/>
+                    </a:lnTo>
+                    <a:cubicBezTo>
+                      <a:pt x="55658" y="65146"/>
+                      <a:pt x="68745" y="0"/>
+                      <a:pt x="84890" y="0"/>
+                    </a:cubicBezTo>
+                    <a:close/>
+                  </a:path>
+                </a:pathLst>
+              </a:custGeom>
+            </p:spPr>
+            <p:style>
+              <a:lnRef idx="2">
+                <a:schemeClr val="accent5">
+                  <a:shade val="50000"/>
+                </a:schemeClr>
+              </a:lnRef>
+              <a:fillRef idx="1">
+                <a:schemeClr val="accent5"/>
+              </a:fillRef>
+              <a:effectRef idx="0">
+                <a:schemeClr val="accent5"/>
+              </a:effectRef>
+              <a:fontRef idx="minor">
+                <a:schemeClr val="lt1"/>
+              </a:fontRef>
+            </p:style>
+            <p:txBody>
+              <a:bodyPr rot="0" spcFirstLastPara="0" vert="horz" wrap="square" lIns="0" tIns="0" rIns="0" bIns="0" numCol="1" spcCol="0" rtlCol="0" fromWordArt="0" anchor="ctr" anchorCtr="0" forceAA="0" compatLnSpc="1">
+                <a:prstTxWarp prst="textNoShape">
+                  <a:avLst/>
+                </a:prstTxWarp>
+                <a:noAutofit/>
+              </a:bodyPr>
+              <a:lstStyle/>
+              <a:p>
+                <a:pPr indent="73025" algn="ctr">
+                  <a:spcAft>
+                    <a:spcPts val="0"/>
+                  </a:spcAft>
+                </a:pPr>
+                <a:r>
+                  <a:rPr lang="en-US" sz="1200" kern="100" dirty="0">
+                    <a:solidFill>
+                      <a:srgbClr val="FFFFFF"/>
+                    </a:solidFill>
+                    <a:effectLst/>
+                    <a:ea typeface="新細明體" panose="02020500000000000000" pitchFamily="18" charset="-120"/>
+                    <a:cs typeface="Times New Roman" panose="02020603050405020304" pitchFamily="18" charset="0"/>
+                  </a:rPr>
+                  <a:t>1</a:t>
+                </a:r>
+                <a:endParaRPr lang="zh-TW" sz="1200" kern="100" dirty="0">
+                  <a:effectLst/>
+                  <a:ea typeface="新細明體" panose="02020500000000000000" pitchFamily="18" charset="-120"/>
+                  <a:cs typeface="Times New Roman" panose="02020603050405020304" pitchFamily="18" charset="0"/>
+                </a:endParaRPr>
+              </a:p>
+            </p:txBody>
+          </p:sp>
+          <p:sp>
+            <p:nvSpPr>
+              <p:cNvPr id="74" name="手繪多邊形: 圖案 10">
+                <a:extLst>
+                  <a:ext uri="{FF2B5EF4-FFF2-40B4-BE49-F238E27FC236}">
+                    <a16:creationId xmlns:a16="http://schemas.microsoft.com/office/drawing/2014/main" id="{07F9982E-E889-44E5-ACF9-ED931F71E801}"/>
+                  </a:ext>
+                </a:extLst>
+              </p:cNvPr>
+              <p:cNvSpPr/>
+              <p:nvPr/>
+            </p:nvSpPr>
+            <p:spPr>
+              <a:xfrm>
+                <a:off x="2914653" y="2736215"/>
+                <a:ext cx="219078" cy="175260"/>
+              </a:xfrm>
+              <a:custGeom>
+                <a:avLst/>
+                <a:gdLst>
+                  <a:gd name="connsiteX0" fmla="*/ 84890 w 453390"/>
+                  <a:gd name="connsiteY0" fmla="*/ 0 h 263525"/>
+                  <a:gd name="connsiteX1" fmla="*/ 453390 w 453390"/>
+                  <a:gd name="connsiteY1" fmla="*/ 0 h 263525"/>
+                  <a:gd name="connsiteX2" fmla="*/ 453390 w 453390"/>
+                  <a:gd name="connsiteY2" fmla="*/ 263525 h 263525"/>
+                  <a:gd name="connsiteX3" fmla="*/ 84890 w 453390"/>
+                  <a:gd name="connsiteY3" fmla="*/ 263525 h 263525"/>
+                  <a:gd name="connsiteX4" fmla="*/ 59217 w 453390"/>
+                  <a:gd name="connsiteY4" fmla="*/ 168771 h 263525"/>
+                  <a:gd name="connsiteX5" fmla="*/ 4819 w 453390"/>
+                  <a:gd name="connsiteY5" fmla="*/ 221542 h 263525"/>
+                  <a:gd name="connsiteX6" fmla="*/ 0 w 453390"/>
+                  <a:gd name="connsiteY6" fmla="*/ 54571 h 263525"/>
+                  <a:gd name="connsiteX7" fmla="*/ 55658 w 453390"/>
+                  <a:gd name="connsiteY7" fmla="*/ 89403 h 263525"/>
+                  <a:gd name="connsiteX8" fmla="*/ 84890 w 453390"/>
+                  <a:gd name="connsiteY8" fmla="*/ 0 h 263525"/>
+                </a:gdLst>
+                <a:ahLst/>
+                <a:cxnLst>
+                  <a:cxn ang="0">
+                    <a:pos x="connsiteX0" y="connsiteY0"/>
+                  </a:cxn>
+                  <a:cxn ang="0">
+                    <a:pos x="connsiteX1" y="connsiteY1"/>
+                  </a:cxn>
+                  <a:cxn ang="0">
+                    <a:pos x="connsiteX2" y="connsiteY2"/>
+                  </a:cxn>
+                  <a:cxn ang="0">
+                    <a:pos x="connsiteX3" y="connsiteY3"/>
+                  </a:cxn>
+                  <a:cxn ang="0">
+                    <a:pos x="connsiteX4" y="connsiteY4"/>
+                  </a:cxn>
+                  <a:cxn ang="0">
+                    <a:pos x="connsiteX5" y="connsiteY5"/>
+                  </a:cxn>
+                  <a:cxn ang="0">
+                    <a:pos x="connsiteX6" y="connsiteY6"/>
+                  </a:cxn>
+                  <a:cxn ang="0">
+                    <a:pos x="connsiteX7" y="connsiteY7"/>
+                  </a:cxn>
+                  <a:cxn ang="0">
+                    <a:pos x="connsiteX8" y="connsiteY8"/>
+                  </a:cxn>
+                </a:cxnLst>
+                <a:rect l="l" t="t" r="r" b="b"/>
+                <a:pathLst>
+                  <a:path w="453390" h="263525">
+                    <a:moveTo>
+                      <a:pt x="84890" y="0"/>
+                    </a:moveTo>
+                    <a:lnTo>
+                      <a:pt x="453390" y="0"/>
+                    </a:lnTo>
+                    <a:lnTo>
+                      <a:pt x="453390" y="263525"/>
+                    </a:lnTo>
+                    <a:lnTo>
+                      <a:pt x="84890" y="263525"/>
+                    </a:lnTo>
+                    <a:cubicBezTo>
+                      <a:pt x="68745" y="263525"/>
+                      <a:pt x="59217" y="193028"/>
+                      <a:pt x="59217" y="168771"/>
+                    </a:cubicBezTo>
+                    <a:lnTo>
+                      <a:pt x="4819" y="221542"/>
+                    </a:lnTo>
+                    <a:lnTo>
+                      <a:pt x="0" y="54571"/>
+                    </a:lnTo>
+                    <a:lnTo>
+                      <a:pt x="55658" y="89403"/>
+                    </a:lnTo>
+                    <a:cubicBezTo>
+                      <a:pt x="55658" y="65146"/>
+                      <a:pt x="68745" y="0"/>
+                      <a:pt x="84890" y="0"/>
+                    </a:cubicBezTo>
+                    <a:close/>
+                  </a:path>
+                </a:pathLst>
+              </a:custGeom>
+            </p:spPr>
+            <p:style>
+              <a:lnRef idx="2">
+                <a:schemeClr val="accent5">
+                  <a:shade val="50000"/>
+                </a:schemeClr>
+              </a:lnRef>
+              <a:fillRef idx="1">
+                <a:schemeClr val="accent5"/>
+              </a:fillRef>
+              <a:effectRef idx="0">
+                <a:schemeClr val="accent5"/>
+              </a:effectRef>
+              <a:fontRef idx="minor">
+                <a:schemeClr val="lt1"/>
+              </a:fontRef>
+            </p:style>
+            <p:txBody>
+              <a:bodyPr rot="0" spcFirstLastPara="0" vert="horz" wrap="square" lIns="0" tIns="0" rIns="0" bIns="0" numCol="1" spcCol="0" rtlCol="0" fromWordArt="0" anchor="ctr" anchorCtr="0" forceAA="0" compatLnSpc="1">
+                <a:prstTxWarp prst="textNoShape">
+                  <a:avLst/>
+                </a:prstTxWarp>
+                <a:noAutofit/>
+              </a:bodyPr>
+              <a:lstStyle/>
+              <a:p>
+                <a:pPr indent="73025" algn="ctr">
+                  <a:spcAft>
+                    <a:spcPts val="0"/>
+                  </a:spcAft>
+                </a:pPr>
+                <a:r>
+                  <a:rPr lang="en-US" sz="1200" kern="100" dirty="0">
+                    <a:solidFill>
+                      <a:srgbClr val="FFFFFF"/>
+                    </a:solidFill>
+                    <a:effectLst/>
+                    <a:ea typeface="新細明體" panose="02020500000000000000" pitchFamily="18" charset="-120"/>
+                    <a:cs typeface="Times New Roman" panose="02020603050405020304" pitchFamily="18" charset="0"/>
+                  </a:rPr>
+                  <a:t>1</a:t>
+                </a:r>
+                <a:endParaRPr lang="zh-TW" sz="1200" kern="100" dirty="0">
+                  <a:effectLst/>
+                  <a:ea typeface="新細明體" panose="02020500000000000000" pitchFamily="18" charset="-120"/>
+                  <a:cs typeface="Times New Roman" panose="02020603050405020304" pitchFamily="18" charset="0"/>
+                </a:endParaRPr>
+              </a:p>
+            </p:txBody>
+          </p:sp>
+        </p:grpSp>
+      </p:grpSp>
     </p:spTree>
     <p:extLst>
       <p:ext uri="{BB962C8B-B14F-4D97-AF65-F5344CB8AC3E}">

--- a/tools/myCustomBlockly/iMi/block.pptx
+++ b/tools/myCustomBlockly/iMi/block.pptx
@@ -243,7 +243,7 @@
           <a:p>
             <a:fld id="{28019EB3-9618-4DC9-9742-E69F5EF18F40}" type="datetimeFigureOut">
               <a:rPr lang="zh-TW" altLang="en-US" smtClean="0"/>
-              <a:t>2023/12/20</a:t>
+              <a:t>2023/12/21</a:t>
             </a:fld>
             <a:endParaRPr lang="zh-TW" altLang="en-US"/>
           </a:p>
@@ -411,7 +411,7 @@
           <a:p>
             <a:fld id="{28019EB3-9618-4DC9-9742-E69F5EF18F40}" type="datetimeFigureOut">
               <a:rPr lang="zh-TW" altLang="en-US" smtClean="0"/>
-              <a:t>2023/12/20</a:t>
+              <a:t>2023/12/21</a:t>
             </a:fld>
             <a:endParaRPr lang="zh-TW" altLang="en-US"/>
           </a:p>
@@ -589,7 +589,7 @@
           <a:p>
             <a:fld id="{28019EB3-9618-4DC9-9742-E69F5EF18F40}" type="datetimeFigureOut">
               <a:rPr lang="zh-TW" altLang="en-US" smtClean="0"/>
-              <a:t>2023/12/20</a:t>
+              <a:t>2023/12/21</a:t>
             </a:fld>
             <a:endParaRPr lang="zh-TW" altLang="en-US"/>
           </a:p>
@@ -757,7 +757,7 @@
           <a:p>
             <a:fld id="{28019EB3-9618-4DC9-9742-E69F5EF18F40}" type="datetimeFigureOut">
               <a:rPr lang="zh-TW" altLang="en-US" smtClean="0"/>
-              <a:t>2023/12/20</a:t>
+              <a:t>2023/12/21</a:t>
             </a:fld>
             <a:endParaRPr lang="zh-TW" altLang="en-US"/>
           </a:p>
@@ -1002,7 +1002,7 @@
           <a:p>
             <a:fld id="{28019EB3-9618-4DC9-9742-E69F5EF18F40}" type="datetimeFigureOut">
               <a:rPr lang="zh-TW" altLang="en-US" smtClean="0"/>
-              <a:t>2023/12/20</a:t>
+              <a:t>2023/12/21</a:t>
             </a:fld>
             <a:endParaRPr lang="zh-TW" altLang="en-US"/>
           </a:p>
@@ -1231,7 +1231,7 @@
           <a:p>
             <a:fld id="{28019EB3-9618-4DC9-9742-E69F5EF18F40}" type="datetimeFigureOut">
               <a:rPr lang="zh-TW" altLang="en-US" smtClean="0"/>
-              <a:t>2023/12/20</a:t>
+              <a:t>2023/12/21</a:t>
             </a:fld>
             <a:endParaRPr lang="zh-TW" altLang="en-US"/>
           </a:p>
@@ -1595,7 +1595,7 @@
           <a:p>
             <a:fld id="{28019EB3-9618-4DC9-9742-E69F5EF18F40}" type="datetimeFigureOut">
               <a:rPr lang="zh-TW" altLang="en-US" smtClean="0"/>
-              <a:t>2023/12/20</a:t>
+              <a:t>2023/12/21</a:t>
             </a:fld>
             <a:endParaRPr lang="zh-TW" altLang="en-US"/>
           </a:p>
@@ -1712,7 +1712,7 @@
           <a:p>
             <a:fld id="{28019EB3-9618-4DC9-9742-E69F5EF18F40}" type="datetimeFigureOut">
               <a:rPr lang="zh-TW" altLang="en-US" smtClean="0"/>
-              <a:t>2023/12/20</a:t>
+              <a:t>2023/12/21</a:t>
             </a:fld>
             <a:endParaRPr lang="zh-TW" altLang="en-US"/>
           </a:p>
@@ -1807,7 +1807,7 @@
           <a:p>
             <a:fld id="{28019EB3-9618-4DC9-9742-E69F5EF18F40}" type="datetimeFigureOut">
               <a:rPr lang="zh-TW" altLang="en-US" smtClean="0"/>
-              <a:t>2023/12/20</a:t>
+              <a:t>2023/12/21</a:t>
             </a:fld>
             <a:endParaRPr lang="zh-TW" altLang="en-US"/>
           </a:p>
@@ -2082,7 +2082,7 @@
           <a:p>
             <a:fld id="{28019EB3-9618-4DC9-9742-E69F5EF18F40}" type="datetimeFigureOut">
               <a:rPr lang="zh-TW" altLang="en-US" smtClean="0"/>
-              <a:t>2023/12/20</a:t>
+              <a:t>2023/12/21</a:t>
             </a:fld>
             <a:endParaRPr lang="zh-TW" altLang="en-US"/>
           </a:p>
@@ -2334,7 +2334,7 @@
           <a:p>
             <a:fld id="{28019EB3-9618-4DC9-9742-E69F5EF18F40}" type="datetimeFigureOut">
               <a:rPr lang="zh-TW" altLang="en-US" smtClean="0"/>
-              <a:t>2023/12/20</a:t>
+              <a:t>2023/12/21</a:t>
             </a:fld>
             <a:endParaRPr lang="zh-TW" altLang="en-US"/>
           </a:p>
@@ -2545,7 +2545,7 @@
           <a:p>
             <a:fld id="{28019EB3-9618-4DC9-9742-E69F5EF18F40}" type="datetimeFigureOut">
               <a:rPr lang="zh-TW" altLang="en-US" smtClean="0"/>
-              <a:t>2023/12/20</a:t>
+              <a:t>2023/12/21</a:t>
             </a:fld>
             <a:endParaRPr lang="zh-TW" altLang="en-US"/>
           </a:p>
@@ -12699,6 +12699,1344 @@
             </a:p>
           </p:txBody>
         </p:sp>
+      </p:grpSp>
+      <p:grpSp>
+        <p:nvGrpSpPr>
+          <p:cNvPr id="134" name="群組 133">
+            <a:extLst>
+              <a:ext uri="{FF2B5EF4-FFF2-40B4-BE49-F238E27FC236}">
+                <a16:creationId xmlns:a16="http://schemas.microsoft.com/office/drawing/2014/main" id="{E7D0DAEF-EB2A-4D83-B1BC-DBD09EAE6F40}"/>
+              </a:ext>
+            </a:extLst>
+          </p:cNvPr>
+          <p:cNvGrpSpPr/>
+          <p:nvPr/>
+        </p:nvGrpSpPr>
+        <p:grpSpPr>
+          <a:xfrm>
+            <a:off x="368014" y="1309288"/>
+            <a:ext cx="2078228" cy="356019"/>
+            <a:chOff x="4453412" y="3664586"/>
+            <a:chExt cx="2078228" cy="356019"/>
+          </a:xfrm>
+        </p:grpSpPr>
+        <p:sp>
+          <p:nvSpPr>
+            <p:cNvPr id="135" name="圓角矩形 4">
+              <a:extLst>
+                <a:ext uri="{FF2B5EF4-FFF2-40B4-BE49-F238E27FC236}">
+                  <a16:creationId xmlns:a16="http://schemas.microsoft.com/office/drawing/2014/main" id="{386BC809-B919-4661-A74C-2019B00ED290}"/>
+                </a:ext>
+              </a:extLst>
+            </p:cNvPr>
+            <p:cNvSpPr/>
+            <p:nvPr/>
+          </p:nvSpPr>
+          <p:spPr>
+            <a:xfrm>
+              <a:off x="4453412" y="3664586"/>
+              <a:ext cx="2078228" cy="356019"/>
+            </a:xfrm>
+            <a:custGeom>
+              <a:avLst/>
+              <a:gdLst>
+                <a:gd name="connsiteX0" fmla="*/ 0 w 4424680"/>
+                <a:gd name="connsiteY0" fmla="*/ 60115 h 360680"/>
+                <a:gd name="connsiteX1" fmla="*/ 60115 w 4424680"/>
+                <a:gd name="connsiteY1" fmla="*/ 0 h 360680"/>
+                <a:gd name="connsiteX2" fmla="*/ 4364565 w 4424680"/>
+                <a:gd name="connsiteY2" fmla="*/ 0 h 360680"/>
+                <a:gd name="connsiteX3" fmla="*/ 4424680 w 4424680"/>
+                <a:gd name="connsiteY3" fmla="*/ 60115 h 360680"/>
+                <a:gd name="connsiteX4" fmla="*/ 4424680 w 4424680"/>
+                <a:gd name="connsiteY4" fmla="*/ 300565 h 360680"/>
+                <a:gd name="connsiteX5" fmla="*/ 4364565 w 4424680"/>
+                <a:gd name="connsiteY5" fmla="*/ 360680 h 360680"/>
+                <a:gd name="connsiteX6" fmla="*/ 60115 w 4424680"/>
+                <a:gd name="connsiteY6" fmla="*/ 360680 h 360680"/>
+                <a:gd name="connsiteX7" fmla="*/ 0 w 4424680"/>
+                <a:gd name="connsiteY7" fmla="*/ 300565 h 360680"/>
+                <a:gd name="connsiteX8" fmla="*/ 0 w 4424680"/>
+                <a:gd name="connsiteY8" fmla="*/ 60115 h 360680"/>
+                <a:gd name="connsiteX0" fmla="*/ 0 w 4424680"/>
+                <a:gd name="connsiteY0" fmla="*/ 60115 h 360680"/>
+                <a:gd name="connsiteX1" fmla="*/ 60115 w 4424680"/>
+                <a:gd name="connsiteY1" fmla="*/ 0 h 360680"/>
+                <a:gd name="connsiteX2" fmla="*/ 279400 w 4424680"/>
+                <a:gd name="connsiteY2" fmla="*/ 0 h 360680"/>
+                <a:gd name="connsiteX3" fmla="*/ 4364565 w 4424680"/>
+                <a:gd name="connsiteY3" fmla="*/ 0 h 360680"/>
+                <a:gd name="connsiteX4" fmla="*/ 4424680 w 4424680"/>
+                <a:gd name="connsiteY4" fmla="*/ 60115 h 360680"/>
+                <a:gd name="connsiteX5" fmla="*/ 4424680 w 4424680"/>
+                <a:gd name="connsiteY5" fmla="*/ 300565 h 360680"/>
+                <a:gd name="connsiteX6" fmla="*/ 4364565 w 4424680"/>
+                <a:gd name="connsiteY6" fmla="*/ 360680 h 360680"/>
+                <a:gd name="connsiteX7" fmla="*/ 60115 w 4424680"/>
+                <a:gd name="connsiteY7" fmla="*/ 360680 h 360680"/>
+                <a:gd name="connsiteX8" fmla="*/ 0 w 4424680"/>
+                <a:gd name="connsiteY8" fmla="*/ 300565 h 360680"/>
+                <a:gd name="connsiteX9" fmla="*/ 0 w 4424680"/>
+                <a:gd name="connsiteY9" fmla="*/ 60115 h 360680"/>
+                <a:gd name="connsiteX0" fmla="*/ 0 w 4424680"/>
+                <a:gd name="connsiteY0" fmla="*/ 60115 h 360680"/>
+                <a:gd name="connsiteX1" fmla="*/ 60115 w 4424680"/>
+                <a:gd name="connsiteY1" fmla="*/ 0 h 360680"/>
+                <a:gd name="connsiteX2" fmla="*/ 4364565 w 4424680"/>
+                <a:gd name="connsiteY2" fmla="*/ 0 h 360680"/>
+                <a:gd name="connsiteX3" fmla="*/ 4424680 w 4424680"/>
+                <a:gd name="connsiteY3" fmla="*/ 60115 h 360680"/>
+                <a:gd name="connsiteX4" fmla="*/ 4424680 w 4424680"/>
+                <a:gd name="connsiteY4" fmla="*/ 300565 h 360680"/>
+                <a:gd name="connsiteX5" fmla="*/ 4364565 w 4424680"/>
+                <a:gd name="connsiteY5" fmla="*/ 360680 h 360680"/>
+                <a:gd name="connsiteX6" fmla="*/ 60115 w 4424680"/>
+                <a:gd name="connsiteY6" fmla="*/ 360680 h 360680"/>
+                <a:gd name="connsiteX7" fmla="*/ 0 w 4424680"/>
+                <a:gd name="connsiteY7" fmla="*/ 300565 h 360680"/>
+                <a:gd name="connsiteX8" fmla="*/ 0 w 4424680"/>
+                <a:gd name="connsiteY8" fmla="*/ 60115 h 360680"/>
+                <a:gd name="connsiteX0" fmla="*/ 0 w 4424680"/>
+                <a:gd name="connsiteY0" fmla="*/ 60115 h 360680"/>
+                <a:gd name="connsiteX1" fmla="*/ 60115 w 4424680"/>
+                <a:gd name="connsiteY1" fmla="*/ 0 h 360680"/>
+                <a:gd name="connsiteX2" fmla="*/ 350520 w 4424680"/>
+                <a:gd name="connsiteY2" fmla="*/ 0 h 360680"/>
+                <a:gd name="connsiteX3" fmla="*/ 4364565 w 4424680"/>
+                <a:gd name="connsiteY3" fmla="*/ 0 h 360680"/>
+                <a:gd name="connsiteX4" fmla="*/ 4424680 w 4424680"/>
+                <a:gd name="connsiteY4" fmla="*/ 60115 h 360680"/>
+                <a:gd name="connsiteX5" fmla="*/ 4424680 w 4424680"/>
+                <a:gd name="connsiteY5" fmla="*/ 300565 h 360680"/>
+                <a:gd name="connsiteX6" fmla="*/ 4364565 w 4424680"/>
+                <a:gd name="connsiteY6" fmla="*/ 360680 h 360680"/>
+                <a:gd name="connsiteX7" fmla="*/ 60115 w 4424680"/>
+                <a:gd name="connsiteY7" fmla="*/ 360680 h 360680"/>
+                <a:gd name="connsiteX8" fmla="*/ 0 w 4424680"/>
+                <a:gd name="connsiteY8" fmla="*/ 300565 h 360680"/>
+                <a:gd name="connsiteX9" fmla="*/ 0 w 4424680"/>
+                <a:gd name="connsiteY9" fmla="*/ 60115 h 360680"/>
+                <a:gd name="connsiteX0" fmla="*/ 0 w 4424680"/>
+                <a:gd name="connsiteY0" fmla="*/ 121075 h 421640"/>
+                <a:gd name="connsiteX1" fmla="*/ 60115 w 4424680"/>
+                <a:gd name="connsiteY1" fmla="*/ 60960 h 421640"/>
+                <a:gd name="connsiteX2" fmla="*/ 350520 w 4424680"/>
+                <a:gd name="connsiteY2" fmla="*/ 60960 h 421640"/>
+                <a:gd name="connsiteX3" fmla="*/ 4364565 w 4424680"/>
+                <a:gd name="connsiteY3" fmla="*/ 60960 h 421640"/>
+                <a:gd name="connsiteX4" fmla="*/ 4424680 w 4424680"/>
+                <a:gd name="connsiteY4" fmla="*/ 121075 h 421640"/>
+                <a:gd name="connsiteX5" fmla="*/ 4424680 w 4424680"/>
+                <a:gd name="connsiteY5" fmla="*/ 361525 h 421640"/>
+                <a:gd name="connsiteX6" fmla="*/ 4364565 w 4424680"/>
+                <a:gd name="connsiteY6" fmla="*/ 421640 h 421640"/>
+                <a:gd name="connsiteX7" fmla="*/ 60115 w 4424680"/>
+                <a:gd name="connsiteY7" fmla="*/ 421640 h 421640"/>
+                <a:gd name="connsiteX8" fmla="*/ 0 w 4424680"/>
+                <a:gd name="connsiteY8" fmla="*/ 361525 h 421640"/>
+                <a:gd name="connsiteX9" fmla="*/ 0 w 4424680"/>
+                <a:gd name="connsiteY9" fmla="*/ 121075 h 421640"/>
+                <a:gd name="connsiteX0" fmla="*/ 0 w 4424680"/>
+                <a:gd name="connsiteY0" fmla="*/ 121075 h 421640"/>
+                <a:gd name="connsiteX1" fmla="*/ 60115 w 4424680"/>
+                <a:gd name="connsiteY1" fmla="*/ 60960 h 421640"/>
+                <a:gd name="connsiteX2" fmla="*/ 350520 w 4424680"/>
+                <a:gd name="connsiteY2" fmla="*/ 60960 h 421640"/>
+                <a:gd name="connsiteX3" fmla="*/ 4364565 w 4424680"/>
+                <a:gd name="connsiteY3" fmla="*/ 60960 h 421640"/>
+                <a:gd name="connsiteX4" fmla="*/ 4424680 w 4424680"/>
+                <a:gd name="connsiteY4" fmla="*/ 121075 h 421640"/>
+                <a:gd name="connsiteX5" fmla="*/ 4424680 w 4424680"/>
+                <a:gd name="connsiteY5" fmla="*/ 361525 h 421640"/>
+                <a:gd name="connsiteX6" fmla="*/ 4364565 w 4424680"/>
+                <a:gd name="connsiteY6" fmla="*/ 421640 h 421640"/>
+                <a:gd name="connsiteX7" fmla="*/ 330200 w 4424680"/>
+                <a:gd name="connsiteY7" fmla="*/ 421640 h 421640"/>
+                <a:gd name="connsiteX8" fmla="*/ 60115 w 4424680"/>
+                <a:gd name="connsiteY8" fmla="*/ 421640 h 421640"/>
+                <a:gd name="connsiteX9" fmla="*/ 0 w 4424680"/>
+                <a:gd name="connsiteY9" fmla="*/ 361525 h 421640"/>
+                <a:gd name="connsiteX10" fmla="*/ 0 w 4424680"/>
+                <a:gd name="connsiteY10" fmla="*/ 121075 h 421640"/>
+                <a:gd name="connsiteX0" fmla="*/ 0 w 4424680"/>
+                <a:gd name="connsiteY0" fmla="*/ 60115 h 360680"/>
+                <a:gd name="connsiteX1" fmla="*/ 60115 w 4424680"/>
+                <a:gd name="connsiteY1" fmla="*/ 0 h 360680"/>
+                <a:gd name="connsiteX2" fmla="*/ 350520 w 4424680"/>
+                <a:gd name="connsiteY2" fmla="*/ 0 h 360680"/>
+                <a:gd name="connsiteX3" fmla="*/ 4364565 w 4424680"/>
+                <a:gd name="connsiteY3" fmla="*/ 0 h 360680"/>
+                <a:gd name="connsiteX4" fmla="*/ 4424680 w 4424680"/>
+                <a:gd name="connsiteY4" fmla="*/ 60115 h 360680"/>
+                <a:gd name="connsiteX5" fmla="*/ 4424680 w 4424680"/>
+                <a:gd name="connsiteY5" fmla="*/ 300565 h 360680"/>
+                <a:gd name="connsiteX6" fmla="*/ 4364565 w 4424680"/>
+                <a:gd name="connsiteY6" fmla="*/ 360680 h 360680"/>
+                <a:gd name="connsiteX7" fmla="*/ 330200 w 4424680"/>
+                <a:gd name="connsiteY7" fmla="*/ 360680 h 360680"/>
+                <a:gd name="connsiteX8" fmla="*/ 60115 w 4424680"/>
+                <a:gd name="connsiteY8" fmla="*/ 360680 h 360680"/>
+                <a:gd name="connsiteX9" fmla="*/ 0 w 4424680"/>
+                <a:gd name="connsiteY9" fmla="*/ 300565 h 360680"/>
+                <a:gd name="connsiteX10" fmla="*/ 0 w 4424680"/>
+                <a:gd name="connsiteY10" fmla="*/ 60115 h 360680"/>
+                <a:gd name="connsiteX0" fmla="*/ 0 w 4424680"/>
+                <a:gd name="connsiteY0" fmla="*/ 60115 h 421640"/>
+                <a:gd name="connsiteX1" fmla="*/ 60115 w 4424680"/>
+                <a:gd name="connsiteY1" fmla="*/ 0 h 421640"/>
+                <a:gd name="connsiteX2" fmla="*/ 350520 w 4424680"/>
+                <a:gd name="connsiteY2" fmla="*/ 0 h 421640"/>
+                <a:gd name="connsiteX3" fmla="*/ 4364565 w 4424680"/>
+                <a:gd name="connsiteY3" fmla="*/ 0 h 421640"/>
+                <a:gd name="connsiteX4" fmla="*/ 4424680 w 4424680"/>
+                <a:gd name="connsiteY4" fmla="*/ 60115 h 421640"/>
+                <a:gd name="connsiteX5" fmla="*/ 4424680 w 4424680"/>
+                <a:gd name="connsiteY5" fmla="*/ 300565 h 421640"/>
+                <a:gd name="connsiteX6" fmla="*/ 4364565 w 4424680"/>
+                <a:gd name="connsiteY6" fmla="*/ 360680 h 421640"/>
+                <a:gd name="connsiteX7" fmla="*/ 330200 w 4424680"/>
+                <a:gd name="connsiteY7" fmla="*/ 360680 h 421640"/>
+                <a:gd name="connsiteX8" fmla="*/ 60115 w 4424680"/>
+                <a:gd name="connsiteY8" fmla="*/ 360680 h 421640"/>
+                <a:gd name="connsiteX9" fmla="*/ 0 w 4424680"/>
+                <a:gd name="connsiteY9" fmla="*/ 300565 h 421640"/>
+                <a:gd name="connsiteX10" fmla="*/ 0 w 4424680"/>
+                <a:gd name="connsiteY10" fmla="*/ 60115 h 421640"/>
+                <a:gd name="connsiteX0" fmla="*/ 0 w 4424680"/>
+                <a:gd name="connsiteY0" fmla="*/ 60115 h 421640"/>
+                <a:gd name="connsiteX1" fmla="*/ 60115 w 4424680"/>
+                <a:gd name="connsiteY1" fmla="*/ 0 h 421640"/>
+                <a:gd name="connsiteX2" fmla="*/ 350520 w 4424680"/>
+                <a:gd name="connsiteY2" fmla="*/ 0 h 421640"/>
+                <a:gd name="connsiteX3" fmla="*/ 4364565 w 4424680"/>
+                <a:gd name="connsiteY3" fmla="*/ 0 h 421640"/>
+                <a:gd name="connsiteX4" fmla="*/ 4424680 w 4424680"/>
+                <a:gd name="connsiteY4" fmla="*/ 60115 h 421640"/>
+                <a:gd name="connsiteX5" fmla="*/ 4424680 w 4424680"/>
+                <a:gd name="connsiteY5" fmla="*/ 300565 h 421640"/>
+                <a:gd name="connsiteX6" fmla="*/ 4364565 w 4424680"/>
+                <a:gd name="connsiteY6" fmla="*/ 360680 h 421640"/>
+                <a:gd name="connsiteX7" fmla="*/ 330200 w 4424680"/>
+                <a:gd name="connsiteY7" fmla="*/ 360680 h 421640"/>
+                <a:gd name="connsiteX8" fmla="*/ 60115 w 4424680"/>
+                <a:gd name="connsiteY8" fmla="*/ 360680 h 421640"/>
+                <a:gd name="connsiteX9" fmla="*/ 0 w 4424680"/>
+                <a:gd name="connsiteY9" fmla="*/ 300565 h 421640"/>
+                <a:gd name="connsiteX10" fmla="*/ 0 w 4424680"/>
+                <a:gd name="connsiteY10" fmla="*/ 60115 h 421640"/>
+                <a:gd name="connsiteX0" fmla="*/ 0 w 4424680"/>
+                <a:gd name="connsiteY0" fmla="*/ 60115 h 377646"/>
+                <a:gd name="connsiteX1" fmla="*/ 60115 w 4424680"/>
+                <a:gd name="connsiteY1" fmla="*/ 0 h 377646"/>
+                <a:gd name="connsiteX2" fmla="*/ 350520 w 4424680"/>
+                <a:gd name="connsiteY2" fmla="*/ 0 h 377646"/>
+                <a:gd name="connsiteX3" fmla="*/ 4364565 w 4424680"/>
+                <a:gd name="connsiteY3" fmla="*/ 0 h 377646"/>
+                <a:gd name="connsiteX4" fmla="*/ 4424680 w 4424680"/>
+                <a:gd name="connsiteY4" fmla="*/ 60115 h 377646"/>
+                <a:gd name="connsiteX5" fmla="*/ 4424680 w 4424680"/>
+                <a:gd name="connsiteY5" fmla="*/ 300565 h 377646"/>
+                <a:gd name="connsiteX6" fmla="*/ 4364565 w 4424680"/>
+                <a:gd name="connsiteY6" fmla="*/ 360680 h 377646"/>
+                <a:gd name="connsiteX7" fmla="*/ 330200 w 4424680"/>
+                <a:gd name="connsiteY7" fmla="*/ 360680 h 377646"/>
+                <a:gd name="connsiteX8" fmla="*/ 60115 w 4424680"/>
+                <a:gd name="connsiteY8" fmla="*/ 360680 h 377646"/>
+                <a:gd name="connsiteX9" fmla="*/ 0 w 4424680"/>
+                <a:gd name="connsiteY9" fmla="*/ 300565 h 377646"/>
+                <a:gd name="connsiteX10" fmla="*/ 0 w 4424680"/>
+                <a:gd name="connsiteY10" fmla="*/ 60115 h 377646"/>
+              </a:gdLst>
+              <a:ahLst/>
+              <a:cxnLst>
+                <a:cxn ang="0">
+                  <a:pos x="connsiteX0" y="connsiteY0"/>
+                </a:cxn>
+                <a:cxn ang="0">
+                  <a:pos x="connsiteX1" y="connsiteY1"/>
+                </a:cxn>
+                <a:cxn ang="0">
+                  <a:pos x="connsiteX2" y="connsiteY2"/>
+                </a:cxn>
+                <a:cxn ang="0">
+                  <a:pos x="connsiteX3" y="connsiteY3"/>
+                </a:cxn>
+                <a:cxn ang="0">
+                  <a:pos x="connsiteX4" y="connsiteY4"/>
+                </a:cxn>
+                <a:cxn ang="0">
+                  <a:pos x="connsiteX5" y="connsiteY5"/>
+                </a:cxn>
+                <a:cxn ang="0">
+                  <a:pos x="connsiteX6" y="connsiteY6"/>
+                </a:cxn>
+                <a:cxn ang="0">
+                  <a:pos x="connsiteX7" y="connsiteY7"/>
+                </a:cxn>
+                <a:cxn ang="0">
+                  <a:pos x="connsiteX8" y="connsiteY8"/>
+                </a:cxn>
+                <a:cxn ang="0">
+                  <a:pos x="connsiteX9" y="connsiteY9"/>
+                </a:cxn>
+                <a:cxn ang="0">
+                  <a:pos x="connsiteX10" y="connsiteY10"/>
+                </a:cxn>
+              </a:cxnLst>
+              <a:rect l="l" t="t" r="r" b="b"/>
+              <a:pathLst>
+                <a:path w="4424680" h="377646">
+                  <a:moveTo>
+                    <a:pt x="0" y="60115"/>
+                  </a:moveTo>
+                  <a:cubicBezTo>
+                    <a:pt x="0" y="26914"/>
+                    <a:pt x="26914" y="0"/>
+                    <a:pt x="60115" y="0"/>
+                  </a:cubicBezTo>
+                  <a:cubicBezTo>
+                    <a:pt x="156917" y="0"/>
+                    <a:pt x="127388" y="56799"/>
+                    <a:pt x="350520" y="0"/>
+                  </a:cubicBezTo>
+                  <a:lnTo>
+                    <a:pt x="4364565" y="0"/>
+                  </a:lnTo>
+                  <a:cubicBezTo>
+                    <a:pt x="4397766" y="0"/>
+                    <a:pt x="4424680" y="26914"/>
+                    <a:pt x="4424680" y="60115"/>
+                  </a:cubicBezTo>
+                  <a:lnTo>
+                    <a:pt x="4424680" y="300565"/>
+                  </a:lnTo>
+                  <a:cubicBezTo>
+                    <a:pt x="4424680" y="333766"/>
+                    <a:pt x="4397766" y="360680"/>
+                    <a:pt x="4364565" y="360680"/>
+                  </a:cubicBezTo>
+                  <a:lnTo>
+                    <a:pt x="330200" y="360680"/>
+                  </a:lnTo>
+                  <a:cubicBezTo>
+                    <a:pt x="170817" y="398855"/>
+                    <a:pt x="150143" y="360680"/>
+                    <a:pt x="60115" y="360680"/>
+                  </a:cubicBezTo>
+                  <a:cubicBezTo>
+                    <a:pt x="26914" y="360680"/>
+                    <a:pt x="0" y="333766"/>
+                    <a:pt x="0" y="300565"/>
+                  </a:cubicBezTo>
+                  <a:lnTo>
+                    <a:pt x="0" y="60115"/>
+                  </a:lnTo>
+                  <a:close/>
+                </a:path>
+              </a:pathLst>
+            </a:custGeom>
+          </p:spPr>
+          <p:style>
+            <a:lnRef idx="2">
+              <a:schemeClr val="accent1">
+                <a:shade val="50000"/>
+              </a:schemeClr>
+            </a:lnRef>
+            <a:fillRef idx="1">
+              <a:schemeClr val="accent1"/>
+            </a:fillRef>
+            <a:effectRef idx="0">
+              <a:schemeClr val="accent1"/>
+            </a:effectRef>
+            <a:fontRef idx="minor">
+              <a:schemeClr val="lt1"/>
+            </a:fontRef>
+          </p:style>
+          <p:txBody>
+            <a:bodyPr rot="0" spcFirstLastPara="0" vert="horz" wrap="square" lIns="36000" tIns="0" rIns="36000" bIns="0" numCol="1" spcCol="0" rtlCol="0" fromWordArt="0" anchor="ctr" anchorCtr="0" forceAA="0" compatLnSpc="1">
+              <a:prstTxWarp prst="textNoShape">
+                <a:avLst/>
+              </a:prstTxWarp>
+              <a:noAutofit/>
+            </a:bodyPr>
+            <a:lstStyle/>
+            <a:p>
+              <a:pPr>
+                <a:spcAft>
+                  <a:spcPts val="0"/>
+                </a:spcAft>
+              </a:pPr>
+              <a:endParaRPr lang="zh-TW" sz="1200" kern="100" dirty="0">
+                <a:effectLst/>
+                <a:ea typeface="新細明體" panose="02020500000000000000" pitchFamily="18" charset="-120"/>
+                <a:cs typeface="Times New Roman" panose="02020603050405020304" pitchFamily="18" charset="0"/>
+              </a:endParaRPr>
+            </a:p>
+          </p:txBody>
+        </p:sp>
+        <p:grpSp>
+          <p:nvGrpSpPr>
+            <p:cNvPr id="136" name="群組 135">
+              <a:extLst>
+                <a:ext uri="{FF2B5EF4-FFF2-40B4-BE49-F238E27FC236}">
+                  <a16:creationId xmlns:a16="http://schemas.microsoft.com/office/drawing/2014/main" id="{6BBE4B39-0AC3-4EFF-A22F-4F6F96E0B7E6}"/>
+                </a:ext>
+              </a:extLst>
+            </p:cNvPr>
+            <p:cNvGrpSpPr/>
+            <p:nvPr/>
+          </p:nvGrpSpPr>
+          <p:grpSpPr>
+            <a:xfrm>
+              <a:off x="4674869" y="3761106"/>
+              <a:ext cx="1630687" cy="175260"/>
+              <a:chOff x="1503044" y="2736215"/>
+              <a:chExt cx="1630687" cy="175260"/>
+            </a:xfrm>
+          </p:grpSpPr>
+          <p:sp>
+            <p:nvSpPr>
+              <p:cNvPr id="137" name="手繪多邊形: 圖案 10">
+                <a:extLst>
+                  <a:ext uri="{FF2B5EF4-FFF2-40B4-BE49-F238E27FC236}">
+                    <a16:creationId xmlns:a16="http://schemas.microsoft.com/office/drawing/2014/main" id="{94D25983-3F23-4D59-B236-C42F5379605C}"/>
+                  </a:ext>
+                </a:extLst>
+              </p:cNvPr>
+              <p:cNvSpPr/>
+              <p:nvPr/>
+            </p:nvSpPr>
+            <p:spPr>
+              <a:xfrm>
+                <a:off x="1503044" y="2736215"/>
+                <a:ext cx="219078" cy="175260"/>
+              </a:xfrm>
+              <a:custGeom>
+                <a:avLst/>
+                <a:gdLst>
+                  <a:gd name="connsiteX0" fmla="*/ 84890 w 453390"/>
+                  <a:gd name="connsiteY0" fmla="*/ 0 h 263525"/>
+                  <a:gd name="connsiteX1" fmla="*/ 453390 w 453390"/>
+                  <a:gd name="connsiteY1" fmla="*/ 0 h 263525"/>
+                  <a:gd name="connsiteX2" fmla="*/ 453390 w 453390"/>
+                  <a:gd name="connsiteY2" fmla="*/ 263525 h 263525"/>
+                  <a:gd name="connsiteX3" fmla="*/ 84890 w 453390"/>
+                  <a:gd name="connsiteY3" fmla="*/ 263525 h 263525"/>
+                  <a:gd name="connsiteX4" fmla="*/ 59217 w 453390"/>
+                  <a:gd name="connsiteY4" fmla="*/ 168771 h 263525"/>
+                  <a:gd name="connsiteX5" fmla="*/ 4819 w 453390"/>
+                  <a:gd name="connsiteY5" fmla="*/ 221542 h 263525"/>
+                  <a:gd name="connsiteX6" fmla="*/ 0 w 453390"/>
+                  <a:gd name="connsiteY6" fmla="*/ 54571 h 263525"/>
+                  <a:gd name="connsiteX7" fmla="*/ 55658 w 453390"/>
+                  <a:gd name="connsiteY7" fmla="*/ 89403 h 263525"/>
+                  <a:gd name="connsiteX8" fmla="*/ 84890 w 453390"/>
+                  <a:gd name="connsiteY8" fmla="*/ 0 h 263525"/>
+                </a:gdLst>
+                <a:ahLst/>
+                <a:cxnLst>
+                  <a:cxn ang="0">
+                    <a:pos x="connsiteX0" y="connsiteY0"/>
+                  </a:cxn>
+                  <a:cxn ang="0">
+                    <a:pos x="connsiteX1" y="connsiteY1"/>
+                  </a:cxn>
+                  <a:cxn ang="0">
+                    <a:pos x="connsiteX2" y="connsiteY2"/>
+                  </a:cxn>
+                  <a:cxn ang="0">
+                    <a:pos x="connsiteX3" y="connsiteY3"/>
+                  </a:cxn>
+                  <a:cxn ang="0">
+                    <a:pos x="connsiteX4" y="connsiteY4"/>
+                  </a:cxn>
+                  <a:cxn ang="0">
+                    <a:pos x="connsiteX5" y="connsiteY5"/>
+                  </a:cxn>
+                  <a:cxn ang="0">
+                    <a:pos x="connsiteX6" y="connsiteY6"/>
+                  </a:cxn>
+                  <a:cxn ang="0">
+                    <a:pos x="connsiteX7" y="connsiteY7"/>
+                  </a:cxn>
+                  <a:cxn ang="0">
+                    <a:pos x="connsiteX8" y="connsiteY8"/>
+                  </a:cxn>
+                </a:cxnLst>
+                <a:rect l="l" t="t" r="r" b="b"/>
+                <a:pathLst>
+                  <a:path w="453390" h="263525">
+                    <a:moveTo>
+                      <a:pt x="84890" y="0"/>
+                    </a:moveTo>
+                    <a:lnTo>
+                      <a:pt x="453390" y="0"/>
+                    </a:lnTo>
+                    <a:lnTo>
+                      <a:pt x="453390" y="263525"/>
+                    </a:lnTo>
+                    <a:lnTo>
+                      <a:pt x="84890" y="263525"/>
+                    </a:lnTo>
+                    <a:cubicBezTo>
+                      <a:pt x="68745" y="263525"/>
+                      <a:pt x="59217" y="193028"/>
+                      <a:pt x="59217" y="168771"/>
+                    </a:cubicBezTo>
+                    <a:lnTo>
+                      <a:pt x="4819" y="221542"/>
+                    </a:lnTo>
+                    <a:lnTo>
+                      <a:pt x="0" y="54571"/>
+                    </a:lnTo>
+                    <a:lnTo>
+                      <a:pt x="55658" y="89403"/>
+                    </a:lnTo>
+                    <a:cubicBezTo>
+                      <a:pt x="55658" y="65146"/>
+                      <a:pt x="68745" y="0"/>
+                      <a:pt x="84890" y="0"/>
+                    </a:cubicBezTo>
+                    <a:close/>
+                  </a:path>
+                </a:pathLst>
+              </a:custGeom>
+            </p:spPr>
+            <p:style>
+              <a:lnRef idx="2">
+                <a:schemeClr val="accent5">
+                  <a:shade val="50000"/>
+                </a:schemeClr>
+              </a:lnRef>
+              <a:fillRef idx="1">
+                <a:schemeClr val="accent5"/>
+              </a:fillRef>
+              <a:effectRef idx="0">
+                <a:schemeClr val="accent5"/>
+              </a:effectRef>
+              <a:fontRef idx="minor">
+                <a:schemeClr val="lt1"/>
+              </a:fontRef>
+            </p:style>
+            <p:txBody>
+              <a:bodyPr rot="0" spcFirstLastPara="0" vert="horz" wrap="square" lIns="0" tIns="0" rIns="0" bIns="0" numCol="1" spcCol="0" rtlCol="0" fromWordArt="0" anchor="ctr" anchorCtr="0" forceAA="0" compatLnSpc="1">
+                <a:prstTxWarp prst="textNoShape">
+                  <a:avLst/>
+                </a:prstTxWarp>
+                <a:noAutofit/>
+              </a:bodyPr>
+              <a:lstStyle/>
+              <a:p>
+                <a:pPr indent="73025" algn="ctr">
+                  <a:spcAft>
+                    <a:spcPts val="0"/>
+                  </a:spcAft>
+                </a:pPr>
+                <a:r>
+                  <a:rPr lang="en-US" sz="1200" kern="100" dirty="0">
+                    <a:solidFill>
+                      <a:srgbClr val="FFFFFF"/>
+                    </a:solidFill>
+                    <a:effectLst/>
+                    <a:ea typeface="新細明體" panose="02020500000000000000" pitchFamily="18" charset="-120"/>
+                    <a:cs typeface="Times New Roman" panose="02020603050405020304" pitchFamily="18" charset="0"/>
+                  </a:rPr>
+                  <a:t>1</a:t>
+                </a:r>
+                <a:endParaRPr lang="zh-TW" sz="1200" kern="100" dirty="0">
+                  <a:effectLst/>
+                  <a:ea typeface="新細明體" panose="02020500000000000000" pitchFamily="18" charset="-120"/>
+                  <a:cs typeface="Times New Roman" panose="02020603050405020304" pitchFamily="18" charset="0"/>
+                </a:endParaRPr>
+              </a:p>
+            </p:txBody>
+          </p:sp>
+          <p:sp>
+            <p:nvSpPr>
+              <p:cNvPr id="138" name="手繪多邊形: 圖案 10">
+                <a:extLst>
+                  <a:ext uri="{FF2B5EF4-FFF2-40B4-BE49-F238E27FC236}">
+                    <a16:creationId xmlns:a16="http://schemas.microsoft.com/office/drawing/2014/main" id="{F7952758-AF57-4C50-968B-85157F7CAE98}"/>
+                  </a:ext>
+                </a:extLst>
+              </p:cNvPr>
+              <p:cNvSpPr/>
+              <p:nvPr/>
+            </p:nvSpPr>
+            <p:spPr>
+              <a:xfrm>
+                <a:off x="1784030" y="2736215"/>
+                <a:ext cx="219078" cy="175260"/>
+              </a:xfrm>
+              <a:custGeom>
+                <a:avLst/>
+                <a:gdLst>
+                  <a:gd name="connsiteX0" fmla="*/ 84890 w 453390"/>
+                  <a:gd name="connsiteY0" fmla="*/ 0 h 263525"/>
+                  <a:gd name="connsiteX1" fmla="*/ 453390 w 453390"/>
+                  <a:gd name="connsiteY1" fmla="*/ 0 h 263525"/>
+                  <a:gd name="connsiteX2" fmla="*/ 453390 w 453390"/>
+                  <a:gd name="connsiteY2" fmla="*/ 263525 h 263525"/>
+                  <a:gd name="connsiteX3" fmla="*/ 84890 w 453390"/>
+                  <a:gd name="connsiteY3" fmla="*/ 263525 h 263525"/>
+                  <a:gd name="connsiteX4" fmla="*/ 59217 w 453390"/>
+                  <a:gd name="connsiteY4" fmla="*/ 168771 h 263525"/>
+                  <a:gd name="connsiteX5" fmla="*/ 4819 w 453390"/>
+                  <a:gd name="connsiteY5" fmla="*/ 221542 h 263525"/>
+                  <a:gd name="connsiteX6" fmla="*/ 0 w 453390"/>
+                  <a:gd name="connsiteY6" fmla="*/ 54571 h 263525"/>
+                  <a:gd name="connsiteX7" fmla="*/ 55658 w 453390"/>
+                  <a:gd name="connsiteY7" fmla="*/ 89403 h 263525"/>
+                  <a:gd name="connsiteX8" fmla="*/ 84890 w 453390"/>
+                  <a:gd name="connsiteY8" fmla="*/ 0 h 263525"/>
+                </a:gdLst>
+                <a:ahLst/>
+                <a:cxnLst>
+                  <a:cxn ang="0">
+                    <a:pos x="connsiteX0" y="connsiteY0"/>
+                  </a:cxn>
+                  <a:cxn ang="0">
+                    <a:pos x="connsiteX1" y="connsiteY1"/>
+                  </a:cxn>
+                  <a:cxn ang="0">
+                    <a:pos x="connsiteX2" y="connsiteY2"/>
+                  </a:cxn>
+                  <a:cxn ang="0">
+                    <a:pos x="connsiteX3" y="connsiteY3"/>
+                  </a:cxn>
+                  <a:cxn ang="0">
+                    <a:pos x="connsiteX4" y="connsiteY4"/>
+                  </a:cxn>
+                  <a:cxn ang="0">
+                    <a:pos x="connsiteX5" y="connsiteY5"/>
+                  </a:cxn>
+                  <a:cxn ang="0">
+                    <a:pos x="connsiteX6" y="connsiteY6"/>
+                  </a:cxn>
+                  <a:cxn ang="0">
+                    <a:pos x="connsiteX7" y="connsiteY7"/>
+                  </a:cxn>
+                  <a:cxn ang="0">
+                    <a:pos x="connsiteX8" y="connsiteY8"/>
+                  </a:cxn>
+                </a:cxnLst>
+                <a:rect l="l" t="t" r="r" b="b"/>
+                <a:pathLst>
+                  <a:path w="453390" h="263525">
+                    <a:moveTo>
+                      <a:pt x="84890" y="0"/>
+                    </a:moveTo>
+                    <a:lnTo>
+                      <a:pt x="453390" y="0"/>
+                    </a:lnTo>
+                    <a:lnTo>
+                      <a:pt x="453390" y="263525"/>
+                    </a:lnTo>
+                    <a:lnTo>
+                      <a:pt x="84890" y="263525"/>
+                    </a:lnTo>
+                    <a:cubicBezTo>
+                      <a:pt x="68745" y="263525"/>
+                      <a:pt x="59217" y="193028"/>
+                      <a:pt x="59217" y="168771"/>
+                    </a:cubicBezTo>
+                    <a:lnTo>
+                      <a:pt x="4819" y="221542"/>
+                    </a:lnTo>
+                    <a:lnTo>
+                      <a:pt x="0" y="54571"/>
+                    </a:lnTo>
+                    <a:lnTo>
+                      <a:pt x="55658" y="89403"/>
+                    </a:lnTo>
+                    <a:cubicBezTo>
+                      <a:pt x="55658" y="65146"/>
+                      <a:pt x="68745" y="0"/>
+                      <a:pt x="84890" y="0"/>
+                    </a:cubicBezTo>
+                    <a:close/>
+                  </a:path>
+                </a:pathLst>
+              </a:custGeom>
+            </p:spPr>
+            <p:style>
+              <a:lnRef idx="2">
+                <a:schemeClr val="accent5">
+                  <a:shade val="50000"/>
+                </a:schemeClr>
+              </a:lnRef>
+              <a:fillRef idx="1">
+                <a:schemeClr val="accent5"/>
+              </a:fillRef>
+              <a:effectRef idx="0">
+                <a:schemeClr val="accent5"/>
+              </a:effectRef>
+              <a:fontRef idx="minor">
+                <a:schemeClr val="lt1"/>
+              </a:fontRef>
+            </p:style>
+            <p:txBody>
+              <a:bodyPr rot="0" spcFirstLastPara="0" vert="horz" wrap="square" lIns="0" tIns="0" rIns="0" bIns="0" numCol="1" spcCol="0" rtlCol="0" fromWordArt="0" anchor="ctr" anchorCtr="0" forceAA="0" compatLnSpc="1">
+                <a:prstTxWarp prst="textNoShape">
+                  <a:avLst/>
+                </a:prstTxWarp>
+                <a:noAutofit/>
+              </a:bodyPr>
+              <a:lstStyle/>
+              <a:p>
+                <a:pPr indent="73025" algn="ctr">
+                  <a:spcAft>
+                    <a:spcPts val="0"/>
+                  </a:spcAft>
+                </a:pPr>
+                <a:r>
+                  <a:rPr lang="en-US" sz="1200" kern="100" dirty="0">
+                    <a:solidFill>
+                      <a:srgbClr val="FFFFFF"/>
+                    </a:solidFill>
+                    <a:effectLst/>
+                    <a:ea typeface="新細明體" panose="02020500000000000000" pitchFamily="18" charset="-120"/>
+                    <a:cs typeface="Times New Roman" panose="02020603050405020304" pitchFamily="18" charset="0"/>
+                  </a:rPr>
+                  <a:t>1</a:t>
+                </a:r>
+                <a:endParaRPr lang="zh-TW" sz="1200" kern="100" dirty="0">
+                  <a:effectLst/>
+                  <a:ea typeface="新細明體" panose="02020500000000000000" pitchFamily="18" charset="-120"/>
+                  <a:cs typeface="Times New Roman" panose="02020603050405020304" pitchFamily="18" charset="0"/>
+                </a:endParaRPr>
+              </a:p>
+            </p:txBody>
+          </p:sp>
+          <p:sp>
+            <p:nvSpPr>
+              <p:cNvPr id="139" name="手繪多邊形: 圖案 10">
+                <a:extLst>
+                  <a:ext uri="{FF2B5EF4-FFF2-40B4-BE49-F238E27FC236}">
+                    <a16:creationId xmlns:a16="http://schemas.microsoft.com/office/drawing/2014/main" id="{4963A187-8107-4D37-9446-703079F4AB24}"/>
+                  </a:ext>
+                </a:extLst>
+              </p:cNvPr>
+              <p:cNvSpPr/>
+              <p:nvPr/>
+            </p:nvSpPr>
+            <p:spPr>
+              <a:xfrm>
+                <a:off x="2065016" y="2736215"/>
+                <a:ext cx="219078" cy="175260"/>
+              </a:xfrm>
+              <a:custGeom>
+                <a:avLst/>
+                <a:gdLst>
+                  <a:gd name="connsiteX0" fmla="*/ 84890 w 453390"/>
+                  <a:gd name="connsiteY0" fmla="*/ 0 h 263525"/>
+                  <a:gd name="connsiteX1" fmla="*/ 453390 w 453390"/>
+                  <a:gd name="connsiteY1" fmla="*/ 0 h 263525"/>
+                  <a:gd name="connsiteX2" fmla="*/ 453390 w 453390"/>
+                  <a:gd name="connsiteY2" fmla="*/ 263525 h 263525"/>
+                  <a:gd name="connsiteX3" fmla="*/ 84890 w 453390"/>
+                  <a:gd name="connsiteY3" fmla="*/ 263525 h 263525"/>
+                  <a:gd name="connsiteX4" fmla="*/ 59217 w 453390"/>
+                  <a:gd name="connsiteY4" fmla="*/ 168771 h 263525"/>
+                  <a:gd name="connsiteX5" fmla="*/ 4819 w 453390"/>
+                  <a:gd name="connsiteY5" fmla="*/ 221542 h 263525"/>
+                  <a:gd name="connsiteX6" fmla="*/ 0 w 453390"/>
+                  <a:gd name="connsiteY6" fmla="*/ 54571 h 263525"/>
+                  <a:gd name="connsiteX7" fmla="*/ 55658 w 453390"/>
+                  <a:gd name="connsiteY7" fmla="*/ 89403 h 263525"/>
+                  <a:gd name="connsiteX8" fmla="*/ 84890 w 453390"/>
+                  <a:gd name="connsiteY8" fmla="*/ 0 h 263525"/>
+                </a:gdLst>
+                <a:ahLst/>
+                <a:cxnLst>
+                  <a:cxn ang="0">
+                    <a:pos x="connsiteX0" y="connsiteY0"/>
+                  </a:cxn>
+                  <a:cxn ang="0">
+                    <a:pos x="connsiteX1" y="connsiteY1"/>
+                  </a:cxn>
+                  <a:cxn ang="0">
+                    <a:pos x="connsiteX2" y="connsiteY2"/>
+                  </a:cxn>
+                  <a:cxn ang="0">
+                    <a:pos x="connsiteX3" y="connsiteY3"/>
+                  </a:cxn>
+                  <a:cxn ang="0">
+                    <a:pos x="connsiteX4" y="connsiteY4"/>
+                  </a:cxn>
+                  <a:cxn ang="0">
+                    <a:pos x="connsiteX5" y="connsiteY5"/>
+                  </a:cxn>
+                  <a:cxn ang="0">
+                    <a:pos x="connsiteX6" y="connsiteY6"/>
+                  </a:cxn>
+                  <a:cxn ang="0">
+                    <a:pos x="connsiteX7" y="connsiteY7"/>
+                  </a:cxn>
+                  <a:cxn ang="0">
+                    <a:pos x="connsiteX8" y="connsiteY8"/>
+                  </a:cxn>
+                </a:cxnLst>
+                <a:rect l="l" t="t" r="r" b="b"/>
+                <a:pathLst>
+                  <a:path w="453390" h="263525">
+                    <a:moveTo>
+                      <a:pt x="84890" y="0"/>
+                    </a:moveTo>
+                    <a:lnTo>
+                      <a:pt x="453390" y="0"/>
+                    </a:lnTo>
+                    <a:lnTo>
+                      <a:pt x="453390" y="263525"/>
+                    </a:lnTo>
+                    <a:lnTo>
+                      <a:pt x="84890" y="263525"/>
+                    </a:lnTo>
+                    <a:cubicBezTo>
+                      <a:pt x="68745" y="263525"/>
+                      <a:pt x="59217" y="193028"/>
+                      <a:pt x="59217" y="168771"/>
+                    </a:cubicBezTo>
+                    <a:lnTo>
+                      <a:pt x="4819" y="221542"/>
+                    </a:lnTo>
+                    <a:lnTo>
+                      <a:pt x="0" y="54571"/>
+                    </a:lnTo>
+                    <a:lnTo>
+                      <a:pt x="55658" y="89403"/>
+                    </a:lnTo>
+                    <a:cubicBezTo>
+                      <a:pt x="55658" y="65146"/>
+                      <a:pt x="68745" y="0"/>
+                      <a:pt x="84890" y="0"/>
+                    </a:cubicBezTo>
+                    <a:close/>
+                  </a:path>
+                </a:pathLst>
+              </a:custGeom>
+            </p:spPr>
+            <p:style>
+              <a:lnRef idx="2">
+                <a:schemeClr val="accent5">
+                  <a:shade val="50000"/>
+                </a:schemeClr>
+              </a:lnRef>
+              <a:fillRef idx="1">
+                <a:schemeClr val="accent5"/>
+              </a:fillRef>
+              <a:effectRef idx="0">
+                <a:schemeClr val="accent5"/>
+              </a:effectRef>
+              <a:fontRef idx="minor">
+                <a:schemeClr val="lt1"/>
+              </a:fontRef>
+            </p:style>
+            <p:txBody>
+              <a:bodyPr rot="0" spcFirstLastPara="0" vert="horz" wrap="square" lIns="0" tIns="0" rIns="0" bIns="0" numCol="1" spcCol="0" rtlCol="0" fromWordArt="0" anchor="ctr" anchorCtr="0" forceAA="0" compatLnSpc="1">
+                <a:prstTxWarp prst="textNoShape">
+                  <a:avLst/>
+                </a:prstTxWarp>
+                <a:noAutofit/>
+              </a:bodyPr>
+              <a:lstStyle/>
+              <a:p>
+                <a:pPr indent="73025" algn="ctr">
+                  <a:spcAft>
+                    <a:spcPts val="0"/>
+                  </a:spcAft>
+                </a:pPr>
+                <a:r>
+                  <a:rPr lang="en-US" sz="1200" kern="100" dirty="0">
+                    <a:solidFill>
+                      <a:srgbClr val="FFFFFF"/>
+                    </a:solidFill>
+                    <a:effectLst/>
+                    <a:ea typeface="新細明體" panose="02020500000000000000" pitchFamily="18" charset="-120"/>
+                    <a:cs typeface="Times New Roman" panose="02020603050405020304" pitchFamily="18" charset="0"/>
+                  </a:rPr>
+                  <a:t>1</a:t>
+                </a:r>
+                <a:endParaRPr lang="zh-TW" sz="1200" kern="100" dirty="0">
+                  <a:effectLst/>
+                  <a:ea typeface="新細明體" panose="02020500000000000000" pitchFamily="18" charset="-120"/>
+                  <a:cs typeface="Times New Roman" panose="02020603050405020304" pitchFamily="18" charset="0"/>
+                </a:endParaRPr>
+              </a:p>
+            </p:txBody>
+          </p:sp>
+          <p:sp>
+            <p:nvSpPr>
+              <p:cNvPr id="140" name="手繪多邊形: 圖案 10">
+                <a:extLst>
+                  <a:ext uri="{FF2B5EF4-FFF2-40B4-BE49-F238E27FC236}">
+                    <a16:creationId xmlns:a16="http://schemas.microsoft.com/office/drawing/2014/main" id="{3D2D591E-3600-4784-BD4A-DBA7A07BAB9D}"/>
+                  </a:ext>
+                </a:extLst>
+              </p:cNvPr>
+              <p:cNvSpPr/>
+              <p:nvPr/>
+            </p:nvSpPr>
+            <p:spPr>
+              <a:xfrm>
+                <a:off x="2346002" y="2736215"/>
+                <a:ext cx="219078" cy="175260"/>
+              </a:xfrm>
+              <a:custGeom>
+                <a:avLst/>
+                <a:gdLst>
+                  <a:gd name="connsiteX0" fmla="*/ 84890 w 453390"/>
+                  <a:gd name="connsiteY0" fmla="*/ 0 h 263525"/>
+                  <a:gd name="connsiteX1" fmla="*/ 453390 w 453390"/>
+                  <a:gd name="connsiteY1" fmla="*/ 0 h 263525"/>
+                  <a:gd name="connsiteX2" fmla="*/ 453390 w 453390"/>
+                  <a:gd name="connsiteY2" fmla="*/ 263525 h 263525"/>
+                  <a:gd name="connsiteX3" fmla="*/ 84890 w 453390"/>
+                  <a:gd name="connsiteY3" fmla="*/ 263525 h 263525"/>
+                  <a:gd name="connsiteX4" fmla="*/ 59217 w 453390"/>
+                  <a:gd name="connsiteY4" fmla="*/ 168771 h 263525"/>
+                  <a:gd name="connsiteX5" fmla="*/ 4819 w 453390"/>
+                  <a:gd name="connsiteY5" fmla="*/ 221542 h 263525"/>
+                  <a:gd name="connsiteX6" fmla="*/ 0 w 453390"/>
+                  <a:gd name="connsiteY6" fmla="*/ 54571 h 263525"/>
+                  <a:gd name="connsiteX7" fmla="*/ 55658 w 453390"/>
+                  <a:gd name="connsiteY7" fmla="*/ 89403 h 263525"/>
+                  <a:gd name="connsiteX8" fmla="*/ 84890 w 453390"/>
+                  <a:gd name="connsiteY8" fmla="*/ 0 h 263525"/>
+                </a:gdLst>
+                <a:ahLst/>
+                <a:cxnLst>
+                  <a:cxn ang="0">
+                    <a:pos x="connsiteX0" y="connsiteY0"/>
+                  </a:cxn>
+                  <a:cxn ang="0">
+                    <a:pos x="connsiteX1" y="connsiteY1"/>
+                  </a:cxn>
+                  <a:cxn ang="0">
+                    <a:pos x="connsiteX2" y="connsiteY2"/>
+                  </a:cxn>
+                  <a:cxn ang="0">
+                    <a:pos x="connsiteX3" y="connsiteY3"/>
+                  </a:cxn>
+                  <a:cxn ang="0">
+                    <a:pos x="connsiteX4" y="connsiteY4"/>
+                  </a:cxn>
+                  <a:cxn ang="0">
+                    <a:pos x="connsiteX5" y="connsiteY5"/>
+                  </a:cxn>
+                  <a:cxn ang="0">
+                    <a:pos x="connsiteX6" y="connsiteY6"/>
+                  </a:cxn>
+                  <a:cxn ang="0">
+                    <a:pos x="connsiteX7" y="connsiteY7"/>
+                  </a:cxn>
+                  <a:cxn ang="0">
+                    <a:pos x="connsiteX8" y="connsiteY8"/>
+                  </a:cxn>
+                </a:cxnLst>
+                <a:rect l="l" t="t" r="r" b="b"/>
+                <a:pathLst>
+                  <a:path w="453390" h="263525">
+                    <a:moveTo>
+                      <a:pt x="84890" y="0"/>
+                    </a:moveTo>
+                    <a:lnTo>
+                      <a:pt x="453390" y="0"/>
+                    </a:lnTo>
+                    <a:lnTo>
+                      <a:pt x="453390" y="263525"/>
+                    </a:lnTo>
+                    <a:lnTo>
+                      <a:pt x="84890" y="263525"/>
+                    </a:lnTo>
+                    <a:cubicBezTo>
+                      <a:pt x="68745" y="263525"/>
+                      <a:pt x="59217" y="193028"/>
+                      <a:pt x="59217" y="168771"/>
+                    </a:cubicBezTo>
+                    <a:lnTo>
+                      <a:pt x="4819" y="221542"/>
+                    </a:lnTo>
+                    <a:lnTo>
+                      <a:pt x="0" y="54571"/>
+                    </a:lnTo>
+                    <a:lnTo>
+                      <a:pt x="55658" y="89403"/>
+                    </a:lnTo>
+                    <a:cubicBezTo>
+                      <a:pt x="55658" y="65146"/>
+                      <a:pt x="68745" y="0"/>
+                      <a:pt x="84890" y="0"/>
+                    </a:cubicBezTo>
+                    <a:close/>
+                  </a:path>
+                </a:pathLst>
+              </a:custGeom>
+            </p:spPr>
+            <p:style>
+              <a:lnRef idx="2">
+                <a:schemeClr val="accent5">
+                  <a:shade val="50000"/>
+                </a:schemeClr>
+              </a:lnRef>
+              <a:fillRef idx="1">
+                <a:schemeClr val="accent5"/>
+              </a:fillRef>
+              <a:effectRef idx="0">
+                <a:schemeClr val="accent5"/>
+              </a:effectRef>
+              <a:fontRef idx="minor">
+                <a:schemeClr val="lt1"/>
+              </a:fontRef>
+            </p:style>
+            <p:txBody>
+              <a:bodyPr rot="0" spcFirstLastPara="0" vert="horz" wrap="square" lIns="0" tIns="0" rIns="0" bIns="0" numCol="1" spcCol="0" rtlCol="0" fromWordArt="0" anchor="ctr" anchorCtr="0" forceAA="0" compatLnSpc="1">
+                <a:prstTxWarp prst="textNoShape">
+                  <a:avLst/>
+                </a:prstTxWarp>
+                <a:noAutofit/>
+              </a:bodyPr>
+              <a:lstStyle/>
+              <a:p>
+                <a:pPr indent="73025" algn="ctr">
+                  <a:spcAft>
+                    <a:spcPts val="0"/>
+                  </a:spcAft>
+                </a:pPr>
+                <a:r>
+                  <a:rPr lang="en-US" sz="1200" kern="100" dirty="0">
+                    <a:solidFill>
+                      <a:srgbClr val="FFFFFF"/>
+                    </a:solidFill>
+                    <a:effectLst/>
+                    <a:ea typeface="新細明體" panose="02020500000000000000" pitchFamily="18" charset="-120"/>
+                    <a:cs typeface="Times New Roman" panose="02020603050405020304" pitchFamily="18" charset="0"/>
+                  </a:rPr>
+                  <a:t>1</a:t>
+                </a:r>
+                <a:endParaRPr lang="zh-TW" sz="1200" kern="100" dirty="0">
+                  <a:effectLst/>
+                  <a:ea typeface="新細明體" panose="02020500000000000000" pitchFamily="18" charset="-120"/>
+                  <a:cs typeface="Times New Roman" panose="02020603050405020304" pitchFamily="18" charset="0"/>
+                </a:endParaRPr>
+              </a:p>
+            </p:txBody>
+          </p:sp>
+          <p:sp>
+            <p:nvSpPr>
+              <p:cNvPr id="141" name="手繪多邊形: 圖案 10">
+                <a:extLst>
+                  <a:ext uri="{FF2B5EF4-FFF2-40B4-BE49-F238E27FC236}">
+                    <a16:creationId xmlns:a16="http://schemas.microsoft.com/office/drawing/2014/main" id="{DCF20AA7-120F-4F19-9831-04A72E11E0B3}"/>
+                  </a:ext>
+                </a:extLst>
+              </p:cNvPr>
+              <p:cNvSpPr/>
+              <p:nvPr/>
+            </p:nvSpPr>
+            <p:spPr>
+              <a:xfrm>
+                <a:off x="2633667" y="2736215"/>
+                <a:ext cx="219078" cy="175260"/>
+              </a:xfrm>
+              <a:custGeom>
+                <a:avLst/>
+                <a:gdLst>
+                  <a:gd name="connsiteX0" fmla="*/ 84890 w 453390"/>
+                  <a:gd name="connsiteY0" fmla="*/ 0 h 263525"/>
+                  <a:gd name="connsiteX1" fmla="*/ 453390 w 453390"/>
+                  <a:gd name="connsiteY1" fmla="*/ 0 h 263525"/>
+                  <a:gd name="connsiteX2" fmla="*/ 453390 w 453390"/>
+                  <a:gd name="connsiteY2" fmla="*/ 263525 h 263525"/>
+                  <a:gd name="connsiteX3" fmla="*/ 84890 w 453390"/>
+                  <a:gd name="connsiteY3" fmla="*/ 263525 h 263525"/>
+                  <a:gd name="connsiteX4" fmla="*/ 59217 w 453390"/>
+                  <a:gd name="connsiteY4" fmla="*/ 168771 h 263525"/>
+                  <a:gd name="connsiteX5" fmla="*/ 4819 w 453390"/>
+                  <a:gd name="connsiteY5" fmla="*/ 221542 h 263525"/>
+                  <a:gd name="connsiteX6" fmla="*/ 0 w 453390"/>
+                  <a:gd name="connsiteY6" fmla="*/ 54571 h 263525"/>
+                  <a:gd name="connsiteX7" fmla="*/ 55658 w 453390"/>
+                  <a:gd name="connsiteY7" fmla="*/ 89403 h 263525"/>
+                  <a:gd name="connsiteX8" fmla="*/ 84890 w 453390"/>
+                  <a:gd name="connsiteY8" fmla="*/ 0 h 263525"/>
+                </a:gdLst>
+                <a:ahLst/>
+                <a:cxnLst>
+                  <a:cxn ang="0">
+                    <a:pos x="connsiteX0" y="connsiteY0"/>
+                  </a:cxn>
+                  <a:cxn ang="0">
+                    <a:pos x="connsiteX1" y="connsiteY1"/>
+                  </a:cxn>
+                  <a:cxn ang="0">
+                    <a:pos x="connsiteX2" y="connsiteY2"/>
+                  </a:cxn>
+                  <a:cxn ang="0">
+                    <a:pos x="connsiteX3" y="connsiteY3"/>
+                  </a:cxn>
+                  <a:cxn ang="0">
+                    <a:pos x="connsiteX4" y="connsiteY4"/>
+                  </a:cxn>
+                  <a:cxn ang="0">
+                    <a:pos x="connsiteX5" y="connsiteY5"/>
+                  </a:cxn>
+                  <a:cxn ang="0">
+                    <a:pos x="connsiteX6" y="connsiteY6"/>
+                  </a:cxn>
+                  <a:cxn ang="0">
+                    <a:pos x="connsiteX7" y="connsiteY7"/>
+                  </a:cxn>
+                  <a:cxn ang="0">
+                    <a:pos x="connsiteX8" y="connsiteY8"/>
+                  </a:cxn>
+                </a:cxnLst>
+                <a:rect l="l" t="t" r="r" b="b"/>
+                <a:pathLst>
+                  <a:path w="453390" h="263525">
+                    <a:moveTo>
+                      <a:pt x="84890" y="0"/>
+                    </a:moveTo>
+                    <a:lnTo>
+                      <a:pt x="453390" y="0"/>
+                    </a:lnTo>
+                    <a:lnTo>
+                      <a:pt x="453390" y="263525"/>
+                    </a:lnTo>
+                    <a:lnTo>
+                      <a:pt x="84890" y="263525"/>
+                    </a:lnTo>
+                    <a:cubicBezTo>
+                      <a:pt x="68745" y="263525"/>
+                      <a:pt x="59217" y="193028"/>
+                      <a:pt x="59217" y="168771"/>
+                    </a:cubicBezTo>
+                    <a:lnTo>
+                      <a:pt x="4819" y="221542"/>
+                    </a:lnTo>
+                    <a:lnTo>
+                      <a:pt x="0" y="54571"/>
+                    </a:lnTo>
+                    <a:lnTo>
+                      <a:pt x="55658" y="89403"/>
+                    </a:lnTo>
+                    <a:cubicBezTo>
+                      <a:pt x="55658" y="65146"/>
+                      <a:pt x="68745" y="0"/>
+                      <a:pt x="84890" y="0"/>
+                    </a:cubicBezTo>
+                    <a:close/>
+                  </a:path>
+                </a:pathLst>
+              </a:custGeom>
+            </p:spPr>
+            <p:style>
+              <a:lnRef idx="2">
+                <a:schemeClr val="accent5">
+                  <a:shade val="50000"/>
+                </a:schemeClr>
+              </a:lnRef>
+              <a:fillRef idx="1">
+                <a:schemeClr val="accent5"/>
+              </a:fillRef>
+              <a:effectRef idx="0">
+                <a:schemeClr val="accent5"/>
+              </a:effectRef>
+              <a:fontRef idx="minor">
+                <a:schemeClr val="lt1"/>
+              </a:fontRef>
+            </p:style>
+            <p:txBody>
+              <a:bodyPr rot="0" spcFirstLastPara="0" vert="horz" wrap="square" lIns="0" tIns="0" rIns="0" bIns="0" numCol="1" spcCol="0" rtlCol="0" fromWordArt="0" anchor="ctr" anchorCtr="0" forceAA="0" compatLnSpc="1">
+                <a:prstTxWarp prst="textNoShape">
+                  <a:avLst/>
+                </a:prstTxWarp>
+                <a:noAutofit/>
+              </a:bodyPr>
+              <a:lstStyle/>
+              <a:p>
+                <a:pPr indent="73025" algn="ctr">
+                  <a:spcAft>
+                    <a:spcPts val="0"/>
+                  </a:spcAft>
+                </a:pPr>
+                <a:r>
+                  <a:rPr lang="en-US" sz="1200" kern="100" dirty="0">
+                    <a:solidFill>
+                      <a:srgbClr val="FFFFFF"/>
+                    </a:solidFill>
+                    <a:effectLst/>
+                    <a:ea typeface="新細明體" panose="02020500000000000000" pitchFamily="18" charset="-120"/>
+                    <a:cs typeface="Times New Roman" panose="02020603050405020304" pitchFamily="18" charset="0"/>
+                  </a:rPr>
+                  <a:t>1</a:t>
+                </a:r>
+                <a:endParaRPr lang="zh-TW" sz="1200" kern="100" dirty="0">
+                  <a:effectLst/>
+                  <a:ea typeface="新細明體" panose="02020500000000000000" pitchFamily="18" charset="-120"/>
+                  <a:cs typeface="Times New Roman" panose="02020603050405020304" pitchFamily="18" charset="0"/>
+                </a:endParaRPr>
+              </a:p>
+            </p:txBody>
+          </p:sp>
+          <p:sp>
+            <p:nvSpPr>
+              <p:cNvPr id="142" name="手繪多邊形: 圖案 10">
+                <a:extLst>
+                  <a:ext uri="{FF2B5EF4-FFF2-40B4-BE49-F238E27FC236}">
+                    <a16:creationId xmlns:a16="http://schemas.microsoft.com/office/drawing/2014/main" id="{EB9C056C-B7C7-4E23-A71D-EC51F4578A47}"/>
+                  </a:ext>
+                </a:extLst>
+              </p:cNvPr>
+              <p:cNvSpPr/>
+              <p:nvPr/>
+            </p:nvSpPr>
+            <p:spPr>
+              <a:xfrm>
+                <a:off x="2914653" y="2736215"/>
+                <a:ext cx="219078" cy="175260"/>
+              </a:xfrm>
+              <a:custGeom>
+                <a:avLst/>
+                <a:gdLst>
+                  <a:gd name="connsiteX0" fmla="*/ 84890 w 453390"/>
+                  <a:gd name="connsiteY0" fmla="*/ 0 h 263525"/>
+                  <a:gd name="connsiteX1" fmla="*/ 453390 w 453390"/>
+                  <a:gd name="connsiteY1" fmla="*/ 0 h 263525"/>
+                  <a:gd name="connsiteX2" fmla="*/ 453390 w 453390"/>
+                  <a:gd name="connsiteY2" fmla="*/ 263525 h 263525"/>
+                  <a:gd name="connsiteX3" fmla="*/ 84890 w 453390"/>
+                  <a:gd name="connsiteY3" fmla="*/ 263525 h 263525"/>
+                  <a:gd name="connsiteX4" fmla="*/ 59217 w 453390"/>
+                  <a:gd name="connsiteY4" fmla="*/ 168771 h 263525"/>
+                  <a:gd name="connsiteX5" fmla="*/ 4819 w 453390"/>
+                  <a:gd name="connsiteY5" fmla="*/ 221542 h 263525"/>
+                  <a:gd name="connsiteX6" fmla="*/ 0 w 453390"/>
+                  <a:gd name="connsiteY6" fmla="*/ 54571 h 263525"/>
+                  <a:gd name="connsiteX7" fmla="*/ 55658 w 453390"/>
+                  <a:gd name="connsiteY7" fmla="*/ 89403 h 263525"/>
+                  <a:gd name="connsiteX8" fmla="*/ 84890 w 453390"/>
+                  <a:gd name="connsiteY8" fmla="*/ 0 h 263525"/>
+                </a:gdLst>
+                <a:ahLst/>
+                <a:cxnLst>
+                  <a:cxn ang="0">
+                    <a:pos x="connsiteX0" y="connsiteY0"/>
+                  </a:cxn>
+                  <a:cxn ang="0">
+                    <a:pos x="connsiteX1" y="connsiteY1"/>
+                  </a:cxn>
+                  <a:cxn ang="0">
+                    <a:pos x="connsiteX2" y="connsiteY2"/>
+                  </a:cxn>
+                  <a:cxn ang="0">
+                    <a:pos x="connsiteX3" y="connsiteY3"/>
+                  </a:cxn>
+                  <a:cxn ang="0">
+                    <a:pos x="connsiteX4" y="connsiteY4"/>
+                  </a:cxn>
+                  <a:cxn ang="0">
+                    <a:pos x="connsiteX5" y="connsiteY5"/>
+                  </a:cxn>
+                  <a:cxn ang="0">
+                    <a:pos x="connsiteX6" y="connsiteY6"/>
+                  </a:cxn>
+                  <a:cxn ang="0">
+                    <a:pos x="connsiteX7" y="connsiteY7"/>
+                  </a:cxn>
+                  <a:cxn ang="0">
+                    <a:pos x="connsiteX8" y="connsiteY8"/>
+                  </a:cxn>
+                </a:cxnLst>
+                <a:rect l="l" t="t" r="r" b="b"/>
+                <a:pathLst>
+                  <a:path w="453390" h="263525">
+                    <a:moveTo>
+                      <a:pt x="84890" y="0"/>
+                    </a:moveTo>
+                    <a:lnTo>
+                      <a:pt x="453390" y="0"/>
+                    </a:lnTo>
+                    <a:lnTo>
+                      <a:pt x="453390" y="263525"/>
+                    </a:lnTo>
+                    <a:lnTo>
+                      <a:pt x="84890" y="263525"/>
+                    </a:lnTo>
+                    <a:cubicBezTo>
+                      <a:pt x="68745" y="263525"/>
+                      <a:pt x="59217" y="193028"/>
+                      <a:pt x="59217" y="168771"/>
+                    </a:cubicBezTo>
+                    <a:lnTo>
+                      <a:pt x="4819" y="221542"/>
+                    </a:lnTo>
+                    <a:lnTo>
+                      <a:pt x="0" y="54571"/>
+                    </a:lnTo>
+                    <a:lnTo>
+                      <a:pt x="55658" y="89403"/>
+                    </a:lnTo>
+                    <a:cubicBezTo>
+                      <a:pt x="55658" y="65146"/>
+                      <a:pt x="68745" y="0"/>
+                      <a:pt x="84890" y="0"/>
+                    </a:cubicBezTo>
+                    <a:close/>
+                  </a:path>
+                </a:pathLst>
+              </a:custGeom>
+            </p:spPr>
+            <p:style>
+              <a:lnRef idx="2">
+                <a:schemeClr val="accent5">
+                  <a:shade val="50000"/>
+                </a:schemeClr>
+              </a:lnRef>
+              <a:fillRef idx="1">
+                <a:schemeClr val="accent5"/>
+              </a:fillRef>
+              <a:effectRef idx="0">
+                <a:schemeClr val="accent5"/>
+              </a:effectRef>
+              <a:fontRef idx="minor">
+                <a:schemeClr val="lt1"/>
+              </a:fontRef>
+            </p:style>
+            <p:txBody>
+              <a:bodyPr rot="0" spcFirstLastPara="0" vert="horz" wrap="square" lIns="0" tIns="0" rIns="0" bIns="0" numCol="1" spcCol="0" rtlCol="0" fromWordArt="0" anchor="ctr" anchorCtr="0" forceAA="0" compatLnSpc="1">
+                <a:prstTxWarp prst="textNoShape">
+                  <a:avLst/>
+                </a:prstTxWarp>
+                <a:noAutofit/>
+              </a:bodyPr>
+              <a:lstStyle/>
+              <a:p>
+                <a:pPr indent="73025" algn="ctr">
+                  <a:spcAft>
+                    <a:spcPts val="0"/>
+                  </a:spcAft>
+                </a:pPr>
+                <a:r>
+                  <a:rPr lang="en-US" sz="1200" kern="100" dirty="0">
+                    <a:solidFill>
+                      <a:srgbClr val="FFFFFF"/>
+                    </a:solidFill>
+                    <a:effectLst/>
+                    <a:ea typeface="新細明體" panose="02020500000000000000" pitchFamily="18" charset="-120"/>
+                    <a:cs typeface="Times New Roman" panose="02020603050405020304" pitchFamily="18" charset="0"/>
+                  </a:rPr>
+                  <a:t>1</a:t>
+                </a:r>
+                <a:endParaRPr lang="zh-TW" sz="1200" kern="100" dirty="0">
+                  <a:effectLst/>
+                  <a:ea typeface="新細明體" panose="02020500000000000000" pitchFamily="18" charset="-120"/>
+                  <a:cs typeface="Times New Roman" panose="02020603050405020304" pitchFamily="18" charset="0"/>
+                </a:endParaRPr>
+              </a:p>
+            </p:txBody>
+          </p:sp>
+        </p:grpSp>
       </p:grpSp>
     </p:spTree>
     <p:extLst>
@@ -13838,7 +15176,7 @@
         </p:nvSpPr>
         <p:spPr>
           <a:xfrm>
-            <a:off x="6096000" y="1036066"/>
+            <a:off x="6406896" y="462534"/>
             <a:ext cx="1888939" cy="1696974"/>
           </a:xfrm>
           <a:custGeom>
@@ -14522,5571 +15860,600 @@
           </a:p>
         </p:txBody>
       </p:sp>
-      <p:grpSp>
-        <p:nvGrpSpPr>
-          <p:cNvPr id="3" name="群組 2">
+      <p:sp>
+        <p:nvSpPr>
+          <p:cNvPr id="51" name="手繪多邊形: 圖案 50">
             <a:extLst>
               <a:ext uri="{FF2B5EF4-FFF2-40B4-BE49-F238E27FC236}">
-                <a16:creationId xmlns:a16="http://schemas.microsoft.com/office/drawing/2014/main" id="{6B4FC413-B9ED-4482-96AB-23A8233D89B1}"/>
+                <a16:creationId xmlns:a16="http://schemas.microsoft.com/office/drawing/2014/main" id="{9531CC4A-15BD-4F34-9B5D-92773EB9975B}"/>
               </a:ext>
             </a:extLst>
           </p:cNvPr>
-          <p:cNvGrpSpPr/>
+          <p:cNvSpPr/>
           <p:nvPr/>
-        </p:nvGrpSpPr>
-        <p:grpSpPr>
+        </p:nvSpPr>
+        <p:spPr>
           <a:xfrm>
-            <a:off x="1281587" y="2639695"/>
-            <a:ext cx="2078228" cy="1380910"/>
-            <a:chOff x="1281587" y="2639695"/>
-            <a:chExt cx="2078228" cy="1380910"/>
+            <a:off x="2633091" y="1950592"/>
+            <a:ext cx="2454312" cy="1326007"/>
           </a:xfrm>
-        </p:grpSpPr>
-        <p:sp>
-          <p:nvSpPr>
-            <p:cNvPr id="15" name="圓角矩形 4">
-              <a:extLst>
-                <a:ext uri="{FF2B5EF4-FFF2-40B4-BE49-F238E27FC236}">
-                  <a16:creationId xmlns:a16="http://schemas.microsoft.com/office/drawing/2014/main" id="{D33D39FB-6B6B-486D-A3E6-0993B69B93CF}"/>
-                </a:ext>
-              </a:extLst>
-            </p:cNvPr>
-            <p:cNvSpPr/>
-            <p:nvPr/>
-          </p:nvSpPr>
-          <p:spPr>
-            <a:xfrm>
-              <a:off x="1281587" y="2639695"/>
-              <a:ext cx="2078228" cy="1380910"/>
-            </a:xfrm>
-            <a:custGeom>
+          <a:custGeom>
+            <a:avLst/>
+            <a:gdLst>
+              <a:gd name="connsiteX0" fmla="*/ 208364 w 2454312"/>
+              <a:gd name="connsiteY0" fmla="*/ 1321660 h 1326007"/>
+              <a:gd name="connsiteX1" fmla="*/ 211775 w 2454312"/>
+              <a:gd name="connsiteY1" fmla="*/ 1322514 h 1326007"/>
+              <a:gd name="connsiteX2" fmla="*/ 206180 w 2454312"/>
+              <a:gd name="connsiteY2" fmla="*/ 1325972 h 1326007"/>
+              <a:gd name="connsiteX3" fmla="*/ 48232 w 2454312"/>
+              <a:gd name="connsiteY3" fmla="*/ 0 h 1326007"/>
+              <a:gd name="connsiteX4" fmla="*/ 207047 w 2454312"/>
+              <a:gd name="connsiteY4" fmla="*/ 0 h 1326007"/>
+              <a:gd name="connsiteX5" fmla="*/ 2402217 w 2454312"/>
+              <a:gd name="connsiteY5" fmla="*/ 0 h 1326007"/>
+              <a:gd name="connsiteX6" fmla="*/ 2435093 w 2454312"/>
+              <a:gd name="connsiteY6" fmla="*/ 30334 h 1326007"/>
+              <a:gd name="connsiteX7" fmla="*/ 2435093 w 2454312"/>
+              <a:gd name="connsiteY7" fmla="*/ 151664 h 1326007"/>
+              <a:gd name="connsiteX8" fmla="*/ 2437912 w 2454312"/>
+              <a:gd name="connsiteY8" fmla="*/ 264216 h 1326007"/>
+              <a:gd name="connsiteX9" fmla="*/ 2439075 w 2454312"/>
+              <a:gd name="connsiteY9" fmla="*/ 310516 h 1326007"/>
+              <a:gd name="connsiteX10" fmla="*/ 1036745 w 2454312"/>
+              <a:gd name="connsiteY10" fmla="*/ 310516 h 1326007"/>
+              <a:gd name="connsiteX11" fmla="*/ 900345 w 2454312"/>
+              <a:gd name="connsiteY11" fmla="*/ 310516 h 1326007"/>
+              <a:gd name="connsiteX12" fmla="*/ 872109 w 2454312"/>
+              <a:gd name="connsiteY12" fmla="*/ 353176 h 1326007"/>
+              <a:gd name="connsiteX13" fmla="*/ 872109 w 2454312"/>
+              <a:gd name="connsiteY13" fmla="*/ 523809 h 1326007"/>
+              <a:gd name="connsiteX14" fmla="*/ 900345 w 2454312"/>
+              <a:gd name="connsiteY14" fmla="*/ 566469 h 1326007"/>
+              <a:gd name="connsiteX15" fmla="*/ 1027201 w 2454312"/>
+              <a:gd name="connsiteY15" fmla="*/ 566469 h 1326007"/>
+              <a:gd name="connsiteX16" fmla="*/ 2445134 w 2454312"/>
+              <a:gd name="connsiteY16" fmla="*/ 566469 h 1326007"/>
+              <a:gd name="connsiteX17" fmla="*/ 2446187 w 2454312"/>
+              <a:gd name="connsiteY17" fmla="*/ 615316 h 1326007"/>
+              <a:gd name="connsiteX18" fmla="*/ 1036745 w 2454312"/>
+              <a:gd name="connsiteY18" fmla="*/ 615316 h 1326007"/>
+              <a:gd name="connsiteX19" fmla="*/ 900345 w 2454312"/>
+              <a:gd name="connsiteY19" fmla="*/ 615316 h 1326007"/>
+              <a:gd name="connsiteX20" fmla="*/ 872109 w 2454312"/>
+              <a:gd name="connsiteY20" fmla="*/ 657976 h 1326007"/>
+              <a:gd name="connsiteX21" fmla="*/ 872109 w 2454312"/>
+              <a:gd name="connsiteY21" fmla="*/ 828609 h 1326007"/>
+              <a:gd name="connsiteX22" fmla="*/ 900345 w 2454312"/>
+              <a:gd name="connsiteY22" fmla="*/ 871269 h 1326007"/>
+              <a:gd name="connsiteX23" fmla="*/ 1027201 w 2454312"/>
+              <a:gd name="connsiteY23" fmla="*/ 871269 h 1326007"/>
+              <a:gd name="connsiteX24" fmla="*/ 2451155 w 2454312"/>
+              <a:gd name="connsiteY24" fmla="*/ 871269 h 1326007"/>
+              <a:gd name="connsiteX25" fmla="*/ 2451915 w 2454312"/>
+              <a:gd name="connsiteY25" fmla="*/ 914528 h 1326007"/>
+              <a:gd name="connsiteX26" fmla="*/ 1036745 w 2454312"/>
+              <a:gd name="connsiteY26" fmla="*/ 914528 h 1326007"/>
+              <a:gd name="connsiteX27" fmla="*/ 900345 w 2454312"/>
+              <a:gd name="connsiteY27" fmla="*/ 914528 h 1326007"/>
+              <a:gd name="connsiteX28" fmla="*/ 872109 w 2454312"/>
+              <a:gd name="connsiteY28" fmla="*/ 957188 h 1326007"/>
+              <a:gd name="connsiteX29" fmla="*/ 872109 w 2454312"/>
+              <a:gd name="connsiteY29" fmla="*/ 1127821 h 1326007"/>
+              <a:gd name="connsiteX30" fmla="*/ 900345 w 2454312"/>
+              <a:gd name="connsiteY30" fmla="*/ 1170481 h 1326007"/>
+              <a:gd name="connsiteX31" fmla="*/ 1027201 w 2454312"/>
+              <a:gd name="connsiteY31" fmla="*/ 1170481 h 1326007"/>
+              <a:gd name="connsiteX32" fmla="*/ 2454312 w 2454312"/>
+              <a:gd name="connsiteY32" fmla="*/ 1170481 h 1326007"/>
+              <a:gd name="connsiteX33" fmla="*/ 2454258 w 2454312"/>
+              <a:gd name="connsiteY33" fmla="*/ 1198971 h 1326007"/>
+              <a:gd name="connsiteX34" fmla="*/ 2448778 w 2454312"/>
+              <a:gd name="connsiteY34" fmla="*/ 1303867 h 1326007"/>
+              <a:gd name="connsiteX35" fmla="*/ 257960 w 2454312"/>
+              <a:gd name="connsiteY35" fmla="*/ 1281453 h 1326007"/>
+              <a:gd name="connsiteX36" fmla="*/ 211003 w 2454312"/>
+              <a:gd name="connsiteY36" fmla="*/ 1316453 h 1326007"/>
+              <a:gd name="connsiteX37" fmla="*/ 208364 w 2454312"/>
+              <a:gd name="connsiteY37" fmla="*/ 1321660 h 1326007"/>
+              <a:gd name="connsiteX38" fmla="*/ 196071 w 2454312"/>
+              <a:gd name="connsiteY38" fmla="*/ 1318583 h 1326007"/>
+              <a:gd name="connsiteX39" fmla="*/ 157111 w 2454312"/>
+              <a:gd name="connsiteY39" fmla="*/ 1256881 h 1326007"/>
+              <a:gd name="connsiteX40" fmla="*/ 0 w 2454312"/>
+              <a:gd name="connsiteY40" fmla="*/ 1284415 h 1326007"/>
+              <a:gd name="connsiteX41" fmla="*/ 15357 w 2454312"/>
+              <a:gd name="connsiteY41" fmla="*/ 30334 h 1326007"/>
+              <a:gd name="connsiteX42" fmla="*/ 48232 w 2454312"/>
+              <a:gd name="connsiteY42" fmla="*/ 0 h 1326007"/>
+            </a:gdLst>
+            <a:ahLst/>
+            <a:cxnLst>
+              <a:cxn ang="0">
+                <a:pos x="connsiteX0" y="connsiteY0"/>
+              </a:cxn>
+              <a:cxn ang="0">
+                <a:pos x="connsiteX1" y="connsiteY1"/>
+              </a:cxn>
+              <a:cxn ang="0">
+                <a:pos x="connsiteX2" y="connsiteY2"/>
+              </a:cxn>
+              <a:cxn ang="0">
+                <a:pos x="connsiteX3" y="connsiteY3"/>
+              </a:cxn>
+              <a:cxn ang="0">
+                <a:pos x="connsiteX4" y="connsiteY4"/>
+              </a:cxn>
+              <a:cxn ang="0">
+                <a:pos x="connsiteX5" y="connsiteY5"/>
+              </a:cxn>
+              <a:cxn ang="0">
+                <a:pos x="connsiteX6" y="connsiteY6"/>
+              </a:cxn>
+              <a:cxn ang="0">
+                <a:pos x="connsiteX7" y="connsiteY7"/>
+              </a:cxn>
+              <a:cxn ang="0">
+                <a:pos x="connsiteX8" y="connsiteY8"/>
+              </a:cxn>
+              <a:cxn ang="0">
+                <a:pos x="connsiteX9" y="connsiteY9"/>
+              </a:cxn>
+              <a:cxn ang="0">
+                <a:pos x="connsiteX10" y="connsiteY10"/>
+              </a:cxn>
+              <a:cxn ang="0">
+                <a:pos x="connsiteX11" y="connsiteY11"/>
+              </a:cxn>
+              <a:cxn ang="0">
+                <a:pos x="connsiteX12" y="connsiteY12"/>
+              </a:cxn>
+              <a:cxn ang="0">
+                <a:pos x="connsiteX13" y="connsiteY13"/>
+              </a:cxn>
+              <a:cxn ang="0">
+                <a:pos x="connsiteX14" y="connsiteY14"/>
+              </a:cxn>
+              <a:cxn ang="0">
+                <a:pos x="connsiteX15" y="connsiteY15"/>
+              </a:cxn>
+              <a:cxn ang="0">
+                <a:pos x="connsiteX16" y="connsiteY16"/>
+              </a:cxn>
+              <a:cxn ang="0">
+                <a:pos x="connsiteX17" y="connsiteY17"/>
+              </a:cxn>
+              <a:cxn ang="0">
+                <a:pos x="connsiteX18" y="connsiteY18"/>
+              </a:cxn>
+              <a:cxn ang="0">
+                <a:pos x="connsiteX19" y="connsiteY19"/>
+              </a:cxn>
+              <a:cxn ang="0">
+                <a:pos x="connsiteX20" y="connsiteY20"/>
+              </a:cxn>
+              <a:cxn ang="0">
+                <a:pos x="connsiteX21" y="connsiteY21"/>
+              </a:cxn>
+              <a:cxn ang="0">
+                <a:pos x="connsiteX22" y="connsiteY22"/>
+              </a:cxn>
+              <a:cxn ang="0">
+                <a:pos x="connsiteX23" y="connsiteY23"/>
+              </a:cxn>
+              <a:cxn ang="0">
+                <a:pos x="connsiteX24" y="connsiteY24"/>
+              </a:cxn>
+              <a:cxn ang="0">
+                <a:pos x="connsiteX25" y="connsiteY25"/>
+              </a:cxn>
+              <a:cxn ang="0">
+                <a:pos x="connsiteX26" y="connsiteY26"/>
+              </a:cxn>
+              <a:cxn ang="0">
+                <a:pos x="connsiteX27" y="connsiteY27"/>
+              </a:cxn>
+              <a:cxn ang="0">
+                <a:pos x="connsiteX28" y="connsiteY28"/>
+              </a:cxn>
+              <a:cxn ang="0">
+                <a:pos x="connsiteX29" y="connsiteY29"/>
+              </a:cxn>
+              <a:cxn ang="0">
+                <a:pos x="connsiteX30" y="connsiteY30"/>
+              </a:cxn>
+              <a:cxn ang="0">
+                <a:pos x="connsiteX31" y="connsiteY31"/>
+              </a:cxn>
+              <a:cxn ang="0">
+                <a:pos x="connsiteX32" y="connsiteY32"/>
+              </a:cxn>
+              <a:cxn ang="0">
+                <a:pos x="connsiteX33" y="connsiteY33"/>
+              </a:cxn>
+              <a:cxn ang="0">
+                <a:pos x="connsiteX34" y="connsiteY34"/>
+              </a:cxn>
+              <a:cxn ang="0">
+                <a:pos x="connsiteX35" y="connsiteY35"/>
+              </a:cxn>
+              <a:cxn ang="0">
+                <a:pos x="connsiteX36" y="connsiteY36"/>
+              </a:cxn>
+              <a:cxn ang="0">
+                <a:pos x="connsiteX37" y="connsiteY37"/>
+              </a:cxn>
+              <a:cxn ang="0">
+                <a:pos x="connsiteX38" y="connsiteY38"/>
+              </a:cxn>
+              <a:cxn ang="0">
+                <a:pos x="connsiteX39" y="connsiteY39"/>
+              </a:cxn>
+              <a:cxn ang="0">
+                <a:pos x="connsiteX40" y="connsiteY40"/>
+              </a:cxn>
+              <a:cxn ang="0">
+                <a:pos x="connsiteX41" y="connsiteY41"/>
+              </a:cxn>
+              <a:cxn ang="0">
+                <a:pos x="connsiteX42" y="connsiteY42"/>
+              </a:cxn>
+            </a:cxnLst>
+            <a:rect l="l" t="t" r="r" b="b"/>
+            <a:pathLst>
+              <a:path w="2454312" h="1326007">
+                <a:moveTo>
+                  <a:pt x="208364" y="1321660"/>
+                </a:moveTo>
+                <a:lnTo>
+                  <a:pt x="211775" y="1322514"/>
+                </a:lnTo>
+                <a:cubicBezTo>
+                  <a:pt x="211697" y="1324440"/>
+                  <a:pt x="208070" y="1326287"/>
+                  <a:pt x="206180" y="1325972"/>
+                </a:cubicBezTo>
+                <a:close/>
+                <a:moveTo>
+                  <a:pt x="48232" y="0"/>
+                </a:moveTo>
+                <a:cubicBezTo>
+                  <a:pt x="101170" y="0"/>
+                  <a:pt x="129105" y="61520"/>
+                  <a:pt x="207047" y="0"/>
+                </a:cubicBezTo>
+                <a:lnTo>
+                  <a:pt x="2402217" y="0"/>
+                </a:lnTo>
+                <a:cubicBezTo>
+                  <a:pt x="2420374" y="0"/>
+                  <a:pt x="2435093" y="13581"/>
+                  <a:pt x="2435093" y="30334"/>
+                </a:cubicBezTo>
+                <a:lnTo>
+                  <a:pt x="2435093" y="151664"/>
+                </a:lnTo>
+                <a:cubicBezTo>
+                  <a:pt x="2435093" y="154805"/>
+                  <a:pt x="2436212" y="197275"/>
+                  <a:pt x="2437912" y="264216"/>
+                </a:cubicBezTo>
+                <a:lnTo>
+                  <a:pt x="2439075" y="310516"/>
+                </a:lnTo>
+                <a:lnTo>
+                  <a:pt x="1036745" y="310516"/>
+                </a:lnTo>
+                <a:cubicBezTo>
+                  <a:pt x="969804" y="397035"/>
+                  <a:pt x="945811" y="310516"/>
+                  <a:pt x="900345" y="310516"/>
+                </a:cubicBezTo>
+                <a:cubicBezTo>
+                  <a:pt x="884750" y="310516"/>
+                  <a:pt x="872109" y="329615"/>
+                  <a:pt x="872109" y="353176"/>
+                </a:cubicBezTo>
+                <a:lnTo>
+                  <a:pt x="872109" y="523809"/>
+                </a:lnTo>
+                <a:cubicBezTo>
+                  <a:pt x="872109" y="547369"/>
+                  <a:pt x="884750" y="566469"/>
+                  <a:pt x="900345" y="566469"/>
+                </a:cubicBezTo>
+                <a:cubicBezTo>
+                  <a:pt x="942630" y="566469"/>
+                  <a:pt x="937195" y="663803"/>
+                  <a:pt x="1027201" y="566469"/>
+                </a:cubicBezTo>
+                <a:lnTo>
+                  <a:pt x="2445134" y="566469"/>
+                </a:lnTo>
+                <a:lnTo>
+                  <a:pt x="2446187" y="615316"/>
+                </a:lnTo>
+                <a:lnTo>
+                  <a:pt x="1036745" y="615316"/>
+                </a:lnTo>
+                <a:cubicBezTo>
+                  <a:pt x="969804" y="701835"/>
+                  <a:pt x="945811" y="615316"/>
+                  <a:pt x="900345" y="615316"/>
+                </a:cubicBezTo>
+                <a:cubicBezTo>
+                  <a:pt x="884750" y="615316"/>
+                  <a:pt x="872109" y="634415"/>
+                  <a:pt x="872109" y="657976"/>
+                </a:cubicBezTo>
+                <a:lnTo>
+                  <a:pt x="872109" y="828609"/>
+                </a:lnTo>
+                <a:cubicBezTo>
+                  <a:pt x="872109" y="852169"/>
+                  <a:pt x="884750" y="871269"/>
+                  <a:pt x="900345" y="871269"/>
+                </a:cubicBezTo>
+                <a:cubicBezTo>
+                  <a:pt x="942630" y="871269"/>
+                  <a:pt x="937195" y="968603"/>
+                  <a:pt x="1027201" y="871269"/>
+                </a:cubicBezTo>
+                <a:lnTo>
+                  <a:pt x="2451155" y="871269"/>
+                </a:lnTo>
+                <a:lnTo>
+                  <a:pt x="2451915" y="914528"/>
+                </a:lnTo>
+                <a:lnTo>
+                  <a:pt x="1036745" y="914528"/>
+                </a:lnTo>
+                <a:cubicBezTo>
+                  <a:pt x="969804" y="1001047"/>
+                  <a:pt x="945811" y="914528"/>
+                  <a:pt x="900345" y="914528"/>
+                </a:cubicBezTo>
+                <a:cubicBezTo>
+                  <a:pt x="884750" y="914528"/>
+                  <a:pt x="872109" y="933627"/>
+                  <a:pt x="872109" y="957188"/>
+                </a:cubicBezTo>
+                <a:lnTo>
+                  <a:pt x="872109" y="1127821"/>
+                </a:lnTo>
+                <a:cubicBezTo>
+                  <a:pt x="872109" y="1151381"/>
+                  <a:pt x="884750" y="1170481"/>
+                  <a:pt x="900345" y="1170481"/>
+                </a:cubicBezTo>
+                <a:cubicBezTo>
+                  <a:pt x="942630" y="1170481"/>
+                  <a:pt x="937195" y="1267815"/>
+                  <a:pt x="1027201" y="1170481"/>
+                </a:cubicBezTo>
+                <a:lnTo>
+                  <a:pt x="2454312" y="1170481"/>
+                </a:lnTo>
+                <a:lnTo>
+                  <a:pt x="2454258" y="1198971"/>
+                </a:lnTo>
+                <a:cubicBezTo>
+                  <a:pt x="2453829" y="1263949"/>
+                  <a:pt x="2452183" y="1303867"/>
+                  <a:pt x="2448778" y="1303867"/>
+                </a:cubicBezTo>
+                <a:lnTo>
+                  <a:pt x="257960" y="1281453"/>
+                </a:lnTo>
+                <a:cubicBezTo>
+                  <a:pt x="231761" y="1298755"/>
+                  <a:pt x="217871" y="1309727"/>
+                  <a:pt x="211003" y="1316453"/>
+                </a:cubicBezTo>
+                <a:lnTo>
+                  <a:pt x="208364" y="1321660"/>
+                </a:lnTo>
+                <a:lnTo>
+                  <a:pt x="196071" y="1318583"/>
+                </a:lnTo>
+                <a:cubicBezTo>
+                  <a:pt x="160418" y="1334534"/>
+                  <a:pt x="180367" y="1260907"/>
+                  <a:pt x="157111" y="1256881"/>
+                </a:cubicBezTo>
+                <a:cubicBezTo>
+                  <a:pt x="133855" y="1252856"/>
+                  <a:pt x="181919" y="1277468"/>
+                  <a:pt x="0" y="1284415"/>
+                </a:cubicBezTo>
+                <a:lnTo>
+                  <a:pt x="15357" y="30334"/>
+                </a:lnTo>
+                <a:cubicBezTo>
+                  <a:pt x="15357" y="13581"/>
+                  <a:pt x="30075" y="0"/>
+                  <a:pt x="48232" y="0"/>
+                </a:cubicBezTo>
+                <a:close/>
+              </a:path>
+            </a:pathLst>
+          </a:custGeom>
+        </p:spPr>
+        <p:style>
+          <a:lnRef idx="2">
+            <a:schemeClr val="accent1">
+              <a:shade val="50000"/>
+            </a:schemeClr>
+          </a:lnRef>
+          <a:fillRef idx="1">
+            <a:schemeClr val="accent1"/>
+          </a:fillRef>
+          <a:effectRef idx="0">
+            <a:schemeClr val="accent1"/>
+          </a:effectRef>
+          <a:fontRef idx="minor">
+            <a:schemeClr val="lt1"/>
+          </a:fontRef>
+        </p:style>
+        <p:txBody>
+          <a:bodyPr rot="0" spcFirstLastPara="0" vert="horz" wrap="square" lIns="91440" tIns="45720" rIns="91440" bIns="45720" numCol="1" spcCol="0" rtlCol="0" fromWordArt="0" anchor="t" anchorCtr="0" forceAA="0" compatLnSpc="1">
+            <a:prstTxWarp prst="textNoShape">
               <a:avLst/>
-              <a:gdLst>
-                <a:gd name="connsiteX0" fmla="*/ 0 w 4424680"/>
-                <a:gd name="connsiteY0" fmla="*/ 60115 h 360680"/>
-                <a:gd name="connsiteX1" fmla="*/ 60115 w 4424680"/>
-                <a:gd name="connsiteY1" fmla="*/ 0 h 360680"/>
-                <a:gd name="connsiteX2" fmla="*/ 4364565 w 4424680"/>
-                <a:gd name="connsiteY2" fmla="*/ 0 h 360680"/>
-                <a:gd name="connsiteX3" fmla="*/ 4424680 w 4424680"/>
-                <a:gd name="connsiteY3" fmla="*/ 60115 h 360680"/>
-                <a:gd name="connsiteX4" fmla="*/ 4424680 w 4424680"/>
-                <a:gd name="connsiteY4" fmla="*/ 300565 h 360680"/>
-                <a:gd name="connsiteX5" fmla="*/ 4364565 w 4424680"/>
-                <a:gd name="connsiteY5" fmla="*/ 360680 h 360680"/>
-                <a:gd name="connsiteX6" fmla="*/ 60115 w 4424680"/>
-                <a:gd name="connsiteY6" fmla="*/ 360680 h 360680"/>
-                <a:gd name="connsiteX7" fmla="*/ 0 w 4424680"/>
-                <a:gd name="connsiteY7" fmla="*/ 300565 h 360680"/>
-                <a:gd name="connsiteX8" fmla="*/ 0 w 4424680"/>
-                <a:gd name="connsiteY8" fmla="*/ 60115 h 360680"/>
-                <a:gd name="connsiteX0" fmla="*/ 0 w 4424680"/>
-                <a:gd name="connsiteY0" fmla="*/ 60115 h 360680"/>
-                <a:gd name="connsiteX1" fmla="*/ 60115 w 4424680"/>
-                <a:gd name="connsiteY1" fmla="*/ 0 h 360680"/>
-                <a:gd name="connsiteX2" fmla="*/ 279400 w 4424680"/>
-                <a:gd name="connsiteY2" fmla="*/ 0 h 360680"/>
-                <a:gd name="connsiteX3" fmla="*/ 4364565 w 4424680"/>
-                <a:gd name="connsiteY3" fmla="*/ 0 h 360680"/>
-                <a:gd name="connsiteX4" fmla="*/ 4424680 w 4424680"/>
-                <a:gd name="connsiteY4" fmla="*/ 60115 h 360680"/>
-                <a:gd name="connsiteX5" fmla="*/ 4424680 w 4424680"/>
-                <a:gd name="connsiteY5" fmla="*/ 300565 h 360680"/>
-                <a:gd name="connsiteX6" fmla="*/ 4364565 w 4424680"/>
-                <a:gd name="connsiteY6" fmla="*/ 360680 h 360680"/>
-                <a:gd name="connsiteX7" fmla="*/ 60115 w 4424680"/>
-                <a:gd name="connsiteY7" fmla="*/ 360680 h 360680"/>
-                <a:gd name="connsiteX8" fmla="*/ 0 w 4424680"/>
-                <a:gd name="connsiteY8" fmla="*/ 300565 h 360680"/>
-                <a:gd name="connsiteX9" fmla="*/ 0 w 4424680"/>
-                <a:gd name="connsiteY9" fmla="*/ 60115 h 360680"/>
-                <a:gd name="connsiteX0" fmla="*/ 0 w 4424680"/>
-                <a:gd name="connsiteY0" fmla="*/ 60115 h 360680"/>
-                <a:gd name="connsiteX1" fmla="*/ 60115 w 4424680"/>
-                <a:gd name="connsiteY1" fmla="*/ 0 h 360680"/>
-                <a:gd name="connsiteX2" fmla="*/ 4364565 w 4424680"/>
-                <a:gd name="connsiteY2" fmla="*/ 0 h 360680"/>
-                <a:gd name="connsiteX3" fmla="*/ 4424680 w 4424680"/>
-                <a:gd name="connsiteY3" fmla="*/ 60115 h 360680"/>
-                <a:gd name="connsiteX4" fmla="*/ 4424680 w 4424680"/>
-                <a:gd name="connsiteY4" fmla="*/ 300565 h 360680"/>
-                <a:gd name="connsiteX5" fmla="*/ 4364565 w 4424680"/>
-                <a:gd name="connsiteY5" fmla="*/ 360680 h 360680"/>
-                <a:gd name="connsiteX6" fmla="*/ 60115 w 4424680"/>
-                <a:gd name="connsiteY6" fmla="*/ 360680 h 360680"/>
-                <a:gd name="connsiteX7" fmla="*/ 0 w 4424680"/>
-                <a:gd name="connsiteY7" fmla="*/ 300565 h 360680"/>
-                <a:gd name="connsiteX8" fmla="*/ 0 w 4424680"/>
-                <a:gd name="connsiteY8" fmla="*/ 60115 h 360680"/>
-                <a:gd name="connsiteX0" fmla="*/ 0 w 4424680"/>
-                <a:gd name="connsiteY0" fmla="*/ 60115 h 360680"/>
-                <a:gd name="connsiteX1" fmla="*/ 60115 w 4424680"/>
-                <a:gd name="connsiteY1" fmla="*/ 0 h 360680"/>
-                <a:gd name="connsiteX2" fmla="*/ 350520 w 4424680"/>
-                <a:gd name="connsiteY2" fmla="*/ 0 h 360680"/>
-                <a:gd name="connsiteX3" fmla="*/ 4364565 w 4424680"/>
-                <a:gd name="connsiteY3" fmla="*/ 0 h 360680"/>
-                <a:gd name="connsiteX4" fmla="*/ 4424680 w 4424680"/>
-                <a:gd name="connsiteY4" fmla="*/ 60115 h 360680"/>
-                <a:gd name="connsiteX5" fmla="*/ 4424680 w 4424680"/>
-                <a:gd name="connsiteY5" fmla="*/ 300565 h 360680"/>
-                <a:gd name="connsiteX6" fmla="*/ 4364565 w 4424680"/>
-                <a:gd name="connsiteY6" fmla="*/ 360680 h 360680"/>
-                <a:gd name="connsiteX7" fmla="*/ 60115 w 4424680"/>
-                <a:gd name="connsiteY7" fmla="*/ 360680 h 360680"/>
-                <a:gd name="connsiteX8" fmla="*/ 0 w 4424680"/>
-                <a:gd name="connsiteY8" fmla="*/ 300565 h 360680"/>
-                <a:gd name="connsiteX9" fmla="*/ 0 w 4424680"/>
-                <a:gd name="connsiteY9" fmla="*/ 60115 h 360680"/>
-                <a:gd name="connsiteX0" fmla="*/ 0 w 4424680"/>
-                <a:gd name="connsiteY0" fmla="*/ 121075 h 421640"/>
-                <a:gd name="connsiteX1" fmla="*/ 60115 w 4424680"/>
-                <a:gd name="connsiteY1" fmla="*/ 60960 h 421640"/>
-                <a:gd name="connsiteX2" fmla="*/ 350520 w 4424680"/>
-                <a:gd name="connsiteY2" fmla="*/ 60960 h 421640"/>
-                <a:gd name="connsiteX3" fmla="*/ 4364565 w 4424680"/>
-                <a:gd name="connsiteY3" fmla="*/ 60960 h 421640"/>
-                <a:gd name="connsiteX4" fmla="*/ 4424680 w 4424680"/>
-                <a:gd name="connsiteY4" fmla="*/ 121075 h 421640"/>
-                <a:gd name="connsiteX5" fmla="*/ 4424680 w 4424680"/>
-                <a:gd name="connsiteY5" fmla="*/ 361525 h 421640"/>
-                <a:gd name="connsiteX6" fmla="*/ 4364565 w 4424680"/>
-                <a:gd name="connsiteY6" fmla="*/ 421640 h 421640"/>
-                <a:gd name="connsiteX7" fmla="*/ 60115 w 4424680"/>
-                <a:gd name="connsiteY7" fmla="*/ 421640 h 421640"/>
-                <a:gd name="connsiteX8" fmla="*/ 0 w 4424680"/>
-                <a:gd name="connsiteY8" fmla="*/ 361525 h 421640"/>
-                <a:gd name="connsiteX9" fmla="*/ 0 w 4424680"/>
-                <a:gd name="connsiteY9" fmla="*/ 121075 h 421640"/>
-                <a:gd name="connsiteX0" fmla="*/ 0 w 4424680"/>
-                <a:gd name="connsiteY0" fmla="*/ 121075 h 421640"/>
-                <a:gd name="connsiteX1" fmla="*/ 60115 w 4424680"/>
-                <a:gd name="connsiteY1" fmla="*/ 60960 h 421640"/>
-                <a:gd name="connsiteX2" fmla="*/ 350520 w 4424680"/>
-                <a:gd name="connsiteY2" fmla="*/ 60960 h 421640"/>
-                <a:gd name="connsiteX3" fmla="*/ 4364565 w 4424680"/>
-                <a:gd name="connsiteY3" fmla="*/ 60960 h 421640"/>
-                <a:gd name="connsiteX4" fmla="*/ 4424680 w 4424680"/>
-                <a:gd name="connsiteY4" fmla="*/ 121075 h 421640"/>
-                <a:gd name="connsiteX5" fmla="*/ 4424680 w 4424680"/>
-                <a:gd name="connsiteY5" fmla="*/ 361525 h 421640"/>
-                <a:gd name="connsiteX6" fmla="*/ 4364565 w 4424680"/>
-                <a:gd name="connsiteY6" fmla="*/ 421640 h 421640"/>
-                <a:gd name="connsiteX7" fmla="*/ 330200 w 4424680"/>
-                <a:gd name="connsiteY7" fmla="*/ 421640 h 421640"/>
-                <a:gd name="connsiteX8" fmla="*/ 60115 w 4424680"/>
-                <a:gd name="connsiteY8" fmla="*/ 421640 h 421640"/>
-                <a:gd name="connsiteX9" fmla="*/ 0 w 4424680"/>
-                <a:gd name="connsiteY9" fmla="*/ 361525 h 421640"/>
-                <a:gd name="connsiteX10" fmla="*/ 0 w 4424680"/>
-                <a:gd name="connsiteY10" fmla="*/ 121075 h 421640"/>
-                <a:gd name="connsiteX0" fmla="*/ 0 w 4424680"/>
-                <a:gd name="connsiteY0" fmla="*/ 60115 h 360680"/>
-                <a:gd name="connsiteX1" fmla="*/ 60115 w 4424680"/>
-                <a:gd name="connsiteY1" fmla="*/ 0 h 360680"/>
-                <a:gd name="connsiteX2" fmla="*/ 350520 w 4424680"/>
-                <a:gd name="connsiteY2" fmla="*/ 0 h 360680"/>
-                <a:gd name="connsiteX3" fmla="*/ 4364565 w 4424680"/>
-                <a:gd name="connsiteY3" fmla="*/ 0 h 360680"/>
-                <a:gd name="connsiteX4" fmla="*/ 4424680 w 4424680"/>
-                <a:gd name="connsiteY4" fmla="*/ 60115 h 360680"/>
-                <a:gd name="connsiteX5" fmla="*/ 4424680 w 4424680"/>
-                <a:gd name="connsiteY5" fmla="*/ 300565 h 360680"/>
-                <a:gd name="connsiteX6" fmla="*/ 4364565 w 4424680"/>
-                <a:gd name="connsiteY6" fmla="*/ 360680 h 360680"/>
-                <a:gd name="connsiteX7" fmla="*/ 330200 w 4424680"/>
-                <a:gd name="connsiteY7" fmla="*/ 360680 h 360680"/>
-                <a:gd name="connsiteX8" fmla="*/ 60115 w 4424680"/>
-                <a:gd name="connsiteY8" fmla="*/ 360680 h 360680"/>
-                <a:gd name="connsiteX9" fmla="*/ 0 w 4424680"/>
-                <a:gd name="connsiteY9" fmla="*/ 300565 h 360680"/>
-                <a:gd name="connsiteX10" fmla="*/ 0 w 4424680"/>
-                <a:gd name="connsiteY10" fmla="*/ 60115 h 360680"/>
-                <a:gd name="connsiteX0" fmla="*/ 0 w 4424680"/>
-                <a:gd name="connsiteY0" fmla="*/ 60115 h 421640"/>
-                <a:gd name="connsiteX1" fmla="*/ 60115 w 4424680"/>
-                <a:gd name="connsiteY1" fmla="*/ 0 h 421640"/>
-                <a:gd name="connsiteX2" fmla="*/ 350520 w 4424680"/>
-                <a:gd name="connsiteY2" fmla="*/ 0 h 421640"/>
-                <a:gd name="connsiteX3" fmla="*/ 4364565 w 4424680"/>
-                <a:gd name="connsiteY3" fmla="*/ 0 h 421640"/>
-                <a:gd name="connsiteX4" fmla="*/ 4424680 w 4424680"/>
-                <a:gd name="connsiteY4" fmla="*/ 60115 h 421640"/>
-                <a:gd name="connsiteX5" fmla="*/ 4424680 w 4424680"/>
-                <a:gd name="connsiteY5" fmla="*/ 300565 h 421640"/>
-                <a:gd name="connsiteX6" fmla="*/ 4364565 w 4424680"/>
-                <a:gd name="connsiteY6" fmla="*/ 360680 h 421640"/>
-                <a:gd name="connsiteX7" fmla="*/ 330200 w 4424680"/>
-                <a:gd name="connsiteY7" fmla="*/ 360680 h 421640"/>
-                <a:gd name="connsiteX8" fmla="*/ 60115 w 4424680"/>
-                <a:gd name="connsiteY8" fmla="*/ 360680 h 421640"/>
-                <a:gd name="connsiteX9" fmla="*/ 0 w 4424680"/>
-                <a:gd name="connsiteY9" fmla="*/ 300565 h 421640"/>
-                <a:gd name="connsiteX10" fmla="*/ 0 w 4424680"/>
-                <a:gd name="connsiteY10" fmla="*/ 60115 h 421640"/>
-                <a:gd name="connsiteX0" fmla="*/ 0 w 4424680"/>
-                <a:gd name="connsiteY0" fmla="*/ 60115 h 421640"/>
-                <a:gd name="connsiteX1" fmla="*/ 60115 w 4424680"/>
-                <a:gd name="connsiteY1" fmla="*/ 0 h 421640"/>
-                <a:gd name="connsiteX2" fmla="*/ 350520 w 4424680"/>
-                <a:gd name="connsiteY2" fmla="*/ 0 h 421640"/>
-                <a:gd name="connsiteX3" fmla="*/ 4364565 w 4424680"/>
-                <a:gd name="connsiteY3" fmla="*/ 0 h 421640"/>
-                <a:gd name="connsiteX4" fmla="*/ 4424680 w 4424680"/>
-                <a:gd name="connsiteY4" fmla="*/ 60115 h 421640"/>
-                <a:gd name="connsiteX5" fmla="*/ 4424680 w 4424680"/>
-                <a:gd name="connsiteY5" fmla="*/ 300565 h 421640"/>
-                <a:gd name="connsiteX6" fmla="*/ 4364565 w 4424680"/>
-                <a:gd name="connsiteY6" fmla="*/ 360680 h 421640"/>
-                <a:gd name="connsiteX7" fmla="*/ 330200 w 4424680"/>
-                <a:gd name="connsiteY7" fmla="*/ 360680 h 421640"/>
-                <a:gd name="connsiteX8" fmla="*/ 60115 w 4424680"/>
-                <a:gd name="connsiteY8" fmla="*/ 360680 h 421640"/>
-                <a:gd name="connsiteX9" fmla="*/ 0 w 4424680"/>
-                <a:gd name="connsiteY9" fmla="*/ 300565 h 421640"/>
-                <a:gd name="connsiteX10" fmla="*/ 0 w 4424680"/>
-                <a:gd name="connsiteY10" fmla="*/ 60115 h 421640"/>
-                <a:gd name="connsiteX0" fmla="*/ 0 w 4424680"/>
-                <a:gd name="connsiteY0" fmla="*/ 60115 h 377646"/>
-                <a:gd name="connsiteX1" fmla="*/ 60115 w 4424680"/>
-                <a:gd name="connsiteY1" fmla="*/ 0 h 377646"/>
-                <a:gd name="connsiteX2" fmla="*/ 350520 w 4424680"/>
-                <a:gd name="connsiteY2" fmla="*/ 0 h 377646"/>
-                <a:gd name="connsiteX3" fmla="*/ 4364565 w 4424680"/>
-                <a:gd name="connsiteY3" fmla="*/ 0 h 377646"/>
-                <a:gd name="connsiteX4" fmla="*/ 4424680 w 4424680"/>
-                <a:gd name="connsiteY4" fmla="*/ 60115 h 377646"/>
-                <a:gd name="connsiteX5" fmla="*/ 4424680 w 4424680"/>
-                <a:gd name="connsiteY5" fmla="*/ 300565 h 377646"/>
-                <a:gd name="connsiteX6" fmla="*/ 4364565 w 4424680"/>
-                <a:gd name="connsiteY6" fmla="*/ 360680 h 377646"/>
-                <a:gd name="connsiteX7" fmla="*/ 330200 w 4424680"/>
-                <a:gd name="connsiteY7" fmla="*/ 360680 h 377646"/>
-                <a:gd name="connsiteX8" fmla="*/ 60115 w 4424680"/>
-                <a:gd name="connsiteY8" fmla="*/ 360680 h 377646"/>
-                <a:gd name="connsiteX9" fmla="*/ 0 w 4424680"/>
-                <a:gd name="connsiteY9" fmla="*/ 300565 h 377646"/>
-                <a:gd name="connsiteX10" fmla="*/ 0 w 4424680"/>
-                <a:gd name="connsiteY10" fmla="*/ 60115 h 377646"/>
-              </a:gdLst>
-              <a:ahLst/>
-              <a:cxnLst>
-                <a:cxn ang="0">
-                  <a:pos x="connsiteX0" y="connsiteY0"/>
-                </a:cxn>
-                <a:cxn ang="0">
-                  <a:pos x="connsiteX1" y="connsiteY1"/>
-                </a:cxn>
-                <a:cxn ang="0">
-                  <a:pos x="connsiteX2" y="connsiteY2"/>
-                </a:cxn>
-                <a:cxn ang="0">
-                  <a:pos x="connsiteX3" y="connsiteY3"/>
-                </a:cxn>
-                <a:cxn ang="0">
-                  <a:pos x="connsiteX4" y="connsiteY4"/>
-                </a:cxn>
-                <a:cxn ang="0">
-                  <a:pos x="connsiteX5" y="connsiteY5"/>
-                </a:cxn>
-                <a:cxn ang="0">
-                  <a:pos x="connsiteX6" y="connsiteY6"/>
-                </a:cxn>
-                <a:cxn ang="0">
-                  <a:pos x="connsiteX7" y="connsiteY7"/>
-                </a:cxn>
-                <a:cxn ang="0">
-                  <a:pos x="connsiteX8" y="connsiteY8"/>
-                </a:cxn>
-                <a:cxn ang="0">
-                  <a:pos x="connsiteX9" y="connsiteY9"/>
-                </a:cxn>
-                <a:cxn ang="0">
-                  <a:pos x="connsiteX10" y="connsiteY10"/>
-                </a:cxn>
-              </a:cxnLst>
-              <a:rect l="l" t="t" r="r" b="b"/>
-              <a:pathLst>
-                <a:path w="4424680" h="377646">
-                  <a:moveTo>
-                    <a:pt x="0" y="60115"/>
-                  </a:moveTo>
-                  <a:cubicBezTo>
-                    <a:pt x="0" y="26914"/>
-                    <a:pt x="26914" y="0"/>
-                    <a:pt x="60115" y="0"/>
-                  </a:cubicBezTo>
-                  <a:cubicBezTo>
-                    <a:pt x="156917" y="0"/>
-                    <a:pt x="127388" y="56799"/>
-                    <a:pt x="350520" y="0"/>
-                  </a:cubicBezTo>
-                  <a:lnTo>
-                    <a:pt x="4364565" y="0"/>
-                  </a:lnTo>
-                  <a:cubicBezTo>
-                    <a:pt x="4397766" y="0"/>
-                    <a:pt x="4424680" y="26914"/>
-                    <a:pt x="4424680" y="60115"/>
-                  </a:cubicBezTo>
-                  <a:lnTo>
-                    <a:pt x="4424680" y="300565"/>
-                  </a:lnTo>
-                  <a:cubicBezTo>
-                    <a:pt x="4424680" y="333766"/>
-                    <a:pt x="4397766" y="360680"/>
-                    <a:pt x="4364565" y="360680"/>
-                  </a:cubicBezTo>
-                  <a:lnTo>
-                    <a:pt x="330200" y="360680"/>
-                  </a:lnTo>
-                  <a:cubicBezTo>
-                    <a:pt x="170817" y="398855"/>
-                    <a:pt x="150143" y="360680"/>
-                    <a:pt x="60115" y="360680"/>
-                  </a:cubicBezTo>
-                  <a:cubicBezTo>
-                    <a:pt x="26914" y="360680"/>
-                    <a:pt x="0" y="333766"/>
-                    <a:pt x="0" y="300565"/>
-                  </a:cubicBezTo>
-                  <a:lnTo>
-                    <a:pt x="0" y="60115"/>
-                  </a:lnTo>
-                  <a:close/>
-                </a:path>
-              </a:pathLst>
-            </a:custGeom>
-          </p:spPr>
-          <p:style>
-            <a:lnRef idx="2">
-              <a:schemeClr val="accent1">
-                <a:shade val="50000"/>
-              </a:schemeClr>
-            </a:lnRef>
-            <a:fillRef idx="1">
-              <a:schemeClr val="accent1"/>
-            </a:fillRef>
-            <a:effectRef idx="0">
-              <a:schemeClr val="accent1"/>
-            </a:effectRef>
-            <a:fontRef idx="minor">
-              <a:schemeClr val="lt1"/>
-            </a:fontRef>
-          </p:style>
-          <p:txBody>
-            <a:bodyPr rot="0" spcFirstLastPara="0" vert="horz" wrap="square" lIns="36000" tIns="0" rIns="36000" bIns="0" numCol="1" spcCol="0" rtlCol="0" fromWordArt="0" anchor="ctr" anchorCtr="0" forceAA="0" compatLnSpc="1">
-              <a:prstTxWarp prst="textNoShape">
-                <a:avLst/>
-              </a:prstTxWarp>
-              <a:noAutofit/>
-            </a:bodyPr>
-            <a:lstStyle/>
-            <a:p>
-              <a:pPr>
-                <a:spcAft>
-                  <a:spcPts val="0"/>
-                </a:spcAft>
-              </a:pPr>
-              <a:endParaRPr lang="zh-TW" sz="1200" kern="100" dirty="0">
-                <a:effectLst/>
+            </a:prstTxWarp>
+            <a:noAutofit/>
+          </a:bodyPr>
+          <a:lstStyle/>
+          <a:p>
+            <a:pPr>
+              <a:spcAft>
+                <a:spcPts val="0"/>
+              </a:spcAft>
+            </a:pPr>
+            <a:r>
+              <a:rPr lang="en-US" altLang="zh-TW" sz="1200" kern="100" dirty="0" err="1">
                 <a:ea typeface="新細明體" panose="02020500000000000000" pitchFamily="18" charset="-120"/>
                 <a:cs typeface="Times New Roman" panose="02020603050405020304" pitchFamily="18" charset="0"/>
-              </a:endParaRPr>
-            </a:p>
-          </p:txBody>
-        </p:sp>
-        <p:grpSp>
-          <p:nvGrpSpPr>
-            <p:cNvPr id="2" name="群組 1">
-              <a:extLst>
-                <a:ext uri="{FF2B5EF4-FFF2-40B4-BE49-F238E27FC236}">
-                  <a16:creationId xmlns:a16="http://schemas.microsoft.com/office/drawing/2014/main" id="{0133ABE0-05F0-400E-B8BB-5F59A535954B}"/>
-                </a:ext>
-              </a:extLst>
-            </p:cNvPr>
-            <p:cNvGrpSpPr/>
-            <p:nvPr/>
-          </p:nvGrpSpPr>
-          <p:grpSpPr>
-            <a:xfrm>
-              <a:off x="1503044" y="2736215"/>
-              <a:ext cx="1630687" cy="175260"/>
-              <a:chOff x="1503044" y="2736215"/>
-              <a:chExt cx="1630687" cy="175260"/>
-            </a:xfrm>
-          </p:grpSpPr>
-          <p:sp>
-            <p:nvSpPr>
-              <p:cNvPr id="16" name="手繪多邊形: 圖案 10">
-                <a:extLst>
-                  <a:ext uri="{FF2B5EF4-FFF2-40B4-BE49-F238E27FC236}">
-                    <a16:creationId xmlns:a16="http://schemas.microsoft.com/office/drawing/2014/main" id="{E050214A-C520-4593-84B6-0C03801F78F4}"/>
-                  </a:ext>
-                </a:extLst>
-              </p:cNvPr>
-              <p:cNvSpPr/>
-              <p:nvPr/>
-            </p:nvSpPr>
-            <p:spPr>
-              <a:xfrm>
-                <a:off x="1503044" y="2736215"/>
-                <a:ext cx="219078" cy="175260"/>
-              </a:xfrm>
-              <a:custGeom>
-                <a:avLst/>
-                <a:gdLst>
-                  <a:gd name="connsiteX0" fmla="*/ 84890 w 453390"/>
-                  <a:gd name="connsiteY0" fmla="*/ 0 h 263525"/>
-                  <a:gd name="connsiteX1" fmla="*/ 453390 w 453390"/>
-                  <a:gd name="connsiteY1" fmla="*/ 0 h 263525"/>
-                  <a:gd name="connsiteX2" fmla="*/ 453390 w 453390"/>
-                  <a:gd name="connsiteY2" fmla="*/ 263525 h 263525"/>
-                  <a:gd name="connsiteX3" fmla="*/ 84890 w 453390"/>
-                  <a:gd name="connsiteY3" fmla="*/ 263525 h 263525"/>
-                  <a:gd name="connsiteX4" fmla="*/ 59217 w 453390"/>
-                  <a:gd name="connsiteY4" fmla="*/ 168771 h 263525"/>
-                  <a:gd name="connsiteX5" fmla="*/ 4819 w 453390"/>
-                  <a:gd name="connsiteY5" fmla="*/ 221542 h 263525"/>
-                  <a:gd name="connsiteX6" fmla="*/ 0 w 453390"/>
-                  <a:gd name="connsiteY6" fmla="*/ 54571 h 263525"/>
-                  <a:gd name="connsiteX7" fmla="*/ 55658 w 453390"/>
-                  <a:gd name="connsiteY7" fmla="*/ 89403 h 263525"/>
-                  <a:gd name="connsiteX8" fmla="*/ 84890 w 453390"/>
-                  <a:gd name="connsiteY8" fmla="*/ 0 h 263525"/>
-                </a:gdLst>
-                <a:ahLst/>
-                <a:cxnLst>
-                  <a:cxn ang="0">
-                    <a:pos x="connsiteX0" y="connsiteY0"/>
-                  </a:cxn>
-                  <a:cxn ang="0">
-                    <a:pos x="connsiteX1" y="connsiteY1"/>
-                  </a:cxn>
-                  <a:cxn ang="0">
-                    <a:pos x="connsiteX2" y="connsiteY2"/>
-                  </a:cxn>
-                  <a:cxn ang="0">
-                    <a:pos x="connsiteX3" y="connsiteY3"/>
-                  </a:cxn>
-                  <a:cxn ang="0">
-                    <a:pos x="connsiteX4" y="connsiteY4"/>
-                  </a:cxn>
-                  <a:cxn ang="0">
-                    <a:pos x="connsiteX5" y="connsiteY5"/>
-                  </a:cxn>
-                  <a:cxn ang="0">
-                    <a:pos x="connsiteX6" y="connsiteY6"/>
-                  </a:cxn>
-                  <a:cxn ang="0">
-                    <a:pos x="connsiteX7" y="connsiteY7"/>
-                  </a:cxn>
-                  <a:cxn ang="0">
-                    <a:pos x="connsiteX8" y="connsiteY8"/>
-                  </a:cxn>
-                </a:cxnLst>
-                <a:rect l="l" t="t" r="r" b="b"/>
-                <a:pathLst>
-                  <a:path w="453390" h="263525">
-                    <a:moveTo>
-                      <a:pt x="84890" y="0"/>
-                    </a:moveTo>
-                    <a:lnTo>
-                      <a:pt x="453390" y="0"/>
-                    </a:lnTo>
-                    <a:lnTo>
-                      <a:pt x="453390" y="263525"/>
-                    </a:lnTo>
-                    <a:lnTo>
-                      <a:pt x="84890" y="263525"/>
-                    </a:lnTo>
-                    <a:cubicBezTo>
-                      <a:pt x="68745" y="263525"/>
-                      <a:pt x="59217" y="193028"/>
-                      <a:pt x="59217" y="168771"/>
-                    </a:cubicBezTo>
-                    <a:lnTo>
-                      <a:pt x="4819" y="221542"/>
-                    </a:lnTo>
-                    <a:lnTo>
-                      <a:pt x="0" y="54571"/>
-                    </a:lnTo>
-                    <a:lnTo>
-                      <a:pt x="55658" y="89403"/>
-                    </a:lnTo>
-                    <a:cubicBezTo>
-                      <a:pt x="55658" y="65146"/>
-                      <a:pt x="68745" y="0"/>
-                      <a:pt x="84890" y="0"/>
-                    </a:cubicBezTo>
-                    <a:close/>
-                  </a:path>
-                </a:pathLst>
-              </a:custGeom>
-            </p:spPr>
-            <p:style>
-              <a:lnRef idx="2">
-                <a:schemeClr val="accent5">
-                  <a:shade val="50000"/>
-                </a:schemeClr>
-              </a:lnRef>
-              <a:fillRef idx="1">
-                <a:schemeClr val="accent5"/>
-              </a:fillRef>
-              <a:effectRef idx="0">
-                <a:schemeClr val="accent5"/>
-              </a:effectRef>
-              <a:fontRef idx="minor">
-                <a:schemeClr val="lt1"/>
-              </a:fontRef>
-            </p:style>
-            <p:txBody>
-              <a:bodyPr rot="0" spcFirstLastPara="0" vert="horz" wrap="square" lIns="0" tIns="0" rIns="0" bIns="0" numCol="1" spcCol="0" rtlCol="0" fromWordArt="0" anchor="ctr" anchorCtr="0" forceAA="0" compatLnSpc="1">
-                <a:prstTxWarp prst="textNoShape">
-                  <a:avLst/>
-                </a:prstTxWarp>
-                <a:noAutofit/>
-              </a:bodyPr>
-              <a:lstStyle/>
-              <a:p>
-                <a:pPr indent="73025" algn="ctr">
-                  <a:spcAft>
-                    <a:spcPts val="0"/>
-                  </a:spcAft>
-                </a:pPr>
-                <a:r>
-                  <a:rPr lang="en-US" sz="1200" kern="100" dirty="0">
-                    <a:solidFill>
-                      <a:srgbClr val="FFFFFF"/>
-                    </a:solidFill>
-                    <a:effectLst/>
-                    <a:ea typeface="新細明體" panose="02020500000000000000" pitchFamily="18" charset="-120"/>
-                    <a:cs typeface="Times New Roman" panose="02020603050405020304" pitchFamily="18" charset="0"/>
-                  </a:rPr>
-                  <a:t>1</a:t>
-                </a:r>
-                <a:endParaRPr lang="zh-TW" sz="1200" kern="100" dirty="0">
-                  <a:effectLst/>
-                  <a:ea typeface="新細明體" panose="02020500000000000000" pitchFamily="18" charset="-120"/>
-                  <a:cs typeface="Times New Roman" panose="02020603050405020304" pitchFamily="18" charset="0"/>
-                </a:endParaRPr>
-              </a:p>
-            </p:txBody>
-          </p:sp>
-          <p:sp>
-            <p:nvSpPr>
-              <p:cNvPr id="17" name="手繪多邊形: 圖案 10">
-                <a:extLst>
-                  <a:ext uri="{FF2B5EF4-FFF2-40B4-BE49-F238E27FC236}">
-                    <a16:creationId xmlns:a16="http://schemas.microsoft.com/office/drawing/2014/main" id="{E9BBC750-3901-4944-B70C-0FBF310C9B3B}"/>
-                  </a:ext>
-                </a:extLst>
-              </p:cNvPr>
-              <p:cNvSpPr/>
-              <p:nvPr/>
-            </p:nvSpPr>
-            <p:spPr>
-              <a:xfrm>
-                <a:off x="1784030" y="2736215"/>
-                <a:ext cx="219078" cy="175260"/>
-              </a:xfrm>
-              <a:custGeom>
-                <a:avLst/>
-                <a:gdLst>
-                  <a:gd name="connsiteX0" fmla="*/ 84890 w 453390"/>
-                  <a:gd name="connsiteY0" fmla="*/ 0 h 263525"/>
-                  <a:gd name="connsiteX1" fmla="*/ 453390 w 453390"/>
-                  <a:gd name="connsiteY1" fmla="*/ 0 h 263525"/>
-                  <a:gd name="connsiteX2" fmla="*/ 453390 w 453390"/>
-                  <a:gd name="connsiteY2" fmla="*/ 263525 h 263525"/>
-                  <a:gd name="connsiteX3" fmla="*/ 84890 w 453390"/>
-                  <a:gd name="connsiteY3" fmla="*/ 263525 h 263525"/>
-                  <a:gd name="connsiteX4" fmla="*/ 59217 w 453390"/>
-                  <a:gd name="connsiteY4" fmla="*/ 168771 h 263525"/>
-                  <a:gd name="connsiteX5" fmla="*/ 4819 w 453390"/>
-                  <a:gd name="connsiteY5" fmla="*/ 221542 h 263525"/>
-                  <a:gd name="connsiteX6" fmla="*/ 0 w 453390"/>
-                  <a:gd name="connsiteY6" fmla="*/ 54571 h 263525"/>
-                  <a:gd name="connsiteX7" fmla="*/ 55658 w 453390"/>
-                  <a:gd name="connsiteY7" fmla="*/ 89403 h 263525"/>
-                  <a:gd name="connsiteX8" fmla="*/ 84890 w 453390"/>
-                  <a:gd name="connsiteY8" fmla="*/ 0 h 263525"/>
-                </a:gdLst>
-                <a:ahLst/>
-                <a:cxnLst>
-                  <a:cxn ang="0">
-                    <a:pos x="connsiteX0" y="connsiteY0"/>
-                  </a:cxn>
-                  <a:cxn ang="0">
-                    <a:pos x="connsiteX1" y="connsiteY1"/>
-                  </a:cxn>
-                  <a:cxn ang="0">
-                    <a:pos x="connsiteX2" y="connsiteY2"/>
-                  </a:cxn>
-                  <a:cxn ang="0">
-                    <a:pos x="connsiteX3" y="connsiteY3"/>
-                  </a:cxn>
-                  <a:cxn ang="0">
-                    <a:pos x="connsiteX4" y="connsiteY4"/>
-                  </a:cxn>
-                  <a:cxn ang="0">
-                    <a:pos x="connsiteX5" y="connsiteY5"/>
-                  </a:cxn>
-                  <a:cxn ang="0">
-                    <a:pos x="connsiteX6" y="connsiteY6"/>
-                  </a:cxn>
-                  <a:cxn ang="0">
-                    <a:pos x="connsiteX7" y="connsiteY7"/>
-                  </a:cxn>
-                  <a:cxn ang="0">
-                    <a:pos x="connsiteX8" y="connsiteY8"/>
-                  </a:cxn>
-                </a:cxnLst>
-                <a:rect l="l" t="t" r="r" b="b"/>
-                <a:pathLst>
-                  <a:path w="453390" h="263525">
-                    <a:moveTo>
-                      <a:pt x="84890" y="0"/>
-                    </a:moveTo>
-                    <a:lnTo>
-                      <a:pt x="453390" y="0"/>
-                    </a:lnTo>
-                    <a:lnTo>
-                      <a:pt x="453390" y="263525"/>
-                    </a:lnTo>
-                    <a:lnTo>
-                      <a:pt x="84890" y="263525"/>
-                    </a:lnTo>
-                    <a:cubicBezTo>
-                      <a:pt x="68745" y="263525"/>
-                      <a:pt x="59217" y="193028"/>
-                      <a:pt x="59217" y="168771"/>
-                    </a:cubicBezTo>
-                    <a:lnTo>
-                      <a:pt x="4819" y="221542"/>
-                    </a:lnTo>
-                    <a:lnTo>
-                      <a:pt x="0" y="54571"/>
-                    </a:lnTo>
-                    <a:lnTo>
-                      <a:pt x="55658" y="89403"/>
-                    </a:lnTo>
-                    <a:cubicBezTo>
-                      <a:pt x="55658" y="65146"/>
-                      <a:pt x="68745" y="0"/>
-                      <a:pt x="84890" y="0"/>
-                    </a:cubicBezTo>
-                    <a:close/>
-                  </a:path>
-                </a:pathLst>
-              </a:custGeom>
-            </p:spPr>
-            <p:style>
-              <a:lnRef idx="2">
-                <a:schemeClr val="accent5">
-                  <a:shade val="50000"/>
-                </a:schemeClr>
-              </a:lnRef>
-              <a:fillRef idx="1">
-                <a:schemeClr val="accent5"/>
-              </a:fillRef>
-              <a:effectRef idx="0">
-                <a:schemeClr val="accent5"/>
-              </a:effectRef>
-              <a:fontRef idx="minor">
-                <a:schemeClr val="lt1"/>
-              </a:fontRef>
-            </p:style>
-            <p:txBody>
-              <a:bodyPr rot="0" spcFirstLastPara="0" vert="horz" wrap="square" lIns="0" tIns="0" rIns="0" bIns="0" numCol="1" spcCol="0" rtlCol="0" fromWordArt="0" anchor="ctr" anchorCtr="0" forceAA="0" compatLnSpc="1">
-                <a:prstTxWarp prst="textNoShape">
-                  <a:avLst/>
-                </a:prstTxWarp>
-                <a:noAutofit/>
-              </a:bodyPr>
-              <a:lstStyle/>
-              <a:p>
-                <a:pPr indent="73025" algn="ctr">
-                  <a:spcAft>
-                    <a:spcPts val="0"/>
-                  </a:spcAft>
-                </a:pPr>
-                <a:r>
-                  <a:rPr lang="en-US" sz="1200" kern="100" dirty="0">
-                    <a:solidFill>
-                      <a:srgbClr val="FFFFFF"/>
-                    </a:solidFill>
-                    <a:effectLst/>
-                    <a:ea typeface="新細明體" panose="02020500000000000000" pitchFamily="18" charset="-120"/>
-                    <a:cs typeface="Times New Roman" panose="02020603050405020304" pitchFamily="18" charset="0"/>
-                  </a:rPr>
-                  <a:t>1</a:t>
-                </a:r>
-                <a:endParaRPr lang="zh-TW" sz="1200" kern="100" dirty="0">
-                  <a:effectLst/>
-                  <a:ea typeface="新細明體" panose="02020500000000000000" pitchFamily="18" charset="-120"/>
-                  <a:cs typeface="Times New Roman" panose="02020603050405020304" pitchFamily="18" charset="0"/>
-                </a:endParaRPr>
-              </a:p>
-            </p:txBody>
-          </p:sp>
-          <p:sp>
-            <p:nvSpPr>
-              <p:cNvPr id="18" name="手繪多邊形: 圖案 10">
-                <a:extLst>
-                  <a:ext uri="{FF2B5EF4-FFF2-40B4-BE49-F238E27FC236}">
-                    <a16:creationId xmlns:a16="http://schemas.microsoft.com/office/drawing/2014/main" id="{88305C79-F0FE-4F62-8A1E-9B23FCE4CD53}"/>
-                  </a:ext>
-                </a:extLst>
-              </p:cNvPr>
-              <p:cNvSpPr/>
-              <p:nvPr/>
-            </p:nvSpPr>
-            <p:spPr>
-              <a:xfrm>
-                <a:off x="2065016" y="2736215"/>
-                <a:ext cx="219078" cy="175260"/>
-              </a:xfrm>
-              <a:custGeom>
-                <a:avLst/>
-                <a:gdLst>
-                  <a:gd name="connsiteX0" fmla="*/ 84890 w 453390"/>
-                  <a:gd name="connsiteY0" fmla="*/ 0 h 263525"/>
-                  <a:gd name="connsiteX1" fmla="*/ 453390 w 453390"/>
-                  <a:gd name="connsiteY1" fmla="*/ 0 h 263525"/>
-                  <a:gd name="connsiteX2" fmla="*/ 453390 w 453390"/>
-                  <a:gd name="connsiteY2" fmla="*/ 263525 h 263525"/>
-                  <a:gd name="connsiteX3" fmla="*/ 84890 w 453390"/>
-                  <a:gd name="connsiteY3" fmla="*/ 263525 h 263525"/>
-                  <a:gd name="connsiteX4" fmla="*/ 59217 w 453390"/>
-                  <a:gd name="connsiteY4" fmla="*/ 168771 h 263525"/>
-                  <a:gd name="connsiteX5" fmla="*/ 4819 w 453390"/>
-                  <a:gd name="connsiteY5" fmla="*/ 221542 h 263525"/>
-                  <a:gd name="connsiteX6" fmla="*/ 0 w 453390"/>
-                  <a:gd name="connsiteY6" fmla="*/ 54571 h 263525"/>
-                  <a:gd name="connsiteX7" fmla="*/ 55658 w 453390"/>
-                  <a:gd name="connsiteY7" fmla="*/ 89403 h 263525"/>
-                  <a:gd name="connsiteX8" fmla="*/ 84890 w 453390"/>
-                  <a:gd name="connsiteY8" fmla="*/ 0 h 263525"/>
-                </a:gdLst>
-                <a:ahLst/>
-                <a:cxnLst>
-                  <a:cxn ang="0">
-                    <a:pos x="connsiteX0" y="connsiteY0"/>
-                  </a:cxn>
-                  <a:cxn ang="0">
-                    <a:pos x="connsiteX1" y="connsiteY1"/>
-                  </a:cxn>
-                  <a:cxn ang="0">
-                    <a:pos x="connsiteX2" y="connsiteY2"/>
-                  </a:cxn>
-                  <a:cxn ang="0">
-                    <a:pos x="connsiteX3" y="connsiteY3"/>
-                  </a:cxn>
-                  <a:cxn ang="0">
-                    <a:pos x="connsiteX4" y="connsiteY4"/>
-                  </a:cxn>
-                  <a:cxn ang="0">
-                    <a:pos x="connsiteX5" y="connsiteY5"/>
-                  </a:cxn>
-                  <a:cxn ang="0">
-                    <a:pos x="connsiteX6" y="connsiteY6"/>
-                  </a:cxn>
-                  <a:cxn ang="0">
-                    <a:pos x="connsiteX7" y="connsiteY7"/>
-                  </a:cxn>
-                  <a:cxn ang="0">
-                    <a:pos x="connsiteX8" y="connsiteY8"/>
-                  </a:cxn>
-                </a:cxnLst>
-                <a:rect l="l" t="t" r="r" b="b"/>
-                <a:pathLst>
-                  <a:path w="453390" h="263525">
-                    <a:moveTo>
-                      <a:pt x="84890" y="0"/>
-                    </a:moveTo>
-                    <a:lnTo>
-                      <a:pt x="453390" y="0"/>
-                    </a:lnTo>
-                    <a:lnTo>
-                      <a:pt x="453390" y="263525"/>
-                    </a:lnTo>
-                    <a:lnTo>
-                      <a:pt x="84890" y="263525"/>
-                    </a:lnTo>
-                    <a:cubicBezTo>
-                      <a:pt x="68745" y="263525"/>
-                      <a:pt x="59217" y="193028"/>
-                      <a:pt x="59217" y="168771"/>
-                    </a:cubicBezTo>
-                    <a:lnTo>
-                      <a:pt x="4819" y="221542"/>
-                    </a:lnTo>
-                    <a:lnTo>
-                      <a:pt x="0" y="54571"/>
-                    </a:lnTo>
-                    <a:lnTo>
-                      <a:pt x="55658" y="89403"/>
-                    </a:lnTo>
-                    <a:cubicBezTo>
-                      <a:pt x="55658" y="65146"/>
-                      <a:pt x="68745" y="0"/>
-                      <a:pt x="84890" y="0"/>
-                    </a:cubicBezTo>
-                    <a:close/>
-                  </a:path>
-                </a:pathLst>
-              </a:custGeom>
-            </p:spPr>
-            <p:style>
-              <a:lnRef idx="2">
-                <a:schemeClr val="accent5">
-                  <a:shade val="50000"/>
-                </a:schemeClr>
-              </a:lnRef>
-              <a:fillRef idx="1">
-                <a:schemeClr val="accent5"/>
-              </a:fillRef>
-              <a:effectRef idx="0">
-                <a:schemeClr val="accent5"/>
-              </a:effectRef>
-              <a:fontRef idx="minor">
-                <a:schemeClr val="lt1"/>
-              </a:fontRef>
-            </p:style>
-            <p:txBody>
-              <a:bodyPr rot="0" spcFirstLastPara="0" vert="horz" wrap="square" lIns="0" tIns="0" rIns="0" bIns="0" numCol="1" spcCol="0" rtlCol="0" fromWordArt="0" anchor="ctr" anchorCtr="0" forceAA="0" compatLnSpc="1">
-                <a:prstTxWarp prst="textNoShape">
-                  <a:avLst/>
-                </a:prstTxWarp>
-                <a:noAutofit/>
-              </a:bodyPr>
-              <a:lstStyle/>
-              <a:p>
-                <a:pPr indent="73025" algn="ctr">
-                  <a:spcAft>
-                    <a:spcPts val="0"/>
-                  </a:spcAft>
-                </a:pPr>
-                <a:r>
-                  <a:rPr lang="en-US" sz="1200" kern="100" dirty="0">
-                    <a:solidFill>
-                      <a:srgbClr val="FFFFFF"/>
-                    </a:solidFill>
-                    <a:effectLst/>
-                    <a:ea typeface="新細明體" panose="02020500000000000000" pitchFamily="18" charset="-120"/>
-                    <a:cs typeface="Times New Roman" panose="02020603050405020304" pitchFamily="18" charset="0"/>
-                  </a:rPr>
-                  <a:t>1</a:t>
-                </a:r>
-                <a:endParaRPr lang="zh-TW" sz="1200" kern="100" dirty="0">
-                  <a:effectLst/>
-                  <a:ea typeface="新細明體" panose="02020500000000000000" pitchFamily="18" charset="-120"/>
-                  <a:cs typeface="Times New Roman" panose="02020603050405020304" pitchFamily="18" charset="0"/>
-                </a:endParaRPr>
-              </a:p>
-            </p:txBody>
-          </p:sp>
-          <p:sp>
-            <p:nvSpPr>
-              <p:cNvPr id="19" name="手繪多邊形: 圖案 10">
-                <a:extLst>
-                  <a:ext uri="{FF2B5EF4-FFF2-40B4-BE49-F238E27FC236}">
-                    <a16:creationId xmlns:a16="http://schemas.microsoft.com/office/drawing/2014/main" id="{57EAB87F-B250-4D76-A521-AD65BB805D50}"/>
-                  </a:ext>
-                </a:extLst>
-              </p:cNvPr>
-              <p:cNvSpPr/>
-              <p:nvPr/>
-            </p:nvSpPr>
-            <p:spPr>
-              <a:xfrm>
-                <a:off x="2346002" y="2736215"/>
-                <a:ext cx="219078" cy="175260"/>
-              </a:xfrm>
-              <a:custGeom>
-                <a:avLst/>
-                <a:gdLst>
-                  <a:gd name="connsiteX0" fmla="*/ 84890 w 453390"/>
-                  <a:gd name="connsiteY0" fmla="*/ 0 h 263525"/>
-                  <a:gd name="connsiteX1" fmla="*/ 453390 w 453390"/>
-                  <a:gd name="connsiteY1" fmla="*/ 0 h 263525"/>
-                  <a:gd name="connsiteX2" fmla="*/ 453390 w 453390"/>
-                  <a:gd name="connsiteY2" fmla="*/ 263525 h 263525"/>
-                  <a:gd name="connsiteX3" fmla="*/ 84890 w 453390"/>
-                  <a:gd name="connsiteY3" fmla="*/ 263525 h 263525"/>
-                  <a:gd name="connsiteX4" fmla="*/ 59217 w 453390"/>
-                  <a:gd name="connsiteY4" fmla="*/ 168771 h 263525"/>
-                  <a:gd name="connsiteX5" fmla="*/ 4819 w 453390"/>
-                  <a:gd name="connsiteY5" fmla="*/ 221542 h 263525"/>
-                  <a:gd name="connsiteX6" fmla="*/ 0 w 453390"/>
-                  <a:gd name="connsiteY6" fmla="*/ 54571 h 263525"/>
-                  <a:gd name="connsiteX7" fmla="*/ 55658 w 453390"/>
-                  <a:gd name="connsiteY7" fmla="*/ 89403 h 263525"/>
-                  <a:gd name="connsiteX8" fmla="*/ 84890 w 453390"/>
-                  <a:gd name="connsiteY8" fmla="*/ 0 h 263525"/>
-                </a:gdLst>
-                <a:ahLst/>
-                <a:cxnLst>
-                  <a:cxn ang="0">
-                    <a:pos x="connsiteX0" y="connsiteY0"/>
-                  </a:cxn>
-                  <a:cxn ang="0">
-                    <a:pos x="connsiteX1" y="connsiteY1"/>
-                  </a:cxn>
-                  <a:cxn ang="0">
-                    <a:pos x="connsiteX2" y="connsiteY2"/>
-                  </a:cxn>
-                  <a:cxn ang="0">
-                    <a:pos x="connsiteX3" y="connsiteY3"/>
-                  </a:cxn>
-                  <a:cxn ang="0">
-                    <a:pos x="connsiteX4" y="connsiteY4"/>
-                  </a:cxn>
-                  <a:cxn ang="0">
-                    <a:pos x="connsiteX5" y="connsiteY5"/>
-                  </a:cxn>
-                  <a:cxn ang="0">
-                    <a:pos x="connsiteX6" y="connsiteY6"/>
-                  </a:cxn>
-                  <a:cxn ang="0">
-                    <a:pos x="connsiteX7" y="connsiteY7"/>
-                  </a:cxn>
-                  <a:cxn ang="0">
-                    <a:pos x="connsiteX8" y="connsiteY8"/>
-                  </a:cxn>
-                </a:cxnLst>
-                <a:rect l="l" t="t" r="r" b="b"/>
-                <a:pathLst>
-                  <a:path w="453390" h="263525">
-                    <a:moveTo>
-                      <a:pt x="84890" y="0"/>
-                    </a:moveTo>
-                    <a:lnTo>
-                      <a:pt x="453390" y="0"/>
-                    </a:lnTo>
-                    <a:lnTo>
-                      <a:pt x="453390" y="263525"/>
-                    </a:lnTo>
-                    <a:lnTo>
-                      <a:pt x="84890" y="263525"/>
-                    </a:lnTo>
-                    <a:cubicBezTo>
-                      <a:pt x="68745" y="263525"/>
-                      <a:pt x="59217" y="193028"/>
-                      <a:pt x="59217" y="168771"/>
-                    </a:cubicBezTo>
-                    <a:lnTo>
-                      <a:pt x="4819" y="221542"/>
-                    </a:lnTo>
-                    <a:lnTo>
-                      <a:pt x="0" y="54571"/>
-                    </a:lnTo>
-                    <a:lnTo>
-                      <a:pt x="55658" y="89403"/>
-                    </a:lnTo>
-                    <a:cubicBezTo>
-                      <a:pt x="55658" y="65146"/>
-                      <a:pt x="68745" y="0"/>
-                      <a:pt x="84890" y="0"/>
-                    </a:cubicBezTo>
-                    <a:close/>
-                  </a:path>
-                </a:pathLst>
-              </a:custGeom>
-            </p:spPr>
-            <p:style>
-              <a:lnRef idx="2">
-                <a:schemeClr val="accent5">
-                  <a:shade val="50000"/>
-                </a:schemeClr>
-              </a:lnRef>
-              <a:fillRef idx="1">
-                <a:schemeClr val="accent5"/>
-              </a:fillRef>
-              <a:effectRef idx="0">
-                <a:schemeClr val="accent5"/>
-              </a:effectRef>
-              <a:fontRef idx="minor">
-                <a:schemeClr val="lt1"/>
-              </a:fontRef>
-            </p:style>
-            <p:txBody>
-              <a:bodyPr rot="0" spcFirstLastPara="0" vert="horz" wrap="square" lIns="0" tIns="0" rIns="0" bIns="0" numCol="1" spcCol="0" rtlCol="0" fromWordArt="0" anchor="ctr" anchorCtr="0" forceAA="0" compatLnSpc="1">
-                <a:prstTxWarp prst="textNoShape">
-                  <a:avLst/>
-                </a:prstTxWarp>
-                <a:noAutofit/>
-              </a:bodyPr>
-              <a:lstStyle/>
-              <a:p>
-                <a:pPr indent="73025" algn="ctr">
-                  <a:spcAft>
-                    <a:spcPts val="0"/>
-                  </a:spcAft>
-                </a:pPr>
-                <a:r>
-                  <a:rPr lang="en-US" sz="1200" kern="100" dirty="0">
-                    <a:solidFill>
-                      <a:srgbClr val="FFFFFF"/>
-                    </a:solidFill>
-                    <a:effectLst/>
-                    <a:ea typeface="新細明體" panose="02020500000000000000" pitchFamily="18" charset="-120"/>
-                    <a:cs typeface="Times New Roman" panose="02020603050405020304" pitchFamily="18" charset="0"/>
-                  </a:rPr>
-                  <a:t>1</a:t>
-                </a:r>
-                <a:endParaRPr lang="zh-TW" sz="1200" kern="100" dirty="0">
-                  <a:effectLst/>
-                  <a:ea typeface="新細明體" panose="02020500000000000000" pitchFamily="18" charset="-120"/>
-                  <a:cs typeface="Times New Roman" panose="02020603050405020304" pitchFamily="18" charset="0"/>
-                </a:endParaRPr>
-              </a:p>
-            </p:txBody>
-          </p:sp>
-          <p:sp>
-            <p:nvSpPr>
-              <p:cNvPr id="20" name="手繪多邊形: 圖案 10">
-                <a:extLst>
-                  <a:ext uri="{FF2B5EF4-FFF2-40B4-BE49-F238E27FC236}">
-                    <a16:creationId xmlns:a16="http://schemas.microsoft.com/office/drawing/2014/main" id="{E12FA86B-02A5-4F12-B152-14AC62BAACFA}"/>
-                  </a:ext>
-                </a:extLst>
-              </p:cNvPr>
-              <p:cNvSpPr/>
-              <p:nvPr/>
-            </p:nvSpPr>
-            <p:spPr>
-              <a:xfrm>
-                <a:off x="2633667" y="2736215"/>
-                <a:ext cx="219078" cy="175260"/>
-              </a:xfrm>
-              <a:custGeom>
-                <a:avLst/>
-                <a:gdLst>
-                  <a:gd name="connsiteX0" fmla="*/ 84890 w 453390"/>
-                  <a:gd name="connsiteY0" fmla="*/ 0 h 263525"/>
-                  <a:gd name="connsiteX1" fmla="*/ 453390 w 453390"/>
-                  <a:gd name="connsiteY1" fmla="*/ 0 h 263525"/>
-                  <a:gd name="connsiteX2" fmla="*/ 453390 w 453390"/>
-                  <a:gd name="connsiteY2" fmla="*/ 263525 h 263525"/>
-                  <a:gd name="connsiteX3" fmla="*/ 84890 w 453390"/>
-                  <a:gd name="connsiteY3" fmla="*/ 263525 h 263525"/>
-                  <a:gd name="connsiteX4" fmla="*/ 59217 w 453390"/>
-                  <a:gd name="connsiteY4" fmla="*/ 168771 h 263525"/>
-                  <a:gd name="connsiteX5" fmla="*/ 4819 w 453390"/>
-                  <a:gd name="connsiteY5" fmla="*/ 221542 h 263525"/>
-                  <a:gd name="connsiteX6" fmla="*/ 0 w 453390"/>
-                  <a:gd name="connsiteY6" fmla="*/ 54571 h 263525"/>
-                  <a:gd name="connsiteX7" fmla="*/ 55658 w 453390"/>
-                  <a:gd name="connsiteY7" fmla="*/ 89403 h 263525"/>
-                  <a:gd name="connsiteX8" fmla="*/ 84890 w 453390"/>
-                  <a:gd name="connsiteY8" fmla="*/ 0 h 263525"/>
-                </a:gdLst>
-                <a:ahLst/>
-                <a:cxnLst>
-                  <a:cxn ang="0">
-                    <a:pos x="connsiteX0" y="connsiteY0"/>
-                  </a:cxn>
-                  <a:cxn ang="0">
-                    <a:pos x="connsiteX1" y="connsiteY1"/>
-                  </a:cxn>
-                  <a:cxn ang="0">
-                    <a:pos x="connsiteX2" y="connsiteY2"/>
-                  </a:cxn>
-                  <a:cxn ang="0">
-                    <a:pos x="connsiteX3" y="connsiteY3"/>
-                  </a:cxn>
-                  <a:cxn ang="0">
-                    <a:pos x="connsiteX4" y="connsiteY4"/>
-                  </a:cxn>
-                  <a:cxn ang="0">
-                    <a:pos x="connsiteX5" y="connsiteY5"/>
-                  </a:cxn>
-                  <a:cxn ang="0">
-                    <a:pos x="connsiteX6" y="connsiteY6"/>
-                  </a:cxn>
-                  <a:cxn ang="0">
-                    <a:pos x="connsiteX7" y="connsiteY7"/>
-                  </a:cxn>
-                  <a:cxn ang="0">
-                    <a:pos x="connsiteX8" y="connsiteY8"/>
-                  </a:cxn>
-                </a:cxnLst>
-                <a:rect l="l" t="t" r="r" b="b"/>
-                <a:pathLst>
-                  <a:path w="453390" h="263525">
-                    <a:moveTo>
-                      <a:pt x="84890" y="0"/>
-                    </a:moveTo>
-                    <a:lnTo>
-                      <a:pt x="453390" y="0"/>
-                    </a:lnTo>
-                    <a:lnTo>
-                      <a:pt x="453390" y="263525"/>
-                    </a:lnTo>
-                    <a:lnTo>
-                      <a:pt x="84890" y="263525"/>
-                    </a:lnTo>
-                    <a:cubicBezTo>
-                      <a:pt x="68745" y="263525"/>
-                      <a:pt x="59217" y="193028"/>
-                      <a:pt x="59217" y="168771"/>
-                    </a:cubicBezTo>
-                    <a:lnTo>
-                      <a:pt x="4819" y="221542"/>
-                    </a:lnTo>
-                    <a:lnTo>
-                      <a:pt x="0" y="54571"/>
-                    </a:lnTo>
-                    <a:lnTo>
-                      <a:pt x="55658" y="89403"/>
-                    </a:lnTo>
-                    <a:cubicBezTo>
-                      <a:pt x="55658" y="65146"/>
-                      <a:pt x="68745" y="0"/>
-                      <a:pt x="84890" y="0"/>
-                    </a:cubicBezTo>
-                    <a:close/>
-                  </a:path>
-                </a:pathLst>
-              </a:custGeom>
-            </p:spPr>
-            <p:style>
-              <a:lnRef idx="2">
-                <a:schemeClr val="accent5">
-                  <a:shade val="50000"/>
-                </a:schemeClr>
-              </a:lnRef>
-              <a:fillRef idx="1">
-                <a:schemeClr val="accent5"/>
-              </a:fillRef>
-              <a:effectRef idx="0">
-                <a:schemeClr val="accent5"/>
-              </a:effectRef>
-              <a:fontRef idx="minor">
-                <a:schemeClr val="lt1"/>
-              </a:fontRef>
-            </p:style>
-            <p:txBody>
-              <a:bodyPr rot="0" spcFirstLastPara="0" vert="horz" wrap="square" lIns="0" tIns="0" rIns="0" bIns="0" numCol="1" spcCol="0" rtlCol="0" fromWordArt="0" anchor="ctr" anchorCtr="0" forceAA="0" compatLnSpc="1">
-                <a:prstTxWarp prst="textNoShape">
-                  <a:avLst/>
-                </a:prstTxWarp>
-                <a:noAutofit/>
-              </a:bodyPr>
-              <a:lstStyle/>
-              <a:p>
-                <a:pPr indent="73025" algn="ctr">
-                  <a:spcAft>
-                    <a:spcPts val="0"/>
-                  </a:spcAft>
-                </a:pPr>
-                <a:r>
-                  <a:rPr lang="en-US" sz="1200" kern="100" dirty="0">
-                    <a:solidFill>
-                      <a:srgbClr val="FFFFFF"/>
-                    </a:solidFill>
-                    <a:effectLst/>
-                    <a:ea typeface="新細明體" panose="02020500000000000000" pitchFamily="18" charset="-120"/>
-                    <a:cs typeface="Times New Roman" panose="02020603050405020304" pitchFamily="18" charset="0"/>
-                  </a:rPr>
-                  <a:t>1</a:t>
-                </a:r>
-                <a:endParaRPr lang="zh-TW" sz="1200" kern="100" dirty="0">
-                  <a:effectLst/>
-                  <a:ea typeface="新細明體" panose="02020500000000000000" pitchFamily="18" charset="-120"/>
-                  <a:cs typeface="Times New Roman" panose="02020603050405020304" pitchFamily="18" charset="0"/>
-                </a:endParaRPr>
-              </a:p>
-            </p:txBody>
-          </p:sp>
-          <p:sp>
-            <p:nvSpPr>
-              <p:cNvPr id="21" name="手繪多邊形: 圖案 10">
-                <a:extLst>
-                  <a:ext uri="{FF2B5EF4-FFF2-40B4-BE49-F238E27FC236}">
-                    <a16:creationId xmlns:a16="http://schemas.microsoft.com/office/drawing/2014/main" id="{10723A31-625F-430A-8DD0-305ACCE78561}"/>
-                  </a:ext>
-                </a:extLst>
-              </p:cNvPr>
-              <p:cNvSpPr/>
-              <p:nvPr/>
-            </p:nvSpPr>
-            <p:spPr>
-              <a:xfrm>
-                <a:off x="2914653" y="2736215"/>
-                <a:ext cx="219078" cy="175260"/>
-              </a:xfrm>
-              <a:custGeom>
-                <a:avLst/>
-                <a:gdLst>
-                  <a:gd name="connsiteX0" fmla="*/ 84890 w 453390"/>
-                  <a:gd name="connsiteY0" fmla="*/ 0 h 263525"/>
-                  <a:gd name="connsiteX1" fmla="*/ 453390 w 453390"/>
-                  <a:gd name="connsiteY1" fmla="*/ 0 h 263525"/>
-                  <a:gd name="connsiteX2" fmla="*/ 453390 w 453390"/>
-                  <a:gd name="connsiteY2" fmla="*/ 263525 h 263525"/>
-                  <a:gd name="connsiteX3" fmla="*/ 84890 w 453390"/>
-                  <a:gd name="connsiteY3" fmla="*/ 263525 h 263525"/>
-                  <a:gd name="connsiteX4" fmla="*/ 59217 w 453390"/>
-                  <a:gd name="connsiteY4" fmla="*/ 168771 h 263525"/>
-                  <a:gd name="connsiteX5" fmla="*/ 4819 w 453390"/>
-                  <a:gd name="connsiteY5" fmla="*/ 221542 h 263525"/>
-                  <a:gd name="connsiteX6" fmla="*/ 0 w 453390"/>
-                  <a:gd name="connsiteY6" fmla="*/ 54571 h 263525"/>
-                  <a:gd name="connsiteX7" fmla="*/ 55658 w 453390"/>
-                  <a:gd name="connsiteY7" fmla="*/ 89403 h 263525"/>
-                  <a:gd name="connsiteX8" fmla="*/ 84890 w 453390"/>
-                  <a:gd name="connsiteY8" fmla="*/ 0 h 263525"/>
-                </a:gdLst>
-                <a:ahLst/>
-                <a:cxnLst>
-                  <a:cxn ang="0">
-                    <a:pos x="connsiteX0" y="connsiteY0"/>
-                  </a:cxn>
-                  <a:cxn ang="0">
-                    <a:pos x="connsiteX1" y="connsiteY1"/>
-                  </a:cxn>
-                  <a:cxn ang="0">
-                    <a:pos x="connsiteX2" y="connsiteY2"/>
-                  </a:cxn>
-                  <a:cxn ang="0">
-                    <a:pos x="connsiteX3" y="connsiteY3"/>
-                  </a:cxn>
-                  <a:cxn ang="0">
-                    <a:pos x="connsiteX4" y="connsiteY4"/>
-                  </a:cxn>
-                  <a:cxn ang="0">
-                    <a:pos x="connsiteX5" y="connsiteY5"/>
-                  </a:cxn>
-                  <a:cxn ang="0">
-                    <a:pos x="connsiteX6" y="connsiteY6"/>
-                  </a:cxn>
-                  <a:cxn ang="0">
-                    <a:pos x="connsiteX7" y="connsiteY7"/>
-                  </a:cxn>
-                  <a:cxn ang="0">
-                    <a:pos x="connsiteX8" y="connsiteY8"/>
-                  </a:cxn>
-                </a:cxnLst>
-                <a:rect l="l" t="t" r="r" b="b"/>
-                <a:pathLst>
-                  <a:path w="453390" h="263525">
-                    <a:moveTo>
-                      <a:pt x="84890" y="0"/>
-                    </a:moveTo>
-                    <a:lnTo>
-                      <a:pt x="453390" y="0"/>
-                    </a:lnTo>
-                    <a:lnTo>
-                      <a:pt x="453390" y="263525"/>
-                    </a:lnTo>
-                    <a:lnTo>
-                      <a:pt x="84890" y="263525"/>
-                    </a:lnTo>
-                    <a:cubicBezTo>
-                      <a:pt x="68745" y="263525"/>
-                      <a:pt x="59217" y="193028"/>
-                      <a:pt x="59217" y="168771"/>
-                    </a:cubicBezTo>
-                    <a:lnTo>
-                      <a:pt x="4819" y="221542"/>
-                    </a:lnTo>
-                    <a:lnTo>
-                      <a:pt x="0" y="54571"/>
-                    </a:lnTo>
-                    <a:lnTo>
-                      <a:pt x="55658" y="89403"/>
-                    </a:lnTo>
-                    <a:cubicBezTo>
-                      <a:pt x="55658" y="65146"/>
-                      <a:pt x="68745" y="0"/>
-                      <a:pt x="84890" y="0"/>
-                    </a:cubicBezTo>
-                    <a:close/>
-                  </a:path>
-                </a:pathLst>
-              </a:custGeom>
-            </p:spPr>
-            <p:style>
-              <a:lnRef idx="2">
-                <a:schemeClr val="accent5">
-                  <a:shade val="50000"/>
-                </a:schemeClr>
-              </a:lnRef>
-              <a:fillRef idx="1">
-                <a:schemeClr val="accent5"/>
-              </a:fillRef>
-              <a:effectRef idx="0">
-                <a:schemeClr val="accent5"/>
-              </a:effectRef>
-              <a:fontRef idx="minor">
-                <a:schemeClr val="lt1"/>
-              </a:fontRef>
-            </p:style>
-            <p:txBody>
-              <a:bodyPr rot="0" spcFirstLastPara="0" vert="horz" wrap="square" lIns="0" tIns="0" rIns="0" bIns="0" numCol="1" spcCol="0" rtlCol="0" fromWordArt="0" anchor="ctr" anchorCtr="0" forceAA="0" compatLnSpc="1">
-                <a:prstTxWarp prst="textNoShape">
-                  <a:avLst/>
-                </a:prstTxWarp>
-                <a:noAutofit/>
-              </a:bodyPr>
-              <a:lstStyle/>
-              <a:p>
-                <a:pPr indent="73025" algn="ctr">
-                  <a:spcAft>
-                    <a:spcPts val="0"/>
-                  </a:spcAft>
-                </a:pPr>
-                <a:r>
-                  <a:rPr lang="en-US" sz="1200" kern="100" dirty="0">
-                    <a:solidFill>
-                      <a:srgbClr val="FFFFFF"/>
-                    </a:solidFill>
-                    <a:effectLst/>
-                    <a:ea typeface="新細明體" panose="02020500000000000000" pitchFamily="18" charset="-120"/>
-                    <a:cs typeface="Times New Roman" panose="02020603050405020304" pitchFamily="18" charset="0"/>
-                  </a:rPr>
-                  <a:t>1</a:t>
-                </a:r>
-                <a:endParaRPr lang="zh-TW" sz="1200" kern="100" dirty="0">
-                  <a:effectLst/>
-                  <a:ea typeface="新細明體" panose="02020500000000000000" pitchFamily="18" charset="-120"/>
-                  <a:cs typeface="Times New Roman" panose="02020603050405020304" pitchFamily="18" charset="0"/>
-                </a:endParaRPr>
-              </a:p>
-            </p:txBody>
-          </p:sp>
-        </p:grpSp>
-        <p:grpSp>
-          <p:nvGrpSpPr>
-            <p:cNvPr id="24" name="群組 23">
-              <a:extLst>
-                <a:ext uri="{FF2B5EF4-FFF2-40B4-BE49-F238E27FC236}">
-                  <a16:creationId xmlns:a16="http://schemas.microsoft.com/office/drawing/2014/main" id="{84E99C5D-CBF1-4126-A42C-10EBDE2C7616}"/>
-                </a:ext>
-              </a:extLst>
-            </p:cNvPr>
-            <p:cNvGrpSpPr/>
-            <p:nvPr/>
-          </p:nvGrpSpPr>
-          <p:grpSpPr>
-            <a:xfrm>
-              <a:off x="1503044" y="3045672"/>
-              <a:ext cx="1630687" cy="175260"/>
-              <a:chOff x="1503044" y="2736215"/>
-              <a:chExt cx="1630687" cy="175260"/>
-            </a:xfrm>
-          </p:grpSpPr>
-          <p:sp>
-            <p:nvSpPr>
-              <p:cNvPr id="25" name="手繪多邊形: 圖案 10">
-                <a:extLst>
-                  <a:ext uri="{FF2B5EF4-FFF2-40B4-BE49-F238E27FC236}">
-                    <a16:creationId xmlns:a16="http://schemas.microsoft.com/office/drawing/2014/main" id="{E64B2C10-9892-4BB3-BF6E-DBABAECA64AA}"/>
-                  </a:ext>
-                </a:extLst>
-              </p:cNvPr>
-              <p:cNvSpPr/>
-              <p:nvPr/>
-            </p:nvSpPr>
-            <p:spPr>
-              <a:xfrm>
-                <a:off x="1503044" y="2736215"/>
-                <a:ext cx="219078" cy="175260"/>
-              </a:xfrm>
-              <a:custGeom>
-                <a:avLst/>
-                <a:gdLst>
-                  <a:gd name="connsiteX0" fmla="*/ 84890 w 453390"/>
-                  <a:gd name="connsiteY0" fmla="*/ 0 h 263525"/>
-                  <a:gd name="connsiteX1" fmla="*/ 453390 w 453390"/>
-                  <a:gd name="connsiteY1" fmla="*/ 0 h 263525"/>
-                  <a:gd name="connsiteX2" fmla="*/ 453390 w 453390"/>
-                  <a:gd name="connsiteY2" fmla="*/ 263525 h 263525"/>
-                  <a:gd name="connsiteX3" fmla="*/ 84890 w 453390"/>
-                  <a:gd name="connsiteY3" fmla="*/ 263525 h 263525"/>
-                  <a:gd name="connsiteX4" fmla="*/ 59217 w 453390"/>
-                  <a:gd name="connsiteY4" fmla="*/ 168771 h 263525"/>
-                  <a:gd name="connsiteX5" fmla="*/ 4819 w 453390"/>
-                  <a:gd name="connsiteY5" fmla="*/ 221542 h 263525"/>
-                  <a:gd name="connsiteX6" fmla="*/ 0 w 453390"/>
-                  <a:gd name="connsiteY6" fmla="*/ 54571 h 263525"/>
-                  <a:gd name="connsiteX7" fmla="*/ 55658 w 453390"/>
-                  <a:gd name="connsiteY7" fmla="*/ 89403 h 263525"/>
-                  <a:gd name="connsiteX8" fmla="*/ 84890 w 453390"/>
-                  <a:gd name="connsiteY8" fmla="*/ 0 h 263525"/>
-                </a:gdLst>
-                <a:ahLst/>
-                <a:cxnLst>
-                  <a:cxn ang="0">
-                    <a:pos x="connsiteX0" y="connsiteY0"/>
-                  </a:cxn>
-                  <a:cxn ang="0">
-                    <a:pos x="connsiteX1" y="connsiteY1"/>
-                  </a:cxn>
-                  <a:cxn ang="0">
-                    <a:pos x="connsiteX2" y="connsiteY2"/>
-                  </a:cxn>
-                  <a:cxn ang="0">
-                    <a:pos x="connsiteX3" y="connsiteY3"/>
-                  </a:cxn>
-                  <a:cxn ang="0">
-                    <a:pos x="connsiteX4" y="connsiteY4"/>
-                  </a:cxn>
-                  <a:cxn ang="0">
-                    <a:pos x="connsiteX5" y="connsiteY5"/>
-                  </a:cxn>
-                  <a:cxn ang="0">
-                    <a:pos x="connsiteX6" y="connsiteY6"/>
-                  </a:cxn>
-                  <a:cxn ang="0">
-                    <a:pos x="connsiteX7" y="connsiteY7"/>
-                  </a:cxn>
-                  <a:cxn ang="0">
-                    <a:pos x="connsiteX8" y="connsiteY8"/>
-                  </a:cxn>
-                </a:cxnLst>
-                <a:rect l="l" t="t" r="r" b="b"/>
-                <a:pathLst>
-                  <a:path w="453390" h="263525">
-                    <a:moveTo>
-                      <a:pt x="84890" y="0"/>
-                    </a:moveTo>
-                    <a:lnTo>
-                      <a:pt x="453390" y="0"/>
-                    </a:lnTo>
-                    <a:lnTo>
-                      <a:pt x="453390" y="263525"/>
-                    </a:lnTo>
-                    <a:lnTo>
-                      <a:pt x="84890" y="263525"/>
-                    </a:lnTo>
-                    <a:cubicBezTo>
-                      <a:pt x="68745" y="263525"/>
-                      <a:pt x="59217" y="193028"/>
-                      <a:pt x="59217" y="168771"/>
-                    </a:cubicBezTo>
-                    <a:lnTo>
-                      <a:pt x="4819" y="221542"/>
-                    </a:lnTo>
-                    <a:lnTo>
-                      <a:pt x="0" y="54571"/>
-                    </a:lnTo>
-                    <a:lnTo>
-                      <a:pt x="55658" y="89403"/>
-                    </a:lnTo>
-                    <a:cubicBezTo>
-                      <a:pt x="55658" y="65146"/>
-                      <a:pt x="68745" y="0"/>
-                      <a:pt x="84890" y="0"/>
-                    </a:cubicBezTo>
-                    <a:close/>
-                  </a:path>
-                </a:pathLst>
-              </a:custGeom>
-            </p:spPr>
-            <p:style>
-              <a:lnRef idx="2">
-                <a:schemeClr val="accent5">
-                  <a:shade val="50000"/>
-                </a:schemeClr>
-              </a:lnRef>
-              <a:fillRef idx="1">
-                <a:schemeClr val="accent5"/>
-              </a:fillRef>
-              <a:effectRef idx="0">
-                <a:schemeClr val="accent5"/>
-              </a:effectRef>
-              <a:fontRef idx="minor">
-                <a:schemeClr val="lt1"/>
-              </a:fontRef>
-            </p:style>
-            <p:txBody>
-              <a:bodyPr rot="0" spcFirstLastPara="0" vert="horz" wrap="square" lIns="0" tIns="0" rIns="0" bIns="0" numCol="1" spcCol="0" rtlCol="0" fromWordArt="0" anchor="ctr" anchorCtr="0" forceAA="0" compatLnSpc="1">
-                <a:prstTxWarp prst="textNoShape">
-                  <a:avLst/>
-                </a:prstTxWarp>
-                <a:noAutofit/>
-              </a:bodyPr>
-              <a:lstStyle/>
-              <a:p>
-                <a:pPr indent="73025" algn="ctr">
-                  <a:spcAft>
-                    <a:spcPts val="0"/>
-                  </a:spcAft>
-                </a:pPr>
-                <a:r>
-                  <a:rPr lang="en-US" sz="1200" kern="100" dirty="0">
-                    <a:solidFill>
-                      <a:srgbClr val="FFFFFF"/>
-                    </a:solidFill>
-                    <a:effectLst/>
-                    <a:ea typeface="新細明體" panose="02020500000000000000" pitchFamily="18" charset="-120"/>
-                    <a:cs typeface="Times New Roman" panose="02020603050405020304" pitchFamily="18" charset="0"/>
-                  </a:rPr>
-                  <a:t>1</a:t>
-                </a:r>
-                <a:endParaRPr lang="zh-TW" sz="1200" kern="100" dirty="0">
-                  <a:effectLst/>
-                  <a:ea typeface="新細明體" panose="02020500000000000000" pitchFamily="18" charset="-120"/>
-                  <a:cs typeface="Times New Roman" panose="02020603050405020304" pitchFamily="18" charset="0"/>
-                </a:endParaRPr>
-              </a:p>
-            </p:txBody>
-          </p:sp>
-          <p:sp>
-            <p:nvSpPr>
-              <p:cNvPr id="26" name="手繪多邊形: 圖案 10">
-                <a:extLst>
-                  <a:ext uri="{FF2B5EF4-FFF2-40B4-BE49-F238E27FC236}">
-                    <a16:creationId xmlns:a16="http://schemas.microsoft.com/office/drawing/2014/main" id="{91BF5181-0009-4702-87FB-4C00CDD80A87}"/>
-                  </a:ext>
-                </a:extLst>
-              </p:cNvPr>
-              <p:cNvSpPr/>
-              <p:nvPr/>
-            </p:nvSpPr>
-            <p:spPr>
-              <a:xfrm>
-                <a:off x="1784030" y="2736215"/>
-                <a:ext cx="219078" cy="175260"/>
-              </a:xfrm>
-              <a:custGeom>
-                <a:avLst/>
-                <a:gdLst>
-                  <a:gd name="connsiteX0" fmla="*/ 84890 w 453390"/>
-                  <a:gd name="connsiteY0" fmla="*/ 0 h 263525"/>
-                  <a:gd name="connsiteX1" fmla="*/ 453390 w 453390"/>
-                  <a:gd name="connsiteY1" fmla="*/ 0 h 263525"/>
-                  <a:gd name="connsiteX2" fmla="*/ 453390 w 453390"/>
-                  <a:gd name="connsiteY2" fmla="*/ 263525 h 263525"/>
-                  <a:gd name="connsiteX3" fmla="*/ 84890 w 453390"/>
-                  <a:gd name="connsiteY3" fmla="*/ 263525 h 263525"/>
-                  <a:gd name="connsiteX4" fmla="*/ 59217 w 453390"/>
-                  <a:gd name="connsiteY4" fmla="*/ 168771 h 263525"/>
-                  <a:gd name="connsiteX5" fmla="*/ 4819 w 453390"/>
-                  <a:gd name="connsiteY5" fmla="*/ 221542 h 263525"/>
-                  <a:gd name="connsiteX6" fmla="*/ 0 w 453390"/>
-                  <a:gd name="connsiteY6" fmla="*/ 54571 h 263525"/>
-                  <a:gd name="connsiteX7" fmla="*/ 55658 w 453390"/>
-                  <a:gd name="connsiteY7" fmla="*/ 89403 h 263525"/>
-                  <a:gd name="connsiteX8" fmla="*/ 84890 w 453390"/>
-                  <a:gd name="connsiteY8" fmla="*/ 0 h 263525"/>
-                </a:gdLst>
-                <a:ahLst/>
-                <a:cxnLst>
-                  <a:cxn ang="0">
-                    <a:pos x="connsiteX0" y="connsiteY0"/>
-                  </a:cxn>
-                  <a:cxn ang="0">
-                    <a:pos x="connsiteX1" y="connsiteY1"/>
-                  </a:cxn>
-                  <a:cxn ang="0">
-                    <a:pos x="connsiteX2" y="connsiteY2"/>
-                  </a:cxn>
-                  <a:cxn ang="0">
-                    <a:pos x="connsiteX3" y="connsiteY3"/>
-                  </a:cxn>
-                  <a:cxn ang="0">
-                    <a:pos x="connsiteX4" y="connsiteY4"/>
-                  </a:cxn>
-                  <a:cxn ang="0">
-                    <a:pos x="connsiteX5" y="connsiteY5"/>
-                  </a:cxn>
-                  <a:cxn ang="0">
-                    <a:pos x="connsiteX6" y="connsiteY6"/>
-                  </a:cxn>
-                  <a:cxn ang="0">
-                    <a:pos x="connsiteX7" y="connsiteY7"/>
-                  </a:cxn>
-                  <a:cxn ang="0">
-                    <a:pos x="connsiteX8" y="connsiteY8"/>
-                  </a:cxn>
-                </a:cxnLst>
-                <a:rect l="l" t="t" r="r" b="b"/>
-                <a:pathLst>
-                  <a:path w="453390" h="263525">
-                    <a:moveTo>
-                      <a:pt x="84890" y="0"/>
-                    </a:moveTo>
-                    <a:lnTo>
-                      <a:pt x="453390" y="0"/>
-                    </a:lnTo>
-                    <a:lnTo>
-                      <a:pt x="453390" y="263525"/>
-                    </a:lnTo>
-                    <a:lnTo>
-                      <a:pt x="84890" y="263525"/>
-                    </a:lnTo>
-                    <a:cubicBezTo>
-                      <a:pt x="68745" y="263525"/>
-                      <a:pt x="59217" y="193028"/>
-                      <a:pt x="59217" y="168771"/>
-                    </a:cubicBezTo>
-                    <a:lnTo>
-                      <a:pt x="4819" y="221542"/>
-                    </a:lnTo>
-                    <a:lnTo>
-                      <a:pt x="0" y="54571"/>
-                    </a:lnTo>
-                    <a:lnTo>
-                      <a:pt x="55658" y="89403"/>
-                    </a:lnTo>
-                    <a:cubicBezTo>
-                      <a:pt x="55658" y="65146"/>
-                      <a:pt x="68745" y="0"/>
-                      <a:pt x="84890" y="0"/>
-                    </a:cubicBezTo>
-                    <a:close/>
-                  </a:path>
-                </a:pathLst>
-              </a:custGeom>
-            </p:spPr>
-            <p:style>
-              <a:lnRef idx="2">
-                <a:schemeClr val="accent5">
-                  <a:shade val="50000"/>
-                </a:schemeClr>
-              </a:lnRef>
-              <a:fillRef idx="1">
-                <a:schemeClr val="accent5"/>
-              </a:fillRef>
-              <a:effectRef idx="0">
-                <a:schemeClr val="accent5"/>
-              </a:effectRef>
-              <a:fontRef idx="minor">
-                <a:schemeClr val="lt1"/>
-              </a:fontRef>
-            </p:style>
-            <p:txBody>
-              <a:bodyPr rot="0" spcFirstLastPara="0" vert="horz" wrap="square" lIns="0" tIns="0" rIns="0" bIns="0" numCol="1" spcCol="0" rtlCol="0" fromWordArt="0" anchor="ctr" anchorCtr="0" forceAA="0" compatLnSpc="1">
-                <a:prstTxWarp prst="textNoShape">
-                  <a:avLst/>
-                </a:prstTxWarp>
-                <a:noAutofit/>
-              </a:bodyPr>
-              <a:lstStyle/>
-              <a:p>
-                <a:pPr indent="73025" algn="ctr">
-                  <a:spcAft>
-                    <a:spcPts val="0"/>
-                  </a:spcAft>
-                </a:pPr>
-                <a:r>
-                  <a:rPr lang="en-US" sz="1200" kern="100" dirty="0">
-                    <a:solidFill>
-                      <a:srgbClr val="FFFFFF"/>
-                    </a:solidFill>
-                    <a:effectLst/>
-                    <a:ea typeface="新細明體" panose="02020500000000000000" pitchFamily="18" charset="-120"/>
-                    <a:cs typeface="Times New Roman" panose="02020603050405020304" pitchFamily="18" charset="0"/>
-                  </a:rPr>
-                  <a:t>1</a:t>
-                </a:r>
-                <a:endParaRPr lang="zh-TW" sz="1200" kern="100" dirty="0">
-                  <a:effectLst/>
-                  <a:ea typeface="新細明體" panose="02020500000000000000" pitchFamily="18" charset="-120"/>
-                  <a:cs typeface="Times New Roman" panose="02020603050405020304" pitchFamily="18" charset="0"/>
-                </a:endParaRPr>
-              </a:p>
-            </p:txBody>
-          </p:sp>
-          <p:sp>
-            <p:nvSpPr>
-              <p:cNvPr id="27" name="手繪多邊形: 圖案 10">
-                <a:extLst>
-                  <a:ext uri="{FF2B5EF4-FFF2-40B4-BE49-F238E27FC236}">
-                    <a16:creationId xmlns:a16="http://schemas.microsoft.com/office/drawing/2014/main" id="{96E8A11A-E923-48B1-997C-B6B0B5A9C284}"/>
-                  </a:ext>
-                </a:extLst>
-              </p:cNvPr>
-              <p:cNvSpPr/>
-              <p:nvPr/>
-            </p:nvSpPr>
-            <p:spPr>
-              <a:xfrm>
-                <a:off x="2065016" y="2736215"/>
-                <a:ext cx="219078" cy="175260"/>
-              </a:xfrm>
-              <a:custGeom>
-                <a:avLst/>
-                <a:gdLst>
-                  <a:gd name="connsiteX0" fmla="*/ 84890 w 453390"/>
-                  <a:gd name="connsiteY0" fmla="*/ 0 h 263525"/>
-                  <a:gd name="connsiteX1" fmla="*/ 453390 w 453390"/>
-                  <a:gd name="connsiteY1" fmla="*/ 0 h 263525"/>
-                  <a:gd name="connsiteX2" fmla="*/ 453390 w 453390"/>
-                  <a:gd name="connsiteY2" fmla="*/ 263525 h 263525"/>
-                  <a:gd name="connsiteX3" fmla="*/ 84890 w 453390"/>
-                  <a:gd name="connsiteY3" fmla="*/ 263525 h 263525"/>
-                  <a:gd name="connsiteX4" fmla="*/ 59217 w 453390"/>
-                  <a:gd name="connsiteY4" fmla="*/ 168771 h 263525"/>
-                  <a:gd name="connsiteX5" fmla="*/ 4819 w 453390"/>
-                  <a:gd name="connsiteY5" fmla="*/ 221542 h 263525"/>
-                  <a:gd name="connsiteX6" fmla="*/ 0 w 453390"/>
-                  <a:gd name="connsiteY6" fmla="*/ 54571 h 263525"/>
-                  <a:gd name="connsiteX7" fmla="*/ 55658 w 453390"/>
-                  <a:gd name="connsiteY7" fmla="*/ 89403 h 263525"/>
-                  <a:gd name="connsiteX8" fmla="*/ 84890 w 453390"/>
-                  <a:gd name="connsiteY8" fmla="*/ 0 h 263525"/>
-                </a:gdLst>
-                <a:ahLst/>
-                <a:cxnLst>
-                  <a:cxn ang="0">
-                    <a:pos x="connsiteX0" y="connsiteY0"/>
-                  </a:cxn>
-                  <a:cxn ang="0">
-                    <a:pos x="connsiteX1" y="connsiteY1"/>
-                  </a:cxn>
-                  <a:cxn ang="0">
-                    <a:pos x="connsiteX2" y="connsiteY2"/>
-                  </a:cxn>
-                  <a:cxn ang="0">
-                    <a:pos x="connsiteX3" y="connsiteY3"/>
-                  </a:cxn>
-                  <a:cxn ang="0">
-                    <a:pos x="connsiteX4" y="connsiteY4"/>
-                  </a:cxn>
-                  <a:cxn ang="0">
-                    <a:pos x="connsiteX5" y="connsiteY5"/>
-                  </a:cxn>
-                  <a:cxn ang="0">
-                    <a:pos x="connsiteX6" y="connsiteY6"/>
-                  </a:cxn>
-                  <a:cxn ang="0">
-                    <a:pos x="connsiteX7" y="connsiteY7"/>
-                  </a:cxn>
-                  <a:cxn ang="0">
-                    <a:pos x="connsiteX8" y="connsiteY8"/>
-                  </a:cxn>
-                </a:cxnLst>
-                <a:rect l="l" t="t" r="r" b="b"/>
-                <a:pathLst>
-                  <a:path w="453390" h="263525">
-                    <a:moveTo>
-                      <a:pt x="84890" y="0"/>
-                    </a:moveTo>
-                    <a:lnTo>
-                      <a:pt x="453390" y="0"/>
-                    </a:lnTo>
-                    <a:lnTo>
-                      <a:pt x="453390" y="263525"/>
-                    </a:lnTo>
-                    <a:lnTo>
-                      <a:pt x="84890" y="263525"/>
-                    </a:lnTo>
-                    <a:cubicBezTo>
-                      <a:pt x="68745" y="263525"/>
-                      <a:pt x="59217" y="193028"/>
-                      <a:pt x="59217" y="168771"/>
-                    </a:cubicBezTo>
-                    <a:lnTo>
-                      <a:pt x="4819" y="221542"/>
-                    </a:lnTo>
-                    <a:lnTo>
-                      <a:pt x="0" y="54571"/>
-                    </a:lnTo>
-                    <a:lnTo>
-                      <a:pt x="55658" y="89403"/>
-                    </a:lnTo>
-                    <a:cubicBezTo>
-                      <a:pt x="55658" y="65146"/>
-                      <a:pt x="68745" y="0"/>
-                      <a:pt x="84890" y="0"/>
-                    </a:cubicBezTo>
-                    <a:close/>
-                  </a:path>
-                </a:pathLst>
-              </a:custGeom>
-            </p:spPr>
-            <p:style>
-              <a:lnRef idx="2">
-                <a:schemeClr val="accent5">
-                  <a:shade val="50000"/>
-                </a:schemeClr>
-              </a:lnRef>
-              <a:fillRef idx="1">
-                <a:schemeClr val="accent5"/>
-              </a:fillRef>
-              <a:effectRef idx="0">
-                <a:schemeClr val="accent5"/>
-              </a:effectRef>
-              <a:fontRef idx="minor">
-                <a:schemeClr val="lt1"/>
-              </a:fontRef>
-            </p:style>
-            <p:txBody>
-              <a:bodyPr rot="0" spcFirstLastPara="0" vert="horz" wrap="square" lIns="0" tIns="0" rIns="0" bIns="0" numCol="1" spcCol="0" rtlCol="0" fromWordArt="0" anchor="ctr" anchorCtr="0" forceAA="0" compatLnSpc="1">
-                <a:prstTxWarp prst="textNoShape">
-                  <a:avLst/>
-                </a:prstTxWarp>
-                <a:noAutofit/>
-              </a:bodyPr>
-              <a:lstStyle/>
-              <a:p>
-                <a:pPr indent="73025" algn="ctr">
-                  <a:spcAft>
-                    <a:spcPts val="0"/>
-                  </a:spcAft>
-                </a:pPr>
-                <a:r>
-                  <a:rPr lang="en-US" sz="1200" kern="100" dirty="0">
-                    <a:solidFill>
-                      <a:srgbClr val="FFFFFF"/>
-                    </a:solidFill>
-                    <a:effectLst/>
-                    <a:ea typeface="新細明體" panose="02020500000000000000" pitchFamily="18" charset="-120"/>
-                    <a:cs typeface="Times New Roman" panose="02020603050405020304" pitchFamily="18" charset="0"/>
-                  </a:rPr>
-                  <a:t>1</a:t>
-                </a:r>
-                <a:endParaRPr lang="zh-TW" sz="1200" kern="100" dirty="0">
-                  <a:effectLst/>
-                  <a:ea typeface="新細明體" panose="02020500000000000000" pitchFamily="18" charset="-120"/>
-                  <a:cs typeface="Times New Roman" panose="02020603050405020304" pitchFamily="18" charset="0"/>
-                </a:endParaRPr>
-              </a:p>
-            </p:txBody>
-          </p:sp>
-          <p:sp>
-            <p:nvSpPr>
-              <p:cNvPr id="28" name="手繪多邊形: 圖案 10">
-                <a:extLst>
-                  <a:ext uri="{FF2B5EF4-FFF2-40B4-BE49-F238E27FC236}">
-                    <a16:creationId xmlns:a16="http://schemas.microsoft.com/office/drawing/2014/main" id="{630A0910-1B39-4CAE-8CF2-E1E459468F8D}"/>
-                  </a:ext>
-                </a:extLst>
-              </p:cNvPr>
-              <p:cNvSpPr/>
-              <p:nvPr/>
-            </p:nvSpPr>
-            <p:spPr>
-              <a:xfrm>
-                <a:off x="2346002" y="2736215"/>
-                <a:ext cx="219078" cy="175260"/>
-              </a:xfrm>
-              <a:custGeom>
-                <a:avLst/>
-                <a:gdLst>
-                  <a:gd name="connsiteX0" fmla="*/ 84890 w 453390"/>
-                  <a:gd name="connsiteY0" fmla="*/ 0 h 263525"/>
-                  <a:gd name="connsiteX1" fmla="*/ 453390 w 453390"/>
-                  <a:gd name="connsiteY1" fmla="*/ 0 h 263525"/>
-                  <a:gd name="connsiteX2" fmla="*/ 453390 w 453390"/>
-                  <a:gd name="connsiteY2" fmla="*/ 263525 h 263525"/>
-                  <a:gd name="connsiteX3" fmla="*/ 84890 w 453390"/>
-                  <a:gd name="connsiteY3" fmla="*/ 263525 h 263525"/>
-                  <a:gd name="connsiteX4" fmla="*/ 59217 w 453390"/>
-                  <a:gd name="connsiteY4" fmla="*/ 168771 h 263525"/>
-                  <a:gd name="connsiteX5" fmla="*/ 4819 w 453390"/>
-                  <a:gd name="connsiteY5" fmla="*/ 221542 h 263525"/>
-                  <a:gd name="connsiteX6" fmla="*/ 0 w 453390"/>
-                  <a:gd name="connsiteY6" fmla="*/ 54571 h 263525"/>
-                  <a:gd name="connsiteX7" fmla="*/ 55658 w 453390"/>
-                  <a:gd name="connsiteY7" fmla="*/ 89403 h 263525"/>
-                  <a:gd name="connsiteX8" fmla="*/ 84890 w 453390"/>
-                  <a:gd name="connsiteY8" fmla="*/ 0 h 263525"/>
-                </a:gdLst>
-                <a:ahLst/>
-                <a:cxnLst>
-                  <a:cxn ang="0">
-                    <a:pos x="connsiteX0" y="connsiteY0"/>
-                  </a:cxn>
-                  <a:cxn ang="0">
-                    <a:pos x="connsiteX1" y="connsiteY1"/>
-                  </a:cxn>
-                  <a:cxn ang="0">
-                    <a:pos x="connsiteX2" y="connsiteY2"/>
-                  </a:cxn>
-                  <a:cxn ang="0">
-                    <a:pos x="connsiteX3" y="connsiteY3"/>
-                  </a:cxn>
-                  <a:cxn ang="0">
-                    <a:pos x="connsiteX4" y="connsiteY4"/>
-                  </a:cxn>
-                  <a:cxn ang="0">
-                    <a:pos x="connsiteX5" y="connsiteY5"/>
-                  </a:cxn>
-                  <a:cxn ang="0">
-                    <a:pos x="connsiteX6" y="connsiteY6"/>
-                  </a:cxn>
-                  <a:cxn ang="0">
-                    <a:pos x="connsiteX7" y="connsiteY7"/>
-                  </a:cxn>
-                  <a:cxn ang="0">
-                    <a:pos x="connsiteX8" y="connsiteY8"/>
-                  </a:cxn>
-                </a:cxnLst>
-                <a:rect l="l" t="t" r="r" b="b"/>
-                <a:pathLst>
-                  <a:path w="453390" h="263525">
-                    <a:moveTo>
-                      <a:pt x="84890" y="0"/>
-                    </a:moveTo>
-                    <a:lnTo>
-                      <a:pt x="453390" y="0"/>
-                    </a:lnTo>
-                    <a:lnTo>
-                      <a:pt x="453390" y="263525"/>
-                    </a:lnTo>
-                    <a:lnTo>
-                      <a:pt x="84890" y="263525"/>
-                    </a:lnTo>
-                    <a:cubicBezTo>
-                      <a:pt x="68745" y="263525"/>
-                      <a:pt x="59217" y="193028"/>
-                      <a:pt x="59217" y="168771"/>
-                    </a:cubicBezTo>
-                    <a:lnTo>
-                      <a:pt x="4819" y="221542"/>
-                    </a:lnTo>
-                    <a:lnTo>
-                      <a:pt x="0" y="54571"/>
-                    </a:lnTo>
-                    <a:lnTo>
-                      <a:pt x="55658" y="89403"/>
-                    </a:lnTo>
-                    <a:cubicBezTo>
-                      <a:pt x="55658" y="65146"/>
-                      <a:pt x="68745" y="0"/>
-                      <a:pt x="84890" y="0"/>
-                    </a:cubicBezTo>
-                    <a:close/>
-                  </a:path>
-                </a:pathLst>
-              </a:custGeom>
-            </p:spPr>
-            <p:style>
-              <a:lnRef idx="2">
-                <a:schemeClr val="accent5">
-                  <a:shade val="50000"/>
-                </a:schemeClr>
-              </a:lnRef>
-              <a:fillRef idx="1">
-                <a:schemeClr val="accent5"/>
-              </a:fillRef>
-              <a:effectRef idx="0">
-                <a:schemeClr val="accent5"/>
-              </a:effectRef>
-              <a:fontRef idx="minor">
-                <a:schemeClr val="lt1"/>
-              </a:fontRef>
-            </p:style>
-            <p:txBody>
-              <a:bodyPr rot="0" spcFirstLastPara="0" vert="horz" wrap="square" lIns="0" tIns="0" rIns="0" bIns="0" numCol="1" spcCol="0" rtlCol="0" fromWordArt="0" anchor="ctr" anchorCtr="0" forceAA="0" compatLnSpc="1">
-                <a:prstTxWarp prst="textNoShape">
-                  <a:avLst/>
-                </a:prstTxWarp>
-                <a:noAutofit/>
-              </a:bodyPr>
-              <a:lstStyle/>
-              <a:p>
-                <a:pPr indent="73025" algn="ctr">
-                  <a:spcAft>
-                    <a:spcPts val="0"/>
-                  </a:spcAft>
-                </a:pPr>
-                <a:r>
-                  <a:rPr lang="en-US" sz="1200" kern="100" dirty="0">
-                    <a:solidFill>
-                      <a:srgbClr val="FFFFFF"/>
-                    </a:solidFill>
-                    <a:effectLst/>
-                    <a:ea typeface="新細明體" panose="02020500000000000000" pitchFamily="18" charset="-120"/>
-                    <a:cs typeface="Times New Roman" panose="02020603050405020304" pitchFamily="18" charset="0"/>
-                  </a:rPr>
-                  <a:t>1</a:t>
-                </a:r>
-                <a:endParaRPr lang="zh-TW" sz="1200" kern="100" dirty="0">
-                  <a:effectLst/>
-                  <a:ea typeface="新細明體" panose="02020500000000000000" pitchFamily="18" charset="-120"/>
-                  <a:cs typeface="Times New Roman" panose="02020603050405020304" pitchFamily="18" charset="0"/>
-                </a:endParaRPr>
-              </a:p>
-            </p:txBody>
-          </p:sp>
-          <p:sp>
-            <p:nvSpPr>
-              <p:cNvPr id="29" name="手繪多邊形: 圖案 10">
-                <a:extLst>
-                  <a:ext uri="{FF2B5EF4-FFF2-40B4-BE49-F238E27FC236}">
-                    <a16:creationId xmlns:a16="http://schemas.microsoft.com/office/drawing/2014/main" id="{87EE1B68-EC0E-40FC-96FC-3A0791CF5D9E}"/>
-                  </a:ext>
-                </a:extLst>
-              </p:cNvPr>
-              <p:cNvSpPr/>
-              <p:nvPr/>
-            </p:nvSpPr>
-            <p:spPr>
-              <a:xfrm>
-                <a:off x="2633667" y="2736215"/>
-                <a:ext cx="219078" cy="175260"/>
-              </a:xfrm>
-              <a:custGeom>
-                <a:avLst/>
-                <a:gdLst>
-                  <a:gd name="connsiteX0" fmla="*/ 84890 w 453390"/>
-                  <a:gd name="connsiteY0" fmla="*/ 0 h 263525"/>
-                  <a:gd name="connsiteX1" fmla="*/ 453390 w 453390"/>
-                  <a:gd name="connsiteY1" fmla="*/ 0 h 263525"/>
-                  <a:gd name="connsiteX2" fmla="*/ 453390 w 453390"/>
-                  <a:gd name="connsiteY2" fmla="*/ 263525 h 263525"/>
-                  <a:gd name="connsiteX3" fmla="*/ 84890 w 453390"/>
-                  <a:gd name="connsiteY3" fmla="*/ 263525 h 263525"/>
-                  <a:gd name="connsiteX4" fmla="*/ 59217 w 453390"/>
-                  <a:gd name="connsiteY4" fmla="*/ 168771 h 263525"/>
-                  <a:gd name="connsiteX5" fmla="*/ 4819 w 453390"/>
-                  <a:gd name="connsiteY5" fmla="*/ 221542 h 263525"/>
-                  <a:gd name="connsiteX6" fmla="*/ 0 w 453390"/>
-                  <a:gd name="connsiteY6" fmla="*/ 54571 h 263525"/>
-                  <a:gd name="connsiteX7" fmla="*/ 55658 w 453390"/>
-                  <a:gd name="connsiteY7" fmla="*/ 89403 h 263525"/>
-                  <a:gd name="connsiteX8" fmla="*/ 84890 w 453390"/>
-                  <a:gd name="connsiteY8" fmla="*/ 0 h 263525"/>
-                </a:gdLst>
-                <a:ahLst/>
-                <a:cxnLst>
-                  <a:cxn ang="0">
-                    <a:pos x="connsiteX0" y="connsiteY0"/>
-                  </a:cxn>
-                  <a:cxn ang="0">
-                    <a:pos x="connsiteX1" y="connsiteY1"/>
-                  </a:cxn>
-                  <a:cxn ang="0">
-                    <a:pos x="connsiteX2" y="connsiteY2"/>
-                  </a:cxn>
-                  <a:cxn ang="0">
-                    <a:pos x="connsiteX3" y="connsiteY3"/>
-                  </a:cxn>
-                  <a:cxn ang="0">
-                    <a:pos x="connsiteX4" y="connsiteY4"/>
-                  </a:cxn>
-                  <a:cxn ang="0">
-                    <a:pos x="connsiteX5" y="connsiteY5"/>
-                  </a:cxn>
-                  <a:cxn ang="0">
-                    <a:pos x="connsiteX6" y="connsiteY6"/>
-                  </a:cxn>
-                  <a:cxn ang="0">
-                    <a:pos x="connsiteX7" y="connsiteY7"/>
-                  </a:cxn>
-                  <a:cxn ang="0">
-                    <a:pos x="connsiteX8" y="connsiteY8"/>
-                  </a:cxn>
-                </a:cxnLst>
-                <a:rect l="l" t="t" r="r" b="b"/>
-                <a:pathLst>
-                  <a:path w="453390" h="263525">
-                    <a:moveTo>
-                      <a:pt x="84890" y="0"/>
-                    </a:moveTo>
-                    <a:lnTo>
-                      <a:pt x="453390" y="0"/>
-                    </a:lnTo>
-                    <a:lnTo>
-                      <a:pt x="453390" y="263525"/>
-                    </a:lnTo>
-                    <a:lnTo>
-                      <a:pt x="84890" y="263525"/>
-                    </a:lnTo>
-                    <a:cubicBezTo>
-                      <a:pt x="68745" y="263525"/>
-                      <a:pt x="59217" y="193028"/>
-                      <a:pt x="59217" y="168771"/>
-                    </a:cubicBezTo>
-                    <a:lnTo>
-                      <a:pt x="4819" y="221542"/>
-                    </a:lnTo>
-                    <a:lnTo>
-                      <a:pt x="0" y="54571"/>
-                    </a:lnTo>
-                    <a:lnTo>
-                      <a:pt x="55658" y="89403"/>
-                    </a:lnTo>
-                    <a:cubicBezTo>
-                      <a:pt x="55658" y="65146"/>
-                      <a:pt x="68745" y="0"/>
-                      <a:pt x="84890" y="0"/>
-                    </a:cubicBezTo>
-                    <a:close/>
-                  </a:path>
-                </a:pathLst>
-              </a:custGeom>
-            </p:spPr>
-            <p:style>
-              <a:lnRef idx="2">
-                <a:schemeClr val="accent5">
-                  <a:shade val="50000"/>
-                </a:schemeClr>
-              </a:lnRef>
-              <a:fillRef idx="1">
-                <a:schemeClr val="accent5"/>
-              </a:fillRef>
-              <a:effectRef idx="0">
-                <a:schemeClr val="accent5"/>
-              </a:effectRef>
-              <a:fontRef idx="minor">
-                <a:schemeClr val="lt1"/>
-              </a:fontRef>
-            </p:style>
-            <p:txBody>
-              <a:bodyPr rot="0" spcFirstLastPara="0" vert="horz" wrap="square" lIns="0" tIns="0" rIns="0" bIns="0" numCol="1" spcCol="0" rtlCol="0" fromWordArt="0" anchor="ctr" anchorCtr="0" forceAA="0" compatLnSpc="1">
-                <a:prstTxWarp prst="textNoShape">
-                  <a:avLst/>
-                </a:prstTxWarp>
-                <a:noAutofit/>
-              </a:bodyPr>
-              <a:lstStyle/>
-              <a:p>
-                <a:pPr indent="73025" algn="ctr">
-                  <a:spcAft>
-                    <a:spcPts val="0"/>
-                  </a:spcAft>
-                </a:pPr>
-                <a:r>
-                  <a:rPr lang="en-US" sz="1200" kern="100" dirty="0">
-                    <a:solidFill>
-                      <a:srgbClr val="FFFFFF"/>
-                    </a:solidFill>
-                    <a:effectLst/>
-                    <a:ea typeface="新細明體" panose="02020500000000000000" pitchFamily="18" charset="-120"/>
-                    <a:cs typeface="Times New Roman" panose="02020603050405020304" pitchFamily="18" charset="0"/>
-                  </a:rPr>
-                  <a:t>1</a:t>
-                </a:r>
-                <a:endParaRPr lang="zh-TW" sz="1200" kern="100" dirty="0">
-                  <a:effectLst/>
-                  <a:ea typeface="新細明體" panose="02020500000000000000" pitchFamily="18" charset="-120"/>
-                  <a:cs typeface="Times New Roman" panose="02020603050405020304" pitchFamily="18" charset="0"/>
-                </a:endParaRPr>
-              </a:p>
-            </p:txBody>
-          </p:sp>
-          <p:sp>
-            <p:nvSpPr>
-              <p:cNvPr id="30" name="手繪多邊形: 圖案 10">
-                <a:extLst>
-                  <a:ext uri="{FF2B5EF4-FFF2-40B4-BE49-F238E27FC236}">
-                    <a16:creationId xmlns:a16="http://schemas.microsoft.com/office/drawing/2014/main" id="{A3655E71-5A30-4BEC-8B1D-F1C2C5B267CE}"/>
-                  </a:ext>
-                </a:extLst>
-              </p:cNvPr>
-              <p:cNvSpPr/>
-              <p:nvPr/>
-            </p:nvSpPr>
-            <p:spPr>
-              <a:xfrm>
-                <a:off x="2914653" y="2736215"/>
-                <a:ext cx="219078" cy="175260"/>
-              </a:xfrm>
-              <a:custGeom>
-                <a:avLst/>
-                <a:gdLst>
-                  <a:gd name="connsiteX0" fmla="*/ 84890 w 453390"/>
-                  <a:gd name="connsiteY0" fmla="*/ 0 h 263525"/>
-                  <a:gd name="connsiteX1" fmla="*/ 453390 w 453390"/>
-                  <a:gd name="connsiteY1" fmla="*/ 0 h 263525"/>
-                  <a:gd name="connsiteX2" fmla="*/ 453390 w 453390"/>
-                  <a:gd name="connsiteY2" fmla="*/ 263525 h 263525"/>
-                  <a:gd name="connsiteX3" fmla="*/ 84890 w 453390"/>
-                  <a:gd name="connsiteY3" fmla="*/ 263525 h 263525"/>
-                  <a:gd name="connsiteX4" fmla="*/ 59217 w 453390"/>
-                  <a:gd name="connsiteY4" fmla="*/ 168771 h 263525"/>
-                  <a:gd name="connsiteX5" fmla="*/ 4819 w 453390"/>
-                  <a:gd name="connsiteY5" fmla="*/ 221542 h 263525"/>
-                  <a:gd name="connsiteX6" fmla="*/ 0 w 453390"/>
-                  <a:gd name="connsiteY6" fmla="*/ 54571 h 263525"/>
-                  <a:gd name="connsiteX7" fmla="*/ 55658 w 453390"/>
-                  <a:gd name="connsiteY7" fmla="*/ 89403 h 263525"/>
-                  <a:gd name="connsiteX8" fmla="*/ 84890 w 453390"/>
-                  <a:gd name="connsiteY8" fmla="*/ 0 h 263525"/>
-                </a:gdLst>
-                <a:ahLst/>
-                <a:cxnLst>
-                  <a:cxn ang="0">
-                    <a:pos x="connsiteX0" y="connsiteY0"/>
-                  </a:cxn>
-                  <a:cxn ang="0">
-                    <a:pos x="connsiteX1" y="connsiteY1"/>
-                  </a:cxn>
-                  <a:cxn ang="0">
-                    <a:pos x="connsiteX2" y="connsiteY2"/>
-                  </a:cxn>
-                  <a:cxn ang="0">
-                    <a:pos x="connsiteX3" y="connsiteY3"/>
-                  </a:cxn>
-                  <a:cxn ang="0">
-                    <a:pos x="connsiteX4" y="connsiteY4"/>
-                  </a:cxn>
-                  <a:cxn ang="0">
-                    <a:pos x="connsiteX5" y="connsiteY5"/>
-                  </a:cxn>
-                  <a:cxn ang="0">
-                    <a:pos x="connsiteX6" y="connsiteY6"/>
-                  </a:cxn>
-                  <a:cxn ang="0">
-                    <a:pos x="connsiteX7" y="connsiteY7"/>
-                  </a:cxn>
-                  <a:cxn ang="0">
-                    <a:pos x="connsiteX8" y="connsiteY8"/>
-                  </a:cxn>
-                </a:cxnLst>
-                <a:rect l="l" t="t" r="r" b="b"/>
-                <a:pathLst>
-                  <a:path w="453390" h="263525">
-                    <a:moveTo>
-                      <a:pt x="84890" y="0"/>
-                    </a:moveTo>
-                    <a:lnTo>
-                      <a:pt x="453390" y="0"/>
-                    </a:lnTo>
-                    <a:lnTo>
-                      <a:pt x="453390" y="263525"/>
-                    </a:lnTo>
-                    <a:lnTo>
-                      <a:pt x="84890" y="263525"/>
-                    </a:lnTo>
-                    <a:cubicBezTo>
-                      <a:pt x="68745" y="263525"/>
-                      <a:pt x="59217" y="193028"/>
-                      <a:pt x="59217" y="168771"/>
-                    </a:cubicBezTo>
-                    <a:lnTo>
-                      <a:pt x="4819" y="221542"/>
-                    </a:lnTo>
-                    <a:lnTo>
-                      <a:pt x="0" y="54571"/>
-                    </a:lnTo>
-                    <a:lnTo>
-                      <a:pt x="55658" y="89403"/>
-                    </a:lnTo>
-                    <a:cubicBezTo>
-                      <a:pt x="55658" y="65146"/>
-                      <a:pt x="68745" y="0"/>
-                      <a:pt x="84890" y="0"/>
-                    </a:cubicBezTo>
-                    <a:close/>
-                  </a:path>
-                </a:pathLst>
-              </a:custGeom>
-            </p:spPr>
-            <p:style>
-              <a:lnRef idx="2">
-                <a:schemeClr val="accent5">
-                  <a:shade val="50000"/>
-                </a:schemeClr>
-              </a:lnRef>
-              <a:fillRef idx="1">
-                <a:schemeClr val="accent5"/>
-              </a:fillRef>
-              <a:effectRef idx="0">
-                <a:schemeClr val="accent5"/>
-              </a:effectRef>
-              <a:fontRef idx="minor">
-                <a:schemeClr val="lt1"/>
-              </a:fontRef>
-            </p:style>
-            <p:txBody>
-              <a:bodyPr rot="0" spcFirstLastPara="0" vert="horz" wrap="square" lIns="0" tIns="0" rIns="0" bIns="0" numCol="1" spcCol="0" rtlCol="0" fromWordArt="0" anchor="ctr" anchorCtr="0" forceAA="0" compatLnSpc="1">
-                <a:prstTxWarp prst="textNoShape">
-                  <a:avLst/>
-                </a:prstTxWarp>
-                <a:noAutofit/>
-              </a:bodyPr>
-              <a:lstStyle/>
-              <a:p>
-                <a:pPr indent="73025" algn="ctr">
-                  <a:spcAft>
-                    <a:spcPts val="0"/>
-                  </a:spcAft>
-                </a:pPr>
-                <a:r>
-                  <a:rPr lang="en-US" sz="1200" kern="100" dirty="0">
-                    <a:solidFill>
-                      <a:srgbClr val="FFFFFF"/>
-                    </a:solidFill>
-                    <a:effectLst/>
-                    <a:ea typeface="新細明體" panose="02020500000000000000" pitchFamily="18" charset="-120"/>
-                    <a:cs typeface="Times New Roman" panose="02020603050405020304" pitchFamily="18" charset="0"/>
-                  </a:rPr>
-                  <a:t>1</a:t>
-                </a:r>
-                <a:endParaRPr lang="zh-TW" sz="1200" kern="100" dirty="0">
-                  <a:effectLst/>
-                  <a:ea typeface="新細明體" panose="02020500000000000000" pitchFamily="18" charset="-120"/>
-                  <a:cs typeface="Times New Roman" panose="02020603050405020304" pitchFamily="18" charset="0"/>
-                </a:endParaRPr>
-              </a:p>
-            </p:txBody>
-          </p:sp>
-        </p:grpSp>
-        <p:grpSp>
-          <p:nvGrpSpPr>
-            <p:cNvPr id="31" name="群組 30">
-              <a:extLst>
-                <a:ext uri="{FF2B5EF4-FFF2-40B4-BE49-F238E27FC236}">
-                  <a16:creationId xmlns:a16="http://schemas.microsoft.com/office/drawing/2014/main" id="{AD10FC0F-4136-4F8F-8A66-B6A414E9A2E8}"/>
-                </a:ext>
-              </a:extLst>
-            </p:cNvPr>
-            <p:cNvGrpSpPr/>
-            <p:nvPr/>
-          </p:nvGrpSpPr>
-          <p:grpSpPr>
-            <a:xfrm>
-              <a:off x="1503044" y="3355129"/>
-              <a:ext cx="1630687" cy="175260"/>
-              <a:chOff x="1503044" y="2736215"/>
-              <a:chExt cx="1630687" cy="175260"/>
-            </a:xfrm>
-          </p:grpSpPr>
-          <p:sp>
-            <p:nvSpPr>
-              <p:cNvPr id="32" name="手繪多邊形: 圖案 10">
-                <a:extLst>
-                  <a:ext uri="{FF2B5EF4-FFF2-40B4-BE49-F238E27FC236}">
-                    <a16:creationId xmlns:a16="http://schemas.microsoft.com/office/drawing/2014/main" id="{AC81421F-8E5E-45B8-ABEE-4FD1B6A29AE6}"/>
-                  </a:ext>
-                </a:extLst>
-              </p:cNvPr>
-              <p:cNvSpPr/>
-              <p:nvPr/>
-            </p:nvSpPr>
-            <p:spPr>
-              <a:xfrm>
-                <a:off x="1503044" y="2736215"/>
-                <a:ext cx="219078" cy="175260"/>
-              </a:xfrm>
-              <a:custGeom>
-                <a:avLst/>
-                <a:gdLst>
-                  <a:gd name="connsiteX0" fmla="*/ 84890 w 453390"/>
-                  <a:gd name="connsiteY0" fmla="*/ 0 h 263525"/>
-                  <a:gd name="connsiteX1" fmla="*/ 453390 w 453390"/>
-                  <a:gd name="connsiteY1" fmla="*/ 0 h 263525"/>
-                  <a:gd name="connsiteX2" fmla="*/ 453390 w 453390"/>
-                  <a:gd name="connsiteY2" fmla="*/ 263525 h 263525"/>
-                  <a:gd name="connsiteX3" fmla="*/ 84890 w 453390"/>
-                  <a:gd name="connsiteY3" fmla="*/ 263525 h 263525"/>
-                  <a:gd name="connsiteX4" fmla="*/ 59217 w 453390"/>
-                  <a:gd name="connsiteY4" fmla="*/ 168771 h 263525"/>
-                  <a:gd name="connsiteX5" fmla="*/ 4819 w 453390"/>
-                  <a:gd name="connsiteY5" fmla="*/ 221542 h 263525"/>
-                  <a:gd name="connsiteX6" fmla="*/ 0 w 453390"/>
-                  <a:gd name="connsiteY6" fmla="*/ 54571 h 263525"/>
-                  <a:gd name="connsiteX7" fmla="*/ 55658 w 453390"/>
-                  <a:gd name="connsiteY7" fmla="*/ 89403 h 263525"/>
-                  <a:gd name="connsiteX8" fmla="*/ 84890 w 453390"/>
-                  <a:gd name="connsiteY8" fmla="*/ 0 h 263525"/>
-                </a:gdLst>
-                <a:ahLst/>
-                <a:cxnLst>
-                  <a:cxn ang="0">
-                    <a:pos x="connsiteX0" y="connsiteY0"/>
-                  </a:cxn>
-                  <a:cxn ang="0">
-                    <a:pos x="connsiteX1" y="connsiteY1"/>
-                  </a:cxn>
-                  <a:cxn ang="0">
-                    <a:pos x="connsiteX2" y="connsiteY2"/>
-                  </a:cxn>
-                  <a:cxn ang="0">
-                    <a:pos x="connsiteX3" y="connsiteY3"/>
-                  </a:cxn>
-                  <a:cxn ang="0">
-                    <a:pos x="connsiteX4" y="connsiteY4"/>
-                  </a:cxn>
-                  <a:cxn ang="0">
-                    <a:pos x="connsiteX5" y="connsiteY5"/>
-                  </a:cxn>
-                  <a:cxn ang="0">
-                    <a:pos x="connsiteX6" y="connsiteY6"/>
-                  </a:cxn>
-                  <a:cxn ang="0">
-                    <a:pos x="connsiteX7" y="connsiteY7"/>
-                  </a:cxn>
-                  <a:cxn ang="0">
-                    <a:pos x="connsiteX8" y="connsiteY8"/>
-                  </a:cxn>
-                </a:cxnLst>
-                <a:rect l="l" t="t" r="r" b="b"/>
-                <a:pathLst>
-                  <a:path w="453390" h="263525">
-                    <a:moveTo>
-                      <a:pt x="84890" y="0"/>
-                    </a:moveTo>
-                    <a:lnTo>
-                      <a:pt x="453390" y="0"/>
-                    </a:lnTo>
-                    <a:lnTo>
-                      <a:pt x="453390" y="263525"/>
-                    </a:lnTo>
-                    <a:lnTo>
-                      <a:pt x="84890" y="263525"/>
-                    </a:lnTo>
-                    <a:cubicBezTo>
-                      <a:pt x="68745" y="263525"/>
-                      <a:pt x="59217" y="193028"/>
-                      <a:pt x="59217" y="168771"/>
-                    </a:cubicBezTo>
-                    <a:lnTo>
-                      <a:pt x="4819" y="221542"/>
-                    </a:lnTo>
-                    <a:lnTo>
-                      <a:pt x="0" y="54571"/>
-                    </a:lnTo>
-                    <a:lnTo>
-                      <a:pt x="55658" y="89403"/>
-                    </a:lnTo>
-                    <a:cubicBezTo>
-                      <a:pt x="55658" y="65146"/>
-                      <a:pt x="68745" y="0"/>
-                      <a:pt x="84890" y="0"/>
-                    </a:cubicBezTo>
-                    <a:close/>
-                  </a:path>
-                </a:pathLst>
-              </a:custGeom>
-            </p:spPr>
-            <p:style>
-              <a:lnRef idx="2">
-                <a:schemeClr val="accent5">
-                  <a:shade val="50000"/>
-                </a:schemeClr>
-              </a:lnRef>
-              <a:fillRef idx="1">
-                <a:schemeClr val="accent5"/>
-              </a:fillRef>
-              <a:effectRef idx="0">
-                <a:schemeClr val="accent5"/>
-              </a:effectRef>
-              <a:fontRef idx="minor">
-                <a:schemeClr val="lt1"/>
-              </a:fontRef>
-            </p:style>
-            <p:txBody>
-              <a:bodyPr rot="0" spcFirstLastPara="0" vert="horz" wrap="square" lIns="0" tIns="0" rIns="0" bIns="0" numCol="1" spcCol="0" rtlCol="0" fromWordArt="0" anchor="ctr" anchorCtr="0" forceAA="0" compatLnSpc="1">
-                <a:prstTxWarp prst="textNoShape">
-                  <a:avLst/>
-                </a:prstTxWarp>
-                <a:noAutofit/>
-              </a:bodyPr>
-              <a:lstStyle/>
-              <a:p>
-                <a:pPr indent="73025" algn="ctr">
-                  <a:spcAft>
-                    <a:spcPts val="0"/>
-                  </a:spcAft>
-                </a:pPr>
-                <a:r>
-                  <a:rPr lang="en-US" sz="1200" kern="100" dirty="0">
-                    <a:solidFill>
-                      <a:srgbClr val="FFFFFF"/>
-                    </a:solidFill>
-                    <a:effectLst/>
-                    <a:ea typeface="新細明體" panose="02020500000000000000" pitchFamily="18" charset="-120"/>
-                    <a:cs typeface="Times New Roman" panose="02020603050405020304" pitchFamily="18" charset="0"/>
-                  </a:rPr>
-                  <a:t>1</a:t>
-                </a:r>
-                <a:endParaRPr lang="zh-TW" sz="1200" kern="100" dirty="0">
-                  <a:effectLst/>
-                  <a:ea typeface="新細明體" panose="02020500000000000000" pitchFamily="18" charset="-120"/>
-                  <a:cs typeface="Times New Roman" panose="02020603050405020304" pitchFamily="18" charset="0"/>
-                </a:endParaRPr>
-              </a:p>
-            </p:txBody>
-          </p:sp>
-          <p:sp>
-            <p:nvSpPr>
-              <p:cNvPr id="33" name="手繪多邊形: 圖案 10">
-                <a:extLst>
-                  <a:ext uri="{FF2B5EF4-FFF2-40B4-BE49-F238E27FC236}">
-                    <a16:creationId xmlns:a16="http://schemas.microsoft.com/office/drawing/2014/main" id="{C3011F18-7831-467D-84A1-3D6E48BFF79B}"/>
-                  </a:ext>
-                </a:extLst>
-              </p:cNvPr>
-              <p:cNvSpPr/>
-              <p:nvPr/>
-            </p:nvSpPr>
-            <p:spPr>
-              <a:xfrm>
-                <a:off x="1784030" y="2736215"/>
-                <a:ext cx="219078" cy="175260"/>
-              </a:xfrm>
-              <a:custGeom>
-                <a:avLst/>
-                <a:gdLst>
-                  <a:gd name="connsiteX0" fmla="*/ 84890 w 453390"/>
-                  <a:gd name="connsiteY0" fmla="*/ 0 h 263525"/>
-                  <a:gd name="connsiteX1" fmla="*/ 453390 w 453390"/>
-                  <a:gd name="connsiteY1" fmla="*/ 0 h 263525"/>
-                  <a:gd name="connsiteX2" fmla="*/ 453390 w 453390"/>
-                  <a:gd name="connsiteY2" fmla="*/ 263525 h 263525"/>
-                  <a:gd name="connsiteX3" fmla="*/ 84890 w 453390"/>
-                  <a:gd name="connsiteY3" fmla="*/ 263525 h 263525"/>
-                  <a:gd name="connsiteX4" fmla="*/ 59217 w 453390"/>
-                  <a:gd name="connsiteY4" fmla="*/ 168771 h 263525"/>
-                  <a:gd name="connsiteX5" fmla="*/ 4819 w 453390"/>
-                  <a:gd name="connsiteY5" fmla="*/ 221542 h 263525"/>
-                  <a:gd name="connsiteX6" fmla="*/ 0 w 453390"/>
-                  <a:gd name="connsiteY6" fmla="*/ 54571 h 263525"/>
-                  <a:gd name="connsiteX7" fmla="*/ 55658 w 453390"/>
-                  <a:gd name="connsiteY7" fmla="*/ 89403 h 263525"/>
-                  <a:gd name="connsiteX8" fmla="*/ 84890 w 453390"/>
-                  <a:gd name="connsiteY8" fmla="*/ 0 h 263525"/>
-                </a:gdLst>
-                <a:ahLst/>
-                <a:cxnLst>
-                  <a:cxn ang="0">
-                    <a:pos x="connsiteX0" y="connsiteY0"/>
-                  </a:cxn>
-                  <a:cxn ang="0">
-                    <a:pos x="connsiteX1" y="connsiteY1"/>
-                  </a:cxn>
-                  <a:cxn ang="0">
-                    <a:pos x="connsiteX2" y="connsiteY2"/>
-                  </a:cxn>
-                  <a:cxn ang="0">
-                    <a:pos x="connsiteX3" y="connsiteY3"/>
-                  </a:cxn>
-                  <a:cxn ang="0">
-                    <a:pos x="connsiteX4" y="connsiteY4"/>
-                  </a:cxn>
-                  <a:cxn ang="0">
-                    <a:pos x="connsiteX5" y="connsiteY5"/>
-                  </a:cxn>
-                  <a:cxn ang="0">
-                    <a:pos x="connsiteX6" y="connsiteY6"/>
-                  </a:cxn>
-                  <a:cxn ang="0">
-                    <a:pos x="connsiteX7" y="connsiteY7"/>
-                  </a:cxn>
-                  <a:cxn ang="0">
-                    <a:pos x="connsiteX8" y="connsiteY8"/>
-                  </a:cxn>
-                </a:cxnLst>
-                <a:rect l="l" t="t" r="r" b="b"/>
-                <a:pathLst>
-                  <a:path w="453390" h="263525">
-                    <a:moveTo>
-                      <a:pt x="84890" y="0"/>
-                    </a:moveTo>
-                    <a:lnTo>
-                      <a:pt x="453390" y="0"/>
-                    </a:lnTo>
-                    <a:lnTo>
-                      <a:pt x="453390" y="263525"/>
-                    </a:lnTo>
-                    <a:lnTo>
-                      <a:pt x="84890" y="263525"/>
-                    </a:lnTo>
-                    <a:cubicBezTo>
-                      <a:pt x="68745" y="263525"/>
-                      <a:pt x="59217" y="193028"/>
-                      <a:pt x="59217" y="168771"/>
-                    </a:cubicBezTo>
-                    <a:lnTo>
-                      <a:pt x="4819" y="221542"/>
-                    </a:lnTo>
-                    <a:lnTo>
-                      <a:pt x="0" y="54571"/>
-                    </a:lnTo>
-                    <a:lnTo>
-                      <a:pt x="55658" y="89403"/>
-                    </a:lnTo>
-                    <a:cubicBezTo>
-                      <a:pt x="55658" y="65146"/>
-                      <a:pt x="68745" y="0"/>
-                      <a:pt x="84890" y="0"/>
-                    </a:cubicBezTo>
-                    <a:close/>
-                  </a:path>
-                </a:pathLst>
-              </a:custGeom>
-            </p:spPr>
-            <p:style>
-              <a:lnRef idx="2">
-                <a:schemeClr val="accent5">
-                  <a:shade val="50000"/>
-                </a:schemeClr>
-              </a:lnRef>
-              <a:fillRef idx="1">
-                <a:schemeClr val="accent5"/>
-              </a:fillRef>
-              <a:effectRef idx="0">
-                <a:schemeClr val="accent5"/>
-              </a:effectRef>
-              <a:fontRef idx="minor">
-                <a:schemeClr val="lt1"/>
-              </a:fontRef>
-            </p:style>
-            <p:txBody>
-              <a:bodyPr rot="0" spcFirstLastPara="0" vert="horz" wrap="square" lIns="0" tIns="0" rIns="0" bIns="0" numCol="1" spcCol="0" rtlCol="0" fromWordArt="0" anchor="ctr" anchorCtr="0" forceAA="0" compatLnSpc="1">
-                <a:prstTxWarp prst="textNoShape">
-                  <a:avLst/>
-                </a:prstTxWarp>
-                <a:noAutofit/>
-              </a:bodyPr>
-              <a:lstStyle/>
-              <a:p>
-                <a:pPr indent="73025" algn="ctr">
-                  <a:spcAft>
-                    <a:spcPts val="0"/>
-                  </a:spcAft>
-                </a:pPr>
-                <a:r>
-                  <a:rPr lang="en-US" sz="1200" kern="100" dirty="0">
-                    <a:solidFill>
-                      <a:srgbClr val="FFFFFF"/>
-                    </a:solidFill>
-                    <a:effectLst/>
-                    <a:ea typeface="新細明體" panose="02020500000000000000" pitchFamily="18" charset="-120"/>
-                    <a:cs typeface="Times New Roman" panose="02020603050405020304" pitchFamily="18" charset="0"/>
-                  </a:rPr>
-                  <a:t>1</a:t>
-                </a:r>
-                <a:endParaRPr lang="zh-TW" sz="1200" kern="100" dirty="0">
-                  <a:effectLst/>
-                  <a:ea typeface="新細明體" panose="02020500000000000000" pitchFamily="18" charset="-120"/>
-                  <a:cs typeface="Times New Roman" panose="02020603050405020304" pitchFamily="18" charset="0"/>
-                </a:endParaRPr>
-              </a:p>
-            </p:txBody>
-          </p:sp>
-          <p:sp>
-            <p:nvSpPr>
-              <p:cNvPr id="34" name="手繪多邊形: 圖案 10">
-                <a:extLst>
-                  <a:ext uri="{FF2B5EF4-FFF2-40B4-BE49-F238E27FC236}">
-                    <a16:creationId xmlns:a16="http://schemas.microsoft.com/office/drawing/2014/main" id="{9483881D-8CF9-4E4C-B147-53F94EF2EA90}"/>
-                  </a:ext>
-                </a:extLst>
-              </p:cNvPr>
-              <p:cNvSpPr/>
-              <p:nvPr/>
-            </p:nvSpPr>
-            <p:spPr>
-              <a:xfrm>
-                <a:off x="2065016" y="2736215"/>
-                <a:ext cx="219078" cy="175260"/>
-              </a:xfrm>
-              <a:custGeom>
-                <a:avLst/>
-                <a:gdLst>
-                  <a:gd name="connsiteX0" fmla="*/ 84890 w 453390"/>
-                  <a:gd name="connsiteY0" fmla="*/ 0 h 263525"/>
-                  <a:gd name="connsiteX1" fmla="*/ 453390 w 453390"/>
-                  <a:gd name="connsiteY1" fmla="*/ 0 h 263525"/>
-                  <a:gd name="connsiteX2" fmla="*/ 453390 w 453390"/>
-                  <a:gd name="connsiteY2" fmla="*/ 263525 h 263525"/>
-                  <a:gd name="connsiteX3" fmla="*/ 84890 w 453390"/>
-                  <a:gd name="connsiteY3" fmla="*/ 263525 h 263525"/>
-                  <a:gd name="connsiteX4" fmla="*/ 59217 w 453390"/>
-                  <a:gd name="connsiteY4" fmla="*/ 168771 h 263525"/>
-                  <a:gd name="connsiteX5" fmla="*/ 4819 w 453390"/>
-                  <a:gd name="connsiteY5" fmla="*/ 221542 h 263525"/>
-                  <a:gd name="connsiteX6" fmla="*/ 0 w 453390"/>
-                  <a:gd name="connsiteY6" fmla="*/ 54571 h 263525"/>
-                  <a:gd name="connsiteX7" fmla="*/ 55658 w 453390"/>
-                  <a:gd name="connsiteY7" fmla="*/ 89403 h 263525"/>
-                  <a:gd name="connsiteX8" fmla="*/ 84890 w 453390"/>
-                  <a:gd name="connsiteY8" fmla="*/ 0 h 263525"/>
-                </a:gdLst>
-                <a:ahLst/>
-                <a:cxnLst>
-                  <a:cxn ang="0">
-                    <a:pos x="connsiteX0" y="connsiteY0"/>
-                  </a:cxn>
-                  <a:cxn ang="0">
-                    <a:pos x="connsiteX1" y="connsiteY1"/>
-                  </a:cxn>
-                  <a:cxn ang="0">
-                    <a:pos x="connsiteX2" y="connsiteY2"/>
-                  </a:cxn>
-                  <a:cxn ang="0">
-                    <a:pos x="connsiteX3" y="connsiteY3"/>
-                  </a:cxn>
-                  <a:cxn ang="0">
-                    <a:pos x="connsiteX4" y="connsiteY4"/>
-                  </a:cxn>
-                  <a:cxn ang="0">
-                    <a:pos x="connsiteX5" y="connsiteY5"/>
-                  </a:cxn>
-                  <a:cxn ang="0">
-                    <a:pos x="connsiteX6" y="connsiteY6"/>
-                  </a:cxn>
-                  <a:cxn ang="0">
-                    <a:pos x="connsiteX7" y="connsiteY7"/>
-                  </a:cxn>
-                  <a:cxn ang="0">
-                    <a:pos x="connsiteX8" y="connsiteY8"/>
-                  </a:cxn>
-                </a:cxnLst>
-                <a:rect l="l" t="t" r="r" b="b"/>
-                <a:pathLst>
-                  <a:path w="453390" h="263525">
-                    <a:moveTo>
-                      <a:pt x="84890" y="0"/>
-                    </a:moveTo>
-                    <a:lnTo>
-                      <a:pt x="453390" y="0"/>
-                    </a:lnTo>
-                    <a:lnTo>
-                      <a:pt x="453390" y="263525"/>
-                    </a:lnTo>
-                    <a:lnTo>
-                      <a:pt x="84890" y="263525"/>
-                    </a:lnTo>
-                    <a:cubicBezTo>
-                      <a:pt x="68745" y="263525"/>
-                      <a:pt x="59217" y="193028"/>
-                      <a:pt x="59217" y="168771"/>
-                    </a:cubicBezTo>
-                    <a:lnTo>
-                      <a:pt x="4819" y="221542"/>
-                    </a:lnTo>
-                    <a:lnTo>
-                      <a:pt x="0" y="54571"/>
-                    </a:lnTo>
-                    <a:lnTo>
-                      <a:pt x="55658" y="89403"/>
-                    </a:lnTo>
-                    <a:cubicBezTo>
-                      <a:pt x="55658" y="65146"/>
-                      <a:pt x="68745" y="0"/>
-                      <a:pt x="84890" y="0"/>
-                    </a:cubicBezTo>
-                    <a:close/>
-                  </a:path>
-                </a:pathLst>
-              </a:custGeom>
-            </p:spPr>
-            <p:style>
-              <a:lnRef idx="2">
-                <a:schemeClr val="accent5">
-                  <a:shade val="50000"/>
-                </a:schemeClr>
-              </a:lnRef>
-              <a:fillRef idx="1">
-                <a:schemeClr val="accent5"/>
-              </a:fillRef>
-              <a:effectRef idx="0">
-                <a:schemeClr val="accent5"/>
-              </a:effectRef>
-              <a:fontRef idx="minor">
-                <a:schemeClr val="lt1"/>
-              </a:fontRef>
-            </p:style>
-            <p:txBody>
-              <a:bodyPr rot="0" spcFirstLastPara="0" vert="horz" wrap="square" lIns="0" tIns="0" rIns="0" bIns="0" numCol="1" spcCol="0" rtlCol="0" fromWordArt="0" anchor="ctr" anchorCtr="0" forceAA="0" compatLnSpc="1">
-                <a:prstTxWarp prst="textNoShape">
-                  <a:avLst/>
-                </a:prstTxWarp>
-                <a:noAutofit/>
-              </a:bodyPr>
-              <a:lstStyle/>
-              <a:p>
-                <a:pPr indent="73025" algn="ctr">
-                  <a:spcAft>
-                    <a:spcPts val="0"/>
-                  </a:spcAft>
-                </a:pPr>
-                <a:r>
-                  <a:rPr lang="en-US" sz="1200" kern="100" dirty="0">
-                    <a:solidFill>
-                      <a:srgbClr val="FFFFFF"/>
-                    </a:solidFill>
-                    <a:effectLst/>
-                    <a:ea typeface="新細明體" panose="02020500000000000000" pitchFamily="18" charset="-120"/>
-                    <a:cs typeface="Times New Roman" panose="02020603050405020304" pitchFamily="18" charset="0"/>
-                  </a:rPr>
-                  <a:t>1</a:t>
-                </a:r>
-                <a:endParaRPr lang="zh-TW" sz="1200" kern="100" dirty="0">
-                  <a:effectLst/>
-                  <a:ea typeface="新細明體" panose="02020500000000000000" pitchFamily="18" charset="-120"/>
-                  <a:cs typeface="Times New Roman" panose="02020603050405020304" pitchFamily="18" charset="0"/>
-                </a:endParaRPr>
-              </a:p>
-            </p:txBody>
-          </p:sp>
-          <p:sp>
-            <p:nvSpPr>
-              <p:cNvPr id="35" name="手繪多邊形: 圖案 10">
-                <a:extLst>
-                  <a:ext uri="{FF2B5EF4-FFF2-40B4-BE49-F238E27FC236}">
-                    <a16:creationId xmlns:a16="http://schemas.microsoft.com/office/drawing/2014/main" id="{427C3B60-6D99-425D-8398-9796AF693D84}"/>
-                  </a:ext>
-                </a:extLst>
-              </p:cNvPr>
-              <p:cNvSpPr/>
-              <p:nvPr/>
-            </p:nvSpPr>
-            <p:spPr>
-              <a:xfrm>
-                <a:off x="2346002" y="2736215"/>
-                <a:ext cx="219078" cy="175260"/>
-              </a:xfrm>
-              <a:custGeom>
-                <a:avLst/>
-                <a:gdLst>
-                  <a:gd name="connsiteX0" fmla="*/ 84890 w 453390"/>
-                  <a:gd name="connsiteY0" fmla="*/ 0 h 263525"/>
-                  <a:gd name="connsiteX1" fmla="*/ 453390 w 453390"/>
-                  <a:gd name="connsiteY1" fmla="*/ 0 h 263525"/>
-                  <a:gd name="connsiteX2" fmla="*/ 453390 w 453390"/>
-                  <a:gd name="connsiteY2" fmla="*/ 263525 h 263525"/>
-                  <a:gd name="connsiteX3" fmla="*/ 84890 w 453390"/>
-                  <a:gd name="connsiteY3" fmla="*/ 263525 h 263525"/>
-                  <a:gd name="connsiteX4" fmla="*/ 59217 w 453390"/>
-                  <a:gd name="connsiteY4" fmla="*/ 168771 h 263525"/>
-                  <a:gd name="connsiteX5" fmla="*/ 4819 w 453390"/>
-                  <a:gd name="connsiteY5" fmla="*/ 221542 h 263525"/>
-                  <a:gd name="connsiteX6" fmla="*/ 0 w 453390"/>
-                  <a:gd name="connsiteY6" fmla="*/ 54571 h 263525"/>
-                  <a:gd name="connsiteX7" fmla="*/ 55658 w 453390"/>
-                  <a:gd name="connsiteY7" fmla="*/ 89403 h 263525"/>
-                  <a:gd name="connsiteX8" fmla="*/ 84890 w 453390"/>
-                  <a:gd name="connsiteY8" fmla="*/ 0 h 263525"/>
-                </a:gdLst>
-                <a:ahLst/>
-                <a:cxnLst>
-                  <a:cxn ang="0">
-                    <a:pos x="connsiteX0" y="connsiteY0"/>
-                  </a:cxn>
-                  <a:cxn ang="0">
-                    <a:pos x="connsiteX1" y="connsiteY1"/>
-                  </a:cxn>
-                  <a:cxn ang="0">
-                    <a:pos x="connsiteX2" y="connsiteY2"/>
-                  </a:cxn>
-                  <a:cxn ang="0">
-                    <a:pos x="connsiteX3" y="connsiteY3"/>
-                  </a:cxn>
-                  <a:cxn ang="0">
-                    <a:pos x="connsiteX4" y="connsiteY4"/>
-                  </a:cxn>
-                  <a:cxn ang="0">
-                    <a:pos x="connsiteX5" y="connsiteY5"/>
-                  </a:cxn>
-                  <a:cxn ang="0">
-                    <a:pos x="connsiteX6" y="connsiteY6"/>
-                  </a:cxn>
-                  <a:cxn ang="0">
-                    <a:pos x="connsiteX7" y="connsiteY7"/>
-                  </a:cxn>
-                  <a:cxn ang="0">
-                    <a:pos x="connsiteX8" y="connsiteY8"/>
-                  </a:cxn>
-                </a:cxnLst>
-                <a:rect l="l" t="t" r="r" b="b"/>
-                <a:pathLst>
-                  <a:path w="453390" h="263525">
-                    <a:moveTo>
-                      <a:pt x="84890" y="0"/>
-                    </a:moveTo>
-                    <a:lnTo>
-                      <a:pt x="453390" y="0"/>
-                    </a:lnTo>
-                    <a:lnTo>
-                      <a:pt x="453390" y="263525"/>
-                    </a:lnTo>
-                    <a:lnTo>
-                      <a:pt x="84890" y="263525"/>
-                    </a:lnTo>
-                    <a:cubicBezTo>
-                      <a:pt x="68745" y="263525"/>
-                      <a:pt x="59217" y="193028"/>
-                      <a:pt x="59217" y="168771"/>
-                    </a:cubicBezTo>
-                    <a:lnTo>
-                      <a:pt x="4819" y="221542"/>
-                    </a:lnTo>
-                    <a:lnTo>
-                      <a:pt x="0" y="54571"/>
-                    </a:lnTo>
-                    <a:lnTo>
-                      <a:pt x="55658" y="89403"/>
-                    </a:lnTo>
-                    <a:cubicBezTo>
-                      <a:pt x="55658" y="65146"/>
-                      <a:pt x="68745" y="0"/>
-                      <a:pt x="84890" y="0"/>
-                    </a:cubicBezTo>
-                    <a:close/>
-                  </a:path>
-                </a:pathLst>
-              </a:custGeom>
-            </p:spPr>
-            <p:style>
-              <a:lnRef idx="2">
-                <a:schemeClr val="accent5">
-                  <a:shade val="50000"/>
-                </a:schemeClr>
-              </a:lnRef>
-              <a:fillRef idx="1">
-                <a:schemeClr val="accent5"/>
-              </a:fillRef>
-              <a:effectRef idx="0">
-                <a:schemeClr val="accent5"/>
-              </a:effectRef>
-              <a:fontRef idx="minor">
-                <a:schemeClr val="lt1"/>
-              </a:fontRef>
-            </p:style>
-            <p:txBody>
-              <a:bodyPr rot="0" spcFirstLastPara="0" vert="horz" wrap="square" lIns="0" tIns="0" rIns="0" bIns="0" numCol="1" spcCol="0" rtlCol="0" fromWordArt="0" anchor="ctr" anchorCtr="0" forceAA="0" compatLnSpc="1">
-                <a:prstTxWarp prst="textNoShape">
-                  <a:avLst/>
-                </a:prstTxWarp>
-                <a:noAutofit/>
-              </a:bodyPr>
-              <a:lstStyle/>
-              <a:p>
-                <a:pPr indent="73025" algn="ctr">
-                  <a:spcAft>
-                    <a:spcPts val="0"/>
-                  </a:spcAft>
-                </a:pPr>
-                <a:r>
-                  <a:rPr lang="en-US" sz="1200" kern="100" dirty="0">
-                    <a:solidFill>
-                      <a:srgbClr val="FFFFFF"/>
-                    </a:solidFill>
-                    <a:effectLst/>
-                    <a:ea typeface="新細明體" panose="02020500000000000000" pitchFamily="18" charset="-120"/>
-                    <a:cs typeface="Times New Roman" panose="02020603050405020304" pitchFamily="18" charset="0"/>
-                  </a:rPr>
-                  <a:t>1</a:t>
-                </a:r>
-                <a:endParaRPr lang="zh-TW" sz="1200" kern="100" dirty="0">
-                  <a:effectLst/>
-                  <a:ea typeface="新細明體" panose="02020500000000000000" pitchFamily="18" charset="-120"/>
-                  <a:cs typeface="Times New Roman" panose="02020603050405020304" pitchFamily="18" charset="0"/>
-                </a:endParaRPr>
-              </a:p>
-            </p:txBody>
-          </p:sp>
-          <p:sp>
-            <p:nvSpPr>
-              <p:cNvPr id="36" name="手繪多邊形: 圖案 10">
-                <a:extLst>
-                  <a:ext uri="{FF2B5EF4-FFF2-40B4-BE49-F238E27FC236}">
-                    <a16:creationId xmlns:a16="http://schemas.microsoft.com/office/drawing/2014/main" id="{5560B283-7234-41D6-B1AD-A541FB63B2B6}"/>
-                  </a:ext>
-                </a:extLst>
-              </p:cNvPr>
-              <p:cNvSpPr/>
-              <p:nvPr/>
-            </p:nvSpPr>
-            <p:spPr>
-              <a:xfrm>
-                <a:off x="2633667" y="2736215"/>
-                <a:ext cx="219078" cy="175260"/>
-              </a:xfrm>
-              <a:custGeom>
-                <a:avLst/>
-                <a:gdLst>
-                  <a:gd name="connsiteX0" fmla="*/ 84890 w 453390"/>
-                  <a:gd name="connsiteY0" fmla="*/ 0 h 263525"/>
-                  <a:gd name="connsiteX1" fmla="*/ 453390 w 453390"/>
-                  <a:gd name="connsiteY1" fmla="*/ 0 h 263525"/>
-                  <a:gd name="connsiteX2" fmla="*/ 453390 w 453390"/>
-                  <a:gd name="connsiteY2" fmla="*/ 263525 h 263525"/>
-                  <a:gd name="connsiteX3" fmla="*/ 84890 w 453390"/>
-                  <a:gd name="connsiteY3" fmla="*/ 263525 h 263525"/>
-                  <a:gd name="connsiteX4" fmla="*/ 59217 w 453390"/>
-                  <a:gd name="connsiteY4" fmla="*/ 168771 h 263525"/>
-                  <a:gd name="connsiteX5" fmla="*/ 4819 w 453390"/>
-                  <a:gd name="connsiteY5" fmla="*/ 221542 h 263525"/>
-                  <a:gd name="connsiteX6" fmla="*/ 0 w 453390"/>
-                  <a:gd name="connsiteY6" fmla="*/ 54571 h 263525"/>
-                  <a:gd name="connsiteX7" fmla="*/ 55658 w 453390"/>
-                  <a:gd name="connsiteY7" fmla="*/ 89403 h 263525"/>
-                  <a:gd name="connsiteX8" fmla="*/ 84890 w 453390"/>
-                  <a:gd name="connsiteY8" fmla="*/ 0 h 263525"/>
-                </a:gdLst>
-                <a:ahLst/>
-                <a:cxnLst>
-                  <a:cxn ang="0">
-                    <a:pos x="connsiteX0" y="connsiteY0"/>
-                  </a:cxn>
-                  <a:cxn ang="0">
-                    <a:pos x="connsiteX1" y="connsiteY1"/>
-                  </a:cxn>
-                  <a:cxn ang="0">
-                    <a:pos x="connsiteX2" y="connsiteY2"/>
-                  </a:cxn>
-                  <a:cxn ang="0">
-                    <a:pos x="connsiteX3" y="connsiteY3"/>
-                  </a:cxn>
-                  <a:cxn ang="0">
-                    <a:pos x="connsiteX4" y="connsiteY4"/>
-                  </a:cxn>
-                  <a:cxn ang="0">
-                    <a:pos x="connsiteX5" y="connsiteY5"/>
-                  </a:cxn>
-                  <a:cxn ang="0">
-                    <a:pos x="connsiteX6" y="connsiteY6"/>
-                  </a:cxn>
-                  <a:cxn ang="0">
-                    <a:pos x="connsiteX7" y="connsiteY7"/>
-                  </a:cxn>
-                  <a:cxn ang="0">
-                    <a:pos x="connsiteX8" y="connsiteY8"/>
-                  </a:cxn>
-                </a:cxnLst>
-                <a:rect l="l" t="t" r="r" b="b"/>
-                <a:pathLst>
-                  <a:path w="453390" h="263525">
-                    <a:moveTo>
-                      <a:pt x="84890" y="0"/>
-                    </a:moveTo>
-                    <a:lnTo>
-                      <a:pt x="453390" y="0"/>
-                    </a:lnTo>
-                    <a:lnTo>
-                      <a:pt x="453390" y="263525"/>
-                    </a:lnTo>
-                    <a:lnTo>
-                      <a:pt x="84890" y="263525"/>
-                    </a:lnTo>
-                    <a:cubicBezTo>
-                      <a:pt x="68745" y="263525"/>
-                      <a:pt x="59217" y="193028"/>
-                      <a:pt x="59217" y="168771"/>
-                    </a:cubicBezTo>
-                    <a:lnTo>
-                      <a:pt x="4819" y="221542"/>
-                    </a:lnTo>
-                    <a:lnTo>
-                      <a:pt x="0" y="54571"/>
-                    </a:lnTo>
-                    <a:lnTo>
-                      <a:pt x="55658" y="89403"/>
-                    </a:lnTo>
-                    <a:cubicBezTo>
-                      <a:pt x="55658" y="65146"/>
-                      <a:pt x="68745" y="0"/>
-                      <a:pt x="84890" y="0"/>
-                    </a:cubicBezTo>
-                    <a:close/>
-                  </a:path>
-                </a:pathLst>
-              </a:custGeom>
-            </p:spPr>
-            <p:style>
-              <a:lnRef idx="2">
-                <a:schemeClr val="accent5">
-                  <a:shade val="50000"/>
-                </a:schemeClr>
-              </a:lnRef>
-              <a:fillRef idx="1">
-                <a:schemeClr val="accent5"/>
-              </a:fillRef>
-              <a:effectRef idx="0">
-                <a:schemeClr val="accent5"/>
-              </a:effectRef>
-              <a:fontRef idx="minor">
-                <a:schemeClr val="lt1"/>
-              </a:fontRef>
-            </p:style>
-            <p:txBody>
-              <a:bodyPr rot="0" spcFirstLastPara="0" vert="horz" wrap="square" lIns="0" tIns="0" rIns="0" bIns="0" numCol="1" spcCol="0" rtlCol="0" fromWordArt="0" anchor="ctr" anchorCtr="0" forceAA="0" compatLnSpc="1">
-                <a:prstTxWarp prst="textNoShape">
-                  <a:avLst/>
-                </a:prstTxWarp>
-                <a:noAutofit/>
-              </a:bodyPr>
-              <a:lstStyle/>
-              <a:p>
-                <a:pPr indent="73025" algn="ctr">
-                  <a:spcAft>
-                    <a:spcPts val="0"/>
-                  </a:spcAft>
-                </a:pPr>
-                <a:r>
-                  <a:rPr lang="en-US" sz="1200" kern="100" dirty="0">
-                    <a:solidFill>
-                      <a:srgbClr val="FFFFFF"/>
-                    </a:solidFill>
-                    <a:effectLst/>
-                    <a:ea typeface="新細明體" panose="02020500000000000000" pitchFamily="18" charset="-120"/>
-                    <a:cs typeface="Times New Roman" panose="02020603050405020304" pitchFamily="18" charset="0"/>
-                  </a:rPr>
-                  <a:t>1</a:t>
-                </a:r>
-                <a:endParaRPr lang="zh-TW" sz="1200" kern="100" dirty="0">
-                  <a:effectLst/>
-                  <a:ea typeface="新細明體" panose="02020500000000000000" pitchFamily="18" charset="-120"/>
-                  <a:cs typeface="Times New Roman" panose="02020603050405020304" pitchFamily="18" charset="0"/>
-                </a:endParaRPr>
-              </a:p>
-            </p:txBody>
-          </p:sp>
-          <p:sp>
-            <p:nvSpPr>
-              <p:cNvPr id="37" name="手繪多邊形: 圖案 10">
-                <a:extLst>
-                  <a:ext uri="{FF2B5EF4-FFF2-40B4-BE49-F238E27FC236}">
-                    <a16:creationId xmlns:a16="http://schemas.microsoft.com/office/drawing/2014/main" id="{CB13022C-D744-47C6-91A0-288305D50156}"/>
-                  </a:ext>
-                </a:extLst>
-              </p:cNvPr>
-              <p:cNvSpPr/>
-              <p:nvPr/>
-            </p:nvSpPr>
-            <p:spPr>
-              <a:xfrm>
-                <a:off x="2914653" y="2736215"/>
-                <a:ext cx="219078" cy="175260"/>
-              </a:xfrm>
-              <a:custGeom>
-                <a:avLst/>
-                <a:gdLst>
-                  <a:gd name="connsiteX0" fmla="*/ 84890 w 453390"/>
-                  <a:gd name="connsiteY0" fmla="*/ 0 h 263525"/>
-                  <a:gd name="connsiteX1" fmla="*/ 453390 w 453390"/>
-                  <a:gd name="connsiteY1" fmla="*/ 0 h 263525"/>
-                  <a:gd name="connsiteX2" fmla="*/ 453390 w 453390"/>
-                  <a:gd name="connsiteY2" fmla="*/ 263525 h 263525"/>
-                  <a:gd name="connsiteX3" fmla="*/ 84890 w 453390"/>
-                  <a:gd name="connsiteY3" fmla="*/ 263525 h 263525"/>
-                  <a:gd name="connsiteX4" fmla="*/ 59217 w 453390"/>
-                  <a:gd name="connsiteY4" fmla="*/ 168771 h 263525"/>
-                  <a:gd name="connsiteX5" fmla="*/ 4819 w 453390"/>
-                  <a:gd name="connsiteY5" fmla="*/ 221542 h 263525"/>
-                  <a:gd name="connsiteX6" fmla="*/ 0 w 453390"/>
-                  <a:gd name="connsiteY6" fmla="*/ 54571 h 263525"/>
-                  <a:gd name="connsiteX7" fmla="*/ 55658 w 453390"/>
-                  <a:gd name="connsiteY7" fmla="*/ 89403 h 263525"/>
-                  <a:gd name="connsiteX8" fmla="*/ 84890 w 453390"/>
-                  <a:gd name="connsiteY8" fmla="*/ 0 h 263525"/>
-                </a:gdLst>
-                <a:ahLst/>
-                <a:cxnLst>
-                  <a:cxn ang="0">
-                    <a:pos x="connsiteX0" y="connsiteY0"/>
-                  </a:cxn>
-                  <a:cxn ang="0">
-                    <a:pos x="connsiteX1" y="connsiteY1"/>
-                  </a:cxn>
-                  <a:cxn ang="0">
-                    <a:pos x="connsiteX2" y="connsiteY2"/>
-                  </a:cxn>
-                  <a:cxn ang="0">
-                    <a:pos x="connsiteX3" y="connsiteY3"/>
-                  </a:cxn>
-                  <a:cxn ang="0">
-                    <a:pos x="connsiteX4" y="connsiteY4"/>
-                  </a:cxn>
-                  <a:cxn ang="0">
-                    <a:pos x="connsiteX5" y="connsiteY5"/>
-                  </a:cxn>
-                  <a:cxn ang="0">
-                    <a:pos x="connsiteX6" y="connsiteY6"/>
-                  </a:cxn>
-                  <a:cxn ang="0">
-                    <a:pos x="connsiteX7" y="connsiteY7"/>
-                  </a:cxn>
-                  <a:cxn ang="0">
-                    <a:pos x="connsiteX8" y="connsiteY8"/>
-                  </a:cxn>
-                </a:cxnLst>
-                <a:rect l="l" t="t" r="r" b="b"/>
-                <a:pathLst>
-                  <a:path w="453390" h="263525">
-                    <a:moveTo>
-                      <a:pt x="84890" y="0"/>
-                    </a:moveTo>
-                    <a:lnTo>
-                      <a:pt x="453390" y="0"/>
-                    </a:lnTo>
-                    <a:lnTo>
-                      <a:pt x="453390" y="263525"/>
-                    </a:lnTo>
-                    <a:lnTo>
-                      <a:pt x="84890" y="263525"/>
-                    </a:lnTo>
-                    <a:cubicBezTo>
-                      <a:pt x="68745" y="263525"/>
-                      <a:pt x="59217" y="193028"/>
-                      <a:pt x="59217" y="168771"/>
-                    </a:cubicBezTo>
-                    <a:lnTo>
-                      <a:pt x="4819" y="221542"/>
-                    </a:lnTo>
-                    <a:lnTo>
-                      <a:pt x="0" y="54571"/>
-                    </a:lnTo>
-                    <a:lnTo>
-                      <a:pt x="55658" y="89403"/>
-                    </a:lnTo>
-                    <a:cubicBezTo>
-                      <a:pt x="55658" y="65146"/>
-                      <a:pt x="68745" y="0"/>
-                      <a:pt x="84890" y="0"/>
-                    </a:cubicBezTo>
-                    <a:close/>
-                  </a:path>
-                </a:pathLst>
-              </a:custGeom>
-            </p:spPr>
-            <p:style>
-              <a:lnRef idx="2">
-                <a:schemeClr val="accent5">
-                  <a:shade val="50000"/>
-                </a:schemeClr>
-              </a:lnRef>
-              <a:fillRef idx="1">
-                <a:schemeClr val="accent5"/>
-              </a:fillRef>
-              <a:effectRef idx="0">
-                <a:schemeClr val="accent5"/>
-              </a:effectRef>
-              <a:fontRef idx="minor">
-                <a:schemeClr val="lt1"/>
-              </a:fontRef>
-            </p:style>
-            <p:txBody>
-              <a:bodyPr rot="0" spcFirstLastPara="0" vert="horz" wrap="square" lIns="0" tIns="0" rIns="0" bIns="0" numCol="1" spcCol="0" rtlCol="0" fromWordArt="0" anchor="ctr" anchorCtr="0" forceAA="0" compatLnSpc="1">
-                <a:prstTxWarp prst="textNoShape">
-                  <a:avLst/>
-                </a:prstTxWarp>
-                <a:noAutofit/>
-              </a:bodyPr>
-              <a:lstStyle/>
-              <a:p>
-                <a:pPr indent="73025" algn="ctr">
-                  <a:spcAft>
-                    <a:spcPts val="0"/>
-                  </a:spcAft>
-                </a:pPr>
-                <a:r>
-                  <a:rPr lang="en-US" sz="1200" kern="100" dirty="0">
-                    <a:solidFill>
-                      <a:srgbClr val="FFFFFF"/>
-                    </a:solidFill>
-                    <a:effectLst/>
-                    <a:ea typeface="新細明體" panose="02020500000000000000" pitchFamily="18" charset="-120"/>
-                    <a:cs typeface="Times New Roman" panose="02020603050405020304" pitchFamily="18" charset="0"/>
-                  </a:rPr>
-                  <a:t>1</a:t>
-                </a:r>
-                <a:endParaRPr lang="zh-TW" sz="1200" kern="100" dirty="0">
-                  <a:effectLst/>
-                  <a:ea typeface="新細明體" panose="02020500000000000000" pitchFamily="18" charset="-120"/>
-                  <a:cs typeface="Times New Roman" panose="02020603050405020304" pitchFamily="18" charset="0"/>
-                </a:endParaRPr>
-              </a:p>
-            </p:txBody>
-          </p:sp>
-        </p:grpSp>
-        <p:grpSp>
-          <p:nvGrpSpPr>
-            <p:cNvPr id="38" name="群組 37">
-              <a:extLst>
-                <a:ext uri="{FF2B5EF4-FFF2-40B4-BE49-F238E27FC236}">
-                  <a16:creationId xmlns:a16="http://schemas.microsoft.com/office/drawing/2014/main" id="{4DD02529-DD7A-4EC2-B18A-79D7BADC84CD}"/>
-                </a:ext>
-              </a:extLst>
-            </p:cNvPr>
-            <p:cNvGrpSpPr/>
-            <p:nvPr/>
-          </p:nvGrpSpPr>
-          <p:grpSpPr>
-            <a:xfrm>
-              <a:off x="1503044" y="3664586"/>
-              <a:ext cx="1630687" cy="175260"/>
-              <a:chOff x="1503044" y="2736215"/>
-              <a:chExt cx="1630687" cy="175260"/>
-            </a:xfrm>
-          </p:grpSpPr>
-          <p:sp>
-            <p:nvSpPr>
-              <p:cNvPr id="39" name="手繪多邊形: 圖案 10">
-                <a:extLst>
-                  <a:ext uri="{FF2B5EF4-FFF2-40B4-BE49-F238E27FC236}">
-                    <a16:creationId xmlns:a16="http://schemas.microsoft.com/office/drawing/2014/main" id="{F7C65FE9-5F33-42C0-BEA9-29DE4B66D00B}"/>
-                  </a:ext>
-                </a:extLst>
-              </p:cNvPr>
-              <p:cNvSpPr/>
-              <p:nvPr/>
-            </p:nvSpPr>
-            <p:spPr>
-              <a:xfrm>
-                <a:off x="1503044" y="2736215"/>
-                <a:ext cx="219078" cy="175260"/>
-              </a:xfrm>
-              <a:custGeom>
-                <a:avLst/>
-                <a:gdLst>
-                  <a:gd name="connsiteX0" fmla="*/ 84890 w 453390"/>
-                  <a:gd name="connsiteY0" fmla="*/ 0 h 263525"/>
-                  <a:gd name="connsiteX1" fmla="*/ 453390 w 453390"/>
-                  <a:gd name="connsiteY1" fmla="*/ 0 h 263525"/>
-                  <a:gd name="connsiteX2" fmla="*/ 453390 w 453390"/>
-                  <a:gd name="connsiteY2" fmla="*/ 263525 h 263525"/>
-                  <a:gd name="connsiteX3" fmla="*/ 84890 w 453390"/>
-                  <a:gd name="connsiteY3" fmla="*/ 263525 h 263525"/>
-                  <a:gd name="connsiteX4" fmla="*/ 59217 w 453390"/>
-                  <a:gd name="connsiteY4" fmla="*/ 168771 h 263525"/>
-                  <a:gd name="connsiteX5" fmla="*/ 4819 w 453390"/>
-                  <a:gd name="connsiteY5" fmla="*/ 221542 h 263525"/>
-                  <a:gd name="connsiteX6" fmla="*/ 0 w 453390"/>
-                  <a:gd name="connsiteY6" fmla="*/ 54571 h 263525"/>
-                  <a:gd name="connsiteX7" fmla="*/ 55658 w 453390"/>
-                  <a:gd name="connsiteY7" fmla="*/ 89403 h 263525"/>
-                  <a:gd name="connsiteX8" fmla="*/ 84890 w 453390"/>
-                  <a:gd name="connsiteY8" fmla="*/ 0 h 263525"/>
-                </a:gdLst>
-                <a:ahLst/>
-                <a:cxnLst>
-                  <a:cxn ang="0">
-                    <a:pos x="connsiteX0" y="connsiteY0"/>
-                  </a:cxn>
-                  <a:cxn ang="0">
-                    <a:pos x="connsiteX1" y="connsiteY1"/>
-                  </a:cxn>
-                  <a:cxn ang="0">
-                    <a:pos x="connsiteX2" y="connsiteY2"/>
-                  </a:cxn>
-                  <a:cxn ang="0">
-                    <a:pos x="connsiteX3" y="connsiteY3"/>
-                  </a:cxn>
-                  <a:cxn ang="0">
-                    <a:pos x="connsiteX4" y="connsiteY4"/>
-                  </a:cxn>
-                  <a:cxn ang="0">
-                    <a:pos x="connsiteX5" y="connsiteY5"/>
-                  </a:cxn>
-                  <a:cxn ang="0">
-                    <a:pos x="connsiteX6" y="connsiteY6"/>
-                  </a:cxn>
-                  <a:cxn ang="0">
-                    <a:pos x="connsiteX7" y="connsiteY7"/>
-                  </a:cxn>
-                  <a:cxn ang="0">
-                    <a:pos x="connsiteX8" y="connsiteY8"/>
-                  </a:cxn>
-                </a:cxnLst>
-                <a:rect l="l" t="t" r="r" b="b"/>
-                <a:pathLst>
-                  <a:path w="453390" h="263525">
-                    <a:moveTo>
-                      <a:pt x="84890" y="0"/>
-                    </a:moveTo>
-                    <a:lnTo>
-                      <a:pt x="453390" y="0"/>
-                    </a:lnTo>
-                    <a:lnTo>
-                      <a:pt x="453390" y="263525"/>
-                    </a:lnTo>
-                    <a:lnTo>
-                      <a:pt x="84890" y="263525"/>
-                    </a:lnTo>
-                    <a:cubicBezTo>
-                      <a:pt x="68745" y="263525"/>
-                      <a:pt x="59217" y="193028"/>
-                      <a:pt x="59217" y="168771"/>
-                    </a:cubicBezTo>
-                    <a:lnTo>
-                      <a:pt x="4819" y="221542"/>
-                    </a:lnTo>
-                    <a:lnTo>
-                      <a:pt x="0" y="54571"/>
-                    </a:lnTo>
-                    <a:lnTo>
-                      <a:pt x="55658" y="89403"/>
-                    </a:lnTo>
-                    <a:cubicBezTo>
-                      <a:pt x="55658" y="65146"/>
-                      <a:pt x="68745" y="0"/>
-                      <a:pt x="84890" y="0"/>
-                    </a:cubicBezTo>
-                    <a:close/>
-                  </a:path>
-                </a:pathLst>
-              </a:custGeom>
-            </p:spPr>
-            <p:style>
-              <a:lnRef idx="2">
-                <a:schemeClr val="accent5">
-                  <a:shade val="50000"/>
-                </a:schemeClr>
-              </a:lnRef>
-              <a:fillRef idx="1">
-                <a:schemeClr val="accent5"/>
-              </a:fillRef>
-              <a:effectRef idx="0">
-                <a:schemeClr val="accent5"/>
-              </a:effectRef>
-              <a:fontRef idx="minor">
-                <a:schemeClr val="lt1"/>
-              </a:fontRef>
-            </p:style>
-            <p:txBody>
-              <a:bodyPr rot="0" spcFirstLastPara="0" vert="horz" wrap="square" lIns="0" tIns="0" rIns="0" bIns="0" numCol="1" spcCol="0" rtlCol="0" fromWordArt="0" anchor="ctr" anchorCtr="0" forceAA="0" compatLnSpc="1">
-                <a:prstTxWarp prst="textNoShape">
-                  <a:avLst/>
-                </a:prstTxWarp>
-                <a:noAutofit/>
-              </a:bodyPr>
-              <a:lstStyle/>
-              <a:p>
-                <a:pPr indent="73025" algn="ctr">
-                  <a:spcAft>
-                    <a:spcPts val="0"/>
-                  </a:spcAft>
-                </a:pPr>
-                <a:r>
-                  <a:rPr lang="en-US" sz="1200" kern="100" dirty="0">
-                    <a:solidFill>
-                      <a:srgbClr val="FFFFFF"/>
-                    </a:solidFill>
-                    <a:effectLst/>
-                    <a:ea typeface="新細明體" panose="02020500000000000000" pitchFamily="18" charset="-120"/>
-                    <a:cs typeface="Times New Roman" panose="02020603050405020304" pitchFamily="18" charset="0"/>
-                  </a:rPr>
-                  <a:t>1</a:t>
-                </a:r>
-                <a:endParaRPr lang="zh-TW" sz="1200" kern="100" dirty="0">
-                  <a:effectLst/>
-                  <a:ea typeface="新細明體" panose="02020500000000000000" pitchFamily="18" charset="-120"/>
-                  <a:cs typeface="Times New Roman" panose="02020603050405020304" pitchFamily="18" charset="0"/>
-                </a:endParaRPr>
-              </a:p>
-            </p:txBody>
-          </p:sp>
-          <p:sp>
-            <p:nvSpPr>
-              <p:cNvPr id="40" name="手繪多邊形: 圖案 10">
-                <a:extLst>
-                  <a:ext uri="{FF2B5EF4-FFF2-40B4-BE49-F238E27FC236}">
-                    <a16:creationId xmlns:a16="http://schemas.microsoft.com/office/drawing/2014/main" id="{D8DE5067-687D-443B-83A3-66EA9AC7EBA9}"/>
-                  </a:ext>
-                </a:extLst>
-              </p:cNvPr>
-              <p:cNvSpPr/>
-              <p:nvPr/>
-            </p:nvSpPr>
-            <p:spPr>
-              <a:xfrm>
-                <a:off x="1784030" y="2736215"/>
-                <a:ext cx="219078" cy="175260"/>
-              </a:xfrm>
-              <a:custGeom>
-                <a:avLst/>
-                <a:gdLst>
-                  <a:gd name="connsiteX0" fmla="*/ 84890 w 453390"/>
-                  <a:gd name="connsiteY0" fmla="*/ 0 h 263525"/>
-                  <a:gd name="connsiteX1" fmla="*/ 453390 w 453390"/>
-                  <a:gd name="connsiteY1" fmla="*/ 0 h 263525"/>
-                  <a:gd name="connsiteX2" fmla="*/ 453390 w 453390"/>
-                  <a:gd name="connsiteY2" fmla="*/ 263525 h 263525"/>
-                  <a:gd name="connsiteX3" fmla="*/ 84890 w 453390"/>
-                  <a:gd name="connsiteY3" fmla="*/ 263525 h 263525"/>
-                  <a:gd name="connsiteX4" fmla="*/ 59217 w 453390"/>
-                  <a:gd name="connsiteY4" fmla="*/ 168771 h 263525"/>
-                  <a:gd name="connsiteX5" fmla="*/ 4819 w 453390"/>
-                  <a:gd name="connsiteY5" fmla="*/ 221542 h 263525"/>
-                  <a:gd name="connsiteX6" fmla="*/ 0 w 453390"/>
-                  <a:gd name="connsiteY6" fmla="*/ 54571 h 263525"/>
-                  <a:gd name="connsiteX7" fmla="*/ 55658 w 453390"/>
-                  <a:gd name="connsiteY7" fmla="*/ 89403 h 263525"/>
-                  <a:gd name="connsiteX8" fmla="*/ 84890 w 453390"/>
-                  <a:gd name="connsiteY8" fmla="*/ 0 h 263525"/>
-                </a:gdLst>
-                <a:ahLst/>
-                <a:cxnLst>
-                  <a:cxn ang="0">
-                    <a:pos x="connsiteX0" y="connsiteY0"/>
-                  </a:cxn>
-                  <a:cxn ang="0">
-                    <a:pos x="connsiteX1" y="connsiteY1"/>
-                  </a:cxn>
-                  <a:cxn ang="0">
-                    <a:pos x="connsiteX2" y="connsiteY2"/>
-                  </a:cxn>
-                  <a:cxn ang="0">
-                    <a:pos x="connsiteX3" y="connsiteY3"/>
-                  </a:cxn>
-                  <a:cxn ang="0">
-                    <a:pos x="connsiteX4" y="connsiteY4"/>
-                  </a:cxn>
-                  <a:cxn ang="0">
-                    <a:pos x="connsiteX5" y="connsiteY5"/>
-                  </a:cxn>
-                  <a:cxn ang="0">
-                    <a:pos x="connsiteX6" y="connsiteY6"/>
-                  </a:cxn>
-                  <a:cxn ang="0">
-                    <a:pos x="connsiteX7" y="connsiteY7"/>
-                  </a:cxn>
-                  <a:cxn ang="0">
-                    <a:pos x="connsiteX8" y="connsiteY8"/>
-                  </a:cxn>
-                </a:cxnLst>
-                <a:rect l="l" t="t" r="r" b="b"/>
-                <a:pathLst>
-                  <a:path w="453390" h="263525">
-                    <a:moveTo>
-                      <a:pt x="84890" y="0"/>
-                    </a:moveTo>
-                    <a:lnTo>
-                      <a:pt x="453390" y="0"/>
-                    </a:lnTo>
-                    <a:lnTo>
-                      <a:pt x="453390" y="263525"/>
-                    </a:lnTo>
-                    <a:lnTo>
-                      <a:pt x="84890" y="263525"/>
-                    </a:lnTo>
-                    <a:cubicBezTo>
-                      <a:pt x="68745" y="263525"/>
-                      <a:pt x="59217" y="193028"/>
-                      <a:pt x="59217" y="168771"/>
-                    </a:cubicBezTo>
-                    <a:lnTo>
-                      <a:pt x="4819" y="221542"/>
-                    </a:lnTo>
-                    <a:lnTo>
-                      <a:pt x="0" y="54571"/>
-                    </a:lnTo>
-                    <a:lnTo>
-                      <a:pt x="55658" y="89403"/>
-                    </a:lnTo>
-                    <a:cubicBezTo>
-                      <a:pt x="55658" y="65146"/>
-                      <a:pt x="68745" y="0"/>
-                      <a:pt x="84890" y="0"/>
-                    </a:cubicBezTo>
-                    <a:close/>
-                  </a:path>
-                </a:pathLst>
-              </a:custGeom>
-            </p:spPr>
-            <p:style>
-              <a:lnRef idx="2">
-                <a:schemeClr val="accent5">
-                  <a:shade val="50000"/>
-                </a:schemeClr>
-              </a:lnRef>
-              <a:fillRef idx="1">
-                <a:schemeClr val="accent5"/>
-              </a:fillRef>
-              <a:effectRef idx="0">
-                <a:schemeClr val="accent5"/>
-              </a:effectRef>
-              <a:fontRef idx="minor">
-                <a:schemeClr val="lt1"/>
-              </a:fontRef>
-            </p:style>
-            <p:txBody>
-              <a:bodyPr rot="0" spcFirstLastPara="0" vert="horz" wrap="square" lIns="0" tIns="0" rIns="0" bIns="0" numCol="1" spcCol="0" rtlCol="0" fromWordArt="0" anchor="ctr" anchorCtr="0" forceAA="0" compatLnSpc="1">
-                <a:prstTxWarp prst="textNoShape">
-                  <a:avLst/>
-                </a:prstTxWarp>
-                <a:noAutofit/>
-              </a:bodyPr>
-              <a:lstStyle/>
-              <a:p>
-                <a:pPr indent="73025" algn="ctr">
-                  <a:spcAft>
-                    <a:spcPts val="0"/>
-                  </a:spcAft>
-                </a:pPr>
-                <a:r>
-                  <a:rPr lang="en-US" sz="1200" kern="100" dirty="0">
-                    <a:solidFill>
-                      <a:srgbClr val="FFFFFF"/>
-                    </a:solidFill>
-                    <a:effectLst/>
-                    <a:ea typeface="新細明體" panose="02020500000000000000" pitchFamily="18" charset="-120"/>
-                    <a:cs typeface="Times New Roman" panose="02020603050405020304" pitchFamily="18" charset="0"/>
-                  </a:rPr>
-                  <a:t>1</a:t>
-                </a:r>
-                <a:endParaRPr lang="zh-TW" sz="1200" kern="100" dirty="0">
-                  <a:effectLst/>
-                  <a:ea typeface="新細明體" panose="02020500000000000000" pitchFamily="18" charset="-120"/>
-                  <a:cs typeface="Times New Roman" panose="02020603050405020304" pitchFamily="18" charset="0"/>
-                </a:endParaRPr>
-              </a:p>
-            </p:txBody>
-          </p:sp>
-          <p:sp>
-            <p:nvSpPr>
-              <p:cNvPr id="41" name="手繪多邊形: 圖案 10">
-                <a:extLst>
-                  <a:ext uri="{FF2B5EF4-FFF2-40B4-BE49-F238E27FC236}">
-                    <a16:creationId xmlns:a16="http://schemas.microsoft.com/office/drawing/2014/main" id="{8C260ABF-518C-401F-9A7F-53D3085AA6B1}"/>
-                  </a:ext>
-                </a:extLst>
-              </p:cNvPr>
-              <p:cNvSpPr/>
-              <p:nvPr/>
-            </p:nvSpPr>
-            <p:spPr>
-              <a:xfrm>
-                <a:off x="2065016" y="2736215"/>
-                <a:ext cx="219078" cy="175260"/>
-              </a:xfrm>
-              <a:custGeom>
-                <a:avLst/>
-                <a:gdLst>
-                  <a:gd name="connsiteX0" fmla="*/ 84890 w 453390"/>
-                  <a:gd name="connsiteY0" fmla="*/ 0 h 263525"/>
-                  <a:gd name="connsiteX1" fmla="*/ 453390 w 453390"/>
-                  <a:gd name="connsiteY1" fmla="*/ 0 h 263525"/>
-                  <a:gd name="connsiteX2" fmla="*/ 453390 w 453390"/>
-                  <a:gd name="connsiteY2" fmla="*/ 263525 h 263525"/>
-                  <a:gd name="connsiteX3" fmla="*/ 84890 w 453390"/>
-                  <a:gd name="connsiteY3" fmla="*/ 263525 h 263525"/>
-                  <a:gd name="connsiteX4" fmla="*/ 59217 w 453390"/>
-                  <a:gd name="connsiteY4" fmla="*/ 168771 h 263525"/>
-                  <a:gd name="connsiteX5" fmla="*/ 4819 w 453390"/>
-                  <a:gd name="connsiteY5" fmla="*/ 221542 h 263525"/>
-                  <a:gd name="connsiteX6" fmla="*/ 0 w 453390"/>
-                  <a:gd name="connsiteY6" fmla="*/ 54571 h 263525"/>
-                  <a:gd name="connsiteX7" fmla="*/ 55658 w 453390"/>
-                  <a:gd name="connsiteY7" fmla="*/ 89403 h 263525"/>
-                  <a:gd name="connsiteX8" fmla="*/ 84890 w 453390"/>
-                  <a:gd name="connsiteY8" fmla="*/ 0 h 263525"/>
-                </a:gdLst>
-                <a:ahLst/>
-                <a:cxnLst>
-                  <a:cxn ang="0">
-                    <a:pos x="connsiteX0" y="connsiteY0"/>
-                  </a:cxn>
-                  <a:cxn ang="0">
-                    <a:pos x="connsiteX1" y="connsiteY1"/>
-                  </a:cxn>
-                  <a:cxn ang="0">
-                    <a:pos x="connsiteX2" y="connsiteY2"/>
-                  </a:cxn>
-                  <a:cxn ang="0">
-                    <a:pos x="connsiteX3" y="connsiteY3"/>
-                  </a:cxn>
-                  <a:cxn ang="0">
-                    <a:pos x="connsiteX4" y="connsiteY4"/>
-                  </a:cxn>
-                  <a:cxn ang="0">
-                    <a:pos x="connsiteX5" y="connsiteY5"/>
-                  </a:cxn>
-                  <a:cxn ang="0">
-                    <a:pos x="connsiteX6" y="connsiteY6"/>
-                  </a:cxn>
-                  <a:cxn ang="0">
-                    <a:pos x="connsiteX7" y="connsiteY7"/>
-                  </a:cxn>
-                  <a:cxn ang="0">
-                    <a:pos x="connsiteX8" y="connsiteY8"/>
-                  </a:cxn>
-                </a:cxnLst>
-                <a:rect l="l" t="t" r="r" b="b"/>
-                <a:pathLst>
-                  <a:path w="453390" h="263525">
-                    <a:moveTo>
-                      <a:pt x="84890" y="0"/>
-                    </a:moveTo>
-                    <a:lnTo>
-                      <a:pt x="453390" y="0"/>
-                    </a:lnTo>
-                    <a:lnTo>
-                      <a:pt x="453390" y="263525"/>
-                    </a:lnTo>
-                    <a:lnTo>
-                      <a:pt x="84890" y="263525"/>
-                    </a:lnTo>
-                    <a:cubicBezTo>
-                      <a:pt x="68745" y="263525"/>
-                      <a:pt x="59217" y="193028"/>
-                      <a:pt x="59217" y="168771"/>
-                    </a:cubicBezTo>
-                    <a:lnTo>
-                      <a:pt x="4819" y="221542"/>
-                    </a:lnTo>
-                    <a:lnTo>
-                      <a:pt x="0" y="54571"/>
-                    </a:lnTo>
-                    <a:lnTo>
-                      <a:pt x="55658" y="89403"/>
-                    </a:lnTo>
-                    <a:cubicBezTo>
-                      <a:pt x="55658" y="65146"/>
-                      <a:pt x="68745" y="0"/>
-                      <a:pt x="84890" y="0"/>
-                    </a:cubicBezTo>
-                    <a:close/>
-                  </a:path>
-                </a:pathLst>
-              </a:custGeom>
-            </p:spPr>
-            <p:style>
-              <a:lnRef idx="2">
-                <a:schemeClr val="accent5">
-                  <a:shade val="50000"/>
-                </a:schemeClr>
-              </a:lnRef>
-              <a:fillRef idx="1">
-                <a:schemeClr val="accent5"/>
-              </a:fillRef>
-              <a:effectRef idx="0">
-                <a:schemeClr val="accent5"/>
-              </a:effectRef>
-              <a:fontRef idx="minor">
-                <a:schemeClr val="lt1"/>
-              </a:fontRef>
-            </p:style>
-            <p:txBody>
-              <a:bodyPr rot="0" spcFirstLastPara="0" vert="horz" wrap="square" lIns="0" tIns="0" rIns="0" bIns="0" numCol="1" spcCol="0" rtlCol="0" fromWordArt="0" anchor="ctr" anchorCtr="0" forceAA="0" compatLnSpc="1">
-                <a:prstTxWarp prst="textNoShape">
-                  <a:avLst/>
-                </a:prstTxWarp>
-                <a:noAutofit/>
-              </a:bodyPr>
-              <a:lstStyle/>
-              <a:p>
-                <a:pPr indent="73025" algn="ctr">
-                  <a:spcAft>
-                    <a:spcPts val="0"/>
-                  </a:spcAft>
-                </a:pPr>
-                <a:r>
-                  <a:rPr lang="en-US" sz="1200" kern="100" dirty="0">
-                    <a:solidFill>
-                      <a:srgbClr val="FFFFFF"/>
-                    </a:solidFill>
-                    <a:effectLst/>
-                    <a:ea typeface="新細明體" panose="02020500000000000000" pitchFamily="18" charset="-120"/>
-                    <a:cs typeface="Times New Roman" panose="02020603050405020304" pitchFamily="18" charset="0"/>
-                  </a:rPr>
-                  <a:t>1</a:t>
-                </a:r>
-                <a:endParaRPr lang="zh-TW" sz="1200" kern="100" dirty="0">
-                  <a:effectLst/>
-                  <a:ea typeface="新細明體" panose="02020500000000000000" pitchFamily="18" charset="-120"/>
-                  <a:cs typeface="Times New Roman" panose="02020603050405020304" pitchFamily="18" charset="0"/>
-                </a:endParaRPr>
-              </a:p>
-            </p:txBody>
-          </p:sp>
-          <p:sp>
-            <p:nvSpPr>
-              <p:cNvPr id="42" name="手繪多邊形: 圖案 10">
-                <a:extLst>
-                  <a:ext uri="{FF2B5EF4-FFF2-40B4-BE49-F238E27FC236}">
-                    <a16:creationId xmlns:a16="http://schemas.microsoft.com/office/drawing/2014/main" id="{ABA8DBF4-117A-4E2B-A55B-3DEB9E71F330}"/>
-                  </a:ext>
-                </a:extLst>
-              </p:cNvPr>
-              <p:cNvSpPr/>
-              <p:nvPr/>
-            </p:nvSpPr>
-            <p:spPr>
-              <a:xfrm>
-                <a:off x="2346002" y="2736215"/>
-                <a:ext cx="219078" cy="175260"/>
-              </a:xfrm>
-              <a:custGeom>
-                <a:avLst/>
-                <a:gdLst>
-                  <a:gd name="connsiteX0" fmla="*/ 84890 w 453390"/>
-                  <a:gd name="connsiteY0" fmla="*/ 0 h 263525"/>
-                  <a:gd name="connsiteX1" fmla="*/ 453390 w 453390"/>
-                  <a:gd name="connsiteY1" fmla="*/ 0 h 263525"/>
-                  <a:gd name="connsiteX2" fmla="*/ 453390 w 453390"/>
-                  <a:gd name="connsiteY2" fmla="*/ 263525 h 263525"/>
-                  <a:gd name="connsiteX3" fmla="*/ 84890 w 453390"/>
-                  <a:gd name="connsiteY3" fmla="*/ 263525 h 263525"/>
-                  <a:gd name="connsiteX4" fmla="*/ 59217 w 453390"/>
-                  <a:gd name="connsiteY4" fmla="*/ 168771 h 263525"/>
-                  <a:gd name="connsiteX5" fmla="*/ 4819 w 453390"/>
-                  <a:gd name="connsiteY5" fmla="*/ 221542 h 263525"/>
-                  <a:gd name="connsiteX6" fmla="*/ 0 w 453390"/>
-                  <a:gd name="connsiteY6" fmla="*/ 54571 h 263525"/>
-                  <a:gd name="connsiteX7" fmla="*/ 55658 w 453390"/>
-                  <a:gd name="connsiteY7" fmla="*/ 89403 h 263525"/>
-                  <a:gd name="connsiteX8" fmla="*/ 84890 w 453390"/>
-                  <a:gd name="connsiteY8" fmla="*/ 0 h 263525"/>
-                </a:gdLst>
-                <a:ahLst/>
-                <a:cxnLst>
-                  <a:cxn ang="0">
-                    <a:pos x="connsiteX0" y="connsiteY0"/>
-                  </a:cxn>
-                  <a:cxn ang="0">
-                    <a:pos x="connsiteX1" y="connsiteY1"/>
-                  </a:cxn>
-                  <a:cxn ang="0">
-                    <a:pos x="connsiteX2" y="connsiteY2"/>
-                  </a:cxn>
-                  <a:cxn ang="0">
-                    <a:pos x="connsiteX3" y="connsiteY3"/>
-                  </a:cxn>
-                  <a:cxn ang="0">
-                    <a:pos x="connsiteX4" y="connsiteY4"/>
-                  </a:cxn>
-                  <a:cxn ang="0">
-                    <a:pos x="connsiteX5" y="connsiteY5"/>
-                  </a:cxn>
-                  <a:cxn ang="0">
-                    <a:pos x="connsiteX6" y="connsiteY6"/>
-                  </a:cxn>
-                  <a:cxn ang="0">
-                    <a:pos x="connsiteX7" y="connsiteY7"/>
-                  </a:cxn>
-                  <a:cxn ang="0">
-                    <a:pos x="connsiteX8" y="connsiteY8"/>
-                  </a:cxn>
-                </a:cxnLst>
-                <a:rect l="l" t="t" r="r" b="b"/>
-                <a:pathLst>
-                  <a:path w="453390" h="263525">
-                    <a:moveTo>
-                      <a:pt x="84890" y="0"/>
-                    </a:moveTo>
-                    <a:lnTo>
-                      <a:pt x="453390" y="0"/>
-                    </a:lnTo>
-                    <a:lnTo>
-                      <a:pt x="453390" y="263525"/>
-                    </a:lnTo>
-                    <a:lnTo>
-                      <a:pt x="84890" y="263525"/>
-                    </a:lnTo>
-                    <a:cubicBezTo>
-                      <a:pt x="68745" y="263525"/>
-                      <a:pt x="59217" y="193028"/>
-                      <a:pt x="59217" y="168771"/>
-                    </a:cubicBezTo>
-                    <a:lnTo>
-                      <a:pt x="4819" y="221542"/>
-                    </a:lnTo>
-                    <a:lnTo>
-                      <a:pt x="0" y="54571"/>
-                    </a:lnTo>
-                    <a:lnTo>
-                      <a:pt x="55658" y="89403"/>
-                    </a:lnTo>
-                    <a:cubicBezTo>
-                      <a:pt x="55658" y="65146"/>
-                      <a:pt x="68745" y="0"/>
-                      <a:pt x="84890" y="0"/>
-                    </a:cubicBezTo>
-                    <a:close/>
-                  </a:path>
-                </a:pathLst>
-              </a:custGeom>
-            </p:spPr>
-            <p:style>
-              <a:lnRef idx="2">
-                <a:schemeClr val="accent5">
-                  <a:shade val="50000"/>
-                </a:schemeClr>
-              </a:lnRef>
-              <a:fillRef idx="1">
-                <a:schemeClr val="accent5"/>
-              </a:fillRef>
-              <a:effectRef idx="0">
-                <a:schemeClr val="accent5"/>
-              </a:effectRef>
-              <a:fontRef idx="minor">
-                <a:schemeClr val="lt1"/>
-              </a:fontRef>
-            </p:style>
-            <p:txBody>
-              <a:bodyPr rot="0" spcFirstLastPara="0" vert="horz" wrap="square" lIns="0" tIns="0" rIns="0" bIns="0" numCol="1" spcCol="0" rtlCol="0" fromWordArt="0" anchor="ctr" anchorCtr="0" forceAA="0" compatLnSpc="1">
-                <a:prstTxWarp prst="textNoShape">
-                  <a:avLst/>
-                </a:prstTxWarp>
-                <a:noAutofit/>
-              </a:bodyPr>
-              <a:lstStyle/>
-              <a:p>
-                <a:pPr indent="73025" algn="ctr">
-                  <a:spcAft>
-                    <a:spcPts val="0"/>
-                  </a:spcAft>
-                </a:pPr>
-                <a:r>
-                  <a:rPr lang="en-US" sz="1200" kern="100" dirty="0">
-                    <a:solidFill>
-                      <a:srgbClr val="FFFFFF"/>
-                    </a:solidFill>
-                    <a:effectLst/>
-                    <a:ea typeface="新細明體" panose="02020500000000000000" pitchFamily="18" charset="-120"/>
-                    <a:cs typeface="Times New Roman" panose="02020603050405020304" pitchFamily="18" charset="0"/>
-                  </a:rPr>
-                  <a:t>1</a:t>
-                </a:r>
-                <a:endParaRPr lang="zh-TW" sz="1200" kern="100" dirty="0">
-                  <a:effectLst/>
-                  <a:ea typeface="新細明體" panose="02020500000000000000" pitchFamily="18" charset="-120"/>
-                  <a:cs typeface="Times New Roman" panose="02020603050405020304" pitchFamily="18" charset="0"/>
-                </a:endParaRPr>
-              </a:p>
-            </p:txBody>
-          </p:sp>
-          <p:sp>
-            <p:nvSpPr>
-              <p:cNvPr id="43" name="手繪多邊形: 圖案 10">
-                <a:extLst>
-                  <a:ext uri="{FF2B5EF4-FFF2-40B4-BE49-F238E27FC236}">
-                    <a16:creationId xmlns:a16="http://schemas.microsoft.com/office/drawing/2014/main" id="{DD957D04-C10F-459C-9451-0B24A7FD1707}"/>
-                  </a:ext>
-                </a:extLst>
-              </p:cNvPr>
-              <p:cNvSpPr/>
-              <p:nvPr/>
-            </p:nvSpPr>
-            <p:spPr>
-              <a:xfrm>
-                <a:off x="2633667" y="2736215"/>
-                <a:ext cx="219078" cy="175260"/>
-              </a:xfrm>
-              <a:custGeom>
-                <a:avLst/>
-                <a:gdLst>
-                  <a:gd name="connsiteX0" fmla="*/ 84890 w 453390"/>
-                  <a:gd name="connsiteY0" fmla="*/ 0 h 263525"/>
-                  <a:gd name="connsiteX1" fmla="*/ 453390 w 453390"/>
-                  <a:gd name="connsiteY1" fmla="*/ 0 h 263525"/>
-                  <a:gd name="connsiteX2" fmla="*/ 453390 w 453390"/>
-                  <a:gd name="connsiteY2" fmla="*/ 263525 h 263525"/>
-                  <a:gd name="connsiteX3" fmla="*/ 84890 w 453390"/>
-                  <a:gd name="connsiteY3" fmla="*/ 263525 h 263525"/>
-                  <a:gd name="connsiteX4" fmla="*/ 59217 w 453390"/>
-                  <a:gd name="connsiteY4" fmla="*/ 168771 h 263525"/>
-                  <a:gd name="connsiteX5" fmla="*/ 4819 w 453390"/>
-                  <a:gd name="connsiteY5" fmla="*/ 221542 h 263525"/>
-                  <a:gd name="connsiteX6" fmla="*/ 0 w 453390"/>
-                  <a:gd name="connsiteY6" fmla="*/ 54571 h 263525"/>
-                  <a:gd name="connsiteX7" fmla="*/ 55658 w 453390"/>
-                  <a:gd name="connsiteY7" fmla="*/ 89403 h 263525"/>
-                  <a:gd name="connsiteX8" fmla="*/ 84890 w 453390"/>
-                  <a:gd name="connsiteY8" fmla="*/ 0 h 263525"/>
-                </a:gdLst>
-                <a:ahLst/>
-                <a:cxnLst>
-                  <a:cxn ang="0">
-                    <a:pos x="connsiteX0" y="connsiteY0"/>
-                  </a:cxn>
-                  <a:cxn ang="0">
-                    <a:pos x="connsiteX1" y="connsiteY1"/>
-                  </a:cxn>
-                  <a:cxn ang="0">
-                    <a:pos x="connsiteX2" y="connsiteY2"/>
-                  </a:cxn>
-                  <a:cxn ang="0">
-                    <a:pos x="connsiteX3" y="connsiteY3"/>
-                  </a:cxn>
-                  <a:cxn ang="0">
-                    <a:pos x="connsiteX4" y="connsiteY4"/>
-                  </a:cxn>
-                  <a:cxn ang="0">
-                    <a:pos x="connsiteX5" y="connsiteY5"/>
-                  </a:cxn>
-                  <a:cxn ang="0">
-                    <a:pos x="connsiteX6" y="connsiteY6"/>
-                  </a:cxn>
-                  <a:cxn ang="0">
-                    <a:pos x="connsiteX7" y="connsiteY7"/>
-                  </a:cxn>
-                  <a:cxn ang="0">
-                    <a:pos x="connsiteX8" y="connsiteY8"/>
-                  </a:cxn>
-                </a:cxnLst>
-                <a:rect l="l" t="t" r="r" b="b"/>
-                <a:pathLst>
-                  <a:path w="453390" h="263525">
-                    <a:moveTo>
-                      <a:pt x="84890" y="0"/>
-                    </a:moveTo>
-                    <a:lnTo>
-                      <a:pt x="453390" y="0"/>
-                    </a:lnTo>
-                    <a:lnTo>
-                      <a:pt x="453390" y="263525"/>
-                    </a:lnTo>
-                    <a:lnTo>
-                      <a:pt x="84890" y="263525"/>
-                    </a:lnTo>
-                    <a:cubicBezTo>
-                      <a:pt x="68745" y="263525"/>
-                      <a:pt x="59217" y="193028"/>
-                      <a:pt x="59217" y="168771"/>
-                    </a:cubicBezTo>
-                    <a:lnTo>
-                      <a:pt x="4819" y="221542"/>
-                    </a:lnTo>
-                    <a:lnTo>
-                      <a:pt x="0" y="54571"/>
-                    </a:lnTo>
-                    <a:lnTo>
-                      <a:pt x="55658" y="89403"/>
-                    </a:lnTo>
-                    <a:cubicBezTo>
-                      <a:pt x="55658" y="65146"/>
-                      <a:pt x="68745" y="0"/>
-                      <a:pt x="84890" y="0"/>
-                    </a:cubicBezTo>
-                    <a:close/>
-                  </a:path>
-                </a:pathLst>
-              </a:custGeom>
-            </p:spPr>
-            <p:style>
-              <a:lnRef idx="2">
-                <a:schemeClr val="accent5">
-                  <a:shade val="50000"/>
-                </a:schemeClr>
-              </a:lnRef>
-              <a:fillRef idx="1">
-                <a:schemeClr val="accent5"/>
-              </a:fillRef>
-              <a:effectRef idx="0">
-                <a:schemeClr val="accent5"/>
-              </a:effectRef>
-              <a:fontRef idx="minor">
-                <a:schemeClr val="lt1"/>
-              </a:fontRef>
-            </p:style>
-            <p:txBody>
-              <a:bodyPr rot="0" spcFirstLastPara="0" vert="horz" wrap="square" lIns="0" tIns="0" rIns="0" bIns="0" numCol="1" spcCol="0" rtlCol="0" fromWordArt="0" anchor="ctr" anchorCtr="0" forceAA="0" compatLnSpc="1">
-                <a:prstTxWarp prst="textNoShape">
-                  <a:avLst/>
-                </a:prstTxWarp>
-                <a:noAutofit/>
-              </a:bodyPr>
-              <a:lstStyle/>
-              <a:p>
-                <a:pPr indent="73025" algn="ctr">
-                  <a:spcAft>
-                    <a:spcPts val="0"/>
-                  </a:spcAft>
-                </a:pPr>
-                <a:r>
-                  <a:rPr lang="en-US" sz="1200" kern="100" dirty="0">
-                    <a:solidFill>
-                      <a:srgbClr val="FFFFFF"/>
-                    </a:solidFill>
-                    <a:effectLst/>
-                    <a:ea typeface="新細明體" panose="02020500000000000000" pitchFamily="18" charset="-120"/>
-                    <a:cs typeface="Times New Roman" panose="02020603050405020304" pitchFamily="18" charset="0"/>
-                  </a:rPr>
-                  <a:t>1</a:t>
-                </a:r>
-                <a:endParaRPr lang="zh-TW" sz="1200" kern="100" dirty="0">
-                  <a:effectLst/>
-                  <a:ea typeface="新細明體" panose="02020500000000000000" pitchFamily="18" charset="-120"/>
-                  <a:cs typeface="Times New Roman" panose="02020603050405020304" pitchFamily="18" charset="0"/>
-                </a:endParaRPr>
-              </a:p>
-            </p:txBody>
-          </p:sp>
-          <p:sp>
-            <p:nvSpPr>
-              <p:cNvPr id="44" name="手繪多邊形: 圖案 10">
-                <a:extLst>
-                  <a:ext uri="{FF2B5EF4-FFF2-40B4-BE49-F238E27FC236}">
-                    <a16:creationId xmlns:a16="http://schemas.microsoft.com/office/drawing/2014/main" id="{F6367CBF-4995-4BF9-8DF9-A0BBE6DBE543}"/>
-                  </a:ext>
-                </a:extLst>
-              </p:cNvPr>
-              <p:cNvSpPr/>
-              <p:nvPr/>
-            </p:nvSpPr>
-            <p:spPr>
-              <a:xfrm>
-                <a:off x="2914653" y="2736215"/>
-                <a:ext cx="219078" cy="175260"/>
-              </a:xfrm>
-              <a:custGeom>
-                <a:avLst/>
-                <a:gdLst>
-                  <a:gd name="connsiteX0" fmla="*/ 84890 w 453390"/>
-                  <a:gd name="connsiteY0" fmla="*/ 0 h 263525"/>
-                  <a:gd name="connsiteX1" fmla="*/ 453390 w 453390"/>
-                  <a:gd name="connsiteY1" fmla="*/ 0 h 263525"/>
-                  <a:gd name="connsiteX2" fmla="*/ 453390 w 453390"/>
-                  <a:gd name="connsiteY2" fmla="*/ 263525 h 263525"/>
-                  <a:gd name="connsiteX3" fmla="*/ 84890 w 453390"/>
-                  <a:gd name="connsiteY3" fmla="*/ 263525 h 263525"/>
-                  <a:gd name="connsiteX4" fmla="*/ 59217 w 453390"/>
-                  <a:gd name="connsiteY4" fmla="*/ 168771 h 263525"/>
-                  <a:gd name="connsiteX5" fmla="*/ 4819 w 453390"/>
-                  <a:gd name="connsiteY5" fmla="*/ 221542 h 263525"/>
-                  <a:gd name="connsiteX6" fmla="*/ 0 w 453390"/>
-                  <a:gd name="connsiteY6" fmla="*/ 54571 h 263525"/>
-                  <a:gd name="connsiteX7" fmla="*/ 55658 w 453390"/>
-                  <a:gd name="connsiteY7" fmla="*/ 89403 h 263525"/>
-                  <a:gd name="connsiteX8" fmla="*/ 84890 w 453390"/>
-                  <a:gd name="connsiteY8" fmla="*/ 0 h 263525"/>
-                </a:gdLst>
-                <a:ahLst/>
-                <a:cxnLst>
-                  <a:cxn ang="0">
-                    <a:pos x="connsiteX0" y="connsiteY0"/>
-                  </a:cxn>
-                  <a:cxn ang="0">
-                    <a:pos x="connsiteX1" y="connsiteY1"/>
-                  </a:cxn>
-                  <a:cxn ang="0">
-                    <a:pos x="connsiteX2" y="connsiteY2"/>
-                  </a:cxn>
-                  <a:cxn ang="0">
-                    <a:pos x="connsiteX3" y="connsiteY3"/>
-                  </a:cxn>
-                  <a:cxn ang="0">
-                    <a:pos x="connsiteX4" y="connsiteY4"/>
-                  </a:cxn>
-                  <a:cxn ang="0">
-                    <a:pos x="connsiteX5" y="connsiteY5"/>
-                  </a:cxn>
-                  <a:cxn ang="0">
-                    <a:pos x="connsiteX6" y="connsiteY6"/>
-                  </a:cxn>
-                  <a:cxn ang="0">
-                    <a:pos x="connsiteX7" y="connsiteY7"/>
-                  </a:cxn>
-                  <a:cxn ang="0">
-                    <a:pos x="connsiteX8" y="connsiteY8"/>
-                  </a:cxn>
-                </a:cxnLst>
-                <a:rect l="l" t="t" r="r" b="b"/>
-                <a:pathLst>
-                  <a:path w="453390" h="263525">
-                    <a:moveTo>
-                      <a:pt x="84890" y="0"/>
-                    </a:moveTo>
-                    <a:lnTo>
-                      <a:pt x="453390" y="0"/>
-                    </a:lnTo>
-                    <a:lnTo>
-                      <a:pt x="453390" y="263525"/>
-                    </a:lnTo>
-                    <a:lnTo>
-                      <a:pt x="84890" y="263525"/>
-                    </a:lnTo>
-                    <a:cubicBezTo>
-                      <a:pt x="68745" y="263525"/>
-                      <a:pt x="59217" y="193028"/>
-                      <a:pt x="59217" y="168771"/>
-                    </a:cubicBezTo>
-                    <a:lnTo>
-                      <a:pt x="4819" y="221542"/>
-                    </a:lnTo>
-                    <a:lnTo>
-                      <a:pt x="0" y="54571"/>
-                    </a:lnTo>
-                    <a:lnTo>
-                      <a:pt x="55658" y="89403"/>
-                    </a:lnTo>
-                    <a:cubicBezTo>
-                      <a:pt x="55658" y="65146"/>
-                      <a:pt x="68745" y="0"/>
-                      <a:pt x="84890" y="0"/>
-                    </a:cubicBezTo>
-                    <a:close/>
-                  </a:path>
-                </a:pathLst>
-              </a:custGeom>
-            </p:spPr>
-            <p:style>
-              <a:lnRef idx="2">
-                <a:schemeClr val="accent5">
-                  <a:shade val="50000"/>
-                </a:schemeClr>
-              </a:lnRef>
-              <a:fillRef idx="1">
-                <a:schemeClr val="accent5"/>
-              </a:fillRef>
-              <a:effectRef idx="0">
-                <a:schemeClr val="accent5"/>
-              </a:effectRef>
-              <a:fontRef idx="minor">
-                <a:schemeClr val="lt1"/>
-              </a:fontRef>
-            </p:style>
-            <p:txBody>
-              <a:bodyPr rot="0" spcFirstLastPara="0" vert="horz" wrap="square" lIns="0" tIns="0" rIns="0" bIns="0" numCol="1" spcCol="0" rtlCol="0" fromWordArt="0" anchor="ctr" anchorCtr="0" forceAA="0" compatLnSpc="1">
-                <a:prstTxWarp prst="textNoShape">
-                  <a:avLst/>
-                </a:prstTxWarp>
-                <a:noAutofit/>
-              </a:bodyPr>
-              <a:lstStyle/>
-              <a:p>
-                <a:pPr indent="73025" algn="ctr">
-                  <a:spcAft>
-                    <a:spcPts val="0"/>
-                  </a:spcAft>
-                </a:pPr>
-                <a:r>
-                  <a:rPr lang="en-US" sz="1200" kern="100" dirty="0">
-                    <a:solidFill>
-                      <a:srgbClr val="FFFFFF"/>
-                    </a:solidFill>
-                    <a:effectLst/>
-                    <a:ea typeface="新細明體" panose="02020500000000000000" pitchFamily="18" charset="-120"/>
-                    <a:cs typeface="Times New Roman" panose="02020603050405020304" pitchFamily="18" charset="0"/>
-                  </a:rPr>
-                  <a:t>1</a:t>
-                </a:r>
-                <a:endParaRPr lang="zh-TW" sz="1200" kern="100" dirty="0">
-                  <a:effectLst/>
-                  <a:ea typeface="新細明體" panose="02020500000000000000" pitchFamily="18" charset="-120"/>
-                  <a:cs typeface="Times New Roman" panose="02020603050405020304" pitchFamily="18" charset="0"/>
-                </a:endParaRPr>
-              </a:p>
-            </p:txBody>
-          </p:sp>
-        </p:grpSp>
-      </p:grpSp>
-      <p:grpSp>
-        <p:nvGrpSpPr>
-          <p:cNvPr id="4" name="群組 3">
-            <a:extLst>
-              <a:ext uri="{FF2B5EF4-FFF2-40B4-BE49-F238E27FC236}">
-                <a16:creationId xmlns:a16="http://schemas.microsoft.com/office/drawing/2014/main" id="{A02F5007-4DEE-4075-9ACC-DB56FAFD055B}"/>
-              </a:ext>
-            </a:extLst>
-          </p:cNvPr>
-          <p:cNvGrpSpPr/>
-          <p:nvPr/>
-        </p:nvGrpSpPr>
-        <p:grpSpPr>
-          <a:xfrm>
-            <a:off x="4453412" y="3664586"/>
-            <a:ext cx="2078228" cy="356019"/>
-            <a:chOff x="4453412" y="3664586"/>
-            <a:chExt cx="2078228" cy="356019"/>
-          </a:xfrm>
-        </p:grpSpPr>
-        <p:sp>
-          <p:nvSpPr>
-            <p:cNvPr id="46" name="圓角矩形 4">
-              <a:extLst>
-                <a:ext uri="{FF2B5EF4-FFF2-40B4-BE49-F238E27FC236}">
-                  <a16:creationId xmlns:a16="http://schemas.microsoft.com/office/drawing/2014/main" id="{12693324-BB8A-4EF0-911F-120B52AF01D0}"/>
-                </a:ext>
-              </a:extLst>
-            </p:cNvPr>
-            <p:cNvSpPr/>
-            <p:nvPr/>
-          </p:nvSpPr>
-          <p:spPr>
-            <a:xfrm>
-              <a:off x="4453412" y="3664586"/>
-              <a:ext cx="2078228" cy="356019"/>
-            </a:xfrm>
-            <a:custGeom>
-              <a:avLst/>
-              <a:gdLst>
-                <a:gd name="connsiteX0" fmla="*/ 0 w 4424680"/>
-                <a:gd name="connsiteY0" fmla="*/ 60115 h 360680"/>
-                <a:gd name="connsiteX1" fmla="*/ 60115 w 4424680"/>
-                <a:gd name="connsiteY1" fmla="*/ 0 h 360680"/>
-                <a:gd name="connsiteX2" fmla="*/ 4364565 w 4424680"/>
-                <a:gd name="connsiteY2" fmla="*/ 0 h 360680"/>
-                <a:gd name="connsiteX3" fmla="*/ 4424680 w 4424680"/>
-                <a:gd name="connsiteY3" fmla="*/ 60115 h 360680"/>
-                <a:gd name="connsiteX4" fmla="*/ 4424680 w 4424680"/>
-                <a:gd name="connsiteY4" fmla="*/ 300565 h 360680"/>
-                <a:gd name="connsiteX5" fmla="*/ 4364565 w 4424680"/>
-                <a:gd name="connsiteY5" fmla="*/ 360680 h 360680"/>
-                <a:gd name="connsiteX6" fmla="*/ 60115 w 4424680"/>
-                <a:gd name="connsiteY6" fmla="*/ 360680 h 360680"/>
-                <a:gd name="connsiteX7" fmla="*/ 0 w 4424680"/>
-                <a:gd name="connsiteY7" fmla="*/ 300565 h 360680"/>
-                <a:gd name="connsiteX8" fmla="*/ 0 w 4424680"/>
-                <a:gd name="connsiteY8" fmla="*/ 60115 h 360680"/>
-                <a:gd name="connsiteX0" fmla="*/ 0 w 4424680"/>
-                <a:gd name="connsiteY0" fmla="*/ 60115 h 360680"/>
-                <a:gd name="connsiteX1" fmla="*/ 60115 w 4424680"/>
-                <a:gd name="connsiteY1" fmla="*/ 0 h 360680"/>
-                <a:gd name="connsiteX2" fmla="*/ 279400 w 4424680"/>
-                <a:gd name="connsiteY2" fmla="*/ 0 h 360680"/>
-                <a:gd name="connsiteX3" fmla="*/ 4364565 w 4424680"/>
-                <a:gd name="connsiteY3" fmla="*/ 0 h 360680"/>
-                <a:gd name="connsiteX4" fmla="*/ 4424680 w 4424680"/>
-                <a:gd name="connsiteY4" fmla="*/ 60115 h 360680"/>
-                <a:gd name="connsiteX5" fmla="*/ 4424680 w 4424680"/>
-                <a:gd name="connsiteY5" fmla="*/ 300565 h 360680"/>
-                <a:gd name="connsiteX6" fmla="*/ 4364565 w 4424680"/>
-                <a:gd name="connsiteY6" fmla="*/ 360680 h 360680"/>
-                <a:gd name="connsiteX7" fmla="*/ 60115 w 4424680"/>
-                <a:gd name="connsiteY7" fmla="*/ 360680 h 360680"/>
-                <a:gd name="connsiteX8" fmla="*/ 0 w 4424680"/>
-                <a:gd name="connsiteY8" fmla="*/ 300565 h 360680"/>
-                <a:gd name="connsiteX9" fmla="*/ 0 w 4424680"/>
-                <a:gd name="connsiteY9" fmla="*/ 60115 h 360680"/>
-                <a:gd name="connsiteX0" fmla="*/ 0 w 4424680"/>
-                <a:gd name="connsiteY0" fmla="*/ 60115 h 360680"/>
-                <a:gd name="connsiteX1" fmla="*/ 60115 w 4424680"/>
-                <a:gd name="connsiteY1" fmla="*/ 0 h 360680"/>
-                <a:gd name="connsiteX2" fmla="*/ 4364565 w 4424680"/>
-                <a:gd name="connsiteY2" fmla="*/ 0 h 360680"/>
-                <a:gd name="connsiteX3" fmla="*/ 4424680 w 4424680"/>
-                <a:gd name="connsiteY3" fmla="*/ 60115 h 360680"/>
-                <a:gd name="connsiteX4" fmla="*/ 4424680 w 4424680"/>
-                <a:gd name="connsiteY4" fmla="*/ 300565 h 360680"/>
-                <a:gd name="connsiteX5" fmla="*/ 4364565 w 4424680"/>
-                <a:gd name="connsiteY5" fmla="*/ 360680 h 360680"/>
-                <a:gd name="connsiteX6" fmla="*/ 60115 w 4424680"/>
-                <a:gd name="connsiteY6" fmla="*/ 360680 h 360680"/>
-                <a:gd name="connsiteX7" fmla="*/ 0 w 4424680"/>
-                <a:gd name="connsiteY7" fmla="*/ 300565 h 360680"/>
-                <a:gd name="connsiteX8" fmla="*/ 0 w 4424680"/>
-                <a:gd name="connsiteY8" fmla="*/ 60115 h 360680"/>
-                <a:gd name="connsiteX0" fmla="*/ 0 w 4424680"/>
-                <a:gd name="connsiteY0" fmla="*/ 60115 h 360680"/>
-                <a:gd name="connsiteX1" fmla="*/ 60115 w 4424680"/>
-                <a:gd name="connsiteY1" fmla="*/ 0 h 360680"/>
-                <a:gd name="connsiteX2" fmla="*/ 350520 w 4424680"/>
-                <a:gd name="connsiteY2" fmla="*/ 0 h 360680"/>
-                <a:gd name="connsiteX3" fmla="*/ 4364565 w 4424680"/>
-                <a:gd name="connsiteY3" fmla="*/ 0 h 360680"/>
-                <a:gd name="connsiteX4" fmla="*/ 4424680 w 4424680"/>
-                <a:gd name="connsiteY4" fmla="*/ 60115 h 360680"/>
-                <a:gd name="connsiteX5" fmla="*/ 4424680 w 4424680"/>
-                <a:gd name="connsiteY5" fmla="*/ 300565 h 360680"/>
-                <a:gd name="connsiteX6" fmla="*/ 4364565 w 4424680"/>
-                <a:gd name="connsiteY6" fmla="*/ 360680 h 360680"/>
-                <a:gd name="connsiteX7" fmla="*/ 60115 w 4424680"/>
-                <a:gd name="connsiteY7" fmla="*/ 360680 h 360680"/>
-                <a:gd name="connsiteX8" fmla="*/ 0 w 4424680"/>
-                <a:gd name="connsiteY8" fmla="*/ 300565 h 360680"/>
-                <a:gd name="connsiteX9" fmla="*/ 0 w 4424680"/>
-                <a:gd name="connsiteY9" fmla="*/ 60115 h 360680"/>
-                <a:gd name="connsiteX0" fmla="*/ 0 w 4424680"/>
-                <a:gd name="connsiteY0" fmla="*/ 121075 h 421640"/>
-                <a:gd name="connsiteX1" fmla="*/ 60115 w 4424680"/>
-                <a:gd name="connsiteY1" fmla="*/ 60960 h 421640"/>
-                <a:gd name="connsiteX2" fmla="*/ 350520 w 4424680"/>
-                <a:gd name="connsiteY2" fmla="*/ 60960 h 421640"/>
-                <a:gd name="connsiteX3" fmla="*/ 4364565 w 4424680"/>
-                <a:gd name="connsiteY3" fmla="*/ 60960 h 421640"/>
-                <a:gd name="connsiteX4" fmla="*/ 4424680 w 4424680"/>
-                <a:gd name="connsiteY4" fmla="*/ 121075 h 421640"/>
-                <a:gd name="connsiteX5" fmla="*/ 4424680 w 4424680"/>
-                <a:gd name="connsiteY5" fmla="*/ 361525 h 421640"/>
-                <a:gd name="connsiteX6" fmla="*/ 4364565 w 4424680"/>
-                <a:gd name="connsiteY6" fmla="*/ 421640 h 421640"/>
-                <a:gd name="connsiteX7" fmla="*/ 60115 w 4424680"/>
-                <a:gd name="connsiteY7" fmla="*/ 421640 h 421640"/>
-                <a:gd name="connsiteX8" fmla="*/ 0 w 4424680"/>
-                <a:gd name="connsiteY8" fmla="*/ 361525 h 421640"/>
-                <a:gd name="connsiteX9" fmla="*/ 0 w 4424680"/>
-                <a:gd name="connsiteY9" fmla="*/ 121075 h 421640"/>
-                <a:gd name="connsiteX0" fmla="*/ 0 w 4424680"/>
-                <a:gd name="connsiteY0" fmla="*/ 121075 h 421640"/>
-                <a:gd name="connsiteX1" fmla="*/ 60115 w 4424680"/>
-                <a:gd name="connsiteY1" fmla="*/ 60960 h 421640"/>
-                <a:gd name="connsiteX2" fmla="*/ 350520 w 4424680"/>
-                <a:gd name="connsiteY2" fmla="*/ 60960 h 421640"/>
-                <a:gd name="connsiteX3" fmla="*/ 4364565 w 4424680"/>
-                <a:gd name="connsiteY3" fmla="*/ 60960 h 421640"/>
-                <a:gd name="connsiteX4" fmla="*/ 4424680 w 4424680"/>
-                <a:gd name="connsiteY4" fmla="*/ 121075 h 421640"/>
-                <a:gd name="connsiteX5" fmla="*/ 4424680 w 4424680"/>
-                <a:gd name="connsiteY5" fmla="*/ 361525 h 421640"/>
-                <a:gd name="connsiteX6" fmla="*/ 4364565 w 4424680"/>
-                <a:gd name="connsiteY6" fmla="*/ 421640 h 421640"/>
-                <a:gd name="connsiteX7" fmla="*/ 330200 w 4424680"/>
-                <a:gd name="connsiteY7" fmla="*/ 421640 h 421640"/>
-                <a:gd name="connsiteX8" fmla="*/ 60115 w 4424680"/>
-                <a:gd name="connsiteY8" fmla="*/ 421640 h 421640"/>
-                <a:gd name="connsiteX9" fmla="*/ 0 w 4424680"/>
-                <a:gd name="connsiteY9" fmla="*/ 361525 h 421640"/>
-                <a:gd name="connsiteX10" fmla="*/ 0 w 4424680"/>
-                <a:gd name="connsiteY10" fmla="*/ 121075 h 421640"/>
-                <a:gd name="connsiteX0" fmla="*/ 0 w 4424680"/>
-                <a:gd name="connsiteY0" fmla="*/ 60115 h 360680"/>
-                <a:gd name="connsiteX1" fmla="*/ 60115 w 4424680"/>
-                <a:gd name="connsiteY1" fmla="*/ 0 h 360680"/>
-                <a:gd name="connsiteX2" fmla="*/ 350520 w 4424680"/>
-                <a:gd name="connsiteY2" fmla="*/ 0 h 360680"/>
-                <a:gd name="connsiteX3" fmla="*/ 4364565 w 4424680"/>
-                <a:gd name="connsiteY3" fmla="*/ 0 h 360680"/>
-                <a:gd name="connsiteX4" fmla="*/ 4424680 w 4424680"/>
-                <a:gd name="connsiteY4" fmla="*/ 60115 h 360680"/>
-                <a:gd name="connsiteX5" fmla="*/ 4424680 w 4424680"/>
-                <a:gd name="connsiteY5" fmla="*/ 300565 h 360680"/>
-                <a:gd name="connsiteX6" fmla="*/ 4364565 w 4424680"/>
-                <a:gd name="connsiteY6" fmla="*/ 360680 h 360680"/>
-                <a:gd name="connsiteX7" fmla="*/ 330200 w 4424680"/>
-                <a:gd name="connsiteY7" fmla="*/ 360680 h 360680"/>
-                <a:gd name="connsiteX8" fmla="*/ 60115 w 4424680"/>
-                <a:gd name="connsiteY8" fmla="*/ 360680 h 360680"/>
-                <a:gd name="connsiteX9" fmla="*/ 0 w 4424680"/>
-                <a:gd name="connsiteY9" fmla="*/ 300565 h 360680"/>
-                <a:gd name="connsiteX10" fmla="*/ 0 w 4424680"/>
-                <a:gd name="connsiteY10" fmla="*/ 60115 h 360680"/>
-                <a:gd name="connsiteX0" fmla="*/ 0 w 4424680"/>
-                <a:gd name="connsiteY0" fmla="*/ 60115 h 421640"/>
-                <a:gd name="connsiteX1" fmla="*/ 60115 w 4424680"/>
-                <a:gd name="connsiteY1" fmla="*/ 0 h 421640"/>
-                <a:gd name="connsiteX2" fmla="*/ 350520 w 4424680"/>
-                <a:gd name="connsiteY2" fmla="*/ 0 h 421640"/>
-                <a:gd name="connsiteX3" fmla="*/ 4364565 w 4424680"/>
-                <a:gd name="connsiteY3" fmla="*/ 0 h 421640"/>
-                <a:gd name="connsiteX4" fmla="*/ 4424680 w 4424680"/>
-                <a:gd name="connsiteY4" fmla="*/ 60115 h 421640"/>
-                <a:gd name="connsiteX5" fmla="*/ 4424680 w 4424680"/>
-                <a:gd name="connsiteY5" fmla="*/ 300565 h 421640"/>
-                <a:gd name="connsiteX6" fmla="*/ 4364565 w 4424680"/>
-                <a:gd name="connsiteY6" fmla="*/ 360680 h 421640"/>
-                <a:gd name="connsiteX7" fmla="*/ 330200 w 4424680"/>
-                <a:gd name="connsiteY7" fmla="*/ 360680 h 421640"/>
-                <a:gd name="connsiteX8" fmla="*/ 60115 w 4424680"/>
-                <a:gd name="connsiteY8" fmla="*/ 360680 h 421640"/>
-                <a:gd name="connsiteX9" fmla="*/ 0 w 4424680"/>
-                <a:gd name="connsiteY9" fmla="*/ 300565 h 421640"/>
-                <a:gd name="connsiteX10" fmla="*/ 0 w 4424680"/>
-                <a:gd name="connsiteY10" fmla="*/ 60115 h 421640"/>
-                <a:gd name="connsiteX0" fmla="*/ 0 w 4424680"/>
-                <a:gd name="connsiteY0" fmla="*/ 60115 h 421640"/>
-                <a:gd name="connsiteX1" fmla="*/ 60115 w 4424680"/>
-                <a:gd name="connsiteY1" fmla="*/ 0 h 421640"/>
-                <a:gd name="connsiteX2" fmla="*/ 350520 w 4424680"/>
-                <a:gd name="connsiteY2" fmla="*/ 0 h 421640"/>
-                <a:gd name="connsiteX3" fmla="*/ 4364565 w 4424680"/>
-                <a:gd name="connsiteY3" fmla="*/ 0 h 421640"/>
-                <a:gd name="connsiteX4" fmla="*/ 4424680 w 4424680"/>
-                <a:gd name="connsiteY4" fmla="*/ 60115 h 421640"/>
-                <a:gd name="connsiteX5" fmla="*/ 4424680 w 4424680"/>
-                <a:gd name="connsiteY5" fmla="*/ 300565 h 421640"/>
-                <a:gd name="connsiteX6" fmla="*/ 4364565 w 4424680"/>
-                <a:gd name="connsiteY6" fmla="*/ 360680 h 421640"/>
-                <a:gd name="connsiteX7" fmla="*/ 330200 w 4424680"/>
-                <a:gd name="connsiteY7" fmla="*/ 360680 h 421640"/>
-                <a:gd name="connsiteX8" fmla="*/ 60115 w 4424680"/>
-                <a:gd name="connsiteY8" fmla="*/ 360680 h 421640"/>
-                <a:gd name="connsiteX9" fmla="*/ 0 w 4424680"/>
-                <a:gd name="connsiteY9" fmla="*/ 300565 h 421640"/>
-                <a:gd name="connsiteX10" fmla="*/ 0 w 4424680"/>
-                <a:gd name="connsiteY10" fmla="*/ 60115 h 421640"/>
-                <a:gd name="connsiteX0" fmla="*/ 0 w 4424680"/>
-                <a:gd name="connsiteY0" fmla="*/ 60115 h 377646"/>
-                <a:gd name="connsiteX1" fmla="*/ 60115 w 4424680"/>
-                <a:gd name="connsiteY1" fmla="*/ 0 h 377646"/>
-                <a:gd name="connsiteX2" fmla="*/ 350520 w 4424680"/>
-                <a:gd name="connsiteY2" fmla="*/ 0 h 377646"/>
-                <a:gd name="connsiteX3" fmla="*/ 4364565 w 4424680"/>
-                <a:gd name="connsiteY3" fmla="*/ 0 h 377646"/>
-                <a:gd name="connsiteX4" fmla="*/ 4424680 w 4424680"/>
-                <a:gd name="connsiteY4" fmla="*/ 60115 h 377646"/>
-                <a:gd name="connsiteX5" fmla="*/ 4424680 w 4424680"/>
-                <a:gd name="connsiteY5" fmla="*/ 300565 h 377646"/>
-                <a:gd name="connsiteX6" fmla="*/ 4364565 w 4424680"/>
-                <a:gd name="connsiteY6" fmla="*/ 360680 h 377646"/>
-                <a:gd name="connsiteX7" fmla="*/ 330200 w 4424680"/>
-                <a:gd name="connsiteY7" fmla="*/ 360680 h 377646"/>
-                <a:gd name="connsiteX8" fmla="*/ 60115 w 4424680"/>
-                <a:gd name="connsiteY8" fmla="*/ 360680 h 377646"/>
-                <a:gd name="connsiteX9" fmla="*/ 0 w 4424680"/>
-                <a:gd name="connsiteY9" fmla="*/ 300565 h 377646"/>
-                <a:gd name="connsiteX10" fmla="*/ 0 w 4424680"/>
-                <a:gd name="connsiteY10" fmla="*/ 60115 h 377646"/>
-              </a:gdLst>
-              <a:ahLst/>
-              <a:cxnLst>
-                <a:cxn ang="0">
-                  <a:pos x="connsiteX0" y="connsiteY0"/>
-                </a:cxn>
-                <a:cxn ang="0">
-                  <a:pos x="connsiteX1" y="connsiteY1"/>
-                </a:cxn>
-                <a:cxn ang="0">
-                  <a:pos x="connsiteX2" y="connsiteY2"/>
-                </a:cxn>
-                <a:cxn ang="0">
-                  <a:pos x="connsiteX3" y="connsiteY3"/>
-                </a:cxn>
-                <a:cxn ang="0">
-                  <a:pos x="connsiteX4" y="connsiteY4"/>
-                </a:cxn>
-                <a:cxn ang="0">
-                  <a:pos x="connsiteX5" y="connsiteY5"/>
-                </a:cxn>
-                <a:cxn ang="0">
-                  <a:pos x="connsiteX6" y="connsiteY6"/>
-                </a:cxn>
-                <a:cxn ang="0">
-                  <a:pos x="connsiteX7" y="connsiteY7"/>
-                </a:cxn>
-                <a:cxn ang="0">
-                  <a:pos x="connsiteX8" y="connsiteY8"/>
-                </a:cxn>
-                <a:cxn ang="0">
-                  <a:pos x="connsiteX9" y="connsiteY9"/>
-                </a:cxn>
-                <a:cxn ang="0">
-                  <a:pos x="connsiteX10" y="connsiteY10"/>
-                </a:cxn>
-              </a:cxnLst>
-              <a:rect l="l" t="t" r="r" b="b"/>
-              <a:pathLst>
-                <a:path w="4424680" h="377646">
-                  <a:moveTo>
-                    <a:pt x="0" y="60115"/>
-                  </a:moveTo>
-                  <a:cubicBezTo>
-                    <a:pt x="0" y="26914"/>
-                    <a:pt x="26914" y="0"/>
-                    <a:pt x="60115" y="0"/>
-                  </a:cubicBezTo>
-                  <a:cubicBezTo>
-                    <a:pt x="156917" y="0"/>
-                    <a:pt x="127388" y="56799"/>
-                    <a:pt x="350520" y="0"/>
-                  </a:cubicBezTo>
-                  <a:lnTo>
-                    <a:pt x="4364565" y="0"/>
-                  </a:lnTo>
-                  <a:cubicBezTo>
-                    <a:pt x="4397766" y="0"/>
-                    <a:pt x="4424680" y="26914"/>
-                    <a:pt x="4424680" y="60115"/>
-                  </a:cubicBezTo>
-                  <a:lnTo>
-                    <a:pt x="4424680" y="300565"/>
-                  </a:lnTo>
-                  <a:cubicBezTo>
-                    <a:pt x="4424680" y="333766"/>
-                    <a:pt x="4397766" y="360680"/>
-                    <a:pt x="4364565" y="360680"/>
-                  </a:cubicBezTo>
-                  <a:lnTo>
-                    <a:pt x="330200" y="360680"/>
-                  </a:lnTo>
-                  <a:cubicBezTo>
-                    <a:pt x="170817" y="398855"/>
-                    <a:pt x="150143" y="360680"/>
-                    <a:pt x="60115" y="360680"/>
-                  </a:cubicBezTo>
-                  <a:cubicBezTo>
-                    <a:pt x="26914" y="360680"/>
-                    <a:pt x="0" y="333766"/>
-                    <a:pt x="0" y="300565"/>
-                  </a:cubicBezTo>
-                  <a:lnTo>
-                    <a:pt x="0" y="60115"/>
-                  </a:lnTo>
-                  <a:close/>
-                </a:path>
-              </a:pathLst>
-            </a:custGeom>
-          </p:spPr>
-          <p:style>
-            <a:lnRef idx="2">
-              <a:schemeClr val="accent1">
-                <a:shade val="50000"/>
-              </a:schemeClr>
-            </a:lnRef>
-            <a:fillRef idx="1">
-              <a:schemeClr val="accent1"/>
-            </a:fillRef>
-            <a:effectRef idx="0">
-              <a:schemeClr val="accent1"/>
-            </a:effectRef>
-            <a:fontRef idx="minor">
-              <a:schemeClr val="lt1"/>
-            </a:fontRef>
-          </p:style>
-          <p:txBody>
-            <a:bodyPr rot="0" spcFirstLastPara="0" vert="horz" wrap="square" lIns="36000" tIns="0" rIns="36000" bIns="0" numCol="1" spcCol="0" rtlCol="0" fromWordArt="0" anchor="ctr" anchorCtr="0" forceAA="0" compatLnSpc="1">
-              <a:prstTxWarp prst="textNoShape">
-                <a:avLst/>
-              </a:prstTxWarp>
-              <a:noAutofit/>
-            </a:bodyPr>
-            <a:lstStyle/>
-            <a:p>
-              <a:pPr>
-                <a:spcAft>
-                  <a:spcPts val="0"/>
-                </a:spcAft>
-              </a:pPr>
-              <a:endParaRPr lang="zh-TW" sz="1200" kern="100" dirty="0">
-                <a:effectLst/>
+              </a:rPr>
+              <a:t>iMi</a:t>
+            </a:r>
+            <a:r>
+              <a:rPr lang="zh-TW" altLang="en-US" sz="1200" kern="100" dirty="0">
                 <a:ea typeface="新細明體" panose="02020500000000000000" pitchFamily="18" charset="-120"/>
                 <a:cs typeface="Times New Roman" panose="02020603050405020304" pitchFamily="18" charset="0"/>
-              </a:endParaRPr>
-            </a:p>
-          </p:txBody>
-        </p:sp>
-        <p:grpSp>
-          <p:nvGrpSpPr>
-            <p:cNvPr id="47" name="群組 46">
-              <a:extLst>
-                <a:ext uri="{FF2B5EF4-FFF2-40B4-BE49-F238E27FC236}">
-                  <a16:creationId xmlns:a16="http://schemas.microsoft.com/office/drawing/2014/main" id="{B3D6B8DE-20C5-4DB9-9BC7-6B43F9F9D937}"/>
-                </a:ext>
-              </a:extLst>
-            </p:cNvPr>
-            <p:cNvGrpSpPr/>
-            <p:nvPr/>
-          </p:nvGrpSpPr>
-          <p:grpSpPr>
-            <a:xfrm>
-              <a:off x="4674869" y="3761106"/>
-              <a:ext cx="1630687" cy="175260"/>
-              <a:chOff x="1503044" y="2736215"/>
-              <a:chExt cx="1630687" cy="175260"/>
-            </a:xfrm>
-          </p:grpSpPr>
-          <p:sp>
-            <p:nvSpPr>
-              <p:cNvPr id="69" name="手繪多邊形: 圖案 10">
-                <a:extLst>
-                  <a:ext uri="{FF2B5EF4-FFF2-40B4-BE49-F238E27FC236}">
-                    <a16:creationId xmlns:a16="http://schemas.microsoft.com/office/drawing/2014/main" id="{CA69C971-2702-4CBF-B887-2808C3511312}"/>
-                  </a:ext>
-                </a:extLst>
-              </p:cNvPr>
-              <p:cNvSpPr/>
-              <p:nvPr/>
-            </p:nvSpPr>
-            <p:spPr>
-              <a:xfrm>
-                <a:off x="1503044" y="2736215"/>
-                <a:ext cx="219078" cy="175260"/>
-              </a:xfrm>
-              <a:custGeom>
-                <a:avLst/>
-                <a:gdLst>
-                  <a:gd name="connsiteX0" fmla="*/ 84890 w 453390"/>
-                  <a:gd name="connsiteY0" fmla="*/ 0 h 263525"/>
-                  <a:gd name="connsiteX1" fmla="*/ 453390 w 453390"/>
-                  <a:gd name="connsiteY1" fmla="*/ 0 h 263525"/>
-                  <a:gd name="connsiteX2" fmla="*/ 453390 w 453390"/>
-                  <a:gd name="connsiteY2" fmla="*/ 263525 h 263525"/>
-                  <a:gd name="connsiteX3" fmla="*/ 84890 w 453390"/>
-                  <a:gd name="connsiteY3" fmla="*/ 263525 h 263525"/>
-                  <a:gd name="connsiteX4" fmla="*/ 59217 w 453390"/>
-                  <a:gd name="connsiteY4" fmla="*/ 168771 h 263525"/>
-                  <a:gd name="connsiteX5" fmla="*/ 4819 w 453390"/>
-                  <a:gd name="connsiteY5" fmla="*/ 221542 h 263525"/>
-                  <a:gd name="connsiteX6" fmla="*/ 0 w 453390"/>
-                  <a:gd name="connsiteY6" fmla="*/ 54571 h 263525"/>
-                  <a:gd name="connsiteX7" fmla="*/ 55658 w 453390"/>
-                  <a:gd name="connsiteY7" fmla="*/ 89403 h 263525"/>
-                  <a:gd name="connsiteX8" fmla="*/ 84890 w 453390"/>
-                  <a:gd name="connsiteY8" fmla="*/ 0 h 263525"/>
-                </a:gdLst>
-                <a:ahLst/>
-                <a:cxnLst>
-                  <a:cxn ang="0">
-                    <a:pos x="connsiteX0" y="connsiteY0"/>
-                  </a:cxn>
-                  <a:cxn ang="0">
-                    <a:pos x="connsiteX1" y="connsiteY1"/>
-                  </a:cxn>
-                  <a:cxn ang="0">
-                    <a:pos x="connsiteX2" y="connsiteY2"/>
-                  </a:cxn>
-                  <a:cxn ang="0">
-                    <a:pos x="connsiteX3" y="connsiteY3"/>
-                  </a:cxn>
-                  <a:cxn ang="0">
-                    <a:pos x="connsiteX4" y="connsiteY4"/>
-                  </a:cxn>
-                  <a:cxn ang="0">
-                    <a:pos x="connsiteX5" y="connsiteY5"/>
-                  </a:cxn>
-                  <a:cxn ang="0">
-                    <a:pos x="connsiteX6" y="connsiteY6"/>
-                  </a:cxn>
-                  <a:cxn ang="0">
-                    <a:pos x="connsiteX7" y="connsiteY7"/>
-                  </a:cxn>
-                  <a:cxn ang="0">
-                    <a:pos x="connsiteX8" y="connsiteY8"/>
-                  </a:cxn>
-                </a:cxnLst>
-                <a:rect l="l" t="t" r="r" b="b"/>
-                <a:pathLst>
-                  <a:path w="453390" h="263525">
-                    <a:moveTo>
-                      <a:pt x="84890" y="0"/>
-                    </a:moveTo>
-                    <a:lnTo>
-                      <a:pt x="453390" y="0"/>
-                    </a:lnTo>
-                    <a:lnTo>
-                      <a:pt x="453390" y="263525"/>
-                    </a:lnTo>
-                    <a:lnTo>
-                      <a:pt x="84890" y="263525"/>
-                    </a:lnTo>
-                    <a:cubicBezTo>
-                      <a:pt x="68745" y="263525"/>
-                      <a:pt x="59217" y="193028"/>
-                      <a:pt x="59217" y="168771"/>
-                    </a:cubicBezTo>
-                    <a:lnTo>
-                      <a:pt x="4819" y="221542"/>
-                    </a:lnTo>
-                    <a:lnTo>
-                      <a:pt x="0" y="54571"/>
-                    </a:lnTo>
-                    <a:lnTo>
-                      <a:pt x="55658" y="89403"/>
-                    </a:lnTo>
-                    <a:cubicBezTo>
-                      <a:pt x="55658" y="65146"/>
-                      <a:pt x="68745" y="0"/>
-                      <a:pt x="84890" y="0"/>
-                    </a:cubicBezTo>
-                    <a:close/>
-                  </a:path>
-                </a:pathLst>
-              </a:custGeom>
-            </p:spPr>
-            <p:style>
-              <a:lnRef idx="2">
-                <a:schemeClr val="accent5">
-                  <a:shade val="50000"/>
-                </a:schemeClr>
-              </a:lnRef>
-              <a:fillRef idx="1">
-                <a:schemeClr val="accent5"/>
-              </a:fillRef>
-              <a:effectRef idx="0">
-                <a:schemeClr val="accent5"/>
-              </a:effectRef>
-              <a:fontRef idx="minor">
-                <a:schemeClr val="lt1"/>
-              </a:fontRef>
-            </p:style>
-            <p:txBody>
-              <a:bodyPr rot="0" spcFirstLastPara="0" vert="horz" wrap="square" lIns="0" tIns="0" rIns="0" bIns="0" numCol="1" spcCol="0" rtlCol="0" fromWordArt="0" anchor="ctr" anchorCtr="0" forceAA="0" compatLnSpc="1">
-                <a:prstTxWarp prst="textNoShape">
-                  <a:avLst/>
-                </a:prstTxWarp>
-                <a:noAutofit/>
-              </a:bodyPr>
-              <a:lstStyle/>
-              <a:p>
-                <a:pPr indent="73025" algn="ctr">
-                  <a:spcAft>
-                    <a:spcPts val="0"/>
-                  </a:spcAft>
-                </a:pPr>
-                <a:r>
-                  <a:rPr lang="en-US" sz="1200" kern="100" dirty="0">
-                    <a:solidFill>
-                      <a:srgbClr val="FFFFFF"/>
-                    </a:solidFill>
-                    <a:effectLst/>
-                    <a:ea typeface="新細明體" panose="02020500000000000000" pitchFamily="18" charset="-120"/>
-                    <a:cs typeface="Times New Roman" panose="02020603050405020304" pitchFamily="18" charset="0"/>
-                  </a:rPr>
-                  <a:t>1</a:t>
-                </a:r>
-                <a:endParaRPr lang="zh-TW" sz="1200" kern="100" dirty="0">
-                  <a:effectLst/>
-                  <a:ea typeface="新細明體" panose="02020500000000000000" pitchFamily="18" charset="-120"/>
-                  <a:cs typeface="Times New Roman" panose="02020603050405020304" pitchFamily="18" charset="0"/>
-                </a:endParaRPr>
-              </a:p>
-            </p:txBody>
-          </p:sp>
-          <p:sp>
-            <p:nvSpPr>
-              <p:cNvPr id="70" name="手繪多邊形: 圖案 10">
-                <a:extLst>
-                  <a:ext uri="{FF2B5EF4-FFF2-40B4-BE49-F238E27FC236}">
-                    <a16:creationId xmlns:a16="http://schemas.microsoft.com/office/drawing/2014/main" id="{DC3ECA74-FB0E-4100-B7F7-0500A237D421}"/>
-                  </a:ext>
-                </a:extLst>
-              </p:cNvPr>
-              <p:cNvSpPr/>
-              <p:nvPr/>
-            </p:nvSpPr>
-            <p:spPr>
-              <a:xfrm>
-                <a:off x="1784030" y="2736215"/>
-                <a:ext cx="219078" cy="175260"/>
-              </a:xfrm>
-              <a:custGeom>
-                <a:avLst/>
-                <a:gdLst>
-                  <a:gd name="connsiteX0" fmla="*/ 84890 w 453390"/>
-                  <a:gd name="connsiteY0" fmla="*/ 0 h 263525"/>
-                  <a:gd name="connsiteX1" fmla="*/ 453390 w 453390"/>
-                  <a:gd name="connsiteY1" fmla="*/ 0 h 263525"/>
-                  <a:gd name="connsiteX2" fmla="*/ 453390 w 453390"/>
-                  <a:gd name="connsiteY2" fmla="*/ 263525 h 263525"/>
-                  <a:gd name="connsiteX3" fmla="*/ 84890 w 453390"/>
-                  <a:gd name="connsiteY3" fmla="*/ 263525 h 263525"/>
-                  <a:gd name="connsiteX4" fmla="*/ 59217 w 453390"/>
-                  <a:gd name="connsiteY4" fmla="*/ 168771 h 263525"/>
-                  <a:gd name="connsiteX5" fmla="*/ 4819 w 453390"/>
-                  <a:gd name="connsiteY5" fmla="*/ 221542 h 263525"/>
-                  <a:gd name="connsiteX6" fmla="*/ 0 w 453390"/>
-                  <a:gd name="connsiteY6" fmla="*/ 54571 h 263525"/>
-                  <a:gd name="connsiteX7" fmla="*/ 55658 w 453390"/>
-                  <a:gd name="connsiteY7" fmla="*/ 89403 h 263525"/>
-                  <a:gd name="connsiteX8" fmla="*/ 84890 w 453390"/>
-                  <a:gd name="connsiteY8" fmla="*/ 0 h 263525"/>
-                </a:gdLst>
-                <a:ahLst/>
-                <a:cxnLst>
-                  <a:cxn ang="0">
-                    <a:pos x="connsiteX0" y="connsiteY0"/>
-                  </a:cxn>
-                  <a:cxn ang="0">
-                    <a:pos x="connsiteX1" y="connsiteY1"/>
-                  </a:cxn>
-                  <a:cxn ang="0">
-                    <a:pos x="connsiteX2" y="connsiteY2"/>
-                  </a:cxn>
-                  <a:cxn ang="0">
-                    <a:pos x="connsiteX3" y="connsiteY3"/>
-                  </a:cxn>
-                  <a:cxn ang="0">
-                    <a:pos x="connsiteX4" y="connsiteY4"/>
-                  </a:cxn>
-                  <a:cxn ang="0">
-                    <a:pos x="connsiteX5" y="connsiteY5"/>
-                  </a:cxn>
-                  <a:cxn ang="0">
-                    <a:pos x="connsiteX6" y="connsiteY6"/>
-                  </a:cxn>
-                  <a:cxn ang="0">
-                    <a:pos x="connsiteX7" y="connsiteY7"/>
-                  </a:cxn>
-                  <a:cxn ang="0">
-                    <a:pos x="connsiteX8" y="connsiteY8"/>
-                  </a:cxn>
-                </a:cxnLst>
-                <a:rect l="l" t="t" r="r" b="b"/>
-                <a:pathLst>
-                  <a:path w="453390" h="263525">
-                    <a:moveTo>
-                      <a:pt x="84890" y="0"/>
-                    </a:moveTo>
-                    <a:lnTo>
-                      <a:pt x="453390" y="0"/>
-                    </a:lnTo>
-                    <a:lnTo>
-                      <a:pt x="453390" y="263525"/>
-                    </a:lnTo>
-                    <a:lnTo>
-                      <a:pt x="84890" y="263525"/>
-                    </a:lnTo>
-                    <a:cubicBezTo>
-                      <a:pt x="68745" y="263525"/>
-                      <a:pt x="59217" y="193028"/>
-                      <a:pt x="59217" y="168771"/>
-                    </a:cubicBezTo>
-                    <a:lnTo>
-                      <a:pt x="4819" y="221542"/>
-                    </a:lnTo>
-                    <a:lnTo>
-                      <a:pt x="0" y="54571"/>
-                    </a:lnTo>
-                    <a:lnTo>
-                      <a:pt x="55658" y="89403"/>
-                    </a:lnTo>
-                    <a:cubicBezTo>
-                      <a:pt x="55658" y="65146"/>
-                      <a:pt x="68745" y="0"/>
-                      <a:pt x="84890" y="0"/>
-                    </a:cubicBezTo>
-                    <a:close/>
-                  </a:path>
-                </a:pathLst>
-              </a:custGeom>
-            </p:spPr>
-            <p:style>
-              <a:lnRef idx="2">
-                <a:schemeClr val="accent5">
-                  <a:shade val="50000"/>
-                </a:schemeClr>
-              </a:lnRef>
-              <a:fillRef idx="1">
-                <a:schemeClr val="accent5"/>
-              </a:fillRef>
-              <a:effectRef idx="0">
-                <a:schemeClr val="accent5"/>
-              </a:effectRef>
-              <a:fontRef idx="minor">
-                <a:schemeClr val="lt1"/>
-              </a:fontRef>
-            </p:style>
-            <p:txBody>
-              <a:bodyPr rot="0" spcFirstLastPara="0" vert="horz" wrap="square" lIns="0" tIns="0" rIns="0" bIns="0" numCol="1" spcCol="0" rtlCol="0" fromWordArt="0" anchor="ctr" anchorCtr="0" forceAA="0" compatLnSpc="1">
-                <a:prstTxWarp prst="textNoShape">
-                  <a:avLst/>
-                </a:prstTxWarp>
-                <a:noAutofit/>
-              </a:bodyPr>
-              <a:lstStyle/>
-              <a:p>
-                <a:pPr indent="73025" algn="ctr">
-                  <a:spcAft>
-                    <a:spcPts val="0"/>
-                  </a:spcAft>
-                </a:pPr>
-                <a:r>
-                  <a:rPr lang="en-US" sz="1200" kern="100" dirty="0">
-                    <a:solidFill>
-                      <a:srgbClr val="FFFFFF"/>
-                    </a:solidFill>
-                    <a:effectLst/>
-                    <a:ea typeface="新細明體" panose="02020500000000000000" pitchFamily="18" charset="-120"/>
-                    <a:cs typeface="Times New Roman" panose="02020603050405020304" pitchFamily="18" charset="0"/>
-                  </a:rPr>
-                  <a:t>1</a:t>
-                </a:r>
-                <a:endParaRPr lang="zh-TW" sz="1200" kern="100" dirty="0">
-                  <a:effectLst/>
-                  <a:ea typeface="新細明體" panose="02020500000000000000" pitchFamily="18" charset="-120"/>
-                  <a:cs typeface="Times New Roman" panose="02020603050405020304" pitchFamily="18" charset="0"/>
-                </a:endParaRPr>
-              </a:p>
-            </p:txBody>
-          </p:sp>
-          <p:sp>
-            <p:nvSpPr>
-              <p:cNvPr id="71" name="手繪多邊形: 圖案 10">
-                <a:extLst>
-                  <a:ext uri="{FF2B5EF4-FFF2-40B4-BE49-F238E27FC236}">
-                    <a16:creationId xmlns:a16="http://schemas.microsoft.com/office/drawing/2014/main" id="{78138566-24AD-4699-928B-2EB8A9FEF365}"/>
-                  </a:ext>
-                </a:extLst>
-              </p:cNvPr>
-              <p:cNvSpPr/>
-              <p:nvPr/>
-            </p:nvSpPr>
-            <p:spPr>
-              <a:xfrm>
-                <a:off x="2065016" y="2736215"/>
-                <a:ext cx="219078" cy="175260"/>
-              </a:xfrm>
-              <a:custGeom>
-                <a:avLst/>
-                <a:gdLst>
-                  <a:gd name="connsiteX0" fmla="*/ 84890 w 453390"/>
-                  <a:gd name="connsiteY0" fmla="*/ 0 h 263525"/>
-                  <a:gd name="connsiteX1" fmla="*/ 453390 w 453390"/>
-                  <a:gd name="connsiteY1" fmla="*/ 0 h 263525"/>
-                  <a:gd name="connsiteX2" fmla="*/ 453390 w 453390"/>
-                  <a:gd name="connsiteY2" fmla="*/ 263525 h 263525"/>
-                  <a:gd name="connsiteX3" fmla="*/ 84890 w 453390"/>
-                  <a:gd name="connsiteY3" fmla="*/ 263525 h 263525"/>
-                  <a:gd name="connsiteX4" fmla="*/ 59217 w 453390"/>
-                  <a:gd name="connsiteY4" fmla="*/ 168771 h 263525"/>
-                  <a:gd name="connsiteX5" fmla="*/ 4819 w 453390"/>
-                  <a:gd name="connsiteY5" fmla="*/ 221542 h 263525"/>
-                  <a:gd name="connsiteX6" fmla="*/ 0 w 453390"/>
-                  <a:gd name="connsiteY6" fmla="*/ 54571 h 263525"/>
-                  <a:gd name="connsiteX7" fmla="*/ 55658 w 453390"/>
-                  <a:gd name="connsiteY7" fmla="*/ 89403 h 263525"/>
-                  <a:gd name="connsiteX8" fmla="*/ 84890 w 453390"/>
-                  <a:gd name="connsiteY8" fmla="*/ 0 h 263525"/>
-                </a:gdLst>
-                <a:ahLst/>
-                <a:cxnLst>
-                  <a:cxn ang="0">
-                    <a:pos x="connsiteX0" y="connsiteY0"/>
-                  </a:cxn>
-                  <a:cxn ang="0">
-                    <a:pos x="connsiteX1" y="connsiteY1"/>
-                  </a:cxn>
-                  <a:cxn ang="0">
-                    <a:pos x="connsiteX2" y="connsiteY2"/>
-                  </a:cxn>
-                  <a:cxn ang="0">
-                    <a:pos x="connsiteX3" y="connsiteY3"/>
-                  </a:cxn>
-                  <a:cxn ang="0">
-                    <a:pos x="connsiteX4" y="connsiteY4"/>
-                  </a:cxn>
-                  <a:cxn ang="0">
-                    <a:pos x="connsiteX5" y="connsiteY5"/>
-                  </a:cxn>
-                  <a:cxn ang="0">
-                    <a:pos x="connsiteX6" y="connsiteY6"/>
-                  </a:cxn>
-                  <a:cxn ang="0">
-                    <a:pos x="connsiteX7" y="connsiteY7"/>
-                  </a:cxn>
-                  <a:cxn ang="0">
-                    <a:pos x="connsiteX8" y="connsiteY8"/>
-                  </a:cxn>
-                </a:cxnLst>
-                <a:rect l="l" t="t" r="r" b="b"/>
-                <a:pathLst>
-                  <a:path w="453390" h="263525">
-                    <a:moveTo>
-                      <a:pt x="84890" y="0"/>
-                    </a:moveTo>
-                    <a:lnTo>
-                      <a:pt x="453390" y="0"/>
-                    </a:lnTo>
-                    <a:lnTo>
-                      <a:pt x="453390" y="263525"/>
-                    </a:lnTo>
-                    <a:lnTo>
-                      <a:pt x="84890" y="263525"/>
-                    </a:lnTo>
-                    <a:cubicBezTo>
-                      <a:pt x="68745" y="263525"/>
-                      <a:pt x="59217" y="193028"/>
-                      <a:pt x="59217" y="168771"/>
-                    </a:cubicBezTo>
-                    <a:lnTo>
-                      <a:pt x="4819" y="221542"/>
-                    </a:lnTo>
-                    <a:lnTo>
-                      <a:pt x="0" y="54571"/>
-                    </a:lnTo>
-                    <a:lnTo>
-                      <a:pt x="55658" y="89403"/>
-                    </a:lnTo>
-                    <a:cubicBezTo>
-                      <a:pt x="55658" y="65146"/>
-                      <a:pt x="68745" y="0"/>
-                      <a:pt x="84890" y="0"/>
-                    </a:cubicBezTo>
-                    <a:close/>
-                  </a:path>
-                </a:pathLst>
-              </a:custGeom>
-            </p:spPr>
-            <p:style>
-              <a:lnRef idx="2">
-                <a:schemeClr val="accent5">
-                  <a:shade val="50000"/>
-                </a:schemeClr>
-              </a:lnRef>
-              <a:fillRef idx="1">
-                <a:schemeClr val="accent5"/>
-              </a:fillRef>
-              <a:effectRef idx="0">
-                <a:schemeClr val="accent5"/>
-              </a:effectRef>
-              <a:fontRef idx="minor">
-                <a:schemeClr val="lt1"/>
-              </a:fontRef>
-            </p:style>
-            <p:txBody>
-              <a:bodyPr rot="0" spcFirstLastPara="0" vert="horz" wrap="square" lIns="0" tIns="0" rIns="0" bIns="0" numCol="1" spcCol="0" rtlCol="0" fromWordArt="0" anchor="ctr" anchorCtr="0" forceAA="0" compatLnSpc="1">
-                <a:prstTxWarp prst="textNoShape">
-                  <a:avLst/>
-                </a:prstTxWarp>
-                <a:noAutofit/>
-              </a:bodyPr>
-              <a:lstStyle/>
-              <a:p>
-                <a:pPr indent="73025" algn="ctr">
-                  <a:spcAft>
-                    <a:spcPts val="0"/>
-                  </a:spcAft>
-                </a:pPr>
-                <a:r>
-                  <a:rPr lang="en-US" sz="1200" kern="100" dirty="0">
-                    <a:solidFill>
-                      <a:srgbClr val="FFFFFF"/>
-                    </a:solidFill>
-                    <a:effectLst/>
-                    <a:ea typeface="新細明體" panose="02020500000000000000" pitchFamily="18" charset="-120"/>
-                    <a:cs typeface="Times New Roman" panose="02020603050405020304" pitchFamily="18" charset="0"/>
-                  </a:rPr>
-                  <a:t>1</a:t>
-                </a:r>
-                <a:endParaRPr lang="zh-TW" sz="1200" kern="100" dirty="0">
-                  <a:effectLst/>
-                  <a:ea typeface="新細明體" panose="02020500000000000000" pitchFamily="18" charset="-120"/>
-                  <a:cs typeface="Times New Roman" panose="02020603050405020304" pitchFamily="18" charset="0"/>
-                </a:endParaRPr>
-              </a:p>
-            </p:txBody>
-          </p:sp>
-          <p:sp>
-            <p:nvSpPr>
-              <p:cNvPr id="72" name="手繪多邊形: 圖案 10">
-                <a:extLst>
-                  <a:ext uri="{FF2B5EF4-FFF2-40B4-BE49-F238E27FC236}">
-                    <a16:creationId xmlns:a16="http://schemas.microsoft.com/office/drawing/2014/main" id="{E5EE9EAE-AF7F-4C0E-ADFC-6090D13F9E2B}"/>
-                  </a:ext>
-                </a:extLst>
-              </p:cNvPr>
-              <p:cNvSpPr/>
-              <p:nvPr/>
-            </p:nvSpPr>
-            <p:spPr>
-              <a:xfrm>
-                <a:off x="2346002" y="2736215"/>
-                <a:ext cx="219078" cy="175260"/>
-              </a:xfrm>
-              <a:custGeom>
-                <a:avLst/>
-                <a:gdLst>
-                  <a:gd name="connsiteX0" fmla="*/ 84890 w 453390"/>
-                  <a:gd name="connsiteY0" fmla="*/ 0 h 263525"/>
-                  <a:gd name="connsiteX1" fmla="*/ 453390 w 453390"/>
-                  <a:gd name="connsiteY1" fmla="*/ 0 h 263525"/>
-                  <a:gd name="connsiteX2" fmla="*/ 453390 w 453390"/>
-                  <a:gd name="connsiteY2" fmla="*/ 263525 h 263525"/>
-                  <a:gd name="connsiteX3" fmla="*/ 84890 w 453390"/>
-                  <a:gd name="connsiteY3" fmla="*/ 263525 h 263525"/>
-                  <a:gd name="connsiteX4" fmla="*/ 59217 w 453390"/>
-                  <a:gd name="connsiteY4" fmla="*/ 168771 h 263525"/>
-                  <a:gd name="connsiteX5" fmla="*/ 4819 w 453390"/>
-                  <a:gd name="connsiteY5" fmla="*/ 221542 h 263525"/>
-                  <a:gd name="connsiteX6" fmla="*/ 0 w 453390"/>
-                  <a:gd name="connsiteY6" fmla="*/ 54571 h 263525"/>
-                  <a:gd name="connsiteX7" fmla="*/ 55658 w 453390"/>
-                  <a:gd name="connsiteY7" fmla="*/ 89403 h 263525"/>
-                  <a:gd name="connsiteX8" fmla="*/ 84890 w 453390"/>
-                  <a:gd name="connsiteY8" fmla="*/ 0 h 263525"/>
-                </a:gdLst>
-                <a:ahLst/>
-                <a:cxnLst>
-                  <a:cxn ang="0">
-                    <a:pos x="connsiteX0" y="connsiteY0"/>
-                  </a:cxn>
-                  <a:cxn ang="0">
-                    <a:pos x="connsiteX1" y="connsiteY1"/>
-                  </a:cxn>
-                  <a:cxn ang="0">
-                    <a:pos x="connsiteX2" y="connsiteY2"/>
-                  </a:cxn>
-                  <a:cxn ang="0">
-                    <a:pos x="connsiteX3" y="connsiteY3"/>
-                  </a:cxn>
-                  <a:cxn ang="0">
-                    <a:pos x="connsiteX4" y="connsiteY4"/>
-                  </a:cxn>
-                  <a:cxn ang="0">
-                    <a:pos x="connsiteX5" y="connsiteY5"/>
-                  </a:cxn>
-                  <a:cxn ang="0">
-                    <a:pos x="connsiteX6" y="connsiteY6"/>
-                  </a:cxn>
-                  <a:cxn ang="0">
-                    <a:pos x="connsiteX7" y="connsiteY7"/>
-                  </a:cxn>
-                  <a:cxn ang="0">
-                    <a:pos x="connsiteX8" y="connsiteY8"/>
-                  </a:cxn>
-                </a:cxnLst>
-                <a:rect l="l" t="t" r="r" b="b"/>
-                <a:pathLst>
-                  <a:path w="453390" h="263525">
-                    <a:moveTo>
-                      <a:pt x="84890" y="0"/>
-                    </a:moveTo>
-                    <a:lnTo>
-                      <a:pt x="453390" y="0"/>
-                    </a:lnTo>
-                    <a:lnTo>
-                      <a:pt x="453390" y="263525"/>
-                    </a:lnTo>
-                    <a:lnTo>
-                      <a:pt x="84890" y="263525"/>
-                    </a:lnTo>
-                    <a:cubicBezTo>
-                      <a:pt x="68745" y="263525"/>
-                      <a:pt x="59217" y="193028"/>
-                      <a:pt x="59217" y="168771"/>
-                    </a:cubicBezTo>
-                    <a:lnTo>
-                      <a:pt x="4819" y="221542"/>
-                    </a:lnTo>
-                    <a:lnTo>
-                      <a:pt x="0" y="54571"/>
-                    </a:lnTo>
-                    <a:lnTo>
-                      <a:pt x="55658" y="89403"/>
-                    </a:lnTo>
-                    <a:cubicBezTo>
-                      <a:pt x="55658" y="65146"/>
-                      <a:pt x="68745" y="0"/>
-                      <a:pt x="84890" y="0"/>
-                    </a:cubicBezTo>
-                    <a:close/>
-                  </a:path>
-                </a:pathLst>
-              </a:custGeom>
-            </p:spPr>
-            <p:style>
-              <a:lnRef idx="2">
-                <a:schemeClr val="accent5">
-                  <a:shade val="50000"/>
-                </a:schemeClr>
-              </a:lnRef>
-              <a:fillRef idx="1">
-                <a:schemeClr val="accent5"/>
-              </a:fillRef>
-              <a:effectRef idx="0">
-                <a:schemeClr val="accent5"/>
-              </a:effectRef>
-              <a:fontRef idx="minor">
-                <a:schemeClr val="lt1"/>
-              </a:fontRef>
-            </p:style>
-            <p:txBody>
-              <a:bodyPr rot="0" spcFirstLastPara="0" vert="horz" wrap="square" lIns="0" tIns="0" rIns="0" bIns="0" numCol="1" spcCol="0" rtlCol="0" fromWordArt="0" anchor="ctr" anchorCtr="0" forceAA="0" compatLnSpc="1">
-                <a:prstTxWarp prst="textNoShape">
-                  <a:avLst/>
-                </a:prstTxWarp>
-                <a:noAutofit/>
-              </a:bodyPr>
-              <a:lstStyle/>
-              <a:p>
-                <a:pPr indent="73025" algn="ctr">
-                  <a:spcAft>
-                    <a:spcPts val="0"/>
-                  </a:spcAft>
-                </a:pPr>
-                <a:r>
-                  <a:rPr lang="en-US" sz="1200" kern="100" dirty="0">
-                    <a:solidFill>
-                      <a:srgbClr val="FFFFFF"/>
-                    </a:solidFill>
-                    <a:effectLst/>
-                    <a:ea typeface="新細明體" panose="02020500000000000000" pitchFamily="18" charset="-120"/>
-                    <a:cs typeface="Times New Roman" panose="02020603050405020304" pitchFamily="18" charset="0"/>
-                  </a:rPr>
-                  <a:t>1</a:t>
-                </a:r>
-                <a:endParaRPr lang="zh-TW" sz="1200" kern="100" dirty="0">
-                  <a:effectLst/>
-                  <a:ea typeface="新細明體" panose="02020500000000000000" pitchFamily="18" charset="-120"/>
-                  <a:cs typeface="Times New Roman" panose="02020603050405020304" pitchFamily="18" charset="0"/>
-                </a:endParaRPr>
-              </a:p>
-            </p:txBody>
-          </p:sp>
-          <p:sp>
-            <p:nvSpPr>
-              <p:cNvPr id="73" name="手繪多邊形: 圖案 10">
-                <a:extLst>
-                  <a:ext uri="{FF2B5EF4-FFF2-40B4-BE49-F238E27FC236}">
-                    <a16:creationId xmlns:a16="http://schemas.microsoft.com/office/drawing/2014/main" id="{FB5B7E53-40D1-4385-B45F-5DA60EF3CDE8}"/>
-                  </a:ext>
-                </a:extLst>
-              </p:cNvPr>
-              <p:cNvSpPr/>
-              <p:nvPr/>
-            </p:nvSpPr>
-            <p:spPr>
-              <a:xfrm>
-                <a:off x="2633667" y="2736215"/>
-                <a:ext cx="219078" cy="175260"/>
-              </a:xfrm>
-              <a:custGeom>
-                <a:avLst/>
-                <a:gdLst>
-                  <a:gd name="connsiteX0" fmla="*/ 84890 w 453390"/>
-                  <a:gd name="connsiteY0" fmla="*/ 0 h 263525"/>
-                  <a:gd name="connsiteX1" fmla="*/ 453390 w 453390"/>
-                  <a:gd name="connsiteY1" fmla="*/ 0 h 263525"/>
-                  <a:gd name="connsiteX2" fmla="*/ 453390 w 453390"/>
-                  <a:gd name="connsiteY2" fmla="*/ 263525 h 263525"/>
-                  <a:gd name="connsiteX3" fmla="*/ 84890 w 453390"/>
-                  <a:gd name="connsiteY3" fmla="*/ 263525 h 263525"/>
-                  <a:gd name="connsiteX4" fmla="*/ 59217 w 453390"/>
-                  <a:gd name="connsiteY4" fmla="*/ 168771 h 263525"/>
-                  <a:gd name="connsiteX5" fmla="*/ 4819 w 453390"/>
-                  <a:gd name="connsiteY5" fmla="*/ 221542 h 263525"/>
-                  <a:gd name="connsiteX6" fmla="*/ 0 w 453390"/>
-                  <a:gd name="connsiteY6" fmla="*/ 54571 h 263525"/>
-                  <a:gd name="connsiteX7" fmla="*/ 55658 w 453390"/>
-                  <a:gd name="connsiteY7" fmla="*/ 89403 h 263525"/>
-                  <a:gd name="connsiteX8" fmla="*/ 84890 w 453390"/>
-                  <a:gd name="connsiteY8" fmla="*/ 0 h 263525"/>
-                </a:gdLst>
-                <a:ahLst/>
-                <a:cxnLst>
-                  <a:cxn ang="0">
-                    <a:pos x="connsiteX0" y="connsiteY0"/>
-                  </a:cxn>
-                  <a:cxn ang="0">
-                    <a:pos x="connsiteX1" y="connsiteY1"/>
-                  </a:cxn>
-                  <a:cxn ang="0">
-                    <a:pos x="connsiteX2" y="connsiteY2"/>
-                  </a:cxn>
-                  <a:cxn ang="0">
-                    <a:pos x="connsiteX3" y="connsiteY3"/>
-                  </a:cxn>
-                  <a:cxn ang="0">
-                    <a:pos x="connsiteX4" y="connsiteY4"/>
-                  </a:cxn>
-                  <a:cxn ang="0">
-                    <a:pos x="connsiteX5" y="connsiteY5"/>
-                  </a:cxn>
-                  <a:cxn ang="0">
-                    <a:pos x="connsiteX6" y="connsiteY6"/>
-                  </a:cxn>
-                  <a:cxn ang="0">
-                    <a:pos x="connsiteX7" y="connsiteY7"/>
-                  </a:cxn>
-                  <a:cxn ang="0">
-                    <a:pos x="connsiteX8" y="connsiteY8"/>
-                  </a:cxn>
-                </a:cxnLst>
-                <a:rect l="l" t="t" r="r" b="b"/>
-                <a:pathLst>
-                  <a:path w="453390" h="263525">
-                    <a:moveTo>
-                      <a:pt x="84890" y="0"/>
-                    </a:moveTo>
-                    <a:lnTo>
-                      <a:pt x="453390" y="0"/>
-                    </a:lnTo>
-                    <a:lnTo>
-                      <a:pt x="453390" y="263525"/>
-                    </a:lnTo>
-                    <a:lnTo>
-                      <a:pt x="84890" y="263525"/>
-                    </a:lnTo>
-                    <a:cubicBezTo>
-                      <a:pt x="68745" y="263525"/>
-                      <a:pt x="59217" y="193028"/>
-                      <a:pt x="59217" y="168771"/>
-                    </a:cubicBezTo>
-                    <a:lnTo>
-                      <a:pt x="4819" y="221542"/>
-                    </a:lnTo>
-                    <a:lnTo>
-                      <a:pt x="0" y="54571"/>
-                    </a:lnTo>
-                    <a:lnTo>
-                      <a:pt x="55658" y="89403"/>
-                    </a:lnTo>
-                    <a:cubicBezTo>
-                      <a:pt x="55658" y="65146"/>
-                      <a:pt x="68745" y="0"/>
-                      <a:pt x="84890" y="0"/>
-                    </a:cubicBezTo>
-                    <a:close/>
-                  </a:path>
-                </a:pathLst>
-              </a:custGeom>
-            </p:spPr>
-            <p:style>
-              <a:lnRef idx="2">
-                <a:schemeClr val="accent5">
-                  <a:shade val="50000"/>
-                </a:schemeClr>
-              </a:lnRef>
-              <a:fillRef idx="1">
-                <a:schemeClr val="accent5"/>
-              </a:fillRef>
-              <a:effectRef idx="0">
-                <a:schemeClr val="accent5"/>
-              </a:effectRef>
-              <a:fontRef idx="minor">
-                <a:schemeClr val="lt1"/>
-              </a:fontRef>
-            </p:style>
-            <p:txBody>
-              <a:bodyPr rot="0" spcFirstLastPara="0" vert="horz" wrap="square" lIns="0" tIns="0" rIns="0" bIns="0" numCol="1" spcCol="0" rtlCol="0" fromWordArt="0" anchor="ctr" anchorCtr="0" forceAA="0" compatLnSpc="1">
-                <a:prstTxWarp prst="textNoShape">
-                  <a:avLst/>
-                </a:prstTxWarp>
-                <a:noAutofit/>
-              </a:bodyPr>
-              <a:lstStyle/>
-              <a:p>
-                <a:pPr indent="73025" algn="ctr">
-                  <a:spcAft>
-                    <a:spcPts val="0"/>
-                  </a:spcAft>
-                </a:pPr>
-                <a:r>
-                  <a:rPr lang="en-US" sz="1200" kern="100" dirty="0">
-                    <a:solidFill>
-                      <a:srgbClr val="FFFFFF"/>
-                    </a:solidFill>
-                    <a:effectLst/>
-                    <a:ea typeface="新細明體" panose="02020500000000000000" pitchFamily="18" charset="-120"/>
-                    <a:cs typeface="Times New Roman" panose="02020603050405020304" pitchFamily="18" charset="0"/>
-                  </a:rPr>
-                  <a:t>1</a:t>
-                </a:r>
-                <a:endParaRPr lang="zh-TW" sz="1200" kern="100" dirty="0">
-                  <a:effectLst/>
-                  <a:ea typeface="新細明體" panose="02020500000000000000" pitchFamily="18" charset="-120"/>
-                  <a:cs typeface="Times New Roman" panose="02020603050405020304" pitchFamily="18" charset="0"/>
-                </a:endParaRPr>
-              </a:p>
-            </p:txBody>
-          </p:sp>
-          <p:sp>
-            <p:nvSpPr>
-              <p:cNvPr id="74" name="手繪多邊形: 圖案 10">
-                <a:extLst>
-                  <a:ext uri="{FF2B5EF4-FFF2-40B4-BE49-F238E27FC236}">
-                    <a16:creationId xmlns:a16="http://schemas.microsoft.com/office/drawing/2014/main" id="{07F9982E-E889-44E5-ACF9-ED931F71E801}"/>
-                  </a:ext>
-                </a:extLst>
-              </p:cNvPr>
-              <p:cNvSpPr/>
-              <p:nvPr/>
-            </p:nvSpPr>
-            <p:spPr>
-              <a:xfrm>
-                <a:off x="2914653" y="2736215"/>
-                <a:ext cx="219078" cy="175260"/>
-              </a:xfrm>
-              <a:custGeom>
-                <a:avLst/>
-                <a:gdLst>
-                  <a:gd name="connsiteX0" fmla="*/ 84890 w 453390"/>
-                  <a:gd name="connsiteY0" fmla="*/ 0 h 263525"/>
-                  <a:gd name="connsiteX1" fmla="*/ 453390 w 453390"/>
-                  <a:gd name="connsiteY1" fmla="*/ 0 h 263525"/>
-                  <a:gd name="connsiteX2" fmla="*/ 453390 w 453390"/>
-                  <a:gd name="connsiteY2" fmla="*/ 263525 h 263525"/>
-                  <a:gd name="connsiteX3" fmla="*/ 84890 w 453390"/>
-                  <a:gd name="connsiteY3" fmla="*/ 263525 h 263525"/>
-                  <a:gd name="connsiteX4" fmla="*/ 59217 w 453390"/>
-                  <a:gd name="connsiteY4" fmla="*/ 168771 h 263525"/>
-                  <a:gd name="connsiteX5" fmla="*/ 4819 w 453390"/>
-                  <a:gd name="connsiteY5" fmla="*/ 221542 h 263525"/>
-                  <a:gd name="connsiteX6" fmla="*/ 0 w 453390"/>
-                  <a:gd name="connsiteY6" fmla="*/ 54571 h 263525"/>
-                  <a:gd name="connsiteX7" fmla="*/ 55658 w 453390"/>
-                  <a:gd name="connsiteY7" fmla="*/ 89403 h 263525"/>
-                  <a:gd name="connsiteX8" fmla="*/ 84890 w 453390"/>
-                  <a:gd name="connsiteY8" fmla="*/ 0 h 263525"/>
-                </a:gdLst>
-                <a:ahLst/>
-                <a:cxnLst>
-                  <a:cxn ang="0">
-                    <a:pos x="connsiteX0" y="connsiteY0"/>
-                  </a:cxn>
-                  <a:cxn ang="0">
-                    <a:pos x="connsiteX1" y="connsiteY1"/>
-                  </a:cxn>
-                  <a:cxn ang="0">
-                    <a:pos x="connsiteX2" y="connsiteY2"/>
-                  </a:cxn>
-                  <a:cxn ang="0">
-                    <a:pos x="connsiteX3" y="connsiteY3"/>
-                  </a:cxn>
-                  <a:cxn ang="0">
-                    <a:pos x="connsiteX4" y="connsiteY4"/>
-                  </a:cxn>
-                  <a:cxn ang="0">
-                    <a:pos x="connsiteX5" y="connsiteY5"/>
-                  </a:cxn>
-                  <a:cxn ang="0">
-                    <a:pos x="connsiteX6" y="connsiteY6"/>
-                  </a:cxn>
-                  <a:cxn ang="0">
-                    <a:pos x="connsiteX7" y="connsiteY7"/>
-                  </a:cxn>
-                  <a:cxn ang="0">
-                    <a:pos x="connsiteX8" y="connsiteY8"/>
-                  </a:cxn>
-                </a:cxnLst>
-                <a:rect l="l" t="t" r="r" b="b"/>
-                <a:pathLst>
-                  <a:path w="453390" h="263525">
-                    <a:moveTo>
-                      <a:pt x="84890" y="0"/>
-                    </a:moveTo>
-                    <a:lnTo>
-                      <a:pt x="453390" y="0"/>
-                    </a:lnTo>
-                    <a:lnTo>
-                      <a:pt x="453390" y="263525"/>
-                    </a:lnTo>
-                    <a:lnTo>
-                      <a:pt x="84890" y="263525"/>
-                    </a:lnTo>
-                    <a:cubicBezTo>
-                      <a:pt x="68745" y="263525"/>
-                      <a:pt x="59217" y="193028"/>
-                      <a:pt x="59217" y="168771"/>
-                    </a:cubicBezTo>
-                    <a:lnTo>
-                      <a:pt x="4819" y="221542"/>
-                    </a:lnTo>
-                    <a:lnTo>
-                      <a:pt x="0" y="54571"/>
-                    </a:lnTo>
-                    <a:lnTo>
-                      <a:pt x="55658" y="89403"/>
-                    </a:lnTo>
-                    <a:cubicBezTo>
-                      <a:pt x="55658" y="65146"/>
-                      <a:pt x="68745" y="0"/>
-                      <a:pt x="84890" y="0"/>
-                    </a:cubicBezTo>
-                    <a:close/>
-                  </a:path>
-                </a:pathLst>
-              </a:custGeom>
-            </p:spPr>
-            <p:style>
-              <a:lnRef idx="2">
-                <a:schemeClr val="accent5">
-                  <a:shade val="50000"/>
-                </a:schemeClr>
-              </a:lnRef>
-              <a:fillRef idx="1">
-                <a:schemeClr val="accent5"/>
-              </a:fillRef>
-              <a:effectRef idx="0">
-                <a:schemeClr val="accent5"/>
-              </a:effectRef>
-              <a:fontRef idx="minor">
-                <a:schemeClr val="lt1"/>
-              </a:fontRef>
-            </p:style>
-            <p:txBody>
-              <a:bodyPr rot="0" spcFirstLastPara="0" vert="horz" wrap="square" lIns="0" tIns="0" rIns="0" bIns="0" numCol="1" spcCol="0" rtlCol="0" fromWordArt="0" anchor="ctr" anchorCtr="0" forceAA="0" compatLnSpc="1">
-                <a:prstTxWarp prst="textNoShape">
-                  <a:avLst/>
-                </a:prstTxWarp>
-                <a:noAutofit/>
-              </a:bodyPr>
-              <a:lstStyle/>
-              <a:p>
-                <a:pPr indent="73025" algn="ctr">
-                  <a:spcAft>
-                    <a:spcPts val="0"/>
-                  </a:spcAft>
-                </a:pPr>
-                <a:r>
-                  <a:rPr lang="en-US" sz="1200" kern="100" dirty="0">
-                    <a:solidFill>
-                      <a:srgbClr val="FFFFFF"/>
-                    </a:solidFill>
-                    <a:effectLst/>
-                    <a:ea typeface="新細明體" panose="02020500000000000000" pitchFamily="18" charset="-120"/>
-                    <a:cs typeface="Times New Roman" panose="02020603050405020304" pitchFamily="18" charset="0"/>
-                  </a:rPr>
-                  <a:t>1</a:t>
-                </a:r>
-                <a:endParaRPr lang="zh-TW" sz="1200" kern="100" dirty="0">
-                  <a:effectLst/>
-                  <a:ea typeface="新細明體" panose="02020500000000000000" pitchFamily="18" charset="-120"/>
-                  <a:cs typeface="Times New Roman" panose="02020603050405020304" pitchFamily="18" charset="0"/>
-                </a:endParaRPr>
-              </a:p>
-            </p:txBody>
-          </p:sp>
-        </p:grpSp>
-      </p:grpSp>
+              </a:rPr>
+              <a:t>雲端平台</a:t>
+            </a:r>
+            <a:r>
+              <a:rPr lang="en-US" altLang="zh-TW" sz="1200" kern="100" dirty="0" err="1">
+                <a:ea typeface="新細明體" panose="02020500000000000000" pitchFamily="18" charset="-120"/>
+                <a:cs typeface="Times New Roman" panose="02020603050405020304" pitchFamily="18" charset="0"/>
+              </a:rPr>
+              <a:t>ESP32</a:t>
+            </a:r>
+            <a:r>
+              <a:rPr lang="en-US" altLang="zh-TW" sz="1200" kern="100" dirty="0">
+                <a:ea typeface="新細明體" panose="02020500000000000000" pitchFamily="18" charset="-120"/>
+                <a:cs typeface="Times New Roman" panose="02020603050405020304" pitchFamily="18" charset="0"/>
+              </a:rPr>
+              <a:t> </a:t>
+            </a:r>
+            <a:r>
+              <a:rPr lang="en-US" altLang="zh-TW" sz="1200" kern="100" dirty="0" err="1">
+                <a:ea typeface="新細明體" panose="02020500000000000000" pitchFamily="18" charset="-120"/>
+                <a:cs typeface="Times New Roman" panose="02020603050405020304" pitchFamily="18" charset="0"/>
+              </a:rPr>
+              <a:t>MQTT</a:t>
+            </a:r>
+            <a:r>
+              <a:rPr lang="zh-TW" altLang="en-US" sz="1200" kern="100" dirty="0">
+                <a:ea typeface="新細明體" panose="02020500000000000000" pitchFamily="18" charset="-120"/>
+                <a:cs typeface="Times New Roman" panose="02020603050405020304" pitchFamily="18" charset="0"/>
+              </a:rPr>
+              <a:t>板初始化</a:t>
+            </a:r>
+            <a:endParaRPr lang="en-US" altLang="zh-TW" sz="1200" kern="100" dirty="0">
+              <a:ea typeface="新細明體" panose="02020500000000000000" pitchFamily="18" charset="-120"/>
+              <a:cs typeface="Times New Roman" panose="02020603050405020304" pitchFamily="18" charset="0"/>
+            </a:endParaRPr>
+          </a:p>
+          <a:p>
+            <a:pPr>
+              <a:lnSpc>
+                <a:spcPts val="2400"/>
+              </a:lnSpc>
+              <a:spcAft>
+                <a:spcPts val="0"/>
+              </a:spcAft>
+            </a:pPr>
+            <a:r>
+              <a:rPr lang="en-US" altLang="zh-TW" sz="1100" dirty="0">
+                <a:solidFill>
+                  <a:srgbClr val="FFFFFF"/>
+                </a:solidFill>
+                <a:cs typeface="Times New Roman" panose="02020603050405020304" pitchFamily="18" charset="0"/>
+              </a:rPr>
+              <a:t>UART</a:t>
+            </a:r>
+            <a:r>
+              <a:rPr lang="zh-TW" altLang="en-US" sz="1100" dirty="0">
+                <a:solidFill>
+                  <a:srgbClr val="FFFFFF"/>
+                </a:solidFill>
+                <a:cs typeface="Times New Roman" panose="02020603050405020304" pitchFamily="18" charset="0"/>
+              </a:rPr>
+              <a:t>通訊</a:t>
+            </a:r>
+            <a:endParaRPr lang="zh-TW" altLang="zh-TW" sz="1100" dirty="0">
+              <a:latin typeface="新細明體" panose="02020500000000000000" pitchFamily="18" charset="-120"/>
+              <a:cs typeface="新細明體" panose="02020500000000000000" pitchFamily="18" charset="-120"/>
+            </a:endParaRPr>
+          </a:p>
+          <a:p>
+            <a:pPr>
+              <a:lnSpc>
+                <a:spcPts val="2400"/>
+              </a:lnSpc>
+              <a:spcAft>
+                <a:spcPts val="0"/>
+              </a:spcAft>
+            </a:pPr>
+            <a:r>
+              <a:rPr lang="en-US" altLang="zh-TW" sz="1100" dirty="0" err="1">
+                <a:solidFill>
+                  <a:srgbClr val="FFFFFF"/>
+                </a:solidFill>
+                <a:cs typeface="Times New Roman" panose="02020603050405020304" pitchFamily="18" charset="0"/>
+              </a:rPr>
+              <a:t>WiFi</a:t>
+            </a:r>
+            <a:r>
+              <a:rPr lang="zh-TW" altLang="en-US" sz="1100" dirty="0">
+                <a:solidFill>
+                  <a:srgbClr val="FFFFFF"/>
+                </a:solidFill>
+                <a:cs typeface="Times New Roman" panose="02020603050405020304" pitchFamily="18" charset="0"/>
+              </a:rPr>
+              <a:t>設定</a:t>
+            </a:r>
+            <a:endParaRPr lang="zh-TW" altLang="zh-TW" sz="1100" dirty="0">
+              <a:latin typeface="新細明體" panose="02020500000000000000" pitchFamily="18" charset="-120"/>
+              <a:cs typeface="新細明體" panose="02020500000000000000" pitchFamily="18" charset="-120"/>
+            </a:endParaRPr>
+          </a:p>
+          <a:p>
+            <a:pPr>
+              <a:lnSpc>
+                <a:spcPts val="2400"/>
+              </a:lnSpc>
+              <a:spcAft>
+                <a:spcPts val="0"/>
+              </a:spcAft>
+            </a:pPr>
+            <a:r>
+              <a:rPr lang="en-US" altLang="zh-TW" sz="1100" dirty="0" err="1">
+                <a:solidFill>
+                  <a:srgbClr val="FFFFFF"/>
+                </a:solidFill>
+                <a:cs typeface="Times New Roman" panose="02020603050405020304" pitchFamily="18" charset="0"/>
+              </a:rPr>
+              <a:t>MQTT</a:t>
+            </a:r>
+            <a:r>
+              <a:rPr lang="zh-TW" altLang="en-US" sz="1100" dirty="0">
+                <a:solidFill>
+                  <a:srgbClr val="FFFFFF"/>
+                </a:solidFill>
+                <a:cs typeface="Times New Roman" panose="02020603050405020304" pitchFamily="18" charset="0"/>
+              </a:rPr>
+              <a:t>設定</a:t>
+            </a:r>
+            <a:endParaRPr lang="zh-TW" altLang="zh-TW" sz="1100" dirty="0">
+              <a:latin typeface="新細明體" panose="02020500000000000000" pitchFamily="18" charset="-120"/>
+              <a:cs typeface="新細明體" panose="02020500000000000000" pitchFamily="18" charset="-120"/>
+            </a:endParaRPr>
+          </a:p>
+        </p:txBody>
+      </p:sp>
     </p:spTree>
     <p:extLst>
       <p:ext uri="{BB962C8B-B14F-4D97-AF65-F5344CB8AC3E}">

--- a/tools/myCustomBlockly/iMi/block.pptx
+++ b/tools/myCustomBlockly/iMi/block.pptx
@@ -15860,600 +15860,6 @@
           </a:p>
         </p:txBody>
       </p:sp>
-      <p:sp>
-        <p:nvSpPr>
-          <p:cNvPr id="51" name="手繪多邊形: 圖案 50">
-            <a:extLst>
-              <a:ext uri="{FF2B5EF4-FFF2-40B4-BE49-F238E27FC236}">
-                <a16:creationId xmlns:a16="http://schemas.microsoft.com/office/drawing/2014/main" id="{9531CC4A-15BD-4F34-9B5D-92773EB9975B}"/>
-              </a:ext>
-            </a:extLst>
-          </p:cNvPr>
-          <p:cNvSpPr/>
-          <p:nvPr/>
-        </p:nvSpPr>
-        <p:spPr>
-          <a:xfrm>
-            <a:off x="2633091" y="1950592"/>
-            <a:ext cx="2454312" cy="1326007"/>
-          </a:xfrm>
-          <a:custGeom>
-            <a:avLst/>
-            <a:gdLst>
-              <a:gd name="connsiteX0" fmla="*/ 208364 w 2454312"/>
-              <a:gd name="connsiteY0" fmla="*/ 1321660 h 1326007"/>
-              <a:gd name="connsiteX1" fmla="*/ 211775 w 2454312"/>
-              <a:gd name="connsiteY1" fmla="*/ 1322514 h 1326007"/>
-              <a:gd name="connsiteX2" fmla="*/ 206180 w 2454312"/>
-              <a:gd name="connsiteY2" fmla="*/ 1325972 h 1326007"/>
-              <a:gd name="connsiteX3" fmla="*/ 48232 w 2454312"/>
-              <a:gd name="connsiteY3" fmla="*/ 0 h 1326007"/>
-              <a:gd name="connsiteX4" fmla="*/ 207047 w 2454312"/>
-              <a:gd name="connsiteY4" fmla="*/ 0 h 1326007"/>
-              <a:gd name="connsiteX5" fmla="*/ 2402217 w 2454312"/>
-              <a:gd name="connsiteY5" fmla="*/ 0 h 1326007"/>
-              <a:gd name="connsiteX6" fmla="*/ 2435093 w 2454312"/>
-              <a:gd name="connsiteY6" fmla="*/ 30334 h 1326007"/>
-              <a:gd name="connsiteX7" fmla="*/ 2435093 w 2454312"/>
-              <a:gd name="connsiteY7" fmla="*/ 151664 h 1326007"/>
-              <a:gd name="connsiteX8" fmla="*/ 2437912 w 2454312"/>
-              <a:gd name="connsiteY8" fmla="*/ 264216 h 1326007"/>
-              <a:gd name="connsiteX9" fmla="*/ 2439075 w 2454312"/>
-              <a:gd name="connsiteY9" fmla="*/ 310516 h 1326007"/>
-              <a:gd name="connsiteX10" fmla="*/ 1036745 w 2454312"/>
-              <a:gd name="connsiteY10" fmla="*/ 310516 h 1326007"/>
-              <a:gd name="connsiteX11" fmla="*/ 900345 w 2454312"/>
-              <a:gd name="connsiteY11" fmla="*/ 310516 h 1326007"/>
-              <a:gd name="connsiteX12" fmla="*/ 872109 w 2454312"/>
-              <a:gd name="connsiteY12" fmla="*/ 353176 h 1326007"/>
-              <a:gd name="connsiteX13" fmla="*/ 872109 w 2454312"/>
-              <a:gd name="connsiteY13" fmla="*/ 523809 h 1326007"/>
-              <a:gd name="connsiteX14" fmla="*/ 900345 w 2454312"/>
-              <a:gd name="connsiteY14" fmla="*/ 566469 h 1326007"/>
-              <a:gd name="connsiteX15" fmla="*/ 1027201 w 2454312"/>
-              <a:gd name="connsiteY15" fmla="*/ 566469 h 1326007"/>
-              <a:gd name="connsiteX16" fmla="*/ 2445134 w 2454312"/>
-              <a:gd name="connsiteY16" fmla="*/ 566469 h 1326007"/>
-              <a:gd name="connsiteX17" fmla="*/ 2446187 w 2454312"/>
-              <a:gd name="connsiteY17" fmla="*/ 615316 h 1326007"/>
-              <a:gd name="connsiteX18" fmla="*/ 1036745 w 2454312"/>
-              <a:gd name="connsiteY18" fmla="*/ 615316 h 1326007"/>
-              <a:gd name="connsiteX19" fmla="*/ 900345 w 2454312"/>
-              <a:gd name="connsiteY19" fmla="*/ 615316 h 1326007"/>
-              <a:gd name="connsiteX20" fmla="*/ 872109 w 2454312"/>
-              <a:gd name="connsiteY20" fmla="*/ 657976 h 1326007"/>
-              <a:gd name="connsiteX21" fmla="*/ 872109 w 2454312"/>
-              <a:gd name="connsiteY21" fmla="*/ 828609 h 1326007"/>
-              <a:gd name="connsiteX22" fmla="*/ 900345 w 2454312"/>
-              <a:gd name="connsiteY22" fmla="*/ 871269 h 1326007"/>
-              <a:gd name="connsiteX23" fmla="*/ 1027201 w 2454312"/>
-              <a:gd name="connsiteY23" fmla="*/ 871269 h 1326007"/>
-              <a:gd name="connsiteX24" fmla="*/ 2451155 w 2454312"/>
-              <a:gd name="connsiteY24" fmla="*/ 871269 h 1326007"/>
-              <a:gd name="connsiteX25" fmla="*/ 2451915 w 2454312"/>
-              <a:gd name="connsiteY25" fmla="*/ 914528 h 1326007"/>
-              <a:gd name="connsiteX26" fmla="*/ 1036745 w 2454312"/>
-              <a:gd name="connsiteY26" fmla="*/ 914528 h 1326007"/>
-              <a:gd name="connsiteX27" fmla="*/ 900345 w 2454312"/>
-              <a:gd name="connsiteY27" fmla="*/ 914528 h 1326007"/>
-              <a:gd name="connsiteX28" fmla="*/ 872109 w 2454312"/>
-              <a:gd name="connsiteY28" fmla="*/ 957188 h 1326007"/>
-              <a:gd name="connsiteX29" fmla="*/ 872109 w 2454312"/>
-              <a:gd name="connsiteY29" fmla="*/ 1127821 h 1326007"/>
-              <a:gd name="connsiteX30" fmla="*/ 900345 w 2454312"/>
-              <a:gd name="connsiteY30" fmla="*/ 1170481 h 1326007"/>
-              <a:gd name="connsiteX31" fmla="*/ 1027201 w 2454312"/>
-              <a:gd name="connsiteY31" fmla="*/ 1170481 h 1326007"/>
-              <a:gd name="connsiteX32" fmla="*/ 2454312 w 2454312"/>
-              <a:gd name="connsiteY32" fmla="*/ 1170481 h 1326007"/>
-              <a:gd name="connsiteX33" fmla="*/ 2454258 w 2454312"/>
-              <a:gd name="connsiteY33" fmla="*/ 1198971 h 1326007"/>
-              <a:gd name="connsiteX34" fmla="*/ 2448778 w 2454312"/>
-              <a:gd name="connsiteY34" fmla="*/ 1303867 h 1326007"/>
-              <a:gd name="connsiteX35" fmla="*/ 257960 w 2454312"/>
-              <a:gd name="connsiteY35" fmla="*/ 1281453 h 1326007"/>
-              <a:gd name="connsiteX36" fmla="*/ 211003 w 2454312"/>
-              <a:gd name="connsiteY36" fmla="*/ 1316453 h 1326007"/>
-              <a:gd name="connsiteX37" fmla="*/ 208364 w 2454312"/>
-              <a:gd name="connsiteY37" fmla="*/ 1321660 h 1326007"/>
-              <a:gd name="connsiteX38" fmla="*/ 196071 w 2454312"/>
-              <a:gd name="connsiteY38" fmla="*/ 1318583 h 1326007"/>
-              <a:gd name="connsiteX39" fmla="*/ 157111 w 2454312"/>
-              <a:gd name="connsiteY39" fmla="*/ 1256881 h 1326007"/>
-              <a:gd name="connsiteX40" fmla="*/ 0 w 2454312"/>
-              <a:gd name="connsiteY40" fmla="*/ 1284415 h 1326007"/>
-              <a:gd name="connsiteX41" fmla="*/ 15357 w 2454312"/>
-              <a:gd name="connsiteY41" fmla="*/ 30334 h 1326007"/>
-              <a:gd name="connsiteX42" fmla="*/ 48232 w 2454312"/>
-              <a:gd name="connsiteY42" fmla="*/ 0 h 1326007"/>
-            </a:gdLst>
-            <a:ahLst/>
-            <a:cxnLst>
-              <a:cxn ang="0">
-                <a:pos x="connsiteX0" y="connsiteY0"/>
-              </a:cxn>
-              <a:cxn ang="0">
-                <a:pos x="connsiteX1" y="connsiteY1"/>
-              </a:cxn>
-              <a:cxn ang="0">
-                <a:pos x="connsiteX2" y="connsiteY2"/>
-              </a:cxn>
-              <a:cxn ang="0">
-                <a:pos x="connsiteX3" y="connsiteY3"/>
-              </a:cxn>
-              <a:cxn ang="0">
-                <a:pos x="connsiteX4" y="connsiteY4"/>
-              </a:cxn>
-              <a:cxn ang="0">
-                <a:pos x="connsiteX5" y="connsiteY5"/>
-              </a:cxn>
-              <a:cxn ang="0">
-                <a:pos x="connsiteX6" y="connsiteY6"/>
-              </a:cxn>
-              <a:cxn ang="0">
-                <a:pos x="connsiteX7" y="connsiteY7"/>
-              </a:cxn>
-              <a:cxn ang="0">
-                <a:pos x="connsiteX8" y="connsiteY8"/>
-              </a:cxn>
-              <a:cxn ang="0">
-                <a:pos x="connsiteX9" y="connsiteY9"/>
-              </a:cxn>
-              <a:cxn ang="0">
-                <a:pos x="connsiteX10" y="connsiteY10"/>
-              </a:cxn>
-              <a:cxn ang="0">
-                <a:pos x="connsiteX11" y="connsiteY11"/>
-              </a:cxn>
-              <a:cxn ang="0">
-                <a:pos x="connsiteX12" y="connsiteY12"/>
-              </a:cxn>
-              <a:cxn ang="0">
-                <a:pos x="connsiteX13" y="connsiteY13"/>
-              </a:cxn>
-              <a:cxn ang="0">
-                <a:pos x="connsiteX14" y="connsiteY14"/>
-              </a:cxn>
-              <a:cxn ang="0">
-                <a:pos x="connsiteX15" y="connsiteY15"/>
-              </a:cxn>
-              <a:cxn ang="0">
-                <a:pos x="connsiteX16" y="connsiteY16"/>
-              </a:cxn>
-              <a:cxn ang="0">
-                <a:pos x="connsiteX17" y="connsiteY17"/>
-              </a:cxn>
-              <a:cxn ang="0">
-                <a:pos x="connsiteX18" y="connsiteY18"/>
-              </a:cxn>
-              <a:cxn ang="0">
-                <a:pos x="connsiteX19" y="connsiteY19"/>
-              </a:cxn>
-              <a:cxn ang="0">
-                <a:pos x="connsiteX20" y="connsiteY20"/>
-              </a:cxn>
-              <a:cxn ang="0">
-                <a:pos x="connsiteX21" y="connsiteY21"/>
-              </a:cxn>
-              <a:cxn ang="0">
-                <a:pos x="connsiteX22" y="connsiteY22"/>
-              </a:cxn>
-              <a:cxn ang="0">
-                <a:pos x="connsiteX23" y="connsiteY23"/>
-              </a:cxn>
-              <a:cxn ang="0">
-                <a:pos x="connsiteX24" y="connsiteY24"/>
-              </a:cxn>
-              <a:cxn ang="0">
-                <a:pos x="connsiteX25" y="connsiteY25"/>
-              </a:cxn>
-              <a:cxn ang="0">
-                <a:pos x="connsiteX26" y="connsiteY26"/>
-              </a:cxn>
-              <a:cxn ang="0">
-                <a:pos x="connsiteX27" y="connsiteY27"/>
-              </a:cxn>
-              <a:cxn ang="0">
-                <a:pos x="connsiteX28" y="connsiteY28"/>
-              </a:cxn>
-              <a:cxn ang="0">
-                <a:pos x="connsiteX29" y="connsiteY29"/>
-              </a:cxn>
-              <a:cxn ang="0">
-                <a:pos x="connsiteX30" y="connsiteY30"/>
-              </a:cxn>
-              <a:cxn ang="0">
-                <a:pos x="connsiteX31" y="connsiteY31"/>
-              </a:cxn>
-              <a:cxn ang="0">
-                <a:pos x="connsiteX32" y="connsiteY32"/>
-              </a:cxn>
-              <a:cxn ang="0">
-                <a:pos x="connsiteX33" y="connsiteY33"/>
-              </a:cxn>
-              <a:cxn ang="0">
-                <a:pos x="connsiteX34" y="connsiteY34"/>
-              </a:cxn>
-              <a:cxn ang="0">
-                <a:pos x="connsiteX35" y="connsiteY35"/>
-              </a:cxn>
-              <a:cxn ang="0">
-                <a:pos x="connsiteX36" y="connsiteY36"/>
-              </a:cxn>
-              <a:cxn ang="0">
-                <a:pos x="connsiteX37" y="connsiteY37"/>
-              </a:cxn>
-              <a:cxn ang="0">
-                <a:pos x="connsiteX38" y="connsiteY38"/>
-              </a:cxn>
-              <a:cxn ang="0">
-                <a:pos x="connsiteX39" y="connsiteY39"/>
-              </a:cxn>
-              <a:cxn ang="0">
-                <a:pos x="connsiteX40" y="connsiteY40"/>
-              </a:cxn>
-              <a:cxn ang="0">
-                <a:pos x="connsiteX41" y="connsiteY41"/>
-              </a:cxn>
-              <a:cxn ang="0">
-                <a:pos x="connsiteX42" y="connsiteY42"/>
-              </a:cxn>
-            </a:cxnLst>
-            <a:rect l="l" t="t" r="r" b="b"/>
-            <a:pathLst>
-              <a:path w="2454312" h="1326007">
-                <a:moveTo>
-                  <a:pt x="208364" y="1321660"/>
-                </a:moveTo>
-                <a:lnTo>
-                  <a:pt x="211775" y="1322514"/>
-                </a:lnTo>
-                <a:cubicBezTo>
-                  <a:pt x="211697" y="1324440"/>
-                  <a:pt x="208070" y="1326287"/>
-                  <a:pt x="206180" y="1325972"/>
-                </a:cubicBezTo>
-                <a:close/>
-                <a:moveTo>
-                  <a:pt x="48232" y="0"/>
-                </a:moveTo>
-                <a:cubicBezTo>
-                  <a:pt x="101170" y="0"/>
-                  <a:pt x="129105" y="61520"/>
-                  <a:pt x="207047" y="0"/>
-                </a:cubicBezTo>
-                <a:lnTo>
-                  <a:pt x="2402217" y="0"/>
-                </a:lnTo>
-                <a:cubicBezTo>
-                  <a:pt x="2420374" y="0"/>
-                  <a:pt x="2435093" y="13581"/>
-                  <a:pt x="2435093" y="30334"/>
-                </a:cubicBezTo>
-                <a:lnTo>
-                  <a:pt x="2435093" y="151664"/>
-                </a:lnTo>
-                <a:cubicBezTo>
-                  <a:pt x="2435093" y="154805"/>
-                  <a:pt x="2436212" y="197275"/>
-                  <a:pt x="2437912" y="264216"/>
-                </a:cubicBezTo>
-                <a:lnTo>
-                  <a:pt x="2439075" y="310516"/>
-                </a:lnTo>
-                <a:lnTo>
-                  <a:pt x="1036745" y="310516"/>
-                </a:lnTo>
-                <a:cubicBezTo>
-                  <a:pt x="969804" y="397035"/>
-                  <a:pt x="945811" y="310516"/>
-                  <a:pt x="900345" y="310516"/>
-                </a:cubicBezTo>
-                <a:cubicBezTo>
-                  <a:pt x="884750" y="310516"/>
-                  <a:pt x="872109" y="329615"/>
-                  <a:pt x="872109" y="353176"/>
-                </a:cubicBezTo>
-                <a:lnTo>
-                  <a:pt x="872109" y="523809"/>
-                </a:lnTo>
-                <a:cubicBezTo>
-                  <a:pt x="872109" y="547369"/>
-                  <a:pt x="884750" y="566469"/>
-                  <a:pt x="900345" y="566469"/>
-                </a:cubicBezTo>
-                <a:cubicBezTo>
-                  <a:pt x="942630" y="566469"/>
-                  <a:pt x="937195" y="663803"/>
-                  <a:pt x="1027201" y="566469"/>
-                </a:cubicBezTo>
-                <a:lnTo>
-                  <a:pt x="2445134" y="566469"/>
-                </a:lnTo>
-                <a:lnTo>
-                  <a:pt x="2446187" y="615316"/>
-                </a:lnTo>
-                <a:lnTo>
-                  <a:pt x="1036745" y="615316"/>
-                </a:lnTo>
-                <a:cubicBezTo>
-                  <a:pt x="969804" y="701835"/>
-                  <a:pt x="945811" y="615316"/>
-                  <a:pt x="900345" y="615316"/>
-                </a:cubicBezTo>
-                <a:cubicBezTo>
-                  <a:pt x="884750" y="615316"/>
-                  <a:pt x="872109" y="634415"/>
-                  <a:pt x="872109" y="657976"/>
-                </a:cubicBezTo>
-                <a:lnTo>
-                  <a:pt x="872109" y="828609"/>
-                </a:lnTo>
-                <a:cubicBezTo>
-                  <a:pt x="872109" y="852169"/>
-                  <a:pt x="884750" y="871269"/>
-                  <a:pt x="900345" y="871269"/>
-                </a:cubicBezTo>
-                <a:cubicBezTo>
-                  <a:pt x="942630" y="871269"/>
-                  <a:pt x="937195" y="968603"/>
-                  <a:pt x="1027201" y="871269"/>
-                </a:cubicBezTo>
-                <a:lnTo>
-                  <a:pt x="2451155" y="871269"/>
-                </a:lnTo>
-                <a:lnTo>
-                  <a:pt x="2451915" y="914528"/>
-                </a:lnTo>
-                <a:lnTo>
-                  <a:pt x="1036745" y="914528"/>
-                </a:lnTo>
-                <a:cubicBezTo>
-                  <a:pt x="969804" y="1001047"/>
-                  <a:pt x="945811" y="914528"/>
-                  <a:pt x="900345" y="914528"/>
-                </a:cubicBezTo>
-                <a:cubicBezTo>
-                  <a:pt x="884750" y="914528"/>
-                  <a:pt x="872109" y="933627"/>
-                  <a:pt x="872109" y="957188"/>
-                </a:cubicBezTo>
-                <a:lnTo>
-                  <a:pt x="872109" y="1127821"/>
-                </a:lnTo>
-                <a:cubicBezTo>
-                  <a:pt x="872109" y="1151381"/>
-                  <a:pt x="884750" y="1170481"/>
-                  <a:pt x="900345" y="1170481"/>
-                </a:cubicBezTo>
-                <a:cubicBezTo>
-                  <a:pt x="942630" y="1170481"/>
-                  <a:pt x="937195" y="1267815"/>
-                  <a:pt x="1027201" y="1170481"/>
-                </a:cubicBezTo>
-                <a:lnTo>
-                  <a:pt x="2454312" y="1170481"/>
-                </a:lnTo>
-                <a:lnTo>
-                  <a:pt x="2454258" y="1198971"/>
-                </a:lnTo>
-                <a:cubicBezTo>
-                  <a:pt x="2453829" y="1263949"/>
-                  <a:pt x="2452183" y="1303867"/>
-                  <a:pt x="2448778" y="1303867"/>
-                </a:cubicBezTo>
-                <a:lnTo>
-                  <a:pt x="257960" y="1281453"/>
-                </a:lnTo>
-                <a:cubicBezTo>
-                  <a:pt x="231761" y="1298755"/>
-                  <a:pt x="217871" y="1309727"/>
-                  <a:pt x="211003" y="1316453"/>
-                </a:cubicBezTo>
-                <a:lnTo>
-                  <a:pt x="208364" y="1321660"/>
-                </a:lnTo>
-                <a:lnTo>
-                  <a:pt x="196071" y="1318583"/>
-                </a:lnTo>
-                <a:cubicBezTo>
-                  <a:pt x="160418" y="1334534"/>
-                  <a:pt x="180367" y="1260907"/>
-                  <a:pt x="157111" y="1256881"/>
-                </a:cubicBezTo>
-                <a:cubicBezTo>
-                  <a:pt x="133855" y="1252856"/>
-                  <a:pt x="181919" y="1277468"/>
-                  <a:pt x="0" y="1284415"/>
-                </a:cubicBezTo>
-                <a:lnTo>
-                  <a:pt x="15357" y="30334"/>
-                </a:lnTo>
-                <a:cubicBezTo>
-                  <a:pt x="15357" y="13581"/>
-                  <a:pt x="30075" y="0"/>
-                  <a:pt x="48232" y="0"/>
-                </a:cubicBezTo>
-                <a:close/>
-              </a:path>
-            </a:pathLst>
-          </a:custGeom>
-        </p:spPr>
-        <p:style>
-          <a:lnRef idx="2">
-            <a:schemeClr val="accent1">
-              <a:shade val="50000"/>
-            </a:schemeClr>
-          </a:lnRef>
-          <a:fillRef idx="1">
-            <a:schemeClr val="accent1"/>
-          </a:fillRef>
-          <a:effectRef idx="0">
-            <a:schemeClr val="accent1"/>
-          </a:effectRef>
-          <a:fontRef idx="minor">
-            <a:schemeClr val="lt1"/>
-          </a:fontRef>
-        </p:style>
-        <p:txBody>
-          <a:bodyPr rot="0" spcFirstLastPara="0" vert="horz" wrap="square" lIns="91440" tIns="45720" rIns="91440" bIns="45720" numCol="1" spcCol="0" rtlCol="0" fromWordArt="0" anchor="t" anchorCtr="0" forceAA="0" compatLnSpc="1">
-            <a:prstTxWarp prst="textNoShape">
-              <a:avLst/>
-            </a:prstTxWarp>
-            <a:noAutofit/>
-          </a:bodyPr>
-          <a:lstStyle/>
-          <a:p>
-            <a:pPr>
-              <a:spcAft>
-                <a:spcPts val="0"/>
-              </a:spcAft>
-            </a:pPr>
-            <a:r>
-              <a:rPr lang="en-US" altLang="zh-TW" sz="1200" kern="100" dirty="0" err="1">
-                <a:ea typeface="新細明體" panose="02020500000000000000" pitchFamily="18" charset="-120"/>
-                <a:cs typeface="Times New Roman" panose="02020603050405020304" pitchFamily="18" charset="0"/>
-              </a:rPr>
-              <a:t>iMi</a:t>
-            </a:r>
-            <a:r>
-              <a:rPr lang="zh-TW" altLang="en-US" sz="1200" kern="100" dirty="0">
-                <a:ea typeface="新細明體" panose="02020500000000000000" pitchFamily="18" charset="-120"/>
-                <a:cs typeface="Times New Roman" panose="02020603050405020304" pitchFamily="18" charset="0"/>
-              </a:rPr>
-              <a:t>雲端平台</a:t>
-            </a:r>
-            <a:r>
-              <a:rPr lang="en-US" altLang="zh-TW" sz="1200" kern="100" dirty="0" err="1">
-                <a:ea typeface="新細明體" panose="02020500000000000000" pitchFamily="18" charset="-120"/>
-                <a:cs typeface="Times New Roman" panose="02020603050405020304" pitchFamily="18" charset="0"/>
-              </a:rPr>
-              <a:t>ESP32</a:t>
-            </a:r>
-            <a:r>
-              <a:rPr lang="en-US" altLang="zh-TW" sz="1200" kern="100" dirty="0">
-                <a:ea typeface="新細明體" panose="02020500000000000000" pitchFamily="18" charset="-120"/>
-                <a:cs typeface="Times New Roman" panose="02020603050405020304" pitchFamily="18" charset="0"/>
-              </a:rPr>
-              <a:t> </a:t>
-            </a:r>
-            <a:r>
-              <a:rPr lang="en-US" altLang="zh-TW" sz="1200" kern="100" dirty="0" err="1">
-                <a:ea typeface="新細明體" panose="02020500000000000000" pitchFamily="18" charset="-120"/>
-                <a:cs typeface="Times New Roman" panose="02020603050405020304" pitchFamily="18" charset="0"/>
-              </a:rPr>
-              <a:t>MQTT</a:t>
-            </a:r>
-            <a:r>
-              <a:rPr lang="zh-TW" altLang="en-US" sz="1200" kern="100" dirty="0">
-                <a:ea typeface="新細明體" panose="02020500000000000000" pitchFamily="18" charset="-120"/>
-                <a:cs typeface="Times New Roman" panose="02020603050405020304" pitchFamily="18" charset="0"/>
-              </a:rPr>
-              <a:t>板初始化</a:t>
-            </a:r>
-            <a:endParaRPr lang="en-US" altLang="zh-TW" sz="1200" kern="100" dirty="0">
-              <a:ea typeface="新細明體" panose="02020500000000000000" pitchFamily="18" charset="-120"/>
-              <a:cs typeface="Times New Roman" panose="02020603050405020304" pitchFamily="18" charset="0"/>
-            </a:endParaRPr>
-          </a:p>
-          <a:p>
-            <a:pPr>
-              <a:lnSpc>
-                <a:spcPts val="2400"/>
-              </a:lnSpc>
-              <a:spcAft>
-                <a:spcPts val="0"/>
-              </a:spcAft>
-            </a:pPr>
-            <a:r>
-              <a:rPr lang="en-US" altLang="zh-TW" sz="1100" dirty="0">
-                <a:solidFill>
-                  <a:srgbClr val="FFFFFF"/>
-                </a:solidFill>
-                <a:cs typeface="Times New Roman" panose="02020603050405020304" pitchFamily="18" charset="0"/>
-              </a:rPr>
-              <a:t>UART</a:t>
-            </a:r>
-            <a:r>
-              <a:rPr lang="zh-TW" altLang="en-US" sz="1100" dirty="0">
-                <a:solidFill>
-                  <a:srgbClr val="FFFFFF"/>
-                </a:solidFill>
-                <a:cs typeface="Times New Roman" panose="02020603050405020304" pitchFamily="18" charset="0"/>
-              </a:rPr>
-              <a:t>通訊</a:t>
-            </a:r>
-            <a:endParaRPr lang="zh-TW" altLang="zh-TW" sz="1100" dirty="0">
-              <a:latin typeface="新細明體" panose="02020500000000000000" pitchFamily="18" charset="-120"/>
-              <a:cs typeface="新細明體" panose="02020500000000000000" pitchFamily="18" charset="-120"/>
-            </a:endParaRPr>
-          </a:p>
-          <a:p>
-            <a:pPr>
-              <a:lnSpc>
-                <a:spcPts val="2400"/>
-              </a:lnSpc>
-              <a:spcAft>
-                <a:spcPts val="0"/>
-              </a:spcAft>
-            </a:pPr>
-            <a:r>
-              <a:rPr lang="en-US" altLang="zh-TW" sz="1100" dirty="0" err="1">
-                <a:solidFill>
-                  <a:srgbClr val="FFFFFF"/>
-                </a:solidFill>
-                <a:cs typeface="Times New Roman" panose="02020603050405020304" pitchFamily="18" charset="0"/>
-              </a:rPr>
-              <a:t>WiFi</a:t>
-            </a:r>
-            <a:r>
-              <a:rPr lang="zh-TW" altLang="en-US" sz="1100" dirty="0">
-                <a:solidFill>
-                  <a:srgbClr val="FFFFFF"/>
-                </a:solidFill>
-                <a:cs typeface="Times New Roman" panose="02020603050405020304" pitchFamily="18" charset="0"/>
-              </a:rPr>
-              <a:t>設定</a:t>
-            </a:r>
-            <a:endParaRPr lang="zh-TW" altLang="zh-TW" sz="1100" dirty="0">
-              <a:latin typeface="新細明體" panose="02020500000000000000" pitchFamily="18" charset="-120"/>
-              <a:cs typeface="新細明體" panose="02020500000000000000" pitchFamily="18" charset="-120"/>
-            </a:endParaRPr>
-          </a:p>
-          <a:p>
-            <a:pPr>
-              <a:lnSpc>
-                <a:spcPts val="2400"/>
-              </a:lnSpc>
-              <a:spcAft>
-                <a:spcPts val="0"/>
-              </a:spcAft>
-            </a:pPr>
-            <a:r>
-              <a:rPr lang="en-US" altLang="zh-TW" sz="1100" dirty="0" err="1">
-                <a:solidFill>
-                  <a:srgbClr val="FFFFFF"/>
-                </a:solidFill>
-                <a:cs typeface="Times New Roman" panose="02020603050405020304" pitchFamily="18" charset="0"/>
-              </a:rPr>
-              <a:t>MQTT</a:t>
-            </a:r>
-            <a:r>
-              <a:rPr lang="zh-TW" altLang="en-US" sz="1100" dirty="0">
-                <a:solidFill>
-                  <a:srgbClr val="FFFFFF"/>
-                </a:solidFill>
-                <a:cs typeface="Times New Roman" panose="02020603050405020304" pitchFamily="18" charset="0"/>
-              </a:rPr>
-              <a:t>設定</a:t>
-            </a:r>
-            <a:endParaRPr lang="zh-TW" altLang="zh-TW" sz="1100" dirty="0">
-              <a:latin typeface="新細明體" panose="02020500000000000000" pitchFamily="18" charset="-120"/>
-              <a:cs typeface="新細明體" panose="02020500000000000000" pitchFamily="18" charset="-120"/>
-            </a:endParaRPr>
-          </a:p>
-        </p:txBody>
-      </p:sp>
     </p:spTree>
     <p:extLst>
       <p:ext uri="{BB962C8B-B14F-4D97-AF65-F5344CB8AC3E}">

--- a/tools/myCustomBlockly/iMi/block.pptx
+++ b/tools/myCustomBlockly/iMi/block.pptx
@@ -243,7 +243,7 @@
           <a:p>
             <a:fld id="{28019EB3-9618-4DC9-9742-E69F5EF18F40}" type="datetimeFigureOut">
               <a:rPr lang="zh-TW" altLang="en-US" smtClean="0"/>
-              <a:t>2023/12/21</a:t>
+              <a:t>2023/12/23</a:t>
             </a:fld>
             <a:endParaRPr lang="zh-TW" altLang="en-US"/>
           </a:p>
@@ -411,7 +411,7 @@
           <a:p>
             <a:fld id="{28019EB3-9618-4DC9-9742-E69F5EF18F40}" type="datetimeFigureOut">
               <a:rPr lang="zh-TW" altLang="en-US" smtClean="0"/>
-              <a:t>2023/12/21</a:t>
+              <a:t>2023/12/23</a:t>
             </a:fld>
             <a:endParaRPr lang="zh-TW" altLang="en-US"/>
           </a:p>
@@ -589,7 +589,7 @@
           <a:p>
             <a:fld id="{28019EB3-9618-4DC9-9742-E69F5EF18F40}" type="datetimeFigureOut">
               <a:rPr lang="zh-TW" altLang="en-US" smtClean="0"/>
-              <a:t>2023/12/21</a:t>
+              <a:t>2023/12/23</a:t>
             </a:fld>
             <a:endParaRPr lang="zh-TW" altLang="en-US"/>
           </a:p>
@@ -757,7 +757,7 @@
           <a:p>
             <a:fld id="{28019EB3-9618-4DC9-9742-E69F5EF18F40}" type="datetimeFigureOut">
               <a:rPr lang="zh-TW" altLang="en-US" smtClean="0"/>
-              <a:t>2023/12/21</a:t>
+              <a:t>2023/12/23</a:t>
             </a:fld>
             <a:endParaRPr lang="zh-TW" altLang="en-US"/>
           </a:p>
@@ -1002,7 +1002,7 @@
           <a:p>
             <a:fld id="{28019EB3-9618-4DC9-9742-E69F5EF18F40}" type="datetimeFigureOut">
               <a:rPr lang="zh-TW" altLang="en-US" smtClean="0"/>
-              <a:t>2023/12/21</a:t>
+              <a:t>2023/12/23</a:t>
             </a:fld>
             <a:endParaRPr lang="zh-TW" altLang="en-US"/>
           </a:p>
@@ -1231,7 +1231,7 @@
           <a:p>
             <a:fld id="{28019EB3-9618-4DC9-9742-E69F5EF18F40}" type="datetimeFigureOut">
               <a:rPr lang="zh-TW" altLang="en-US" smtClean="0"/>
-              <a:t>2023/12/21</a:t>
+              <a:t>2023/12/23</a:t>
             </a:fld>
             <a:endParaRPr lang="zh-TW" altLang="en-US"/>
           </a:p>
@@ -1595,7 +1595,7 @@
           <a:p>
             <a:fld id="{28019EB3-9618-4DC9-9742-E69F5EF18F40}" type="datetimeFigureOut">
               <a:rPr lang="zh-TW" altLang="en-US" smtClean="0"/>
-              <a:t>2023/12/21</a:t>
+              <a:t>2023/12/23</a:t>
             </a:fld>
             <a:endParaRPr lang="zh-TW" altLang="en-US"/>
           </a:p>
@@ -1712,7 +1712,7 @@
           <a:p>
             <a:fld id="{28019EB3-9618-4DC9-9742-E69F5EF18F40}" type="datetimeFigureOut">
               <a:rPr lang="zh-TW" altLang="en-US" smtClean="0"/>
-              <a:t>2023/12/21</a:t>
+              <a:t>2023/12/23</a:t>
             </a:fld>
             <a:endParaRPr lang="zh-TW" altLang="en-US"/>
           </a:p>
@@ -1807,7 +1807,7 @@
           <a:p>
             <a:fld id="{28019EB3-9618-4DC9-9742-E69F5EF18F40}" type="datetimeFigureOut">
               <a:rPr lang="zh-TW" altLang="en-US" smtClean="0"/>
-              <a:t>2023/12/21</a:t>
+              <a:t>2023/12/23</a:t>
             </a:fld>
             <a:endParaRPr lang="zh-TW" altLang="en-US"/>
           </a:p>
@@ -2082,7 +2082,7 @@
           <a:p>
             <a:fld id="{28019EB3-9618-4DC9-9742-E69F5EF18F40}" type="datetimeFigureOut">
               <a:rPr lang="zh-TW" altLang="en-US" smtClean="0"/>
-              <a:t>2023/12/21</a:t>
+              <a:t>2023/12/23</a:t>
             </a:fld>
             <a:endParaRPr lang="zh-TW" altLang="en-US"/>
           </a:p>
@@ -2334,7 +2334,7 @@
           <a:p>
             <a:fld id="{28019EB3-9618-4DC9-9742-E69F5EF18F40}" type="datetimeFigureOut">
               <a:rPr lang="zh-TW" altLang="en-US" smtClean="0"/>
-              <a:t>2023/12/21</a:t>
+              <a:t>2023/12/23</a:t>
             </a:fld>
             <a:endParaRPr lang="zh-TW" altLang="en-US"/>
           </a:p>
@@ -2545,7 +2545,7 @@
           <a:p>
             <a:fld id="{28019EB3-9618-4DC9-9742-E69F5EF18F40}" type="datetimeFigureOut">
               <a:rPr lang="zh-TW" altLang="en-US" smtClean="0"/>
-              <a:t>2023/12/21</a:t>
+              <a:t>2023/12/23</a:t>
             </a:fld>
             <a:endParaRPr lang="zh-TW" altLang="en-US"/>
           </a:p>
@@ -15168,698 +15168,6 @@
           </a:p>
         </p:txBody>
       </p:sp>
-      <p:sp>
-        <p:nvSpPr>
-          <p:cNvPr id="12" name="手繪多邊形 11"/>
-          <p:cNvSpPr/>
-          <p:nvPr/>
-        </p:nvSpPr>
-        <p:spPr>
-          <a:xfrm>
-            <a:off x="6406896" y="462534"/>
-            <a:ext cx="1888939" cy="1696974"/>
-          </a:xfrm>
-          <a:custGeom>
-            <a:avLst/>
-            <a:gdLst>
-              <a:gd name="connsiteX0" fmla="*/ 159400 w 1888939"/>
-              <a:gd name="connsiteY0" fmla="*/ 1691010 h 1696974"/>
-              <a:gd name="connsiteX1" fmla="*/ 162989 w 1888939"/>
-              <a:gd name="connsiteY1" fmla="*/ 1692504 h 1696974"/>
-              <a:gd name="connsiteX2" fmla="*/ 158011 w 1888939"/>
-              <a:gd name="connsiteY2" fmla="*/ 1693914 h 1696974"/>
-              <a:gd name="connsiteX3" fmla="*/ 37121 w 1888939"/>
-              <a:gd name="connsiteY3" fmla="*/ 0 h 1696974"/>
-              <a:gd name="connsiteX4" fmla="*/ 159350 w 1888939"/>
-              <a:gd name="connsiteY4" fmla="*/ 0 h 1696974"/>
-              <a:gd name="connsiteX5" fmla="*/ 1848828 w 1888939"/>
-              <a:gd name="connsiteY5" fmla="*/ 0 h 1696974"/>
-              <a:gd name="connsiteX6" fmla="*/ 1874130 w 1888939"/>
-              <a:gd name="connsiteY6" fmla="*/ 38820 h 1696974"/>
-              <a:gd name="connsiteX7" fmla="*/ 1874130 w 1888939"/>
-              <a:gd name="connsiteY7" fmla="*/ 194093 h 1696974"/>
-              <a:gd name="connsiteX8" fmla="*/ 1875156 w 1888939"/>
-              <a:gd name="connsiteY8" fmla="*/ 263608 h 1696974"/>
-              <a:gd name="connsiteX9" fmla="*/ 1875535 w 1888939"/>
-              <a:gd name="connsiteY9" fmla="*/ 288290 h 1696974"/>
-              <a:gd name="connsiteX10" fmla="*/ 1109120 w 1888939"/>
-              <a:gd name="connsiteY10" fmla="*/ 288290 h 1696974"/>
-              <a:gd name="connsiteX11" fmla="*/ 972720 w 1888939"/>
-              <a:gd name="connsiteY11" fmla="*/ 288290 h 1696974"/>
-              <a:gd name="connsiteX12" fmla="*/ 944484 w 1888939"/>
-              <a:gd name="connsiteY12" fmla="*/ 330950 h 1696974"/>
-              <a:gd name="connsiteX13" fmla="*/ 944484 w 1888939"/>
-              <a:gd name="connsiteY13" fmla="*/ 501583 h 1696974"/>
-              <a:gd name="connsiteX14" fmla="*/ 972720 w 1888939"/>
-              <a:gd name="connsiteY14" fmla="*/ 544243 h 1696974"/>
-              <a:gd name="connsiteX15" fmla="*/ 1099576 w 1888939"/>
-              <a:gd name="connsiteY15" fmla="*/ 544243 h 1696974"/>
-              <a:gd name="connsiteX16" fmla="*/ 1879368 w 1888939"/>
-              <a:gd name="connsiteY16" fmla="*/ 544243 h 1696974"/>
-              <a:gd name="connsiteX17" fmla="*/ 1879388 w 1888939"/>
-              <a:gd name="connsiteY17" fmla="*/ 545591 h 1696974"/>
-              <a:gd name="connsiteX18" fmla="*/ 1880265 w 1888939"/>
-              <a:gd name="connsiteY18" fmla="*/ 608245 h 1696974"/>
-              <a:gd name="connsiteX19" fmla="*/ 1109120 w 1888939"/>
-              <a:gd name="connsiteY19" fmla="*/ 608245 h 1696974"/>
-              <a:gd name="connsiteX20" fmla="*/ 972720 w 1888939"/>
-              <a:gd name="connsiteY20" fmla="*/ 608245 h 1696974"/>
-              <a:gd name="connsiteX21" fmla="*/ 944484 w 1888939"/>
-              <a:gd name="connsiteY21" fmla="*/ 650905 h 1696974"/>
-              <a:gd name="connsiteX22" fmla="*/ 944484 w 1888939"/>
-              <a:gd name="connsiteY22" fmla="*/ 821538 h 1696974"/>
-              <a:gd name="connsiteX23" fmla="*/ 972720 w 1888939"/>
-              <a:gd name="connsiteY23" fmla="*/ 864198 h 1696974"/>
-              <a:gd name="connsiteX24" fmla="*/ 1099576 w 1888939"/>
-              <a:gd name="connsiteY24" fmla="*/ 864198 h 1696974"/>
-              <a:gd name="connsiteX25" fmla="*/ 1883693 w 1888939"/>
-              <a:gd name="connsiteY25" fmla="*/ 864198 h 1696974"/>
-              <a:gd name="connsiteX26" fmla="*/ 1884221 w 1888939"/>
-              <a:gd name="connsiteY26" fmla="*/ 905101 h 1696974"/>
-              <a:gd name="connsiteX27" fmla="*/ 1884490 w 1888939"/>
-              <a:gd name="connsiteY27" fmla="*/ 928200 h 1696974"/>
-              <a:gd name="connsiteX28" fmla="*/ 1109120 w 1888939"/>
-              <a:gd name="connsiteY28" fmla="*/ 928200 h 1696974"/>
-              <a:gd name="connsiteX29" fmla="*/ 972720 w 1888939"/>
-              <a:gd name="connsiteY29" fmla="*/ 928200 h 1696974"/>
-              <a:gd name="connsiteX30" fmla="*/ 944484 w 1888939"/>
-              <a:gd name="connsiteY30" fmla="*/ 970860 h 1696974"/>
-              <a:gd name="connsiteX31" fmla="*/ 944484 w 1888939"/>
-              <a:gd name="connsiteY31" fmla="*/ 1141493 h 1696974"/>
-              <a:gd name="connsiteX32" fmla="*/ 972720 w 1888939"/>
-              <a:gd name="connsiteY32" fmla="*/ 1184153 h 1696974"/>
-              <a:gd name="connsiteX33" fmla="*/ 1099576 w 1888939"/>
-              <a:gd name="connsiteY33" fmla="*/ 1184153 h 1696974"/>
-              <a:gd name="connsiteX34" fmla="*/ 1887258 w 1888939"/>
-              <a:gd name="connsiteY34" fmla="*/ 1184153 h 1696974"/>
-              <a:gd name="connsiteX35" fmla="*/ 1887774 w 1888939"/>
-              <a:gd name="connsiteY35" fmla="*/ 1248156 h 1696974"/>
-              <a:gd name="connsiteX36" fmla="*/ 1109120 w 1888939"/>
-              <a:gd name="connsiteY36" fmla="*/ 1248156 h 1696974"/>
-              <a:gd name="connsiteX37" fmla="*/ 972720 w 1888939"/>
-              <a:gd name="connsiteY37" fmla="*/ 1248156 h 1696974"/>
-              <a:gd name="connsiteX38" fmla="*/ 944484 w 1888939"/>
-              <a:gd name="connsiteY38" fmla="*/ 1290816 h 1696974"/>
-              <a:gd name="connsiteX39" fmla="*/ 944484 w 1888939"/>
-              <a:gd name="connsiteY39" fmla="*/ 1461449 h 1696974"/>
-              <a:gd name="connsiteX40" fmla="*/ 972720 w 1888939"/>
-              <a:gd name="connsiteY40" fmla="*/ 1504109 h 1696974"/>
-              <a:gd name="connsiteX41" fmla="*/ 1099576 w 1888939"/>
-              <a:gd name="connsiteY41" fmla="*/ 1504109 h 1696974"/>
-              <a:gd name="connsiteX42" fmla="*/ 1888939 w 1888939"/>
-              <a:gd name="connsiteY42" fmla="*/ 1504109 h 1696974"/>
-              <a:gd name="connsiteX43" fmla="*/ 1888938 w 1888939"/>
-              <a:gd name="connsiteY43" fmla="*/ 1515361 h 1696974"/>
-              <a:gd name="connsiteX44" fmla="*/ 1884663 w 1888939"/>
-              <a:gd name="connsiteY44" fmla="*/ 1668640 h 1696974"/>
-              <a:gd name="connsiteX45" fmla="*/ 198535 w 1888939"/>
-              <a:gd name="connsiteY45" fmla="*/ 1639955 h 1696974"/>
-              <a:gd name="connsiteX46" fmla="*/ 162395 w 1888939"/>
-              <a:gd name="connsiteY46" fmla="*/ 1684747 h 1696974"/>
-              <a:gd name="connsiteX47" fmla="*/ 159400 w 1888939"/>
-              <a:gd name="connsiteY47" fmla="*/ 1691010 h 1696974"/>
-              <a:gd name="connsiteX48" fmla="*/ 150903 w 1888939"/>
-              <a:gd name="connsiteY48" fmla="*/ 1687473 h 1696974"/>
-              <a:gd name="connsiteX49" fmla="*/ 120918 w 1888939"/>
-              <a:gd name="connsiteY49" fmla="*/ 1608509 h 1696974"/>
-              <a:gd name="connsiteX50" fmla="*/ 0 w 1888939"/>
-              <a:gd name="connsiteY50" fmla="*/ 1643746 h 1696974"/>
-              <a:gd name="connsiteX51" fmla="*/ 11819 w 1888939"/>
-              <a:gd name="connsiteY51" fmla="*/ 38820 h 1696974"/>
-              <a:gd name="connsiteX52" fmla="*/ 37121 w 1888939"/>
-              <a:gd name="connsiteY52" fmla="*/ 0 h 1696974"/>
-            </a:gdLst>
-            <a:ahLst/>
-            <a:cxnLst>
-              <a:cxn ang="0">
-                <a:pos x="connsiteX0" y="connsiteY0"/>
-              </a:cxn>
-              <a:cxn ang="0">
-                <a:pos x="connsiteX1" y="connsiteY1"/>
-              </a:cxn>
-              <a:cxn ang="0">
-                <a:pos x="connsiteX2" y="connsiteY2"/>
-              </a:cxn>
-              <a:cxn ang="0">
-                <a:pos x="connsiteX3" y="connsiteY3"/>
-              </a:cxn>
-              <a:cxn ang="0">
-                <a:pos x="connsiteX4" y="connsiteY4"/>
-              </a:cxn>
-              <a:cxn ang="0">
-                <a:pos x="connsiteX5" y="connsiteY5"/>
-              </a:cxn>
-              <a:cxn ang="0">
-                <a:pos x="connsiteX6" y="connsiteY6"/>
-              </a:cxn>
-              <a:cxn ang="0">
-                <a:pos x="connsiteX7" y="connsiteY7"/>
-              </a:cxn>
-              <a:cxn ang="0">
-                <a:pos x="connsiteX8" y="connsiteY8"/>
-              </a:cxn>
-              <a:cxn ang="0">
-                <a:pos x="connsiteX9" y="connsiteY9"/>
-              </a:cxn>
-              <a:cxn ang="0">
-                <a:pos x="connsiteX10" y="connsiteY10"/>
-              </a:cxn>
-              <a:cxn ang="0">
-                <a:pos x="connsiteX11" y="connsiteY11"/>
-              </a:cxn>
-              <a:cxn ang="0">
-                <a:pos x="connsiteX12" y="connsiteY12"/>
-              </a:cxn>
-              <a:cxn ang="0">
-                <a:pos x="connsiteX13" y="connsiteY13"/>
-              </a:cxn>
-              <a:cxn ang="0">
-                <a:pos x="connsiteX14" y="connsiteY14"/>
-              </a:cxn>
-              <a:cxn ang="0">
-                <a:pos x="connsiteX15" y="connsiteY15"/>
-              </a:cxn>
-              <a:cxn ang="0">
-                <a:pos x="connsiteX16" y="connsiteY16"/>
-              </a:cxn>
-              <a:cxn ang="0">
-                <a:pos x="connsiteX17" y="connsiteY17"/>
-              </a:cxn>
-              <a:cxn ang="0">
-                <a:pos x="connsiteX18" y="connsiteY18"/>
-              </a:cxn>
-              <a:cxn ang="0">
-                <a:pos x="connsiteX19" y="connsiteY19"/>
-              </a:cxn>
-              <a:cxn ang="0">
-                <a:pos x="connsiteX20" y="connsiteY20"/>
-              </a:cxn>
-              <a:cxn ang="0">
-                <a:pos x="connsiteX21" y="connsiteY21"/>
-              </a:cxn>
-              <a:cxn ang="0">
-                <a:pos x="connsiteX22" y="connsiteY22"/>
-              </a:cxn>
-              <a:cxn ang="0">
-                <a:pos x="connsiteX23" y="connsiteY23"/>
-              </a:cxn>
-              <a:cxn ang="0">
-                <a:pos x="connsiteX24" y="connsiteY24"/>
-              </a:cxn>
-              <a:cxn ang="0">
-                <a:pos x="connsiteX25" y="connsiteY25"/>
-              </a:cxn>
-              <a:cxn ang="0">
-                <a:pos x="connsiteX26" y="connsiteY26"/>
-              </a:cxn>
-              <a:cxn ang="0">
-                <a:pos x="connsiteX27" y="connsiteY27"/>
-              </a:cxn>
-              <a:cxn ang="0">
-                <a:pos x="connsiteX28" y="connsiteY28"/>
-              </a:cxn>
-              <a:cxn ang="0">
-                <a:pos x="connsiteX29" y="connsiteY29"/>
-              </a:cxn>
-              <a:cxn ang="0">
-                <a:pos x="connsiteX30" y="connsiteY30"/>
-              </a:cxn>
-              <a:cxn ang="0">
-                <a:pos x="connsiteX31" y="connsiteY31"/>
-              </a:cxn>
-              <a:cxn ang="0">
-                <a:pos x="connsiteX32" y="connsiteY32"/>
-              </a:cxn>
-              <a:cxn ang="0">
-                <a:pos x="connsiteX33" y="connsiteY33"/>
-              </a:cxn>
-              <a:cxn ang="0">
-                <a:pos x="connsiteX34" y="connsiteY34"/>
-              </a:cxn>
-              <a:cxn ang="0">
-                <a:pos x="connsiteX35" y="connsiteY35"/>
-              </a:cxn>
-              <a:cxn ang="0">
-                <a:pos x="connsiteX36" y="connsiteY36"/>
-              </a:cxn>
-              <a:cxn ang="0">
-                <a:pos x="connsiteX37" y="connsiteY37"/>
-              </a:cxn>
-              <a:cxn ang="0">
-                <a:pos x="connsiteX38" y="connsiteY38"/>
-              </a:cxn>
-              <a:cxn ang="0">
-                <a:pos x="connsiteX39" y="connsiteY39"/>
-              </a:cxn>
-              <a:cxn ang="0">
-                <a:pos x="connsiteX40" y="connsiteY40"/>
-              </a:cxn>
-              <a:cxn ang="0">
-                <a:pos x="connsiteX41" y="connsiteY41"/>
-              </a:cxn>
-              <a:cxn ang="0">
-                <a:pos x="connsiteX42" y="connsiteY42"/>
-              </a:cxn>
-              <a:cxn ang="0">
-                <a:pos x="connsiteX43" y="connsiteY43"/>
-              </a:cxn>
-              <a:cxn ang="0">
-                <a:pos x="connsiteX44" y="connsiteY44"/>
-              </a:cxn>
-              <a:cxn ang="0">
-                <a:pos x="connsiteX45" y="connsiteY45"/>
-              </a:cxn>
-              <a:cxn ang="0">
-                <a:pos x="connsiteX46" y="connsiteY46"/>
-              </a:cxn>
-              <a:cxn ang="0">
-                <a:pos x="connsiteX47" y="connsiteY47"/>
-              </a:cxn>
-              <a:cxn ang="0">
-                <a:pos x="connsiteX48" y="connsiteY48"/>
-              </a:cxn>
-              <a:cxn ang="0">
-                <a:pos x="connsiteX49" y="connsiteY49"/>
-              </a:cxn>
-              <a:cxn ang="0">
-                <a:pos x="connsiteX50" y="connsiteY50"/>
-              </a:cxn>
-              <a:cxn ang="0">
-                <a:pos x="connsiteX51" y="connsiteY51"/>
-              </a:cxn>
-              <a:cxn ang="0">
-                <a:pos x="connsiteX52" y="connsiteY52"/>
-              </a:cxn>
-            </a:cxnLst>
-            <a:rect l="l" t="t" r="r" b="b"/>
-            <a:pathLst>
-              <a:path w="1888939" h="1696974">
-                <a:moveTo>
-                  <a:pt x="159400" y="1691010"/>
-                </a:moveTo>
-                <a:lnTo>
-                  <a:pt x="162989" y="1692504"/>
-                </a:lnTo>
-                <a:cubicBezTo>
-                  <a:pt x="162900" y="1696201"/>
-                  <a:pt x="156664" y="1699672"/>
-                  <a:pt x="158011" y="1693914"/>
-                </a:cubicBezTo>
-                <a:close/>
-                <a:moveTo>
-                  <a:pt x="37121" y="0"/>
-                </a:moveTo>
-                <a:cubicBezTo>
-                  <a:pt x="77864" y="0"/>
-                  <a:pt x="99364" y="78731"/>
-                  <a:pt x="159350" y="0"/>
-                </a:cubicBezTo>
-                <a:lnTo>
-                  <a:pt x="1848828" y="0"/>
-                </a:lnTo>
-                <a:cubicBezTo>
-                  <a:pt x="1862802" y="0"/>
-                  <a:pt x="1874130" y="17380"/>
-                  <a:pt x="1874130" y="38820"/>
-                </a:cubicBezTo>
-                <a:lnTo>
-                  <a:pt x="1874130" y="194093"/>
-                </a:lnTo>
-                <a:cubicBezTo>
-                  <a:pt x="1874130" y="196773"/>
-                  <a:pt x="1874513" y="221823"/>
-                  <a:pt x="1875156" y="263608"/>
-                </a:cubicBezTo>
-                <a:lnTo>
-                  <a:pt x="1875535" y="288290"/>
-                </a:lnTo>
-                <a:lnTo>
-                  <a:pt x="1109120" y="288290"/>
-                </a:lnTo>
-                <a:cubicBezTo>
-                  <a:pt x="1042179" y="374809"/>
-                  <a:pt x="1018186" y="288290"/>
-                  <a:pt x="972720" y="288290"/>
-                </a:cubicBezTo>
-                <a:cubicBezTo>
-                  <a:pt x="957125" y="288290"/>
-                  <a:pt x="944484" y="307389"/>
-                  <a:pt x="944484" y="330950"/>
-                </a:cubicBezTo>
-                <a:lnTo>
-                  <a:pt x="944484" y="501583"/>
-                </a:lnTo>
-                <a:cubicBezTo>
-                  <a:pt x="944484" y="525143"/>
-                  <a:pt x="957125" y="544243"/>
-                  <a:pt x="972720" y="544243"/>
-                </a:cubicBezTo>
-                <a:cubicBezTo>
-                  <a:pt x="1015005" y="544243"/>
-                  <a:pt x="1009570" y="641577"/>
-                  <a:pt x="1099576" y="544243"/>
-                </a:cubicBezTo>
-                <a:lnTo>
-                  <a:pt x="1879368" y="544243"/>
-                </a:lnTo>
-                <a:lnTo>
-                  <a:pt x="1879388" y="545591"/>
-                </a:lnTo>
-                <a:lnTo>
-                  <a:pt x="1880265" y="608245"/>
-                </a:lnTo>
-                <a:lnTo>
-                  <a:pt x="1109120" y="608245"/>
-                </a:lnTo>
-                <a:cubicBezTo>
-                  <a:pt x="1042179" y="694764"/>
-                  <a:pt x="1018186" y="608245"/>
-                  <a:pt x="972720" y="608245"/>
-                </a:cubicBezTo>
-                <a:cubicBezTo>
-                  <a:pt x="957125" y="608245"/>
-                  <a:pt x="944484" y="627344"/>
-                  <a:pt x="944484" y="650905"/>
-                </a:cubicBezTo>
-                <a:lnTo>
-                  <a:pt x="944484" y="821538"/>
-                </a:lnTo>
-                <a:cubicBezTo>
-                  <a:pt x="944484" y="845098"/>
-                  <a:pt x="957125" y="864198"/>
-                  <a:pt x="972720" y="864198"/>
-                </a:cubicBezTo>
-                <a:cubicBezTo>
-                  <a:pt x="1015005" y="864198"/>
-                  <a:pt x="1009570" y="961532"/>
-                  <a:pt x="1099576" y="864198"/>
-                </a:cubicBezTo>
-                <a:lnTo>
-                  <a:pt x="1883693" y="864198"/>
-                </a:lnTo>
-                <a:lnTo>
-                  <a:pt x="1884221" y="905101"/>
-                </a:lnTo>
-                <a:lnTo>
-                  <a:pt x="1884490" y="928200"/>
-                </a:lnTo>
-                <a:lnTo>
-                  <a:pt x="1109120" y="928200"/>
-                </a:lnTo>
-                <a:cubicBezTo>
-                  <a:pt x="1042179" y="1014719"/>
-                  <a:pt x="1018186" y="928200"/>
-                  <a:pt x="972720" y="928200"/>
-                </a:cubicBezTo>
-                <a:cubicBezTo>
-                  <a:pt x="957125" y="928200"/>
-                  <a:pt x="944484" y="947299"/>
-                  <a:pt x="944484" y="970860"/>
-                </a:cubicBezTo>
-                <a:lnTo>
-                  <a:pt x="944484" y="1141493"/>
-                </a:lnTo>
-                <a:cubicBezTo>
-                  <a:pt x="944484" y="1165053"/>
-                  <a:pt x="957125" y="1184153"/>
-                  <a:pt x="972720" y="1184153"/>
-                </a:cubicBezTo>
-                <a:cubicBezTo>
-                  <a:pt x="1015005" y="1184153"/>
-                  <a:pt x="1009570" y="1281487"/>
-                  <a:pt x="1099576" y="1184153"/>
-                </a:cubicBezTo>
-                <a:lnTo>
-                  <a:pt x="1887258" y="1184153"/>
-                </a:lnTo>
-                <a:lnTo>
-                  <a:pt x="1887774" y="1248156"/>
-                </a:lnTo>
-                <a:lnTo>
-                  <a:pt x="1109120" y="1248156"/>
-                </a:lnTo>
-                <a:cubicBezTo>
-                  <a:pt x="1042179" y="1334675"/>
-                  <a:pt x="1018186" y="1248156"/>
-                  <a:pt x="972720" y="1248156"/>
-                </a:cubicBezTo>
-                <a:cubicBezTo>
-                  <a:pt x="957125" y="1248156"/>
-                  <a:pt x="944484" y="1267255"/>
-                  <a:pt x="944484" y="1290816"/>
-                </a:cubicBezTo>
-                <a:lnTo>
-                  <a:pt x="944484" y="1461449"/>
-                </a:lnTo>
-                <a:cubicBezTo>
-                  <a:pt x="944484" y="1485009"/>
-                  <a:pt x="957125" y="1504109"/>
-                  <a:pt x="972720" y="1504109"/>
-                </a:cubicBezTo>
-                <a:cubicBezTo>
-                  <a:pt x="1015005" y="1504109"/>
-                  <a:pt x="1009570" y="1601443"/>
-                  <a:pt x="1099576" y="1504109"/>
-                </a:cubicBezTo>
-                <a:lnTo>
-                  <a:pt x="1888939" y="1504109"/>
-                </a:lnTo>
-                <a:lnTo>
-                  <a:pt x="1888938" y="1515361"/>
-                </a:lnTo>
-                <a:cubicBezTo>
-                  <a:pt x="1888731" y="1609690"/>
-                  <a:pt x="1887478" y="1668640"/>
-                  <a:pt x="1884663" y="1668640"/>
-                </a:cubicBezTo>
-                <a:lnTo>
-                  <a:pt x="198535" y="1639955"/>
-                </a:lnTo>
-                <a:cubicBezTo>
-                  <a:pt x="178372" y="1662099"/>
-                  <a:pt x="167681" y="1676140"/>
-                  <a:pt x="162395" y="1684747"/>
-                </a:cubicBezTo>
-                <a:lnTo>
-                  <a:pt x="159400" y="1691010"/>
-                </a:lnTo>
-                <a:lnTo>
-                  <a:pt x="150903" y="1687473"/>
-                </a:lnTo>
-                <a:cubicBezTo>
-                  <a:pt x="123463" y="1707886"/>
-                  <a:pt x="138817" y="1613661"/>
-                  <a:pt x="120918" y="1608509"/>
-                </a:cubicBezTo>
-                <a:cubicBezTo>
-                  <a:pt x="103019" y="1603358"/>
-                  <a:pt x="140011" y="1634856"/>
-                  <a:pt x="0" y="1643746"/>
-                </a:cubicBezTo>
-                <a:lnTo>
-                  <a:pt x="11819" y="38820"/>
-                </a:lnTo>
-                <a:cubicBezTo>
-                  <a:pt x="11819" y="17380"/>
-                  <a:pt x="23147" y="0"/>
-                  <a:pt x="37121" y="0"/>
-                </a:cubicBezTo>
-                <a:close/>
-              </a:path>
-            </a:pathLst>
-          </a:custGeom>
-        </p:spPr>
-        <p:style>
-          <a:lnRef idx="2">
-            <a:schemeClr val="accent1">
-              <a:shade val="50000"/>
-            </a:schemeClr>
-          </a:lnRef>
-          <a:fillRef idx="1">
-            <a:schemeClr val="accent1"/>
-          </a:fillRef>
-          <a:effectRef idx="0">
-            <a:schemeClr val="accent1"/>
-          </a:effectRef>
-          <a:fontRef idx="minor">
-            <a:schemeClr val="lt1"/>
-          </a:fontRef>
-        </p:style>
-        <p:txBody>
-          <a:bodyPr rot="0" spcFirstLastPara="0" vert="horz" wrap="square" lIns="91440" tIns="45720" rIns="91440" bIns="45720" numCol="1" spcCol="0" rtlCol="0" fromWordArt="0" anchor="t" anchorCtr="0" forceAA="0" compatLnSpc="1">
-            <a:prstTxWarp prst="textNoShape">
-              <a:avLst/>
-            </a:prstTxWarp>
-            <a:noAutofit/>
-          </a:bodyPr>
-          <a:lstStyle/>
-          <a:p>
-            <a:pPr>
-              <a:spcAft>
-                <a:spcPts val="0"/>
-              </a:spcAft>
-            </a:pPr>
-            <a:r>
-              <a:rPr lang="en-US" altLang="zh-TW" sz="1200" kern="100" dirty="0" err="1">
-                <a:ea typeface="新細明體" panose="02020500000000000000" pitchFamily="18" charset="-120"/>
-                <a:cs typeface="Times New Roman" panose="02020603050405020304" pitchFamily="18" charset="0"/>
-              </a:rPr>
-              <a:t>iMi</a:t>
-            </a:r>
-            <a:r>
-              <a:rPr lang="zh-TW" altLang="en-US" sz="1200" kern="100" dirty="0">
-                <a:ea typeface="新細明體" panose="02020500000000000000" pitchFamily="18" charset="-120"/>
-                <a:cs typeface="Times New Roman" panose="02020603050405020304" pitchFamily="18" charset="0"/>
-              </a:rPr>
-              <a:t>物流模組</a:t>
-            </a:r>
-            <a:r>
-              <a:rPr lang="en-US" altLang="zh-TW" sz="1200" kern="100" dirty="0" err="1">
-                <a:ea typeface="新細明體" panose="02020500000000000000" pitchFamily="18" charset="-120"/>
-                <a:cs typeface="Times New Roman" panose="02020603050405020304" pitchFamily="18" charset="0"/>
-              </a:rPr>
-              <a:t>ESP32</a:t>
-            </a:r>
-            <a:r>
-              <a:rPr lang="zh-TW" altLang="en-US" sz="1200" kern="100" dirty="0">
-                <a:ea typeface="新細明體" panose="02020500000000000000" pitchFamily="18" charset="-120"/>
-                <a:cs typeface="Times New Roman" panose="02020603050405020304" pitchFamily="18" charset="0"/>
-              </a:rPr>
-              <a:t>初始化</a:t>
-            </a:r>
-            <a:endParaRPr lang="en-US" altLang="zh-TW" sz="1200" kern="100" dirty="0">
-              <a:ea typeface="新細明體" panose="02020500000000000000" pitchFamily="18" charset="-120"/>
-              <a:cs typeface="Times New Roman" panose="02020603050405020304" pitchFamily="18" charset="0"/>
-            </a:endParaRPr>
-          </a:p>
-          <a:p>
-            <a:pPr>
-              <a:lnSpc>
-                <a:spcPts val="2400"/>
-              </a:lnSpc>
-              <a:spcAft>
-                <a:spcPts val="0"/>
-              </a:spcAft>
-            </a:pPr>
-            <a:r>
-              <a:rPr lang="en-US" altLang="zh-TW" sz="1100" dirty="0" err="1">
-                <a:solidFill>
-                  <a:srgbClr val="FFFFFF"/>
-                </a:solidFill>
-                <a:cs typeface="Times New Roman" panose="02020603050405020304" pitchFamily="18" charset="0"/>
-              </a:rPr>
-              <a:t>WiFi</a:t>
-            </a:r>
-            <a:r>
-              <a:rPr lang="zh-TW" altLang="en-US" sz="1100" dirty="0">
-                <a:solidFill>
-                  <a:srgbClr val="FFFFFF"/>
-                </a:solidFill>
-                <a:cs typeface="Times New Roman" panose="02020603050405020304" pitchFamily="18" charset="0"/>
-              </a:rPr>
-              <a:t>設定</a:t>
-            </a:r>
-            <a:endParaRPr lang="zh-TW" altLang="zh-TW" sz="1100" dirty="0">
-              <a:latin typeface="新細明體" panose="02020500000000000000" pitchFamily="18" charset="-120"/>
-              <a:cs typeface="新細明體" panose="02020500000000000000" pitchFamily="18" charset="-120"/>
-            </a:endParaRPr>
-          </a:p>
-          <a:p>
-            <a:pPr>
-              <a:lnSpc>
-                <a:spcPts val="2400"/>
-              </a:lnSpc>
-              <a:spcAft>
-                <a:spcPts val="0"/>
-              </a:spcAft>
-            </a:pPr>
-            <a:r>
-              <a:rPr lang="en-US" altLang="zh-TW" sz="1100" dirty="0" err="1">
-                <a:solidFill>
-                  <a:srgbClr val="FFFFFF"/>
-                </a:solidFill>
-                <a:cs typeface="Times New Roman" panose="02020603050405020304" pitchFamily="18" charset="0"/>
-              </a:rPr>
-              <a:t>MQTT</a:t>
-            </a:r>
-            <a:r>
-              <a:rPr lang="zh-TW" altLang="en-US" sz="1100" dirty="0">
-                <a:solidFill>
-                  <a:srgbClr val="FFFFFF"/>
-                </a:solidFill>
-                <a:cs typeface="Times New Roman" panose="02020603050405020304" pitchFamily="18" charset="0"/>
-              </a:rPr>
-              <a:t>設定</a:t>
-            </a:r>
-            <a:endParaRPr lang="zh-TW" altLang="zh-TW" sz="1100" dirty="0">
-              <a:latin typeface="新細明體" panose="02020500000000000000" pitchFamily="18" charset="-120"/>
-              <a:cs typeface="新細明體" panose="02020500000000000000" pitchFamily="18" charset="-120"/>
-            </a:endParaRPr>
-          </a:p>
-          <a:p>
-            <a:pPr>
-              <a:lnSpc>
-                <a:spcPts val="2400"/>
-              </a:lnSpc>
-              <a:spcAft>
-                <a:spcPts val="0"/>
-              </a:spcAft>
-            </a:pPr>
-            <a:r>
-              <a:rPr lang="en-US" altLang="zh-TW" sz="1100" dirty="0" err="1">
-                <a:solidFill>
-                  <a:srgbClr val="FFFFFF"/>
-                </a:solidFill>
-                <a:cs typeface="Times New Roman" panose="02020603050405020304" pitchFamily="18" charset="0"/>
-              </a:rPr>
-              <a:t>UART</a:t>
-            </a:r>
-            <a:r>
-              <a:rPr lang="zh-TW" altLang="en-US" sz="1100" dirty="0">
-                <a:solidFill>
-                  <a:srgbClr val="FFFFFF"/>
-                </a:solidFill>
-                <a:cs typeface="Times New Roman" panose="02020603050405020304" pitchFamily="18" charset="0"/>
-              </a:rPr>
-              <a:t>通訊</a:t>
-            </a:r>
-            <a:endParaRPr lang="en-US" altLang="zh-TW" sz="1100" dirty="0">
-              <a:solidFill>
-                <a:srgbClr val="FFFFFF"/>
-              </a:solidFill>
-              <a:cs typeface="Times New Roman" panose="02020603050405020304" pitchFamily="18" charset="0"/>
-            </a:endParaRPr>
-          </a:p>
-          <a:p>
-            <a:pPr>
-              <a:lnSpc>
-                <a:spcPts val="2400"/>
-              </a:lnSpc>
-              <a:spcAft>
-                <a:spcPts val="0"/>
-              </a:spcAft>
-            </a:pPr>
-            <a:r>
-              <a:rPr lang="en-US" altLang="zh-TW" sz="1100" dirty="0">
-                <a:latin typeface="新細明體" panose="02020500000000000000" pitchFamily="18" charset="-120"/>
-                <a:cs typeface="新細明體" panose="02020500000000000000" pitchFamily="18" charset="-120"/>
-              </a:rPr>
-              <a:t>Google</a:t>
-            </a:r>
-            <a:r>
-              <a:rPr lang="zh-TW" altLang="en-US" sz="1100" dirty="0">
-                <a:latin typeface="新細明體" panose="02020500000000000000" pitchFamily="18" charset="-120"/>
-                <a:cs typeface="新細明體" panose="02020500000000000000" pitchFamily="18" charset="-120"/>
-              </a:rPr>
-              <a:t>試算表</a:t>
-            </a:r>
-            <a:endParaRPr lang="zh-TW" altLang="zh-TW" sz="1100" dirty="0">
-              <a:latin typeface="新細明體" panose="02020500000000000000" pitchFamily="18" charset="-120"/>
-              <a:cs typeface="新細明體" panose="02020500000000000000" pitchFamily="18" charset="-120"/>
-            </a:endParaRPr>
-          </a:p>
-        </p:txBody>
-      </p:sp>
     </p:spTree>
     <p:extLst>
       <p:ext uri="{BB962C8B-B14F-4D97-AF65-F5344CB8AC3E}">
